--- a/docs/theme-preview/pptx/clean.pptx
+++ b/docs/theme-preview/pptx/clean.pptx
@@ -10557,7 +10557,7 @@
                 <a:ea typeface="Pretendard" pitchFamily="34" charset="-122"/>
                 <a:cs typeface="Pretendard" pitchFamily="34" charset="-120"/>
               </a:rPr>
-              <a:t>Markdown Semantics</a:t>
+              <a:t>Semantic Blocks</a:t>
             </a:r>
             <a:endParaRPr lang="en-US" sz="2200" dirty="0"/>
           </a:p>
@@ -13772,7 +13772,7 @@
                 <a:ea typeface="Pretendard" pitchFamily="34" charset="-122"/>
                 <a:cs typeface="Pretendard" pitchFamily="34" charset="-120"/>
               </a:rPr>
-              <a:t>Markdown Semantics</a:t>
+              <a:t>Semantic Blocks</a:t>
             </a:r>
             <a:endParaRPr lang="en-US" sz="3400" dirty="0"/>
           </a:p>

--- a/docs/theme-preview/pptx/clean.pptx
+++ b/docs/theme-preview/pptx/clean.pptx
@@ -125,7 +125,7 @@
 </p:presentation>
 </file>
 
-<file path=ppt/charts/chart3.xml><?xml version="1.0" encoding="utf-8"?>
+<file path=ppt/charts/chart1.xml><?xml version="1.0" encoding="utf-8"?>
 <c:chartSpace xmlns:c="http://schemas.openxmlformats.org/drawingml/2006/chart" xmlns:a="http://schemas.openxmlformats.org/drawingml/2006/main" xmlns:r="http://schemas.openxmlformats.org/officeDocument/2006/relationships">
   <c:date1904 val="0"/>
   <c:roundedCorners val="1"/>
@@ -9606,8 +9606,37 @@
         </p:nvSpPr>
         <p:spPr>
           <a:xfrm>
-            <a:off x="914400" y="1417320"/>
-            <a:ext cx="73152" cy="868680"/>
+            <a:off x="786384" y="1956816"/>
+            <a:ext cx="32004" cy="3483864"/>
+          </a:xfrm>
+          <a:prstGeom prst="rect">
+            <a:avLst/>
+          </a:prstGeom>
+          <a:solidFill>
+            <a:srgbClr val="DBEAFE">
+              <a:alpha val="80000"/>
+            </a:srgbClr>
+          </a:solidFill>
+          <a:ln w="12700">
+            <a:solidFill>
+              <a:srgbClr val="DBEAFE">
+                <a:alpha val="0"/>
+              </a:srgbClr>
+            </a:solidFill>
+            <a:prstDash val="solid"/>
+          </a:ln>
+        </p:spPr>
+      </p:sp>
+      <p:sp>
+        <p:nvSpPr>
+          <p:cNvPr id="4" name="Shape 2"/>
+          <p:cNvSpPr/>
+          <p:nvPr/>
+        </p:nvSpPr>
+        <p:spPr>
+          <a:xfrm>
+            <a:off x="914400" y="1865376"/>
+            <a:ext cx="73152" cy="1024128"/>
           </a:xfrm>
           <a:prstGeom prst="rect">
             <a:avLst/>
@@ -9627,14 +9656,14 @@
       </p:sp>
       <p:sp>
         <p:nvSpPr>
-          <p:cNvPr id="4" name="Shape 2"/>
-          <p:cNvSpPr/>
-          <p:nvPr/>
-        </p:nvSpPr>
-        <p:spPr>
-          <a:xfrm>
-            <a:off x="914400" y="2560320"/>
-            <a:ext cx="73152" cy="868680"/>
+          <p:cNvPr id="5" name="Shape 3"/>
+          <p:cNvSpPr/>
+          <p:nvPr/>
+        </p:nvSpPr>
+        <p:spPr>
+          <a:xfrm>
+            <a:off x="914400" y="3191256"/>
+            <a:ext cx="73152" cy="1024128"/>
           </a:xfrm>
           <a:prstGeom prst="rect">
             <a:avLst/>
@@ -9654,14 +9683,14 @@
       </p:sp>
       <p:sp>
         <p:nvSpPr>
-          <p:cNvPr id="5" name="Shape 3"/>
-          <p:cNvSpPr/>
-          <p:nvPr/>
-        </p:nvSpPr>
-        <p:spPr>
-          <a:xfrm>
-            <a:off x="914400" y="3703320"/>
-            <a:ext cx="73152" cy="868680"/>
+          <p:cNvPr id="6" name="Shape 4"/>
+          <p:cNvSpPr/>
+          <p:nvPr/>
+        </p:nvSpPr>
+        <p:spPr>
+          <a:xfrm>
+            <a:off x="914400" y="4507992"/>
+            <a:ext cx="73152" cy="1024128"/>
           </a:xfrm>
           <a:prstGeom prst="rect">
             <a:avLst/>
@@ -9681,7 +9710,7 @@
       </p:sp>
       <p:pic>
         <p:nvPicPr>
-          <p:cNvPr id="6" name="Image 0" descr="preencoded.png">    </p:cNvPr>
+          <p:cNvPr id="7" name="Image 0" descr="preencoded.png">    </p:cNvPr>
           <p:cNvPicPr>
             <a:picLocks noChangeAspect="1"/>
           </p:cNvPicPr>
@@ -9701,8 +9730,8 @@
         </p:blipFill>
         <p:spPr>
           <a:xfrm>
-            <a:off x="914400" y="1417320"/>
-            <a:ext cx="10241280" cy="868680"/>
+            <a:off x="914400" y="1865376"/>
+            <a:ext cx="10241280" cy="1024128"/>
           </a:xfrm>
           <a:prstGeom prst="rect">
             <a:avLst/>
@@ -9711,14 +9740,14 @@
       </p:pic>
       <p:sp>
         <p:nvSpPr>
-          <p:cNvPr id="7" name="Shape 4"/>
-          <p:cNvSpPr/>
-          <p:nvPr/>
-        </p:nvSpPr>
-        <p:spPr>
-          <a:xfrm>
-            <a:off x="914400" y="1417320"/>
-            <a:ext cx="10241280" cy="868680"/>
+          <p:cNvPr id="8" name="Shape 5"/>
+          <p:cNvSpPr/>
+          <p:nvPr/>
+        </p:nvSpPr>
+        <p:spPr>
+          <a:xfrm>
+            <a:off x="914400" y="1865376"/>
+            <a:ext cx="10241280" cy="1024128"/>
           </a:xfrm>
           <a:prstGeom prst="rect">
             <a:avLst/>
@@ -9747,7 +9776,7 @@
       </p:sp>
       <p:pic>
         <p:nvPicPr>
-          <p:cNvPr id="8" name="Image 1" descr="preencoded.png">    </p:cNvPr>
+          <p:cNvPr id="9" name="Image 1" descr="preencoded.png">    </p:cNvPr>
           <p:cNvPicPr>
             <a:picLocks noChangeAspect="1"/>
           </p:cNvPicPr>
@@ -9767,8 +9796,8 @@
         </p:blipFill>
         <p:spPr>
           <a:xfrm>
-            <a:off x="914400" y="2560320"/>
-            <a:ext cx="10241280" cy="868680"/>
+            <a:off x="914400" y="3191256"/>
+            <a:ext cx="10241280" cy="1024128"/>
           </a:xfrm>
           <a:prstGeom prst="rect">
             <a:avLst/>
@@ -9777,14 +9806,14 @@
       </p:pic>
       <p:sp>
         <p:nvSpPr>
-          <p:cNvPr id="9" name="Shape 5"/>
-          <p:cNvSpPr/>
-          <p:nvPr/>
-        </p:nvSpPr>
-        <p:spPr>
-          <a:xfrm>
-            <a:off x="914400" y="2560320"/>
-            <a:ext cx="10241280" cy="868680"/>
+          <p:cNvPr id="10" name="Shape 6"/>
+          <p:cNvSpPr/>
+          <p:nvPr/>
+        </p:nvSpPr>
+        <p:spPr>
+          <a:xfrm>
+            <a:off x="914400" y="3191256"/>
+            <a:ext cx="10241280" cy="1024128"/>
           </a:xfrm>
           <a:prstGeom prst="rect">
             <a:avLst/>
@@ -9813,7 +9842,7 @@
       </p:sp>
       <p:pic>
         <p:nvPicPr>
-          <p:cNvPr id="10" name="Image 2" descr="preencoded.png">    </p:cNvPr>
+          <p:cNvPr id="11" name="Image 2" descr="preencoded.png">    </p:cNvPr>
           <p:cNvPicPr>
             <a:picLocks noChangeAspect="1"/>
           </p:cNvPicPr>
@@ -9833,8 +9862,8 @@
         </p:blipFill>
         <p:spPr>
           <a:xfrm>
-            <a:off x="914400" y="3703320"/>
-            <a:ext cx="10241280" cy="868680"/>
+            <a:off x="914400" y="4507992"/>
+            <a:ext cx="10241280" cy="1024128"/>
           </a:xfrm>
           <a:prstGeom prst="rect">
             <a:avLst/>
@@ -9843,14 +9872,14 @@
       </p:pic>
       <p:sp>
         <p:nvSpPr>
-          <p:cNvPr id="11" name="Shape 6"/>
-          <p:cNvSpPr/>
-          <p:nvPr/>
-        </p:nvSpPr>
-        <p:spPr>
-          <a:xfrm>
-            <a:off x="914400" y="3703320"/>
-            <a:ext cx="10241280" cy="868680"/>
+          <p:cNvPr id="12" name="Shape 7"/>
+          <p:cNvSpPr/>
+          <p:nvPr/>
+        </p:nvSpPr>
+        <p:spPr>
+          <a:xfrm>
+            <a:off x="914400" y="4507992"/>
+            <a:ext cx="10241280" cy="1024128"/>
           </a:xfrm>
           <a:prstGeom prst="rect">
             <a:avLst/>
@@ -9879,7 +9908,7 @@
       </p:sp>
       <p:sp>
         <p:nvSpPr>
-          <p:cNvPr id="12" name="Text 7"/>
+          <p:cNvPr id="13" name="Text 8"/>
           <p:cNvSpPr txBox="1"/>
           <p:nvPr/>
         </p:nvSpPr>
@@ -9921,18 +9950,18 @@
       </p:sp>
       <p:sp>
         <p:nvSpPr>
-          <p:cNvPr id="13" name="Shape 8"/>
-          <p:cNvSpPr/>
-          <p:nvPr/>
-        </p:nvSpPr>
-        <p:spPr>
-          <a:xfrm>
-            <a:off x="1097280" y="1623060"/>
-            <a:ext cx="457200" cy="457200"/>
+          <p:cNvPr id="14" name="Shape 9"/>
+          <p:cNvSpPr/>
+          <p:nvPr/>
+        </p:nvSpPr>
+        <p:spPr>
+          <a:xfrm>
+            <a:off x="1097280" y="2140428"/>
+            <a:ext cx="474025" cy="474025"/>
           </a:xfrm>
           <a:prstGeom prst="roundRect">
             <a:avLst>
-              <a:gd name="adj" fmla="val 8000"/>
+              <a:gd name="adj" fmla="val 7716"/>
             </a:avLst>
           </a:prstGeom>
           <a:solidFill>
@@ -9948,7 +9977,7 @@
       </p:sp>
       <p:pic>
         <p:nvPicPr>
-          <p:cNvPr id="14" name="Image 3" descr="flow icon from tabler-icons (MIT)">    </p:cNvPr>
+          <p:cNvPr id="15" name="Image 3" descr="flow icon from tabler-icons (MIT)">    </p:cNvPr>
           <p:cNvPicPr>
             <a:picLocks noChangeAspect="1"/>
           </p:cNvPicPr>
@@ -9968,8 +9997,8 @@
         </p:blipFill>
         <p:spPr>
           <a:xfrm>
-            <a:off x="1170432" y="1696212"/>
-            <a:ext cx="310896" cy="310896"/>
+            <a:off x="1170432" y="2213580"/>
+            <a:ext cx="327721" cy="327721"/>
           </a:xfrm>
           <a:prstGeom prst="rect">
             <a:avLst/>
@@ -9978,14 +10007,14 @@
       </p:pic>
       <p:sp>
         <p:nvSpPr>
-          <p:cNvPr id="15" name="Text 9"/>
+          <p:cNvPr id="16" name="Text 10"/>
           <p:cNvSpPr txBox="1"/>
           <p:nvPr/>
         </p:nvSpPr>
         <p:spPr>
           <a:xfrm>
-            <a:off x="1682496" y="1508760"/>
-            <a:ext cx="9272016" cy="685800"/>
+            <a:off x="1699321" y="1957548"/>
+            <a:ext cx="9255191" cy="839785"/>
           </a:xfrm>
           <a:prstGeom prst="rect">
             <a:avLst/>
@@ -10037,18 +10066,18 @@
       </p:sp>
       <p:sp>
         <p:nvSpPr>
-          <p:cNvPr id="16" name="Shape 10"/>
-          <p:cNvSpPr/>
-          <p:nvPr/>
-        </p:nvSpPr>
-        <p:spPr>
-          <a:xfrm>
-            <a:off x="1097280" y="2766060"/>
-            <a:ext cx="457200" cy="457200"/>
+          <p:cNvPr id="17" name="Shape 11"/>
+          <p:cNvSpPr/>
+          <p:nvPr/>
+        </p:nvSpPr>
+        <p:spPr>
+          <a:xfrm>
+            <a:off x="1097280" y="3466308"/>
+            <a:ext cx="474025" cy="474025"/>
           </a:xfrm>
           <a:prstGeom prst="roundRect">
             <a:avLst>
-              <a:gd name="adj" fmla="val 8000"/>
+              <a:gd name="adj" fmla="val 7716"/>
             </a:avLst>
           </a:prstGeom>
           <a:solidFill>
@@ -10064,7 +10093,7 @@
       </p:sp>
       <p:pic>
         <p:nvPicPr>
-          <p:cNvPr id="17" name="Image 4" descr="verified icon from tabler-icons (MIT)">    </p:cNvPr>
+          <p:cNvPr id="18" name="Image 4" descr="verified icon from tabler-icons (MIT)">    </p:cNvPr>
           <p:cNvPicPr>
             <a:picLocks noChangeAspect="1"/>
           </p:cNvPicPr>
@@ -10084,8 +10113,8 @@
         </p:blipFill>
         <p:spPr>
           <a:xfrm>
-            <a:off x="1170432" y="2839212"/>
-            <a:ext cx="310896" cy="310896"/>
+            <a:off x="1170432" y="3539460"/>
+            <a:ext cx="327721" cy="327721"/>
           </a:xfrm>
           <a:prstGeom prst="rect">
             <a:avLst/>
@@ -10094,14 +10123,14 @@
       </p:pic>
       <p:sp>
         <p:nvSpPr>
-          <p:cNvPr id="18" name="Text 11"/>
+          <p:cNvPr id="19" name="Text 12"/>
           <p:cNvSpPr txBox="1"/>
           <p:nvPr/>
         </p:nvSpPr>
         <p:spPr>
           <a:xfrm>
-            <a:off x="1682496" y="2651760"/>
-            <a:ext cx="9272016" cy="685800"/>
+            <a:off x="1699321" y="3283428"/>
+            <a:ext cx="9255191" cy="839785"/>
           </a:xfrm>
           <a:prstGeom prst="rect">
             <a:avLst/>
@@ -10153,18 +10182,18 @@
       </p:sp>
       <p:sp>
         <p:nvSpPr>
-          <p:cNvPr id="19" name="Shape 12"/>
-          <p:cNvSpPr/>
-          <p:nvPr/>
-        </p:nvSpPr>
-        <p:spPr>
-          <a:xfrm>
-            <a:off x="1097280" y="3909060"/>
-            <a:ext cx="457200" cy="457200"/>
+          <p:cNvPr id="20" name="Shape 13"/>
+          <p:cNvSpPr/>
+          <p:nvPr/>
+        </p:nvSpPr>
+        <p:spPr>
+          <a:xfrm>
+            <a:off x="1097280" y="4783044"/>
+            <a:ext cx="474025" cy="474025"/>
           </a:xfrm>
           <a:prstGeom prst="roundRect">
             <a:avLst>
-              <a:gd name="adj" fmla="val 8000"/>
+              <a:gd name="adj" fmla="val 7716"/>
             </a:avLst>
           </a:prstGeom>
           <a:solidFill>
@@ -10180,7 +10209,7 @@
       </p:sp>
       <p:pic>
         <p:nvPicPr>
-          <p:cNvPr id="20" name="Image 5" descr="spark icon from tabler-icons (MIT)">    </p:cNvPr>
+          <p:cNvPr id="21" name="Image 5" descr="spark icon from tabler-icons (MIT)">    </p:cNvPr>
           <p:cNvPicPr>
             <a:picLocks noChangeAspect="1"/>
           </p:cNvPicPr>
@@ -10200,8 +10229,8 @@
         </p:blipFill>
         <p:spPr>
           <a:xfrm>
-            <a:off x="1170432" y="3982212"/>
-            <a:ext cx="310896" cy="310896"/>
+            <a:off x="1170432" y="4856196"/>
+            <a:ext cx="327721" cy="327721"/>
           </a:xfrm>
           <a:prstGeom prst="rect">
             <a:avLst/>
@@ -10210,14 +10239,14 @@
       </p:pic>
       <p:sp>
         <p:nvSpPr>
-          <p:cNvPr id="21" name="Text 13"/>
+          <p:cNvPr id="22" name="Text 14"/>
           <p:cNvSpPr txBox="1"/>
           <p:nvPr/>
         </p:nvSpPr>
         <p:spPr>
           <a:xfrm>
-            <a:off x="1682496" y="3794760"/>
-            <a:ext cx="9272016" cy="685800"/>
+            <a:off x="1699321" y="4600164"/>
+            <a:ext cx="9255191" cy="839785"/>
           </a:xfrm>
           <a:prstGeom prst="rect">
             <a:avLst/>
@@ -10334,8 +10363,8 @@
         </p:nvSpPr>
         <p:spPr>
           <a:xfrm>
-            <a:off x="914400" y="1463040"/>
-            <a:ext cx="10241280" cy="73152"/>
+            <a:off x="822960" y="1188720"/>
+            <a:ext cx="10515600" cy="45720"/>
           </a:xfrm>
           <a:prstGeom prst="rect">
             <a:avLst/>
@@ -10355,7 +10384,387 @@
       </p:sp>
       <p:sp>
         <p:nvSpPr>
-          <p:cNvPr id="4" name="Text 2"/>
+          <p:cNvPr id="4" name="Shape 2"/>
+          <p:cNvSpPr/>
+          <p:nvPr/>
+        </p:nvSpPr>
+        <p:spPr>
+          <a:xfrm>
+            <a:off x="822960" y="6199632"/>
+            <a:ext cx="2011680" cy="45720"/>
+          </a:xfrm>
+          <a:prstGeom prst="rect">
+            <a:avLst/>
+          </a:prstGeom>
+          <a:solidFill>
+            <a:srgbClr val="DBEAFE"/>
+          </a:solidFill>
+          <a:ln w="12700">
+            <a:solidFill>
+              <a:srgbClr val="DBEAFE">
+                <a:alpha val="0"/>
+              </a:srgbClr>
+            </a:solidFill>
+            <a:prstDash val="solid"/>
+          </a:ln>
+        </p:spPr>
+      </p:sp>
+      <p:sp>
+        <p:nvSpPr>
+          <p:cNvPr id="5" name="Shape 3"/>
+          <p:cNvSpPr/>
+          <p:nvPr/>
+        </p:nvSpPr>
+        <p:spPr>
+          <a:xfrm>
+            <a:off x="6080760" y="1389888"/>
+            <a:ext cx="22860" cy="4663440"/>
+          </a:xfrm>
+          <a:prstGeom prst="rect">
+            <a:avLst/>
+          </a:prstGeom>
+          <a:solidFill>
+            <a:srgbClr val="E2E8F0">
+              <a:alpha val="90000"/>
+            </a:srgbClr>
+          </a:solidFill>
+          <a:ln w="12700">
+            <a:solidFill>
+              <a:srgbClr val="E2E8F0">
+                <a:alpha val="0"/>
+              </a:srgbClr>
+            </a:solidFill>
+            <a:prstDash val="solid"/>
+          </a:ln>
+        </p:spPr>
+      </p:sp>
+      <p:sp>
+        <p:nvSpPr>
+          <p:cNvPr id="6" name="Shape 4"/>
+          <p:cNvSpPr/>
+          <p:nvPr/>
+        </p:nvSpPr>
+        <p:spPr>
+          <a:xfrm>
+            <a:off x="822960" y="1389888"/>
+            <a:ext cx="73152" cy="658368"/>
+          </a:xfrm>
+          <a:prstGeom prst="rect">
+            <a:avLst/>
+          </a:prstGeom>
+          <a:solidFill>
+            <a:srgbClr val="2563EB"/>
+          </a:solidFill>
+          <a:ln w="12700">
+            <a:solidFill>
+              <a:srgbClr val="2563EB">
+                <a:alpha val="0"/>
+              </a:srgbClr>
+            </a:solidFill>
+            <a:prstDash val="solid"/>
+          </a:ln>
+        </p:spPr>
+      </p:sp>
+      <p:sp>
+        <p:nvSpPr>
+          <p:cNvPr id="7" name="Shape 5"/>
+          <p:cNvSpPr/>
+          <p:nvPr/>
+        </p:nvSpPr>
+        <p:spPr>
+          <a:xfrm>
+            <a:off x="822960" y="2194560"/>
+            <a:ext cx="73152" cy="658368"/>
+          </a:xfrm>
+          <a:prstGeom prst="rect">
+            <a:avLst/>
+          </a:prstGeom>
+          <a:solidFill>
+            <a:srgbClr val="DBEAFE"/>
+          </a:solidFill>
+          <a:ln w="12700">
+            <a:solidFill>
+              <a:srgbClr val="DBEAFE">
+                <a:alpha val="0"/>
+              </a:srgbClr>
+            </a:solidFill>
+            <a:prstDash val="solid"/>
+          </a:ln>
+        </p:spPr>
+      </p:sp>
+      <p:sp>
+        <p:nvSpPr>
+          <p:cNvPr id="8" name="Shape 6"/>
+          <p:cNvSpPr/>
+          <p:nvPr/>
+        </p:nvSpPr>
+        <p:spPr>
+          <a:xfrm>
+            <a:off x="822960" y="2990088"/>
+            <a:ext cx="73152" cy="658368"/>
+          </a:xfrm>
+          <a:prstGeom prst="rect">
+            <a:avLst/>
+          </a:prstGeom>
+          <a:solidFill>
+            <a:srgbClr val="2563EB"/>
+          </a:solidFill>
+          <a:ln w="12700">
+            <a:solidFill>
+              <a:srgbClr val="2563EB">
+                <a:alpha val="0"/>
+              </a:srgbClr>
+            </a:solidFill>
+            <a:prstDash val="solid"/>
+          </a:ln>
+        </p:spPr>
+      </p:sp>
+      <p:sp>
+        <p:nvSpPr>
+          <p:cNvPr id="9" name="Shape 7"/>
+          <p:cNvSpPr/>
+          <p:nvPr/>
+        </p:nvSpPr>
+        <p:spPr>
+          <a:xfrm>
+            <a:off x="822960" y="3794760"/>
+            <a:ext cx="73152" cy="658368"/>
+          </a:xfrm>
+          <a:prstGeom prst="rect">
+            <a:avLst/>
+          </a:prstGeom>
+          <a:solidFill>
+            <a:srgbClr val="DBEAFE"/>
+          </a:solidFill>
+          <a:ln w="12700">
+            <a:solidFill>
+              <a:srgbClr val="DBEAFE">
+                <a:alpha val="0"/>
+              </a:srgbClr>
+            </a:solidFill>
+            <a:prstDash val="solid"/>
+          </a:ln>
+        </p:spPr>
+      </p:sp>
+      <p:sp>
+        <p:nvSpPr>
+          <p:cNvPr id="10" name="Shape 8"/>
+          <p:cNvSpPr/>
+          <p:nvPr/>
+        </p:nvSpPr>
+        <p:spPr>
+          <a:xfrm>
+            <a:off x="822960" y="4599432"/>
+            <a:ext cx="73152" cy="658368"/>
+          </a:xfrm>
+          <a:prstGeom prst="rect">
+            <a:avLst/>
+          </a:prstGeom>
+          <a:solidFill>
+            <a:srgbClr val="2563EB"/>
+          </a:solidFill>
+          <a:ln w="12700">
+            <a:solidFill>
+              <a:srgbClr val="2563EB">
+                <a:alpha val="0"/>
+              </a:srgbClr>
+            </a:solidFill>
+            <a:prstDash val="solid"/>
+          </a:ln>
+        </p:spPr>
+      </p:sp>
+      <p:sp>
+        <p:nvSpPr>
+          <p:cNvPr id="11" name="Shape 9"/>
+          <p:cNvSpPr/>
+          <p:nvPr/>
+        </p:nvSpPr>
+        <p:spPr>
+          <a:xfrm>
+            <a:off x="822960" y="5394960"/>
+            <a:ext cx="73152" cy="658368"/>
+          </a:xfrm>
+          <a:prstGeom prst="rect">
+            <a:avLst/>
+          </a:prstGeom>
+          <a:solidFill>
+            <a:srgbClr val="DBEAFE"/>
+          </a:solidFill>
+          <a:ln w="12700">
+            <a:solidFill>
+              <a:srgbClr val="DBEAFE">
+                <a:alpha val="0"/>
+              </a:srgbClr>
+            </a:solidFill>
+            <a:prstDash val="solid"/>
+          </a:ln>
+        </p:spPr>
+      </p:sp>
+      <p:sp>
+        <p:nvSpPr>
+          <p:cNvPr id="12" name="Shape 10"/>
+          <p:cNvSpPr/>
+          <p:nvPr/>
+        </p:nvSpPr>
+        <p:spPr>
+          <a:xfrm>
+            <a:off x="6272784" y="1389888"/>
+            <a:ext cx="73152" cy="658368"/>
+          </a:xfrm>
+          <a:prstGeom prst="rect">
+            <a:avLst/>
+          </a:prstGeom>
+          <a:solidFill>
+            <a:srgbClr val="2563EB"/>
+          </a:solidFill>
+          <a:ln w="12700">
+            <a:solidFill>
+              <a:srgbClr val="2563EB">
+                <a:alpha val="0"/>
+              </a:srgbClr>
+            </a:solidFill>
+            <a:prstDash val="solid"/>
+          </a:ln>
+        </p:spPr>
+      </p:sp>
+      <p:sp>
+        <p:nvSpPr>
+          <p:cNvPr id="13" name="Shape 11"/>
+          <p:cNvSpPr/>
+          <p:nvPr/>
+        </p:nvSpPr>
+        <p:spPr>
+          <a:xfrm>
+            <a:off x="6272784" y="2194560"/>
+            <a:ext cx="73152" cy="658368"/>
+          </a:xfrm>
+          <a:prstGeom prst="rect">
+            <a:avLst/>
+          </a:prstGeom>
+          <a:solidFill>
+            <a:srgbClr val="DBEAFE"/>
+          </a:solidFill>
+          <a:ln w="12700">
+            <a:solidFill>
+              <a:srgbClr val="DBEAFE">
+                <a:alpha val="0"/>
+              </a:srgbClr>
+            </a:solidFill>
+            <a:prstDash val="solid"/>
+          </a:ln>
+        </p:spPr>
+      </p:sp>
+      <p:sp>
+        <p:nvSpPr>
+          <p:cNvPr id="14" name="Shape 12"/>
+          <p:cNvSpPr/>
+          <p:nvPr/>
+        </p:nvSpPr>
+        <p:spPr>
+          <a:xfrm>
+            <a:off x="6272784" y="2990088"/>
+            <a:ext cx="73152" cy="658368"/>
+          </a:xfrm>
+          <a:prstGeom prst="rect">
+            <a:avLst/>
+          </a:prstGeom>
+          <a:solidFill>
+            <a:srgbClr val="2563EB"/>
+          </a:solidFill>
+          <a:ln w="12700">
+            <a:solidFill>
+              <a:srgbClr val="2563EB">
+                <a:alpha val="0"/>
+              </a:srgbClr>
+            </a:solidFill>
+            <a:prstDash val="solid"/>
+          </a:ln>
+        </p:spPr>
+      </p:sp>
+      <p:sp>
+        <p:nvSpPr>
+          <p:cNvPr id="15" name="Shape 13"/>
+          <p:cNvSpPr/>
+          <p:nvPr/>
+        </p:nvSpPr>
+        <p:spPr>
+          <a:xfrm>
+            <a:off x="6272784" y="3794760"/>
+            <a:ext cx="73152" cy="658368"/>
+          </a:xfrm>
+          <a:prstGeom prst="rect">
+            <a:avLst/>
+          </a:prstGeom>
+          <a:solidFill>
+            <a:srgbClr val="DBEAFE"/>
+          </a:solidFill>
+          <a:ln w="12700">
+            <a:solidFill>
+              <a:srgbClr val="DBEAFE">
+                <a:alpha val="0"/>
+              </a:srgbClr>
+            </a:solidFill>
+            <a:prstDash val="solid"/>
+          </a:ln>
+        </p:spPr>
+      </p:sp>
+      <p:sp>
+        <p:nvSpPr>
+          <p:cNvPr id="16" name="Shape 14"/>
+          <p:cNvSpPr/>
+          <p:nvPr/>
+        </p:nvSpPr>
+        <p:spPr>
+          <a:xfrm>
+            <a:off x="6272784" y="4599432"/>
+            <a:ext cx="73152" cy="658368"/>
+          </a:xfrm>
+          <a:prstGeom prst="rect">
+            <a:avLst/>
+          </a:prstGeom>
+          <a:solidFill>
+            <a:srgbClr val="2563EB"/>
+          </a:solidFill>
+          <a:ln w="12700">
+            <a:solidFill>
+              <a:srgbClr val="2563EB">
+                <a:alpha val="0"/>
+              </a:srgbClr>
+            </a:solidFill>
+            <a:prstDash val="solid"/>
+          </a:ln>
+        </p:spPr>
+      </p:sp>
+      <p:sp>
+        <p:nvSpPr>
+          <p:cNvPr id="17" name="Shape 15"/>
+          <p:cNvSpPr/>
+          <p:nvPr/>
+        </p:nvSpPr>
+        <p:spPr>
+          <a:xfrm>
+            <a:off x="6272784" y="5394960"/>
+            <a:ext cx="73152" cy="658368"/>
+          </a:xfrm>
+          <a:prstGeom prst="rect">
+            <a:avLst/>
+          </a:prstGeom>
+          <a:solidFill>
+            <a:srgbClr val="DBEAFE"/>
+          </a:solidFill>
+          <a:ln w="12700">
+            <a:solidFill>
+              <a:srgbClr val="DBEAFE">
+                <a:alpha val="0"/>
+              </a:srgbClr>
+            </a:solidFill>
+            <a:prstDash val="solid"/>
+          </a:ln>
+        </p:spPr>
+      </p:sp>
+      <p:sp>
+        <p:nvSpPr>
+          <p:cNvPr id="18" name="Text 16"/>
           <p:cNvSpPr txBox="1"/>
           <p:nvPr/>
         </p:nvSpPr>
@@ -10397,14 +10806,14 @@
       </p:sp>
       <p:sp>
         <p:nvSpPr>
-          <p:cNvPr id="5" name="Text 3"/>
+          <p:cNvPr id="19" name="Text 17"/>
           <p:cNvSpPr txBox="1"/>
           <p:nvPr/>
         </p:nvSpPr>
         <p:spPr>
           <a:xfrm>
-            <a:off x="987552" y="1572768"/>
-            <a:ext cx="10094976" cy="355092"/>
+            <a:off x="1042416" y="1481328"/>
+            <a:ext cx="4645152" cy="475488"/>
           </a:xfrm>
           <a:prstGeom prst="rect">
             <a:avLst/>
@@ -10416,14 +10825,14 @@
           <a:bodyPr wrap="square" lIns="0" tIns="25400" rIns="25400" bIns="0" rtlCol="0" anchor="ctr"/>
           <a:lstStyle/>
           <a:p>
-            <a:pPr algn="l" indent="0" marL="0">
+            <a:pPr algn="ctr" indent="0" marL="0">
               <a:lnSpc>
                 <a:spcPct val="120000"/>
               </a:lnSpc>
               <a:buNone/>
             </a:pPr>
             <a:r>
-              <a:rPr lang="en-US" sz="2200" dirty="0">
+              <a:rPr lang="en-US" sz="1800" dirty="0">
                 <a:solidFill>
                   <a:srgbClr val="111827"/>
                 </a:solidFill>
@@ -10431,22 +10840,22 @@
                 <a:ea typeface="Pretendard" pitchFamily="34" charset="-122"/>
                 <a:cs typeface="Pretendard" pitchFamily="34" charset="-120"/>
               </a:rPr>
-              <a:t>Preview Purpose</a:t>
+              <a:t>01  Preview Purpose</a:t>
             </a:r>
-            <a:endParaRPr lang="en-US" sz="2200" dirty="0"/>
+            <a:endParaRPr lang="en-US" sz="1800" dirty="0"/>
           </a:p>
         </p:txBody>
       </p:sp>
       <p:sp>
         <p:nvSpPr>
-          <p:cNvPr id="6" name="Text 4"/>
+          <p:cNvPr id="20" name="Text 18"/>
           <p:cNvSpPr txBox="1"/>
           <p:nvPr/>
         </p:nvSpPr>
         <p:spPr>
           <a:xfrm>
-            <a:off x="987552" y="1927860"/>
-            <a:ext cx="10094976" cy="355092"/>
+            <a:off x="1042416" y="2286000"/>
+            <a:ext cx="4645152" cy="475488"/>
           </a:xfrm>
           <a:prstGeom prst="rect">
             <a:avLst/>
@@ -10458,14 +10867,14 @@
           <a:bodyPr wrap="square" lIns="0" tIns="25400" rIns="25400" bIns="0" rtlCol="0" anchor="ctr"/>
           <a:lstStyle/>
           <a:p>
-            <a:pPr algn="l" indent="0" marL="0">
+            <a:pPr algn="ctr" indent="0" marL="0">
               <a:lnSpc>
                 <a:spcPct val="120000"/>
               </a:lnSpc>
               <a:buNone/>
             </a:pPr>
             <a:r>
-              <a:rPr lang="en-US" sz="2200" dirty="0">
+              <a:rPr lang="en-US" sz="1800" dirty="0">
                 <a:solidFill>
                   <a:srgbClr val="111827"/>
                 </a:solidFill>
@@ -10473,22 +10882,22 @@
                 <a:ea typeface="Pretendard" pitchFamily="34" charset="-122"/>
                 <a:cs typeface="Pretendard" pitchFamily="34" charset="-120"/>
               </a:rPr>
-              <a:t>Composition Contract</a:t>
+              <a:t>02  Composition Contract</a:t>
             </a:r>
-            <a:endParaRPr lang="en-US" sz="2200" dirty="0"/>
+            <a:endParaRPr lang="en-US" sz="1800" dirty="0"/>
           </a:p>
         </p:txBody>
       </p:sp>
       <p:sp>
         <p:nvSpPr>
-          <p:cNvPr id="7" name="Text 5"/>
+          <p:cNvPr id="21" name="Text 19"/>
           <p:cNvSpPr txBox="1"/>
           <p:nvPr/>
         </p:nvSpPr>
         <p:spPr>
           <a:xfrm>
-            <a:off x="987552" y="2282952"/>
-            <a:ext cx="10094976" cy="355092"/>
+            <a:off x="1042416" y="3081528"/>
+            <a:ext cx="4645152" cy="475488"/>
           </a:xfrm>
           <a:prstGeom prst="rect">
             <a:avLst/>
@@ -10500,14 +10909,14 @@
           <a:bodyPr wrap="square" lIns="0" tIns="25400" rIns="25400" bIns="0" rtlCol="0" anchor="ctr"/>
           <a:lstStyle/>
           <a:p>
-            <a:pPr algn="l" indent="0" marL="0">
+            <a:pPr algn="ctr" indent="0" marL="0">
               <a:lnSpc>
                 <a:spcPct val="120000"/>
               </a:lnSpc>
               <a:buNone/>
             </a:pPr>
             <a:r>
-              <a:rPr lang="en-US" sz="2200" dirty="0">
+              <a:rPr lang="en-US" sz="1800" dirty="0">
                 <a:solidFill>
                   <a:srgbClr val="111827"/>
                 </a:solidFill>
@@ -10515,22 +10924,22 @@
                 <a:ea typeface="Pretendard" pitchFamily="34" charset="-122"/>
                 <a:cs typeface="Pretendard" pitchFamily="34" charset="-120"/>
               </a:rPr>
-              <a:t>Style Families</a:t>
+              <a:t>03  Style Families</a:t>
             </a:r>
-            <a:endParaRPr lang="en-US" sz="2200" dirty="0"/>
+            <a:endParaRPr lang="en-US" sz="1800" dirty="0"/>
           </a:p>
         </p:txBody>
       </p:sp>
       <p:sp>
         <p:nvSpPr>
-          <p:cNvPr id="8" name="Text 6"/>
+          <p:cNvPr id="22" name="Text 20"/>
           <p:cNvSpPr txBox="1"/>
           <p:nvPr/>
         </p:nvSpPr>
         <p:spPr>
           <a:xfrm>
-            <a:off x="987552" y="2638044"/>
-            <a:ext cx="10094976" cy="355092"/>
+            <a:off x="1042416" y="3886200"/>
+            <a:ext cx="4645152" cy="475488"/>
           </a:xfrm>
           <a:prstGeom prst="rect">
             <a:avLst/>
@@ -10542,14 +10951,14 @@
           <a:bodyPr wrap="square" lIns="0" tIns="25400" rIns="25400" bIns="0" rtlCol="0" anchor="ctr"/>
           <a:lstStyle/>
           <a:p>
-            <a:pPr algn="l" indent="0" marL="0">
+            <a:pPr algn="ctr" indent="0" marL="0">
               <a:lnSpc>
                 <a:spcPct val="120000"/>
               </a:lnSpc>
               <a:buNone/>
             </a:pPr>
             <a:r>
-              <a:rPr lang="en-US" sz="2200" dirty="0">
+              <a:rPr lang="en-US" sz="1800" dirty="0">
                 <a:solidFill>
                   <a:srgbClr val="111827"/>
                 </a:solidFill>
@@ -10557,22 +10966,22 @@
                 <a:ea typeface="Pretendard" pitchFamily="34" charset="-122"/>
                 <a:cs typeface="Pretendard" pitchFamily="34" charset="-120"/>
               </a:rPr>
-              <a:t>Semantic Blocks</a:t>
+              <a:t>04  Semantic Blocks</a:t>
             </a:r>
-            <a:endParaRPr lang="en-US" sz="2200" dirty="0"/>
+            <a:endParaRPr lang="en-US" sz="1800" dirty="0"/>
           </a:p>
         </p:txBody>
       </p:sp>
       <p:sp>
         <p:nvSpPr>
-          <p:cNvPr id="9" name="Text 7"/>
+          <p:cNvPr id="23" name="Text 21"/>
           <p:cNvSpPr txBox="1"/>
           <p:nvPr/>
         </p:nvSpPr>
         <p:spPr>
           <a:xfrm>
-            <a:off x="987552" y="2993136"/>
-            <a:ext cx="10094976" cy="355092"/>
+            <a:off x="1042416" y="4690872"/>
+            <a:ext cx="4645152" cy="475488"/>
           </a:xfrm>
           <a:prstGeom prst="rect">
             <a:avLst/>
@@ -10584,14 +10993,14 @@
           <a:bodyPr wrap="square" lIns="0" tIns="25400" rIns="25400" bIns="0" rtlCol="0" anchor="ctr"/>
           <a:lstStyle/>
           <a:p>
-            <a:pPr algn="l" indent="0" marL="0">
+            <a:pPr algn="ctr" indent="0" marL="0">
               <a:lnSpc>
                 <a:spcPct val="120000"/>
               </a:lnSpc>
               <a:buNone/>
             </a:pPr>
             <a:r>
-              <a:rPr lang="en-US" sz="2200" dirty="0">
+              <a:rPr lang="en-US" sz="1800" dirty="0">
                 <a:solidFill>
                   <a:srgbClr val="111827"/>
                 </a:solidFill>
@@ -10599,22 +11008,22 @@
                 <a:ea typeface="Pretendard" pitchFamily="34" charset="-122"/>
                 <a:cs typeface="Pretendard" pitchFamily="34" charset="-120"/>
               </a:rPr>
-              <a:t>Pipeline Diagram</a:t>
+              <a:t>05  Pipeline Diagram</a:t>
             </a:r>
-            <a:endParaRPr lang="en-US" sz="2200" dirty="0"/>
+            <a:endParaRPr lang="en-US" sz="1800" dirty="0"/>
           </a:p>
         </p:txBody>
       </p:sp>
       <p:sp>
         <p:nvSpPr>
-          <p:cNvPr id="10" name="Text 8"/>
+          <p:cNvPr id="24" name="Text 22"/>
           <p:cNvSpPr txBox="1"/>
           <p:nvPr/>
         </p:nvSpPr>
         <p:spPr>
           <a:xfrm>
-            <a:off x="987552" y="3348228"/>
-            <a:ext cx="10094976" cy="355092"/>
+            <a:off x="1042416" y="5486400"/>
+            <a:ext cx="4645152" cy="475488"/>
           </a:xfrm>
           <a:prstGeom prst="rect">
             <a:avLst/>
@@ -10626,14 +11035,14 @@
           <a:bodyPr wrap="square" lIns="0" tIns="25400" rIns="25400" bIns="0" rtlCol="0" anchor="ctr"/>
           <a:lstStyle/>
           <a:p>
-            <a:pPr algn="l" indent="0" marL="0">
+            <a:pPr algn="ctr" indent="0" marL="0">
               <a:lnSpc>
                 <a:spcPct val="120000"/>
               </a:lnSpc>
               <a:buNone/>
             </a:pPr>
             <a:r>
-              <a:rPr lang="en-US" sz="2200" dirty="0">
+              <a:rPr lang="en-US" sz="1800" dirty="0">
                 <a:solidFill>
                   <a:srgbClr val="111827"/>
                 </a:solidFill>
@@ -10641,22 +11050,22 @@
                 <a:ea typeface="Pretendard" pitchFamily="34" charset="-122"/>
                 <a:cs typeface="Pretendard" pitchFamily="34" charset="-120"/>
               </a:rPr>
-              <a:t>Table Coherence</a:t>
+              <a:t>06  Table Coherence</a:t>
             </a:r>
-            <a:endParaRPr lang="en-US" sz="2200" dirty="0"/>
+            <a:endParaRPr lang="en-US" sz="1800" dirty="0"/>
           </a:p>
         </p:txBody>
       </p:sp>
       <p:sp>
         <p:nvSpPr>
-          <p:cNvPr id="11" name="Text 9"/>
+          <p:cNvPr id="25" name="Text 23"/>
           <p:cNvSpPr txBox="1"/>
           <p:nvPr/>
         </p:nvSpPr>
         <p:spPr>
           <a:xfrm>
-            <a:off x="987552" y="3703320"/>
-            <a:ext cx="10094976" cy="355092"/>
+            <a:off x="6492240" y="1481328"/>
+            <a:ext cx="4645152" cy="475488"/>
           </a:xfrm>
           <a:prstGeom prst="rect">
             <a:avLst/>
@@ -10668,14 +11077,14 @@
           <a:bodyPr wrap="square" lIns="0" tIns="25400" rIns="25400" bIns="0" rtlCol="0" anchor="ctr"/>
           <a:lstStyle/>
           <a:p>
-            <a:pPr algn="l" indent="0" marL="0">
+            <a:pPr algn="ctr" indent="0" marL="0">
               <a:lnSpc>
                 <a:spcPct val="120000"/>
               </a:lnSpc>
               <a:buNone/>
             </a:pPr>
             <a:r>
-              <a:rPr lang="en-US" sz="2200" dirty="0">
+              <a:rPr lang="en-US" sz="1800" dirty="0">
                 <a:solidFill>
                   <a:srgbClr val="111827"/>
                 </a:solidFill>
@@ -10683,22 +11092,22 @@
                 <a:ea typeface="Pretendard" pitchFamily="34" charset="-122"/>
                 <a:cs typeface="Pretendard" pitchFamily="34" charset="-120"/>
               </a:rPr>
-              <a:t>Chart and Table Pair</a:t>
+              <a:t>07  Chart and Table Pair</a:t>
             </a:r>
-            <a:endParaRPr lang="en-US" sz="2200" dirty="0"/>
+            <a:endParaRPr lang="en-US" sz="1800" dirty="0"/>
           </a:p>
         </p:txBody>
       </p:sp>
       <p:sp>
         <p:nvSpPr>
-          <p:cNvPr id="12" name="Text 10"/>
+          <p:cNvPr id="26" name="Text 24"/>
           <p:cNvSpPr txBox="1"/>
           <p:nvPr/>
         </p:nvSpPr>
         <p:spPr>
           <a:xfrm>
-            <a:off x="987552" y="4058412"/>
-            <a:ext cx="10094976" cy="355092"/>
+            <a:off x="6492240" y="2286000"/>
+            <a:ext cx="4645152" cy="475488"/>
           </a:xfrm>
           <a:prstGeom prst="rect">
             <a:avLst/>
@@ -10710,14 +11119,14 @@
           <a:bodyPr wrap="square" lIns="0" tIns="25400" rIns="25400" bIns="0" rtlCol="0" anchor="ctr"/>
           <a:lstStyle/>
           <a:p>
-            <a:pPr algn="l" indent="0" marL="0">
+            <a:pPr algn="ctr" indent="0" marL="0">
               <a:lnSpc>
                 <a:spcPct val="120000"/>
               </a:lnSpc>
               <a:buNone/>
             </a:pPr>
             <a:r>
-              <a:rPr lang="en-US" sz="2200" dirty="0">
+              <a:rPr lang="en-US" sz="1800" dirty="0">
                 <a:solidFill>
                   <a:srgbClr val="111827"/>
                 </a:solidFill>
@@ -10725,22 +11134,22 @@
                 <a:ea typeface="Pretendard" pitchFamily="34" charset="-122"/>
                 <a:cs typeface="Pretendard" pitchFamily="34" charset="-120"/>
               </a:rPr>
-              <a:t>Editable Proof Objects</a:t>
+              <a:t>08  Editable Proof Objects</a:t>
             </a:r>
-            <a:endParaRPr lang="en-US" sz="2200" dirty="0"/>
+            <a:endParaRPr lang="en-US" sz="1800" dirty="0"/>
           </a:p>
         </p:txBody>
       </p:sp>
       <p:sp>
         <p:nvSpPr>
-          <p:cNvPr id="13" name="Text 11"/>
+          <p:cNvPr id="27" name="Text 25"/>
           <p:cNvSpPr txBox="1"/>
           <p:nvPr/>
         </p:nvSpPr>
         <p:spPr>
           <a:xfrm>
-            <a:off x="987552" y="4413504"/>
-            <a:ext cx="10094976" cy="355092"/>
+            <a:off x="6492240" y="3081528"/>
+            <a:ext cx="4645152" cy="475488"/>
           </a:xfrm>
           <a:prstGeom prst="rect">
             <a:avLst/>
@@ -10752,14 +11161,14 @@
           <a:bodyPr wrap="square" lIns="0" tIns="25400" rIns="25400" bIns="0" rtlCol="0" anchor="ctr"/>
           <a:lstStyle/>
           <a:p>
-            <a:pPr algn="l" indent="0" marL="0">
+            <a:pPr algn="ctr" indent="0" marL="0">
               <a:lnSpc>
                 <a:spcPct val="120000"/>
               </a:lnSpc>
               <a:buNone/>
             </a:pPr>
             <a:r>
-              <a:rPr lang="en-US" sz="2200" dirty="0">
+              <a:rPr lang="en-US" sz="1800" dirty="0">
                 <a:solidFill>
                   <a:srgbClr val="111827"/>
                 </a:solidFill>
@@ -10767,22 +11176,22 @@
                 <a:ea typeface="Pretendard" pitchFamily="34" charset="-122"/>
                 <a:cs typeface="Pretendard" pitchFamily="34" charset="-120"/>
               </a:rPr>
-              <a:t>Object Shape Grammar</a:t>
+              <a:t>09  Object Shape Grammar</a:t>
             </a:r>
-            <a:endParaRPr lang="en-US" sz="2200" dirty="0"/>
+            <a:endParaRPr lang="en-US" sz="1800" dirty="0"/>
           </a:p>
         </p:txBody>
       </p:sp>
       <p:sp>
         <p:nvSpPr>
-          <p:cNvPr id="14" name="Text 12"/>
+          <p:cNvPr id="28" name="Text 26"/>
           <p:cNvSpPr txBox="1"/>
           <p:nvPr/>
         </p:nvSpPr>
         <p:spPr>
           <a:xfrm>
-            <a:off x="987552" y="4768596"/>
-            <a:ext cx="10094976" cy="355092"/>
+            <a:off x="6492240" y="3886200"/>
+            <a:ext cx="4645152" cy="475488"/>
           </a:xfrm>
           <a:prstGeom prst="rect">
             <a:avLst/>
@@ -10794,14 +11203,14 @@
           <a:bodyPr wrap="square" lIns="0" tIns="25400" rIns="25400" bIns="0" rtlCol="0" anchor="ctr"/>
           <a:lstStyle/>
           <a:p>
-            <a:pPr algn="l" indent="0" marL="0">
+            <a:pPr algn="ctr" indent="0" marL="0">
               <a:lnSpc>
                 <a:spcPct val="120000"/>
               </a:lnSpc>
               <a:buNone/>
             </a:pPr>
             <a:r>
-              <a:rPr lang="en-US" sz="2200" dirty="0">
+              <a:rPr lang="en-US" sz="1800" dirty="0">
                 <a:solidFill>
                   <a:srgbClr val="111827"/>
                 </a:solidFill>
@@ -10809,22 +11218,22 @@
                 <a:ea typeface="Pretendard" pitchFamily="34" charset="-122"/>
                 <a:cs typeface="Pretendard" pitchFamily="34" charset="-120"/>
               </a:rPr>
-              <a:t>Icon and Text Aside</a:t>
+              <a:t>10  Icon and Text Aside</a:t>
             </a:r>
-            <a:endParaRPr lang="en-US" sz="2200" dirty="0"/>
+            <a:endParaRPr lang="en-US" sz="1800" dirty="0"/>
           </a:p>
         </p:txBody>
       </p:sp>
       <p:sp>
         <p:nvSpPr>
-          <p:cNvPr id="15" name="Text 13"/>
+          <p:cNvPr id="29" name="Text 27"/>
           <p:cNvSpPr txBox="1"/>
           <p:nvPr/>
         </p:nvSpPr>
         <p:spPr>
           <a:xfrm>
-            <a:off x="987552" y="5123688"/>
-            <a:ext cx="10094976" cy="355092"/>
+            <a:off x="6492240" y="4690872"/>
+            <a:ext cx="4645152" cy="475488"/>
           </a:xfrm>
           <a:prstGeom prst="rect">
             <a:avLst/>
@@ -10836,14 +11245,14 @@
           <a:bodyPr wrap="square" lIns="0" tIns="25400" rIns="25400" bIns="0" rtlCol="0" anchor="ctr"/>
           <a:lstStyle/>
           <a:p>
-            <a:pPr algn="l" indent="0" marL="0">
+            <a:pPr algn="ctr" indent="0" marL="0">
               <a:lnSpc>
                 <a:spcPct val="120000"/>
               </a:lnSpc>
               <a:buNone/>
             </a:pPr>
             <a:r>
-              <a:rPr lang="en-US" sz="2200" dirty="0">
+              <a:rPr lang="en-US" sz="1800" dirty="0">
                 <a:solidFill>
                   <a:srgbClr val="111827"/>
                 </a:solidFill>
@@ -10851,22 +11260,22 @@
                 <a:ea typeface="Pretendard" pitchFamily="34" charset="-122"/>
                 <a:cs typeface="Pretendard" pitchFamily="34" charset="-120"/>
               </a:rPr>
-              <a:t>Overflow Guard</a:t>
+              <a:t>11  Overflow Guard</a:t>
             </a:r>
-            <a:endParaRPr lang="en-US" sz="2200" dirty="0"/>
+            <a:endParaRPr lang="en-US" sz="1800" dirty="0"/>
           </a:p>
         </p:txBody>
       </p:sp>
       <p:sp>
         <p:nvSpPr>
-          <p:cNvPr id="16" name="Text 14"/>
+          <p:cNvPr id="30" name="Text 28"/>
           <p:cNvSpPr txBox="1"/>
           <p:nvPr/>
         </p:nvSpPr>
         <p:spPr>
           <a:xfrm>
-            <a:off x="987552" y="5478780"/>
-            <a:ext cx="10094976" cy="355092"/>
+            <a:off x="6492240" y="5486400"/>
+            <a:ext cx="4645152" cy="475488"/>
           </a:xfrm>
           <a:prstGeom prst="rect">
             <a:avLst/>
@@ -10878,14 +11287,14 @@
           <a:bodyPr wrap="square" lIns="0" tIns="25400" rIns="25400" bIns="0" rtlCol="0" anchor="ctr"/>
           <a:lstStyle/>
           <a:p>
-            <a:pPr algn="l" indent="0" marL="0">
+            <a:pPr algn="ctr" indent="0" marL="0">
               <a:lnSpc>
                 <a:spcPct val="120000"/>
               </a:lnSpc>
               <a:buNone/>
             </a:pPr>
             <a:r>
-              <a:rPr lang="en-US" sz="2200" dirty="0">
+              <a:rPr lang="en-US" sz="1800" dirty="0">
                 <a:solidFill>
                   <a:srgbClr val="111827"/>
                 </a:solidFill>
@@ -10893,9 +11302,9 @@
                 <a:ea typeface="Pretendard" pitchFamily="34" charset="-122"/>
                 <a:cs typeface="Pretendard" pitchFamily="34" charset="-120"/>
               </a:rPr>
-              <a:t>Actions Output Review</a:t>
+              <a:t>12  Actions Output Review</a:t>
             </a:r>
-            <a:endParaRPr lang="en-US" sz="2200" dirty="0"/>
+            <a:endParaRPr lang="en-US" sz="1800" dirty="0"/>
           </a:p>
         </p:txBody>
       </p:sp>
@@ -11370,8 +11779,37 @@
         </p:nvSpPr>
         <p:spPr>
           <a:xfrm>
-            <a:off x="914400" y="1417320"/>
-            <a:ext cx="73152" cy="868680"/>
+            <a:off x="786384" y="1956816"/>
+            <a:ext cx="32004" cy="3483864"/>
+          </a:xfrm>
+          <a:prstGeom prst="rect">
+            <a:avLst/>
+          </a:prstGeom>
+          <a:solidFill>
+            <a:srgbClr val="DBEAFE">
+              <a:alpha val="80000"/>
+            </a:srgbClr>
+          </a:solidFill>
+          <a:ln w="12700">
+            <a:solidFill>
+              <a:srgbClr val="DBEAFE">
+                <a:alpha val="0"/>
+              </a:srgbClr>
+            </a:solidFill>
+            <a:prstDash val="solid"/>
+          </a:ln>
+        </p:spPr>
+      </p:sp>
+      <p:sp>
+        <p:nvSpPr>
+          <p:cNvPr id="4" name="Shape 2"/>
+          <p:cNvSpPr/>
+          <p:nvPr/>
+        </p:nvSpPr>
+        <p:spPr>
+          <a:xfrm>
+            <a:off x="914400" y="1865376"/>
+            <a:ext cx="73152" cy="1024128"/>
           </a:xfrm>
           <a:prstGeom prst="rect">
             <a:avLst/>
@@ -11391,14 +11829,14 @@
       </p:sp>
       <p:sp>
         <p:nvSpPr>
-          <p:cNvPr id="4" name="Shape 2"/>
-          <p:cNvSpPr/>
-          <p:nvPr/>
-        </p:nvSpPr>
-        <p:spPr>
-          <a:xfrm>
-            <a:off x="914400" y="2560320"/>
-            <a:ext cx="73152" cy="868680"/>
+          <p:cNvPr id="5" name="Shape 3"/>
+          <p:cNvSpPr/>
+          <p:nvPr/>
+        </p:nvSpPr>
+        <p:spPr>
+          <a:xfrm>
+            <a:off x="914400" y="3191256"/>
+            <a:ext cx="73152" cy="1024128"/>
           </a:xfrm>
           <a:prstGeom prst="rect">
             <a:avLst/>
@@ -11418,14 +11856,14 @@
       </p:sp>
       <p:sp>
         <p:nvSpPr>
-          <p:cNvPr id="5" name="Shape 3"/>
-          <p:cNvSpPr/>
-          <p:nvPr/>
-        </p:nvSpPr>
-        <p:spPr>
-          <a:xfrm>
-            <a:off x="914400" y="3703320"/>
-            <a:ext cx="73152" cy="868680"/>
+          <p:cNvPr id="6" name="Shape 4"/>
+          <p:cNvSpPr/>
+          <p:nvPr/>
+        </p:nvSpPr>
+        <p:spPr>
+          <a:xfrm>
+            <a:off x="914400" y="4507992"/>
+            <a:ext cx="73152" cy="1024128"/>
           </a:xfrm>
           <a:prstGeom prst="rect">
             <a:avLst/>
@@ -11445,7 +11883,7 @@
       </p:sp>
       <p:pic>
         <p:nvPicPr>
-          <p:cNvPr id="6" name="Image 0" descr="preencoded.png">    </p:cNvPr>
+          <p:cNvPr id="7" name="Image 0" descr="preencoded.png">    </p:cNvPr>
           <p:cNvPicPr>
             <a:picLocks noChangeAspect="1"/>
           </p:cNvPicPr>
@@ -11465,8 +11903,8 @@
         </p:blipFill>
         <p:spPr>
           <a:xfrm>
-            <a:off x="914400" y="1417320"/>
-            <a:ext cx="10241280" cy="868680"/>
+            <a:off x="914400" y="1865376"/>
+            <a:ext cx="10241280" cy="1024128"/>
           </a:xfrm>
           <a:prstGeom prst="rect">
             <a:avLst/>
@@ -11475,14 +11913,14 @@
       </p:pic>
       <p:sp>
         <p:nvSpPr>
-          <p:cNvPr id="7" name="Shape 4"/>
-          <p:cNvSpPr/>
-          <p:nvPr/>
-        </p:nvSpPr>
-        <p:spPr>
-          <a:xfrm>
-            <a:off x="914400" y="1417320"/>
-            <a:ext cx="10241280" cy="868680"/>
+          <p:cNvPr id="8" name="Shape 5"/>
+          <p:cNvSpPr/>
+          <p:nvPr/>
+        </p:nvSpPr>
+        <p:spPr>
+          <a:xfrm>
+            <a:off x="914400" y="1865376"/>
+            <a:ext cx="10241280" cy="1024128"/>
           </a:xfrm>
           <a:prstGeom prst="rect">
             <a:avLst/>
@@ -11511,7 +11949,7 @@
       </p:sp>
       <p:pic>
         <p:nvPicPr>
-          <p:cNvPr id="8" name="Image 1" descr="preencoded.png">    </p:cNvPr>
+          <p:cNvPr id="9" name="Image 1" descr="preencoded.png">    </p:cNvPr>
           <p:cNvPicPr>
             <a:picLocks noChangeAspect="1"/>
           </p:cNvPicPr>
@@ -11531,8 +11969,8 @@
         </p:blipFill>
         <p:spPr>
           <a:xfrm>
-            <a:off x="914400" y="2560320"/>
-            <a:ext cx="10241280" cy="868680"/>
+            <a:off x="914400" y="3191256"/>
+            <a:ext cx="10241280" cy="1024128"/>
           </a:xfrm>
           <a:prstGeom prst="rect">
             <a:avLst/>
@@ -11541,14 +11979,14 @@
       </p:pic>
       <p:sp>
         <p:nvSpPr>
-          <p:cNvPr id="9" name="Shape 5"/>
-          <p:cNvSpPr/>
-          <p:nvPr/>
-        </p:nvSpPr>
-        <p:spPr>
-          <a:xfrm>
-            <a:off x="914400" y="2560320"/>
-            <a:ext cx="10241280" cy="868680"/>
+          <p:cNvPr id="10" name="Shape 6"/>
+          <p:cNvSpPr/>
+          <p:nvPr/>
+        </p:nvSpPr>
+        <p:spPr>
+          <a:xfrm>
+            <a:off x="914400" y="3191256"/>
+            <a:ext cx="10241280" cy="1024128"/>
           </a:xfrm>
           <a:prstGeom prst="rect">
             <a:avLst/>
@@ -11577,7 +12015,7 @@
       </p:sp>
       <p:pic>
         <p:nvPicPr>
-          <p:cNvPr id="10" name="Image 2" descr="preencoded.png">    </p:cNvPr>
+          <p:cNvPr id="11" name="Image 2" descr="preencoded.png">    </p:cNvPr>
           <p:cNvPicPr>
             <a:picLocks noChangeAspect="1"/>
           </p:cNvPicPr>
@@ -11597,8 +12035,8 @@
         </p:blipFill>
         <p:spPr>
           <a:xfrm>
-            <a:off x="914400" y="3703320"/>
-            <a:ext cx="10241280" cy="868680"/>
+            <a:off x="914400" y="4507992"/>
+            <a:ext cx="10241280" cy="1024128"/>
           </a:xfrm>
           <a:prstGeom prst="rect">
             <a:avLst/>
@@ -11607,14 +12045,14 @@
       </p:pic>
       <p:sp>
         <p:nvSpPr>
-          <p:cNvPr id="11" name="Shape 6"/>
-          <p:cNvSpPr/>
-          <p:nvPr/>
-        </p:nvSpPr>
-        <p:spPr>
-          <a:xfrm>
-            <a:off x="914400" y="3703320"/>
-            <a:ext cx="10241280" cy="868680"/>
+          <p:cNvPr id="12" name="Shape 7"/>
+          <p:cNvSpPr/>
+          <p:nvPr/>
+        </p:nvSpPr>
+        <p:spPr>
+          <a:xfrm>
+            <a:off x="914400" y="4507992"/>
+            <a:ext cx="10241280" cy="1024128"/>
           </a:xfrm>
           <a:prstGeom prst="rect">
             <a:avLst/>
@@ -11643,7 +12081,7 @@
       </p:sp>
       <p:sp>
         <p:nvSpPr>
-          <p:cNvPr id="12" name="Text 7"/>
+          <p:cNvPr id="13" name="Text 8"/>
           <p:cNvSpPr txBox="1"/>
           <p:nvPr/>
         </p:nvSpPr>
@@ -11685,18 +12123,18 @@
       </p:sp>
       <p:sp>
         <p:nvSpPr>
-          <p:cNvPr id="13" name="Shape 8"/>
-          <p:cNvSpPr/>
-          <p:nvPr/>
-        </p:nvSpPr>
-        <p:spPr>
-          <a:xfrm>
-            <a:off x="1097280" y="1623060"/>
-            <a:ext cx="457200" cy="457200"/>
+          <p:cNvPr id="14" name="Shape 9"/>
+          <p:cNvSpPr/>
+          <p:nvPr/>
+        </p:nvSpPr>
+        <p:spPr>
+          <a:xfrm>
+            <a:off x="1097280" y="2140428"/>
+            <a:ext cx="474025" cy="474025"/>
           </a:xfrm>
           <a:prstGeom prst="roundRect">
             <a:avLst>
-              <a:gd name="adj" fmla="val 8000"/>
+              <a:gd name="adj" fmla="val 7716"/>
             </a:avLst>
           </a:prstGeom>
           <a:solidFill>
@@ -11712,7 +12150,7 @@
       </p:sp>
       <p:pic>
         <p:nvPicPr>
-          <p:cNvPr id="14" name="Image 3" descr="flow icon from tabler-icons (MIT)">    </p:cNvPr>
+          <p:cNvPr id="15" name="Image 3" descr="flow icon from tabler-icons (MIT)">    </p:cNvPr>
           <p:cNvPicPr>
             <a:picLocks noChangeAspect="1"/>
           </p:cNvPicPr>
@@ -11732,8 +12170,8 @@
         </p:blipFill>
         <p:spPr>
           <a:xfrm>
-            <a:off x="1170432" y="1696212"/>
-            <a:ext cx="310896" cy="310896"/>
+            <a:off x="1170432" y="2213580"/>
+            <a:ext cx="327721" cy="327721"/>
           </a:xfrm>
           <a:prstGeom prst="rect">
             <a:avLst/>
@@ -11742,14 +12180,14 @@
       </p:pic>
       <p:sp>
         <p:nvSpPr>
-          <p:cNvPr id="15" name="Text 9"/>
+          <p:cNvPr id="16" name="Text 10"/>
           <p:cNvSpPr txBox="1"/>
           <p:nvPr/>
         </p:nvSpPr>
         <p:spPr>
           <a:xfrm>
-            <a:off x="1682496" y="1508760"/>
-            <a:ext cx="9272016" cy="685800"/>
+            <a:off x="1699321" y="1957548"/>
+            <a:ext cx="9255191" cy="839785"/>
           </a:xfrm>
           <a:prstGeom prst="rect">
             <a:avLst/>
@@ -11801,18 +12239,18 @@
       </p:sp>
       <p:sp>
         <p:nvSpPr>
-          <p:cNvPr id="16" name="Shape 10"/>
-          <p:cNvSpPr/>
-          <p:nvPr/>
-        </p:nvSpPr>
-        <p:spPr>
-          <a:xfrm>
-            <a:off x="1097280" y="2766060"/>
-            <a:ext cx="457200" cy="457200"/>
+          <p:cNvPr id="17" name="Shape 11"/>
+          <p:cNvSpPr/>
+          <p:nvPr/>
+        </p:nvSpPr>
+        <p:spPr>
+          <a:xfrm>
+            <a:off x="1097280" y="3466308"/>
+            <a:ext cx="474025" cy="474025"/>
           </a:xfrm>
           <a:prstGeom prst="roundRect">
             <a:avLst>
-              <a:gd name="adj" fmla="val 8000"/>
+              <a:gd name="adj" fmla="val 7716"/>
             </a:avLst>
           </a:prstGeom>
           <a:solidFill>
@@ -11828,7 +12266,7 @@
       </p:sp>
       <p:pic>
         <p:nvPicPr>
-          <p:cNvPr id="17" name="Image 4" descr="verified icon from tabler-icons (MIT)">    </p:cNvPr>
+          <p:cNvPr id="18" name="Image 4" descr="verified icon from tabler-icons (MIT)">    </p:cNvPr>
           <p:cNvPicPr>
             <a:picLocks noChangeAspect="1"/>
           </p:cNvPicPr>
@@ -11848,8 +12286,8 @@
         </p:blipFill>
         <p:spPr>
           <a:xfrm>
-            <a:off x="1170432" y="2839212"/>
-            <a:ext cx="310896" cy="310896"/>
+            <a:off x="1170432" y="3539460"/>
+            <a:ext cx="327721" cy="327721"/>
           </a:xfrm>
           <a:prstGeom prst="rect">
             <a:avLst/>
@@ -11858,14 +12296,14 @@
       </p:pic>
       <p:sp>
         <p:nvSpPr>
-          <p:cNvPr id="18" name="Text 11"/>
+          <p:cNvPr id="19" name="Text 12"/>
           <p:cNvSpPr txBox="1"/>
           <p:nvPr/>
         </p:nvSpPr>
         <p:spPr>
           <a:xfrm>
-            <a:off x="1682496" y="2651760"/>
-            <a:ext cx="9272016" cy="685800"/>
+            <a:off x="1699321" y="3283428"/>
+            <a:ext cx="9255191" cy="839785"/>
           </a:xfrm>
           <a:prstGeom prst="rect">
             <a:avLst/>
@@ -11917,18 +12355,18 @@
       </p:sp>
       <p:sp>
         <p:nvSpPr>
-          <p:cNvPr id="19" name="Shape 12"/>
-          <p:cNvSpPr/>
-          <p:nvPr/>
-        </p:nvSpPr>
-        <p:spPr>
-          <a:xfrm>
-            <a:off x="1097280" y="3909060"/>
-            <a:ext cx="457200" cy="457200"/>
+          <p:cNvPr id="20" name="Shape 13"/>
+          <p:cNvSpPr/>
+          <p:nvPr/>
+        </p:nvSpPr>
+        <p:spPr>
+          <a:xfrm>
+            <a:off x="1097280" y="4783044"/>
+            <a:ext cx="474025" cy="474025"/>
           </a:xfrm>
           <a:prstGeom prst="roundRect">
             <a:avLst>
-              <a:gd name="adj" fmla="val 8000"/>
+              <a:gd name="adj" fmla="val 7716"/>
             </a:avLst>
           </a:prstGeom>
           <a:solidFill>
@@ -11944,7 +12382,7 @@
       </p:sp>
       <p:pic>
         <p:nvPicPr>
-          <p:cNvPr id="20" name="Image 5" descr="spark icon from tabler-icons (MIT)">    </p:cNvPr>
+          <p:cNvPr id="21" name="Image 5" descr="spark icon from tabler-icons (MIT)">    </p:cNvPr>
           <p:cNvPicPr>
             <a:picLocks noChangeAspect="1"/>
           </p:cNvPicPr>
@@ -11964,8 +12402,8 @@
         </p:blipFill>
         <p:spPr>
           <a:xfrm>
-            <a:off x="1170432" y="3982212"/>
-            <a:ext cx="310896" cy="310896"/>
+            <a:off x="1170432" y="4856196"/>
+            <a:ext cx="327721" cy="327721"/>
           </a:xfrm>
           <a:prstGeom prst="rect">
             <a:avLst/>
@@ -11974,14 +12412,14 @@
       </p:pic>
       <p:sp>
         <p:nvSpPr>
-          <p:cNvPr id="21" name="Text 13"/>
+          <p:cNvPr id="22" name="Text 14"/>
           <p:cNvSpPr txBox="1"/>
           <p:nvPr/>
         </p:nvSpPr>
         <p:spPr>
           <a:xfrm>
-            <a:off x="1682496" y="3794760"/>
-            <a:ext cx="9272016" cy="685800"/>
+            <a:off x="1699321" y="4600164"/>
+            <a:ext cx="9255191" cy="839785"/>
           </a:xfrm>
           <a:prstGeom prst="rect">
             <a:avLst/>
@@ -12371,8 +12809,37 @@
         </p:nvSpPr>
         <p:spPr>
           <a:xfrm>
-            <a:off x="914400" y="1417320"/>
-            <a:ext cx="73152" cy="868680"/>
+            <a:off x="786384" y="1956816"/>
+            <a:ext cx="32004" cy="3483864"/>
+          </a:xfrm>
+          <a:prstGeom prst="rect">
+            <a:avLst/>
+          </a:prstGeom>
+          <a:solidFill>
+            <a:srgbClr val="DBEAFE">
+              <a:alpha val="80000"/>
+            </a:srgbClr>
+          </a:solidFill>
+          <a:ln w="12700">
+            <a:solidFill>
+              <a:srgbClr val="DBEAFE">
+                <a:alpha val="0"/>
+              </a:srgbClr>
+            </a:solidFill>
+            <a:prstDash val="solid"/>
+          </a:ln>
+        </p:spPr>
+      </p:sp>
+      <p:sp>
+        <p:nvSpPr>
+          <p:cNvPr id="4" name="Shape 2"/>
+          <p:cNvSpPr/>
+          <p:nvPr/>
+        </p:nvSpPr>
+        <p:spPr>
+          <a:xfrm>
+            <a:off x="914400" y="1865376"/>
+            <a:ext cx="73152" cy="1024128"/>
           </a:xfrm>
           <a:prstGeom prst="rect">
             <a:avLst/>
@@ -12392,14 +12859,14 @@
       </p:sp>
       <p:sp>
         <p:nvSpPr>
-          <p:cNvPr id="4" name="Shape 2"/>
-          <p:cNvSpPr/>
-          <p:nvPr/>
-        </p:nvSpPr>
-        <p:spPr>
-          <a:xfrm>
-            <a:off x="914400" y="2560320"/>
-            <a:ext cx="73152" cy="868680"/>
+          <p:cNvPr id="5" name="Shape 3"/>
+          <p:cNvSpPr/>
+          <p:nvPr/>
+        </p:nvSpPr>
+        <p:spPr>
+          <a:xfrm>
+            <a:off x="914400" y="3191256"/>
+            <a:ext cx="73152" cy="1024128"/>
           </a:xfrm>
           <a:prstGeom prst="rect">
             <a:avLst/>
@@ -12419,14 +12886,14 @@
       </p:sp>
       <p:sp>
         <p:nvSpPr>
-          <p:cNvPr id="5" name="Shape 3"/>
-          <p:cNvSpPr/>
-          <p:nvPr/>
-        </p:nvSpPr>
-        <p:spPr>
-          <a:xfrm>
-            <a:off x="914400" y="3703320"/>
-            <a:ext cx="73152" cy="868680"/>
+          <p:cNvPr id="6" name="Shape 4"/>
+          <p:cNvSpPr/>
+          <p:nvPr/>
+        </p:nvSpPr>
+        <p:spPr>
+          <a:xfrm>
+            <a:off x="914400" y="4507992"/>
+            <a:ext cx="73152" cy="1024128"/>
           </a:xfrm>
           <a:prstGeom prst="rect">
             <a:avLst/>
@@ -12446,7 +12913,7 @@
       </p:sp>
       <p:pic>
         <p:nvPicPr>
-          <p:cNvPr id="6" name="Image 0" descr="preencoded.png">    </p:cNvPr>
+          <p:cNvPr id="7" name="Image 0" descr="preencoded.png">    </p:cNvPr>
           <p:cNvPicPr>
             <a:picLocks noChangeAspect="1"/>
           </p:cNvPicPr>
@@ -12466,8 +12933,8 @@
         </p:blipFill>
         <p:spPr>
           <a:xfrm>
-            <a:off x="914400" y="1417320"/>
-            <a:ext cx="10241280" cy="868680"/>
+            <a:off x="914400" y="1865376"/>
+            <a:ext cx="10241280" cy="1024128"/>
           </a:xfrm>
           <a:prstGeom prst="rect">
             <a:avLst/>
@@ -12476,14 +12943,14 @@
       </p:pic>
       <p:sp>
         <p:nvSpPr>
-          <p:cNvPr id="7" name="Shape 4"/>
-          <p:cNvSpPr/>
-          <p:nvPr/>
-        </p:nvSpPr>
-        <p:spPr>
-          <a:xfrm>
-            <a:off x="914400" y="1417320"/>
-            <a:ext cx="10241280" cy="868680"/>
+          <p:cNvPr id="8" name="Shape 5"/>
+          <p:cNvSpPr/>
+          <p:nvPr/>
+        </p:nvSpPr>
+        <p:spPr>
+          <a:xfrm>
+            <a:off x="914400" y="1865376"/>
+            <a:ext cx="10241280" cy="1024128"/>
           </a:xfrm>
           <a:prstGeom prst="rect">
             <a:avLst/>
@@ -12512,7 +12979,7 @@
       </p:sp>
       <p:pic>
         <p:nvPicPr>
-          <p:cNvPr id="8" name="Image 1" descr="preencoded.png">    </p:cNvPr>
+          <p:cNvPr id="9" name="Image 1" descr="preencoded.png">    </p:cNvPr>
           <p:cNvPicPr>
             <a:picLocks noChangeAspect="1"/>
           </p:cNvPicPr>
@@ -12532,8 +12999,8 @@
         </p:blipFill>
         <p:spPr>
           <a:xfrm>
-            <a:off x="914400" y="2560320"/>
-            <a:ext cx="10241280" cy="868680"/>
+            <a:off x="914400" y="3191256"/>
+            <a:ext cx="10241280" cy="1024128"/>
           </a:xfrm>
           <a:prstGeom prst="rect">
             <a:avLst/>
@@ -12542,14 +13009,14 @@
       </p:pic>
       <p:sp>
         <p:nvSpPr>
-          <p:cNvPr id="9" name="Shape 5"/>
-          <p:cNvSpPr/>
-          <p:nvPr/>
-        </p:nvSpPr>
-        <p:spPr>
-          <a:xfrm>
-            <a:off x="914400" y="2560320"/>
-            <a:ext cx="10241280" cy="868680"/>
+          <p:cNvPr id="10" name="Shape 6"/>
+          <p:cNvSpPr/>
+          <p:nvPr/>
+        </p:nvSpPr>
+        <p:spPr>
+          <a:xfrm>
+            <a:off x="914400" y="3191256"/>
+            <a:ext cx="10241280" cy="1024128"/>
           </a:xfrm>
           <a:prstGeom prst="rect">
             <a:avLst/>
@@ -12578,7 +13045,7 @@
       </p:sp>
       <p:pic>
         <p:nvPicPr>
-          <p:cNvPr id="10" name="Image 2" descr="preencoded.png">    </p:cNvPr>
+          <p:cNvPr id="11" name="Image 2" descr="preencoded.png">    </p:cNvPr>
           <p:cNvPicPr>
             <a:picLocks noChangeAspect="1"/>
           </p:cNvPicPr>
@@ -12598,8 +13065,8 @@
         </p:blipFill>
         <p:spPr>
           <a:xfrm>
-            <a:off x="914400" y="3703320"/>
-            <a:ext cx="10241280" cy="868680"/>
+            <a:off x="914400" y="4507992"/>
+            <a:ext cx="10241280" cy="1024128"/>
           </a:xfrm>
           <a:prstGeom prst="rect">
             <a:avLst/>
@@ -12608,14 +13075,14 @@
       </p:pic>
       <p:sp>
         <p:nvSpPr>
-          <p:cNvPr id="11" name="Shape 6"/>
-          <p:cNvSpPr/>
-          <p:nvPr/>
-        </p:nvSpPr>
-        <p:spPr>
-          <a:xfrm>
-            <a:off x="914400" y="3703320"/>
-            <a:ext cx="10241280" cy="868680"/>
+          <p:cNvPr id="12" name="Shape 7"/>
+          <p:cNvSpPr/>
+          <p:nvPr/>
+        </p:nvSpPr>
+        <p:spPr>
+          <a:xfrm>
+            <a:off x="914400" y="4507992"/>
+            <a:ext cx="10241280" cy="1024128"/>
           </a:xfrm>
           <a:prstGeom prst="rect">
             <a:avLst/>
@@ -12644,7 +13111,7 @@
       </p:sp>
       <p:sp>
         <p:nvSpPr>
-          <p:cNvPr id="12" name="Text 7"/>
+          <p:cNvPr id="13" name="Text 8"/>
           <p:cNvSpPr txBox="1"/>
           <p:nvPr/>
         </p:nvSpPr>
@@ -12686,18 +13153,18 @@
       </p:sp>
       <p:sp>
         <p:nvSpPr>
-          <p:cNvPr id="13" name="Shape 8"/>
-          <p:cNvSpPr/>
-          <p:nvPr/>
-        </p:nvSpPr>
-        <p:spPr>
-          <a:xfrm>
-            <a:off x="1097280" y="1623060"/>
-            <a:ext cx="457200" cy="457200"/>
+          <p:cNvPr id="14" name="Shape 9"/>
+          <p:cNvSpPr/>
+          <p:nvPr/>
+        </p:nvSpPr>
+        <p:spPr>
+          <a:xfrm>
+            <a:off x="1097280" y="2140428"/>
+            <a:ext cx="474025" cy="474025"/>
           </a:xfrm>
           <a:prstGeom prst="roundRect">
             <a:avLst>
-              <a:gd name="adj" fmla="val 8000"/>
+              <a:gd name="adj" fmla="val 7716"/>
             </a:avLst>
           </a:prstGeom>
           <a:solidFill>
@@ -12713,7 +13180,7 @@
       </p:sp>
       <p:pic>
         <p:nvPicPr>
-          <p:cNvPr id="14" name="Image 3" descr="flow icon from tabler-icons (MIT)">    </p:cNvPr>
+          <p:cNvPr id="15" name="Image 3" descr="flow icon from tabler-icons (MIT)">    </p:cNvPr>
           <p:cNvPicPr>
             <a:picLocks noChangeAspect="1"/>
           </p:cNvPicPr>
@@ -12733,8 +13200,8 @@
         </p:blipFill>
         <p:spPr>
           <a:xfrm>
-            <a:off x="1170432" y="1696212"/>
-            <a:ext cx="310896" cy="310896"/>
+            <a:off x="1170432" y="2213580"/>
+            <a:ext cx="327721" cy="327721"/>
           </a:xfrm>
           <a:prstGeom prst="rect">
             <a:avLst/>
@@ -12743,14 +13210,14 @@
       </p:pic>
       <p:sp>
         <p:nvSpPr>
-          <p:cNvPr id="15" name="Text 9"/>
+          <p:cNvPr id="16" name="Text 10"/>
           <p:cNvSpPr txBox="1"/>
           <p:nvPr/>
         </p:nvSpPr>
         <p:spPr>
           <a:xfrm>
-            <a:off x="1682496" y="1508760"/>
-            <a:ext cx="9272016" cy="685800"/>
+            <a:off x="1699321" y="1957548"/>
+            <a:ext cx="9255191" cy="839785"/>
           </a:xfrm>
           <a:prstGeom prst="rect">
             <a:avLst/>
@@ -12777,7 +13244,7 @@
                 <a:ea typeface="Pretendard" pitchFamily="34" charset="-122"/>
                 <a:cs typeface="Pretendard" pitchFamily="34" charset="-120"/>
               </a:rPr>
-              <a:t>Plain / clean</a:t>
+              <a:t>Clean / minimalism</a:t>
             </a:r>
             <a:pPr algn="l" indent="0" marL="0">
               <a:lnSpc>
@@ -12794,7 +13261,7 @@
                 <a:ea typeface="Pretendard" pitchFamily="34" charset="-122"/>
                 <a:cs typeface="Pretendard" pitchFamily="34" charset="-120"/>
               </a:rPr>
-              <a:t>  low-decoration baselines.</a:t>
+              <a:t>  restrained structural baselines.</a:t>
             </a:r>
             <a:endParaRPr lang="en-US" sz="2200" dirty="0"/>
           </a:p>
@@ -12802,18 +13269,18 @@
       </p:sp>
       <p:sp>
         <p:nvSpPr>
-          <p:cNvPr id="16" name="Shape 10"/>
-          <p:cNvSpPr/>
-          <p:nvPr/>
-        </p:nvSpPr>
-        <p:spPr>
-          <a:xfrm>
-            <a:off x="1097280" y="2766060"/>
-            <a:ext cx="457200" cy="457200"/>
+          <p:cNvPr id="17" name="Shape 11"/>
+          <p:cNvSpPr/>
+          <p:nvPr/>
+        </p:nvSpPr>
+        <p:spPr>
+          <a:xfrm>
+            <a:off x="1097280" y="3466308"/>
+            <a:ext cx="474025" cy="474025"/>
           </a:xfrm>
           <a:prstGeom prst="roundRect">
             <a:avLst>
-              <a:gd name="adj" fmla="val 8000"/>
+              <a:gd name="adj" fmla="val 7716"/>
             </a:avLst>
           </a:prstGeom>
           <a:solidFill>
@@ -12829,7 +13296,7 @@
       </p:sp>
       <p:pic>
         <p:nvPicPr>
-          <p:cNvPr id="17" name="Image 4" descr="verified icon from tabler-icons (MIT)">    </p:cNvPr>
+          <p:cNvPr id="18" name="Image 4" descr="verified icon from tabler-icons (MIT)">    </p:cNvPr>
           <p:cNvPicPr>
             <a:picLocks noChangeAspect="1"/>
           </p:cNvPicPr>
@@ -12849,8 +13316,8 @@
         </p:blipFill>
         <p:spPr>
           <a:xfrm>
-            <a:off x="1170432" y="2839212"/>
-            <a:ext cx="310896" cy="310896"/>
+            <a:off x="1170432" y="3539460"/>
+            <a:ext cx="327721" cy="327721"/>
           </a:xfrm>
           <a:prstGeom prst="rect">
             <a:avLst/>
@@ -12859,14 +13326,14 @@
       </p:pic>
       <p:sp>
         <p:nvSpPr>
-          <p:cNvPr id="18" name="Text 11"/>
+          <p:cNvPr id="19" name="Text 12"/>
           <p:cNvSpPr txBox="1"/>
           <p:nvPr/>
         </p:nvSpPr>
         <p:spPr>
           <a:xfrm>
-            <a:off x="1682496" y="2651760"/>
-            <a:ext cx="9272016" cy="685800"/>
+            <a:off x="1699321" y="3283428"/>
+            <a:ext cx="9255191" cy="839785"/>
           </a:xfrm>
           <a:prstGeom prst="rect">
             <a:avLst/>
@@ -12918,18 +13385,18 @@
       </p:sp>
       <p:sp>
         <p:nvSpPr>
-          <p:cNvPr id="19" name="Shape 12"/>
-          <p:cNvSpPr/>
-          <p:nvPr/>
-        </p:nvSpPr>
-        <p:spPr>
-          <a:xfrm>
-            <a:off x="1097280" y="3909060"/>
-            <a:ext cx="457200" cy="457200"/>
+          <p:cNvPr id="20" name="Shape 13"/>
+          <p:cNvSpPr/>
+          <p:nvPr/>
+        </p:nvSpPr>
+        <p:spPr>
+          <a:xfrm>
+            <a:off x="1097280" y="4783044"/>
+            <a:ext cx="474025" cy="474025"/>
           </a:xfrm>
           <a:prstGeom prst="roundRect">
             <a:avLst>
-              <a:gd name="adj" fmla="val 8000"/>
+              <a:gd name="adj" fmla="val 7716"/>
             </a:avLst>
           </a:prstGeom>
           <a:solidFill>
@@ -12945,7 +13412,7 @@
       </p:sp>
       <p:pic>
         <p:nvPicPr>
-          <p:cNvPr id="20" name="Image 5" descr="spark icon from tabler-icons (MIT)">    </p:cNvPr>
+          <p:cNvPr id="21" name="Image 5" descr="spark icon from tabler-icons (MIT)">    </p:cNvPr>
           <p:cNvPicPr>
             <a:picLocks noChangeAspect="1"/>
           </p:cNvPicPr>
@@ -12965,8 +13432,8 @@
         </p:blipFill>
         <p:spPr>
           <a:xfrm>
-            <a:off x="1170432" y="3982212"/>
-            <a:ext cx="310896" cy="310896"/>
+            <a:off x="1170432" y="4856196"/>
+            <a:ext cx="327721" cy="327721"/>
           </a:xfrm>
           <a:prstGeom prst="rect">
             <a:avLst/>
@@ -12975,14 +13442,14 @@
       </p:pic>
       <p:sp>
         <p:nvSpPr>
-          <p:cNvPr id="21" name="Text 13"/>
+          <p:cNvPr id="22" name="Text 14"/>
           <p:cNvSpPr txBox="1"/>
           <p:nvPr/>
         </p:nvSpPr>
         <p:spPr>
           <a:xfrm>
-            <a:off x="1682496" y="3794760"/>
-            <a:ext cx="9272016" cy="685800"/>
+            <a:off x="1699321" y="4600164"/>
+            <a:ext cx="9255191" cy="839785"/>
           </a:xfrm>
           <a:prstGeom prst="rect">
             <a:avLst/>

--- a/docs/theme-preview/pptx/clean.pptx
+++ b/docs/theme-preview/pptx/clean.pptx
@@ -8167,7 +8167,7 @@
       </p:sp>
       <p:pic>
         <p:nvPicPr>
-          <p:cNvPr id="17" name="Image 4" descr="flow icon from tabler-icons (MIT)">    </p:cNvPr>
+          <p:cNvPr id="17" name="Image 4" descr="article icon from tabler-icons (MIT)">    </p:cNvPr>
           <p:cNvPicPr>
             <a:picLocks noChangeAspect="1"/>
           </p:cNvPicPr>
@@ -8283,7 +8283,7 @@
       </p:sp>
       <p:pic>
         <p:nvPicPr>
-          <p:cNvPr id="20" name="Image 5" descr="verified icon from tabler-icons (MIT)">    </p:cNvPr>
+          <p:cNvPr id="20" name="Image 5" descr="article icon from tabler-icons (MIT)">    </p:cNvPr>
           <p:cNvPicPr>
             <a:picLocks noChangeAspect="1"/>
           </p:cNvPicPr>
@@ -8399,7 +8399,7 @@
       </p:sp>
       <p:pic>
         <p:nvPicPr>
-          <p:cNvPr id="23" name="Image 6" descr="spark icon from tabler-icons (MIT)">    </p:cNvPr>
+          <p:cNvPr id="23" name="Image 6" descr="article icon from tabler-icons (MIT)">    </p:cNvPr>
           <p:cNvPicPr>
             <a:picLocks noChangeAspect="1"/>
           </p:cNvPicPr>
@@ -8515,7 +8515,7 @@
       </p:sp>
       <p:pic>
         <p:nvPicPr>
-          <p:cNvPr id="26" name="Image 7" descr="chart icon from tabler-icons (MIT)">    </p:cNvPr>
+          <p:cNvPr id="26" name="Image 7" descr="table icon from tabler-icons (MIT)">    </p:cNvPr>
           <p:cNvPicPr>
             <a:picLocks noChangeAspect="1"/>
           </p:cNvPicPr>
@@ -9104,7 +9104,7 @@
       </p:sp>
       <p:pic>
         <p:nvPicPr>
-          <p:cNvPr id="17" name="Image 4" descr="flow icon from tabler-icons (MIT)">    </p:cNvPr>
+          <p:cNvPr id="17" name="Image 4" descr="verified icon from tabler-icons (MIT)">    </p:cNvPr>
           <p:cNvPicPr>
             <a:picLocks noChangeAspect="1"/>
           </p:cNvPicPr>
@@ -9220,7 +9220,7 @@
       </p:sp>
       <p:pic>
         <p:nvPicPr>
-          <p:cNvPr id="20" name="Image 5" descr="verified icon from tabler-icons (MIT)">    </p:cNvPr>
+          <p:cNvPr id="20" name="Image 5" descr="table icon from tabler-icons (MIT)">    </p:cNvPr>
           <p:cNvPicPr>
             <a:picLocks noChangeAspect="1"/>
           </p:cNvPicPr>
@@ -9336,7 +9336,7 @@
       </p:sp>
       <p:pic>
         <p:nvPicPr>
-          <p:cNvPr id="23" name="Image 6" descr="spark icon from tabler-icons (MIT)">    </p:cNvPr>
+          <p:cNvPr id="23" name="Image 6" descr="article icon from tabler-icons (MIT)">    </p:cNvPr>
           <p:cNvPicPr>
             <a:picLocks noChangeAspect="1"/>
           </p:cNvPicPr>
@@ -9452,7 +9452,7 @@
       </p:sp>
       <p:pic>
         <p:nvPicPr>
-          <p:cNvPr id="26" name="Image 7" descr="chart icon from tabler-icons (MIT)">    </p:cNvPr>
+          <p:cNvPr id="26" name="Image 7" descr="article icon from tabler-icons (MIT)">    </p:cNvPr>
           <p:cNvPicPr>
             <a:picLocks noChangeAspect="1"/>
           </p:cNvPicPr>
@@ -12150,7 +12150,7 @@
       </p:sp>
       <p:pic>
         <p:nvPicPr>
-          <p:cNvPr id="15" name="Image 3" descr="flow icon from tabler-icons (MIT)">    </p:cNvPr>
+          <p:cNvPr id="15" name="Image 3" descr="article icon from tabler-icons (MIT)">    </p:cNvPr>
           <p:cNvPicPr>
             <a:picLocks noChangeAspect="1"/>
           </p:cNvPicPr>
@@ -12266,7 +12266,7 @@
       </p:sp>
       <p:pic>
         <p:nvPicPr>
-          <p:cNvPr id="18" name="Image 4" descr="verified icon from tabler-icons (MIT)">    </p:cNvPr>
+          <p:cNvPr id="18" name="Image 4" descr="chart icon from tabler-icons (MIT)">    </p:cNvPr>
           <p:cNvPicPr>
             <a:picLocks noChangeAspect="1"/>
           </p:cNvPicPr>
@@ -12382,7 +12382,7 @@
       </p:sp>
       <p:pic>
         <p:nvPicPr>
-          <p:cNvPr id="21" name="Image 5" descr="spark icon from tabler-icons (MIT)">    </p:cNvPr>
+          <p:cNvPr id="21" name="Image 5" descr="article icon from tabler-icons (MIT)">    </p:cNvPr>
           <p:cNvPicPr>
             <a:picLocks noChangeAspect="1"/>
           </p:cNvPicPr>
@@ -13180,7 +13180,7 @@
       </p:sp>
       <p:pic>
         <p:nvPicPr>
-          <p:cNvPr id="15" name="Image 3" descr="flow icon from tabler-icons (MIT)">    </p:cNvPr>
+          <p:cNvPr id="15" name="Image 3" descr="article icon from tabler-icons (MIT)">    </p:cNvPr>
           <p:cNvPicPr>
             <a:picLocks noChangeAspect="1"/>
           </p:cNvPicPr>
@@ -13296,7 +13296,7 @@
       </p:sp>
       <p:pic>
         <p:nvPicPr>
-          <p:cNvPr id="18" name="Image 4" descr="verified icon from tabler-icons (MIT)">    </p:cNvPr>
+          <p:cNvPr id="18" name="Image 4" descr="article icon from tabler-icons (MIT)">    </p:cNvPr>
           <p:cNvPicPr>
             <a:picLocks noChangeAspect="1"/>
           </p:cNvPicPr>
@@ -13412,7 +13412,7 @@
       </p:sp>
       <p:pic>
         <p:nvPicPr>
-          <p:cNvPr id="21" name="Image 5" descr="spark icon from tabler-icons (MIT)">    </p:cNvPr>
+          <p:cNvPr id="21" name="Image 5" descr="article icon from tabler-icons (MIT)">    </p:cNvPr>
           <p:cNvPicPr>
             <a:picLocks noChangeAspect="1"/>
           </p:cNvPicPr>
@@ -14274,7 +14274,7 @@
       </p:sp>
       <p:pic>
         <p:nvPicPr>
-          <p:cNvPr id="17" name="Image 4" descr="flow icon from tabler-icons (MIT)">    </p:cNvPr>
+          <p:cNvPr id="17" name="Image 4" descr="table icon from tabler-icons (MIT)">    </p:cNvPr>
           <p:cNvPicPr>
             <a:picLocks noChangeAspect="1"/>
           </p:cNvPicPr>
@@ -14390,7 +14390,7 @@
       </p:sp>
       <p:pic>
         <p:nvPicPr>
-          <p:cNvPr id="20" name="Image 5" descr="verified icon from tabler-icons (MIT)">    </p:cNvPr>
+          <p:cNvPr id="20" name="Image 5" descr="article icon from tabler-icons (MIT)">    </p:cNvPr>
           <p:cNvPicPr>
             <a:picLocks noChangeAspect="1"/>
           </p:cNvPicPr>
@@ -14506,7 +14506,7 @@
       </p:sp>
       <p:pic>
         <p:nvPicPr>
-          <p:cNvPr id="23" name="Image 6" descr="spark icon from tabler-icons (MIT)">    </p:cNvPr>
+          <p:cNvPr id="23" name="Image 6" descr="article icon from tabler-icons (MIT)">    </p:cNvPr>
           <p:cNvPicPr>
             <a:picLocks noChangeAspect="1"/>
           </p:cNvPicPr>
@@ -14622,7 +14622,7 @@
       </p:sp>
       <p:pic>
         <p:nvPicPr>
-          <p:cNvPr id="26" name="Image 7" descr="chart icon from tabler-icons (MIT)">    </p:cNvPr>
+          <p:cNvPr id="26" name="Image 7" descr="table icon from tabler-icons (MIT)">    </p:cNvPr>
           <p:cNvPicPr>
             <a:picLocks noChangeAspect="1"/>
           </p:cNvPicPr>

--- a/docs/theme-preview/pptx/clean.pptx
+++ b/docs/theme-preview/pptx/clean.pptx
@@ -10798,7 +10798,7 @@
                 <a:ea typeface="Pretendard" pitchFamily="34" charset="-122"/>
                 <a:cs typeface="Pretendard" pitchFamily="34" charset="-120"/>
               </a:rPr>
-              <a:t>목차</a:t>
+              <a:t>Agenda</a:t>
             </a:r>
             <a:endParaRPr lang="en-US" sz="3800" dirty="0"/>
           </a:p>

--- a/docs/theme-preview/pptx/clean.pptx
+++ b/docs/theme-preview/pptx/clean.pptx
@@ -3004,36 +3004,75 @@
           </a:ln>
         </p:spPr>
       </p:sp>
-      <p:sp>
-        <p:nvSpPr>
-          <p:cNvPr id="3" name="Shape 1"/>
-          <p:cNvSpPr/>
-          <p:nvPr/>
-        </p:nvSpPr>
-        <p:spPr>
-          <a:xfrm>
-            <a:off x="914400" y="1463040"/>
-            <a:ext cx="10241280" cy="73152"/>
-          </a:xfrm>
-          <a:prstGeom prst="rect">
-            <a:avLst/>
-          </a:prstGeom>
-          <a:solidFill>
-            <a:srgbClr val="2563EB"/>
-          </a:solidFill>
-          <a:ln w="12700">
-            <a:solidFill>
-              <a:srgbClr val="2563EB">
+      <p:pic>
+        <p:nvPicPr>
+          <p:cNvPr id="3" name="Image 0" descr="preencoded.png">    </p:cNvPr>
+          <p:cNvPicPr>
+            <a:picLocks noChangeAspect="1"/>
+          </p:cNvPicPr>
+          <p:nvPr/>
+        </p:nvPicPr>
+        <p:blipFill>
+          <a:blip r:embed="rId1">
+            <a:extLst>
+              <a:ext uri="{96DAC541-7B7A-43D3-8B79-37D633B846F1}">
+                <asvg:svgBlip xmlns:asvg="http://schemas.microsoft.com/office/drawing/2016/SVG/main" r:embed="rId2"/>
+              </a:ext>
+            </a:extLst>
+          </a:blip>
+          <a:stretch>
+            <a:fillRect/>
+          </a:stretch>
+        </p:blipFill>
+        <p:spPr>
+          <a:xfrm>
+            <a:off x="914400" y="1417320"/>
+            <a:ext cx="10241280" cy="4526280"/>
+          </a:xfrm>
+          <a:prstGeom prst="rect">
+            <a:avLst/>
+          </a:prstGeom>
+        </p:spPr>
+      </p:pic>
+      <p:sp>
+        <p:nvSpPr>
+          <p:cNvPr id="4" name="Shape 1"/>
+          <p:cNvSpPr/>
+          <p:nvPr/>
+        </p:nvSpPr>
+        <p:spPr>
+          <a:xfrm>
+            <a:off x="914400" y="1417320"/>
+            <a:ext cx="10241280" cy="4526280"/>
+          </a:xfrm>
+          <a:prstGeom prst="rect">
+            <a:avLst/>
+          </a:prstGeom>
+          <a:solidFill>
+            <a:srgbClr val="FFFFFF">
+              <a:alpha val="0"/>
+            </a:srgbClr>
+          </a:solidFill>
+          <a:ln w="12700">
+            <a:solidFill>
+              <a:srgbClr val="E2E8F0">
                 <a:alpha val="0"/>
               </a:srgbClr>
             </a:solidFill>
             <a:prstDash val="solid"/>
           </a:ln>
-        </p:spPr>
-      </p:sp>
-      <p:sp>
-        <p:nvSpPr>
-          <p:cNvPr id="4" name="Text 2"/>
+          <a:effectLst>
+            <a:outerShdw sx="100000" sy="100000" kx="0" ky="0" algn="bl" rotWithShape="0" blurRad="12700" dist="50800" dir="2700000">
+              <a:srgbClr val="000000">
+                <a:alpha val="8000"/>
+              </a:srgbClr>
+            </a:outerShdw>
+          </a:effectLst>
+        </p:spPr>
+      </p:sp>
+      <p:sp>
+        <p:nvSpPr>
+          <p:cNvPr id="5" name="Text 2"/>
           <p:cNvSpPr txBox="1"/>
           <p:nvPr/>
         </p:nvSpPr>
@@ -3088,8 +3127,8 @@
           </p:nvPr>
         </p:nvGraphicFramePr>
         <p:xfrm>
-          <a:off x="914400" y="1463040"/>
-          <a:ext cx="10241280" cy="4480560"/>
+          <a:off x="914400" y="1417320"/>
+          <a:ext cx="10241280" cy="4526280"/>
         </p:xfrm>
         <a:graphic>
           <a:graphicData uri="http://schemas.openxmlformats.org/drawingml/2006/table">
@@ -3100,7 +3139,7 @@
                 <a:gridCol w="3413760"/>
                 <a:gridCol w="3413760"/>
               </a:tblGrid>
-              <a:tr h="896112">
+              <a:tr h="905256">
                 <a:tc>
                   <a:txBody>
                     <a:bodyPr/>
@@ -3110,7 +3149,7 @@
                         <a:buNone/>
                       </a:pPr>
                       <a:r>
-                        <a:rPr lang="en-US" sz="2200" b="1" dirty="0">
+                        <a:rPr lang="en-US" sz="1800" b="1" dirty="0">
                           <a:solidFill>
                             <a:srgbClr val="FFFFFF"/>
                           </a:solidFill>
@@ -3120,7 +3159,7 @@
                         </a:rPr>
                         <a:t>Object</a:t>
                       </a:r>
-                      <a:endParaRPr lang="en-US" sz="2200" dirty="0">
+                      <a:endParaRPr lang="en-US" sz="1800" dirty="0">
                         <a:latin typeface="Pretendard" charset="0"/>
                         <a:ea typeface="Pretendard" charset="0"/>
                         <a:cs typeface="Pretendard" charset="0"/>
@@ -3178,7 +3217,7 @@
                         <a:buNone/>
                       </a:pPr>
                       <a:r>
-                        <a:rPr lang="en-US" sz="2200" b="1" dirty="0">
+                        <a:rPr lang="en-US" sz="1800" b="1" dirty="0">
                           <a:solidFill>
                             <a:srgbClr val="FFFFFF"/>
                           </a:solidFill>
@@ -3188,7 +3227,7 @@
                         </a:rPr>
                         <a:t>Renderer expectation</a:t>
                       </a:r>
-                      <a:endParaRPr lang="en-US" sz="2200" dirty="0">
+                      <a:endParaRPr lang="en-US" sz="1800" dirty="0">
                         <a:latin typeface="Pretendard" charset="0"/>
                         <a:ea typeface="Pretendard" charset="0"/>
                         <a:cs typeface="Pretendard" charset="0"/>
@@ -3246,7 +3285,7 @@
                         <a:buNone/>
                       </a:pPr>
                       <a:r>
-                        <a:rPr lang="en-US" sz="2200" b="1" dirty="0">
+                        <a:rPr lang="en-US" sz="1800" b="1" dirty="0">
                           <a:solidFill>
                             <a:srgbClr val="FFFFFF"/>
                           </a:solidFill>
@@ -3256,7 +3295,7 @@
                         </a:rPr>
                         <a:t>QA signal</a:t>
                       </a:r>
-                      <a:endParaRPr lang="en-US" sz="2200" dirty="0">
+                      <a:endParaRPr lang="en-US" sz="1800" dirty="0">
                         <a:latin typeface="Pretendard" charset="0"/>
                         <a:ea typeface="Pretendard" charset="0"/>
                         <a:cs typeface="Pretendard" charset="0"/>
@@ -3306,7 +3345,7 @@
                   </a:tcPr>
                 </a:tc>
               </a:tr>
-              <a:tr h="896112">
+              <a:tr h="905256">
                 <a:tc>
                   <a:txBody>
                     <a:bodyPr/>
@@ -3316,7 +3355,7 @@
                         <a:buNone/>
                       </a:pPr>
                       <a:r>
-                        <a:rPr lang="en-US" sz="2200" b="1" dirty="0">
+                        <a:rPr lang="en-US" sz="1800" b="1" dirty="0">
                           <a:solidFill>
                             <a:srgbClr val="111827"/>
                           </a:solidFill>
@@ -3326,7 +3365,7 @@
                         </a:rPr>
                         <a:t>Text box</a:t>
                       </a:r>
-                      <a:endParaRPr lang="en-US" sz="2200" dirty="0">
+                      <a:endParaRPr lang="en-US" sz="1800" dirty="0">
                         <a:latin typeface="Pretendard" charset="0"/>
                         <a:ea typeface="Pretendard" charset="0"/>
                         <a:cs typeface="Pretendard" charset="0"/>
@@ -3381,7 +3420,7 @@
                         <a:buNone/>
                       </a:pPr>
                       <a:r>
-                        <a:rPr lang="en-US" sz="2200" dirty="0">
+                        <a:rPr lang="en-US" sz="1800" dirty="0">
                           <a:solidFill>
                             <a:srgbClr val="111827"/>
                           </a:solidFill>
@@ -3391,7 +3430,7 @@
                         </a:rPr>
                         <a:t>editable, middle aligned</a:t>
                       </a:r>
-                      <a:endParaRPr lang="en-US" sz="2200" dirty="0">
+                      <a:endParaRPr lang="en-US" sz="1800" dirty="0">
                         <a:latin typeface="Pretendard" charset="0"/>
                         <a:ea typeface="Pretendard" charset="0"/>
                         <a:cs typeface="Pretendard" charset="0"/>
@@ -3446,7 +3485,7 @@
                         <a:buNone/>
                       </a:pPr>
                       <a:r>
-                        <a:rPr lang="en-US" sz="2200" dirty="0">
+                        <a:rPr lang="en-US" sz="1800" dirty="0">
                           <a:solidFill>
                             <a:srgbClr val="111827"/>
                           </a:solidFill>
@@ -3456,7 +3495,7 @@
                         </a:rPr>
                         <a:t>readable minimum size</a:t>
                       </a:r>
-                      <a:endParaRPr lang="en-US" sz="2200" dirty="0">
+                      <a:endParaRPr lang="en-US" sz="1800" dirty="0">
                         <a:latin typeface="Pretendard" charset="0"/>
                         <a:ea typeface="Pretendard" charset="0"/>
                         <a:cs typeface="Pretendard" charset="0"/>
@@ -3503,7 +3542,7 @@
                   </a:tcPr>
                 </a:tc>
               </a:tr>
-              <a:tr h="896112">
+              <a:tr h="905256">
                 <a:tc>
                   <a:txBody>
                     <a:bodyPr/>
@@ -3513,7 +3552,7 @@
                         <a:buNone/>
                       </a:pPr>
                       <a:r>
-                        <a:rPr lang="en-US" sz="2200" b="1" dirty="0">
+                        <a:rPr lang="en-US" sz="1800" b="1" dirty="0">
                           <a:solidFill>
                             <a:srgbClr val="111827"/>
                           </a:solidFill>
@@ -3523,7 +3562,7 @@
                         </a:rPr>
                         <a:t>Table</a:t>
                       </a:r>
-                      <a:endParaRPr lang="en-US" sz="2200" dirty="0">
+                      <a:endParaRPr lang="en-US" sz="1800" dirty="0">
                         <a:latin typeface="Pretendard" charset="0"/>
                         <a:ea typeface="Pretendard" charset="0"/>
                         <a:cs typeface="Pretendard" charset="0"/>
@@ -3583,7 +3622,7 @@
                         <a:buNone/>
                       </a:pPr>
                       <a:r>
-                        <a:rPr lang="en-US" sz="2200" dirty="0">
+                        <a:rPr lang="en-US" sz="1800" dirty="0">
                           <a:solidFill>
                             <a:srgbClr val="111827"/>
                           </a:solidFill>
@@ -3593,7 +3632,7 @@
                         </a:rPr>
                         <a:t>native table object</a:t>
                       </a:r>
-                      <a:endParaRPr lang="en-US" sz="2200" dirty="0">
+                      <a:endParaRPr lang="en-US" sz="1800" dirty="0">
                         <a:latin typeface="Pretendard" charset="0"/>
                         <a:ea typeface="Pretendard" charset="0"/>
                         <a:cs typeface="Pretendard" charset="0"/>
@@ -3653,7 +3692,7 @@
                         <a:buNone/>
                       </a:pPr>
                       <a:r>
-                        <a:rPr lang="en-US" sz="2200" dirty="0">
+                        <a:rPr lang="en-US" sz="1800" dirty="0">
                           <a:solidFill>
                             <a:srgbClr val="111827"/>
                           </a:solidFill>
@@ -3663,7 +3702,7 @@
                         </a:rPr>
                         <a:t>header fill and cell padding</a:t>
                       </a:r>
-                      <a:endParaRPr lang="en-US" sz="2200" dirty="0">
+                      <a:endParaRPr lang="en-US" sz="1800" dirty="0">
                         <a:latin typeface="Pretendard" charset="0"/>
                         <a:ea typeface="Pretendard" charset="0"/>
                         <a:cs typeface="Pretendard" charset="0"/>
@@ -3715,7 +3754,7 @@
                   </a:tcPr>
                 </a:tc>
               </a:tr>
-              <a:tr h="896112">
+              <a:tr h="905256">
                 <a:tc>
                   <a:txBody>
                     <a:bodyPr/>
@@ -3725,7 +3764,7 @@
                         <a:buNone/>
                       </a:pPr>
                       <a:r>
-                        <a:rPr lang="en-US" sz="2200" b="1" dirty="0">
+                        <a:rPr lang="en-US" sz="1800" b="1" dirty="0">
                           <a:solidFill>
                             <a:srgbClr val="111827"/>
                           </a:solidFill>
@@ -3735,7 +3774,7 @@
                         </a:rPr>
                         <a:t>Diagram</a:t>
                       </a:r>
-                      <a:endParaRPr lang="en-US" sz="2200" dirty="0">
+                      <a:endParaRPr lang="en-US" sz="1800" dirty="0">
                         <a:latin typeface="Pretendard" charset="0"/>
                         <a:ea typeface="Pretendard" charset="0"/>
                         <a:cs typeface="Pretendard" charset="0"/>
@@ -3790,7 +3829,7 @@
                         <a:buNone/>
                       </a:pPr>
                       <a:r>
-                        <a:rPr lang="en-US" sz="2200" dirty="0">
+                        <a:rPr lang="en-US" sz="1800" dirty="0">
                           <a:solidFill>
                             <a:srgbClr val="111827"/>
                           </a:solidFill>
@@ -3800,7 +3839,7 @@
                         </a:rPr>
                         <a:t>nodes and connectors</a:t>
                       </a:r>
-                      <a:endParaRPr lang="en-US" sz="2200" dirty="0">
+                      <a:endParaRPr lang="en-US" sz="1800" dirty="0">
                         <a:latin typeface="Pretendard" charset="0"/>
                         <a:ea typeface="Pretendard" charset="0"/>
                         <a:cs typeface="Pretendard" charset="0"/>
@@ -3855,7 +3894,7 @@
                         <a:buNone/>
                       </a:pPr>
                       <a:r>
-                        <a:rPr lang="en-US" sz="2200" dirty="0">
+                        <a:rPr lang="en-US" sz="1800" dirty="0">
                           <a:solidFill>
                             <a:srgbClr val="111827"/>
                           </a:solidFill>
@@ -3865,7 +3904,7 @@
                         </a:rPr>
                         <a:t>no clipped labels</a:t>
                       </a:r>
-                      <a:endParaRPr lang="en-US" sz="2200" dirty="0">
+                      <a:endParaRPr lang="en-US" sz="1800" dirty="0">
                         <a:latin typeface="Pretendard" charset="0"/>
                         <a:ea typeface="Pretendard" charset="0"/>
                         <a:cs typeface="Pretendard" charset="0"/>
@@ -3912,7 +3951,7 @@
                   </a:tcPr>
                 </a:tc>
               </a:tr>
-              <a:tr h="896112">
+              <a:tr h="905256">
                 <a:tc>
                   <a:txBody>
                     <a:bodyPr/>
@@ -3922,7 +3961,7 @@
                         <a:buNone/>
                       </a:pPr>
                       <a:r>
-                        <a:rPr lang="en-US" sz="2200" b="1" dirty="0">
+                        <a:rPr lang="en-US" sz="1800" b="1" dirty="0">
                           <a:solidFill>
                             <a:srgbClr val="111827"/>
                           </a:solidFill>
@@ -3932,7 +3971,7 @@
                         </a:rPr>
                         <a:t>Chart</a:t>
                       </a:r>
-                      <a:endParaRPr lang="en-US" sz="2200" dirty="0">
+                      <a:endParaRPr lang="en-US" sz="1800" dirty="0">
                         <a:latin typeface="Pretendard" charset="0"/>
                         <a:ea typeface="Pretendard" charset="0"/>
                         <a:cs typeface="Pretendard" charset="0"/>
@@ -3992,7 +4031,7 @@
                         <a:buNone/>
                       </a:pPr>
                       <a:r>
-                        <a:rPr lang="en-US" sz="2200" dirty="0">
+                        <a:rPr lang="en-US" sz="1800" dirty="0">
                           <a:solidFill>
                             <a:srgbClr val="111827"/>
                           </a:solidFill>
@@ -4002,7 +4041,7 @@
                         </a:rPr>
                         <a:t>theme-colored data object</a:t>
                       </a:r>
-                      <a:endParaRPr lang="en-US" sz="2200" dirty="0">
+                      <a:endParaRPr lang="en-US" sz="1800" dirty="0">
                         <a:latin typeface="Pretendard" charset="0"/>
                         <a:ea typeface="Pretendard" charset="0"/>
                         <a:cs typeface="Pretendard" charset="0"/>
@@ -4062,7 +4101,7 @@
                         <a:buNone/>
                       </a:pPr>
                       <a:r>
-                        <a:rPr lang="en-US" sz="2200" dirty="0">
+                        <a:rPr lang="en-US" sz="1800" dirty="0">
                           <a:solidFill>
                             <a:srgbClr val="111827"/>
                           </a:solidFill>
@@ -4072,7 +4111,7 @@
                         </a:rPr>
                         <a:t>contrast and value clarity</a:t>
                       </a:r>
-                      <a:endParaRPr lang="en-US" sz="2200" dirty="0">
+                      <a:endParaRPr lang="en-US" sz="1800" dirty="0">
                         <a:latin typeface="Pretendard" charset="0"/>
                         <a:ea typeface="Pretendard" charset="0"/>
                         <a:cs typeface="Pretendard" charset="0"/>
@@ -4536,36 +4575,75 @@
           </a:ln>
         </p:spPr>
       </p:sp>
-      <p:sp>
-        <p:nvSpPr>
-          <p:cNvPr id="3" name="Shape 1"/>
-          <p:cNvSpPr/>
-          <p:nvPr/>
-        </p:nvSpPr>
-        <p:spPr>
-          <a:xfrm>
-            <a:off x="914400" y="1463040"/>
-            <a:ext cx="10241280" cy="73152"/>
-          </a:xfrm>
-          <a:prstGeom prst="rect">
-            <a:avLst/>
-          </a:prstGeom>
-          <a:solidFill>
-            <a:srgbClr val="2563EB"/>
-          </a:solidFill>
-          <a:ln w="12700">
-            <a:solidFill>
-              <a:srgbClr val="2563EB">
+      <p:pic>
+        <p:nvPicPr>
+          <p:cNvPr id="3" name="Image 0" descr="preencoded.png">    </p:cNvPr>
+          <p:cNvPicPr>
+            <a:picLocks noChangeAspect="1"/>
+          </p:cNvPicPr>
+          <p:nvPr/>
+        </p:nvPicPr>
+        <p:blipFill>
+          <a:blip r:embed="rId1">
+            <a:extLst>
+              <a:ext uri="{96DAC541-7B7A-43D3-8B79-37D633B846F1}">
+                <asvg:svgBlip xmlns:asvg="http://schemas.microsoft.com/office/drawing/2016/SVG/main" r:embed="rId2"/>
+              </a:ext>
+            </a:extLst>
+          </a:blip>
+          <a:stretch>
+            <a:fillRect/>
+          </a:stretch>
+        </p:blipFill>
+        <p:spPr>
+          <a:xfrm>
+            <a:off x="914400" y="1417320"/>
+            <a:ext cx="10241280" cy="4526280"/>
+          </a:xfrm>
+          <a:prstGeom prst="rect">
+            <a:avLst/>
+          </a:prstGeom>
+        </p:spPr>
+      </p:pic>
+      <p:sp>
+        <p:nvSpPr>
+          <p:cNvPr id="4" name="Shape 1"/>
+          <p:cNvSpPr/>
+          <p:nvPr/>
+        </p:nvSpPr>
+        <p:spPr>
+          <a:xfrm>
+            <a:off x="914400" y="1417320"/>
+            <a:ext cx="10241280" cy="4526280"/>
+          </a:xfrm>
+          <a:prstGeom prst="rect">
+            <a:avLst/>
+          </a:prstGeom>
+          <a:solidFill>
+            <a:srgbClr val="FFFFFF">
+              <a:alpha val="0"/>
+            </a:srgbClr>
+          </a:solidFill>
+          <a:ln w="12700">
+            <a:solidFill>
+              <a:srgbClr val="E2E8F0">
                 <a:alpha val="0"/>
               </a:srgbClr>
             </a:solidFill>
             <a:prstDash val="solid"/>
           </a:ln>
-        </p:spPr>
-      </p:sp>
-      <p:sp>
-        <p:nvSpPr>
-          <p:cNvPr id="4" name="Text 2"/>
+          <a:effectLst>
+            <a:outerShdw sx="100000" sy="100000" kx="0" ky="0" algn="bl" rotWithShape="0" blurRad="12700" dist="50800" dir="2700000">
+              <a:srgbClr val="000000">
+                <a:alpha val="8000"/>
+              </a:srgbClr>
+            </a:outerShdw>
+          </a:effectLst>
+        </p:spPr>
+      </p:sp>
+      <p:sp>
+        <p:nvSpPr>
+          <p:cNvPr id="5" name="Text 2"/>
           <p:cNvSpPr txBox="1"/>
           <p:nvPr/>
         </p:nvSpPr>
@@ -4620,8 +4698,8 @@
           </p:nvPr>
         </p:nvGraphicFramePr>
         <p:xfrm>
-          <a:off x="914400" y="1463040"/>
-          <a:ext cx="10241280" cy="4480560"/>
+          <a:off x="914400" y="1417320"/>
+          <a:ext cx="10241280" cy="4526280"/>
         </p:xfrm>
         <a:graphic>
           <a:graphicData uri="http://schemas.openxmlformats.org/drawingml/2006/table">
@@ -4632,7 +4710,7 @@
                 <a:gridCol w="3413760"/>
                 <a:gridCol w="3413760"/>
               </a:tblGrid>
-              <a:tr h="1120140">
+              <a:tr h="1131570">
                 <a:tc>
                   <a:txBody>
                     <a:bodyPr/>
@@ -4642,7 +4720,7 @@
                         <a:buNone/>
                       </a:pPr>
                       <a:r>
-                        <a:rPr lang="en-US" sz="2200" b="1" dirty="0">
+                        <a:rPr lang="en-US" sz="1800" b="1" dirty="0">
                           <a:solidFill>
                             <a:srgbClr val="FFFFFF"/>
                           </a:solidFill>
@@ -4652,7 +4730,7 @@
                         </a:rPr>
                         <a:t>Stage</a:t>
                       </a:r>
-                      <a:endParaRPr lang="en-US" sz="2200" dirty="0">
+                      <a:endParaRPr lang="en-US" sz="1800" dirty="0">
                         <a:latin typeface="Pretendard" charset="0"/>
                         <a:ea typeface="Pretendard" charset="0"/>
                         <a:cs typeface="Pretendard" charset="0"/>
@@ -4710,7 +4788,7 @@
                         <a:buNone/>
                       </a:pPr>
                       <a:r>
-                        <a:rPr lang="en-US" sz="2200" b="1" dirty="0">
+                        <a:rPr lang="en-US" sz="1800" b="1" dirty="0">
                           <a:solidFill>
                             <a:srgbClr val="FFFFFF"/>
                           </a:solidFill>
@@ -4720,7 +4798,7 @@
                         </a:rPr>
                         <a:t>Coverage</a:t>
                       </a:r>
-                      <a:endParaRPr lang="en-US" sz="2200" dirty="0">
+                      <a:endParaRPr lang="en-US" sz="1800" dirty="0">
                         <a:latin typeface="Pretendard" charset="0"/>
                         <a:ea typeface="Pretendard" charset="0"/>
                         <a:cs typeface="Pretendard" charset="0"/>
@@ -4778,7 +4856,7 @@
                         <a:buNone/>
                       </a:pPr>
                       <a:r>
-                        <a:rPr lang="en-US" sz="2200" b="1" dirty="0">
+                        <a:rPr lang="en-US" sz="1800" b="1" dirty="0">
                           <a:solidFill>
                             <a:srgbClr val="FFFFFF"/>
                           </a:solidFill>
@@ -4788,7 +4866,7 @@
                         </a:rPr>
                         <a:t>Defects</a:t>
                       </a:r>
-                      <a:endParaRPr lang="en-US" sz="2200" dirty="0">
+                      <a:endParaRPr lang="en-US" sz="1800" dirty="0">
                         <a:latin typeface="Pretendard" charset="0"/>
                         <a:ea typeface="Pretendard" charset="0"/>
                         <a:cs typeface="Pretendard" charset="0"/>
@@ -4838,7 +4916,7 @@
                   </a:tcPr>
                 </a:tc>
               </a:tr>
-              <a:tr h="1120140">
+              <a:tr h="1131570">
                 <a:tc>
                   <a:txBody>
                     <a:bodyPr/>
@@ -4848,7 +4926,7 @@
                         <a:buNone/>
                       </a:pPr>
                       <a:r>
-                        <a:rPr lang="en-US" sz="2200" b="1" dirty="0">
+                        <a:rPr lang="en-US" sz="1800" b="1" dirty="0">
                           <a:solidFill>
                             <a:srgbClr val="111827"/>
                           </a:solidFill>
@@ -4858,7 +4936,7 @@
                         </a:rPr>
                         <a:t>Parser</a:t>
                       </a:r>
-                      <a:endParaRPr lang="en-US" sz="2200" dirty="0">
+                      <a:endParaRPr lang="en-US" sz="1800" dirty="0">
                         <a:latin typeface="Pretendard" charset="0"/>
                         <a:ea typeface="Pretendard" charset="0"/>
                         <a:cs typeface="Pretendard" charset="0"/>
@@ -4913,7 +4991,7 @@
                         <a:buNone/>
                       </a:pPr>
                       <a:r>
-                        <a:rPr lang="en-US" sz="2200" dirty="0">
+                        <a:rPr lang="en-US" sz="1800" dirty="0">
                           <a:solidFill>
                             <a:srgbClr val="111827"/>
                           </a:solidFill>
@@ -4923,7 +5001,7 @@
                         </a:rPr>
                         <a:t>92</a:t>
                       </a:r>
-                      <a:endParaRPr lang="en-US" sz="2200" dirty="0">
+                      <a:endParaRPr lang="en-US" sz="1800" dirty="0">
                         <a:latin typeface="Pretendard" charset="0"/>
                         <a:ea typeface="Pretendard" charset="0"/>
                         <a:cs typeface="Pretendard" charset="0"/>
@@ -4978,7 +5056,7 @@
                         <a:buNone/>
                       </a:pPr>
                       <a:r>
-                        <a:rPr lang="en-US" sz="2200" dirty="0">
+                        <a:rPr lang="en-US" sz="1800" dirty="0">
                           <a:solidFill>
                             <a:srgbClr val="111827"/>
                           </a:solidFill>
@@ -4988,7 +5066,7 @@
                         </a:rPr>
                         <a:t>3</a:t>
                       </a:r>
-                      <a:endParaRPr lang="en-US" sz="2200" dirty="0">
+                      <a:endParaRPr lang="en-US" sz="1800" dirty="0">
                         <a:latin typeface="Pretendard" charset="0"/>
                         <a:ea typeface="Pretendard" charset="0"/>
                         <a:cs typeface="Pretendard" charset="0"/>
@@ -5035,7 +5113,7 @@
                   </a:tcPr>
                 </a:tc>
               </a:tr>
-              <a:tr h="1120140">
+              <a:tr h="1131570">
                 <a:tc>
                   <a:txBody>
                     <a:bodyPr/>
@@ -5045,7 +5123,7 @@
                         <a:buNone/>
                       </a:pPr>
                       <a:r>
-                        <a:rPr lang="en-US" sz="2200" b="1" dirty="0">
+                        <a:rPr lang="en-US" sz="1800" b="1" dirty="0">
                           <a:solidFill>
                             <a:srgbClr val="111827"/>
                           </a:solidFill>
@@ -5055,7 +5133,7 @@
                         </a:rPr>
                         <a:t>Layout</a:t>
                       </a:r>
-                      <a:endParaRPr lang="en-US" sz="2200" dirty="0">
+                      <a:endParaRPr lang="en-US" sz="1800" dirty="0">
                         <a:latin typeface="Pretendard" charset="0"/>
                         <a:ea typeface="Pretendard" charset="0"/>
                         <a:cs typeface="Pretendard" charset="0"/>
@@ -5115,7 +5193,7 @@
                         <a:buNone/>
                       </a:pPr>
                       <a:r>
-                        <a:rPr lang="en-US" sz="2200" dirty="0">
+                        <a:rPr lang="en-US" sz="1800" dirty="0">
                           <a:solidFill>
                             <a:srgbClr val="111827"/>
                           </a:solidFill>
@@ -5125,7 +5203,7 @@
                         </a:rPr>
                         <a:t>88</a:t>
                       </a:r>
-                      <a:endParaRPr lang="en-US" sz="2200" dirty="0">
+                      <a:endParaRPr lang="en-US" sz="1800" dirty="0">
                         <a:latin typeface="Pretendard" charset="0"/>
                         <a:ea typeface="Pretendard" charset="0"/>
                         <a:cs typeface="Pretendard" charset="0"/>
@@ -5185,7 +5263,7 @@
                         <a:buNone/>
                       </a:pPr>
                       <a:r>
-                        <a:rPr lang="en-US" sz="2200" dirty="0">
+                        <a:rPr lang="en-US" sz="1800" dirty="0">
                           <a:solidFill>
                             <a:srgbClr val="111827"/>
                           </a:solidFill>
@@ -5195,7 +5273,7 @@
                         </a:rPr>
                         <a:t>5</a:t>
                       </a:r>
-                      <a:endParaRPr lang="en-US" sz="2200" dirty="0">
+                      <a:endParaRPr lang="en-US" sz="1800" dirty="0">
                         <a:latin typeface="Pretendard" charset="0"/>
                         <a:ea typeface="Pretendard" charset="0"/>
                         <a:cs typeface="Pretendard" charset="0"/>
@@ -5247,7 +5325,7 @@
                   </a:tcPr>
                 </a:tc>
               </a:tr>
-              <a:tr h="1120140">
+              <a:tr h="1131570">
                 <a:tc>
                   <a:txBody>
                     <a:bodyPr/>
@@ -5257,7 +5335,7 @@
                         <a:buNone/>
                       </a:pPr>
                       <a:r>
-                        <a:rPr lang="en-US" sz="2200" b="1" dirty="0">
+                        <a:rPr lang="en-US" sz="1800" b="1" dirty="0">
                           <a:solidFill>
                             <a:srgbClr val="111827"/>
                           </a:solidFill>
@@ -5267,7 +5345,7 @@
                         </a:rPr>
                         <a:t>PPTX</a:t>
                       </a:r>
-                      <a:endParaRPr lang="en-US" sz="2200" dirty="0">
+                      <a:endParaRPr lang="en-US" sz="1800" dirty="0">
                         <a:latin typeface="Pretendard" charset="0"/>
                         <a:ea typeface="Pretendard" charset="0"/>
                         <a:cs typeface="Pretendard" charset="0"/>
@@ -5322,7 +5400,7 @@
                         <a:buNone/>
                       </a:pPr>
                       <a:r>
-                        <a:rPr lang="en-US" sz="2200" dirty="0">
+                        <a:rPr lang="en-US" sz="1800" dirty="0">
                           <a:solidFill>
                             <a:srgbClr val="111827"/>
                           </a:solidFill>
@@ -5332,7 +5410,7 @@
                         </a:rPr>
                         <a:t>95</a:t>
                       </a:r>
-                      <a:endParaRPr lang="en-US" sz="2200" dirty="0">
+                      <a:endParaRPr lang="en-US" sz="1800" dirty="0">
                         <a:latin typeface="Pretendard" charset="0"/>
                         <a:ea typeface="Pretendard" charset="0"/>
                         <a:cs typeface="Pretendard" charset="0"/>
@@ -5387,7 +5465,7 @@
                         <a:buNone/>
                       </a:pPr>
                       <a:r>
-                        <a:rPr lang="en-US" sz="2200" dirty="0">
+                        <a:rPr lang="en-US" sz="1800" dirty="0">
                           <a:solidFill>
                             <a:srgbClr val="111827"/>
                           </a:solidFill>
@@ -5397,7 +5475,7 @@
                         </a:rPr>
                         <a:t>2</a:t>
                       </a:r>
-                      <a:endParaRPr lang="en-US" sz="2200" dirty="0">
+                      <a:endParaRPr lang="en-US" sz="1800" dirty="0">
                         <a:latin typeface="Pretendard" charset="0"/>
                         <a:ea typeface="Pretendard" charset="0"/>
                         <a:cs typeface="Pretendard" charset="0"/>

--- a/docs/theme-preview/pptx/clean.pptx
+++ b/docs/theme-preview/pptx/clean.pptx
@@ -24,9 +24,14 @@
     <p:sldId id="272" r:id="rId18"/>
     <p:sldId id="273" r:id="rId19"/>
     <p:sldId id="274" r:id="rId20"/>
+    <p:sldId id="275" r:id="rId21"/>
+    <p:sldId id="276" r:id="rId22"/>
+    <p:sldId id="277" r:id="rId23"/>
+    <p:sldId id="278" r:id="rId24"/>
+    <p:sldId id="279" r:id="rId25"/>
   </p:sldIdLst>
   <p:notesMasterIdLst>
-    <p:notesMasterId r:id="rId21"/>
+    <p:notesMasterId r:id="rId26"/>
   </p:notesMasterIdLst>
   <p:sldSz cx="12191695" cy="6858000"/>
   <p:notesSz cx="6858000" cy="12191695"/>
@@ -468,6 +473,246 @@
 </c:chartSpace>
 </file>
 
+<file path=ppt/charts/chart2.xml><?xml version="1.0" encoding="utf-8"?>
+<c:chartSpace xmlns:c="http://schemas.openxmlformats.org/drawingml/2006/chart" xmlns:a="http://schemas.openxmlformats.org/drawingml/2006/main" xmlns:r="http://schemas.openxmlformats.org/officeDocument/2006/relationships">
+  <c:date1904 val="0"/>
+  <c:roundedCorners val="1"/>
+  <c:chart>
+    <c:autoTitleDeleted val="1"/>
+    <c:plotArea>
+      <c:layout/>
+      <c:barChart>
+        <c:barDir val="col"/>
+        <c:grouping val="clustered"/>
+        <c:varyColors val="0"/>
+        <c:ser>
+          <c:idx val="0"/>
+          <c:order val="0"/>
+          <c:tx>
+            <c:strRef>
+              <c:f>Sheet1!$B$1</c:f>
+              <c:strCache>
+                <c:ptCount val="1"/>
+                <c:pt idx="0">
+                  <c:v>Score</c:v>
+                </c:pt>
+              </c:strCache>
+            </c:strRef>
+          </c:tx>
+          <c:spPr>
+            <a:solidFill>
+              <a:srgbClr val="2563EB"/>
+            </a:solidFill>
+            <a:effectLst/>
+          </c:spPr>
+          <c:invertIfNegative val="0"/>
+          <c:dLbls>
+            <c:numFmt formatCode="#,##0" sourceLinked="0"/>
+            <c:txPr>
+              <a:bodyPr/>
+              <a:lstStyle/>
+              <a:p>
+                <a:pPr>
+                  <a:defRPr b="0" i="0" strike="noStrike" sz="1200" u="none">
+                    <a:solidFill>
+                      <a:srgbClr val="000000"/>
+                    </a:solidFill>
+                    <a:latin typeface="Arial"/>
+                  </a:defRPr>
+                </a:pPr>
+              </a:p>
+            </c:txPr>
+            <c:showLegendKey val="0"/>
+            <c:showVal val="1"/>
+            <c:showCatName val="0"/>
+            <c:showSerName val="0"/>
+            <c:showPercent val="0"/>
+            <c:showBubbleSize val="0"/>
+            <c:showLeaderLines val="0"/>
+          </c:dLbls>
+          <c:cat>
+            <c:multiLvlStrRef>
+              <c:f>Sheet1!$A$2:$A$4</c:f>
+              <c:multiLvlStrCache>
+                <c:ptCount val="3"/>
+                <c:lvl>
+                  <c:pt idx="0">
+                    <c:v>Parse</c:v>
+                  </c:pt>
+                  <c:pt idx="1">
+                    <c:v>Plan</c:v>
+                  </c:pt>
+                  <c:pt idx="2">
+                    <c:v>Render</c:v>
+                  </c:pt>
+                </c:lvl>
+              </c:multiLvlStrCache>
+            </c:multiLvlStrRef>
+          </c:cat>
+          <c:val>
+            <c:numRef>
+              <c:f>Sheet1!$B$2:$B$4</c:f>
+              <c:numCache>
+                <c:formatCode>General</c:formatCode>
+                <c:ptCount val="3"/>
+                <c:pt idx="0">
+                  <c:v>78</c:v>
+                </c:pt>
+                <c:pt idx="1">
+                  <c:v>86</c:v>
+                </c:pt>
+                <c:pt idx="2">
+                  <c:v>93</c:v>
+                </c:pt>
+              </c:numCache>
+            </c:numRef>
+          </c:val>
+        </c:ser>
+        <c:dLbls>
+          <c:numFmt formatCode="#,##0" sourceLinked="0"/>
+          <c:txPr>
+            <a:bodyPr/>
+            <a:lstStyle/>
+            <a:p>
+              <a:pPr>
+                <a:defRPr b="0" i="0" strike="noStrike" sz="1200" u="none">
+                  <a:solidFill>
+                    <a:srgbClr val="000000"/>
+                  </a:solidFill>
+                  <a:latin typeface="Arial"/>
+                </a:defRPr>
+              </a:pPr>
+            </a:p>
+          </c:txPr>
+          <c:showLegendKey val="0"/>
+          <c:showVal val="1"/>
+          <c:showCatName val="0"/>
+          <c:showSerName val="0"/>
+          <c:showPercent val="0"/>
+          <c:showBubbleSize val="0"/>
+          <c:showLeaderLines val="0"/>
+        </c:dLbls>
+        <c:gapWidth val="150"/>
+        <c:overlap val="0"/>
+        <c:axId val="2094734554"/>
+        <c:axId val="2094734552"/>
+        <c:axId val="2094734556"/>
+      </c:barChart>
+      <c:catAx>
+        <c:axId val="2094734554"/>
+        <c:scaling>
+          <c:orientation val="minMax"/>
+        </c:scaling>
+        <c:delete val="0"/>
+        <c:axPos val="b"/>
+        <c:numFmt formatCode="General" sourceLinked="1"/>
+        <c:majorTickMark val="out"/>
+        <c:minorTickMark val="none"/>
+        <c:tickLblPos val="low"/>
+        <c:spPr>
+          <a:ln w="12700" cap="flat">
+            <a:solidFill>
+              <a:srgbClr val="888888"/>
+            </a:solidFill>
+            <a:prstDash val="solid"/>
+            <a:round/>
+          </a:ln>
+        </c:spPr>
+        <c:txPr>
+          <a:bodyPr/>
+          <a:lstStyle/>
+          <a:p>
+            <a:pPr>
+              <a:defRPr sz="1100" b="0" i="0" u="none" strike="noStrike">
+                <a:solidFill>
+                  <a:srgbClr val="111827"/>
+                </a:solidFill>
+                <a:latin typeface="Pretendard"/>
+              </a:defRPr>
+            </a:pPr>
+            <a:endParaRPr lang="en-US"/>
+          </a:p>
+        </c:txPr>
+        <c:crossAx val="2094734552"/>
+        <c:crosses val="autoZero"/>
+        <c:auto val="1"/>
+        <c:lblAlgn val="ctr"/>
+        <c:noMultiLvlLbl val="1"/>
+      </c:catAx>
+      <c:valAx>
+        <c:axId val="2094734552"/>
+        <c:scaling>
+          <c:orientation val="minMax"/>
+        </c:scaling>
+        <c:delete val="0"/>
+        <c:axPos val="l"/>
+        <c:majorGridlines>
+          <c:spPr>
+            <a:ln w="12700" cap="flat">
+              <a:solidFill>
+                <a:srgbClr val="E2E8F0"/>
+              </a:solidFill>
+              <a:prstDash val="solid"/>
+              <a:round/>
+            </a:ln>
+          </c:spPr>
+        </c:majorGridlines>
+        <c:numFmt formatCode="General" sourceLinked="0"/>
+        <c:majorTickMark val="out"/>
+        <c:minorTickMark val="none"/>
+        <c:tickLblPos val="nextTo"/>
+        <c:spPr>
+          <a:ln w="12700" cap="flat">
+            <a:solidFill>
+              <a:srgbClr val="888888"/>
+            </a:solidFill>
+            <a:prstDash val="solid"/>
+            <a:round/>
+          </a:ln>
+        </c:spPr>
+        <c:txPr>
+          <a:bodyPr/>
+          <a:lstStyle/>
+          <a:p>
+            <a:pPr>
+              <a:defRPr sz="1100" b="0" i="0" u="none" strike="noStrike">
+                <a:solidFill>
+                  <a:srgbClr val="475569"/>
+                </a:solidFill>
+                <a:latin typeface="Pretendard"/>
+              </a:defRPr>
+            </a:pPr>
+            <a:endParaRPr lang="en-US"/>
+          </a:p>
+        </c:txPr>
+        <c:crossAx val="2094734554"/>
+        <c:crosses val="autoZero"/>
+        <c:crossBetween val="between"/>
+      </c:valAx>
+      <c:spPr>
+        <a:noFill/>
+        <a:ln>
+          <a:noFill/>
+        </a:ln>
+        <a:effectLst/>
+      </c:spPr>
+    </c:plotArea>
+    <c:plotVisOnly val="1"/>
+    <c:dispBlanksAs val="span"/>
+  </c:chart>
+  <c:spPr>
+    <a:noFill/>
+    <a:ln>
+      <a:noFill/>
+    </a:ln>
+    <a:effectLst/>
+  </c:spPr>
+  <c:externalData r:id="rId1">
+    <c:autoUpdate val="0"/>
+  </c:externalData>
+</c:chartSpace>
+</file>
+
 <file path=ppt/notesMasters/notesMaster1.xml><?xml version="1.0" encoding="utf-8"?>
 <p:notesMaster xmlns:a="http://schemas.openxmlformats.org/drawingml/2006/main" xmlns:r="http://schemas.openxmlformats.org/officeDocument/2006/relationships" xmlns:p="http://schemas.openxmlformats.org/presentationml/2006/main">
   <p:cSld>
@@ -1873,6 +2118,446 @@
 </p:notes>
 </file>
 
+<file path=ppt/notesSlides/notesSlide20.xml><?xml version="1.0" encoding="utf-8"?>
+<p:notes xmlns:a="http://schemas.openxmlformats.org/drawingml/2006/main" xmlns:r="http://schemas.openxmlformats.org/officeDocument/2006/relationships" xmlns:p="http://schemas.openxmlformats.org/presentationml/2006/main">
+  <p:cSld>
+    <p:spTree>
+      <p:nvGrpSpPr>
+        <p:cNvPr id="1" name=""/>
+        <p:cNvGrpSpPr/>
+        <p:nvPr/>
+      </p:nvGrpSpPr>
+      <p:grpSpPr>
+        <a:xfrm>
+          <a:off x="0" y="0"/>
+          <a:ext cx="0" cy="0"/>
+          <a:chOff x="0" y="0"/>
+          <a:chExt cx="0" cy="0"/>
+        </a:xfrm>
+      </p:grpSpPr>
+      <p:sp>
+        <p:nvSpPr>
+          <p:cNvPr id="2" name="Slide Image Placeholder 1"/>
+          <p:cNvSpPr>
+            <a:spLocks noGrp="1" noRot="1" noChangeAspect="1"/>
+          </p:cNvSpPr>
+          <p:nvPr>
+            <p:ph type="sldImg"/>
+          </p:nvPr>
+        </p:nvSpPr>
+        <p:spPr/>
+      </p:sp>
+      <p:sp>
+        <p:nvSpPr>
+          <p:cNvPr id="3" name="Notes Placeholder 2"/>
+          <p:cNvSpPr>
+            <a:spLocks noGrp="1"/>
+          </p:cNvSpPr>
+          <p:nvPr>
+            <p:ph type="body" idx="1"/>
+          </p:nvPr>
+        </p:nvSpPr>
+        <p:spPr/>
+        <p:txBody>
+          <a:bodyPr/>
+          <a:lstStyle/>
+          <a:p>
+            <a:r>
+              <a:rPr lang="en-US" dirty="0"/>
+              <a:t/>
+            </a:r>
+            <a:endParaRPr lang="en-US" dirty="0"/>
+          </a:p>
+        </p:txBody>
+      </p:sp>
+      <p:sp>
+        <p:nvSpPr>
+          <p:cNvPr id="4" name="Slide Number Placeholder 3"/>
+          <p:cNvSpPr>
+            <a:spLocks noGrp="1"/>
+          </p:cNvSpPr>
+          <p:nvPr>
+            <p:ph type="sldNum" sz="quarter" idx="10"/>
+          </p:nvPr>
+        </p:nvSpPr>
+        <p:spPr/>
+        <p:txBody>
+          <a:bodyPr/>
+          <a:lstStyle/>
+          <a:p>
+            <a:fld id="{F7021451-1387-4CA6-816F-3879F97B5CBC}" type="slidenum">
+              <a:rPr lang="en-US"/>
+              <a:t>20</a:t>
+            </a:fld>
+            <a:endParaRPr lang="en-US"/>
+          </a:p>
+        </p:txBody>
+      </p:sp>
+    </p:spTree>
+    <p:extLst>
+      <p:ext uri="{BB962C8B-B14F-4D97-AF65-F5344CB8AC3E}">
+        <p14:creationId xmlns:p14="http://schemas.microsoft.com/office/powerpoint/2010/main" val="1024086991"/>
+      </p:ext>
+    </p:extLst>
+  </p:cSld>
+  <p:clrMapOvr>
+    <a:masterClrMapping/>
+  </p:clrMapOvr>
+</p:notes>
+</file>
+
+<file path=ppt/notesSlides/notesSlide21.xml><?xml version="1.0" encoding="utf-8"?>
+<p:notes xmlns:a="http://schemas.openxmlformats.org/drawingml/2006/main" xmlns:r="http://schemas.openxmlformats.org/officeDocument/2006/relationships" xmlns:p="http://schemas.openxmlformats.org/presentationml/2006/main">
+  <p:cSld>
+    <p:spTree>
+      <p:nvGrpSpPr>
+        <p:cNvPr id="1" name=""/>
+        <p:cNvGrpSpPr/>
+        <p:nvPr/>
+      </p:nvGrpSpPr>
+      <p:grpSpPr>
+        <a:xfrm>
+          <a:off x="0" y="0"/>
+          <a:ext cx="0" cy="0"/>
+          <a:chOff x="0" y="0"/>
+          <a:chExt cx="0" cy="0"/>
+        </a:xfrm>
+      </p:grpSpPr>
+      <p:sp>
+        <p:nvSpPr>
+          <p:cNvPr id="2" name="Slide Image Placeholder 1"/>
+          <p:cNvSpPr>
+            <a:spLocks noGrp="1" noRot="1" noChangeAspect="1"/>
+          </p:cNvSpPr>
+          <p:nvPr>
+            <p:ph type="sldImg"/>
+          </p:nvPr>
+        </p:nvSpPr>
+        <p:spPr/>
+      </p:sp>
+      <p:sp>
+        <p:nvSpPr>
+          <p:cNvPr id="3" name="Notes Placeholder 2"/>
+          <p:cNvSpPr>
+            <a:spLocks noGrp="1"/>
+          </p:cNvSpPr>
+          <p:nvPr>
+            <p:ph type="body" idx="1"/>
+          </p:nvPr>
+        </p:nvSpPr>
+        <p:spPr/>
+        <p:txBody>
+          <a:bodyPr/>
+          <a:lstStyle/>
+          <a:p>
+            <a:r>
+              <a:rPr lang="en-US" dirty="0"/>
+              <a:t/>
+            </a:r>
+            <a:endParaRPr lang="en-US" dirty="0"/>
+          </a:p>
+        </p:txBody>
+      </p:sp>
+      <p:sp>
+        <p:nvSpPr>
+          <p:cNvPr id="4" name="Slide Number Placeholder 3"/>
+          <p:cNvSpPr>
+            <a:spLocks noGrp="1"/>
+          </p:cNvSpPr>
+          <p:nvPr>
+            <p:ph type="sldNum" sz="quarter" idx="10"/>
+          </p:nvPr>
+        </p:nvSpPr>
+        <p:spPr/>
+        <p:txBody>
+          <a:bodyPr/>
+          <a:lstStyle/>
+          <a:p>
+            <a:fld id="{F7021451-1387-4CA6-816F-3879F97B5CBC}" type="slidenum">
+              <a:rPr lang="en-US"/>
+              <a:t>21</a:t>
+            </a:fld>
+            <a:endParaRPr lang="en-US"/>
+          </a:p>
+        </p:txBody>
+      </p:sp>
+    </p:spTree>
+    <p:extLst>
+      <p:ext uri="{BB962C8B-B14F-4D97-AF65-F5344CB8AC3E}">
+        <p14:creationId xmlns:p14="http://schemas.microsoft.com/office/powerpoint/2010/main" val="1024086991"/>
+      </p:ext>
+    </p:extLst>
+  </p:cSld>
+  <p:clrMapOvr>
+    <a:masterClrMapping/>
+  </p:clrMapOvr>
+</p:notes>
+</file>
+
+<file path=ppt/notesSlides/notesSlide22.xml><?xml version="1.0" encoding="utf-8"?>
+<p:notes xmlns:a="http://schemas.openxmlformats.org/drawingml/2006/main" xmlns:r="http://schemas.openxmlformats.org/officeDocument/2006/relationships" xmlns:p="http://schemas.openxmlformats.org/presentationml/2006/main">
+  <p:cSld>
+    <p:spTree>
+      <p:nvGrpSpPr>
+        <p:cNvPr id="1" name=""/>
+        <p:cNvGrpSpPr/>
+        <p:nvPr/>
+      </p:nvGrpSpPr>
+      <p:grpSpPr>
+        <a:xfrm>
+          <a:off x="0" y="0"/>
+          <a:ext cx="0" cy="0"/>
+          <a:chOff x="0" y="0"/>
+          <a:chExt cx="0" cy="0"/>
+        </a:xfrm>
+      </p:grpSpPr>
+      <p:sp>
+        <p:nvSpPr>
+          <p:cNvPr id="2" name="Slide Image Placeholder 1"/>
+          <p:cNvSpPr>
+            <a:spLocks noGrp="1" noRot="1" noChangeAspect="1"/>
+          </p:cNvSpPr>
+          <p:nvPr>
+            <p:ph type="sldImg"/>
+          </p:nvPr>
+        </p:nvSpPr>
+        <p:spPr/>
+      </p:sp>
+      <p:sp>
+        <p:nvSpPr>
+          <p:cNvPr id="3" name="Notes Placeholder 2"/>
+          <p:cNvSpPr>
+            <a:spLocks noGrp="1"/>
+          </p:cNvSpPr>
+          <p:nvPr>
+            <p:ph type="body" idx="1"/>
+          </p:nvPr>
+        </p:nvSpPr>
+        <p:spPr/>
+        <p:txBody>
+          <a:bodyPr/>
+          <a:lstStyle/>
+          <a:p>
+            <a:r>
+              <a:rPr lang="en-US" dirty="0"/>
+              <a:t/>
+            </a:r>
+            <a:endParaRPr lang="en-US" dirty="0"/>
+          </a:p>
+        </p:txBody>
+      </p:sp>
+      <p:sp>
+        <p:nvSpPr>
+          <p:cNvPr id="4" name="Slide Number Placeholder 3"/>
+          <p:cNvSpPr>
+            <a:spLocks noGrp="1"/>
+          </p:cNvSpPr>
+          <p:nvPr>
+            <p:ph type="sldNum" sz="quarter" idx="10"/>
+          </p:nvPr>
+        </p:nvSpPr>
+        <p:spPr/>
+        <p:txBody>
+          <a:bodyPr/>
+          <a:lstStyle/>
+          <a:p>
+            <a:fld id="{F7021451-1387-4CA6-816F-3879F97B5CBC}" type="slidenum">
+              <a:rPr lang="en-US"/>
+              <a:t>22</a:t>
+            </a:fld>
+            <a:endParaRPr lang="en-US"/>
+          </a:p>
+        </p:txBody>
+      </p:sp>
+    </p:spTree>
+    <p:extLst>
+      <p:ext uri="{BB962C8B-B14F-4D97-AF65-F5344CB8AC3E}">
+        <p14:creationId xmlns:p14="http://schemas.microsoft.com/office/powerpoint/2010/main" val="1024086991"/>
+      </p:ext>
+    </p:extLst>
+  </p:cSld>
+  <p:clrMapOvr>
+    <a:masterClrMapping/>
+  </p:clrMapOvr>
+</p:notes>
+</file>
+
+<file path=ppt/notesSlides/notesSlide23.xml><?xml version="1.0" encoding="utf-8"?>
+<p:notes xmlns:a="http://schemas.openxmlformats.org/drawingml/2006/main" xmlns:r="http://schemas.openxmlformats.org/officeDocument/2006/relationships" xmlns:p="http://schemas.openxmlformats.org/presentationml/2006/main">
+  <p:cSld>
+    <p:spTree>
+      <p:nvGrpSpPr>
+        <p:cNvPr id="1" name=""/>
+        <p:cNvGrpSpPr/>
+        <p:nvPr/>
+      </p:nvGrpSpPr>
+      <p:grpSpPr>
+        <a:xfrm>
+          <a:off x="0" y="0"/>
+          <a:ext cx="0" cy="0"/>
+          <a:chOff x="0" y="0"/>
+          <a:chExt cx="0" cy="0"/>
+        </a:xfrm>
+      </p:grpSpPr>
+      <p:sp>
+        <p:nvSpPr>
+          <p:cNvPr id="2" name="Slide Image Placeholder 1"/>
+          <p:cNvSpPr>
+            <a:spLocks noGrp="1" noRot="1" noChangeAspect="1"/>
+          </p:cNvSpPr>
+          <p:nvPr>
+            <p:ph type="sldImg"/>
+          </p:nvPr>
+        </p:nvSpPr>
+        <p:spPr/>
+      </p:sp>
+      <p:sp>
+        <p:nvSpPr>
+          <p:cNvPr id="3" name="Notes Placeholder 2"/>
+          <p:cNvSpPr>
+            <a:spLocks noGrp="1"/>
+          </p:cNvSpPr>
+          <p:nvPr>
+            <p:ph type="body" idx="1"/>
+          </p:nvPr>
+        </p:nvSpPr>
+        <p:spPr/>
+        <p:txBody>
+          <a:bodyPr/>
+          <a:lstStyle/>
+          <a:p>
+            <a:r>
+              <a:rPr lang="en-US" dirty="0"/>
+              <a:t/>
+            </a:r>
+            <a:endParaRPr lang="en-US" dirty="0"/>
+          </a:p>
+        </p:txBody>
+      </p:sp>
+      <p:sp>
+        <p:nvSpPr>
+          <p:cNvPr id="4" name="Slide Number Placeholder 3"/>
+          <p:cNvSpPr>
+            <a:spLocks noGrp="1"/>
+          </p:cNvSpPr>
+          <p:nvPr>
+            <p:ph type="sldNum" sz="quarter" idx="10"/>
+          </p:nvPr>
+        </p:nvSpPr>
+        <p:spPr/>
+        <p:txBody>
+          <a:bodyPr/>
+          <a:lstStyle/>
+          <a:p>
+            <a:fld id="{F7021451-1387-4CA6-816F-3879F97B5CBC}" type="slidenum">
+              <a:rPr lang="en-US"/>
+              <a:t>23</a:t>
+            </a:fld>
+            <a:endParaRPr lang="en-US"/>
+          </a:p>
+        </p:txBody>
+      </p:sp>
+    </p:spTree>
+    <p:extLst>
+      <p:ext uri="{BB962C8B-B14F-4D97-AF65-F5344CB8AC3E}">
+        <p14:creationId xmlns:p14="http://schemas.microsoft.com/office/powerpoint/2010/main" val="1024086991"/>
+      </p:ext>
+    </p:extLst>
+  </p:cSld>
+  <p:clrMapOvr>
+    <a:masterClrMapping/>
+  </p:clrMapOvr>
+</p:notes>
+</file>
+
+<file path=ppt/notesSlides/notesSlide24.xml><?xml version="1.0" encoding="utf-8"?>
+<p:notes xmlns:a="http://schemas.openxmlformats.org/drawingml/2006/main" xmlns:r="http://schemas.openxmlformats.org/officeDocument/2006/relationships" xmlns:p="http://schemas.openxmlformats.org/presentationml/2006/main">
+  <p:cSld>
+    <p:spTree>
+      <p:nvGrpSpPr>
+        <p:cNvPr id="1" name=""/>
+        <p:cNvGrpSpPr/>
+        <p:nvPr/>
+      </p:nvGrpSpPr>
+      <p:grpSpPr>
+        <a:xfrm>
+          <a:off x="0" y="0"/>
+          <a:ext cx="0" cy="0"/>
+          <a:chOff x="0" y="0"/>
+          <a:chExt cx="0" cy="0"/>
+        </a:xfrm>
+      </p:grpSpPr>
+      <p:sp>
+        <p:nvSpPr>
+          <p:cNvPr id="2" name="Slide Image Placeholder 1"/>
+          <p:cNvSpPr>
+            <a:spLocks noGrp="1" noRot="1" noChangeAspect="1"/>
+          </p:cNvSpPr>
+          <p:nvPr>
+            <p:ph type="sldImg"/>
+          </p:nvPr>
+        </p:nvSpPr>
+        <p:spPr/>
+      </p:sp>
+      <p:sp>
+        <p:nvSpPr>
+          <p:cNvPr id="3" name="Notes Placeholder 2"/>
+          <p:cNvSpPr>
+            <a:spLocks noGrp="1"/>
+          </p:cNvSpPr>
+          <p:nvPr>
+            <p:ph type="body" idx="1"/>
+          </p:nvPr>
+        </p:nvSpPr>
+        <p:spPr/>
+        <p:txBody>
+          <a:bodyPr/>
+          <a:lstStyle/>
+          <a:p>
+            <a:r>
+              <a:rPr lang="en-US" dirty="0"/>
+              <a:t/>
+            </a:r>
+            <a:endParaRPr lang="en-US" dirty="0"/>
+          </a:p>
+        </p:txBody>
+      </p:sp>
+      <p:sp>
+        <p:nvSpPr>
+          <p:cNvPr id="4" name="Slide Number Placeholder 3"/>
+          <p:cNvSpPr>
+            <a:spLocks noGrp="1"/>
+          </p:cNvSpPr>
+          <p:nvPr>
+            <p:ph type="sldNum" sz="quarter" idx="10"/>
+          </p:nvPr>
+        </p:nvSpPr>
+        <p:spPr/>
+        <p:txBody>
+          <a:bodyPr/>
+          <a:lstStyle/>
+          <a:p>
+            <a:fld id="{F7021451-1387-4CA6-816F-3879F97B5CBC}" type="slidenum">
+              <a:rPr lang="en-US"/>
+              <a:t>24</a:t>
+            </a:fld>
+            <a:endParaRPr lang="en-US"/>
+          </a:p>
+        </p:txBody>
+      </p:sp>
+    </p:spTree>
+    <p:extLst>
+      <p:ext uri="{BB962C8B-B14F-4D97-AF65-F5344CB8AC3E}">
+        <p14:creationId xmlns:p14="http://schemas.microsoft.com/office/powerpoint/2010/main" val="1024086991"/>
+      </p:ext>
+    </p:extLst>
+  </p:cSld>
+  <p:clrMapOvr>
+    <a:masterClrMapping/>
+  </p:clrMapOvr>
+</p:notes>
+</file>
+
 <file path=ppt/notesSlides/notesSlide3.xml><?xml version="1.0" encoding="utf-8"?>
 <p:notes xmlns:a="http://schemas.openxmlformats.org/drawingml/2006/main" xmlns:r="http://schemas.openxmlformats.org/officeDocument/2006/relationships" xmlns:p="http://schemas.openxmlformats.org/presentationml/2006/main">
   <p:cSld>
@@ -2939,7 +3624,7 @@
                 <a:ea typeface="Pretendard" pitchFamily="34" charset="-122"/>
                 <a:cs typeface="Pretendard" pitchFamily="34" charset="-120"/>
               </a:rPr>
-              <a:t>MDPR Composition Grammar QA</a:t>
+              <a:t>MDPR Design Grammar</a:t>
             </a:r>
             <a:endParaRPr lang="en-US" sz="4800" dirty="0"/>
           </a:p>
@@ -3004,6 +3689,1863 @@
           </a:ln>
         </p:spPr>
       </p:sp>
+      <p:sp>
+        <p:nvSpPr>
+          <p:cNvPr id="3" name="Text 1"/>
+          <p:cNvSpPr txBox="1"/>
+          <p:nvPr/>
+        </p:nvSpPr>
+        <p:spPr>
+          <a:xfrm>
+            <a:off x="731520" y="457200"/>
+            <a:ext cx="10698480" cy="731520"/>
+          </a:xfrm>
+          <a:prstGeom prst="rect">
+            <a:avLst/>
+          </a:prstGeom>
+          <a:noFill/>
+          <a:ln/>
+        </p:spPr>
+        <p:txBody>
+          <a:bodyPr wrap="square" lIns="0" tIns="0" rIns="0" bIns="0" rtlCol="0" anchor="ctr"/>
+          <a:lstStyle/>
+          <a:p>
+            <a:pPr algn="ctr" indent="0" marL="0">
+              <a:lnSpc>
+                <a:spcPct val="120000"/>
+              </a:lnSpc>
+              <a:buNone/>
+            </a:pPr>
+            <a:r>
+              <a:rPr lang="en-US" sz="3400" b="1" dirty="0">
+                <a:solidFill>
+                  <a:srgbClr val="111827"/>
+                </a:solidFill>
+                <a:latin typeface="Pretendard" pitchFamily="34" charset="0"/>
+                <a:ea typeface="Pretendard" pitchFamily="34" charset="-122"/>
+                <a:cs typeface="Pretendard" pitchFamily="34" charset="-120"/>
+              </a:rPr>
+              <a:t>Pipeline Diagram</a:t>
+            </a:r>
+            <a:endParaRPr lang="en-US" sz="3400" dirty="0"/>
+          </a:p>
+        </p:txBody>
+      </p:sp>
+      <p:sp>
+        <p:nvSpPr>
+          <p:cNvPr id="4" name="Shape 2"/>
+          <p:cNvSpPr/>
+          <p:nvPr/>
+        </p:nvSpPr>
+        <p:spPr>
+          <a:xfrm>
+            <a:off x="4002024" y="3095244"/>
+            <a:ext cx="457200" cy="0"/>
+          </a:xfrm>
+          <a:prstGeom prst="line">
+            <a:avLst/>
+          </a:prstGeom>
+          <a:noFill/>
+          <a:ln w="12700">
+            <a:solidFill>
+              <a:srgbClr val="2563EB"/>
+            </a:solidFill>
+            <a:prstDash val="solid"/>
+            <a:tailEnd type="triangle"/>
+          </a:ln>
+        </p:spPr>
+      </p:sp>
+      <p:sp>
+        <p:nvSpPr>
+          <p:cNvPr id="5" name="Shape 3"/>
+          <p:cNvSpPr/>
+          <p:nvPr/>
+        </p:nvSpPr>
+        <p:spPr>
+          <a:xfrm>
+            <a:off x="7748016" y="3095244"/>
+            <a:ext cx="457200" cy="0"/>
+          </a:xfrm>
+          <a:prstGeom prst="line">
+            <a:avLst/>
+          </a:prstGeom>
+          <a:noFill/>
+          <a:ln w="12700">
+            <a:solidFill>
+              <a:srgbClr val="2563EB"/>
+            </a:solidFill>
+            <a:prstDash val="solid"/>
+            <a:tailEnd type="triangle"/>
+          </a:ln>
+        </p:spPr>
+      </p:sp>
+      <p:sp>
+        <p:nvSpPr>
+          <p:cNvPr id="6" name="Shape 4"/>
+          <p:cNvSpPr/>
+          <p:nvPr/>
+        </p:nvSpPr>
+        <p:spPr>
+          <a:xfrm>
+            <a:off x="9849612" y="3627791"/>
+            <a:ext cx="0" cy="416235"/>
+          </a:xfrm>
+          <a:prstGeom prst="line">
+            <a:avLst/>
+          </a:prstGeom>
+          <a:noFill/>
+          <a:ln w="12700">
+            <a:solidFill>
+              <a:srgbClr val="2563EB"/>
+            </a:solidFill>
+            <a:prstDash val="solid"/>
+            <a:tailEnd type="triangle"/>
+          </a:ln>
+        </p:spPr>
+      </p:sp>
+      <p:sp>
+        <p:nvSpPr>
+          <p:cNvPr id="7" name="Shape 5"/>
+          <p:cNvSpPr/>
+          <p:nvPr/>
+        </p:nvSpPr>
+        <p:spPr>
+          <a:xfrm>
+            <a:off x="7748016" y="4576572"/>
+            <a:ext cx="457200" cy="0"/>
+          </a:xfrm>
+          <a:prstGeom prst="line">
+            <a:avLst/>
+          </a:prstGeom>
+          <a:noFill/>
+          <a:ln w="12700">
+            <a:solidFill>
+              <a:srgbClr val="2563EB"/>
+            </a:solidFill>
+            <a:prstDash val="solid"/>
+            <a:headEnd type="triangle"/>
+          </a:ln>
+        </p:spPr>
+      </p:sp>
+      <p:sp>
+        <p:nvSpPr>
+          <p:cNvPr id="8" name="Shape 6"/>
+          <p:cNvSpPr/>
+          <p:nvPr/>
+        </p:nvSpPr>
+        <p:spPr>
+          <a:xfrm>
+            <a:off x="4002024" y="4576572"/>
+            <a:ext cx="457200" cy="0"/>
+          </a:xfrm>
+          <a:prstGeom prst="line">
+            <a:avLst/>
+          </a:prstGeom>
+          <a:noFill/>
+          <a:ln w="12700">
+            <a:solidFill>
+              <a:srgbClr val="2563EB"/>
+            </a:solidFill>
+            <a:prstDash val="solid"/>
+            <a:headEnd type="triangle"/>
+          </a:ln>
+        </p:spPr>
+      </p:sp>
+      <p:sp>
+        <p:nvSpPr>
+          <p:cNvPr id="9" name="Shape 7"/>
+          <p:cNvSpPr/>
+          <p:nvPr/>
+        </p:nvSpPr>
+        <p:spPr>
+          <a:xfrm>
+            <a:off x="640080" y="2510028"/>
+            <a:ext cx="3435096" cy="1170432"/>
+          </a:xfrm>
+          <a:prstGeom prst="roundRect">
+            <a:avLst>
+              <a:gd name="adj" fmla="val 4688"/>
+            </a:avLst>
+          </a:prstGeom>
+          <a:solidFill>
+            <a:srgbClr val="FFFFFF"/>
+          </a:solidFill>
+          <a:ln w="12700">
+            <a:solidFill>
+              <a:srgbClr val="2563EB"/>
+            </a:solidFill>
+            <a:prstDash val="solid"/>
+          </a:ln>
+          <a:effectLst>
+            <a:outerShdw sx="100000" sy="100000" kx="0" ky="0" algn="bl" rotWithShape="0" blurRad="12700" dist="50800" dir="2700000">
+              <a:srgbClr val="000000">
+                <a:alpha val="12000"/>
+              </a:srgbClr>
+            </a:outerShdw>
+          </a:effectLst>
+        </p:spPr>
+      </p:sp>
+      <p:sp>
+        <p:nvSpPr>
+          <p:cNvPr id="10" name="Shape 8"/>
+          <p:cNvSpPr/>
+          <p:nvPr/>
+        </p:nvSpPr>
+        <p:spPr>
+          <a:xfrm>
+            <a:off x="640080" y="2510028"/>
+            <a:ext cx="3435096" cy="109728"/>
+          </a:xfrm>
+          <a:prstGeom prst="rect">
+            <a:avLst/>
+          </a:prstGeom>
+          <a:solidFill>
+            <a:srgbClr val="2563EB"/>
+          </a:solidFill>
+          <a:ln w="12700">
+            <a:solidFill>
+              <a:srgbClr val="2563EB">
+                <a:alpha val="0"/>
+              </a:srgbClr>
+            </a:solidFill>
+            <a:prstDash val="solid"/>
+          </a:ln>
+        </p:spPr>
+      </p:sp>
+      <p:sp>
+        <p:nvSpPr>
+          <p:cNvPr id="11" name="Shape 9"/>
+          <p:cNvSpPr/>
+          <p:nvPr/>
+        </p:nvSpPr>
+        <p:spPr>
+          <a:xfrm>
+            <a:off x="804672" y="2907975"/>
+            <a:ext cx="374538" cy="374538"/>
+          </a:xfrm>
+          <a:prstGeom prst="ellipse">
+            <a:avLst/>
+          </a:prstGeom>
+          <a:solidFill>
+            <a:srgbClr val="2563EB"/>
+          </a:solidFill>
+          <a:ln w="12700">
+            <a:solidFill>
+              <a:srgbClr val="2563EB">
+                <a:alpha val="0"/>
+              </a:srgbClr>
+            </a:solidFill>
+            <a:prstDash val="solid"/>
+          </a:ln>
+        </p:spPr>
+      </p:sp>
+      <p:sp>
+        <p:nvSpPr>
+          <p:cNvPr id="12" name="Text 10"/>
+          <p:cNvSpPr txBox="1"/>
+          <p:nvPr/>
+        </p:nvSpPr>
+        <p:spPr>
+          <a:xfrm>
+            <a:off x="804672" y="2907975"/>
+            <a:ext cx="374538" cy="374538"/>
+          </a:xfrm>
+          <a:prstGeom prst="rect">
+            <a:avLst/>
+          </a:prstGeom>
+          <a:noFill/>
+          <a:ln/>
+        </p:spPr>
+        <p:txBody>
+          <a:bodyPr wrap="square" lIns="0" tIns="0" rIns="0" bIns="0" rtlCol="0" anchor="ctr">
+            <a:normAutofit/>
+          </a:bodyPr>
+          <a:lstStyle/>
+          <a:p>
+            <a:pPr algn="ctr" indent="0" marL="0">
+              <a:lnSpc>
+                <a:spcPct val="120000"/>
+              </a:lnSpc>
+              <a:buNone/>
+            </a:pPr>
+            <a:r>
+              <a:rPr lang="en-US" sz="1500" b="1" dirty="0">
+                <a:solidFill>
+                  <a:srgbClr val="F8FAFC"/>
+                </a:solidFill>
+                <a:latin typeface="Pretendard" pitchFamily="34" charset="0"/>
+                <a:ea typeface="Pretendard" pitchFamily="34" charset="-122"/>
+                <a:cs typeface="Pretendard" pitchFamily="34" charset="-120"/>
+              </a:rPr>
+              <a:t>1</a:t>
+            </a:r>
+            <a:endParaRPr lang="en-US" sz="1500" dirty="0"/>
+          </a:p>
+        </p:txBody>
+      </p:sp>
+      <p:sp>
+        <p:nvSpPr>
+          <p:cNvPr id="13" name="Text 11"/>
+          <p:cNvSpPr txBox="1"/>
+          <p:nvPr/>
+        </p:nvSpPr>
+        <p:spPr>
+          <a:xfrm>
+            <a:off x="1325514" y="2638044"/>
+            <a:ext cx="2585070" cy="914400"/>
+          </a:xfrm>
+          <a:prstGeom prst="rect">
+            <a:avLst/>
+          </a:prstGeom>
+          <a:noFill/>
+          <a:ln/>
+        </p:spPr>
+        <p:txBody>
+          <a:bodyPr wrap="square" lIns="0" tIns="25400" rIns="25400" bIns="0" rtlCol="0" anchor="ctr">
+            <a:normAutofit/>
+          </a:bodyPr>
+          <a:lstStyle/>
+          <a:p>
+            <a:pPr algn="l" indent="0" marL="0">
+              <a:lnSpc>
+                <a:spcPct val="92000"/>
+              </a:lnSpc>
+              <a:buNone/>
+            </a:pPr>
+            <a:r>
+              <a:rPr lang="en-US" sz="1600" dirty="0">
+                <a:solidFill>
+                  <a:srgbClr val="111827"/>
+                </a:solidFill>
+                <a:latin typeface="Pretendard" pitchFamily="34" charset="0"/>
+                <a:ea typeface="Pretendard" pitchFamily="34" charset="-122"/>
+                <a:cs typeface="Pretendard" pitchFamily="34" charset="-120"/>
+              </a:rPr>
+              <a:t>Markdown source</a:t>
+            </a:r>
+            <a:endParaRPr lang="en-US" sz="1600" dirty="0"/>
+          </a:p>
+        </p:txBody>
+      </p:sp>
+      <p:sp>
+        <p:nvSpPr>
+          <p:cNvPr id="14" name="Shape 12"/>
+          <p:cNvSpPr/>
+          <p:nvPr/>
+        </p:nvSpPr>
+        <p:spPr>
+          <a:xfrm>
+            <a:off x="4386072" y="2510028"/>
+            <a:ext cx="3435096" cy="1170432"/>
+          </a:xfrm>
+          <a:prstGeom prst="roundRect">
+            <a:avLst>
+              <a:gd name="adj" fmla="val 4688"/>
+            </a:avLst>
+          </a:prstGeom>
+          <a:solidFill>
+            <a:srgbClr val="FFFFFF"/>
+          </a:solidFill>
+          <a:ln w="12700">
+            <a:solidFill>
+              <a:srgbClr val="2563EB"/>
+            </a:solidFill>
+            <a:prstDash val="solid"/>
+          </a:ln>
+          <a:effectLst>
+            <a:outerShdw sx="100000" sy="100000" kx="0" ky="0" algn="bl" rotWithShape="0" blurRad="12700" dist="50800" dir="2700000">
+              <a:srgbClr val="000000">
+                <a:alpha val="12000"/>
+              </a:srgbClr>
+            </a:outerShdw>
+          </a:effectLst>
+        </p:spPr>
+      </p:sp>
+      <p:sp>
+        <p:nvSpPr>
+          <p:cNvPr id="15" name="Shape 13"/>
+          <p:cNvSpPr/>
+          <p:nvPr/>
+        </p:nvSpPr>
+        <p:spPr>
+          <a:xfrm>
+            <a:off x="4386072" y="2510028"/>
+            <a:ext cx="3435096" cy="109728"/>
+          </a:xfrm>
+          <a:prstGeom prst="rect">
+            <a:avLst/>
+          </a:prstGeom>
+          <a:solidFill>
+            <a:srgbClr val="2563EB"/>
+          </a:solidFill>
+          <a:ln w="12700">
+            <a:solidFill>
+              <a:srgbClr val="2563EB">
+                <a:alpha val="0"/>
+              </a:srgbClr>
+            </a:solidFill>
+            <a:prstDash val="solid"/>
+          </a:ln>
+        </p:spPr>
+      </p:sp>
+      <p:sp>
+        <p:nvSpPr>
+          <p:cNvPr id="16" name="Shape 14"/>
+          <p:cNvSpPr/>
+          <p:nvPr/>
+        </p:nvSpPr>
+        <p:spPr>
+          <a:xfrm>
+            <a:off x="4550664" y="2907975"/>
+            <a:ext cx="374538" cy="374538"/>
+          </a:xfrm>
+          <a:prstGeom prst="ellipse">
+            <a:avLst/>
+          </a:prstGeom>
+          <a:solidFill>
+            <a:srgbClr val="2563EB"/>
+          </a:solidFill>
+          <a:ln w="12700">
+            <a:solidFill>
+              <a:srgbClr val="2563EB">
+                <a:alpha val="0"/>
+              </a:srgbClr>
+            </a:solidFill>
+            <a:prstDash val="solid"/>
+          </a:ln>
+        </p:spPr>
+      </p:sp>
+      <p:sp>
+        <p:nvSpPr>
+          <p:cNvPr id="17" name="Text 15"/>
+          <p:cNvSpPr txBox="1"/>
+          <p:nvPr/>
+        </p:nvSpPr>
+        <p:spPr>
+          <a:xfrm>
+            <a:off x="4550664" y="2907975"/>
+            <a:ext cx="374538" cy="374538"/>
+          </a:xfrm>
+          <a:prstGeom prst="rect">
+            <a:avLst/>
+          </a:prstGeom>
+          <a:noFill/>
+          <a:ln/>
+        </p:spPr>
+        <p:txBody>
+          <a:bodyPr wrap="square" lIns="0" tIns="0" rIns="0" bIns="0" rtlCol="0" anchor="ctr">
+            <a:normAutofit/>
+          </a:bodyPr>
+          <a:lstStyle/>
+          <a:p>
+            <a:pPr algn="ctr" indent="0" marL="0">
+              <a:lnSpc>
+                <a:spcPct val="120000"/>
+              </a:lnSpc>
+              <a:buNone/>
+            </a:pPr>
+            <a:r>
+              <a:rPr lang="en-US" sz="1500" b="1" dirty="0">
+                <a:solidFill>
+                  <a:srgbClr val="F8FAFC"/>
+                </a:solidFill>
+                <a:latin typeface="Pretendard" pitchFamily="34" charset="0"/>
+                <a:ea typeface="Pretendard" pitchFamily="34" charset="-122"/>
+                <a:cs typeface="Pretendard" pitchFamily="34" charset="-120"/>
+              </a:rPr>
+              <a:t>2</a:t>
+            </a:r>
+            <a:endParaRPr lang="en-US" sz="1500" dirty="0"/>
+          </a:p>
+        </p:txBody>
+      </p:sp>
+      <p:sp>
+        <p:nvSpPr>
+          <p:cNvPr id="18" name="Text 16"/>
+          <p:cNvSpPr txBox="1"/>
+          <p:nvPr/>
+        </p:nvSpPr>
+        <p:spPr>
+          <a:xfrm>
+            <a:off x="5071506" y="2638044"/>
+            <a:ext cx="2585070" cy="914400"/>
+          </a:xfrm>
+          <a:prstGeom prst="rect">
+            <a:avLst/>
+          </a:prstGeom>
+          <a:noFill/>
+          <a:ln/>
+        </p:spPr>
+        <p:txBody>
+          <a:bodyPr wrap="square" lIns="0" tIns="25400" rIns="25400" bIns="0" rtlCol="0" anchor="ctr">
+            <a:normAutofit/>
+          </a:bodyPr>
+          <a:lstStyle/>
+          <a:p>
+            <a:pPr algn="l" indent="0" marL="0">
+              <a:lnSpc>
+                <a:spcPct val="92000"/>
+              </a:lnSpc>
+              <a:buNone/>
+            </a:pPr>
+            <a:r>
+              <a:rPr lang="en-US" sz="1600" dirty="0">
+                <a:solidFill>
+                  <a:srgbClr val="111827"/>
+                </a:solidFill>
+                <a:latin typeface="Pretendard" pitchFamily="34" charset="0"/>
+                <a:ea typeface="Pretendard" pitchFamily="34" charset="-122"/>
+                <a:cs typeface="Pretendard" pitchFamily="34" charset="-120"/>
+              </a:rPr>
+              <a:t>Parse blocks</a:t>
+            </a:r>
+            <a:endParaRPr lang="en-US" sz="1600" dirty="0"/>
+          </a:p>
+        </p:txBody>
+      </p:sp>
+      <p:sp>
+        <p:nvSpPr>
+          <p:cNvPr id="19" name="Shape 17"/>
+          <p:cNvSpPr/>
+          <p:nvPr/>
+        </p:nvSpPr>
+        <p:spPr>
+          <a:xfrm>
+            <a:off x="8132064" y="2510028"/>
+            <a:ext cx="3435096" cy="1170432"/>
+          </a:xfrm>
+          <a:prstGeom prst="roundRect">
+            <a:avLst>
+              <a:gd name="adj" fmla="val 4688"/>
+            </a:avLst>
+          </a:prstGeom>
+          <a:solidFill>
+            <a:srgbClr val="FFFFFF"/>
+          </a:solidFill>
+          <a:ln w="12700">
+            <a:solidFill>
+              <a:srgbClr val="2563EB"/>
+            </a:solidFill>
+            <a:prstDash val="solid"/>
+          </a:ln>
+          <a:effectLst>
+            <a:outerShdw sx="100000" sy="100000" kx="0" ky="0" algn="bl" rotWithShape="0" blurRad="12700" dist="50800" dir="2700000">
+              <a:srgbClr val="000000">
+                <a:alpha val="12000"/>
+              </a:srgbClr>
+            </a:outerShdw>
+          </a:effectLst>
+        </p:spPr>
+      </p:sp>
+      <p:sp>
+        <p:nvSpPr>
+          <p:cNvPr id="20" name="Shape 18"/>
+          <p:cNvSpPr/>
+          <p:nvPr/>
+        </p:nvSpPr>
+        <p:spPr>
+          <a:xfrm>
+            <a:off x="8132064" y="2510028"/>
+            <a:ext cx="3435096" cy="109728"/>
+          </a:xfrm>
+          <a:prstGeom prst="rect">
+            <a:avLst/>
+          </a:prstGeom>
+          <a:solidFill>
+            <a:srgbClr val="2563EB"/>
+          </a:solidFill>
+          <a:ln w="12700">
+            <a:solidFill>
+              <a:srgbClr val="2563EB">
+                <a:alpha val="0"/>
+              </a:srgbClr>
+            </a:solidFill>
+            <a:prstDash val="solid"/>
+          </a:ln>
+        </p:spPr>
+      </p:sp>
+      <p:sp>
+        <p:nvSpPr>
+          <p:cNvPr id="21" name="Shape 19"/>
+          <p:cNvSpPr/>
+          <p:nvPr/>
+        </p:nvSpPr>
+        <p:spPr>
+          <a:xfrm>
+            <a:off x="8296656" y="2907975"/>
+            <a:ext cx="374538" cy="374538"/>
+          </a:xfrm>
+          <a:prstGeom prst="ellipse">
+            <a:avLst/>
+          </a:prstGeom>
+          <a:solidFill>
+            <a:srgbClr val="2563EB"/>
+          </a:solidFill>
+          <a:ln w="12700">
+            <a:solidFill>
+              <a:srgbClr val="2563EB">
+                <a:alpha val="0"/>
+              </a:srgbClr>
+            </a:solidFill>
+            <a:prstDash val="solid"/>
+          </a:ln>
+        </p:spPr>
+      </p:sp>
+      <p:sp>
+        <p:nvSpPr>
+          <p:cNvPr id="22" name="Text 20"/>
+          <p:cNvSpPr txBox="1"/>
+          <p:nvPr/>
+        </p:nvSpPr>
+        <p:spPr>
+          <a:xfrm>
+            <a:off x="8296656" y="2907975"/>
+            <a:ext cx="374538" cy="374538"/>
+          </a:xfrm>
+          <a:prstGeom prst="rect">
+            <a:avLst/>
+          </a:prstGeom>
+          <a:noFill/>
+          <a:ln/>
+        </p:spPr>
+        <p:txBody>
+          <a:bodyPr wrap="square" lIns="0" tIns="0" rIns="0" bIns="0" rtlCol="0" anchor="ctr">
+            <a:normAutofit/>
+          </a:bodyPr>
+          <a:lstStyle/>
+          <a:p>
+            <a:pPr algn="ctr" indent="0" marL="0">
+              <a:lnSpc>
+                <a:spcPct val="120000"/>
+              </a:lnSpc>
+              <a:buNone/>
+            </a:pPr>
+            <a:r>
+              <a:rPr lang="en-US" sz="1500" b="1" dirty="0">
+                <a:solidFill>
+                  <a:srgbClr val="F8FAFC"/>
+                </a:solidFill>
+                <a:latin typeface="Pretendard" pitchFamily="34" charset="0"/>
+                <a:ea typeface="Pretendard" pitchFamily="34" charset="-122"/>
+                <a:cs typeface="Pretendard" pitchFamily="34" charset="-120"/>
+              </a:rPr>
+              <a:t>3</a:t>
+            </a:r>
+            <a:endParaRPr lang="en-US" sz="1500" dirty="0"/>
+          </a:p>
+        </p:txBody>
+      </p:sp>
+      <p:sp>
+        <p:nvSpPr>
+          <p:cNvPr id="23" name="Text 21"/>
+          <p:cNvSpPr txBox="1"/>
+          <p:nvPr/>
+        </p:nvSpPr>
+        <p:spPr>
+          <a:xfrm>
+            <a:off x="8817498" y="2638044"/>
+            <a:ext cx="2585070" cy="914400"/>
+          </a:xfrm>
+          <a:prstGeom prst="rect">
+            <a:avLst/>
+          </a:prstGeom>
+          <a:noFill/>
+          <a:ln/>
+        </p:spPr>
+        <p:txBody>
+          <a:bodyPr wrap="square" lIns="0" tIns="25400" rIns="25400" bIns="0" rtlCol="0" anchor="ctr">
+            <a:normAutofit/>
+          </a:bodyPr>
+          <a:lstStyle/>
+          <a:p>
+            <a:pPr algn="l" indent="0" marL="0">
+              <a:lnSpc>
+                <a:spcPct val="92000"/>
+              </a:lnSpc>
+              <a:buNone/>
+            </a:pPr>
+            <a:r>
+              <a:rPr lang="en-US" sz="1600" dirty="0">
+                <a:solidFill>
+                  <a:srgbClr val="111827"/>
+                </a:solidFill>
+                <a:latin typeface="Pretendard" pitchFamily="34" charset="0"/>
+                <a:ea typeface="Pretendard" pitchFamily="34" charset="-122"/>
+                <a:cs typeface="Pretendard" pitchFamily="34" charset="-120"/>
+              </a:rPr>
+              <a:t>Split slides</a:t>
+            </a:r>
+            <a:endParaRPr lang="en-US" sz="1600" dirty="0"/>
+          </a:p>
+        </p:txBody>
+      </p:sp>
+      <p:sp>
+        <p:nvSpPr>
+          <p:cNvPr id="24" name="Shape 22"/>
+          <p:cNvSpPr/>
+          <p:nvPr/>
+        </p:nvSpPr>
+        <p:spPr>
+          <a:xfrm>
+            <a:off x="8132064" y="3991356"/>
+            <a:ext cx="3435096" cy="1170432"/>
+          </a:xfrm>
+          <a:prstGeom prst="roundRect">
+            <a:avLst>
+              <a:gd name="adj" fmla="val 4688"/>
+            </a:avLst>
+          </a:prstGeom>
+          <a:solidFill>
+            <a:srgbClr val="FFFFFF"/>
+          </a:solidFill>
+          <a:ln w="12700">
+            <a:solidFill>
+              <a:srgbClr val="2563EB"/>
+            </a:solidFill>
+            <a:prstDash val="solid"/>
+          </a:ln>
+          <a:effectLst>
+            <a:outerShdw sx="100000" sy="100000" kx="0" ky="0" algn="bl" rotWithShape="0" blurRad="12700" dist="50800" dir="2700000">
+              <a:srgbClr val="000000">
+                <a:alpha val="12000"/>
+              </a:srgbClr>
+            </a:outerShdw>
+          </a:effectLst>
+        </p:spPr>
+      </p:sp>
+      <p:sp>
+        <p:nvSpPr>
+          <p:cNvPr id="25" name="Shape 23"/>
+          <p:cNvSpPr/>
+          <p:nvPr/>
+        </p:nvSpPr>
+        <p:spPr>
+          <a:xfrm>
+            <a:off x="8132064" y="3991356"/>
+            <a:ext cx="3435096" cy="109728"/>
+          </a:xfrm>
+          <a:prstGeom prst="rect">
+            <a:avLst/>
+          </a:prstGeom>
+          <a:solidFill>
+            <a:srgbClr val="2563EB"/>
+          </a:solidFill>
+          <a:ln w="12700">
+            <a:solidFill>
+              <a:srgbClr val="2563EB">
+                <a:alpha val="0"/>
+              </a:srgbClr>
+            </a:solidFill>
+            <a:prstDash val="solid"/>
+          </a:ln>
+        </p:spPr>
+      </p:sp>
+      <p:sp>
+        <p:nvSpPr>
+          <p:cNvPr id="26" name="Shape 24"/>
+          <p:cNvSpPr/>
+          <p:nvPr/>
+        </p:nvSpPr>
+        <p:spPr>
+          <a:xfrm>
+            <a:off x="8296656" y="4389303"/>
+            <a:ext cx="374538" cy="374538"/>
+          </a:xfrm>
+          <a:prstGeom prst="ellipse">
+            <a:avLst/>
+          </a:prstGeom>
+          <a:solidFill>
+            <a:srgbClr val="2563EB"/>
+          </a:solidFill>
+          <a:ln w="12700">
+            <a:solidFill>
+              <a:srgbClr val="2563EB">
+                <a:alpha val="0"/>
+              </a:srgbClr>
+            </a:solidFill>
+            <a:prstDash val="solid"/>
+          </a:ln>
+        </p:spPr>
+      </p:sp>
+      <p:sp>
+        <p:nvSpPr>
+          <p:cNvPr id="27" name="Text 25"/>
+          <p:cNvSpPr txBox="1"/>
+          <p:nvPr/>
+        </p:nvSpPr>
+        <p:spPr>
+          <a:xfrm>
+            <a:off x="8296656" y="4389303"/>
+            <a:ext cx="374538" cy="374538"/>
+          </a:xfrm>
+          <a:prstGeom prst="rect">
+            <a:avLst/>
+          </a:prstGeom>
+          <a:noFill/>
+          <a:ln/>
+        </p:spPr>
+        <p:txBody>
+          <a:bodyPr wrap="square" lIns="0" tIns="0" rIns="0" bIns="0" rtlCol="0" anchor="ctr">
+            <a:normAutofit/>
+          </a:bodyPr>
+          <a:lstStyle/>
+          <a:p>
+            <a:pPr algn="ctr" indent="0" marL="0">
+              <a:lnSpc>
+                <a:spcPct val="120000"/>
+              </a:lnSpc>
+              <a:buNone/>
+            </a:pPr>
+            <a:r>
+              <a:rPr lang="en-US" sz="1500" b="1" dirty="0">
+                <a:solidFill>
+                  <a:srgbClr val="F8FAFC"/>
+                </a:solidFill>
+                <a:latin typeface="Pretendard" pitchFamily="34" charset="0"/>
+                <a:ea typeface="Pretendard" pitchFamily="34" charset="-122"/>
+                <a:cs typeface="Pretendard" pitchFamily="34" charset="-120"/>
+              </a:rPr>
+              <a:t>4</a:t>
+            </a:r>
+            <a:endParaRPr lang="en-US" sz="1500" dirty="0"/>
+          </a:p>
+        </p:txBody>
+      </p:sp>
+      <p:sp>
+        <p:nvSpPr>
+          <p:cNvPr id="28" name="Text 26"/>
+          <p:cNvSpPr txBox="1"/>
+          <p:nvPr/>
+        </p:nvSpPr>
+        <p:spPr>
+          <a:xfrm>
+            <a:off x="8817498" y="4119372"/>
+            <a:ext cx="2585070" cy="914400"/>
+          </a:xfrm>
+          <a:prstGeom prst="rect">
+            <a:avLst/>
+          </a:prstGeom>
+          <a:noFill/>
+          <a:ln/>
+        </p:spPr>
+        <p:txBody>
+          <a:bodyPr wrap="square" lIns="0" tIns="25400" rIns="25400" bIns="0" rtlCol="0" anchor="ctr">
+            <a:normAutofit/>
+          </a:bodyPr>
+          <a:lstStyle/>
+          <a:p>
+            <a:pPr algn="l" indent="0" marL="0">
+              <a:lnSpc>
+                <a:spcPct val="92000"/>
+              </a:lnSpc>
+              <a:buNone/>
+            </a:pPr>
+            <a:r>
+              <a:rPr lang="en-US" sz="1600" dirty="0">
+                <a:solidFill>
+                  <a:srgbClr val="111827"/>
+                </a:solidFill>
+                <a:latin typeface="Pretendard" pitchFamily="34" charset="0"/>
+                <a:ea typeface="Pretendard" pitchFamily="34" charset="-122"/>
+                <a:cs typeface="Pretendard" pitchFamily="34" charset="-120"/>
+              </a:rPr>
+              <a:t>Layout objects</a:t>
+            </a:r>
+            <a:endParaRPr lang="en-US" sz="1600" dirty="0"/>
+          </a:p>
+        </p:txBody>
+      </p:sp>
+      <p:sp>
+        <p:nvSpPr>
+          <p:cNvPr id="29" name="Shape 27"/>
+          <p:cNvSpPr/>
+          <p:nvPr/>
+        </p:nvSpPr>
+        <p:spPr>
+          <a:xfrm>
+            <a:off x="4386072" y="3991356"/>
+            <a:ext cx="3435096" cy="1170432"/>
+          </a:xfrm>
+          <a:prstGeom prst="roundRect">
+            <a:avLst>
+              <a:gd name="adj" fmla="val 4688"/>
+            </a:avLst>
+          </a:prstGeom>
+          <a:solidFill>
+            <a:srgbClr val="FFFFFF"/>
+          </a:solidFill>
+          <a:ln w="12700">
+            <a:solidFill>
+              <a:srgbClr val="2563EB"/>
+            </a:solidFill>
+            <a:prstDash val="solid"/>
+          </a:ln>
+          <a:effectLst>
+            <a:outerShdw sx="100000" sy="100000" kx="0" ky="0" algn="bl" rotWithShape="0" blurRad="12700" dist="50800" dir="2700000">
+              <a:srgbClr val="000000">
+                <a:alpha val="12000"/>
+              </a:srgbClr>
+            </a:outerShdw>
+          </a:effectLst>
+        </p:spPr>
+      </p:sp>
+      <p:sp>
+        <p:nvSpPr>
+          <p:cNvPr id="30" name="Shape 28"/>
+          <p:cNvSpPr/>
+          <p:nvPr/>
+        </p:nvSpPr>
+        <p:spPr>
+          <a:xfrm>
+            <a:off x="4386072" y="3991356"/>
+            <a:ext cx="3435096" cy="109728"/>
+          </a:xfrm>
+          <a:prstGeom prst="rect">
+            <a:avLst/>
+          </a:prstGeom>
+          <a:solidFill>
+            <a:srgbClr val="2563EB"/>
+          </a:solidFill>
+          <a:ln w="12700">
+            <a:solidFill>
+              <a:srgbClr val="2563EB">
+                <a:alpha val="0"/>
+              </a:srgbClr>
+            </a:solidFill>
+            <a:prstDash val="solid"/>
+          </a:ln>
+        </p:spPr>
+      </p:sp>
+      <p:sp>
+        <p:nvSpPr>
+          <p:cNvPr id="31" name="Shape 29"/>
+          <p:cNvSpPr/>
+          <p:nvPr/>
+        </p:nvSpPr>
+        <p:spPr>
+          <a:xfrm>
+            <a:off x="4550664" y="4389303"/>
+            <a:ext cx="374538" cy="374538"/>
+          </a:xfrm>
+          <a:prstGeom prst="ellipse">
+            <a:avLst/>
+          </a:prstGeom>
+          <a:solidFill>
+            <a:srgbClr val="2563EB"/>
+          </a:solidFill>
+          <a:ln w="12700">
+            <a:solidFill>
+              <a:srgbClr val="2563EB">
+                <a:alpha val="0"/>
+              </a:srgbClr>
+            </a:solidFill>
+            <a:prstDash val="solid"/>
+          </a:ln>
+        </p:spPr>
+      </p:sp>
+      <p:sp>
+        <p:nvSpPr>
+          <p:cNvPr id="32" name="Text 30"/>
+          <p:cNvSpPr txBox="1"/>
+          <p:nvPr/>
+        </p:nvSpPr>
+        <p:spPr>
+          <a:xfrm>
+            <a:off x="4550664" y="4389303"/>
+            <a:ext cx="374538" cy="374538"/>
+          </a:xfrm>
+          <a:prstGeom prst="rect">
+            <a:avLst/>
+          </a:prstGeom>
+          <a:noFill/>
+          <a:ln/>
+        </p:spPr>
+        <p:txBody>
+          <a:bodyPr wrap="square" lIns="0" tIns="0" rIns="0" bIns="0" rtlCol="0" anchor="ctr">
+            <a:normAutofit/>
+          </a:bodyPr>
+          <a:lstStyle/>
+          <a:p>
+            <a:pPr algn="ctr" indent="0" marL="0">
+              <a:lnSpc>
+                <a:spcPct val="120000"/>
+              </a:lnSpc>
+              <a:buNone/>
+            </a:pPr>
+            <a:r>
+              <a:rPr lang="en-US" sz="1500" b="1" dirty="0">
+                <a:solidFill>
+                  <a:srgbClr val="F8FAFC"/>
+                </a:solidFill>
+                <a:latin typeface="Pretendard" pitchFamily="34" charset="0"/>
+                <a:ea typeface="Pretendard" pitchFamily="34" charset="-122"/>
+                <a:cs typeface="Pretendard" pitchFamily="34" charset="-120"/>
+              </a:rPr>
+              <a:t>5</a:t>
+            </a:r>
+            <a:endParaRPr lang="en-US" sz="1500" dirty="0"/>
+          </a:p>
+        </p:txBody>
+      </p:sp>
+      <p:sp>
+        <p:nvSpPr>
+          <p:cNvPr id="33" name="Text 31"/>
+          <p:cNvSpPr txBox="1"/>
+          <p:nvPr/>
+        </p:nvSpPr>
+        <p:spPr>
+          <a:xfrm>
+            <a:off x="5071506" y="4119372"/>
+            <a:ext cx="2585070" cy="914400"/>
+          </a:xfrm>
+          <a:prstGeom prst="rect">
+            <a:avLst/>
+          </a:prstGeom>
+          <a:noFill/>
+          <a:ln/>
+        </p:spPr>
+        <p:txBody>
+          <a:bodyPr wrap="square" lIns="0" tIns="25400" rIns="25400" bIns="0" rtlCol="0" anchor="ctr">
+            <a:normAutofit/>
+          </a:bodyPr>
+          <a:lstStyle/>
+          <a:p>
+            <a:pPr algn="l" indent="0" marL="0">
+              <a:lnSpc>
+                <a:spcPct val="92000"/>
+              </a:lnSpc>
+              <a:buNone/>
+            </a:pPr>
+            <a:r>
+              <a:rPr lang="en-US" sz="1600" dirty="0">
+                <a:solidFill>
+                  <a:srgbClr val="111827"/>
+                </a:solidFill>
+                <a:latin typeface="Pretendard" pitchFamily="34" charset="0"/>
+                <a:ea typeface="Pretendard" pitchFamily="34" charset="-122"/>
+                <a:cs typeface="Pretendard" pitchFamily="34" charset="-120"/>
+              </a:rPr>
+              <a:t>Validate overflow</a:t>
+            </a:r>
+            <a:endParaRPr lang="en-US" sz="1600" dirty="0"/>
+          </a:p>
+        </p:txBody>
+      </p:sp>
+      <p:sp>
+        <p:nvSpPr>
+          <p:cNvPr id="34" name="Shape 32"/>
+          <p:cNvSpPr/>
+          <p:nvPr/>
+        </p:nvSpPr>
+        <p:spPr>
+          <a:xfrm>
+            <a:off x="640080" y="3991356"/>
+            <a:ext cx="3435096" cy="1170432"/>
+          </a:xfrm>
+          <a:prstGeom prst="roundRect">
+            <a:avLst>
+              <a:gd name="adj" fmla="val 4688"/>
+            </a:avLst>
+          </a:prstGeom>
+          <a:solidFill>
+            <a:srgbClr val="FFFFFF"/>
+          </a:solidFill>
+          <a:ln w="12700">
+            <a:solidFill>
+              <a:srgbClr val="2563EB"/>
+            </a:solidFill>
+            <a:prstDash val="solid"/>
+          </a:ln>
+          <a:effectLst>
+            <a:outerShdw sx="100000" sy="100000" kx="0" ky="0" algn="bl" rotWithShape="0" blurRad="12700" dist="50800" dir="2700000">
+              <a:srgbClr val="000000">
+                <a:alpha val="12000"/>
+              </a:srgbClr>
+            </a:outerShdw>
+          </a:effectLst>
+        </p:spPr>
+      </p:sp>
+      <p:sp>
+        <p:nvSpPr>
+          <p:cNvPr id="35" name="Shape 33"/>
+          <p:cNvSpPr/>
+          <p:nvPr/>
+        </p:nvSpPr>
+        <p:spPr>
+          <a:xfrm>
+            <a:off x="640080" y="3991356"/>
+            <a:ext cx="3435096" cy="109728"/>
+          </a:xfrm>
+          <a:prstGeom prst="rect">
+            <a:avLst/>
+          </a:prstGeom>
+          <a:solidFill>
+            <a:srgbClr val="2563EB"/>
+          </a:solidFill>
+          <a:ln w="12700">
+            <a:solidFill>
+              <a:srgbClr val="2563EB">
+                <a:alpha val="0"/>
+              </a:srgbClr>
+            </a:solidFill>
+            <a:prstDash val="solid"/>
+          </a:ln>
+        </p:spPr>
+      </p:sp>
+      <p:sp>
+        <p:nvSpPr>
+          <p:cNvPr id="36" name="Shape 34"/>
+          <p:cNvSpPr/>
+          <p:nvPr/>
+        </p:nvSpPr>
+        <p:spPr>
+          <a:xfrm>
+            <a:off x="804672" y="4389303"/>
+            <a:ext cx="374538" cy="374538"/>
+          </a:xfrm>
+          <a:prstGeom prst="ellipse">
+            <a:avLst/>
+          </a:prstGeom>
+          <a:solidFill>
+            <a:srgbClr val="2563EB"/>
+          </a:solidFill>
+          <a:ln w="12700">
+            <a:solidFill>
+              <a:srgbClr val="2563EB">
+                <a:alpha val="0"/>
+              </a:srgbClr>
+            </a:solidFill>
+            <a:prstDash val="solid"/>
+          </a:ln>
+        </p:spPr>
+      </p:sp>
+      <p:sp>
+        <p:nvSpPr>
+          <p:cNvPr id="37" name="Text 35"/>
+          <p:cNvSpPr txBox="1"/>
+          <p:nvPr/>
+        </p:nvSpPr>
+        <p:spPr>
+          <a:xfrm>
+            <a:off x="804672" y="4389303"/>
+            <a:ext cx="374538" cy="374538"/>
+          </a:xfrm>
+          <a:prstGeom prst="rect">
+            <a:avLst/>
+          </a:prstGeom>
+          <a:noFill/>
+          <a:ln/>
+        </p:spPr>
+        <p:txBody>
+          <a:bodyPr wrap="square" lIns="0" tIns="0" rIns="0" bIns="0" rtlCol="0" anchor="ctr">
+            <a:normAutofit/>
+          </a:bodyPr>
+          <a:lstStyle/>
+          <a:p>
+            <a:pPr algn="ctr" indent="0" marL="0">
+              <a:lnSpc>
+                <a:spcPct val="120000"/>
+              </a:lnSpc>
+              <a:buNone/>
+            </a:pPr>
+            <a:r>
+              <a:rPr lang="en-US" sz="1500" b="1" dirty="0">
+                <a:solidFill>
+                  <a:srgbClr val="F8FAFC"/>
+                </a:solidFill>
+                <a:latin typeface="Pretendard" pitchFamily="34" charset="0"/>
+                <a:ea typeface="Pretendard" pitchFamily="34" charset="-122"/>
+                <a:cs typeface="Pretendard" pitchFamily="34" charset="-120"/>
+              </a:rPr>
+              <a:t>6</a:t>
+            </a:r>
+            <a:endParaRPr lang="en-US" sz="1500" dirty="0"/>
+          </a:p>
+        </p:txBody>
+      </p:sp>
+      <p:sp>
+        <p:nvSpPr>
+          <p:cNvPr id="38" name="Text 36"/>
+          <p:cNvSpPr txBox="1"/>
+          <p:nvPr/>
+        </p:nvSpPr>
+        <p:spPr>
+          <a:xfrm>
+            <a:off x="1325514" y="4119372"/>
+            <a:ext cx="2585070" cy="914400"/>
+          </a:xfrm>
+          <a:prstGeom prst="rect">
+            <a:avLst/>
+          </a:prstGeom>
+          <a:noFill/>
+          <a:ln/>
+        </p:spPr>
+        <p:txBody>
+          <a:bodyPr wrap="square" lIns="0" tIns="25400" rIns="25400" bIns="0" rtlCol="0" anchor="ctr">
+            <a:normAutofit/>
+          </a:bodyPr>
+          <a:lstStyle/>
+          <a:p>
+            <a:pPr algn="l" indent="0" marL="0">
+              <a:lnSpc>
+                <a:spcPct val="92000"/>
+              </a:lnSpc>
+              <a:buNone/>
+            </a:pPr>
+            <a:r>
+              <a:rPr lang="en-US" sz="1600" dirty="0">
+                <a:solidFill>
+                  <a:srgbClr val="111827"/>
+                </a:solidFill>
+                <a:latin typeface="Pretendard" pitchFamily="34" charset="0"/>
+                <a:ea typeface="Pretendard" pitchFamily="34" charset="-122"/>
+                <a:cs typeface="Pretendard" pitchFamily="34" charset="-120"/>
+              </a:rPr>
+              <a:t>Render PPTX HTML PDF</a:t>
+            </a:r>
+            <a:endParaRPr lang="en-US" sz="1600" dirty="0"/>
+          </a:p>
+        </p:txBody>
+      </p:sp>
+    </p:spTree>
+  </p:cSld>
+  <p:clrMapOvr>
+    <a:masterClrMapping/>
+  </p:clrMapOvr>
+</p:sld>
+</file>
+
+<file path=ppt/slides/slide11.xml><?xml version="1.0" encoding="utf-8"?>
+<p:sld xmlns:a="http://schemas.openxmlformats.org/drawingml/2006/main" xmlns:r="http://schemas.openxmlformats.org/officeDocument/2006/relationships" xmlns:p="http://schemas.openxmlformats.org/presentationml/2006/main">
+  <p:cSld name="Slide 11">
+    <p:bg>
+      <p:bgPr>
+        <a:solidFill>
+          <a:srgbClr val="F8FAFC"/>
+        </a:solidFill>
+      </p:bgPr>
+    </p:bg>
+    <p:spTree>
+      <p:nvGrpSpPr>
+        <p:cNvPr id="1" name=""/>
+        <p:cNvGrpSpPr/>
+        <p:nvPr/>
+      </p:nvGrpSpPr>
+      <p:grpSpPr>
+        <a:xfrm>
+          <a:off x="0" y="0"/>
+          <a:ext cx="0" cy="0"/>
+          <a:chOff x="0" y="0"/>
+          <a:chExt cx="0" cy="0"/>
+        </a:xfrm>
+      </p:grpSpPr>
+      <p:sp>
+        <p:nvSpPr>
+          <p:cNvPr id="2" name="Shape 0"/>
+          <p:cNvSpPr/>
+          <p:nvPr/>
+        </p:nvSpPr>
+        <p:spPr>
+          <a:xfrm>
+            <a:off x="731520" y="1207008"/>
+            <a:ext cx="1325880" cy="54864"/>
+          </a:xfrm>
+          <a:prstGeom prst="rect">
+            <a:avLst/>
+          </a:prstGeom>
+          <a:solidFill>
+            <a:srgbClr val="2563EB"/>
+          </a:solidFill>
+          <a:ln w="12700">
+            <a:solidFill>
+              <a:srgbClr val="2563EB">
+                <a:alpha val="0"/>
+              </a:srgbClr>
+            </a:solidFill>
+            <a:prstDash val="solid"/>
+          </a:ln>
+        </p:spPr>
+      </p:sp>
+      <p:sp>
+        <p:nvSpPr>
+          <p:cNvPr id="3" name="Shape 1"/>
+          <p:cNvSpPr/>
+          <p:nvPr/>
+        </p:nvSpPr>
+        <p:spPr>
+          <a:xfrm>
+            <a:off x="914400" y="1463040"/>
+            <a:ext cx="10241280" cy="73152"/>
+          </a:xfrm>
+          <a:prstGeom prst="rect">
+            <a:avLst/>
+          </a:prstGeom>
+          <a:solidFill>
+            <a:srgbClr val="2563EB"/>
+          </a:solidFill>
+          <a:ln w="12700">
+            <a:solidFill>
+              <a:srgbClr val="2563EB">
+                <a:alpha val="0"/>
+              </a:srgbClr>
+            </a:solidFill>
+            <a:prstDash val="solid"/>
+          </a:ln>
+        </p:spPr>
+      </p:sp>
+      <p:sp>
+        <p:nvSpPr>
+          <p:cNvPr id="4" name="Text 2"/>
+          <p:cNvSpPr txBox="1"/>
+          <p:nvPr/>
+        </p:nvSpPr>
+        <p:spPr>
+          <a:xfrm>
+            <a:off x="731520" y="457200"/>
+            <a:ext cx="10698480" cy="731520"/>
+          </a:xfrm>
+          <a:prstGeom prst="rect">
+            <a:avLst/>
+          </a:prstGeom>
+          <a:noFill/>
+          <a:ln/>
+        </p:spPr>
+        <p:txBody>
+          <a:bodyPr wrap="square" lIns="0" tIns="0" rIns="0" bIns="0" rtlCol="0" anchor="ctr"/>
+          <a:lstStyle/>
+          <a:p>
+            <a:pPr algn="ctr" indent="0" marL="0">
+              <a:lnSpc>
+                <a:spcPct val="120000"/>
+              </a:lnSpc>
+              <a:buNone/>
+            </a:pPr>
+            <a:r>
+              <a:rPr lang="en-US" sz="3400" b="1" dirty="0">
+                <a:solidFill>
+                  <a:srgbClr val="111827"/>
+                </a:solidFill>
+                <a:latin typeface="Pretendard" pitchFamily="34" charset="0"/>
+                <a:ea typeface="Pretendard" pitchFamily="34" charset="-122"/>
+                <a:cs typeface="Pretendard" pitchFamily="34" charset="-120"/>
+              </a:rPr>
+              <a:t>Decoration Pattern Catalog</a:t>
+            </a:r>
+            <a:endParaRPr lang="en-US" sz="3400" dirty="0"/>
+          </a:p>
+        </p:txBody>
+      </p:sp>
+      <p:sp>
+        <p:nvSpPr>
+          <p:cNvPr id="5" name="Text 3"/>
+          <p:cNvSpPr txBox="1"/>
+          <p:nvPr/>
+        </p:nvSpPr>
+        <p:spPr>
+          <a:xfrm>
+            <a:off x="987552" y="1572768"/>
+            <a:ext cx="10094976" cy="4261104"/>
+          </a:xfrm>
+          <a:prstGeom prst="rect">
+            <a:avLst/>
+          </a:prstGeom>
+          <a:noFill/>
+          <a:ln/>
+        </p:spPr>
+        <p:txBody>
+          <a:bodyPr wrap="square" lIns="0" tIns="25400" rIns="25400" bIns="0" rtlCol="0" anchor="t"/>
+          <a:lstStyle/>
+          <a:p>
+            <a:pPr algn="l" indent="0" marL="0">
+              <a:lnSpc>
+                <a:spcPct val="120000"/>
+              </a:lnSpc>
+              <a:buNone/>
+            </a:pPr>
+            <a:r>
+              <a:rPr lang="en-US" sz="2200" b="1" dirty="0">
+                <a:solidFill>
+                  <a:srgbClr val="2563EB"/>
+                </a:solidFill>
+                <a:latin typeface="Pretendard" pitchFamily="34" charset="0"/>
+                <a:ea typeface="Pretendard" pitchFamily="34" charset="-122"/>
+                <a:cs typeface="Pretendard" pitchFamily="34" charset="-120"/>
+              </a:rPr>
+              <a:t>- Surfaces</a:t>
+            </a:r>
+            <a:pPr algn="l" indent="0" marL="0">
+              <a:lnSpc>
+                <a:spcPct val="120000"/>
+              </a:lnSpc>
+              <a:buNone/>
+            </a:pPr>
+            <a:r>
+              <a:rPr lang="en-US" sz="2200" dirty="0">
+                <a:solidFill>
+                  <a:srgbClr val="111827"/>
+                </a:solidFill>
+                <a:latin typeface="Pretendard" pitchFamily="34" charset="0"/>
+                <a:ea typeface="Pretendard" pitchFamily="34" charset="-122"/>
+                <a:cs typeface="Pretendard" pitchFamily="34" charset="-120"/>
+              </a:rPr>
+              <a:t>  rounded-card, two-corner-card, flag-drop, ticket-panel, notched-panel, circle-vine.</a:t>
+            </a:r>
+            <a:endParaRPr lang="en-US" sz="2200" dirty="0"/>
+          </a:p>
+          <a:p>
+            <a:pPr algn="l" indent="0" marL="0">
+              <a:lnSpc>
+                <a:spcPct val="120000"/>
+              </a:lnSpc>
+              <a:buNone/>
+            </a:pPr>
+            <a:r>
+              <a:rPr lang="en-US" sz="2200" b="1" dirty="0">
+                <a:solidFill>
+                  <a:srgbClr val="2563EB"/>
+                </a:solidFill>
+                <a:latin typeface="Pretendard" pitchFamily="34" charset="0"/>
+                <a:ea typeface="Pretendard" pitchFamily="34" charset="-122"/>
+                <a:cs typeface="Pretendard" pitchFamily="34" charset="-120"/>
+              </a:rPr>
+              <a:t>- Layouts</a:t>
+            </a:r>
+            <a:endParaRPr lang="en-US" sz="2200" dirty="0"/>
+          </a:p>
+          <a:p>
+            <a:pPr algn="l" indent="0" marL="0">
+              <a:lnSpc>
+                <a:spcPct val="120000"/>
+              </a:lnSpc>
+              <a:buNone/>
+            </a:pPr>
+            <a:r>
+              <a:rPr lang="en-US" sz="2200" dirty="0">
+                <a:solidFill>
+                  <a:srgbClr val="111827"/>
+                </a:solidFill>
+                <a:latin typeface="Pretendard" pitchFamily="34" charset="0"/>
+                <a:ea typeface="Pretendard" pitchFamily="34" charset="-122"/>
+                <a:cs typeface="Pretendard" pitchFamily="34" charset="-120"/>
+              </a:rPr>
+              <a:t>  toc-strips, two-column-compare, three-card-grid, six-tile-grid, timeline-rail, pipeline-chain.</a:t>
+            </a:r>
+            <a:endParaRPr lang="en-US" sz="2200" dirty="0"/>
+          </a:p>
+          <a:p>
+            <a:pPr algn="l" indent="0" marL="0">
+              <a:lnSpc>
+                <a:spcPct val="120000"/>
+              </a:lnSpc>
+              <a:buNone/>
+            </a:pPr>
+            <a:r>
+              <a:rPr lang="en-US" sz="2200" b="1" dirty="0">
+                <a:solidFill>
+                  <a:srgbClr val="2563EB"/>
+                </a:solidFill>
+                <a:latin typeface="Pretendard" pitchFamily="34" charset="0"/>
+                <a:ea typeface="Pretendard" pitchFamily="34" charset="-122"/>
+                <a:cs typeface="Pretendard" pitchFamily="34" charset="-120"/>
+              </a:rPr>
+              <a:t>- Evidence</a:t>
+            </a:r>
+            <a:endParaRPr lang="en-US" sz="2200" dirty="0"/>
+          </a:p>
+          <a:p>
+            <a:pPr algn="l" indent="0" marL="0">
+              <a:lnSpc>
+                <a:spcPct val="120000"/>
+              </a:lnSpc>
+              <a:buNone/>
+            </a:pPr>
+            <a:r>
+              <a:rPr lang="en-US" sz="2200" dirty="0">
+                <a:solidFill>
+                  <a:srgbClr val="111827"/>
+                </a:solidFill>
+                <a:latin typeface="Pretendard" pitchFamily="34" charset="0"/>
+                <a:ea typeface="Pretendard" pitchFamily="34" charset="-122"/>
+                <a:cs typeface="Pretendard" pitchFamily="34" charset="-120"/>
+              </a:rPr>
+              <a:t>  chart-table-pair, metric-proof, arc-ring-proof, gauge-proof, connected-strip, mixed-object-pack.</a:t>
+            </a:r>
+            <a:endParaRPr lang="en-US" sz="2200" dirty="0"/>
+          </a:p>
+          <a:p>
+            <a:pPr algn="l" indent="0" marL="0">
+              <a:lnSpc>
+                <a:spcPct val="120000"/>
+              </a:lnSpc>
+              <a:buNone/>
+            </a:pPr>
+            <a:r>
+              <a:rPr lang="en-US" sz="2200" b="1" dirty="0">
+                <a:solidFill>
+                  <a:srgbClr val="2563EB"/>
+                </a:solidFill>
+                <a:latin typeface="Pretendard" pitchFamily="34" charset="0"/>
+                <a:ea typeface="Pretendard" pitchFamily="34" charset="-122"/>
+                <a:cs typeface="Pretendard" pitchFamily="34" charset="-120"/>
+              </a:rPr>
+              <a:t>- Connectors</a:t>
+            </a:r>
+            <a:endParaRPr lang="en-US" sz="2200" dirty="0"/>
+          </a:p>
+          <a:p>
+            <a:pPr algn="l" indent="0" marL="0">
+              <a:lnSpc>
+                <a:spcPct val="120000"/>
+              </a:lnSpc>
+              <a:buNone/>
+            </a:pPr>
+            <a:r>
+              <a:rPr lang="en-US" sz="2200" dirty="0">
+                <a:solidFill>
+                  <a:srgbClr val="111827"/>
+                </a:solidFill>
+                <a:latin typeface="Pretendard" pitchFamily="34" charset="0"/>
+                <a:ea typeface="Pretendard" pitchFamily="34" charset="-122"/>
+                <a:cs typeface="Pretendard" pitchFamily="34" charset="-120"/>
+              </a:rPr>
+              <a:t>  straight-arrow, elbow-arrow, boundary-attach, overlap-joint, parallel-flow, contrast-flow.</a:t>
+            </a:r>
+            <a:endParaRPr lang="en-US" sz="2200" dirty="0"/>
+          </a:p>
+        </p:txBody>
+      </p:sp>
+    </p:spTree>
+  </p:cSld>
+  <p:clrMapOvr>
+    <a:masterClrMapping/>
+  </p:clrMapOvr>
+</p:sld>
+</file>
+
+<file path=ppt/slides/slide12.xml><?xml version="1.0" encoding="utf-8"?>
+<p:sld xmlns:a="http://schemas.openxmlformats.org/drawingml/2006/main" xmlns:r="http://schemas.openxmlformats.org/officeDocument/2006/relationships" xmlns:p="http://schemas.openxmlformats.org/presentationml/2006/main">
+  <p:cSld name="Slide 12">
+    <p:bg>
+      <p:bgPr>
+        <a:solidFill>
+          <a:srgbClr val="F8FAFC"/>
+        </a:solidFill>
+      </p:bgPr>
+    </p:bg>
+    <p:spTree>
+      <p:nvGrpSpPr>
+        <p:cNvPr id="1" name=""/>
+        <p:cNvGrpSpPr/>
+        <p:nvPr/>
+      </p:nvGrpSpPr>
+      <p:grpSpPr>
+        <a:xfrm>
+          <a:off x="0" y="0"/>
+          <a:ext cx="0" cy="0"/>
+          <a:chOff x="0" y="0"/>
+          <a:chExt cx="0" cy="0"/>
+        </a:xfrm>
+      </p:grpSpPr>
+      <p:sp>
+        <p:nvSpPr>
+          <p:cNvPr id="2" name="Shape 0"/>
+          <p:cNvSpPr/>
+          <p:nvPr/>
+        </p:nvSpPr>
+        <p:spPr>
+          <a:xfrm>
+            <a:off x="731520" y="1207008"/>
+            <a:ext cx="1325880" cy="54864"/>
+          </a:xfrm>
+          <a:prstGeom prst="rect">
+            <a:avLst/>
+          </a:prstGeom>
+          <a:solidFill>
+            <a:srgbClr val="2563EB"/>
+          </a:solidFill>
+          <a:ln w="12700">
+            <a:solidFill>
+              <a:srgbClr val="2563EB">
+                <a:alpha val="0"/>
+              </a:srgbClr>
+            </a:solidFill>
+            <a:prstDash val="solid"/>
+          </a:ln>
+        </p:spPr>
+      </p:sp>
+      <p:sp>
+        <p:nvSpPr>
+          <p:cNvPr id="3" name="Shape 1"/>
+          <p:cNvSpPr/>
+          <p:nvPr/>
+        </p:nvSpPr>
+        <p:spPr>
+          <a:xfrm>
+            <a:off x="822960" y="1554480"/>
+            <a:ext cx="4937760" cy="73152"/>
+          </a:xfrm>
+          <a:prstGeom prst="rect">
+            <a:avLst/>
+          </a:prstGeom>
+          <a:solidFill>
+            <a:srgbClr val="2563EB"/>
+          </a:solidFill>
+          <a:ln w="12700">
+            <a:solidFill>
+              <a:srgbClr val="2563EB">
+                <a:alpha val="0"/>
+              </a:srgbClr>
+            </a:solidFill>
+            <a:prstDash val="solid"/>
+          </a:ln>
+        </p:spPr>
+      </p:sp>
+      <p:sp>
+        <p:nvSpPr>
+          <p:cNvPr id="4" name="Shape 2"/>
+          <p:cNvSpPr/>
+          <p:nvPr/>
+        </p:nvSpPr>
+        <p:spPr>
+          <a:xfrm>
+            <a:off x="6400800" y="1554480"/>
+            <a:ext cx="4937760" cy="73152"/>
+          </a:xfrm>
+          <a:prstGeom prst="rect">
+            <a:avLst/>
+          </a:prstGeom>
+          <a:solidFill>
+            <a:srgbClr val="2563EB"/>
+          </a:solidFill>
+          <a:ln w="12700">
+            <a:solidFill>
+              <a:srgbClr val="2563EB">
+                <a:alpha val="0"/>
+              </a:srgbClr>
+            </a:solidFill>
+            <a:prstDash val="solid"/>
+          </a:ln>
+        </p:spPr>
+      </p:sp>
+      <p:sp>
+        <p:nvSpPr>
+          <p:cNvPr id="5" name="Text 3"/>
+          <p:cNvSpPr txBox="1"/>
+          <p:nvPr/>
+        </p:nvSpPr>
+        <p:spPr>
+          <a:xfrm>
+            <a:off x="731520" y="457200"/>
+            <a:ext cx="10698480" cy="731520"/>
+          </a:xfrm>
+          <a:prstGeom prst="rect">
+            <a:avLst/>
+          </a:prstGeom>
+          <a:noFill/>
+          <a:ln/>
+        </p:spPr>
+        <p:txBody>
+          <a:bodyPr wrap="square" lIns="0" tIns="0" rIns="0" bIns="0" rtlCol="0" anchor="ctr"/>
+          <a:lstStyle/>
+          <a:p>
+            <a:pPr algn="ctr" indent="0" marL="0">
+              <a:lnSpc>
+                <a:spcPct val="120000"/>
+              </a:lnSpc>
+              <a:buNone/>
+            </a:pPr>
+            <a:r>
+              <a:rPr lang="en-US" sz="3400" b="1" dirty="0">
+                <a:solidFill>
+                  <a:srgbClr val="111827"/>
+                </a:solidFill>
+                <a:latin typeface="Pretendard" pitchFamily="34" charset="0"/>
+                <a:ea typeface="Pretendard" pitchFamily="34" charset="-122"/>
+                <a:cs typeface="Pretendard" pitchFamily="34" charset="-120"/>
+              </a:rPr>
+              <a:t>Decoration Pattern Catalog (Cont. 2/2)</a:t>
+            </a:r>
+            <a:endParaRPr lang="en-US" sz="3400" dirty="0"/>
+          </a:p>
+        </p:txBody>
+      </p:sp>
+      <p:sp>
+        <p:nvSpPr>
+          <p:cNvPr id="6" name="Text 4"/>
+          <p:cNvSpPr txBox="1"/>
+          <p:nvPr/>
+        </p:nvSpPr>
+        <p:spPr>
+          <a:xfrm>
+            <a:off x="896112" y="1664208"/>
+            <a:ext cx="4791456" cy="4169664"/>
+          </a:xfrm>
+          <a:prstGeom prst="rect">
+            <a:avLst/>
+          </a:prstGeom>
+          <a:noFill/>
+          <a:ln/>
+        </p:spPr>
+        <p:txBody>
+          <a:bodyPr wrap="square" lIns="0" tIns="25400" rIns="25400" bIns="0" rtlCol="0" anchor="t"/>
+          <a:lstStyle/>
+          <a:p>
+            <a:pPr algn="l" indent="0" marL="0">
+              <a:lnSpc>
+                <a:spcPct val="120000"/>
+              </a:lnSpc>
+              <a:buNone/>
+            </a:pPr>
+            <a:r>
+              <a:rPr lang="en-US" sz="2200" b="1" dirty="0">
+                <a:solidFill>
+                  <a:srgbClr val="2563EB"/>
+                </a:solidFill>
+                <a:latin typeface="Pretendard" pitchFamily="34" charset="0"/>
+                <a:ea typeface="Pretendard" pitchFamily="34" charset="-122"/>
+                <a:cs typeface="Pretendard" pitchFamily="34" charset="-120"/>
+              </a:rPr>
+              <a:t>- Icons</a:t>
+            </a:r>
+            <a:pPr algn="l" indent="0" marL="0">
+              <a:lnSpc>
+                <a:spcPct val="120000"/>
+              </a:lnSpc>
+              <a:buNone/>
+            </a:pPr>
+            <a:r>
+              <a:rPr lang="en-US" sz="2200" dirty="0">
+                <a:solidFill>
+                  <a:srgbClr val="111827"/>
+                </a:solidFill>
+                <a:latin typeface="Pretendard" pitchFamily="34" charset="0"/>
+                <a:ea typeface="Pretendard" pitchFamily="34" charset="-122"/>
+                <a:cs typeface="Pretendard" pitchFamily="34" charset="-120"/>
+              </a:rPr>
+              <a:t>  number-badge, mono-icon-slot, letter-disc, quiet-aside, image-safe-frame, brand-glyph.</a:t>
+            </a:r>
+            <a:endParaRPr lang="en-US" sz="2200" dirty="0"/>
+          </a:p>
+        </p:txBody>
+      </p:sp>
+      <p:sp>
+        <p:nvSpPr>
+          <p:cNvPr id="7" name="Text 5"/>
+          <p:cNvSpPr txBox="1"/>
+          <p:nvPr/>
+        </p:nvSpPr>
+        <p:spPr>
+          <a:xfrm>
+            <a:off x="6473952" y="1664208"/>
+            <a:ext cx="4791456" cy="4169664"/>
+          </a:xfrm>
+          <a:prstGeom prst="rect">
+            <a:avLst/>
+          </a:prstGeom>
+          <a:noFill/>
+          <a:ln/>
+        </p:spPr>
+        <p:txBody>
+          <a:bodyPr wrap="square" lIns="0" tIns="25400" rIns="25400" bIns="0" rtlCol="0" anchor="t"/>
+          <a:lstStyle/>
+          <a:p>
+            <a:pPr algn="l" indent="0" marL="0">
+              <a:lnSpc>
+                <a:spcPct val="120000"/>
+              </a:lnSpc>
+              <a:buNone/>
+            </a:pPr>
+            <a:r>
+              <a:rPr lang="en-US" sz="2200" b="1" dirty="0">
+                <a:solidFill>
+                  <a:srgbClr val="2563EB"/>
+                </a:solidFill>
+                <a:latin typeface="Pretendard" pitchFamily="34" charset="0"/>
+                <a:ea typeface="Pretendard" pitchFamily="34" charset="-122"/>
+                <a:cs typeface="Pretendard" pitchFamily="34" charset="-120"/>
+              </a:rPr>
+              <a:t>- Page grammar</a:t>
+            </a:r>
+            <a:pPr algn="l" indent="0" marL="0">
+              <a:lnSpc>
+                <a:spcPct val="120000"/>
+              </a:lnSpc>
+              <a:buNone/>
+            </a:pPr>
+            <a:r>
+              <a:rPr lang="en-US" sz="2200" dirty="0">
+                <a:solidFill>
+                  <a:srgbClr val="111827"/>
+                </a:solidFill>
+                <a:latin typeface="Pretendard" pitchFamily="34" charset="0"/>
+                <a:ea typeface="Pretendard" pitchFamily="34" charset="-122"/>
+                <a:cs typeface="Pretendard" pitchFamily="34" charset="-120"/>
+              </a:rPr>
+              <a:t>  magazine-rail, grid-baseline, glass-surface, newmorphic-panel, data-rail, minimal-rule.</a:t>
+            </a:r>
+            <a:endParaRPr lang="en-US" sz="2200" dirty="0"/>
+          </a:p>
+        </p:txBody>
+      </p:sp>
+    </p:spTree>
+  </p:cSld>
+  <p:clrMapOvr>
+    <a:masterClrMapping/>
+  </p:clrMapOvr>
+</p:sld>
+</file>
+
+<file path=ppt/slides/slide13.xml><?xml version="1.0" encoding="utf-8"?>
+<p:sld xmlns:a="http://schemas.openxmlformats.org/drawingml/2006/main" xmlns:r="http://schemas.openxmlformats.org/officeDocument/2006/relationships" xmlns:p="http://schemas.openxmlformats.org/presentationml/2006/main">
+  <p:cSld name="Slide 13">
+    <p:bg>
+      <p:bgPr>
+        <a:solidFill>
+          <a:srgbClr val="F8FAFC"/>
+        </a:solidFill>
+      </p:bgPr>
+    </p:bg>
+    <p:spTree>
+      <p:nvGrpSpPr>
+        <p:cNvPr id="1" name=""/>
+        <p:cNvGrpSpPr/>
+        <p:nvPr/>
+      </p:nvGrpSpPr>
+      <p:grpSpPr>
+        <a:xfrm>
+          <a:off x="0" y="0"/>
+          <a:ext cx="0" cy="0"/>
+          <a:chOff x="0" y="0"/>
+          <a:chExt cx="0" cy="0"/>
+        </a:xfrm>
+      </p:grpSpPr>
+      <p:sp>
+        <p:nvSpPr>
+          <p:cNvPr id="2" name="Shape 0"/>
+          <p:cNvSpPr/>
+          <p:nvPr/>
+        </p:nvSpPr>
+        <p:spPr>
+          <a:xfrm>
+            <a:off x="731520" y="1207008"/>
+            <a:ext cx="1325880" cy="54864"/>
+          </a:xfrm>
+          <a:prstGeom prst="rect">
+            <a:avLst/>
+          </a:prstGeom>
+          <a:solidFill>
+            <a:srgbClr val="2563EB"/>
+          </a:solidFill>
+          <a:ln w="12700">
+            <a:solidFill>
+              <a:srgbClr val="2563EB">
+                <a:alpha val="0"/>
+              </a:srgbClr>
+            </a:solidFill>
+            <a:prstDash val="solid"/>
+          </a:ln>
+        </p:spPr>
+      </p:sp>
       <p:pic>
         <p:nvPicPr>
           <p:cNvPr id="3" name="Image 0" descr="preencoded.png">    </p:cNvPr>
@@ -3114,7 +5656,7 @@
       </p:sp>
       <p:graphicFrame>
         <p:nvGraphicFramePr>
-          <p:cNvPr id="11" name="Table 0"/>
+          <p:cNvPr id="14" name="Table 0"/>
           <p:cNvGraphicFramePr>
             <a:graphicFrameLocks noGrp="1"/>
           </p:cNvGraphicFramePr>
@@ -4175,9 +6717,9 @@
 </p:sld>
 </file>
 
-<file path=ppt/slides/slide11.xml><?xml version="1.0" encoding="utf-8"?>
+<file path=ppt/slides/slide14.xml><?xml version="1.0" encoding="utf-8"?>
 <p:sld xmlns:a="http://schemas.openxmlformats.org/drawingml/2006/main" xmlns:r="http://schemas.openxmlformats.org/officeDocument/2006/relationships" xmlns:p="http://schemas.openxmlformats.org/presentationml/2006/main">
-  <p:cSld name="Slide 11">
+  <p:cSld name="Slide 14">
     <p:bg>
       <p:bgPr>
         <a:solidFill>
@@ -4524,9 +7066,9 @@
 </p:sld>
 </file>
 
-<file path=ppt/slides/slide12.xml><?xml version="1.0" encoding="utf-8"?>
+<file path=ppt/slides/slide15.xml><?xml version="1.0" encoding="utf-8"?>
 <p:sld xmlns:a="http://schemas.openxmlformats.org/drawingml/2006/main" xmlns:r="http://schemas.openxmlformats.org/officeDocument/2006/relationships" xmlns:p="http://schemas.openxmlformats.org/presentationml/2006/main">
-  <p:cSld name="Slide 12">
+  <p:cSld name="Slide 15">
     <p:bg>
       <p:bgPr>
         <a:solidFill>
@@ -4685,7 +7227,7 @@
       </p:sp>
       <p:graphicFrame>
         <p:nvGraphicFramePr>
-          <p:cNvPr id="13" name="Table 0"/>
+          <p:cNvPr id="16" name="Table 0"/>
           <p:cNvGraphicFramePr>
             <a:graphicFrameLocks noGrp="1"/>
           </p:cNvGraphicFramePr>
@@ -5534,9 +8076,9 @@
 </p:sld>
 </file>
 
-<file path=ppt/slides/slide13.xml><?xml version="1.0" encoding="utf-8"?>
+<file path=ppt/slides/slide16.xml><?xml version="1.0" encoding="utf-8"?>
 <p:sld xmlns:a="http://schemas.openxmlformats.org/drawingml/2006/main" xmlns:r="http://schemas.openxmlformats.org/officeDocument/2006/relationships" xmlns:p="http://schemas.openxmlformats.org/presentationml/2006/main">
-  <p:cSld name="Slide 13">
+  <p:cSld name="Slide 16">
     <p:bg>
       <p:bgPr>
         <a:solidFill>
@@ -6404,9 +8946,9 @@
 </p:sld>
 </file>
 
-<file path=ppt/slides/slide14.xml><?xml version="1.0" encoding="utf-8"?>
+<file path=ppt/slides/slide17.xml><?xml version="1.0" encoding="utf-8"?>
 <p:sld xmlns:a="http://schemas.openxmlformats.org/drawingml/2006/main" xmlns:r="http://schemas.openxmlformats.org/officeDocument/2006/relationships" xmlns:p="http://schemas.openxmlformats.org/presentationml/2006/main">
-  <p:cSld name="Slide 14">
+  <p:cSld name="Slide 17">
     <p:bg>
       <p:bgPr>
         <a:solidFill>
@@ -7211,9 +9753,9 @@
 </p:sld>
 </file>
 
-<file path=ppt/slides/slide15.xml><?xml version="1.0" encoding="utf-8"?>
+<file path=ppt/slides/slide18.xml><?xml version="1.0" encoding="utf-8"?>
 <p:sld xmlns:a="http://schemas.openxmlformats.org/drawingml/2006/main" xmlns:r="http://schemas.openxmlformats.org/officeDocument/2006/relationships" xmlns:p="http://schemas.openxmlformats.org/presentationml/2006/main">
-  <p:cSld name="Slide 15">
+  <p:cSld name="Slide 18">
     <p:bg>
       <p:bgPr>
         <a:solidFill>
@@ -7478,9 +10020,9 @@
 </p:sld>
 </file>
 
-<file path=ppt/slides/slide16.xml><?xml version="1.0" encoding="utf-8"?>
+<file path=ppt/slides/slide19.xml><?xml version="1.0" encoding="utf-8"?>
 <p:sld xmlns:a="http://schemas.openxmlformats.org/drawingml/2006/main" xmlns:r="http://schemas.openxmlformats.org/officeDocument/2006/relationships" xmlns:p="http://schemas.openxmlformats.org/presentationml/2006/main">
-  <p:cSld name="Slide 16">
+  <p:cSld name="Slide 19">
     <p:bg>
       <p:bgPr>
         <a:solidFill>
@@ -7751,9 +10293,1159 @@
 </p:sld>
 </file>
 
-<file path=ppt/slides/slide17.xml><?xml version="1.0" encoding="utf-8"?>
+<file path=ppt/slides/slide2.xml><?xml version="1.0" encoding="utf-8"?>
 <p:sld xmlns:a="http://schemas.openxmlformats.org/drawingml/2006/main" xmlns:r="http://schemas.openxmlformats.org/officeDocument/2006/relationships" xmlns:p="http://schemas.openxmlformats.org/presentationml/2006/main">
-  <p:cSld name="Slide 17">
+  <p:cSld name="Slide 2">
+    <p:bg>
+      <p:bgPr>
+        <a:solidFill>
+          <a:srgbClr val="F8FAFC"/>
+        </a:solidFill>
+      </p:bgPr>
+    </p:bg>
+    <p:spTree>
+      <p:nvGrpSpPr>
+        <p:cNvPr id="1" name=""/>
+        <p:cNvGrpSpPr/>
+        <p:nvPr/>
+      </p:nvGrpSpPr>
+      <p:grpSpPr>
+        <a:xfrm>
+          <a:off x="0" y="0"/>
+          <a:ext cx="0" cy="0"/>
+          <a:chOff x="0" y="0"/>
+          <a:chExt cx="0" cy="0"/>
+        </a:xfrm>
+      </p:grpSpPr>
+      <p:sp>
+        <p:nvSpPr>
+          <p:cNvPr id="2" name="Shape 0"/>
+          <p:cNvSpPr/>
+          <p:nvPr/>
+        </p:nvSpPr>
+        <p:spPr>
+          <a:xfrm>
+            <a:off x="731520" y="1207008"/>
+            <a:ext cx="1325880" cy="54864"/>
+          </a:xfrm>
+          <a:prstGeom prst="rect">
+            <a:avLst/>
+          </a:prstGeom>
+          <a:solidFill>
+            <a:srgbClr val="2563EB"/>
+          </a:solidFill>
+          <a:ln w="12700">
+            <a:solidFill>
+              <a:srgbClr val="2563EB">
+                <a:alpha val="0"/>
+              </a:srgbClr>
+            </a:solidFill>
+            <a:prstDash val="solid"/>
+          </a:ln>
+        </p:spPr>
+      </p:sp>
+      <p:sp>
+        <p:nvSpPr>
+          <p:cNvPr id="3" name="Shape 1"/>
+          <p:cNvSpPr/>
+          <p:nvPr/>
+        </p:nvSpPr>
+        <p:spPr>
+          <a:xfrm>
+            <a:off x="822960" y="1188720"/>
+            <a:ext cx="10515600" cy="45720"/>
+          </a:xfrm>
+          <a:prstGeom prst="rect">
+            <a:avLst/>
+          </a:prstGeom>
+          <a:solidFill>
+            <a:srgbClr val="2563EB"/>
+          </a:solidFill>
+          <a:ln w="12700">
+            <a:solidFill>
+              <a:srgbClr val="2563EB">
+                <a:alpha val="0"/>
+              </a:srgbClr>
+            </a:solidFill>
+            <a:prstDash val="solid"/>
+          </a:ln>
+        </p:spPr>
+      </p:sp>
+      <p:sp>
+        <p:nvSpPr>
+          <p:cNvPr id="4" name="Shape 2"/>
+          <p:cNvSpPr/>
+          <p:nvPr/>
+        </p:nvSpPr>
+        <p:spPr>
+          <a:xfrm>
+            <a:off x="822960" y="6382512"/>
+            <a:ext cx="2011680" cy="45720"/>
+          </a:xfrm>
+          <a:prstGeom prst="rect">
+            <a:avLst/>
+          </a:prstGeom>
+          <a:solidFill>
+            <a:srgbClr val="DBEAFE"/>
+          </a:solidFill>
+          <a:ln w="12700">
+            <a:solidFill>
+              <a:srgbClr val="DBEAFE">
+                <a:alpha val="0"/>
+              </a:srgbClr>
+            </a:solidFill>
+            <a:prstDash val="solid"/>
+          </a:ln>
+        </p:spPr>
+      </p:sp>
+      <p:sp>
+        <p:nvSpPr>
+          <p:cNvPr id="5" name="Shape 3"/>
+          <p:cNvSpPr/>
+          <p:nvPr/>
+        </p:nvSpPr>
+        <p:spPr>
+          <a:xfrm>
+            <a:off x="6080760" y="1389888"/>
+            <a:ext cx="22860" cy="4846320"/>
+          </a:xfrm>
+          <a:prstGeom prst="rect">
+            <a:avLst/>
+          </a:prstGeom>
+          <a:solidFill>
+            <a:srgbClr val="E2E8F0">
+              <a:alpha val="90000"/>
+            </a:srgbClr>
+          </a:solidFill>
+          <a:ln w="12700">
+            <a:solidFill>
+              <a:srgbClr val="E2E8F0">
+                <a:alpha val="0"/>
+              </a:srgbClr>
+            </a:solidFill>
+            <a:prstDash val="solid"/>
+          </a:ln>
+        </p:spPr>
+      </p:sp>
+      <p:sp>
+        <p:nvSpPr>
+          <p:cNvPr id="6" name="Shape 4"/>
+          <p:cNvSpPr/>
+          <p:nvPr/>
+        </p:nvSpPr>
+        <p:spPr>
+          <a:xfrm>
+            <a:off x="822960" y="1389888"/>
+            <a:ext cx="73152" cy="566928"/>
+          </a:xfrm>
+          <a:prstGeom prst="rect">
+            <a:avLst/>
+          </a:prstGeom>
+          <a:solidFill>
+            <a:srgbClr val="2563EB"/>
+          </a:solidFill>
+          <a:ln w="12700">
+            <a:solidFill>
+              <a:srgbClr val="2563EB">
+                <a:alpha val="0"/>
+              </a:srgbClr>
+            </a:solidFill>
+            <a:prstDash val="solid"/>
+          </a:ln>
+        </p:spPr>
+      </p:sp>
+      <p:sp>
+        <p:nvSpPr>
+          <p:cNvPr id="7" name="Shape 5"/>
+          <p:cNvSpPr/>
+          <p:nvPr/>
+        </p:nvSpPr>
+        <p:spPr>
+          <a:xfrm>
+            <a:off x="822960" y="2103120"/>
+            <a:ext cx="73152" cy="566928"/>
+          </a:xfrm>
+          <a:prstGeom prst="rect">
+            <a:avLst/>
+          </a:prstGeom>
+          <a:solidFill>
+            <a:srgbClr val="DBEAFE"/>
+          </a:solidFill>
+          <a:ln w="12700">
+            <a:solidFill>
+              <a:srgbClr val="DBEAFE">
+                <a:alpha val="0"/>
+              </a:srgbClr>
+            </a:solidFill>
+            <a:prstDash val="solid"/>
+          </a:ln>
+        </p:spPr>
+      </p:sp>
+      <p:sp>
+        <p:nvSpPr>
+          <p:cNvPr id="8" name="Shape 6"/>
+          <p:cNvSpPr/>
+          <p:nvPr/>
+        </p:nvSpPr>
+        <p:spPr>
+          <a:xfrm>
+            <a:off x="822960" y="2816352"/>
+            <a:ext cx="73152" cy="566928"/>
+          </a:xfrm>
+          <a:prstGeom prst="rect">
+            <a:avLst/>
+          </a:prstGeom>
+          <a:solidFill>
+            <a:srgbClr val="2563EB"/>
+          </a:solidFill>
+          <a:ln w="12700">
+            <a:solidFill>
+              <a:srgbClr val="2563EB">
+                <a:alpha val="0"/>
+              </a:srgbClr>
+            </a:solidFill>
+            <a:prstDash val="solid"/>
+          </a:ln>
+        </p:spPr>
+      </p:sp>
+      <p:sp>
+        <p:nvSpPr>
+          <p:cNvPr id="9" name="Shape 7"/>
+          <p:cNvSpPr/>
+          <p:nvPr/>
+        </p:nvSpPr>
+        <p:spPr>
+          <a:xfrm>
+            <a:off x="822960" y="3529584"/>
+            <a:ext cx="73152" cy="566928"/>
+          </a:xfrm>
+          <a:prstGeom prst="rect">
+            <a:avLst/>
+          </a:prstGeom>
+          <a:solidFill>
+            <a:srgbClr val="DBEAFE"/>
+          </a:solidFill>
+          <a:ln w="12700">
+            <a:solidFill>
+              <a:srgbClr val="DBEAFE">
+                <a:alpha val="0"/>
+              </a:srgbClr>
+            </a:solidFill>
+            <a:prstDash val="solid"/>
+          </a:ln>
+        </p:spPr>
+      </p:sp>
+      <p:sp>
+        <p:nvSpPr>
+          <p:cNvPr id="10" name="Shape 8"/>
+          <p:cNvSpPr/>
+          <p:nvPr/>
+        </p:nvSpPr>
+        <p:spPr>
+          <a:xfrm>
+            <a:off x="822960" y="4242816"/>
+            <a:ext cx="73152" cy="566928"/>
+          </a:xfrm>
+          <a:prstGeom prst="rect">
+            <a:avLst/>
+          </a:prstGeom>
+          <a:solidFill>
+            <a:srgbClr val="2563EB"/>
+          </a:solidFill>
+          <a:ln w="12700">
+            <a:solidFill>
+              <a:srgbClr val="2563EB">
+                <a:alpha val="0"/>
+              </a:srgbClr>
+            </a:solidFill>
+            <a:prstDash val="solid"/>
+          </a:ln>
+        </p:spPr>
+      </p:sp>
+      <p:sp>
+        <p:nvSpPr>
+          <p:cNvPr id="11" name="Shape 9"/>
+          <p:cNvSpPr/>
+          <p:nvPr/>
+        </p:nvSpPr>
+        <p:spPr>
+          <a:xfrm>
+            <a:off x="822960" y="4956048"/>
+            <a:ext cx="73152" cy="566928"/>
+          </a:xfrm>
+          <a:prstGeom prst="rect">
+            <a:avLst/>
+          </a:prstGeom>
+          <a:solidFill>
+            <a:srgbClr val="DBEAFE"/>
+          </a:solidFill>
+          <a:ln w="12700">
+            <a:solidFill>
+              <a:srgbClr val="DBEAFE">
+                <a:alpha val="0"/>
+              </a:srgbClr>
+            </a:solidFill>
+            <a:prstDash val="solid"/>
+          </a:ln>
+        </p:spPr>
+      </p:sp>
+      <p:sp>
+        <p:nvSpPr>
+          <p:cNvPr id="12" name="Shape 10"/>
+          <p:cNvSpPr/>
+          <p:nvPr/>
+        </p:nvSpPr>
+        <p:spPr>
+          <a:xfrm>
+            <a:off x="822960" y="5669280"/>
+            <a:ext cx="73152" cy="566928"/>
+          </a:xfrm>
+          <a:prstGeom prst="rect">
+            <a:avLst/>
+          </a:prstGeom>
+          <a:solidFill>
+            <a:srgbClr val="2563EB"/>
+          </a:solidFill>
+          <a:ln w="12700">
+            <a:solidFill>
+              <a:srgbClr val="2563EB">
+                <a:alpha val="0"/>
+              </a:srgbClr>
+            </a:solidFill>
+            <a:prstDash val="solid"/>
+          </a:ln>
+        </p:spPr>
+      </p:sp>
+      <p:sp>
+        <p:nvSpPr>
+          <p:cNvPr id="13" name="Shape 11"/>
+          <p:cNvSpPr/>
+          <p:nvPr/>
+        </p:nvSpPr>
+        <p:spPr>
+          <a:xfrm>
+            <a:off x="6272784" y="1389888"/>
+            <a:ext cx="73152" cy="566928"/>
+          </a:xfrm>
+          <a:prstGeom prst="rect">
+            <a:avLst/>
+          </a:prstGeom>
+          <a:solidFill>
+            <a:srgbClr val="DBEAFE"/>
+          </a:solidFill>
+          <a:ln w="12700">
+            <a:solidFill>
+              <a:srgbClr val="DBEAFE">
+                <a:alpha val="0"/>
+              </a:srgbClr>
+            </a:solidFill>
+            <a:prstDash val="solid"/>
+          </a:ln>
+        </p:spPr>
+      </p:sp>
+      <p:sp>
+        <p:nvSpPr>
+          <p:cNvPr id="14" name="Shape 12"/>
+          <p:cNvSpPr/>
+          <p:nvPr/>
+        </p:nvSpPr>
+        <p:spPr>
+          <a:xfrm>
+            <a:off x="6272784" y="2103120"/>
+            <a:ext cx="73152" cy="566928"/>
+          </a:xfrm>
+          <a:prstGeom prst="rect">
+            <a:avLst/>
+          </a:prstGeom>
+          <a:solidFill>
+            <a:srgbClr val="2563EB"/>
+          </a:solidFill>
+          <a:ln w="12700">
+            <a:solidFill>
+              <a:srgbClr val="2563EB">
+                <a:alpha val="0"/>
+              </a:srgbClr>
+            </a:solidFill>
+            <a:prstDash val="solid"/>
+          </a:ln>
+        </p:spPr>
+      </p:sp>
+      <p:sp>
+        <p:nvSpPr>
+          <p:cNvPr id="15" name="Shape 13"/>
+          <p:cNvSpPr/>
+          <p:nvPr/>
+        </p:nvSpPr>
+        <p:spPr>
+          <a:xfrm>
+            <a:off x="6272784" y="2816352"/>
+            <a:ext cx="73152" cy="566928"/>
+          </a:xfrm>
+          <a:prstGeom prst="rect">
+            <a:avLst/>
+          </a:prstGeom>
+          <a:solidFill>
+            <a:srgbClr val="DBEAFE"/>
+          </a:solidFill>
+          <a:ln w="12700">
+            <a:solidFill>
+              <a:srgbClr val="DBEAFE">
+                <a:alpha val="0"/>
+              </a:srgbClr>
+            </a:solidFill>
+            <a:prstDash val="solid"/>
+          </a:ln>
+        </p:spPr>
+      </p:sp>
+      <p:sp>
+        <p:nvSpPr>
+          <p:cNvPr id="16" name="Shape 14"/>
+          <p:cNvSpPr/>
+          <p:nvPr/>
+        </p:nvSpPr>
+        <p:spPr>
+          <a:xfrm>
+            <a:off x="6272784" y="3529584"/>
+            <a:ext cx="73152" cy="566928"/>
+          </a:xfrm>
+          <a:prstGeom prst="rect">
+            <a:avLst/>
+          </a:prstGeom>
+          <a:solidFill>
+            <a:srgbClr val="2563EB"/>
+          </a:solidFill>
+          <a:ln w="12700">
+            <a:solidFill>
+              <a:srgbClr val="2563EB">
+                <a:alpha val="0"/>
+              </a:srgbClr>
+            </a:solidFill>
+            <a:prstDash val="solid"/>
+          </a:ln>
+        </p:spPr>
+      </p:sp>
+      <p:sp>
+        <p:nvSpPr>
+          <p:cNvPr id="17" name="Shape 15"/>
+          <p:cNvSpPr/>
+          <p:nvPr/>
+        </p:nvSpPr>
+        <p:spPr>
+          <a:xfrm>
+            <a:off x="6272784" y="4242816"/>
+            <a:ext cx="73152" cy="566928"/>
+          </a:xfrm>
+          <a:prstGeom prst="rect">
+            <a:avLst/>
+          </a:prstGeom>
+          <a:solidFill>
+            <a:srgbClr val="DBEAFE"/>
+          </a:solidFill>
+          <a:ln w="12700">
+            <a:solidFill>
+              <a:srgbClr val="DBEAFE">
+                <a:alpha val="0"/>
+              </a:srgbClr>
+            </a:solidFill>
+            <a:prstDash val="solid"/>
+          </a:ln>
+        </p:spPr>
+      </p:sp>
+      <p:sp>
+        <p:nvSpPr>
+          <p:cNvPr id="18" name="Shape 16"/>
+          <p:cNvSpPr/>
+          <p:nvPr/>
+        </p:nvSpPr>
+        <p:spPr>
+          <a:xfrm>
+            <a:off x="6272784" y="4956048"/>
+            <a:ext cx="73152" cy="566928"/>
+          </a:xfrm>
+          <a:prstGeom prst="rect">
+            <a:avLst/>
+          </a:prstGeom>
+          <a:solidFill>
+            <a:srgbClr val="2563EB"/>
+          </a:solidFill>
+          <a:ln w="12700">
+            <a:solidFill>
+              <a:srgbClr val="2563EB">
+                <a:alpha val="0"/>
+              </a:srgbClr>
+            </a:solidFill>
+            <a:prstDash val="solid"/>
+          </a:ln>
+        </p:spPr>
+      </p:sp>
+      <p:sp>
+        <p:nvSpPr>
+          <p:cNvPr id="19" name="Shape 17"/>
+          <p:cNvSpPr/>
+          <p:nvPr/>
+        </p:nvSpPr>
+        <p:spPr>
+          <a:xfrm>
+            <a:off x="6272784" y="5669280"/>
+            <a:ext cx="73152" cy="566928"/>
+          </a:xfrm>
+          <a:prstGeom prst="rect">
+            <a:avLst/>
+          </a:prstGeom>
+          <a:solidFill>
+            <a:srgbClr val="DBEAFE"/>
+          </a:solidFill>
+          <a:ln w="12700">
+            <a:solidFill>
+              <a:srgbClr val="DBEAFE">
+                <a:alpha val="0"/>
+              </a:srgbClr>
+            </a:solidFill>
+            <a:prstDash val="solid"/>
+          </a:ln>
+        </p:spPr>
+      </p:sp>
+      <p:sp>
+        <p:nvSpPr>
+          <p:cNvPr id="20" name="Text 18"/>
+          <p:cNvSpPr txBox="1"/>
+          <p:nvPr/>
+        </p:nvSpPr>
+        <p:spPr>
+          <a:xfrm>
+            <a:off x="731520" y="384048"/>
+            <a:ext cx="10698480" cy="822960"/>
+          </a:xfrm>
+          <a:prstGeom prst="rect">
+            <a:avLst/>
+          </a:prstGeom>
+          <a:noFill/>
+          <a:ln/>
+        </p:spPr>
+        <p:txBody>
+          <a:bodyPr wrap="square" lIns="0" tIns="0" rIns="0" bIns="0" rtlCol="0" anchor="ctr"/>
+          <a:lstStyle/>
+          <a:p>
+            <a:pPr algn="ctr" indent="0" marL="0">
+              <a:lnSpc>
+                <a:spcPct val="120000"/>
+              </a:lnSpc>
+              <a:buNone/>
+            </a:pPr>
+            <a:r>
+              <a:rPr lang="en-US" sz="3800" b="1" dirty="0">
+                <a:solidFill>
+                  <a:srgbClr val="111827"/>
+                </a:solidFill>
+                <a:latin typeface="Pretendard" pitchFamily="34" charset="0"/>
+                <a:ea typeface="Pretendard" pitchFamily="34" charset="-122"/>
+                <a:cs typeface="Pretendard" pitchFamily="34" charset="-120"/>
+              </a:rPr>
+              <a:t>Agenda</a:t>
+            </a:r>
+            <a:endParaRPr lang="en-US" sz="3800" dirty="0"/>
+          </a:p>
+        </p:txBody>
+      </p:sp>
+      <p:sp>
+        <p:nvSpPr>
+          <p:cNvPr id="21" name="Text 19"/>
+          <p:cNvSpPr txBox="1"/>
+          <p:nvPr/>
+        </p:nvSpPr>
+        <p:spPr>
+          <a:xfrm>
+            <a:off x="1042416" y="1481328"/>
+            <a:ext cx="4645152" cy="384048"/>
+          </a:xfrm>
+          <a:prstGeom prst="rect">
+            <a:avLst/>
+          </a:prstGeom>
+          <a:noFill/>
+          <a:ln/>
+        </p:spPr>
+        <p:txBody>
+          <a:bodyPr wrap="square" lIns="0" tIns="25400" rIns="25400" bIns="0" rtlCol="0" anchor="ctr"/>
+          <a:lstStyle/>
+          <a:p>
+            <a:pPr algn="ctr" indent="0" marL="0">
+              <a:lnSpc>
+                <a:spcPct val="120000"/>
+              </a:lnSpc>
+              <a:buNone/>
+            </a:pPr>
+            <a:r>
+              <a:rPr lang="en-US" sz="1800" dirty="0">
+                <a:solidFill>
+                  <a:srgbClr val="111827"/>
+                </a:solidFill>
+                <a:latin typeface="Pretendard" pitchFamily="34" charset="0"/>
+                <a:ea typeface="Pretendard" pitchFamily="34" charset="-122"/>
+                <a:cs typeface="Pretendard" pitchFamily="34" charset="-120"/>
+              </a:rPr>
+              <a:t>01  Teaser Summary</a:t>
+            </a:r>
+            <a:endParaRPr lang="en-US" sz="1800" dirty="0"/>
+          </a:p>
+        </p:txBody>
+      </p:sp>
+      <p:sp>
+        <p:nvSpPr>
+          <p:cNvPr id="22" name="Text 20"/>
+          <p:cNvSpPr txBox="1"/>
+          <p:nvPr/>
+        </p:nvSpPr>
+        <p:spPr>
+          <a:xfrm>
+            <a:off x="1042416" y="2194560"/>
+            <a:ext cx="4645152" cy="384048"/>
+          </a:xfrm>
+          <a:prstGeom prst="rect">
+            <a:avLst/>
+          </a:prstGeom>
+          <a:noFill/>
+          <a:ln/>
+        </p:spPr>
+        <p:txBody>
+          <a:bodyPr wrap="square" lIns="0" tIns="25400" rIns="25400" bIns="0" rtlCol="0" anchor="ctr"/>
+          <a:lstStyle/>
+          <a:p>
+            <a:pPr algn="ctr" indent="0" marL="0">
+              <a:lnSpc>
+                <a:spcPct val="120000"/>
+              </a:lnSpc>
+              <a:buNone/>
+            </a:pPr>
+            <a:r>
+              <a:rPr lang="en-US" sz="1800" dirty="0">
+                <a:solidFill>
+                  <a:srgbClr val="111827"/>
+                </a:solidFill>
+                <a:latin typeface="Pretendard" pitchFamily="34" charset="0"/>
+                <a:ea typeface="Pretendard" pitchFamily="34" charset="-122"/>
+                <a:cs typeface="Pretendard" pitchFamily="34" charset="-120"/>
+              </a:rPr>
+              <a:t>02  Composition Contract</a:t>
+            </a:r>
+            <a:endParaRPr lang="en-US" sz="1800" dirty="0"/>
+          </a:p>
+        </p:txBody>
+      </p:sp>
+      <p:sp>
+        <p:nvSpPr>
+          <p:cNvPr id="23" name="Text 21"/>
+          <p:cNvSpPr txBox="1"/>
+          <p:nvPr/>
+        </p:nvSpPr>
+        <p:spPr>
+          <a:xfrm>
+            <a:off x="1042416" y="2907792"/>
+            <a:ext cx="4645152" cy="384048"/>
+          </a:xfrm>
+          <a:prstGeom prst="rect">
+            <a:avLst/>
+          </a:prstGeom>
+          <a:noFill/>
+          <a:ln/>
+        </p:spPr>
+        <p:txBody>
+          <a:bodyPr wrap="square" lIns="0" tIns="25400" rIns="25400" bIns="0" rtlCol="0" anchor="ctr"/>
+          <a:lstStyle/>
+          <a:p>
+            <a:pPr algn="ctr" indent="0" marL="0">
+              <a:lnSpc>
+                <a:spcPct val="120000"/>
+              </a:lnSpc>
+              <a:buNone/>
+            </a:pPr>
+            <a:r>
+              <a:rPr lang="en-US" sz="1800" dirty="0">
+                <a:solidFill>
+                  <a:srgbClr val="111827"/>
+                </a:solidFill>
+                <a:latin typeface="Pretendard" pitchFamily="34" charset="0"/>
+                <a:ea typeface="Pretendard" pitchFamily="34" charset="-122"/>
+                <a:cs typeface="Pretendard" pitchFamily="34" charset="-120"/>
+              </a:rPr>
+              <a:t>03  Pruned Style Families</a:t>
+            </a:r>
+            <a:endParaRPr lang="en-US" sz="1800" dirty="0"/>
+          </a:p>
+        </p:txBody>
+      </p:sp>
+      <p:sp>
+        <p:nvSpPr>
+          <p:cNvPr id="24" name="Text 22"/>
+          <p:cNvSpPr txBox="1"/>
+          <p:nvPr/>
+        </p:nvSpPr>
+        <p:spPr>
+          <a:xfrm>
+            <a:off x="1042416" y="3621024"/>
+            <a:ext cx="4645152" cy="384048"/>
+          </a:xfrm>
+          <a:prstGeom prst="rect">
+            <a:avLst/>
+          </a:prstGeom>
+          <a:noFill/>
+          <a:ln/>
+        </p:spPr>
+        <p:txBody>
+          <a:bodyPr wrap="square" lIns="0" tIns="25400" rIns="25400" bIns="0" rtlCol="0" anchor="ctr"/>
+          <a:lstStyle/>
+          <a:p>
+            <a:pPr algn="ctr" indent="0" marL="0">
+              <a:lnSpc>
+                <a:spcPct val="120000"/>
+              </a:lnSpc>
+              <a:buNone/>
+            </a:pPr>
+            <a:r>
+              <a:rPr lang="en-US" sz="1800" dirty="0">
+                <a:solidFill>
+                  <a:srgbClr val="111827"/>
+                </a:solidFill>
+                <a:latin typeface="Pretendard" pitchFamily="34" charset="0"/>
+                <a:ea typeface="Pretendard" pitchFamily="34" charset="-122"/>
+                <a:cs typeface="Pretendard" pitchFamily="34" charset="-120"/>
+              </a:rPr>
+              <a:t>04  Semantic Blocks</a:t>
+            </a:r>
+            <a:endParaRPr lang="en-US" sz="1800" dirty="0"/>
+          </a:p>
+        </p:txBody>
+      </p:sp>
+      <p:sp>
+        <p:nvSpPr>
+          <p:cNvPr id="25" name="Text 23"/>
+          <p:cNvSpPr txBox="1"/>
+          <p:nvPr/>
+        </p:nvSpPr>
+        <p:spPr>
+          <a:xfrm>
+            <a:off x="1042416" y="4334256"/>
+            <a:ext cx="4645152" cy="384048"/>
+          </a:xfrm>
+          <a:prstGeom prst="rect">
+            <a:avLst/>
+          </a:prstGeom>
+          <a:noFill/>
+          <a:ln/>
+        </p:spPr>
+        <p:txBody>
+          <a:bodyPr wrap="square" lIns="0" tIns="25400" rIns="25400" bIns="0" rtlCol="0" anchor="ctr"/>
+          <a:lstStyle/>
+          <a:p>
+            <a:pPr algn="ctr" indent="0" marL="0">
+              <a:lnSpc>
+                <a:spcPct val="120000"/>
+              </a:lnSpc>
+              <a:buNone/>
+            </a:pPr>
+            <a:r>
+              <a:rPr lang="en-US" sz="1800" dirty="0">
+                <a:solidFill>
+                  <a:srgbClr val="111827"/>
+                </a:solidFill>
+                <a:latin typeface="Pretendard" pitchFamily="34" charset="0"/>
+                <a:ea typeface="Pretendard" pitchFamily="34" charset="-122"/>
+                <a:cs typeface="Pretendard" pitchFamily="34" charset="-120"/>
+              </a:rPr>
+              <a:t>05  Pipeline Diagram</a:t>
+            </a:r>
+            <a:endParaRPr lang="en-US" sz="1800" dirty="0"/>
+          </a:p>
+        </p:txBody>
+      </p:sp>
+      <p:sp>
+        <p:nvSpPr>
+          <p:cNvPr id="26" name="Text 24"/>
+          <p:cNvSpPr txBox="1"/>
+          <p:nvPr/>
+        </p:nvSpPr>
+        <p:spPr>
+          <a:xfrm>
+            <a:off x="1042416" y="5047488"/>
+            <a:ext cx="4645152" cy="384048"/>
+          </a:xfrm>
+          <a:prstGeom prst="rect">
+            <a:avLst/>
+          </a:prstGeom>
+          <a:noFill/>
+          <a:ln/>
+        </p:spPr>
+        <p:txBody>
+          <a:bodyPr wrap="square" lIns="0" tIns="25400" rIns="25400" bIns="0" rtlCol="0" anchor="ctr"/>
+          <a:lstStyle/>
+          <a:p>
+            <a:pPr algn="ctr" indent="0" marL="0">
+              <a:lnSpc>
+                <a:spcPct val="120000"/>
+              </a:lnSpc>
+              <a:buNone/>
+            </a:pPr>
+            <a:r>
+              <a:rPr lang="en-US" sz="1800" dirty="0">
+                <a:solidFill>
+                  <a:srgbClr val="111827"/>
+                </a:solidFill>
+                <a:latin typeface="Pretendard" pitchFamily="34" charset="0"/>
+                <a:ea typeface="Pretendard" pitchFamily="34" charset="-122"/>
+                <a:cs typeface="Pretendard" pitchFamily="34" charset="-120"/>
+              </a:rPr>
+              <a:t>06  Decoration Pattern Catalog</a:t>
+            </a:r>
+            <a:endParaRPr lang="en-US" sz="1800" dirty="0"/>
+          </a:p>
+        </p:txBody>
+      </p:sp>
+      <p:sp>
+        <p:nvSpPr>
+          <p:cNvPr id="27" name="Text 25"/>
+          <p:cNvSpPr txBox="1"/>
+          <p:nvPr/>
+        </p:nvSpPr>
+        <p:spPr>
+          <a:xfrm>
+            <a:off x="1042416" y="5760720"/>
+            <a:ext cx="4645152" cy="384048"/>
+          </a:xfrm>
+          <a:prstGeom prst="rect">
+            <a:avLst/>
+          </a:prstGeom>
+          <a:noFill/>
+          <a:ln/>
+        </p:spPr>
+        <p:txBody>
+          <a:bodyPr wrap="square" lIns="0" tIns="25400" rIns="25400" bIns="0" rtlCol="0" anchor="ctr"/>
+          <a:lstStyle/>
+          <a:p>
+            <a:pPr algn="ctr" indent="0" marL="0">
+              <a:lnSpc>
+                <a:spcPct val="120000"/>
+              </a:lnSpc>
+              <a:buNone/>
+            </a:pPr>
+            <a:r>
+              <a:rPr lang="en-US" sz="1800" dirty="0">
+                <a:solidFill>
+                  <a:srgbClr val="111827"/>
+                </a:solidFill>
+                <a:latin typeface="Pretendard" pitchFamily="34" charset="0"/>
+                <a:ea typeface="Pretendard" pitchFamily="34" charset="-122"/>
+                <a:cs typeface="Pretendard" pitchFamily="34" charset="-120"/>
+              </a:rPr>
+              <a:t>07  Table Coherence</a:t>
+            </a:r>
+            <a:endParaRPr lang="en-US" sz="1800" dirty="0"/>
+          </a:p>
+        </p:txBody>
+      </p:sp>
+      <p:sp>
+        <p:nvSpPr>
+          <p:cNvPr id="28" name="Text 26"/>
+          <p:cNvSpPr txBox="1"/>
+          <p:nvPr/>
+        </p:nvSpPr>
+        <p:spPr>
+          <a:xfrm>
+            <a:off x="6492240" y="1481328"/>
+            <a:ext cx="4645152" cy="384048"/>
+          </a:xfrm>
+          <a:prstGeom prst="rect">
+            <a:avLst/>
+          </a:prstGeom>
+          <a:noFill/>
+          <a:ln/>
+        </p:spPr>
+        <p:txBody>
+          <a:bodyPr wrap="square" lIns="0" tIns="25400" rIns="25400" bIns="0" rtlCol="0" anchor="ctr"/>
+          <a:lstStyle/>
+          <a:p>
+            <a:pPr algn="ctr" indent="0" marL="0">
+              <a:lnSpc>
+                <a:spcPct val="120000"/>
+              </a:lnSpc>
+              <a:buNone/>
+            </a:pPr>
+            <a:r>
+              <a:rPr lang="en-US" sz="1800" dirty="0">
+                <a:solidFill>
+                  <a:srgbClr val="111827"/>
+                </a:solidFill>
+                <a:latin typeface="Pretendard" pitchFamily="34" charset="0"/>
+                <a:ea typeface="Pretendard" pitchFamily="34" charset="-122"/>
+                <a:cs typeface="Pretendard" pitchFamily="34" charset="-120"/>
+              </a:rPr>
+              <a:t>08  Chart and Table Pair</a:t>
+            </a:r>
+            <a:endParaRPr lang="en-US" sz="1800" dirty="0"/>
+          </a:p>
+        </p:txBody>
+      </p:sp>
+      <p:sp>
+        <p:nvSpPr>
+          <p:cNvPr id="29" name="Text 27"/>
+          <p:cNvSpPr txBox="1"/>
+          <p:nvPr/>
+        </p:nvSpPr>
+        <p:spPr>
+          <a:xfrm>
+            <a:off x="6492240" y="2194560"/>
+            <a:ext cx="4645152" cy="384048"/>
+          </a:xfrm>
+          <a:prstGeom prst="rect">
+            <a:avLst/>
+          </a:prstGeom>
+          <a:noFill/>
+          <a:ln/>
+        </p:spPr>
+        <p:txBody>
+          <a:bodyPr wrap="square" lIns="0" tIns="25400" rIns="25400" bIns="0" rtlCol="0" anchor="ctr"/>
+          <a:lstStyle/>
+          <a:p>
+            <a:pPr algn="ctr" indent="0" marL="0">
+              <a:lnSpc>
+                <a:spcPct val="120000"/>
+              </a:lnSpc>
+              <a:buNone/>
+            </a:pPr>
+            <a:r>
+              <a:rPr lang="en-US" sz="1800" dirty="0">
+                <a:solidFill>
+                  <a:srgbClr val="111827"/>
+                </a:solidFill>
+                <a:latin typeface="Pretendard" pitchFamily="34" charset="0"/>
+                <a:ea typeface="Pretendard" pitchFamily="34" charset="-122"/>
+                <a:cs typeface="Pretendard" pitchFamily="34" charset="-120"/>
+              </a:rPr>
+              <a:t>09  Editable Proof Objects</a:t>
+            </a:r>
+            <a:endParaRPr lang="en-US" sz="1800" dirty="0"/>
+          </a:p>
+        </p:txBody>
+      </p:sp>
+      <p:sp>
+        <p:nvSpPr>
+          <p:cNvPr id="30" name="Text 28"/>
+          <p:cNvSpPr txBox="1"/>
+          <p:nvPr/>
+        </p:nvSpPr>
+        <p:spPr>
+          <a:xfrm>
+            <a:off x="6492240" y="2907792"/>
+            <a:ext cx="4645152" cy="384048"/>
+          </a:xfrm>
+          <a:prstGeom prst="rect">
+            <a:avLst/>
+          </a:prstGeom>
+          <a:noFill/>
+          <a:ln/>
+        </p:spPr>
+        <p:txBody>
+          <a:bodyPr wrap="square" lIns="0" tIns="25400" rIns="25400" bIns="0" rtlCol="0" anchor="ctr"/>
+          <a:lstStyle/>
+          <a:p>
+            <a:pPr algn="ctr" indent="0" marL="0">
+              <a:lnSpc>
+                <a:spcPct val="120000"/>
+              </a:lnSpc>
+              <a:buNone/>
+            </a:pPr>
+            <a:r>
+              <a:rPr lang="en-US" sz="1800" dirty="0">
+                <a:solidFill>
+                  <a:srgbClr val="111827"/>
+                </a:solidFill>
+                <a:latin typeface="Pretendard" pitchFamily="34" charset="0"/>
+                <a:ea typeface="Pretendard" pitchFamily="34" charset="-122"/>
+                <a:cs typeface="Pretendard" pitchFamily="34" charset="-120"/>
+              </a:rPr>
+              <a:t>10  Object Shape Grammar</a:t>
+            </a:r>
+            <a:endParaRPr lang="en-US" sz="1800" dirty="0"/>
+          </a:p>
+        </p:txBody>
+      </p:sp>
+      <p:sp>
+        <p:nvSpPr>
+          <p:cNvPr id="31" name="Text 29"/>
+          <p:cNvSpPr txBox="1"/>
+          <p:nvPr/>
+        </p:nvSpPr>
+        <p:spPr>
+          <a:xfrm>
+            <a:off x="6492240" y="3621024"/>
+            <a:ext cx="4645152" cy="384048"/>
+          </a:xfrm>
+          <a:prstGeom prst="rect">
+            <a:avLst/>
+          </a:prstGeom>
+          <a:noFill/>
+          <a:ln/>
+        </p:spPr>
+        <p:txBody>
+          <a:bodyPr wrap="square" lIns="0" tIns="25400" rIns="25400" bIns="0" rtlCol="0" anchor="ctr"/>
+          <a:lstStyle/>
+          <a:p>
+            <a:pPr algn="ctr" indent="0" marL="0">
+              <a:lnSpc>
+                <a:spcPct val="120000"/>
+              </a:lnSpc>
+              <a:buNone/>
+            </a:pPr>
+            <a:r>
+              <a:rPr lang="en-US" sz="1800" dirty="0">
+                <a:solidFill>
+                  <a:srgbClr val="111827"/>
+                </a:solidFill>
+                <a:latin typeface="Pretendard" pitchFamily="34" charset="0"/>
+                <a:ea typeface="Pretendard" pitchFamily="34" charset="-122"/>
+                <a:cs typeface="Pretendard" pitchFamily="34" charset="-120"/>
+              </a:rPr>
+              <a:t>11  Icon and Text Aside</a:t>
+            </a:r>
+            <a:endParaRPr lang="en-US" sz="1800" dirty="0"/>
+          </a:p>
+        </p:txBody>
+      </p:sp>
+      <p:sp>
+        <p:nvSpPr>
+          <p:cNvPr id="32" name="Text 30"/>
+          <p:cNvSpPr txBox="1"/>
+          <p:nvPr/>
+        </p:nvSpPr>
+        <p:spPr>
+          <a:xfrm>
+            <a:off x="6492240" y="4334256"/>
+            <a:ext cx="4645152" cy="384048"/>
+          </a:xfrm>
+          <a:prstGeom prst="rect">
+            <a:avLst/>
+          </a:prstGeom>
+          <a:noFill/>
+          <a:ln/>
+        </p:spPr>
+        <p:txBody>
+          <a:bodyPr wrap="square" lIns="0" tIns="25400" rIns="25400" bIns="0" rtlCol="0" anchor="ctr"/>
+          <a:lstStyle/>
+          <a:p>
+            <a:pPr algn="ctr" indent="0" marL="0">
+              <a:lnSpc>
+                <a:spcPct val="120000"/>
+              </a:lnSpc>
+              <a:buNone/>
+            </a:pPr>
+            <a:r>
+              <a:rPr lang="en-US" sz="1800" dirty="0">
+                <a:solidFill>
+                  <a:srgbClr val="111827"/>
+                </a:solidFill>
+                <a:latin typeface="Pretendard" pitchFamily="34" charset="0"/>
+                <a:ea typeface="Pretendard" pitchFamily="34" charset="-122"/>
+                <a:cs typeface="Pretendard" pitchFamily="34" charset="-120"/>
+              </a:rPr>
+              <a:t>12  Overflow Guard</a:t>
+            </a:r>
+            <a:endParaRPr lang="en-US" sz="1800" dirty="0"/>
+          </a:p>
+        </p:txBody>
+      </p:sp>
+      <p:sp>
+        <p:nvSpPr>
+          <p:cNvPr id="33" name="Text 31"/>
+          <p:cNvSpPr txBox="1"/>
+          <p:nvPr/>
+        </p:nvSpPr>
+        <p:spPr>
+          <a:xfrm>
+            <a:off x="6492240" y="5047488"/>
+            <a:ext cx="4645152" cy="384048"/>
+          </a:xfrm>
+          <a:prstGeom prst="rect">
+            <a:avLst/>
+          </a:prstGeom>
+          <a:noFill/>
+          <a:ln/>
+        </p:spPr>
+        <p:txBody>
+          <a:bodyPr wrap="square" lIns="0" tIns="25400" rIns="25400" bIns="0" rtlCol="0" anchor="ctr"/>
+          <a:lstStyle/>
+          <a:p>
+            <a:pPr algn="ctr" indent="0" marL="0">
+              <a:lnSpc>
+                <a:spcPct val="120000"/>
+              </a:lnSpc>
+              <a:buNone/>
+            </a:pPr>
+            <a:r>
+              <a:rPr lang="en-US" sz="1800" dirty="0">
+                <a:solidFill>
+                  <a:srgbClr val="111827"/>
+                </a:solidFill>
+                <a:latin typeface="Pretendard" pitchFamily="34" charset="0"/>
+                <a:ea typeface="Pretendard" pitchFamily="34" charset="-122"/>
+                <a:cs typeface="Pretendard" pitchFamily="34" charset="-120"/>
+              </a:rPr>
+              <a:t>13  Image Safe Frame</a:t>
+            </a:r>
+            <a:endParaRPr lang="en-US" sz="1800" dirty="0"/>
+          </a:p>
+        </p:txBody>
+      </p:sp>
+      <p:sp>
+        <p:nvSpPr>
+          <p:cNvPr id="34" name="Text 32"/>
+          <p:cNvSpPr txBox="1"/>
+          <p:nvPr/>
+        </p:nvSpPr>
+        <p:spPr>
+          <a:xfrm>
+            <a:off x="6492240" y="5760720"/>
+            <a:ext cx="4645152" cy="384048"/>
+          </a:xfrm>
+          <a:prstGeom prst="rect">
+            <a:avLst/>
+          </a:prstGeom>
+          <a:noFill/>
+          <a:ln/>
+        </p:spPr>
+        <p:txBody>
+          <a:bodyPr wrap="square" lIns="0" tIns="25400" rIns="25400" bIns="0" rtlCol="0" anchor="ctr"/>
+          <a:lstStyle/>
+          <a:p>
+            <a:pPr algn="ctr" indent="0" marL="0">
+              <a:lnSpc>
+                <a:spcPct val="120000"/>
+              </a:lnSpc>
+              <a:buNone/>
+            </a:pPr>
+            <a:r>
+              <a:rPr lang="en-US" sz="1800" dirty="0">
+                <a:solidFill>
+                  <a:srgbClr val="111827"/>
+                </a:solidFill>
+                <a:latin typeface="Pretendard" pitchFamily="34" charset="0"/>
+                <a:ea typeface="Pretendard" pitchFamily="34" charset="-122"/>
+                <a:cs typeface="Pretendard" pitchFamily="34" charset="-120"/>
+              </a:rPr>
+              <a:t>14  Mixed Object Packing</a:t>
+            </a:r>
+            <a:endParaRPr lang="en-US" sz="1800" dirty="0"/>
+          </a:p>
+        </p:txBody>
+      </p:sp>
+    </p:spTree>
+  </p:cSld>
+  <p:clrMapOvr>
+    <a:masterClrMapping/>
+  </p:clrMapOvr>
+</p:sld>
+</file>
+
+<file path=ppt/slides/slide20.xml><?xml version="1.0" encoding="utf-8"?>
+<p:sld xmlns:a="http://schemas.openxmlformats.org/drawingml/2006/main" xmlns:r="http://schemas.openxmlformats.org/officeDocument/2006/relationships" xmlns:p="http://schemas.openxmlformats.org/presentationml/2006/main">
+  <p:cSld name="Slide 20">
     <p:bg>
       <p:bgPr>
         <a:solidFill>
@@ -8281,8 +11973,8 @@
         </p:nvSpPr>
         <p:spPr>
           <a:xfrm>
-            <a:off x="1689354" y="1627632"/>
-            <a:ext cx="3961638" cy="1591056"/>
+            <a:off x="1689354" y="2033016"/>
+            <a:ext cx="3961638" cy="780288"/>
           </a:xfrm>
           <a:prstGeom prst="rect">
             <a:avLst/>
@@ -8397,8 +12089,8 @@
         </p:nvSpPr>
         <p:spPr>
           <a:xfrm>
-            <a:off x="7175754" y="1627632"/>
-            <a:ext cx="3961638" cy="1591056"/>
+            <a:off x="7175754" y="1865376"/>
+            <a:ext cx="3961638" cy="1115568"/>
           </a:xfrm>
           <a:prstGeom prst="rect">
             <a:avLst/>
@@ -8513,8 +12205,8 @@
         </p:nvSpPr>
         <p:spPr>
           <a:xfrm>
-            <a:off x="1689354" y="3913632"/>
-            <a:ext cx="3961638" cy="1591056"/>
+            <a:off x="1689354" y="4151376"/>
+            <a:ext cx="3961638" cy="1115568"/>
           </a:xfrm>
           <a:prstGeom prst="rect">
             <a:avLst/>
@@ -8629,8 +12321,8 @@
         </p:nvSpPr>
         <p:spPr>
           <a:xfrm>
-            <a:off x="7175754" y="3913632"/>
-            <a:ext cx="3961638" cy="1591056"/>
+            <a:off x="7175754" y="4151376"/>
+            <a:ext cx="3961638" cy="1115568"/>
           </a:xfrm>
           <a:prstGeom prst="rect">
             <a:avLst/>
@@ -8688,9 +12380,9 @@
 </p:sld>
 </file>
 
-<file path=ppt/slides/slide18.xml><?xml version="1.0" encoding="utf-8"?>
+<file path=ppt/slides/slide21.xml><?xml version="1.0" encoding="utf-8"?>
 <p:sld xmlns:a="http://schemas.openxmlformats.org/drawingml/2006/main" xmlns:r="http://schemas.openxmlformats.org/officeDocument/2006/relationships" xmlns:p="http://schemas.openxmlformats.org/presentationml/2006/main">
-  <p:cSld name="Slide 18">
+  <p:cSld name="Slide 21">
     <p:bg>
       <p:bgPr>
         <a:solidFill>
@@ -9218,8 +12910,8 @@
         </p:nvSpPr>
         <p:spPr>
           <a:xfrm>
-            <a:off x="1689354" y="1627632"/>
-            <a:ext cx="3961638" cy="1591056"/>
+            <a:off x="1689354" y="1865376"/>
+            <a:ext cx="3961638" cy="1115568"/>
           </a:xfrm>
           <a:prstGeom prst="rect">
             <a:avLst/>
@@ -9334,8 +13026,8 @@
         </p:nvSpPr>
         <p:spPr>
           <a:xfrm>
-            <a:off x="7175754" y="1627632"/>
-            <a:ext cx="3961638" cy="1591056"/>
+            <a:off x="7175754" y="1697736"/>
+            <a:ext cx="3961638" cy="1450848"/>
           </a:xfrm>
           <a:prstGeom prst="rect">
             <a:avLst/>
@@ -9450,8 +13142,8 @@
         </p:nvSpPr>
         <p:spPr>
           <a:xfrm>
-            <a:off x="1689354" y="3913632"/>
-            <a:ext cx="3961638" cy="1591056"/>
+            <a:off x="1689354" y="4151376"/>
+            <a:ext cx="3961638" cy="1115568"/>
           </a:xfrm>
           <a:prstGeom prst="rect">
             <a:avLst/>
@@ -9566,8 +13258,8 @@
         </p:nvSpPr>
         <p:spPr>
           <a:xfrm>
-            <a:off x="7175754" y="3913632"/>
-            <a:ext cx="3961638" cy="1591056"/>
+            <a:off x="7175754" y="4151376"/>
+            <a:ext cx="3961638" cy="1115568"/>
           </a:xfrm>
           <a:prstGeom prst="rect">
             <a:avLst/>
@@ -9625,9 +13317,1285 @@
 </p:sld>
 </file>
 
-<file path=ppt/slides/slide19.xml><?xml version="1.0" encoding="utf-8"?>
+<file path=ppt/slides/slide22.xml><?xml version="1.0" encoding="utf-8"?>
 <p:sld xmlns:a="http://schemas.openxmlformats.org/drawingml/2006/main" xmlns:r="http://schemas.openxmlformats.org/officeDocument/2006/relationships" xmlns:p="http://schemas.openxmlformats.org/presentationml/2006/main">
-  <p:cSld name="Slide 19">
+  <p:cSld name="Slide 22">
+    <p:bg>
+      <p:bgPr>
+        <a:solidFill>
+          <a:srgbClr val="F8FAFC"/>
+        </a:solidFill>
+      </p:bgPr>
+    </p:bg>
+    <p:spTree>
+      <p:nvGrpSpPr>
+        <p:cNvPr id="1" name=""/>
+        <p:cNvGrpSpPr/>
+        <p:nvPr/>
+      </p:nvGrpSpPr>
+      <p:grpSpPr>
+        <a:xfrm>
+          <a:off x="0" y="0"/>
+          <a:ext cx="0" cy="0"/>
+          <a:chOff x="0" y="0"/>
+          <a:chExt cx="0" cy="0"/>
+        </a:xfrm>
+      </p:grpSpPr>
+      <p:sp>
+        <p:nvSpPr>
+          <p:cNvPr id="2" name="Shape 0"/>
+          <p:cNvSpPr/>
+          <p:nvPr/>
+        </p:nvSpPr>
+        <p:spPr>
+          <a:xfrm>
+            <a:off x="731520" y="1207008"/>
+            <a:ext cx="1325880" cy="54864"/>
+          </a:xfrm>
+          <a:prstGeom prst="rect">
+            <a:avLst/>
+          </a:prstGeom>
+          <a:solidFill>
+            <a:srgbClr val="2563EB"/>
+          </a:solidFill>
+          <a:ln w="12700">
+            <a:solidFill>
+              <a:srgbClr val="2563EB">
+                <a:alpha val="0"/>
+              </a:srgbClr>
+            </a:solidFill>
+            <a:prstDash val="solid"/>
+          </a:ln>
+        </p:spPr>
+      </p:sp>
+      <p:sp>
+        <p:nvSpPr>
+          <p:cNvPr id="3" name="Shape 1"/>
+          <p:cNvSpPr/>
+          <p:nvPr/>
+        </p:nvSpPr>
+        <p:spPr>
+          <a:xfrm>
+            <a:off x="822960" y="1463040"/>
+            <a:ext cx="5623560" cy="73152"/>
+          </a:xfrm>
+          <a:prstGeom prst="rect">
+            <a:avLst/>
+          </a:prstGeom>
+          <a:solidFill>
+            <a:srgbClr val="2563EB"/>
+          </a:solidFill>
+          <a:ln w="12700">
+            <a:solidFill>
+              <a:srgbClr val="2563EB">
+                <a:alpha val="0"/>
+              </a:srgbClr>
+            </a:solidFill>
+            <a:prstDash val="solid"/>
+          </a:ln>
+        </p:spPr>
+      </p:sp>
+      <p:pic>
+        <p:nvPicPr>
+          <p:cNvPr id="4" name="Image 0" descr="preencoded.png">    </p:cNvPr>
+          <p:cNvPicPr>
+            <a:picLocks noChangeAspect="1"/>
+          </p:cNvPicPr>
+          <p:nvPr/>
+        </p:nvPicPr>
+        <p:blipFill>
+          <a:blip r:embed="rId1">
+            <a:extLst>
+              <a:ext uri="{96DAC541-7B7A-43D3-8B79-37D633B846F1}">
+                <asvg:svgBlip xmlns:asvg="http://schemas.microsoft.com/office/drawing/2016/SVG/main" r:embed="rId2"/>
+              </a:ext>
+            </a:extLst>
+          </a:blip>
+          <a:stretch>
+            <a:fillRect/>
+          </a:stretch>
+        </p:blipFill>
+        <p:spPr>
+          <a:xfrm>
+            <a:off x="6812280" y="1463040"/>
+            <a:ext cx="4434840" cy="4526280"/>
+          </a:xfrm>
+          <a:prstGeom prst="rect">
+            <a:avLst/>
+          </a:prstGeom>
+        </p:spPr>
+      </p:pic>
+      <p:sp>
+        <p:nvSpPr>
+          <p:cNvPr id="5" name="Shape 2"/>
+          <p:cNvSpPr/>
+          <p:nvPr/>
+        </p:nvSpPr>
+        <p:spPr>
+          <a:xfrm>
+            <a:off x="6812280" y="1463040"/>
+            <a:ext cx="4434840" cy="4526280"/>
+          </a:xfrm>
+          <a:prstGeom prst="rect">
+            <a:avLst/>
+          </a:prstGeom>
+          <a:solidFill>
+            <a:srgbClr val="FFFFFF">
+              <a:alpha val="0"/>
+            </a:srgbClr>
+          </a:solidFill>
+          <a:ln w="12700">
+            <a:solidFill>
+              <a:srgbClr val="E2E8F0">
+                <a:alpha val="0"/>
+              </a:srgbClr>
+            </a:solidFill>
+            <a:prstDash val="solid"/>
+          </a:ln>
+          <a:effectLst>
+            <a:outerShdw sx="100000" sy="100000" kx="0" ky="0" algn="bl" rotWithShape="0" blurRad="12700" dist="50800" dir="2700000">
+              <a:srgbClr val="000000">
+                <a:alpha val="8000"/>
+              </a:srgbClr>
+            </a:outerShdw>
+          </a:effectLst>
+        </p:spPr>
+      </p:sp>
+      <p:sp>
+        <p:nvSpPr>
+          <p:cNvPr id="6" name="Text 3"/>
+          <p:cNvSpPr txBox="1"/>
+          <p:nvPr/>
+        </p:nvSpPr>
+        <p:spPr>
+          <a:xfrm>
+            <a:off x="731520" y="457200"/>
+            <a:ext cx="10698480" cy="731520"/>
+          </a:xfrm>
+          <a:prstGeom prst="rect">
+            <a:avLst/>
+          </a:prstGeom>
+          <a:noFill/>
+          <a:ln/>
+        </p:spPr>
+        <p:txBody>
+          <a:bodyPr wrap="square" lIns="0" tIns="0" rIns="0" bIns="0" rtlCol="0" anchor="ctr"/>
+          <a:lstStyle/>
+          <a:p>
+            <a:pPr algn="ctr" indent="0" marL="0">
+              <a:lnSpc>
+                <a:spcPct val="120000"/>
+              </a:lnSpc>
+              <a:buNone/>
+            </a:pPr>
+            <a:r>
+              <a:rPr lang="en-US" sz="3400" b="1" dirty="0">
+                <a:solidFill>
+                  <a:srgbClr val="111827"/>
+                </a:solidFill>
+                <a:latin typeface="Pretendard" pitchFamily="34" charset="0"/>
+                <a:ea typeface="Pretendard" pitchFamily="34" charset="-122"/>
+                <a:cs typeface="Pretendard" pitchFamily="34" charset="-120"/>
+              </a:rPr>
+              <a:t>Image Safe Frame</a:t>
+            </a:r>
+            <a:endParaRPr lang="en-US" sz="3400" dirty="0"/>
+          </a:p>
+        </p:txBody>
+      </p:sp>
+      <p:sp>
+        <p:nvSpPr>
+          <p:cNvPr id="7" name="Text 4"/>
+          <p:cNvSpPr txBox="1"/>
+          <p:nvPr/>
+        </p:nvSpPr>
+        <p:spPr>
+          <a:xfrm>
+            <a:off x="896112" y="1572768"/>
+            <a:ext cx="5477256" cy="4306824"/>
+          </a:xfrm>
+          <a:prstGeom prst="rect">
+            <a:avLst/>
+          </a:prstGeom>
+          <a:noFill/>
+          <a:ln/>
+        </p:spPr>
+        <p:txBody>
+          <a:bodyPr wrap="square" lIns="0" tIns="25400" rIns="25400" bIns="0" rtlCol="0" anchor="t"/>
+          <a:lstStyle/>
+          <a:p>
+            <a:pPr algn="l" indent="0" marL="0">
+              <a:lnSpc>
+                <a:spcPct val="120000"/>
+              </a:lnSpc>
+              <a:buNone/>
+            </a:pPr>
+            <a:r>
+              <a:rPr lang="en-US" sz="2200" b="1" dirty="0">
+                <a:solidFill>
+                  <a:srgbClr val="2563EB"/>
+                </a:solidFill>
+                <a:latin typeface="Pretendard" pitchFamily="34" charset="0"/>
+                <a:ea typeface="Pretendard" pitchFamily="34" charset="-122"/>
+                <a:cs typeface="Pretendard" pitchFamily="34" charset="-120"/>
+              </a:rPr>
+              <a:t>- Image role</a:t>
+            </a:r>
+            <a:pPr algn="l" indent="0" marL="0">
+              <a:lnSpc>
+                <a:spcPct val="120000"/>
+              </a:lnSpc>
+              <a:buNone/>
+            </a:pPr>
+            <a:r>
+              <a:rPr lang="en-US" sz="2200" dirty="0">
+                <a:solidFill>
+                  <a:srgbClr val="111827"/>
+                </a:solidFill>
+                <a:latin typeface="Pretendard" pitchFamily="34" charset="0"/>
+                <a:ea typeface="Pretendard" pitchFamily="34" charset="-122"/>
+                <a:cs typeface="Pretendard" pitchFamily="34" charset="-120"/>
+              </a:rPr>
+              <a:t>  picture content uses an internal safe frame.</a:t>
+            </a:r>
+            <a:endParaRPr lang="en-US" sz="2200" dirty="0"/>
+          </a:p>
+          <a:p>
+            <a:pPr algn="l" indent="0" marL="0">
+              <a:lnSpc>
+                <a:spcPct val="120000"/>
+              </a:lnSpc>
+              <a:buNone/>
+            </a:pPr>
+            <a:r>
+              <a:rPr lang="en-US" sz="2200" b="1" dirty="0">
+                <a:solidFill>
+                  <a:srgbClr val="2563EB"/>
+                </a:solidFill>
+                <a:latin typeface="Pretendard" pitchFamily="34" charset="0"/>
+                <a:ea typeface="Pretendard" pitchFamily="34" charset="-122"/>
+                <a:cs typeface="Pretendard" pitchFamily="34" charset="-120"/>
+              </a:rPr>
+              <a:t>- Surface rule</a:t>
+            </a:r>
+            <a:endParaRPr lang="en-US" sz="2200" dirty="0"/>
+          </a:p>
+          <a:p>
+            <a:pPr algn="l" indent="0" marL="0">
+              <a:lnSpc>
+                <a:spcPct val="120000"/>
+              </a:lnSpc>
+              <a:buNone/>
+            </a:pPr>
+            <a:r>
+              <a:rPr lang="en-US" sz="2200" dirty="0">
+                <a:solidFill>
+                  <a:srgbClr val="111827"/>
+                </a:solidFill>
+                <a:latin typeface="Pretendard" pitchFamily="34" charset="0"/>
+                <a:ea typeface="Pretendard" pitchFamily="34" charset="-122"/>
+                <a:cs typeface="Pretendard" pitchFamily="34" charset="-120"/>
+              </a:rPr>
+              <a:t>  background decoration stays outside the picture bounds.</a:t>
+            </a:r>
+            <a:endParaRPr lang="en-US" sz="2200" dirty="0"/>
+          </a:p>
+          <a:p>
+            <a:pPr algn="l" indent="0" marL="0">
+              <a:lnSpc>
+                <a:spcPct val="120000"/>
+              </a:lnSpc>
+              <a:buNone/>
+            </a:pPr>
+            <a:r>
+              <a:rPr lang="en-US" sz="2200" b="1" dirty="0">
+                <a:solidFill>
+                  <a:srgbClr val="2563EB"/>
+                </a:solidFill>
+                <a:latin typeface="Pretendard" pitchFamily="34" charset="0"/>
+                <a:ea typeface="Pretendard" pitchFamily="34" charset="-122"/>
+                <a:cs typeface="Pretendard" pitchFamily="34" charset="-120"/>
+              </a:rPr>
+              <a:t>- Bounds rule</a:t>
+            </a:r>
+            <a:endParaRPr lang="en-US" sz="2200" dirty="0"/>
+          </a:p>
+          <a:p>
+            <a:pPr algn="l" indent="0" marL="0">
+              <a:lnSpc>
+                <a:spcPct val="120000"/>
+              </a:lnSpc>
+              <a:buNone/>
+            </a:pPr>
+            <a:r>
+              <a:rPr lang="en-US" sz="2200" dirty="0">
+                <a:solidFill>
+                  <a:srgbClr val="111827"/>
+                </a:solidFill>
+                <a:latin typeface="Pretendard" pitchFamily="34" charset="0"/>
+                <a:ea typeface="Pretendard" pitchFamily="34" charset="-122"/>
+                <a:cs typeface="Pretendard" pitchFamily="34" charset="-120"/>
+              </a:rPr>
+              <a:t>  child images never exceed their owning image region.</a:t>
+            </a:r>
+            <a:endParaRPr lang="en-US" sz="2200" dirty="0"/>
+          </a:p>
+        </p:txBody>
+      </p:sp>
+      <p:pic>
+        <p:nvPicPr>
+          <p:cNvPr id="8" name="Image 1" descr="Safe frame diagram">    </p:cNvPr>
+          <p:cNvPicPr>
+            <a:picLocks noChangeAspect="1"/>
+          </p:cNvPicPr>
+          <p:nvPr/>
+        </p:nvPicPr>
+        <p:blipFill>
+          <a:blip r:embed="rId3">
+            <a:extLst>
+              <a:ext uri="{96DAC541-7B7A-43D3-8B79-37D633B846F1}">
+                <asvg:svgBlip xmlns:asvg="http://schemas.microsoft.com/office/drawing/2016/SVG/main" r:embed="rId4"/>
+              </a:ext>
+            </a:extLst>
+          </a:blip>
+          <a:stretch>
+            <a:fillRect/>
+          </a:stretch>
+        </p:blipFill>
+        <p:spPr>
+          <a:xfrm>
+            <a:off x="6940296" y="1591056"/>
+            <a:ext cx="4178808" cy="4270248"/>
+          </a:xfrm>
+          <a:prstGeom prst="rect">
+            <a:avLst/>
+          </a:prstGeom>
+        </p:spPr>
+      </p:pic>
+    </p:spTree>
+  </p:cSld>
+  <p:clrMapOvr>
+    <a:masterClrMapping/>
+  </p:clrMapOvr>
+</p:sld>
+</file>
+
+<file path=ppt/slides/slide23.xml><?xml version="1.0" encoding="utf-8"?>
+<p:sld xmlns:a="http://schemas.openxmlformats.org/drawingml/2006/main" xmlns:r="http://schemas.openxmlformats.org/officeDocument/2006/relationships" xmlns:p="http://schemas.openxmlformats.org/presentationml/2006/main">
+  <p:cSld name="Slide 23">
+    <p:bg>
+      <p:bgPr>
+        <a:solidFill>
+          <a:srgbClr val="F8FAFC"/>
+        </a:solidFill>
+      </p:bgPr>
+    </p:bg>
+    <p:spTree>
+      <p:nvGrpSpPr>
+        <p:cNvPr id="1" name=""/>
+        <p:cNvGrpSpPr/>
+        <p:nvPr/>
+      </p:nvGrpSpPr>
+      <p:grpSpPr>
+        <a:xfrm>
+          <a:off x="0" y="0"/>
+          <a:ext cx="0" cy="0"/>
+          <a:chOff x="0" y="0"/>
+          <a:chExt cx="0" cy="0"/>
+        </a:xfrm>
+      </p:grpSpPr>
+      <p:sp>
+        <p:nvSpPr>
+          <p:cNvPr id="2" name="Shape 0"/>
+          <p:cNvSpPr/>
+          <p:nvPr/>
+        </p:nvSpPr>
+        <p:spPr>
+          <a:xfrm>
+            <a:off x="731520" y="1207008"/>
+            <a:ext cx="1325880" cy="54864"/>
+          </a:xfrm>
+          <a:prstGeom prst="rect">
+            <a:avLst/>
+          </a:prstGeom>
+          <a:solidFill>
+            <a:srgbClr val="2563EB"/>
+          </a:solidFill>
+          <a:ln w="12700">
+            <a:solidFill>
+              <a:srgbClr val="2563EB">
+                <a:alpha val="0"/>
+              </a:srgbClr>
+            </a:solidFill>
+            <a:prstDash val="solid"/>
+          </a:ln>
+        </p:spPr>
+      </p:sp>
+      <p:sp>
+        <p:nvSpPr>
+          <p:cNvPr id="3" name="Shape 1"/>
+          <p:cNvSpPr/>
+          <p:nvPr/>
+        </p:nvSpPr>
+        <p:spPr>
+          <a:xfrm>
+            <a:off x="841248" y="4041648"/>
+            <a:ext cx="4572000" cy="73152"/>
+          </a:xfrm>
+          <a:prstGeom prst="rect">
+            <a:avLst/>
+          </a:prstGeom>
+          <a:solidFill>
+            <a:srgbClr val="2563EB"/>
+          </a:solidFill>
+          <a:ln w="12700">
+            <a:solidFill>
+              <a:srgbClr val="2563EB">
+                <a:alpha val="0"/>
+              </a:srgbClr>
+            </a:solidFill>
+            <a:prstDash val="solid"/>
+          </a:ln>
+        </p:spPr>
+      </p:sp>
+      <p:pic>
+        <p:nvPicPr>
+          <p:cNvPr id="4" name="Image 0" descr="preencoded.png">    </p:cNvPr>
+          <p:cNvPicPr>
+            <a:picLocks noChangeAspect="1"/>
+          </p:cNvPicPr>
+          <p:nvPr/>
+        </p:nvPicPr>
+        <p:blipFill>
+          <a:blip r:embed="rId1">
+            <a:extLst>
+              <a:ext uri="{96DAC541-7B7A-43D3-8B79-37D633B846F1}">
+                <asvg:svgBlip xmlns:asvg="http://schemas.microsoft.com/office/drawing/2016/SVG/main" r:embed="rId2"/>
+              </a:ext>
+            </a:extLst>
+          </a:blip>
+          <a:stretch>
+            <a:fillRect/>
+          </a:stretch>
+        </p:blipFill>
+        <p:spPr>
+          <a:xfrm>
+            <a:off x="749808" y="1444752"/>
+            <a:ext cx="4617720" cy="2359152"/>
+          </a:xfrm>
+          <a:prstGeom prst="rect">
+            <a:avLst/>
+          </a:prstGeom>
+        </p:spPr>
+      </p:pic>
+      <p:sp>
+        <p:nvSpPr>
+          <p:cNvPr id="5" name="Shape 2"/>
+          <p:cNvSpPr/>
+          <p:nvPr/>
+        </p:nvSpPr>
+        <p:spPr>
+          <a:xfrm>
+            <a:off x="749808" y="1444752"/>
+            <a:ext cx="4617720" cy="2359152"/>
+          </a:xfrm>
+          <a:prstGeom prst="rect">
+            <a:avLst/>
+          </a:prstGeom>
+          <a:solidFill>
+            <a:srgbClr val="FFFFFF">
+              <a:alpha val="0"/>
+            </a:srgbClr>
+          </a:solidFill>
+          <a:ln w="12700">
+            <a:solidFill>
+              <a:srgbClr val="E2E8F0">
+                <a:alpha val="0"/>
+              </a:srgbClr>
+            </a:solidFill>
+            <a:prstDash val="solid"/>
+          </a:ln>
+          <a:effectLst>
+            <a:outerShdw sx="100000" sy="100000" kx="0" ky="0" algn="bl" rotWithShape="0" blurRad="12700" dist="50800" dir="2700000">
+              <a:srgbClr val="000000">
+                <a:alpha val="8000"/>
+              </a:srgbClr>
+            </a:outerShdw>
+          </a:effectLst>
+        </p:spPr>
+      </p:sp>
+      <p:pic>
+        <p:nvPicPr>
+          <p:cNvPr id="6" name="Image 1" descr="preencoded.png">    </p:cNvPr>
+          <p:cNvPicPr>
+            <a:picLocks noChangeAspect="1"/>
+          </p:cNvPicPr>
+          <p:nvPr/>
+        </p:nvPicPr>
+        <p:blipFill>
+          <a:blip r:embed="rId3">
+            <a:extLst>
+              <a:ext uri="{96DAC541-7B7A-43D3-8B79-37D633B846F1}">
+                <asvg:svgBlip xmlns:asvg="http://schemas.microsoft.com/office/drawing/2016/SVG/main" r:embed="rId4"/>
+              </a:ext>
+            </a:extLst>
+          </a:blip>
+          <a:stretch>
+            <a:fillRect/>
+          </a:stretch>
+        </p:blipFill>
+        <p:spPr>
+          <a:xfrm>
+            <a:off x="5577840" y="1481328"/>
+            <a:ext cx="5532120" cy="2212848"/>
+          </a:xfrm>
+          <a:prstGeom prst="rect">
+            <a:avLst/>
+          </a:prstGeom>
+        </p:spPr>
+      </p:pic>
+      <p:sp>
+        <p:nvSpPr>
+          <p:cNvPr id="7" name="Shape 3"/>
+          <p:cNvSpPr/>
+          <p:nvPr/>
+        </p:nvSpPr>
+        <p:spPr>
+          <a:xfrm>
+            <a:off x="5577840" y="1481328"/>
+            <a:ext cx="5532120" cy="2212848"/>
+          </a:xfrm>
+          <a:prstGeom prst="rect">
+            <a:avLst/>
+          </a:prstGeom>
+          <a:solidFill>
+            <a:srgbClr val="FFFFFF">
+              <a:alpha val="0"/>
+            </a:srgbClr>
+          </a:solidFill>
+          <a:ln w="12700">
+            <a:solidFill>
+              <a:srgbClr val="E2E8F0">
+                <a:alpha val="0"/>
+              </a:srgbClr>
+            </a:solidFill>
+            <a:prstDash val="solid"/>
+          </a:ln>
+          <a:effectLst>
+            <a:outerShdw sx="100000" sy="100000" kx="0" ky="0" algn="bl" rotWithShape="0" blurRad="12700" dist="50800" dir="2700000">
+              <a:srgbClr val="000000">
+                <a:alpha val="8000"/>
+              </a:srgbClr>
+            </a:outerShdw>
+          </a:effectLst>
+        </p:spPr>
+      </p:sp>
+      <p:pic>
+        <p:nvPicPr>
+          <p:cNvPr id="8" name="Image 2" descr="preencoded.png">    </p:cNvPr>
+          <p:cNvPicPr>
+            <a:picLocks noChangeAspect="1"/>
+          </p:cNvPicPr>
+          <p:nvPr/>
+        </p:nvPicPr>
+        <p:blipFill>
+          <a:blip r:embed="rId5">
+            <a:extLst>
+              <a:ext uri="{96DAC541-7B7A-43D3-8B79-37D633B846F1}">
+                <asvg:svgBlip xmlns:asvg="http://schemas.microsoft.com/office/drawing/2016/SVG/main" r:embed="rId6"/>
+              </a:ext>
+            </a:extLst>
+          </a:blip>
+          <a:stretch>
+            <a:fillRect/>
+          </a:stretch>
+        </p:blipFill>
+        <p:spPr>
+          <a:xfrm>
+            <a:off x="5577840" y="3913632"/>
+            <a:ext cx="5532120" cy="2011680"/>
+          </a:xfrm>
+          <a:prstGeom prst="rect">
+            <a:avLst/>
+          </a:prstGeom>
+        </p:spPr>
+      </p:pic>
+      <p:sp>
+        <p:nvSpPr>
+          <p:cNvPr id="9" name="Shape 4"/>
+          <p:cNvSpPr/>
+          <p:nvPr/>
+        </p:nvSpPr>
+        <p:spPr>
+          <a:xfrm>
+            <a:off x="5577840" y="3913632"/>
+            <a:ext cx="5532120" cy="2011680"/>
+          </a:xfrm>
+          <a:prstGeom prst="rect">
+            <a:avLst/>
+          </a:prstGeom>
+          <a:solidFill>
+            <a:srgbClr val="FFFFFF">
+              <a:alpha val="0"/>
+            </a:srgbClr>
+          </a:solidFill>
+          <a:ln w="12700">
+            <a:solidFill>
+              <a:srgbClr val="E2E8F0">
+                <a:alpha val="0"/>
+              </a:srgbClr>
+            </a:solidFill>
+            <a:prstDash val="solid"/>
+          </a:ln>
+          <a:effectLst>
+            <a:outerShdw sx="100000" sy="100000" kx="0" ky="0" algn="bl" rotWithShape="0" blurRad="12700" dist="50800" dir="2700000">
+              <a:srgbClr val="000000">
+                <a:alpha val="8000"/>
+              </a:srgbClr>
+            </a:outerShdw>
+          </a:effectLst>
+        </p:spPr>
+      </p:sp>
+      <p:sp>
+        <p:nvSpPr>
+          <p:cNvPr id="10" name="Text 5"/>
+          <p:cNvSpPr txBox="1"/>
+          <p:nvPr/>
+        </p:nvSpPr>
+        <p:spPr>
+          <a:xfrm>
+            <a:off x="731520" y="457200"/>
+            <a:ext cx="10698480" cy="731520"/>
+          </a:xfrm>
+          <a:prstGeom prst="rect">
+            <a:avLst/>
+          </a:prstGeom>
+          <a:noFill/>
+          <a:ln/>
+        </p:spPr>
+        <p:txBody>
+          <a:bodyPr wrap="square" lIns="0" tIns="0" rIns="0" bIns="0" rtlCol="0" anchor="ctr"/>
+          <a:lstStyle/>
+          <a:p>
+            <a:pPr algn="ctr" indent="0" marL="0">
+              <a:lnSpc>
+                <a:spcPct val="120000"/>
+              </a:lnSpc>
+              <a:buNone/>
+            </a:pPr>
+            <a:r>
+              <a:rPr lang="en-US" sz="3400" b="1" dirty="0">
+                <a:solidFill>
+                  <a:srgbClr val="111827"/>
+                </a:solidFill>
+                <a:latin typeface="Pretendard" pitchFamily="34" charset="0"/>
+                <a:ea typeface="Pretendard" pitchFamily="34" charset="-122"/>
+                <a:cs typeface="Pretendard" pitchFamily="34" charset="-120"/>
+              </a:rPr>
+              <a:t>Mixed Object Packing</a:t>
+            </a:r>
+            <a:endParaRPr lang="en-US" sz="3400" dirty="0"/>
+          </a:p>
+        </p:txBody>
+      </p:sp>
+      <p:graphicFrame>
+        <p:nvGraphicFramePr>
+          <p:cNvPr id="11" name="Chart 0" descr=""/>
+          <p:cNvGraphicFramePr/>
+          <p:nvPr/>
+        </p:nvGraphicFramePr>
+        <p:xfrm>
+          <a:off x="877824" y="1591056"/>
+          <a:ext cx="4361688" cy="2066544"/>
+        </p:xfrm>
+        <a:graphic xmlns:a="http://schemas.openxmlformats.org/drawingml/2006/main">
+          <a:graphicData uri="http://schemas.openxmlformats.org/drawingml/2006/chart">
+            <c:chart xmlns:c="http://schemas.openxmlformats.org/drawingml/2006/chart" r:id="rId7"/>
+          </a:graphicData>
+        </a:graphic>
+      </p:graphicFrame>
+      <p:graphicFrame>
+        <p:nvGraphicFramePr>
+          <p:cNvPr id="24" name="Table 0"/>
+          <p:cNvGraphicFramePr>
+            <a:graphicFrameLocks noGrp="1"/>
+          </p:cNvGraphicFramePr>
+          <p:nvPr>
+            <p:extLst>
+              <p:ext uri="{D42A27DB-BD31-4B8C-83A1-F6EECF244321}">
+                <p14:modId xmlns:p14="http://schemas.microsoft.com/office/powerpoint/2010/main" val="1579011935"/>
+              </p:ext>
+            </p:extLst>
+          </p:nvPr>
+        </p:nvGraphicFramePr>
+        <p:xfrm>
+          <a:off x="5577840" y="1481328"/>
+          <a:ext cx="5532120" cy="2212848"/>
+        </p:xfrm>
+        <a:graphic>
+          <a:graphicData uri="http://schemas.openxmlformats.org/drawingml/2006/table">
+            <a:tbl>
+              <a:tblPr/>
+              <a:tblGrid>
+                <a:gridCol w="2766060"/>
+                <a:gridCol w="2766060"/>
+              </a:tblGrid>
+              <a:tr h="737616">
+                <a:tc>
+                  <a:txBody>
+                    <a:bodyPr/>
+                    <a:lstStyle/>
+                    <a:p>
+                      <a:pPr algn="ctr" indent="0" marL="0">
+                        <a:buNone/>
+                      </a:pPr>
+                      <a:r>
+                        <a:rPr lang="en-US" sz="1800" b="1" dirty="0">
+                          <a:solidFill>
+                            <a:srgbClr val="FFFFFF"/>
+                          </a:solidFill>
+                          <a:latin typeface="Pretendard" pitchFamily="34" charset="0"/>
+                          <a:ea typeface="Pretendard" pitchFamily="34" charset="-122"/>
+                          <a:cs typeface="Pretendard" pitchFamily="34" charset="-120"/>
+                        </a:rPr>
+                        <a:t>Object</a:t>
+                      </a:r>
+                      <a:endParaRPr lang="en-US" sz="1800" dirty="0">
+                        <a:latin typeface="Pretendard" charset="0"/>
+                        <a:ea typeface="Pretendard" charset="0"/>
+                        <a:cs typeface="Pretendard" charset="0"/>
+                      </a:endParaRPr>
+                    </a:p>
+                  </a:txBody>
+                  <a:tcPr marL="54864" marR="54864" marT="36576" marB="36576" anchor="ctr">
+                    <a:lnL w="12700" cap="flat" cmpd="sng" algn="ctr">
+                      <a:solidFill>
+                        <a:srgbClr val="E2E8F0"/>
+                      </a:solidFill>
+                      <a:prstDash val="solid"/>
+                      <a:round/>
+                      <a:headEnd type="none" w="med" len="med"/>
+                      <a:tailEnd type="none" w="med" len="med"/>
+                    </a:lnL>
+                    <a:lnR w="12700" cap="flat" cmpd="sng" algn="ctr">
+                      <a:solidFill>
+                        <a:srgbClr val="E2E8F0"/>
+                      </a:solidFill>
+                      <a:prstDash val="solid"/>
+                      <a:round/>
+                      <a:headEnd type="none" w="med" len="med"/>
+                      <a:tailEnd type="none" w="med" len="med"/>
+                    </a:lnR>
+                    <a:lnT w="12700" cap="flat" cmpd="sng" algn="ctr">
+                      <a:solidFill>
+                        <a:srgbClr val="E2E8F0"/>
+                      </a:solidFill>
+                      <a:prstDash val="solid"/>
+                      <a:round/>
+                      <a:headEnd type="none" w="med" len="med"/>
+                      <a:tailEnd type="none" w="med" len="med"/>
+                    </a:lnT>
+                    <a:lnB w="12700" cap="flat" cmpd="sng" algn="ctr">
+                      <a:solidFill>
+                        <a:srgbClr val="E2E8F0"/>
+                      </a:solidFill>
+                      <a:prstDash val="solid"/>
+                      <a:round/>
+                      <a:headEnd type="none" w="med" len="med"/>
+                      <a:tailEnd type="none" w="med" len="med"/>
+                    </a:lnB>
+                    <a:solidFill>
+                      <a:srgbClr val="2563EB"/>
+                    </a:solidFill>
+                  </a:tcPr>
+                </a:tc>
+                <a:tc>
+                  <a:txBody>
+                    <a:bodyPr/>
+                    <a:lstStyle/>
+                    <a:p>
+                      <a:pPr algn="ctr" indent="0" marL="0">
+                        <a:buNone/>
+                      </a:pPr>
+                      <a:r>
+                        <a:rPr lang="en-US" sz="1800" b="1" dirty="0">
+                          <a:solidFill>
+                            <a:srgbClr val="FFFFFF"/>
+                          </a:solidFill>
+                          <a:latin typeface="Pretendard" pitchFamily="34" charset="0"/>
+                          <a:ea typeface="Pretendard" pitchFamily="34" charset="-122"/>
+                          <a:cs typeface="Pretendard" pitchFamily="34" charset="-120"/>
+                        </a:rPr>
+                        <a:t>Signal</a:t>
+                      </a:r>
+                      <a:endParaRPr lang="en-US" sz="1800" dirty="0">
+                        <a:latin typeface="Pretendard" charset="0"/>
+                        <a:ea typeface="Pretendard" charset="0"/>
+                        <a:cs typeface="Pretendard" charset="0"/>
+                      </a:endParaRPr>
+                    </a:p>
+                  </a:txBody>
+                  <a:tcPr marL="54864" marR="54864" marT="36576" marB="36576" anchor="ctr">
+                    <a:lnL w="12700" cap="flat" cmpd="sng" algn="ctr">
+                      <a:solidFill>
+                        <a:srgbClr val="E2E8F0"/>
+                      </a:solidFill>
+                      <a:prstDash val="solid"/>
+                      <a:round/>
+                      <a:headEnd type="none" w="med" len="med"/>
+                      <a:tailEnd type="none" w="med" len="med"/>
+                    </a:lnL>
+                    <a:lnR w="12700" cap="flat" cmpd="sng" algn="ctr">
+                      <a:solidFill>
+                        <a:srgbClr val="E2E8F0"/>
+                      </a:solidFill>
+                      <a:prstDash val="solid"/>
+                      <a:round/>
+                      <a:headEnd type="none" w="med" len="med"/>
+                      <a:tailEnd type="none" w="med" len="med"/>
+                    </a:lnR>
+                    <a:lnT w="12700" cap="flat" cmpd="sng" algn="ctr">
+                      <a:solidFill>
+                        <a:srgbClr val="E2E8F0"/>
+                      </a:solidFill>
+                      <a:prstDash val="solid"/>
+                      <a:round/>
+                      <a:headEnd type="none" w="med" len="med"/>
+                      <a:tailEnd type="none" w="med" len="med"/>
+                    </a:lnT>
+                    <a:lnB w="12700" cap="flat" cmpd="sng" algn="ctr">
+                      <a:solidFill>
+                        <a:srgbClr val="E2E8F0"/>
+                      </a:solidFill>
+                      <a:prstDash val="solid"/>
+                      <a:round/>
+                      <a:headEnd type="none" w="med" len="med"/>
+                      <a:tailEnd type="none" w="med" len="med"/>
+                    </a:lnB>
+                    <a:solidFill>
+                      <a:srgbClr val="2563EB"/>
+                    </a:solidFill>
+                  </a:tcPr>
+                </a:tc>
+              </a:tr>
+              <a:tr h="737616">
+                <a:tc>
+                  <a:txBody>
+                    <a:bodyPr/>
+                    <a:lstStyle/>
+                    <a:p>
+                      <a:pPr algn="l" indent="0" marL="0">
+                        <a:buNone/>
+                      </a:pPr>
+                      <a:r>
+                        <a:rPr lang="en-US" sz="1800" b="1" dirty="0">
+                          <a:solidFill>
+                            <a:srgbClr val="111827"/>
+                          </a:solidFill>
+                          <a:latin typeface="Pretendard" pitchFamily="34" charset="0"/>
+                          <a:ea typeface="Pretendard" pitchFamily="34" charset="-122"/>
+                          <a:cs typeface="Pretendard" pitchFamily="34" charset="-120"/>
+                        </a:rPr>
+                        <a:t>Chart</a:t>
+                      </a:r>
+                      <a:endParaRPr lang="en-US" sz="1800" dirty="0">
+                        <a:latin typeface="Pretendard" charset="0"/>
+                        <a:ea typeface="Pretendard" charset="0"/>
+                        <a:cs typeface="Pretendard" charset="0"/>
+                      </a:endParaRPr>
+                    </a:p>
+                  </a:txBody>
+                  <a:tcPr marL="54864" marR="54864" marT="36576" marB="36576" anchor="ctr">
+                    <a:lnL w="12700" cap="flat" cmpd="sng" algn="ctr">
+                      <a:solidFill>
+                        <a:srgbClr val="E2E8F0"/>
+                      </a:solidFill>
+                      <a:prstDash val="solid"/>
+                      <a:round/>
+                      <a:headEnd type="none" w="med" len="med"/>
+                      <a:tailEnd type="none" w="med" len="med"/>
+                    </a:lnL>
+                    <a:lnR w="12700" cap="flat" cmpd="sng" algn="ctr">
+                      <a:solidFill>
+                        <a:srgbClr val="E2E8F0"/>
+                      </a:solidFill>
+                      <a:prstDash val="solid"/>
+                      <a:round/>
+                      <a:headEnd type="none" w="med" len="med"/>
+                      <a:tailEnd type="none" w="med" len="med"/>
+                    </a:lnR>
+                    <a:lnT w="12700" cap="flat" cmpd="sng" algn="ctr">
+                      <a:solidFill>
+                        <a:srgbClr val="E2E8F0"/>
+                      </a:solidFill>
+                      <a:prstDash val="solid"/>
+                      <a:round/>
+                      <a:headEnd type="none" w="med" len="med"/>
+                      <a:tailEnd type="none" w="med" len="med"/>
+                    </a:lnT>
+                    <a:lnB w="12700" cap="flat" cmpd="sng" algn="ctr">
+                      <a:solidFill>
+                        <a:srgbClr val="E2E8F0"/>
+                      </a:solidFill>
+                      <a:prstDash val="solid"/>
+                      <a:round/>
+                      <a:headEnd type="none" w="med" len="med"/>
+                      <a:tailEnd type="none" w="med" len="med"/>
+                    </a:lnB>
+                  </a:tcPr>
+                </a:tc>
+                <a:tc>
+                  <a:txBody>
+                    <a:bodyPr/>
+                    <a:lstStyle/>
+                    <a:p>
+                      <a:pPr algn="l" indent="0" marL="0">
+                        <a:buNone/>
+                      </a:pPr>
+                      <a:r>
+                        <a:rPr lang="en-US" sz="1800" dirty="0">
+                          <a:solidFill>
+                            <a:srgbClr val="111827"/>
+                          </a:solidFill>
+                          <a:latin typeface="Pretendard" pitchFamily="34" charset="0"/>
+                          <a:ea typeface="Pretendard" pitchFamily="34" charset="-122"/>
+                          <a:cs typeface="Pretendard" pitchFamily="34" charset="-120"/>
+                        </a:rPr>
+                        <a:t>trend</a:t>
+                      </a:r>
+                      <a:endParaRPr lang="en-US" sz="1800" dirty="0">
+                        <a:latin typeface="Pretendard" charset="0"/>
+                        <a:ea typeface="Pretendard" charset="0"/>
+                        <a:cs typeface="Pretendard" charset="0"/>
+                      </a:endParaRPr>
+                    </a:p>
+                  </a:txBody>
+                  <a:tcPr marL="54864" marR="54864" marT="36576" marB="36576" anchor="ctr">
+                    <a:lnL w="12700" cap="flat" cmpd="sng" algn="ctr">
+                      <a:solidFill>
+                        <a:srgbClr val="E2E8F0"/>
+                      </a:solidFill>
+                      <a:prstDash val="solid"/>
+                      <a:round/>
+                      <a:headEnd type="none" w="med" len="med"/>
+                      <a:tailEnd type="none" w="med" len="med"/>
+                    </a:lnL>
+                    <a:lnR w="12700" cap="flat" cmpd="sng" algn="ctr">
+                      <a:solidFill>
+                        <a:srgbClr val="E2E8F0"/>
+                      </a:solidFill>
+                      <a:prstDash val="solid"/>
+                      <a:round/>
+                      <a:headEnd type="none" w="med" len="med"/>
+                      <a:tailEnd type="none" w="med" len="med"/>
+                    </a:lnR>
+                    <a:lnT w="12700" cap="flat" cmpd="sng" algn="ctr">
+                      <a:solidFill>
+                        <a:srgbClr val="E2E8F0"/>
+                      </a:solidFill>
+                      <a:prstDash val="solid"/>
+                      <a:round/>
+                      <a:headEnd type="none" w="med" len="med"/>
+                      <a:tailEnd type="none" w="med" len="med"/>
+                    </a:lnT>
+                    <a:lnB w="12700" cap="flat" cmpd="sng" algn="ctr">
+                      <a:solidFill>
+                        <a:srgbClr val="E2E8F0"/>
+                      </a:solidFill>
+                      <a:prstDash val="solid"/>
+                      <a:round/>
+                      <a:headEnd type="none" w="med" len="med"/>
+                      <a:tailEnd type="none" w="med" len="med"/>
+                    </a:lnB>
+                  </a:tcPr>
+                </a:tc>
+              </a:tr>
+              <a:tr h="737616">
+                <a:tc>
+                  <a:txBody>
+                    <a:bodyPr/>
+                    <a:lstStyle/>
+                    <a:p>
+                      <a:pPr algn="l" indent="0" marL="0">
+                        <a:buNone/>
+                      </a:pPr>
+                      <a:r>
+                        <a:rPr lang="en-US" sz="1800" b="1" dirty="0">
+                          <a:solidFill>
+                            <a:srgbClr val="111827"/>
+                          </a:solidFill>
+                          <a:latin typeface="Pretendard" pitchFamily="34" charset="0"/>
+                          <a:ea typeface="Pretendard" pitchFamily="34" charset="-122"/>
+                          <a:cs typeface="Pretendard" pitchFamily="34" charset="-120"/>
+                        </a:rPr>
+                        <a:t>Image</a:t>
+                      </a:r>
+                      <a:endParaRPr lang="en-US" sz="1800" dirty="0">
+                        <a:latin typeface="Pretendard" charset="0"/>
+                        <a:ea typeface="Pretendard" charset="0"/>
+                        <a:cs typeface="Pretendard" charset="0"/>
+                      </a:endParaRPr>
+                    </a:p>
+                  </a:txBody>
+                  <a:tcPr marL="54864" marR="54864" marT="36576" marB="36576" anchor="ctr">
+                    <a:lnL w="12700" cap="flat" cmpd="sng" algn="ctr">
+                      <a:solidFill>
+                        <a:srgbClr val="E2E8F0"/>
+                      </a:solidFill>
+                      <a:prstDash val="solid"/>
+                      <a:round/>
+                      <a:headEnd type="none" w="med" len="med"/>
+                      <a:tailEnd type="none" w="med" len="med"/>
+                    </a:lnL>
+                    <a:lnR w="12700" cap="flat" cmpd="sng" algn="ctr">
+                      <a:solidFill>
+                        <a:srgbClr val="E2E8F0"/>
+                      </a:solidFill>
+                      <a:prstDash val="solid"/>
+                      <a:round/>
+                      <a:headEnd type="none" w="med" len="med"/>
+                      <a:tailEnd type="none" w="med" len="med"/>
+                    </a:lnR>
+                    <a:lnT w="12700" cap="flat" cmpd="sng" algn="ctr">
+                      <a:solidFill>
+                        <a:srgbClr val="E2E8F0"/>
+                      </a:solidFill>
+                      <a:prstDash val="solid"/>
+                      <a:round/>
+                      <a:headEnd type="none" w="med" len="med"/>
+                      <a:tailEnd type="none" w="med" len="med"/>
+                    </a:lnT>
+                    <a:lnB w="12700" cap="flat" cmpd="sng" algn="ctr">
+                      <a:solidFill>
+                        <a:srgbClr val="E2E8F0"/>
+                      </a:solidFill>
+                      <a:prstDash val="solid"/>
+                      <a:round/>
+                      <a:headEnd type="none" w="med" len="med"/>
+                      <a:tailEnd type="none" w="med" len="med"/>
+                    </a:lnB>
+                    <a:solidFill>
+                      <a:srgbClr val="FFFFFF">
+                        <a:alpha val="80000"/>
+                      </a:srgbClr>
+                    </a:solidFill>
+                  </a:tcPr>
+                </a:tc>
+                <a:tc>
+                  <a:txBody>
+                    <a:bodyPr/>
+                    <a:lstStyle/>
+                    <a:p>
+                      <a:pPr algn="l" indent="0" marL="0">
+                        <a:buNone/>
+                      </a:pPr>
+                      <a:r>
+                        <a:rPr lang="en-US" sz="1800" dirty="0">
+                          <a:solidFill>
+                            <a:srgbClr val="111827"/>
+                          </a:solidFill>
+                          <a:latin typeface="Pretendard" pitchFamily="34" charset="0"/>
+                          <a:ea typeface="Pretendard" pitchFamily="34" charset="-122"/>
+                          <a:cs typeface="Pretendard" pitchFamily="34" charset="-120"/>
+                        </a:rPr>
+                        <a:t>bounded</a:t>
+                      </a:r>
+                      <a:endParaRPr lang="en-US" sz="1800" dirty="0">
+                        <a:latin typeface="Pretendard" charset="0"/>
+                        <a:ea typeface="Pretendard" charset="0"/>
+                        <a:cs typeface="Pretendard" charset="0"/>
+                      </a:endParaRPr>
+                    </a:p>
+                  </a:txBody>
+                  <a:tcPr marL="54864" marR="54864" marT="36576" marB="36576" anchor="ctr">
+                    <a:lnL w="12700" cap="flat" cmpd="sng" algn="ctr">
+                      <a:solidFill>
+                        <a:srgbClr val="E2E8F0"/>
+                      </a:solidFill>
+                      <a:prstDash val="solid"/>
+                      <a:round/>
+                      <a:headEnd type="none" w="med" len="med"/>
+                      <a:tailEnd type="none" w="med" len="med"/>
+                    </a:lnL>
+                    <a:lnR w="12700" cap="flat" cmpd="sng" algn="ctr">
+                      <a:solidFill>
+                        <a:srgbClr val="E2E8F0"/>
+                      </a:solidFill>
+                      <a:prstDash val="solid"/>
+                      <a:round/>
+                      <a:headEnd type="none" w="med" len="med"/>
+                      <a:tailEnd type="none" w="med" len="med"/>
+                    </a:lnR>
+                    <a:lnT w="12700" cap="flat" cmpd="sng" algn="ctr">
+                      <a:solidFill>
+                        <a:srgbClr val="E2E8F0"/>
+                      </a:solidFill>
+                      <a:prstDash val="solid"/>
+                      <a:round/>
+                      <a:headEnd type="none" w="med" len="med"/>
+                      <a:tailEnd type="none" w="med" len="med"/>
+                    </a:lnT>
+                    <a:lnB w="12700" cap="flat" cmpd="sng" algn="ctr">
+                      <a:solidFill>
+                        <a:srgbClr val="E2E8F0"/>
+                      </a:solidFill>
+                      <a:prstDash val="solid"/>
+                      <a:round/>
+                      <a:headEnd type="none" w="med" len="med"/>
+                      <a:tailEnd type="none" w="med" len="med"/>
+                    </a:lnB>
+                    <a:solidFill>
+                      <a:srgbClr val="FFFFFF">
+                        <a:alpha val="80000"/>
+                      </a:srgbClr>
+                    </a:solidFill>
+                  </a:tcPr>
+                </a:tc>
+              </a:tr>
+            </a:tbl>
+          </a:graphicData>
+        </a:graphic>
+      </p:graphicFrame>
+      <p:sp>
+        <p:nvSpPr>
+          <p:cNvPr id="13" name="Text 6"/>
+          <p:cNvSpPr txBox="1"/>
+          <p:nvPr/>
+        </p:nvSpPr>
+        <p:spPr>
+          <a:xfrm>
+            <a:off x="914400" y="4151376"/>
+            <a:ext cx="4425696" cy="1499616"/>
+          </a:xfrm>
+          <a:prstGeom prst="rect">
+            <a:avLst/>
+          </a:prstGeom>
+          <a:noFill/>
+          <a:ln/>
+        </p:spPr>
+        <p:txBody>
+          <a:bodyPr wrap="square" lIns="0" tIns="25400" rIns="25400" bIns="0" rtlCol="0" anchor="t"/>
+          <a:lstStyle/>
+          <a:p>
+            <a:pPr algn="l" indent="0" marL="0">
+              <a:lnSpc>
+                <a:spcPct val="120000"/>
+              </a:lnSpc>
+              <a:buNone/>
+            </a:pPr>
+            <a:r>
+              <a:rPr lang="en-US" sz="1800" b="1" dirty="0">
+                <a:solidFill>
+                  <a:srgbClr val="2563EB"/>
+                </a:solidFill>
+                <a:latin typeface="Pretendard" pitchFamily="34" charset="0"/>
+                <a:ea typeface="Pretendard" pitchFamily="34" charset="-122"/>
+                <a:cs typeface="Pretendard" pitchFamily="34" charset="-120"/>
+              </a:rPr>
+              <a:t>- Reading order</a:t>
+            </a:r>
+            <a:pPr algn="l" indent="0" marL="0">
+              <a:lnSpc>
+                <a:spcPct val="120000"/>
+              </a:lnSpc>
+              <a:buNone/>
+            </a:pPr>
+            <a:r>
+              <a:rPr lang="en-US" sz="1800" dirty="0">
+                <a:solidFill>
+                  <a:srgbClr val="111827"/>
+                </a:solidFill>
+                <a:latin typeface="Pretendard" pitchFamily="34" charset="0"/>
+                <a:ea typeface="Pretendard" pitchFamily="34" charset="-122"/>
+                <a:cs typeface="Pretendard" pitchFamily="34" charset="-120"/>
+              </a:rPr>
+              <a:t>  chart and table remain the primary evidence.</a:t>
+            </a:r>
+            <a:endParaRPr lang="en-US" sz="1800" dirty="0"/>
+          </a:p>
+          <a:p>
+            <a:pPr algn="l" indent="0" marL="0">
+              <a:lnSpc>
+                <a:spcPct val="120000"/>
+              </a:lnSpc>
+              <a:buNone/>
+            </a:pPr>
+            <a:r>
+              <a:rPr lang="en-US" sz="1800" b="1" dirty="0">
+                <a:solidFill>
+                  <a:srgbClr val="2563EB"/>
+                </a:solidFill>
+                <a:latin typeface="Pretendard" pitchFamily="34" charset="0"/>
+                <a:ea typeface="Pretendard" pitchFamily="34" charset="-122"/>
+                <a:cs typeface="Pretendard" pitchFamily="34" charset="-120"/>
+              </a:rPr>
+              <a:t>- Image role</a:t>
+            </a:r>
+            <a:endParaRPr lang="en-US" sz="1800" dirty="0"/>
+          </a:p>
+          <a:p>
+            <a:pPr algn="l" indent="0" marL="0">
+              <a:lnSpc>
+                <a:spcPct val="120000"/>
+              </a:lnSpc>
+              <a:buNone/>
+            </a:pPr>
+            <a:r>
+              <a:rPr lang="en-US" sz="1800" dirty="0">
+                <a:solidFill>
+                  <a:srgbClr val="111827"/>
+                </a:solidFill>
+                <a:latin typeface="Pretendard" pitchFamily="34" charset="0"/>
+                <a:ea typeface="Pretendard" pitchFamily="34" charset="-122"/>
+                <a:cs typeface="Pretendard" pitchFamily="34" charset="-120"/>
+              </a:rPr>
+              <a:t>  visual evidence stays bounded in a separate safe frame.</a:t>
+            </a:r>
+            <a:endParaRPr lang="en-US" sz="1800" dirty="0"/>
+          </a:p>
+        </p:txBody>
+      </p:sp>
+      <p:pic>
+        <p:nvPicPr>
+          <p:cNvPr id="14" name="Image 3" descr="Safe frame diagram">    </p:cNvPr>
+          <p:cNvPicPr>
+            <a:picLocks noChangeAspect="1"/>
+          </p:cNvPicPr>
+          <p:nvPr/>
+        </p:nvPicPr>
+        <p:blipFill>
+          <a:blip r:embed="rId8">
+            <a:extLst>
+              <a:ext uri="{96DAC541-7B7A-43D3-8B79-37D633B846F1}">
+                <asvg:svgBlip xmlns:asvg="http://schemas.microsoft.com/office/drawing/2016/SVG/main" r:embed="rId9"/>
+              </a:ext>
+            </a:extLst>
+          </a:blip>
+          <a:stretch>
+            <a:fillRect/>
+          </a:stretch>
+        </p:blipFill>
+        <p:spPr>
+          <a:xfrm>
+            <a:off x="5648249" y="3984041"/>
+            <a:ext cx="5391302" cy="1870862"/>
+          </a:xfrm>
+          <a:prstGeom prst="rect">
+            <a:avLst/>
+          </a:prstGeom>
+        </p:spPr>
+      </p:pic>
+    </p:spTree>
+  </p:cSld>
+  <p:clrMapOvr>
+    <a:masterClrMapping/>
+  </p:clrMapOvr>
+</p:sld>
+</file>
+
+<file path=ppt/slides/slide24.xml><?xml version="1.0" encoding="utf-8"?>
+<p:sld xmlns:a="http://schemas.openxmlformats.org/drawingml/2006/main" xmlns:r="http://schemas.openxmlformats.org/officeDocument/2006/relationships" xmlns:p="http://schemas.openxmlformats.org/presentationml/2006/main">
+  <p:cSld name="Slide 24">
     <p:bg>
       <p:bgPr>
         <a:solidFill>
@@ -10091,8 +15059,8 @@
         </p:nvSpPr>
         <p:spPr>
           <a:xfrm>
-            <a:off x="1699321" y="1957548"/>
-            <a:ext cx="9255191" cy="839785"/>
+            <a:off x="1699321" y="1987296"/>
+            <a:ext cx="9255191" cy="780288"/>
           </a:xfrm>
           <a:prstGeom prst="rect">
             <a:avLst/>
@@ -10207,8 +15175,8 @@
         </p:nvSpPr>
         <p:spPr>
           <a:xfrm>
-            <a:off x="1699321" y="3283428"/>
-            <a:ext cx="9255191" cy="839785"/>
+            <a:off x="1699321" y="3313176"/>
+            <a:ext cx="9255191" cy="780288"/>
           </a:xfrm>
           <a:prstGeom prst="rect">
             <a:avLst/>
@@ -10323,8 +15291,8 @@
         </p:nvSpPr>
         <p:spPr>
           <a:xfrm>
-            <a:off x="1699321" y="4600164"/>
-            <a:ext cx="9255191" cy="839785"/>
+            <a:off x="1699321" y="4629912"/>
+            <a:ext cx="9255191" cy="780288"/>
           </a:xfrm>
           <a:prstGeom prst="rect">
             <a:avLst/>
@@ -10382,1018 +15350,6 @@
 </p:sld>
 </file>
 
-<file path=ppt/slides/slide2.xml><?xml version="1.0" encoding="utf-8"?>
-<p:sld xmlns:a="http://schemas.openxmlformats.org/drawingml/2006/main" xmlns:r="http://schemas.openxmlformats.org/officeDocument/2006/relationships" xmlns:p="http://schemas.openxmlformats.org/presentationml/2006/main">
-  <p:cSld name="Slide 2">
-    <p:bg>
-      <p:bgPr>
-        <a:solidFill>
-          <a:srgbClr val="F8FAFC"/>
-        </a:solidFill>
-      </p:bgPr>
-    </p:bg>
-    <p:spTree>
-      <p:nvGrpSpPr>
-        <p:cNvPr id="1" name=""/>
-        <p:cNvGrpSpPr/>
-        <p:nvPr/>
-      </p:nvGrpSpPr>
-      <p:grpSpPr>
-        <a:xfrm>
-          <a:off x="0" y="0"/>
-          <a:ext cx="0" cy="0"/>
-          <a:chOff x="0" y="0"/>
-          <a:chExt cx="0" cy="0"/>
-        </a:xfrm>
-      </p:grpSpPr>
-      <p:sp>
-        <p:nvSpPr>
-          <p:cNvPr id="2" name="Shape 0"/>
-          <p:cNvSpPr/>
-          <p:nvPr/>
-        </p:nvSpPr>
-        <p:spPr>
-          <a:xfrm>
-            <a:off x="731520" y="1207008"/>
-            <a:ext cx="1325880" cy="54864"/>
-          </a:xfrm>
-          <a:prstGeom prst="rect">
-            <a:avLst/>
-          </a:prstGeom>
-          <a:solidFill>
-            <a:srgbClr val="2563EB"/>
-          </a:solidFill>
-          <a:ln w="12700">
-            <a:solidFill>
-              <a:srgbClr val="2563EB">
-                <a:alpha val="0"/>
-              </a:srgbClr>
-            </a:solidFill>
-            <a:prstDash val="solid"/>
-          </a:ln>
-        </p:spPr>
-      </p:sp>
-      <p:sp>
-        <p:nvSpPr>
-          <p:cNvPr id="3" name="Shape 1"/>
-          <p:cNvSpPr/>
-          <p:nvPr/>
-        </p:nvSpPr>
-        <p:spPr>
-          <a:xfrm>
-            <a:off x="822960" y="1188720"/>
-            <a:ext cx="10515600" cy="45720"/>
-          </a:xfrm>
-          <a:prstGeom prst="rect">
-            <a:avLst/>
-          </a:prstGeom>
-          <a:solidFill>
-            <a:srgbClr val="2563EB"/>
-          </a:solidFill>
-          <a:ln w="12700">
-            <a:solidFill>
-              <a:srgbClr val="2563EB">
-                <a:alpha val="0"/>
-              </a:srgbClr>
-            </a:solidFill>
-            <a:prstDash val="solid"/>
-          </a:ln>
-        </p:spPr>
-      </p:sp>
-      <p:sp>
-        <p:nvSpPr>
-          <p:cNvPr id="4" name="Shape 2"/>
-          <p:cNvSpPr/>
-          <p:nvPr/>
-        </p:nvSpPr>
-        <p:spPr>
-          <a:xfrm>
-            <a:off x="822960" y="6199632"/>
-            <a:ext cx="2011680" cy="45720"/>
-          </a:xfrm>
-          <a:prstGeom prst="rect">
-            <a:avLst/>
-          </a:prstGeom>
-          <a:solidFill>
-            <a:srgbClr val="DBEAFE"/>
-          </a:solidFill>
-          <a:ln w="12700">
-            <a:solidFill>
-              <a:srgbClr val="DBEAFE">
-                <a:alpha val="0"/>
-              </a:srgbClr>
-            </a:solidFill>
-            <a:prstDash val="solid"/>
-          </a:ln>
-        </p:spPr>
-      </p:sp>
-      <p:sp>
-        <p:nvSpPr>
-          <p:cNvPr id="5" name="Shape 3"/>
-          <p:cNvSpPr/>
-          <p:nvPr/>
-        </p:nvSpPr>
-        <p:spPr>
-          <a:xfrm>
-            <a:off x="6080760" y="1389888"/>
-            <a:ext cx="22860" cy="4663440"/>
-          </a:xfrm>
-          <a:prstGeom prst="rect">
-            <a:avLst/>
-          </a:prstGeom>
-          <a:solidFill>
-            <a:srgbClr val="E2E8F0">
-              <a:alpha val="90000"/>
-            </a:srgbClr>
-          </a:solidFill>
-          <a:ln w="12700">
-            <a:solidFill>
-              <a:srgbClr val="E2E8F0">
-                <a:alpha val="0"/>
-              </a:srgbClr>
-            </a:solidFill>
-            <a:prstDash val="solid"/>
-          </a:ln>
-        </p:spPr>
-      </p:sp>
-      <p:sp>
-        <p:nvSpPr>
-          <p:cNvPr id="6" name="Shape 4"/>
-          <p:cNvSpPr/>
-          <p:nvPr/>
-        </p:nvSpPr>
-        <p:spPr>
-          <a:xfrm>
-            <a:off x="822960" y="1389888"/>
-            <a:ext cx="73152" cy="658368"/>
-          </a:xfrm>
-          <a:prstGeom prst="rect">
-            <a:avLst/>
-          </a:prstGeom>
-          <a:solidFill>
-            <a:srgbClr val="2563EB"/>
-          </a:solidFill>
-          <a:ln w="12700">
-            <a:solidFill>
-              <a:srgbClr val="2563EB">
-                <a:alpha val="0"/>
-              </a:srgbClr>
-            </a:solidFill>
-            <a:prstDash val="solid"/>
-          </a:ln>
-        </p:spPr>
-      </p:sp>
-      <p:sp>
-        <p:nvSpPr>
-          <p:cNvPr id="7" name="Shape 5"/>
-          <p:cNvSpPr/>
-          <p:nvPr/>
-        </p:nvSpPr>
-        <p:spPr>
-          <a:xfrm>
-            <a:off x="822960" y="2194560"/>
-            <a:ext cx="73152" cy="658368"/>
-          </a:xfrm>
-          <a:prstGeom prst="rect">
-            <a:avLst/>
-          </a:prstGeom>
-          <a:solidFill>
-            <a:srgbClr val="DBEAFE"/>
-          </a:solidFill>
-          <a:ln w="12700">
-            <a:solidFill>
-              <a:srgbClr val="DBEAFE">
-                <a:alpha val="0"/>
-              </a:srgbClr>
-            </a:solidFill>
-            <a:prstDash val="solid"/>
-          </a:ln>
-        </p:spPr>
-      </p:sp>
-      <p:sp>
-        <p:nvSpPr>
-          <p:cNvPr id="8" name="Shape 6"/>
-          <p:cNvSpPr/>
-          <p:nvPr/>
-        </p:nvSpPr>
-        <p:spPr>
-          <a:xfrm>
-            <a:off x="822960" y="2990088"/>
-            <a:ext cx="73152" cy="658368"/>
-          </a:xfrm>
-          <a:prstGeom prst="rect">
-            <a:avLst/>
-          </a:prstGeom>
-          <a:solidFill>
-            <a:srgbClr val="2563EB"/>
-          </a:solidFill>
-          <a:ln w="12700">
-            <a:solidFill>
-              <a:srgbClr val="2563EB">
-                <a:alpha val="0"/>
-              </a:srgbClr>
-            </a:solidFill>
-            <a:prstDash val="solid"/>
-          </a:ln>
-        </p:spPr>
-      </p:sp>
-      <p:sp>
-        <p:nvSpPr>
-          <p:cNvPr id="9" name="Shape 7"/>
-          <p:cNvSpPr/>
-          <p:nvPr/>
-        </p:nvSpPr>
-        <p:spPr>
-          <a:xfrm>
-            <a:off x="822960" y="3794760"/>
-            <a:ext cx="73152" cy="658368"/>
-          </a:xfrm>
-          <a:prstGeom prst="rect">
-            <a:avLst/>
-          </a:prstGeom>
-          <a:solidFill>
-            <a:srgbClr val="DBEAFE"/>
-          </a:solidFill>
-          <a:ln w="12700">
-            <a:solidFill>
-              <a:srgbClr val="DBEAFE">
-                <a:alpha val="0"/>
-              </a:srgbClr>
-            </a:solidFill>
-            <a:prstDash val="solid"/>
-          </a:ln>
-        </p:spPr>
-      </p:sp>
-      <p:sp>
-        <p:nvSpPr>
-          <p:cNvPr id="10" name="Shape 8"/>
-          <p:cNvSpPr/>
-          <p:nvPr/>
-        </p:nvSpPr>
-        <p:spPr>
-          <a:xfrm>
-            <a:off x="822960" y="4599432"/>
-            <a:ext cx="73152" cy="658368"/>
-          </a:xfrm>
-          <a:prstGeom prst="rect">
-            <a:avLst/>
-          </a:prstGeom>
-          <a:solidFill>
-            <a:srgbClr val="2563EB"/>
-          </a:solidFill>
-          <a:ln w="12700">
-            <a:solidFill>
-              <a:srgbClr val="2563EB">
-                <a:alpha val="0"/>
-              </a:srgbClr>
-            </a:solidFill>
-            <a:prstDash val="solid"/>
-          </a:ln>
-        </p:spPr>
-      </p:sp>
-      <p:sp>
-        <p:nvSpPr>
-          <p:cNvPr id="11" name="Shape 9"/>
-          <p:cNvSpPr/>
-          <p:nvPr/>
-        </p:nvSpPr>
-        <p:spPr>
-          <a:xfrm>
-            <a:off x="822960" y="5394960"/>
-            <a:ext cx="73152" cy="658368"/>
-          </a:xfrm>
-          <a:prstGeom prst="rect">
-            <a:avLst/>
-          </a:prstGeom>
-          <a:solidFill>
-            <a:srgbClr val="DBEAFE"/>
-          </a:solidFill>
-          <a:ln w="12700">
-            <a:solidFill>
-              <a:srgbClr val="DBEAFE">
-                <a:alpha val="0"/>
-              </a:srgbClr>
-            </a:solidFill>
-            <a:prstDash val="solid"/>
-          </a:ln>
-        </p:spPr>
-      </p:sp>
-      <p:sp>
-        <p:nvSpPr>
-          <p:cNvPr id="12" name="Shape 10"/>
-          <p:cNvSpPr/>
-          <p:nvPr/>
-        </p:nvSpPr>
-        <p:spPr>
-          <a:xfrm>
-            <a:off x="6272784" y="1389888"/>
-            <a:ext cx="73152" cy="658368"/>
-          </a:xfrm>
-          <a:prstGeom prst="rect">
-            <a:avLst/>
-          </a:prstGeom>
-          <a:solidFill>
-            <a:srgbClr val="2563EB"/>
-          </a:solidFill>
-          <a:ln w="12700">
-            <a:solidFill>
-              <a:srgbClr val="2563EB">
-                <a:alpha val="0"/>
-              </a:srgbClr>
-            </a:solidFill>
-            <a:prstDash val="solid"/>
-          </a:ln>
-        </p:spPr>
-      </p:sp>
-      <p:sp>
-        <p:nvSpPr>
-          <p:cNvPr id="13" name="Shape 11"/>
-          <p:cNvSpPr/>
-          <p:nvPr/>
-        </p:nvSpPr>
-        <p:spPr>
-          <a:xfrm>
-            <a:off x="6272784" y="2194560"/>
-            <a:ext cx="73152" cy="658368"/>
-          </a:xfrm>
-          <a:prstGeom prst="rect">
-            <a:avLst/>
-          </a:prstGeom>
-          <a:solidFill>
-            <a:srgbClr val="DBEAFE"/>
-          </a:solidFill>
-          <a:ln w="12700">
-            <a:solidFill>
-              <a:srgbClr val="DBEAFE">
-                <a:alpha val="0"/>
-              </a:srgbClr>
-            </a:solidFill>
-            <a:prstDash val="solid"/>
-          </a:ln>
-        </p:spPr>
-      </p:sp>
-      <p:sp>
-        <p:nvSpPr>
-          <p:cNvPr id="14" name="Shape 12"/>
-          <p:cNvSpPr/>
-          <p:nvPr/>
-        </p:nvSpPr>
-        <p:spPr>
-          <a:xfrm>
-            <a:off x="6272784" y="2990088"/>
-            <a:ext cx="73152" cy="658368"/>
-          </a:xfrm>
-          <a:prstGeom prst="rect">
-            <a:avLst/>
-          </a:prstGeom>
-          <a:solidFill>
-            <a:srgbClr val="2563EB"/>
-          </a:solidFill>
-          <a:ln w="12700">
-            <a:solidFill>
-              <a:srgbClr val="2563EB">
-                <a:alpha val="0"/>
-              </a:srgbClr>
-            </a:solidFill>
-            <a:prstDash val="solid"/>
-          </a:ln>
-        </p:spPr>
-      </p:sp>
-      <p:sp>
-        <p:nvSpPr>
-          <p:cNvPr id="15" name="Shape 13"/>
-          <p:cNvSpPr/>
-          <p:nvPr/>
-        </p:nvSpPr>
-        <p:spPr>
-          <a:xfrm>
-            <a:off x="6272784" y="3794760"/>
-            <a:ext cx="73152" cy="658368"/>
-          </a:xfrm>
-          <a:prstGeom prst="rect">
-            <a:avLst/>
-          </a:prstGeom>
-          <a:solidFill>
-            <a:srgbClr val="DBEAFE"/>
-          </a:solidFill>
-          <a:ln w="12700">
-            <a:solidFill>
-              <a:srgbClr val="DBEAFE">
-                <a:alpha val="0"/>
-              </a:srgbClr>
-            </a:solidFill>
-            <a:prstDash val="solid"/>
-          </a:ln>
-        </p:spPr>
-      </p:sp>
-      <p:sp>
-        <p:nvSpPr>
-          <p:cNvPr id="16" name="Shape 14"/>
-          <p:cNvSpPr/>
-          <p:nvPr/>
-        </p:nvSpPr>
-        <p:spPr>
-          <a:xfrm>
-            <a:off x="6272784" y="4599432"/>
-            <a:ext cx="73152" cy="658368"/>
-          </a:xfrm>
-          <a:prstGeom prst="rect">
-            <a:avLst/>
-          </a:prstGeom>
-          <a:solidFill>
-            <a:srgbClr val="2563EB"/>
-          </a:solidFill>
-          <a:ln w="12700">
-            <a:solidFill>
-              <a:srgbClr val="2563EB">
-                <a:alpha val="0"/>
-              </a:srgbClr>
-            </a:solidFill>
-            <a:prstDash val="solid"/>
-          </a:ln>
-        </p:spPr>
-      </p:sp>
-      <p:sp>
-        <p:nvSpPr>
-          <p:cNvPr id="17" name="Shape 15"/>
-          <p:cNvSpPr/>
-          <p:nvPr/>
-        </p:nvSpPr>
-        <p:spPr>
-          <a:xfrm>
-            <a:off x="6272784" y="5394960"/>
-            <a:ext cx="73152" cy="658368"/>
-          </a:xfrm>
-          <a:prstGeom prst="rect">
-            <a:avLst/>
-          </a:prstGeom>
-          <a:solidFill>
-            <a:srgbClr val="DBEAFE"/>
-          </a:solidFill>
-          <a:ln w="12700">
-            <a:solidFill>
-              <a:srgbClr val="DBEAFE">
-                <a:alpha val="0"/>
-              </a:srgbClr>
-            </a:solidFill>
-            <a:prstDash val="solid"/>
-          </a:ln>
-        </p:spPr>
-      </p:sp>
-      <p:sp>
-        <p:nvSpPr>
-          <p:cNvPr id="18" name="Text 16"/>
-          <p:cNvSpPr txBox="1"/>
-          <p:nvPr/>
-        </p:nvSpPr>
-        <p:spPr>
-          <a:xfrm>
-            <a:off x="731520" y="384048"/>
-            <a:ext cx="10698480" cy="822960"/>
-          </a:xfrm>
-          <a:prstGeom prst="rect">
-            <a:avLst/>
-          </a:prstGeom>
-          <a:noFill/>
-          <a:ln/>
-        </p:spPr>
-        <p:txBody>
-          <a:bodyPr wrap="square" lIns="0" tIns="0" rIns="0" bIns="0" rtlCol="0" anchor="ctr"/>
-          <a:lstStyle/>
-          <a:p>
-            <a:pPr algn="ctr" indent="0" marL="0">
-              <a:lnSpc>
-                <a:spcPct val="120000"/>
-              </a:lnSpc>
-              <a:buNone/>
-            </a:pPr>
-            <a:r>
-              <a:rPr lang="en-US" sz="3800" b="1" dirty="0">
-                <a:solidFill>
-                  <a:srgbClr val="111827"/>
-                </a:solidFill>
-                <a:latin typeface="Pretendard" pitchFamily="34" charset="0"/>
-                <a:ea typeface="Pretendard" pitchFamily="34" charset="-122"/>
-                <a:cs typeface="Pretendard" pitchFamily="34" charset="-120"/>
-              </a:rPr>
-              <a:t>Agenda</a:t>
-            </a:r>
-            <a:endParaRPr lang="en-US" sz="3800" dirty="0"/>
-          </a:p>
-        </p:txBody>
-      </p:sp>
-      <p:sp>
-        <p:nvSpPr>
-          <p:cNvPr id="19" name="Text 17"/>
-          <p:cNvSpPr txBox="1"/>
-          <p:nvPr/>
-        </p:nvSpPr>
-        <p:spPr>
-          <a:xfrm>
-            <a:off x="1042416" y="1481328"/>
-            <a:ext cx="4645152" cy="475488"/>
-          </a:xfrm>
-          <a:prstGeom prst="rect">
-            <a:avLst/>
-          </a:prstGeom>
-          <a:noFill/>
-          <a:ln/>
-        </p:spPr>
-        <p:txBody>
-          <a:bodyPr wrap="square" lIns="0" tIns="25400" rIns="25400" bIns="0" rtlCol="0" anchor="ctr"/>
-          <a:lstStyle/>
-          <a:p>
-            <a:pPr algn="ctr" indent="0" marL="0">
-              <a:lnSpc>
-                <a:spcPct val="120000"/>
-              </a:lnSpc>
-              <a:buNone/>
-            </a:pPr>
-            <a:r>
-              <a:rPr lang="en-US" sz="1800" dirty="0">
-                <a:solidFill>
-                  <a:srgbClr val="111827"/>
-                </a:solidFill>
-                <a:latin typeface="Pretendard" pitchFamily="34" charset="0"/>
-                <a:ea typeface="Pretendard" pitchFamily="34" charset="-122"/>
-                <a:cs typeface="Pretendard" pitchFamily="34" charset="-120"/>
-              </a:rPr>
-              <a:t>01  Preview Purpose</a:t>
-            </a:r>
-            <a:endParaRPr lang="en-US" sz="1800" dirty="0"/>
-          </a:p>
-        </p:txBody>
-      </p:sp>
-      <p:sp>
-        <p:nvSpPr>
-          <p:cNvPr id="20" name="Text 18"/>
-          <p:cNvSpPr txBox="1"/>
-          <p:nvPr/>
-        </p:nvSpPr>
-        <p:spPr>
-          <a:xfrm>
-            <a:off x="1042416" y="2286000"/>
-            <a:ext cx="4645152" cy="475488"/>
-          </a:xfrm>
-          <a:prstGeom prst="rect">
-            <a:avLst/>
-          </a:prstGeom>
-          <a:noFill/>
-          <a:ln/>
-        </p:spPr>
-        <p:txBody>
-          <a:bodyPr wrap="square" lIns="0" tIns="25400" rIns="25400" bIns="0" rtlCol="0" anchor="ctr"/>
-          <a:lstStyle/>
-          <a:p>
-            <a:pPr algn="ctr" indent="0" marL="0">
-              <a:lnSpc>
-                <a:spcPct val="120000"/>
-              </a:lnSpc>
-              <a:buNone/>
-            </a:pPr>
-            <a:r>
-              <a:rPr lang="en-US" sz="1800" dirty="0">
-                <a:solidFill>
-                  <a:srgbClr val="111827"/>
-                </a:solidFill>
-                <a:latin typeface="Pretendard" pitchFamily="34" charset="0"/>
-                <a:ea typeface="Pretendard" pitchFamily="34" charset="-122"/>
-                <a:cs typeface="Pretendard" pitchFamily="34" charset="-120"/>
-              </a:rPr>
-              <a:t>02  Composition Contract</a:t>
-            </a:r>
-            <a:endParaRPr lang="en-US" sz="1800" dirty="0"/>
-          </a:p>
-        </p:txBody>
-      </p:sp>
-      <p:sp>
-        <p:nvSpPr>
-          <p:cNvPr id="21" name="Text 19"/>
-          <p:cNvSpPr txBox="1"/>
-          <p:nvPr/>
-        </p:nvSpPr>
-        <p:spPr>
-          <a:xfrm>
-            <a:off x="1042416" y="3081528"/>
-            <a:ext cx="4645152" cy="475488"/>
-          </a:xfrm>
-          <a:prstGeom prst="rect">
-            <a:avLst/>
-          </a:prstGeom>
-          <a:noFill/>
-          <a:ln/>
-        </p:spPr>
-        <p:txBody>
-          <a:bodyPr wrap="square" lIns="0" tIns="25400" rIns="25400" bIns="0" rtlCol="0" anchor="ctr"/>
-          <a:lstStyle/>
-          <a:p>
-            <a:pPr algn="ctr" indent="0" marL="0">
-              <a:lnSpc>
-                <a:spcPct val="120000"/>
-              </a:lnSpc>
-              <a:buNone/>
-            </a:pPr>
-            <a:r>
-              <a:rPr lang="en-US" sz="1800" dirty="0">
-                <a:solidFill>
-                  <a:srgbClr val="111827"/>
-                </a:solidFill>
-                <a:latin typeface="Pretendard" pitchFamily="34" charset="0"/>
-                <a:ea typeface="Pretendard" pitchFamily="34" charset="-122"/>
-                <a:cs typeface="Pretendard" pitchFamily="34" charset="-120"/>
-              </a:rPr>
-              <a:t>03  Style Families</a:t>
-            </a:r>
-            <a:endParaRPr lang="en-US" sz="1800" dirty="0"/>
-          </a:p>
-        </p:txBody>
-      </p:sp>
-      <p:sp>
-        <p:nvSpPr>
-          <p:cNvPr id="22" name="Text 20"/>
-          <p:cNvSpPr txBox="1"/>
-          <p:nvPr/>
-        </p:nvSpPr>
-        <p:spPr>
-          <a:xfrm>
-            <a:off x="1042416" y="3886200"/>
-            <a:ext cx="4645152" cy="475488"/>
-          </a:xfrm>
-          <a:prstGeom prst="rect">
-            <a:avLst/>
-          </a:prstGeom>
-          <a:noFill/>
-          <a:ln/>
-        </p:spPr>
-        <p:txBody>
-          <a:bodyPr wrap="square" lIns="0" tIns="25400" rIns="25400" bIns="0" rtlCol="0" anchor="ctr"/>
-          <a:lstStyle/>
-          <a:p>
-            <a:pPr algn="ctr" indent="0" marL="0">
-              <a:lnSpc>
-                <a:spcPct val="120000"/>
-              </a:lnSpc>
-              <a:buNone/>
-            </a:pPr>
-            <a:r>
-              <a:rPr lang="en-US" sz="1800" dirty="0">
-                <a:solidFill>
-                  <a:srgbClr val="111827"/>
-                </a:solidFill>
-                <a:latin typeface="Pretendard" pitchFamily="34" charset="0"/>
-                <a:ea typeface="Pretendard" pitchFamily="34" charset="-122"/>
-                <a:cs typeface="Pretendard" pitchFamily="34" charset="-120"/>
-              </a:rPr>
-              <a:t>04  Semantic Blocks</a:t>
-            </a:r>
-            <a:endParaRPr lang="en-US" sz="1800" dirty="0"/>
-          </a:p>
-        </p:txBody>
-      </p:sp>
-      <p:sp>
-        <p:nvSpPr>
-          <p:cNvPr id="23" name="Text 21"/>
-          <p:cNvSpPr txBox="1"/>
-          <p:nvPr/>
-        </p:nvSpPr>
-        <p:spPr>
-          <a:xfrm>
-            <a:off x="1042416" y="4690872"/>
-            <a:ext cx="4645152" cy="475488"/>
-          </a:xfrm>
-          <a:prstGeom prst="rect">
-            <a:avLst/>
-          </a:prstGeom>
-          <a:noFill/>
-          <a:ln/>
-        </p:spPr>
-        <p:txBody>
-          <a:bodyPr wrap="square" lIns="0" tIns="25400" rIns="25400" bIns="0" rtlCol="0" anchor="ctr"/>
-          <a:lstStyle/>
-          <a:p>
-            <a:pPr algn="ctr" indent="0" marL="0">
-              <a:lnSpc>
-                <a:spcPct val="120000"/>
-              </a:lnSpc>
-              <a:buNone/>
-            </a:pPr>
-            <a:r>
-              <a:rPr lang="en-US" sz="1800" dirty="0">
-                <a:solidFill>
-                  <a:srgbClr val="111827"/>
-                </a:solidFill>
-                <a:latin typeface="Pretendard" pitchFamily="34" charset="0"/>
-                <a:ea typeface="Pretendard" pitchFamily="34" charset="-122"/>
-                <a:cs typeface="Pretendard" pitchFamily="34" charset="-120"/>
-              </a:rPr>
-              <a:t>05  Pipeline Diagram</a:t>
-            </a:r>
-            <a:endParaRPr lang="en-US" sz="1800" dirty="0"/>
-          </a:p>
-        </p:txBody>
-      </p:sp>
-      <p:sp>
-        <p:nvSpPr>
-          <p:cNvPr id="24" name="Text 22"/>
-          <p:cNvSpPr txBox="1"/>
-          <p:nvPr/>
-        </p:nvSpPr>
-        <p:spPr>
-          <a:xfrm>
-            <a:off x="1042416" y="5486400"/>
-            <a:ext cx="4645152" cy="475488"/>
-          </a:xfrm>
-          <a:prstGeom prst="rect">
-            <a:avLst/>
-          </a:prstGeom>
-          <a:noFill/>
-          <a:ln/>
-        </p:spPr>
-        <p:txBody>
-          <a:bodyPr wrap="square" lIns="0" tIns="25400" rIns="25400" bIns="0" rtlCol="0" anchor="ctr"/>
-          <a:lstStyle/>
-          <a:p>
-            <a:pPr algn="ctr" indent="0" marL="0">
-              <a:lnSpc>
-                <a:spcPct val="120000"/>
-              </a:lnSpc>
-              <a:buNone/>
-            </a:pPr>
-            <a:r>
-              <a:rPr lang="en-US" sz="1800" dirty="0">
-                <a:solidFill>
-                  <a:srgbClr val="111827"/>
-                </a:solidFill>
-                <a:latin typeface="Pretendard" pitchFamily="34" charset="0"/>
-                <a:ea typeface="Pretendard" pitchFamily="34" charset="-122"/>
-                <a:cs typeface="Pretendard" pitchFamily="34" charset="-120"/>
-              </a:rPr>
-              <a:t>06  Table Coherence</a:t>
-            </a:r>
-            <a:endParaRPr lang="en-US" sz="1800" dirty="0"/>
-          </a:p>
-        </p:txBody>
-      </p:sp>
-      <p:sp>
-        <p:nvSpPr>
-          <p:cNvPr id="25" name="Text 23"/>
-          <p:cNvSpPr txBox="1"/>
-          <p:nvPr/>
-        </p:nvSpPr>
-        <p:spPr>
-          <a:xfrm>
-            <a:off x="6492240" y="1481328"/>
-            <a:ext cx="4645152" cy="475488"/>
-          </a:xfrm>
-          <a:prstGeom prst="rect">
-            <a:avLst/>
-          </a:prstGeom>
-          <a:noFill/>
-          <a:ln/>
-        </p:spPr>
-        <p:txBody>
-          <a:bodyPr wrap="square" lIns="0" tIns="25400" rIns="25400" bIns="0" rtlCol="0" anchor="ctr"/>
-          <a:lstStyle/>
-          <a:p>
-            <a:pPr algn="ctr" indent="0" marL="0">
-              <a:lnSpc>
-                <a:spcPct val="120000"/>
-              </a:lnSpc>
-              <a:buNone/>
-            </a:pPr>
-            <a:r>
-              <a:rPr lang="en-US" sz="1800" dirty="0">
-                <a:solidFill>
-                  <a:srgbClr val="111827"/>
-                </a:solidFill>
-                <a:latin typeface="Pretendard" pitchFamily="34" charset="0"/>
-                <a:ea typeface="Pretendard" pitchFamily="34" charset="-122"/>
-                <a:cs typeface="Pretendard" pitchFamily="34" charset="-120"/>
-              </a:rPr>
-              <a:t>07  Chart and Table Pair</a:t>
-            </a:r>
-            <a:endParaRPr lang="en-US" sz="1800" dirty="0"/>
-          </a:p>
-        </p:txBody>
-      </p:sp>
-      <p:sp>
-        <p:nvSpPr>
-          <p:cNvPr id="26" name="Text 24"/>
-          <p:cNvSpPr txBox="1"/>
-          <p:nvPr/>
-        </p:nvSpPr>
-        <p:spPr>
-          <a:xfrm>
-            <a:off x="6492240" y="2286000"/>
-            <a:ext cx="4645152" cy="475488"/>
-          </a:xfrm>
-          <a:prstGeom prst="rect">
-            <a:avLst/>
-          </a:prstGeom>
-          <a:noFill/>
-          <a:ln/>
-        </p:spPr>
-        <p:txBody>
-          <a:bodyPr wrap="square" lIns="0" tIns="25400" rIns="25400" bIns="0" rtlCol="0" anchor="ctr"/>
-          <a:lstStyle/>
-          <a:p>
-            <a:pPr algn="ctr" indent="0" marL="0">
-              <a:lnSpc>
-                <a:spcPct val="120000"/>
-              </a:lnSpc>
-              <a:buNone/>
-            </a:pPr>
-            <a:r>
-              <a:rPr lang="en-US" sz="1800" dirty="0">
-                <a:solidFill>
-                  <a:srgbClr val="111827"/>
-                </a:solidFill>
-                <a:latin typeface="Pretendard" pitchFamily="34" charset="0"/>
-                <a:ea typeface="Pretendard" pitchFamily="34" charset="-122"/>
-                <a:cs typeface="Pretendard" pitchFamily="34" charset="-120"/>
-              </a:rPr>
-              <a:t>08  Editable Proof Objects</a:t>
-            </a:r>
-            <a:endParaRPr lang="en-US" sz="1800" dirty="0"/>
-          </a:p>
-        </p:txBody>
-      </p:sp>
-      <p:sp>
-        <p:nvSpPr>
-          <p:cNvPr id="27" name="Text 25"/>
-          <p:cNvSpPr txBox="1"/>
-          <p:nvPr/>
-        </p:nvSpPr>
-        <p:spPr>
-          <a:xfrm>
-            <a:off x="6492240" y="3081528"/>
-            <a:ext cx="4645152" cy="475488"/>
-          </a:xfrm>
-          <a:prstGeom prst="rect">
-            <a:avLst/>
-          </a:prstGeom>
-          <a:noFill/>
-          <a:ln/>
-        </p:spPr>
-        <p:txBody>
-          <a:bodyPr wrap="square" lIns="0" tIns="25400" rIns="25400" bIns="0" rtlCol="0" anchor="ctr"/>
-          <a:lstStyle/>
-          <a:p>
-            <a:pPr algn="ctr" indent="0" marL="0">
-              <a:lnSpc>
-                <a:spcPct val="120000"/>
-              </a:lnSpc>
-              <a:buNone/>
-            </a:pPr>
-            <a:r>
-              <a:rPr lang="en-US" sz="1800" dirty="0">
-                <a:solidFill>
-                  <a:srgbClr val="111827"/>
-                </a:solidFill>
-                <a:latin typeface="Pretendard" pitchFamily="34" charset="0"/>
-                <a:ea typeface="Pretendard" pitchFamily="34" charset="-122"/>
-                <a:cs typeface="Pretendard" pitchFamily="34" charset="-120"/>
-              </a:rPr>
-              <a:t>09  Object Shape Grammar</a:t>
-            </a:r>
-            <a:endParaRPr lang="en-US" sz="1800" dirty="0"/>
-          </a:p>
-        </p:txBody>
-      </p:sp>
-      <p:sp>
-        <p:nvSpPr>
-          <p:cNvPr id="28" name="Text 26"/>
-          <p:cNvSpPr txBox="1"/>
-          <p:nvPr/>
-        </p:nvSpPr>
-        <p:spPr>
-          <a:xfrm>
-            <a:off x="6492240" y="3886200"/>
-            <a:ext cx="4645152" cy="475488"/>
-          </a:xfrm>
-          <a:prstGeom prst="rect">
-            <a:avLst/>
-          </a:prstGeom>
-          <a:noFill/>
-          <a:ln/>
-        </p:spPr>
-        <p:txBody>
-          <a:bodyPr wrap="square" lIns="0" tIns="25400" rIns="25400" bIns="0" rtlCol="0" anchor="ctr"/>
-          <a:lstStyle/>
-          <a:p>
-            <a:pPr algn="ctr" indent="0" marL="0">
-              <a:lnSpc>
-                <a:spcPct val="120000"/>
-              </a:lnSpc>
-              <a:buNone/>
-            </a:pPr>
-            <a:r>
-              <a:rPr lang="en-US" sz="1800" dirty="0">
-                <a:solidFill>
-                  <a:srgbClr val="111827"/>
-                </a:solidFill>
-                <a:latin typeface="Pretendard" pitchFamily="34" charset="0"/>
-                <a:ea typeface="Pretendard" pitchFamily="34" charset="-122"/>
-                <a:cs typeface="Pretendard" pitchFamily="34" charset="-120"/>
-              </a:rPr>
-              <a:t>10  Icon and Text Aside</a:t>
-            </a:r>
-            <a:endParaRPr lang="en-US" sz="1800" dirty="0"/>
-          </a:p>
-        </p:txBody>
-      </p:sp>
-      <p:sp>
-        <p:nvSpPr>
-          <p:cNvPr id="29" name="Text 27"/>
-          <p:cNvSpPr txBox="1"/>
-          <p:nvPr/>
-        </p:nvSpPr>
-        <p:spPr>
-          <a:xfrm>
-            <a:off x="6492240" y="4690872"/>
-            <a:ext cx="4645152" cy="475488"/>
-          </a:xfrm>
-          <a:prstGeom prst="rect">
-            <a:avLst/>
-          </a:prstGeom>
-          <a:noFill/>
-          <a:ln/>
-        </p:spPr>
-        <p:txBody>
-          <a:bodyPr wrap="square" lIns="0" tIns="25400" rIns="25400" bIns="0" rtlCol="0" anchor="ctr"/>
-          <a:lstStyle/>
-          <a:p>
-            <a:pPr algn="ctr" indent="0" marL="0">
-              <a:lnSpc>
-                <a:spcPct val="120000"/>
-              </a:lnSpc>
-              <a:buNone/>
-            </a:pPr>
-            <a:r>
-              <a:rPr lang="en-US" sz="1800" dirty="0">
-                <a:solidFill>
-                  <a:srgbClr val="111827"/>
-                </a:solidFill>
-                <a:latin typeface="Pretendard" pitchFamily="34" charset="0"/>
-                <a:ea typeface="Pretendard" pitchFamily="34" charset="-122"/>
-                <a:cs typeface="Pretendard" pitchFamily="34" charset="-120"/>
-              </a:rPr>
-              <a:t>11  Overflow Guard</a:t>
-            </a:r>
-            <a:endParaRPr lang="en-US" sz="1800" dirty="0"/>
-          </a:p>
-        </p:txBody>
-      </p:sp>
-      <p:sp>
-        <p:nvSpPr>
-          <p:cNvPr id="30" name="Text 28"/>
-          <p:cNvSpPr txBox="1"/>
-          <p:nvPr/>
-        </p:nvSpPr>
-        <p:spPr>
-          <a:xfrm>
-            <a:off x="6492240" y="5486400"/>
-            <a:ext cx="4645152" cy="475488"/>
-          </a:xfrm>
-          <a:prstGeom prst="rect">
-            <a:avLst/>
-          </a:prstGeom>
-          <a:noFill/>
-          <a:ln/>
-        </p:spPr>
-        <p:txBody>
-          <a:bodyPr wrap="square" lIns="0" tIns="25400" rIns="25400" bIns="0" rtlCol="0" anchor="ctr"/>
-          <a:lstStyle/>
-          <a:p>
-            <a:pPr algn="ctr" indent="0" marL="0">
-              <a:lnSpc>
-                <a:spcPct val="120000"/>
-              </a:lnSpc>
-              <a:buNone/>
-            </a:pPr>
-            <a:r>
-              <a:rPr lang="en-US" sz="1800" dirty="0">
-                <a:solidFill>
-                  <a:srgbClr val="111827"/>
-                </a:solidFill>
-                <a:latin typeface="Pretendard" pitchFamily="34" charset="0"/>
-                <a:ea typeface="Pretendard" pitchFamily="34" charset="-122"/>
-                <a:cs typeface="Pretendard" pitchFamily="34" charset="-120"/>
-              </a:rPr>
-              <a:t>12  Actions Output Review</a:t>
-            </a:r>
-            <a:endParaRPr lang="en-US" sz="1800" dirty="0"/>
-          </a:p>
-        </p:txBody>
-      </p:sp>
-    </p:spTree>
-  </p:cSld>
-  <p:clrMapOvr>
-    <a:masterClrMapping/>
-  </p:clrMapOvr>
-</p:sld>
-</file>
-
 <file path=ppt/slides/slide3.xml><?xml version="1.0" encoding="utf-8"?>
 <p:sld xmlns:a="http://schemas.openxmlformats.org/drawingml/2006/main" xmlns:r="http://schemas.openxmlformats.org/officeDocument/2006/relationships" xmlns:p="http://schemas.openxmlformats.org/presentationml/2006/main">
   <p:cSld name="Slide 3">
@@ -11453,8 +15409,8 @@
         </p:nvSpPr>
         <p:spPr>
           <a:xfrm>
-            <a:off x="914400" y="3063240"/>
-            <a:ext cx="10241280" cy="73152"/>
+            <a:off x="822960" y="3099816"/>
+            <a:ext cx="10515600" cy="45720"/>
           </a:xfrm>
           <a:prstGeom prst="rect">
             <a:avLst/>
@@ -11472,87 +15428,46 @@
           </a:ln>
         </p:spPr>
       </p:sp>
-      <p:pic>
-        <p:nvPicPr>
-          <p:cNvPr id="4" name="Image 0" descr="preencoded.png">    </p:cNvPr>
-          <p:cNvPicPr>
-            <a:picLocks noChangeAspect="1"/>
-          </p:cNvPicPr>
-          <p:nvPr/>
-        </p:nvPicPr>
-        <p:blipFill>
-          <a:blip r:embed="rId1">
-            <a:extLst>
-              <a:ext uri="{96DAC541-7B7A-43D3-8B79-37D633B846F1}">
-                <asvg:svgBlip xmlns:asvg="http://schemas.microsoft.com/office/drawing/2016/SVG/main" r:embed="rId2"/>
-              </a:ext>
-            </a:extLst>
-          </a:blip>
-          <a:stretch>
-            <a:fillRect/>
-          </a:stretch>
-        </p:blipFill>
-        <p:spPr>
-          <a:xfrm>
-            <a:off x="914400" y="1417320"/>
-            <a:ext cx="10241280" cy="1325880"/>
-          </a:xfrm>
-          <a:prstGeom prst="rect">
-            <a:avLst/>
-          </a:prstGeom>
-        </p:spPr>
-      </p:pic>
-      <p:sp>
-        <p:nvSpPr>
-          <p:cNvPr id="5" name="Shape 2"/>
+      <p:sp>
+        <p:nvSpPr>
+          <p:cNvPr id="4" name="Shape 2"/>
           <p:cNvSpPr/>
           <p:nvPr/>
         </p:nvSpPr>
         <p:spPr>
           <a:xfrm>
-            <a:off x="914400" y="1417320"/>
-            <a:ext cx="10241280" cy="1325880"/>
-          </a:xfrm>
-          <a:prstGeom prst="rect">
-            <a:avLst/>
-          </a:prstGeom>
-          <a:solidFill>
-            <a:srgbClr val="FFFFFF">
-              <a:alpha val="0"/>
-            </a:srgbClr>
+            <a:off x="822960" y="4288536"/>
+            <a:ext cx="2011680" cy="45720"/>
+          </a:xfrm>
+          <a:prstGeom prst="rect">
+            <a:avLst/>
+          </a:prstGeom>
+          <a:solidFill>
+            <a:srgbClr val="DBEAFE"/>
           </a:solidFill>
           <a:ln w="12700">
             <a:solidFill>
-              <a:srgbClr val="E2E8F0">
+              <a:srgbClr val="DBEAFE">
                 <a:alpha val="0"/>
               </a:srgbClr>
             </a:solidFill>
             <a:prstDash val="solid"/>
           </a:ln>
-          <a:effectLst>
-            <a:outerShdw sx="100000" sy="100000" kx="0" ky="0" algn="bl" rotWithShape="0" blurRad="12700" dist="50800" dir="2700000">
-              <a:srgbClr val="000000">
-                <a:alpha val="8000"/>
-              </a:srgbClr>
-            </a:outerShdw>
-          </a:effectLst>
-        </p:spPr>
-      </p:sp>
-      <p:sp>
-        <p:nvSpPr>
-          <p:cNvPr id="6" name="Shape 3"/>
+        </p:spPr>
+      </p:sp>
+      <p:sp>
+        <p:nvSpPr>
+          <p:cNvPr id="5" name="Shape 3"/>
           <p:cNvSpPr/>
           <p:nvPr/>
         </p:nvSpPr>
         <p:spPr>
           <a:xfrm>
-            <a:off x="1046988" y="1549908"/>
-            <a:ext cx="73152" cy="1060704"/>
-          </a:xfrm>
-          <a:prstGeom prst="roundRect">
-            <a:avLst>
-              <a:gd name="adj" fmla="val 25000"/>
-            </a:avLst>
+            <a:off x="822960" y="3300984"/>
+            <a:ext cx="73152" cy="841248"/>
+          </a:xfrm>
+          <a:prstGeom prst="rect">
+            <a:avLst/>
           </a:prstGeom>
           <a:solidFill>
             <a:srgbClr val="2563EB"/>
@@ -11569,14 +15484,14 @@
       </p:sp>
       <p:sp>
         <p:nvSpPr>
-          <p:cNvPr id="7" name="Text 4"/>
+          <p:cNvPr id="6" name="Text 4"/>
           <p:cNvSpPr txBox="1"/>
           <p:nvPr/>
         </p:nvSpPr>
         <p:spPr>
           <a:xfrm>
-            <a:off x="731520" y="457200"/>
-            <a:ext cx="10698480" cy="731520"/>
+            <a:off x="731520" y="384048"/>
+            <a:ext cx="10698480" cy="822960"/>
           </a:xfrm>
           <a:prstGeom prst="rect">
             <a:avLst/>
@@ -11595,7 +15510,7 @@
               <a:buNone/>
             </a:pPr>
             <a:r>
-              <a:rPr lang="en-US" sz="3400" b="1" dirty="0">
+              <a:rPr lang="en-US" sz="3800" b="1" dirty="0">
                 <a:solidFill>
                   <a:srgbClr val="111827"/>
                 </a:solidFill>
@@ -11603,22 +15518,22 @@
                 <a:ea typeface="Pretendard" pitchFamily="34" charset="-122"/>
                 <a:cs typeface="Pretendard" pitchFamily="34" charset="-120"/>
               </a:rPr>
-              <a:t>Preview Purpose</a:t>
+              <a:t>Agenda (Cont. 2/2)</a:t>
             </a:r>
-            <a:endParaRPr lang="en-US" sz="3400" dirty="0"/>
+            <a:endParaRPr lang="en-US" sz="3800" dirty="0"/>
           </a:p>
         </p:txBody>
       </p:sp>
       <p:sp>
         <p:nvSpPr>
-          <p:cNvPr id="8" name="Text 5"/>
+          <p:cNvPr id="7" name="Text 5"/>
           <p:cNvSpPr txBox="1"/>
           <p:nvPr/>
         </p:nvSpPr>
         <p:spPr>
           <a:xfrm>
-            <a:off x="1298448" y="1545336"/>
-            <a:ext cx="9637776" cy="1069848"/>
+            <a:off x="1042416" y="3392424"/>
+            <a:ext cx="10094976" cy="658368"/>
           </a:xfrm>
           <a:prstGeom prst="rect">
             <a:avLst/>
@@ -11627,69 +15542,10 @@
           <a:ln/>
         </p:spPr>
         <p:txBody>
-          <a:bodyPr wrap="square" lIns="0" tIns="0" rIns="0" bIns="0" rtlCol="0" anchor="ctr"/>
+          <a:bodyPr wrap="square" lIns="0" tIns="25400" rIns="25400" bIns="0" rtlCol="0" anchor="ctr"/>
           <a:lstStyle/>
           <a:p>
-            <a:pPr algn="l" indent="0" marL="0">
-              <a:lnSpc>
-                <a:spcPct val="120000"/>
-              </a:lnSpc>
-              <a:buNone/>
-            </a:pPr>
-            <a:r>
-              <a:rPr lang="en-US" sz="2200" b="1" dirty="0">
-                <a:solidFill>
-                  <a:srgbClr val="111827"/>
-                </a:solidFill>
-                <a:latin typeface="Pretendard" pitchFamily="34" charset="0"/>
-                <a:ea typeface="Pretendard" pitchFamily="34" charset="-122"/>
-                <a:cs typeface="Pretendard" pitchFamily="34" charset="-120"/>
-              </a:rPr>
-              <a:t>Generated decks must prove hierarchy, evidence, and object grammar before decoration.</a:t>
-            </a:r>
-            <a:endParaRPr lang="en-US" sz="2200" dirty="0"/>
-          </a:p>
-        </p:txBody>
-      </p:sp>
-      <p:sp>
-        <p:nvSpPr>
-          <p:cNvPr id="9" name="Text 6"/>
-          <p:cNvSpPr txBox="1"/>
-          <p:nvPr/>
-        </p:nvSpPr>
-        <p:spPr>
-          <a:xfrm>
-            <a:off x="987552" y="3172968"/>
-            <a:ext cx="10094976" cy="2478024"/>
-          </a:xfrm>
-          <a:prstGeom prst="rect">
-            <a:avLst/>
-          </a:prstGeom>
-          <a:noFill/>
-          <a:ln/>
-        </p:spPr>
-        <p:txBody>
-          <a:bodyPr wrap="square" lIns="0" tIns="25400" rIns="25400" bIns="0" rtlCol="0" anchor="t"/>
-          <a:lstStyle/>
-          <a:p>
-            <a:pPr algn="l" indent="0" marL="0">
-              <a:lnSpc>
-                <a:spcPct val="120000"/>
-              </a:lnSpc>
-              <a:buNone/>
-            </a:pPr>
-            <a:r>
-              <a:rPr lang="en-US" sz="2200" b="1" dirty="0">
-                <a:solidFill>
-                  <a:srgbClr val="2563EB"/>
-                </a:solidFill>
-                <a:latin typeface="Pretendard" pitchFamily="34" charset="0"/>
-                <a:ea typeface="Pretendard" pitchFamily="34" charset="-122"/>
-                <a:cs typeface="Pretendard" pitchFamily="34" charset="-120"/>
-              </a:rPr>
-              <a:t>- Fixture type</a:t>
-            </a:r>
-            <a:pPr algn="l" indent="0" marL="0">
+            <a:pPr algn="ctr" indent="0" marL="0">
               <a:lnSpc>
                 <a:spcPct val="120000"/>
               </a:lnSpc>
@@ -11704,87 +15560,7 @@
                 <a:ea typeface="Pretendard" pitchFamily="34" charset="-122"/>
                 <a:cs typeface="Pretendard" pitchFamily="34" charset="-120"/>
               </a:rPr>
-              <a:t>  Actions theme preview source.</a:t>
-            </a:r>
-            <a:endParaRPr lang="en-US" sz="2200" dirty="0"/>
-          </a:p>
-          <a:p>
-            <a:pPr algn="l" indent="0" marL="0">
-              <a:lnSpc>
-                <a:spcPct val="120000"/>
-              </a:lnSpc>
-              <a:buNone/>
-            </a:pPr>
-            <a:r>
-              <a:rPr lang="en-US" sz="2200" b="1" dirty="0">
-                <a:solidFill>
-                  <a:srgbClr val="2563EB"/>
-                </a:solidFill>
-                <a:latin typeface="Pretendard" pitchFamily="34" charset="0"/>
-                <a:ea typeface="Pretendard" pitchFamily="34" charset="-122"/>
-                <a:cs typeface="Pretendard" pitchFamily="34" charset="-120"/>
-              </a:rPr>
-              <a:t>- Source shape</a:t>
-            </a:r>
-            <a:endParaRPr lang="en-US" sz="2200" dirty="0"/>
-          </a:p>
-          <a:p>
-            <a:pPr algn="l" indent="0" marL="0">
-              <a:lnSpc>
-                <a:spcPct val="120000"/>
-              </a:lnSpc>
-              <a:buNone/>
-            </a:pPr>
-            <a:r>
-              <a:rPr lang="en-US" sz="2200" dirty="0">
-                <a:solidFill>
-                  <a:srgbClr val="111827"/>
-                </a:solidFill>
-                <a:latin typeface="Pretendard" pitchFamily="34" charset="0"/>
-                <a:ea typeface="Pretendard" pitchFamily="34" charset="-122"/>
-                <a:cs typeface="Pretendard" pitchFamily="34" charset="-120"/>
-              </a:rPr>
-              <a:t>  short bullets, bounded tables, and one-slide diagrams.</a:t>
-            </a:r>
-            <a:endParaRPr lang="en-US" sz="2200" dirty="0"/>
-          </a:p>
-          <a:p>
-            <a:pPr algn="l" indent="0" marL="0">
-              <a:lnSpc>
-                <a:spcPct val="120000"/>
-              </a:lnSpc>
-              <a:buNone/>
-            </a:pPr>
-            <a:r>
-              <a:rPr lang="en-US" sz="2200" b="1" dirty="0">
-                <a:solidFill>
-                  <a:srgbClr val="2563EB"/>
-                </a:solidFill>
-                <a:latin typeface="Pretendard" pitchFamily="34" charset="0"/>
-                <a:ea typeface="Pretendard" pitchFamily="34" charset="-122"/>
-                <a:cs typeface="Pretendard" pitchFamily="34" charset="-120"/>
-              </a:rPr>
-              <a:t>- Review target</a:t>
-            </a:r>
-            <a:endParaRPr lang="en-US" sz="2200" dirty="0"/>
-          </a:p>
-          <a:p>
-            <a:pPr algn="l" indent="0" marL="0">
-              <a:lnSpc>
-                <a:spcPct val="120000"/>
-              </a:lnSpc>
-              <a:buNone/>
-            </a:pPr>
-            <a:r>
-              <a:rPr lang="en-US" sz="2200" dirty="0">
-                <a:solidFill>
-                  <a:srgbClr val="111827"/>
-                </a:solidFill>
-                <a:latin typeface="Pretendard" pitchFamily="34" charset="0"/>
-                <a:ea typeface="Pretendard" pitchFamily="34" charset="-122"/>
-                <a:cs typeface="Pretendard" pitchFamily="34" charset="-120"/>
-              </a:rPr>
-              <a:t>  readable, coherent, composition-aware output.</a:t>
+              <a:t>01  Actions Output Review</a:t>
             </a:r>
             <a:endParaRPr lang="en-US" sz="2200" dirty="0"/>
           </a:p>
@@ -11857,6 +15633,450 @@
         </p:nvSpPr>
         <p:spPr>
           <a:xfrm>
+            <a:off x="914400" y="3063240"/>
+            <a:ext cx="10241280" cy="73152"/>
+          </a:xfrm>
+          <a:prstGeom prst="rect">
+            <a:avLst/>
+          </a:prstGeom>
+          <a:solidFill>
+            <a:srgbClr val="2563EB"/>
+          </a:solidFill>
+          <a:ln w="12700">
+            <a:solidFill>
+              <a:srgbClr val="2563EB">
+                <a:alpha val="0"/>
+              </a:srgbClr>
+            </a:solidFill>
+            <a:prstDash val="solid"/>
+          </a:ln>
+        </p:spPr>
+      </p:sp>
+      <p:pic>
+        <p:nvPicPr>
+          <p:cNvPr id="4" name="Image 0" descr="preencoded.png">    </p:cNvPr>
+          <p:cNvPicPr>
+            <a:picLocks noChangeAspect="1"/>
+          </p:cNvPicPr>
+          <p:nvPr/>
+        </p:nvPicPr>
+        <p:blipFill>
+          <a:blip r:embed="rId1">
+            <a:extLst>
+              <a:ext uri="{96DAC541-7B7A-43D3-8B79-37D633B846F1}">
+                <asvg:svgBlip xmlns:asvg="http://schemas.microsoft.com/office/drawing/2016/SVG/main" r:embed="rId2"/>
+              </a:ext>
+            </a:extLst>
+          </a:blip>
+          <a:stretch>
+            <a:fillRect/>
+          </a:stretch>
+        </p:blipFill>
+        <p:spPr>
+          <a:xfrm>
+            <a:off x="914400" y="1417320"/>
+            <a:ext cx="10241280" cy="1325880"/>
+          </a:xfrm>
+          <a:prstGeom prst="rect">
+            <a:avLst/>
+          </a:prstGeom>
+        </p:spPr>
+      </p:pic>
+      <p:sp>
+        <p:nvSpPr>
+          <p:cNvPr id="5" name="Shape 2"/>
+          <p:cNvSpPr/>
+          <p:nvPr/>
+        </p:nvSpPr>
+        <p:spPr>
+          <a:xfrm>
+            <a:off x="914400" y="1417320"/>
+            <a:ext cx="10241280" cy="1325880"/>
+          </a:xfrm>
+          <a:prstGeom prst="rect">
+            <a:avLst/>
+          </a:prstGeom>
+          <a:solidFill>
+            <a:srgbClr val="FFFFFF">
+              <a:alpha val="0"/>
+            </a:srgbClr>
+          </a:solidFill>
+          <a:ln w="12700">
+            <a:solidFill>
+              <a:srgbClr val="E2E8F0">
+                <a:alpha val="0"/>
+              </a:srgbClr>
+            </a:solidFill>
+            <a:prstDash val="solid"/>
+          </a:ln>
+          <a:effectLst>
+            <a:outerShdw sx="100000" sy="100000" kx="0" ky="0" algn="bl" rotWithShape="0" blurRad="12700" dist="50800" dir="2700000">
+              <a:srgbClr val="000000">
+                <a:alpha val="8000"/>
+              </a:srgbClr>
+            </a:outerShdw>
+          </a:effectLst>
+        </p:spPr>
+      </p:sp>
+      <p:sp>
+        <p:nvSpPr>
+          <p:cNvPr id="6" name="Shape 3"/>
+          <p:cNvSpPr/>
+          <p:nvPr/>
+        </p:nvSpPr>
+        <p:spPr>
+          <a:xfrm>
+            <a:off x="1046988" y="1549908"/>
+            <a:ext cx="73152" cy="1060704"/>
+          </a:xfrm>
+          <a:prstGeom prst="roundRect">
+            <a:avLst>
+              <a:gd name="adj" fmla="val 25000"/>
+            </a:avLst>
+          </a:prstGeom>
+          <a:solidFill>
+            <a:srgbClr val="2563EB"/>
+          </a:solidFill>
+          <a:ln w="12700">
+            <a:solidFill>
+              <a:srgbClr val="2563EB">
+                <a:alpha val="0"/>
+              </a:srgbClr>
+            </a:solidFill>
+            <a:prstDash val="solid"/>
+          </a:ln>
+        </p:spPr>
+      </p:sp>
+      <p:sp>
+        <p:nvSpPr>
+          <p:cNvPr id="7" name="Text 4"/>
+          <p:cNvSpPr txBox="1"/>
+          <p:nvPr/>
+        </p:nvSpPr>
+        <p:spPr>
+          <a:xfrm>
+            <a:off x="731520" y="457200"/>
+            <a:ext cx="10698480" cy="731520"/>
+          </a:xfrm>
+          <a:prstGeom prst="rect">
+            <a:avLst/>
+          </a:prstGeom>
+          <a:noFill/>
+          <a:ln/>
+        </p:spPr>
+        <p:txBody>
+          <a:bodyPr wrap="square" lIns="0" tIns="0" rIns="0" bIns="0" rtlCol="0" anchor="ctr"/>
+          <a:lstStyle/>
+          <a:p>
+            <a:pPr algn="ctr" indent="0" marL="0">
+              <a:lnSpc>
+                <a:spcPct val="120000"/>
+              </a:lnSpc>
+              <a:buNone/>
+            </a:pPr>
+            <a:r>
+              <a:rPr lang="en-US" sz="3400" b="1" dirty="0">
+                <a:solidFill>
+                  <a:srgbClr val="111827"/>
+                </a:solidFill>
+                <a:latin typeface="Pretendard" pitchFamily="34" charset="0"/>
+                <a:ea typeface="Pretendard" pitchFamily="34" charset="-122"/>
+                <a:cs typeface="Pretendard" pitchFamily="34" charset="-120"/>
+              </a:rPr>
+              <a:t>Teaser Summary</a:t>
+            </a:r>
+            <a:endParaRPr lang="en-US" sz="3400" dirty="0"/>
+          </a:p>
+        </p:txBody>
+      </p:sp>
+      <p:sp>
+        <p:nvSpPr>
+          <p:cNvPr id="8" name="Text 5"/>
+          <p:cNvSpPr txBox="1"/>
+          <p:nvPr/>
+        </p:nvSpPr>
+        <p:spPr>
+          <a:xfrm>
+            <a:off x="1298448" y="1545336"/>
+            <a:ext cx="9637776" cy="1069848"/>
+          </a:xfrm>
+          <a:prstGeom prst="rect">
+            <a:avLst/>
+          </a:prstGeom>
+          <a:noFill/>
+          <a:ln/>
+        </p:spPr>
+        <p:txBody>
+          <a:bodyPr wrap="square" lIns="0" tIns="0" rIns="0" bIns="0" rtlCol="0" anchor="ctr"/>
+          <a:lstStyle/>
+          <a:p>
+            <a:pPr algn="l" indent="0" marL="0">
+              <a:lnSpc>
+                <a:spcPct val="120000"/>
+              </a:lnSpc>
+              <a:buNone/>
+            </a:pPr>
+            <a:r>
+              <a:rPr lang="en-US" sz="2200" b="1" dirty="0">
+                <a:solidFill>
+                  <a:srgbClr val="111827"/>
+                </a:solidFill>
+                <a:latin typeface="Pretendard" pitchFamily="34" charset="0"/>
+                <a:ea typeface="Pretendard" pitchFamily="34" charset="-122"/>
+                <a:cs typeface="Pretendard" pitchFamily="34" charset="-120"/>
+              </a:rPr>
+              <a:t>Generated PPTX slides should show design range without sacrificing coherence.</a:t>
+            </a:r>
+            <a:endParaRPr lang="en-US" sz="2200" dirty="0"/>
+          </a:p>
+        </p:txBody>
+      </p:sp>
+      <p:sp>
+        <p:nvSpPr>
+          <p:cNvPr id="9" name="Text 6"/>
+          <p:cNvSpPr txBox="1"/>
+          <p:nvPr/>
+        </p:nvSpPr>
+        <p:spPr>
+          <a:xfrm>
+            <a:off x="987552" y="3172968"/>
+            <a:ext cx="10094976" cy="2478024"/>
+          </a:xfrm>
+          <a:prstGeom prst="rect">
+            <a:avLst/>
+          </a:prstGeom>
+          <a:noFill/>
+          <a:ln/>
+        </p:spPr>
+        <p:txBody>
+          <a:bodyPr wrap="square" lIns="0" tIns="25400" rIns="25400" bIns="0" rtlCol="0" anchor="t"/>
+          <a:lstStyle/>
+          <a:p>
+            <a:pPr algn="l" indent="0" marL="0">
+              <a:lnSpc>
+                <a:spcPct val="120000"/>
+              </a:lnSpc>
+              <a:buNone/>
+            </a:pPr>
+            <a:r>
+              <a:rPr lang="en-US" sz="2200" b="1" dirty="0">
+                <a:solidFill>
+                  <a:srgbClr val="2563EB"/>
+                </a:solidFill>
+                <a:latin typeface="Pretendard" pitchFamily="34" charset="0"/>
+                <a:ea typeface="Pretendard" pitchFamily="34" charset="-122"/>
+                <a:cs typeface="Pretendard" pitchFamily="34" charset="-120"/>
+              </a:rPr>
+              <a:t>- Preview styles</a:t>
+            </a:r>
+            <a:pPr algn="l" indent="0" marL="0">
+              <a:lnSpc>
+                <a:spcPct val="120000"/>
+              </a:lnSpc>
+              <a:buNone/>
+            </a:pPr>
+            <a:r>
+              <a:rPr lang="en-US" sz="2200" dirty="0">
+                <a:solidFill>
+                  <a:srgbClr val="111827"/>
+                </a:solidFill>
+                <a:latin typeface="Pretendard" pitchFamily="34" charset="0"/>
+                <a:ea typeface="Pretendard" pitchFamily="34" charset="-122"/>
+                <a:cs typeface="Pretendard" pitchFamily="34" charset="-120"/>
+              </a:rPr>
+              <a:t>  8 pruned decoration grammars, not palette-only swaps.</a:t>
+            </a:r>
+            <a:endParaRPr lang="en-US" sz="2200" dirty="0"/>
+          </a:p>
+          <a:p>
+            <a:pPr algn="l" indent="0" marL="0">
+              <a:lnSpc>
+                <a:spcPct val="120000"/>
+              </a:lnSpc>
+              <a:buNone/>
+            </a:pPr>
+            <a:r>
+              <a:rPr lang="en-US" sz="2200" b="1" dirty="0">
+                <a:solidFill>
+                  <a:srgbClr val="2563EB"/>
+                </a:solidFill>
+                <a:latin typeface="Pretendard" pitchFamily="34" charset="0"/>
+                <a:ea typeface="Pretendard" pitchFamily="34" charset="-122"/>
+                <a:cs typeface="Pretendard" pitchFamily="34" charset="-120"/>
+              </a:rPr>
+              <a:t>- Pattern range</a:t>
+            </a:r>
+            <a:endParaRPr lang="en-US" sz="2200" dirty="0"/>
+          </a:p>
+          <a:p>
+            <a:pPr algn="l" indent="0" marL="0">
+              <a:lnSpc>
+                <a:spcPct val="120000"/>
+              </a:lnSpc>
+              <a:buNone/>
+            </a:pPr>
+            <a:r>
+              <a:rPr lang="en-US" sz="2200" dirty="0">
+                <a:solidFill>
+                  <a:srgbClr val="111827"/>
+                </a:solidFill>
+                <a:latin typeface="Pretendard" pitchFamily="34" charset="0"/>
+                <a:ea typeface="Pretendard" pitchFamily="34" charset="-122"/>
+                <a:cs typeface="Pretendard" pitchFamily="34" charset="-120"/>
+              </a:rPr>
+              <a:t>  36+ decoration and layout patterns selected by content role.</a:t>
+            </a:r>
+            <a:endParaRPr lang="en-US" sz="2200" dirty="0"/>
+          </a:p>
+          <a:p>
+            <a:pPr algn="l" indent="0" marL="0">
+              <a:lnSpc>
+                <a:spcPct val="120000"/>
+              </a:lnSpc>
+              <a:buNone/>
+            </a:pPr>
+            <a:r>
+              <a:rPr lang="en-US" sz="2200" b="1" dirty="0">
+                <a:solidFill>
+                  <a:srgbClr val="2563EB"/>
+                </a:solidFill>
+                <a:latin typeface="Pretendard" pitchFamily="34" charset="0"/>
+                <a:ea typeface="Pretendard" pitchFamily="34" charset="-122"/>
+                <a:cs typeface="Pretendard" pitchFamily="34" charset="-120"/>
+              </a:rPr>
+              <a:t>- Object support</a:t>
+            </a:r>
+            <a:endParaRPr lang="en-US" sz="2200" dirty="0"/>
+          </a:p>
+          <a:p>
+            <a:pPr algn="l" indent="0" marL="0">
+              <a:lnSpc>
+                <a:spcPct val="120000"/>
+              </a:lnSpc>
+              <a:buNone/>
+            </a:pPr>
+            <a:r>
+              <a:rPr lang="en-US" sz="2200" dirty="0">
+                <a:solidFill>
+                  <a:srgbClr val="111827"/>
+                </a:solidFill>
+                <a:latin typeface="Pretendard" pitchFamily="34" charset="0"/>
+                <a:ea typeface="Pretendard" pitchFamily="34" charset="-122"/>
+                <a:cs typeface="Pretendard" pitchFamily="34" charset="-120"/>
+              </a:rPr>
+              <a:t>  native tables, charts, proof objects, diagrams, images, and icon slots.</a:t>
+            </a:r>
+            <a:endParaRPr lang="en-US" sz="2200" dirty="0"/>
+          </a:p>
+          <a:p>
+            <a:pPr algn="l" indent="0" marL="0">
+              <a:lnSpc>
+                <a:spcPct val="120000"/>
+              </a:lnSpc>
+              <a:buNone/>
+            </a:pPr>
+            <a:r>
+              <a:rPr lang="en-US" sz="2200" b="1" dirty="0">
+                <a:solidFill>
+                  <a:srgbClr val="2563EB"/>
+                </a:solidFill>
+                <a:latin typeface="Pretendard" pitchFamily="34" charset="0"/>
+                <a:ea typeface="Pretendard" pitchFamily="34" charset="-122"/>
+                <a:cs typeface="Pretendard" pitchFamily="34" charset="-120"/>
+              </a:rPr>
+              <a:t>- QA contract</a:t>
+            </a:r>
+            <a:endParaRPr lang="en-US" sz="2200" dirty="0"/>
+          </a:p>
+          <a:p>
+            <a:pPr algn="l" indent="0" marL="0">
+              <a:lnSpc>
+                <a:spcPct val="120000"/>
+              </a:lnSpc>
+              <a:buNone/>
+            </a:pPr>
+            <a:r>
+              <a:rPr lang="en-US" sz="2200" dirty="0">
+                <a:solidFill>
+                  <a:srgbClr val="111827"/>
+                </a:solidFill>
+                <a:latin typeface="Pretendard" pitchFamily="34" charset="0"/>
+                <a:ea typeface="Pretendard" pitchFamily="34" charset="-122"/>
+                <a:cs typeface="Pretendard" pitchFamily="34" charset="-120"/>
+              </a:rPr>
+              <a:t>  readable text, bounded objects, aligned connectors, and editable PPTX output.</a:t>
+            </a:r>
+            <a:endParaRPr lang="en-US" sz="2200" dirty="0"/>
+          </a:p>
+        </p:txBody>
+      </p:sp>
+    </p:spTree>
+  </p:cSld>
+  <p:clrMapOvr>
+    <a:masterClrMapping/>
+  </p:clrMapOvr>
+</p:sld>
+</file>
+
+<file path=ppt/slides/slide5.xml><?xml version="1.0" encoding="utf-8"?>
+<p:sld xmlns:a="http://schemas.openxmlformats.org/drawingml/2006/main" xmlns:r="http://schemas.openxmlformats.org/officeDocument/2006/relationships" xmlns:p="http://schemas.openxmlformats.org/presentationml/2006/main">
+  <p:cSld name="Slide 5">
+    <p:bg>
+      <p:bgPr>
+        <a:solidFill>
+          <a:srgbClr val="F8FAFC"/>
+        </a:solidFill>
+      </p:bgPr>
+    </p:bg>
+    <p:spTree>
+      <p:nvGrpSpPr>
+        <p:cNvPr id="1" name=""/>
+        <p:cNvGrpSpPr/>
+        <p:nvPr/>
+      </p:nvGrpSpPr>
+      <p:grpSpPr>
+        <a:xfrm>
+          <a:off x="0" y="0"/>
+          <a:ext cx="0" cy="0"/>
+          <a:chOff x="0" y="0"/>
+          <a:chExt cx="0" cy="0"/>
+        </a:xfrm>
+      </p:grpSpPr>
+      <p:sp>
+        <p:nvSpPr>
+          <p:cNvPr id="2" name="Shape 0"/>
+          <p:cNvSpPr/>
+          <p:nvPr/>
+        </p:nvSpPr>
+        <p:spPr>
+          <a:xfrm>
+            <a:off x="731520" y="1207008"/>
+            <a:ext cx="1325880" cy="54864"/>
+          </a:xfrm>
+          <a:prstGeom prst="rect">
+            <a:avLst/>
+          </a:prstGeom>
+          <a:solidFill>
+            <a:srgbClr val="2563EB"/>
+          </a:solidFill>
+          <a:ln w="12700">
+            <a:solidFill>
+              <a:srgbClr val="2563EB">
+                <a:alpha val="0"/>
+              </a:srgbClr>
+            </a:solidFill>
+            <a:prstDash val="solid"/>
+          </a:ln>
+        </p:spPr>
+      </p:sp>
+      <p:sp>
+        <p:nvSpPr>
+          <p:cNvPr id="3" name="Shape 1"/>
+          <p:cNvSpPr/>
+          <p:nvPr/>
+        </p:nvSpPr>
+        <p:spPr>
+          <a:xfrm>
             <a:off x="786384" y="1956816"/>
             <a:ext cx="32004" cy="3483864"/>
           </a:xfrm>
@@ -12264,8 +16484,8 @@
         </p:nvSpPr>
         <p:spPr>
           <a:xfrm>
-            <a:off x="1699321" y="1957548"/>
-            <a:ext cx="9255191" cy="839785"/>
+            <a:off x="1699321" y="1987296"/>
+            <a:ext cx="9255191" cy="780288"/>
           </a:xfrm>
           <a:prstGeom prst="rect">
             <a:avLst/>
@@ -12380,8 +16600,8 @@
         </p:nvSpPr>
         <p:spPr>
           <a:xfrm>
-            <a:off x="1699321" y="3283428"/>
-            <a:ext cx="9255191" cy="839785"/>
+            <a:off x="1699321" y="3313176"/>
+            <a:ext cx="9255191" cy="780288"/>
           </a:xfrm>
           <a:prstGeom prst="rect">
             <a:avLst/>
@@ -12496,8 +16716,8 @@
         </p:nvSpPr>
         <p:spPr>
           <a:xfrm>
-            <a:off x="1699321" y="4600164"/>
-            <a:ext cx="9255191" cy="839785"/>
+            <a:off x="1699321" y="4629912"/>
+            <a:ext cx="9255191" cy="780288"/>
           </a:xfrm>
           <a:prstGeom prst="rect">
             <a:avLst/>
@@ -12555,9 +16775,9 @@
 </p:sld>
 </file>
 
-<file path=ppt/slides/slide5.xml><?xml version="1.0" encoding="utf-8"?>
+<file path=ppt/slides/slide6.xml><?xml version="1.0" encoding="utf-8"?>
 <p:sld xmlns:a="http://schemas.openxmlformats.org/drawingml/2006/main" xmlns:r="http://schemas.openxmlformats.org/officeDocument/2006/relationships" xmlns:p="http://schemas.openxmlformats.org/presentationml/2006/main">
-  <p:cSld name="Slide 5">
+  <p:cSld name="Slide 6">
     <p:bg>
       <p:bgPr>
         <a:solidFill>
@@ -12828,9 +17048,9 @@
 </p:sld>
 </file>
 
-<file path=ppt/slides/slide6.xml><?xml version="1.0" encoding="utf-8"?>
+<file path=ppt/slides/slide7.xml><?xml version="1.0" encoding="utf-8"?>
 <p:sld xmlns:a="http://schemas.openxmlformats.org/drawingml/2006/main" xmlns:r="http://schemas.openxmlformats.org/officeDocument/2006/relationships" xmlns:p="http://schemas.openxmlformats.org/presentationml/2006/main">
-  <p:cSld name="Slide 6">
+  <p:cSld name="Slide 7">
     <p:bg>
       <p:bgPr>
         <a:solidFill>
@@ -13223,7 +17443,7 @@
                 <a:ea typeface="Pretendard" pitchFamily="34" charset="-122"/>
                 <a:cs typeface="Pretendard" pitchFamily="34" charset="-120"/>
               </a:rPr>
-              <a:t>Style Families</a:t>
+              <a:t>Pruned Style Families</a:t>
             </a:r>
             <a:endParaRPr lang="en-US" sz="3400" dirty="0"/>
           </a:p>
@@ -13294,8 +17514,8 @@
         </p:nvSpPr>
         <p:spPr>
           <a:xfrm>
-            <a:off x="1699321" y="1957548"/>
-            <a:ext cx="9255191" cy="839785"/>
+            <a:off x="1699321" y="1987296"/>
+            <a:ext cx="9255191" cy="780288"/>
           </a:xfrm>
           <a:prstGeom prst="rect">
             <a:avLst/>
@@ -13322,7 +17542,7 @@
                 <a:ea typeface="Pretendard" pitchFamily="34" charset="-122"/>
                 <a:cs typeface="Pretendard" pitchFamily="34" charset="-120"/>
               </a:rPr>
-              <a:t>Clean / minimalism</a:t>
+              <a:t>Clean</a:t>
             </a:r>
             <a:pPr algn="l" indent="0" marL="0">
               <a:lnSpc>
@@ -13339,7 +17559,7 @@
                 <a:ea typeface="Pretendard" pitchFamily="34" charset="-122"/>
                 <a:cs typeface="Pretendard" pitchFamily="34" charset="-120"/>
               </a:rPr>
-              <a:t>  restrained structural baselines.</a:t>
+              <a:t>  restrained default structure.</a:t>
             </a:r>
             <a:endParaRPr lang="en-US" sz="2200" dirty="0"/>
           </a:p>
@@ -13374,7 +17594,7 @@
       </p:sp>
       <p:pic>
         <p:nvPicPr>
-          <p:cNvPr id="18" name="Image 4" descr="article icon from tabler-icons (MIT)">    </p:cNvPr>
+          <p:cNvPr id="18" name="Image 4" descr="chart icon from tabler-icons (MIT)">    </p:cNvPr>
           <p:cNvPicPr>
             <a:picLocks noChangeAspect="1"/>
           </p:cNvPicPr>
@@ -13410,124 +17630,8 @@
         </p:nvSpPr>
         <p:spPr>
           <a:xfrm>
-            <a:off x="1699321" y="3283428"/>
-            <a:ext cx="9255191" cy="839785"/>
-          </a:xfrm>
-          <a:prstGeom prst="rect">
-            <a:avLst/>
-          </a:prstGeom>
-          <a:noFill/>
-          <a:ln/>
-        </p:spPr>
-        <p:txBody>
-          <a:bodyPr wrap="square" lIns="0" tIns="25400" rIns="25400" bIns="0" rtlCol="0" anchor="ctr"/>
-          <a:lstStyle/>
-          <a:p>
-            <a:pPr algn="l" indent="0" marL="0">
-              <a:lnSpc>
-                <a:spcPct val="120000"/>
-              </a:lnSpc>
-              <a:buNone/>
-            </a:pPr>
-            <a:r>
-              <a:rPr lang="en-US" sz="2200" b="1" dirty="0">
-                <a:solidFill>
-                  <a:srgbClr val="2563EB"/>
-                </a:solidFill>
-                <a:latin typeface="Pretendard" pitchFamily="34" charset="0"/>
-                <a:ea typeface="Pretendard" pitchFamily="34" charset="-122"/>
-                <a:cs typeface="Pretendard" pitchFamily="34" charset="-120"/>
-              </a:rPr>
-              <a:t>Executive / technical</a:t>
-            </a:r>
-            <a:pPr algn="l" indent="0" marL="0">
-              <a:lnSpc>
-                <a:spcPct val="120000"/>
-              </a:lnSpc>
-              <a:buNone/>
-            </a:pPr>
-            <a:r>
-              <a:rPr lang="en-US" sz="2200" dirty="0">
-                <a:solidFill>
-                  <a:srgbClr val="111827"/>
-                </a:solidFill>
-                <a:latin typeface="Pretendard" pitchFamily="34" charset="0"/>
-                <a:ea typeface="Pretendard" pitchFamily="34" charset="-122"/>
-                <a:cs typeface="Pretendard" pitchFamily="34" charset="-120"/>
-              </a:rPr>
-              <a:t>  structured operational hierarchy.</a:t>
-            </a:r>
-            <a:endParaRPr lang="en-US" sz="2200" dirty="0"/>
-          </a:p>
-        </p:txBody>
-      </p:sp>
-      <p:sp>
-        <p:nvSpPr>
-          <p:cNvPr id="20" name="Shape 13"/>
-          <p:cNvSpPr/>
-          <p:nvPr/>
-        </p:nvSpPr>
-        <p:spPr>
-          <a:xfrm>
-            <a:off x="1097280" y="4783044"/>
-            <a:ext cx="474025" cy="474025"/>
-          </a:xfrm>
-          <a:prstGeom prst="roundRect">
-            <a:avLst>
-              <a:gd name="adj" fmla="val 7716"/>
-            </a:avLst>
-          </a:prstGeom>
-          <a:solidFill>
-            <a:srgbClr val="F8FAFC"/>
-          </a:solidFill>
-          <a:ln w="12700">
-            <a:solidFill>
-              <a:srgbClr val="E2E8F0"/>
-            </a:solidFill>
-            <a:prstDash val="solid"/>
-          </a:ln>
-        </p:spPr>
-      </p:sp>
-      <p:pic>
-        <p:nvPicPr>
-          <p:cNvPr id="21" name="Image 5" descr="article icon from tabler-icons (MIT)">    </p:cNvPr>
-          <p:cNvPicPr>
-            <a:picLocks noChangeAspect="1"/>
-          </p:cNvPicPr>
-          <p:nvPr/>
-        </p:nvPicPr>
-        <p:blipFill>
-          <a:blip r:embed="rId11">
-            <a:extLst>
-              <a:ext uri="{96DAC541-7B7A-43D3-8B79-37D633B846F1}">
-                <asvg:svgBlip xmlns:asvg="http://schemas.microsoft.com/office/drawing/2016/SVG/main" r:embed="rId12"/>
-              </a:ext>
-            </a:extLst>
-          </a:blip>
-          <a:stretch>
-            <a:fillRect/>
-          </a:stretch>
-        </p:blipFill>
-        <p:spPr>
-          <a:xfrm>
-            <a:off x="1170432" y="4856196"/>
-            <a:ext cx="327721" cy="327721"/>
-          </a:xfrm>
-          <a:prstGeom prst="rect">
-            <a:avLst/>
-          </a:prstGeom>
-        </p:spPr>
-      </p:pic>
-      <p:sp>
-        <p:nvSpPr>
-          <p:cNvPr id="22" name="Text 14"/>
-          <p:cNvSpPr txBox="1"/>
-          <p:nvPr/>
-        </p:nvSpPr>
-        <p:spPr>
-          <a:xfrm>
-            <a:off x="1699321" y="4600164"/>
-            <a:ext cx="9255191" cy="839785"/>
+            <a:off x="1699321" y="3313176"/>
+            <a:ext cx="9255191" cy="780288"/>
           </a:xfrm>
           <a:prstGeom prst="rect">
             <a:avLst/>
@@ -13571,7 +17675,123 @@
                 <a:ea typeface="Pretendard" pitchFamily="34" charset="-122"/>
                 <a:cs typeface="Pretendard" pitchFamily="34" charset="-120"/>
               </a:rPr>
-              <a:t>  warmer page rhythm.</a:t>
+              <a:t>  asymmetric rhythm and publication-like accents.</a:t>
+            </a:r>
+            <a:endParaRPr lang="en-US" sz="2200" dirty="0"/>
+          </a:p>
+        </p:txBody>
+      </p:sp>
+      <p:sp>
+        <p:nvSpPr>
+          <p:cNvPr id="20" name="Shape 13"/>
+          <p:cNvSpPr/>
+          <p:nvPr/>
+        </p:nvSpPr>
+        <p:spPr>
+          <a:xfrm>
+            <a:off x="1097280" y="4783044"/>
+            <a:ext cx="474025" cy="474025"/>
+          </a:xfrm>
+          <a:prstGeom prst="roundRect">
+            <a:avLst>
+              <a:gd name="adj" fmla="val 7716"/>
+            </a:avLst>
+          </a:prstGeom>
+          <a:solidFill>
+            <a:srgbClr val="F8FAFC"/>
+          </a:solidFill>
+          <a:ln w="12700">
+            <a:solidFill>
+              <a:srgbClr val="E2E8F0"/>
+            </a:solidFill>
+            <a:prstDash val="solid"/>
+          </a:ln>
+        </p:spPr>
+      </p:sp>
+      <p:pic>
+        <p:nvPicPr>
+          <p:cNvPr id="21" name="Image 5" descr="article icon from tabler-icons (MIT)">    </p:cNvPr>
+          <p:cNvPicPr>
+            <a:picLocks noChangeAspect="1"/>
+          </p:cNvPicPr>
+          <p:nvPr/>
+        </p:nvPicPr>
+        <p:blipFill>
+          <a:blip r:embed="rId11">
+            <a:extLst>
+              <a:ext uri="{96DAC541-7B7A-43D3-8B79-37D633B846F1}">
+                <asvg:svgBlip xmlns:asvg="http://schemas.microsoft.com/office/drawing/2016/SVG/main" r:embed="rId12"/>
+              </a:ext>
+            </a:extLst>
+          </a:blip>
+          <a:stretch>
+            <a:fillRect/>
+          </a:stretch>
+        </p:blipFill>
+        <p:spPr>
+          <a:xfrm>
+            <a:off x="1170432" y="4856196"/>
+            <a:ext cx="327721" cy="327721"/>
+          </a:xfrm>
+          <a:prstGeom prst="rect">
+            <a:avLst/>
+          </a:prstGeom>
+        </p:spPr>
+      </p:pic>
+      <p:sp>
+        <p:nvSpPr>
+          <p:cNvPr id="22" name="Text 14"/>
+          <p:cNvSpPr txBox="1"/>
+          <p:nvPr/>
+        </p:nvSpPr>
+        <p:spPr>
+          <a:xfrm>
+            <a:off x="1699321" y="4629912"/>
+            <a:ext cx="9255191" cy="780288"/>
+          </a:xfrm>
+          <a:prstGeom prst="rect">
+            <a:avLst/>
+          </a:prstGeom>
+          <a:noFill/>
+          <a:ln/>
+        </p:spPr>
+        <p:txBody>
+          <a:bodyPr wrap="square" lIns="0" tIns="25400" rIns="25400" bIns="0" rtlCol="0" anchor="ctr"/>
+          <a:lstStyle/>
+          <a:p>
+            <a:pPr algn="l" indent="0" marL="0">
+              <a:lnSpc>
+                <a:spcPct val="120000"/>
+              </a:lnSpc>
+              <a:buNone/>
+            </a:pPr>
+            <a:r>
+              <a:rPr lang="en-US" sz="2200" b="1" dirty="0">
+                <a:solidFill>
+                  <a:srgbClr val="2563EB"/>
+                </a:solidFill>
+                <a:latin typeface="Pretendard" pitchFamily="34" charset="0"/>
+                <a:ea typeface="Pretendard" pitchFamily="34" charset="-122"/>
+                <a:cs typeface="Pretendard" pitchFamily="34" charset="-120"/>
+              </a:rPr>
+              <a:t>Minimalism / newmorphism</a:t>
+            </a:r>
+            <a:pPr algn="l" indent="0" marL="0">
+              <a:lnSpc>
+                <a:spcPct val="120000"/>
+              </a:lnSpc>
+              <a:buNone/>
+            </a:pPr>
+            <a:r>
+              <a:rPr lang="en-US" sz="2200" dirty="0">
+                <a:solidFill>
+                  <a:srgbClr val="111827"/>
+                </a:solidFill>
+                <a:latin typeface="Pretendard" pitchFamily="34" charset="0"/>
+                <a:ea typeface="Pretendard" pitchFamily="34" charset="-122"/>
+                <a:cs typeface="Pretendard" pitchFamily="34" charset="-120"/>
+              </a:rPr>
+              <a:t>  sparse rules or soft raised surfaces.</a:t>
             </a:r>
             <a:endParaRPr lang="en-US" sz="2200" dirty="0"/>
           </a:p>
@@ -13585,9 +17805,9 @@
 </p:sld>
 </file>
 
-<file path=ppt/slides/slide7.xml><?xml version="1.0" encoding="utf-8"?>
+<file path=ppt/slides/slide8.xml><?xml version="1.0" encoding="utf-8"?>
 <p:sld xmlns:a="http://schemas.openxmlformats.org/drawingml/2006/main" xmlns:r="http://schemas.openxmlformats.org/officeDocument/2006/relationships" xmlns:p="http://schemas.openxmlformats.org/presentationml/2006/main">
-  <p:cSld name="Slide 7">
+  <p:cSld name="Slide 8">
     <p:bg>
       <p:bgPr>
         <a:solidFill>
@@ -13726,7 +17946,7 @@
                 <a:ea typeface="Pretendard" pitchFamily="34" charset="-122"/>
                 <a:cs typeface="Pretendard" pitchFamily="34" charset="-120"/>
               </a:rPr>
-              <a:t>Style Families (Cont. 2/2)</a:t>
+              <a:t>Pruned Style Families (Cont. 2/2)</a:t>
             </a:r>
             <a:endParaRPr lang="en-US" sz="3400" dirty="0"/>
           </a:p>
@@ -13741,65 +17961,6 @@
         <p:spPr>
           <a:xfrm>
             <a:off x="896112" y="1664208"/>
-            <a:ext cx="4791456" cy="4169664"/>
-          </a:xfrm>
-          <a:prstGeom prst="rect">
-            <a:avLst/>
-          </a:prstGeom>
-          <a:noFill/>
-          <a:ln/>
-        </p:spPr>
-        <p:txBody>
-          <a:bodyPr wrap="square" lIns="0" tIns="25400" rIns="25400" bIns="0" rtlCol="0" anchor="t"/>
-          <a:lstStyle/>
-          <a:p>
-            <a:pPr algn="l" indent="0" marL="0">
-              <a:lnSpc>
-                <a:spcPct val="120000"/>
-              </a:lnSpc>
-              <a:buNone/>
-            </a:pPr>
-            <a:r>
-              <a:rPr lang="en-US" sz="2200" b="1" dirty="0">
-                <a:solidFill>
-                  <a:srgbClr val="2563EB"/>
-                </a:solidFill>
-                <a:latin typeface="Pretendard" pitchFamily="34" charset="0"/>
-                <a:ea typeface="Pretendard" pitchFamily="34" charset="-122"/>
-                <a:cs typeface="Pretendard" pitchFamily="34" charset="-120"/>
-              </a:rPr>
-              <a:t>- Minimalism / newmorphism</a:t>
-            </a:r>
-            <a:pPr algn="l" indent="0" marL="0">
-              <a:lnSpc>
-                <a:spcPct val="120000"/>
-              </a:lnSpc>
-              <a:buNone/>
-            </a:pPr>
-            <a:r>
-              <a:rPr lang="en-US" sz="2200" dirty="0">
-                <a:solidFill>
-                  <a:srgbClr val="111827"/>
-                </a:solidFill>
-                <a:latin typeface="Pretendard" pitchFamily="34" charset="0"/>
-                <a:ea typeface="Pretendard" pitchFamily="34" charset="-122"/>
-                <a:cs typeface="Pretendard" pitchFamily="34" charset="-120"/>
-              </a:rPr>
-              <a:t>  sparse or softly raised surfaces.</a:t>
-            </a:r>
-            <a:endParaRPr lang="en-US" sz="2200" dirty="0"/>
-          </a:p>
-        </p:txBody>
-      </p:sp>
-      <p:sp>
-        <p:nvSpPr>
-          <p:cNvPr id="7" name="Text 5"/>
-          <p:cNvSpPr txBox="1"/>
-          <p:nvPr/>
-        </p:nvSpPr>
-        <p:spPr>
-          <a:xfrm>
-            <a:off x="6473952" y="1664208"/>
             <a:ext cx="4791456" cy="4169664"/>
           </a:xfrm>
           <a:prstGeom prst="rect">
@@ -13844,7 +18005,66 @@
                 <a:ea typeface="Pretendard" pitchFamily="34" charset="-122"/>
                 <a:cs typeface="Pretendard" pitchFamily="34" charset="-120"/>
               </a:rPr>
-              <a:t>  distinct surface and background grammar.</a:t>
+              <a:t>  translucent surfaces, construction lines, or metric rails.</a:t>
+            </a:r>
+            <a:endParaRPr lang="en-US" sz="2200" dirty="0"/>
+          </a:p>
+        </p:txBody>
+      </p:sp>
+      <p:sp>
+        <p:nvSpPr>
+          <p:cNvPr id="7" name="Text 5"/>
+          <p:cNvSpPr txBox="1"/>
+          <p:nvPr/>
+        </p:nvSpPr>
+        <p:spPr>
+          <a:xfrm>
+            <a:off x="6473952" y="1664208"/>
+            <a:ext cx="4791456" cy="4169664"/>
+          </a:xfrm>
+          <a:prstGeom prst="rect">
+            <a:avLst/>
+          </a:prstGeom>
+          <a:noFill/>
+          <a:ln/>
+        </p:spPr>
+        <p:txBody>
+          <a:bodyPr wrap="square" lIns="0" tIns="25400" rIns="25400" bIns="0" rtlCol="0" anchor="t"/>
+          <a:lstStyle/>
+          <a:p>
+            <a:pPr algn="l" indent="0" marL="0">
+              <a:lnSpc>
+                <a:spcPct val="120000"/>
+              </a:lnSpc>
+              <a:buNone/>
+            </a:pPr>
+            <a:r>
+              <a:rPr lang="en-US" sz="2200" b="1" dirty="0">
+                <a:solidFill>
+                  <a:srgbClr val="2563EB"/>
+                </a:solidFill>
+                <a:latin typeface="Pretendard" pitchFamily="34" charset="0"/>
+                <a:ea typeface="Pretendard" pitchFamily="34" charset="-122"/>
+                <a:cs typeface="Pretendard" pitchFamily="34" charset="-120"/>
+              </a:rPr>
+              <a:t>- Pruning rule</a:t>
+            </a:r>
+            <a:pPr algn="l" indent="0" marL="0">
+              <a:lnSpc>
+                <a:spcPct val="120000"/>
+              </a:lnSpc>
+              <a:buNone/>
+            </a:pPr>
+            <a:r>
+              <a:rPr lang="en-US" sz="2200" dirty="0">
+                <a:solidFill>
+                  <a:srgbClr val="111827"/>
+                </a:solidFill>
+                <a:latin typeface="Pretendard" pitchFamily="34" charset="0"/>
+                <a:ea typeface="Pretendard" pitchFamily="34" charset="-122"/>
+                <a:cs typeface="Pretendard" pitchFamily="34" charset="-120"/>
+              </a:rPr>
+              <a:t>  preview excludes styles that only change palette or background.</a:t>
             </a:r>
             <a:endParaRPr lang="en-US" sz="2200" dirty="0"/>
           </a:p>
@@ -13858,9 +18078,9 @@
 </p:sld>
 </file>
 
-<file path=ppt/slides/slide8.xml><?xml version="1.0" encoding="utf-8"?>
+<file path=ppt/slides/slide9.xml><?xml version="1.0" encoding="utf-8"?>
 <p:sld xmlns:a="http://schemas.openxmlformats.org/drawingml/2006/main" xmlns:r="http://schemas.openxmlformats.org/officeDocument/2006/relationships" xmlns:p="http://schemas.openxmlformats.org/presentationml/2006/main">
-  <p:cSld name="Slide 8">
+  <p:cSld name="Slide 9">
     <p:bg>
       <p:bgPr>
         <a:solidFill>
@@ -14388,8 +18608,8 @@
         </p:nvSpPr>
         <p:spPr>
           <a:xfrm>
-            <a:off x="1689354" y="1627632"/>
-            <a:ext cx="3961638" cy="1591056"/>
+            <a:off x="1689354" y="2033016"/>
+            <a:ext cx="3961638" cy="780288"/>
           </a:xfrm>
           <a:prstGeom prst="rect">
             <a:avLst/>
@@ -14504,8 +18724,8 @@
         </p:nvSpPr>
         <p:spPr>
           <a:xfrm>
-            <a:off x="7175754" y="1627632"/>
-            <a:ext cx="3961638" cy="1591056"/>
+            <a:off x="7175754" y="1865376"/>
+            <a:ext cx="3961638" cy="1115568"/>
           </a:xfrm>
           <a:prstGeom prst="rect">
             <a:avLst/>
@@ -14620,8 +18840,8 @@
         </p:nvSpPr>
         <p:spPr>
           <a:xfrm>
-            <a:off x="1689354" y="3913632"/>
-            <a:ext cx="3961638" cy="1591056"/>
+            <a:off x="1689354" y="4151376"/>
+            <a:ext cx="3961638" cy="1115568"/>
           </a:xfrm>
           <a:prstGeom prst="rect">
             <a:avLst/>
@@ -14736,8 +18956,8 @@
         </p:nvSpPr>
         <p:spPr>
           <a:xfrm>
-            <a:off x="7175754" y="3913632"/>
-            <a:ext cx="3961638" cy="1591056"/>
+            <a:off x="7175754" y="4151376"/>
+            <a:ext cx="3961638" cy="1115568"/>
           </a:xfrm>
           <a:prstGeom prst="rect">
             <a:avLst/>
@@ -14784,1283 +19004,6 @@
               <a:t>  bold and italic remain editable.</a:t>
             </a:r>
             <a:endParaRPr lang="en-US" sz="2200" dirty="0"/>
-          </a:p>
-        </p:txBody>
-      </p:sp>
-    </p:spTree>
-  </p:cSld>
-  <p:clrMapOvr>
-    <a:masterClrMapping/>
-  </p:clrMapOvr>
-</p:sld>
-</file>
-
-<file path=ppt/slides/slide9.xml><?xml version="1.0" encoding="utf-8"?>
-<p:sld xmlns:a="http://schemas.openxmlformats.org/drawingml/2006/main" xmlns:r="http://schemas.openxmlformats.org/officeDocument/2006/relationships" xmlns:p="http://schemas.openxmlformats.org/presentationml/2006/main">
-  <p:cSld name="Slide 9">
-    <p:bg>
-      <p:bgPr>
-        <a:solidFill>
-          <a:srgbClr val="F8FAFC"/>
-        </a:solidFill>
-      </p:bgPr>
-    </p:bg>
-    <p:spTree>
-      <p:nvGrpSpPr>
-        <p:cNvPr id="1" name=""/>
-        <p:cNvGrpSpPr/>
-        <p:nvPr/>
-      </p:nvGrpSpPr>
-      <p:grpSpPr>
-        <a:xfrm>
-          <a:off x="0" y="0"/>
-          <a:ext cx="0" cy="0"/>
-          <a:chOff x="0" y="0"/>
-          <a:chExt cx="0" cy="0"/>
-        </a:xfrm>
-      </p:grpSpPr>
-      <p:sp>
-        <p:nvSpPr>
-          <p:cNvPr id="2" name="Shape 0"/>
-          <p:cNvSpPr/>
-          <p:nvPr/>
-        </p:nvSpPr>
-        <p:spPr>
-          <a:xfrm>
-            <a:off x="731520" y="1207008"/>
-            <a:ext cx="1325880" cy="54864"/>
-          </a:xfrm>
-          <a:prstGeom prst="rect">
-            <a:avLst/>
-          </a:prstGeom>
-          <a:solidFill>
-            <a:srgbClr val="2563EB"/>
-          </a:solidFill>
-          <a:ln w="12700">
-            <a:solidFill>
-              <a:srgbClr val="2563EB">
-                <a:alpha val="0"/>
-              </a:srgbClr>
-            </a:solidFill>
-            <a:prstDash val="solid"/>
-          </a:ln>
-        </p:spPr>
-      </p:sp>
-      <p:sp>
-        <p:nvSpPr>
-          <p:cNvPr id="3" name="Text 1"/>
-          <p:cNvSpPr txBox="1"/>
-          <p:nvPr/>
-        </p:nvSpPr>
-        <p:spPr>
-          <a:xfrm>
-            <a:off x="731520" y="457200"/>
-            <a:ext cx="10698480" cy="731520"/>
-          </a:xfrm>
-          <a:prstGeom prst="rect">
-            <a:avLst/>
-          </a:prstGeom>
-          <a:noFill/>
-          <a:ln/>
-        </p:spPr>
-        <p:txBody>
-          <a:bodyPr wrap="square" lIns="0" tIns="0" rIns="0" bIns="0" rtlCol="0" anchor="ctr"/>
-          <a:lstStyle/>
-          <a:p>
-            <a:pPr algn="ctr" indent="0" marL="0">
-              <a:lnSpc>
-                <a:spcPct val="120000"/>
-              </a:lnSpc>
-              <a:buNone/>
-            </a:pPr>
-            <a:r>
-              <a:rPr lang="en-US" sz="3400" b="1" dirty="0">
-                <a:solidFill>
-                  <a:srgbClr val="111827"/>
-                </a:solidFill>
-                <a:latin typeface="Pretendard" pitchFamily="34" charset="0"/>
-                <a:ea typeface="Pretendard" pitchFamily="34" charset="-122"/>
-                <a:cs typeface="Pretendard" pitchFamily="34" charset="-120"/>
-              </a:rPr>
-              <a:t>Pipeline Diagram</a:t>
-            </a:r>
-            <a:endParaRPr lang="en-US" sz="3400" dirty="0"/>
-          </a:p>
-        </p:txBody>
-      </p:sp>
-      <p:sp>
-        <p:nvSpPr>
-          <p:cNvPr id="4" name="Shape 2"/>
-          <p:cNvSpPr/>
-          <p:nvPr/>
-        </p:nvSpPr>
-        <p:spPr>
-          <a:xfrm>
-            <a:off x="4002024" y="3095244"/>
-            <a:ext cx="457200" cy="0"/>
-          </a:xfrm>
-          <a:prstGeom prst="line">
-            <a:avLst/>
-          </a:prstGeom>
-          <a:noFill/>
-          <a:ln w="12700">
-            <a:solidFill>
-              <a:srgbClr val="2563EB"/>
-            </a:solidFill>
-            <a:prstDash val="solid"/>
-            <a:tailEnd type="triangle"/>
-          </a:ln>
-        </p:spPr>
-      </p:sp>
-      <p:sp>
-        <p:nvSpPr>
-          <p:cNvPr id="5" name="Shape 3"/>
-          <p:cNvSpPr/>
-          <p:nvPr/>
-        </p:nvSpPr>
-        <p:spPr>
-          <a:xfrm>
-            <a:off x="7748016" y="3095244"/>
-            <a:ext cx="457200" cy="0"/>
-          </a:xfrm>
-          <a:prstGeom prst="line">
-            <a:avLst/>
-          </a:prstGeom>
-          <a:noFill/>
-          <a:ln w="12700">
-            <a:solidFill>
-              <a:srgbClr val="2563EB"/>
-            </a:solidFill>
-            <a:prstDash val="solid"/>
-            <a:tailEnd type="triangle"/>
-          </a:ln>
-        </p:spPr>
-      </p:sp>
-      <p:sp>
-        <p:nvSpPr>
-          <p:cNvPr id="6" name="Shape 4"/>
-          <p:cNvSpPr/>
-          <p:nvPr/>
-        </p:nvSpPr>
-        <p:spPr>
-          <a:xfrm>
-            <a:off x="9849612" y="3627791"/>
-            <a:ext cx="0" cy="416235"/>
-          </a:xfrm>
-          <a:prstGeom prst="line">
-            <a:avLst/>
-          </a:prstGeom>
-          <a:noFill/>
-          <a:ln w="12700">
-            <a:solidFill>
-              <a:srgbClr val="2563EB"/>
-            </a:solidFill>
-            <a:prstDash val="solid"/>
-            <a:tailEnd type="triangle"/>
-          </a:ln>
-        </p:spPr>
-      </p:sp>
-      <p:sp>
-        <p:nvSpPr>
-          <p:cNvPr id="7" name="Shape 5"/>
-          <p:cNvSpPr/>
-          <p:nvPr/>
-        </p:nvSpPr>
-        <p:spPr>
-          <a:xfrm>
-            <a:off x="7748016" y="4576572"/>
-            <a:ext cx="457200" cy="0"/>
-          </a:xfrm>
-          <a:prstGeom prst="line">
-            <a:avLst/>
-          </a:prstGeom>
-          <a:noFill/>
-          <a:ln w="12700">
-            <a:solidFill>
-              <a:srgbClr val="2563EB"/>
-            </a:solidFill>
-            <a:prstDash val="solid"/>
-            <a:headEnd type="triangle"/>
-          </a:ln>
-        </p:spPr>
-      </p:sp>
-      <p:sp>
-        <p:nvSpPr>
-          <p:cNvPr id="8" name="Shape 6"/>
-          <p:cNvSpPr/>
-          <p:nvPr/>
-        </p:nvSpPr>
-        <p:spPr>
-          <a:xfrm>
-            <a:off x="4002024" y="4576572"/>
-            <a:ext cx="457200" cy="0"/>
-          </a:xfrm>
-          <a:prstGeom prst="line">
-            <a:avLst/>
-          </a:prstGeom>
-          <a:noFill/>
-          <a:ln w="12700">
-            <a:solidFill>
-              <a:srgbClr val="2563EB"/>
-            </a:solidFill>
-            <a:prstDash val="solid"/>
-            <a:headEnd type="triangle"/>
-          </a:ln>
-        </p:spPr>
-      </p:sp>
-      <p:sp>
-        <p:nvSpPr>
-          <p:cNvPr id="9" name="Shape 7"/>
-          <p:cNvSpPr/>
-          <p:nvPr/>
-        </p:nvSpPr>
-        <p:spPr>
-          <a:xfrm>
-            <a:off x="640080" y="2510028"/>
-            <a:ext cx="3435096" cy="1170432"/>
-          </a:xfrm>
-          <a:prstGeom prst="roundRect">
-            <a:avLst>
-              <a:gd name="adj" fmla="val 4688"/>
-            </a:avLst>
-          </a:prstGeom>
-          <a:solidFill>
-            <a:srgbClr val="FFFFFF"/>
-          </a:solidFill>
-          <a:ln w="12700">
-            <a:solidFill>
-              <a:srgbClr val="2563EB"/>
-            </a:solidFill>
-            <a:prstDash val="solid"/>
-          </a:ln>
-          <a:effectLst>
-            <a:outerShdw sx="100000" sy="100000" kx="0" ky="0" algn="bl" rotWithShape="0" blurRad="12700" dist="50800" dir="2700000">
-              <a:srgbClr val="000000">
-                <a:alpha val="12000"/>
-              </a:srgbClr>
-            </a:outerShdw>
-          </a:effectLst>
-        </p:spPr>
-      </p:sp>
-      <p:sp>
-        <p:nvSpPr>
-          <p:cNvPr id="10" name="Shape 8"/>
-          <p:cNvSpPr/>
-          <p:nvPr/>
-        </p:nvSpPr>
-        <p:spPr>
-          <a:xfrm>
-            <a:off x="640080" y="2510028"/>
-            <a:ext cx="3435096" cy="109728"/>
-          </a:xfrm>
-          <a:prstGeom prst="rect">
-            <a:avLst/>
-          </a:prstGeom>
-          <a:solidFill>
-            <a:srgbClr val="2563EB"/>
-          </a:solidFill>
-          <a:ln w="12700">
-            <a:solidFill>
-              <a:srgbClr val="2563EB">
-                <a:alpha val="0"/>
-              </a:srgbClr>
-            </a:solidFill>
-            <a:prstDash val="solid"/>
-          </a:ln>
-        </p:spPr>
-      </p:sp>
-      <p:sp>
-        <p:nvSpPr>
-          <p:cNvPr id="11" name="Shape 9"/>
-          <p:cNvSpPr/>
-          <p:nvPr/>
-        </p:nvSpPr>
-        <p:spPr>
-          <a:xfrm>
-            <a:off x="804672" y="2907975"/>
-            <a:ext cx="374538" cy="374538"/>
-          </a:xfrm>
-          <a:prstGeom prst="ellipse">
-            <a:avLst/>
-          </a:prstGeom>
-          <a:solidFill>
-            <a:srgbClr val="2563EB"/>
-          </a:solidFill>
-          <a:ln w="12700">
-            <a:solidFill>
-              <a:srgbClr val="2563EB">
-                <a:alpha val="0"/>
-              </a:srgbClr>
-            </a:solidFill>
-            <a:prstDash val="solid"/>
-          </a:ln>
-        </p:spPr>
-      </p:sp>
-      <p:sp>
-        <p:nvSpPr>
-          <p:cNvPr id="12" name="Text 10"/>
-          <p:cNvSpPr txBox="1"/>
-          <p:nvPr/>
-        </p:nvSpPr>
-        <p:spPr>
-          <a:xfrm>
-            <a:off x="804672" y="2907975"/>
-            <a:ext cx="374538" cy="374538"/>
-          </a:xfrm>
-          <a:prstGeom prst="rect">
-            <a:avLst/>
-          </a:prstGeom>
-          <a:noFill/>
-          <a:ln/>
-        </p:spPr>
-        <p:txBody>
-          <a:bodyPr wrap="square" lIns="0" tIns="0" rIns="0" bIns="0" rtlCol="0" anchor="ctr">
-            <a:normAutofit/>
-          </a:bodyPr>
-          <a:lstStyle/>
-          <a:p>
-            <a:pPr algn="ctr" indent="0" marL="0">
-              <a:lnSpc>
-                <a:spcPct val="120000"/>
-              </a:lnSpc>
-              <a:buNone/>
-            </a:pPr>
-            <a:r>
-              <a:rPr lang="en-US" sz="1500" b="1" dirty="0">
-                <a:solidFill>
-                  <a:srgbClr val="F8FAFC"/>
-                </a:solidFill>
-                <a:latin typeface="Pretendard" pitchFamily="34" charset="0"/>
-                <a:ea typeface="Pretendard" pitchFamily="34" charset="-122"/>
-                <a:cs typeface="Pretendard" pitchFamily="34" charset="-120"/>
-              </a:rPr>
-              <a:t>1</a:t>
-            </a:r>
-            <a:endParaRPr lang="en-US" sz="1500" dirty="0"/>
-          </a:p>
-        </p:txBody>
-      </p:sp>
-      <p:sp>
-        <p:nvSpPr>
-          <p:cNvPr id="13" name="Text 11"/>
-          <p:cNvSpPr txBox="1"/>
-          <p:nvPr/>
-        </p:nvSpPr>
-        <p:spPr>
-          <a:xfrm>
-            <a:off x="1325514" y="2638044"/>
-            <a:ext cx="2585070" cy="914400"/>
-          </a:xfrm>
-          <a:prstGeom prst="rect">
-            <a:avLst/>
-          </a:prstGeom>
-          <a:noFill/>
-          <a:ln/>
-        </p:spPr>
-        <p:txBody>
-          <a:bodyPr wrap="square" lIns="0" tIns="25400" rIns="25400" bIns="0" rtlCol="0" anchor="ctr">
-            <a:normAutofit/>
-          </a:bodyPr>
-          <a:lstStyle/>
-          <a:p>
-            <a:pPr algn="l" indent="0" marL="0">
-              <a:lnSpc>
-                <a:spcPct val="92000"/>
-              </a:lnSpc>
-              <a:buNone/>
-            </a:pPr>
-            <a:r>
-              <a:rPr lang="en-US" sz="1600" dirty="0">
-                <a:solidFill>
-                  <a:srgbClr val="111827"/>
-                </a:solidFill>
-                <a:latin typeface="Pretendard" pitchFamily="34" charset="0"/>
-                <a:ea typeface="Pretendard" pitchFamily="34" charset="-122"/>
-                <a:cs typeface="Pretendard" pitchFamily="34" charset="-120"/>
-              </a:rPr>
-              <a:t>Markdown source</a:t>
-            </a:r>
-            <a:endParaRPr lang="en-US" sz="1600" dirty="0"/>
-          </a:p>
-        </p:txBody>
-      </p:sp>
-      <p:sp>
-        <p:nvSpPr>
-          <p:cNvPr id="14" name="Shape 12"/>
-          <p:cNvSpPr/>
-          <p:nvPr/>
-        </p:nvSpPr>
-        <p:spPr>
-          <a:xfrm>
-            <a:off x="4386072" y="2510028"/>
-            <a:ext cx="3435096" cy="1170432"/>
-          </a:xfrm>
-          <a:prstGeom prst="roundRect">
-            <a:avLst>
-              <a:gd name="adj" fmla="val 4688"/>
-            </a:avLst>
-          </a:prstGeom>
-          <a:solidFill>
-            <a:srgbClr val="FFFFFF"/>
-          </a:solidFill>
-          <a:ln w="12700">
-            <a:solidFill>
-              <a:srgbClr val="2563EB"/>
-            </a:solidFill>
-            <a:prstDash val="solid"/>
-          </a:ln>
-          <a:effectLst>
-            <a:outerShdw sx="100000" sy="100000" kx="0" ky="0" algn="bl" rotWithShape="0" blurRad="12700" dist="50800" dir="2700000">
-              <a:srgbClr val="000000">
-                <a:alpha val="12000"/>
-              </a:srgbClr>
-            </a:outerShdw>
-          </a:effectLst>
-        </p:spPr>
-      </p:sp>
-      <p:sp>
-        <p:nvSpPr>
-          <p:cNvPr id="15" name="Shape 13"/>
-          <p:cNvSpPr/>
-          <p:nvPr/>
-        </p:nvSpPr>
-        <p:spPr>
-          <a:xfrm>
-            <a:off x="4386072" y="2510028"/>
-            <a:ext cx="3435096" cy="109728"/>
-          </a:xfrm>
-          <a:prstGeom prst="rect">
-            <a:avLst/>
-          </a:prstGeom>
-          <a:solidFill>
-            <a:srgbClr val="2563EB"/>
-          </a:solidFill>
-          <a:ln w="12700">
-            <a:solidFill>
-              <a:srgbClr val="2563EB">
-                <a:alpha val="0"/>
-              </a:srgbClr>
-            </a:solidFill>
-            <a:prstDash val="solid"/>
-          </a:ln>
-        </p:spPr>
-      </p:sp>
-      <p:sp>
-        <p:nvSpPr>
-          <p:cNvPr id="16" name="Shape 14"/>
-          <p:cNvSpPr/>
-          <p:nvPr/>
-        </p:nvSpPr>
-        <p:spPr>
-          <a:xfrm>
-            <a:off x="4550664" y="2907975"/>
-            <a:ext cx="374538" cy="374538"/>
-          </a:xfrm>
-          <a:prstGeom prst="ellipse">
-            <a:avLst/>
-          </a:prstGeom>
-          <a:solidFill>
-            <a:srgbClr val="2563EB"/>
-          </a:solidFill>
-          <a:ln w="12700">
-            <a:solidFill>
-              <a:srgbClr val="2563EB">
-                <a:alpha val="0"/>
-              </a:srgbClr>
-            </a:solidFill>
-            <a:prstDash val="solid"/>
-          </a:ln>
-        </p:spPr>
-      </p:sp>
-      <p:sp>
-        <p:nvSpPr>
-          <p:cNvPr id="17" name="Text 15"/>
-          <p:cNvSpPr txBox="1"/>
-          <p:nvPr/>
-        </p:nvSpPr>
-        <p:spPr>
-          <a:xfrm>
-            <a:off x="4550664" y="2907975"/>
-            <a:ext cx="374538" cy="374538"/>
-          </a:xfrm>
-          <a:prstGeom prst="rect">
-            <a:avLst/>
-          </a:prstGeom>
-          <a:noFill/>
-          <a:ln/>
-        </p:spPr>
-        <p:txBody>
-          <a:bodyPr wrap="square" lIns="0" tIns="0" rIns="0" bIns="0" rtlCol="0" anchor="ctr">
-            <a:normAutofit/>
-          </a:bodyPr>
-          <a:lstStyle/>
-          <a:p>
-            <a:pPr algn="ctr" indent="0" marL="0">
-              <a:lnSpc>
-                <a:spcPct val="120000"/>
-              </a:lnSpc>
-              <a:buNone/>
-            </a:pPr>
-            <a:r>
-              <a:rPr lang="en-US" sz="1500" b="1" dirty="0">
-                <a:solidFill>
-                  <a:srgbClr val="F8FAFC"/>
-                </a:solidFill>
-                <a:latin typeface="Pretendard" pitchFamily="34" charset="0"/>
-                <a:ea typeface="Pretendard" pitchFamily="34" charset="-122"/>
-                <a:cs typeface="Pretendard" pitchFamily="34" charset="-120"/>
-              </a:rPr>
-              <a:t>2</a:t>
-            </a:r>
-            <a:endParaRPr lang="en-US" sz="1500" dirty="0"/>
-          </a:p>
-        </p:txBody>
-      </p:sp>
-      <p:sp>
-        <p:nvSpPr>
-          <p:cNvPr id="18" name="Text 16"/>
-          <p:cNvSpPr txBox="1"/>
-          <p:nvPr/>
-        </p:nvSpPr>
-        <p:spPr>
-          <a:xfrm>
-            <a:off x="5071506" y="2638044"/>
-            <a:ext cx="2585070" cy="914400"/>
-          </a:xfrm>
-          <a:prstGeom prst="rect">
-            <a:avLst/>
-          </a:prstGeom>
-          <a:noFill/>
-          <a:ln/>
-        </p:spPr>
-        <p:txBody>
-          <a:bodyPr wrap="square" lIns="0" tIns="25400" rIns="25400" bIns="0" rtlCol="0" anchor="ctr">
-            <a:normAutofit/>
-          </a:bodyPr>
-          <a:lstStyle/>
-          <a:p>
-            <a:pPr algn="l" indent="0" marL="0">
-              <a:lnSpc>
-                <a:spcPct val="92000"/>
-              </a:lnSpc>
-              <a:buNone/>
-            </a:pPr>
-            <a:r>
-              <a:rPr lang="en-US" sz="1600" dirty="0">
-                <a:solidFill>
-                  <a:srgbClr val="111827"/>
-                </a:solidFill>
-                <a:latin typeface="Pretendard" pitchFamily="34" charset="0"/>
-                <a:ea typeface="Pretendard" pitchFamily="34" charset="-122"/>
-                <a:cs typeface="Pretendard" pitchFamily="34" charset="-120"/>
-              </a:rPr>
-              <a:t>Parse blocks</a:t>
-            </a:r>
-            <a:endParaRPr lang="en-US" sz="1600" dirty="0"/>
-          </a:p>
-        </p:txBody>
-      </p:sp>
-      <p:sp>
-        <p:nvSpPr>
-          <p:cNvPr id="19" name="Shape 17"/>
-          <p:cNvSpPr/>
-          <p:nvPr/>
-        </p:nvSpPr>
-        <p:spPr>
-          <a:xfrm>
-            <a:off x="8132064" y="2510028"/>
-            <a:ext cx="3435096" cy="1170432"/>
-          </a:xfrm>
-          <a:prstGeom prst="roundRect">
-            <a:avLst>
-              <a:gd name="adj" fmla="val 4688"/>
-            </a:avLst>
-          </a:prstGeom>
-          <a:solidFill>
-            <a:srgbClr val="FFFFFF"/>
-          </a:solidFill>
-          <a:ln w="12700">
-            <a:solidFill>
-              <a:srgbClr val="2563EB"/>
-            </a:solidFill>
-            <a:prstDash val="solid"/>
-          </a:ln>
-          <a:effectLst>
-            <a:outerShdw sx="100000" sy="100000" kx="0" ky="0" algn="bl" rotWithShape="0" blurRad="12700" dist="50800" dir="2700000">
-              <a:srgbClr val="000000">
-                <a:alpha val="12000"/>
-              </a:srgbClr>
-            </a:outerShdw>
-          </a:effectLst>
-        </p:spPr>
-      </p:sp>
-      <p:sp>
-        <p:nvSpPr>
-          <p:cNvPr id="20" name="Shape 18"/>
-          <p:cNvSpPr/>
-          <p:nvPr/>
-        </p:nvSpPr>
-        <p:spPr>
-          <a:xfrm>
-            <a:off x="8132064" y="2510028"/>
-            <a:ext cx="3435096" cy="109728"/>
-          </a:xfrm>
-          <a:prstGeom prst="rect">
-            <a:avLst/>
-          </a:prstGeom>
-          <a:solidFill>
-            <a:srgbClr val="2563EB"/>
-          </a:solidFill>
-          <a:ln w="12700">
-            <a:solidFill>
-              <a:srgbClr val="2563EB">
-                <a:alpha val="0"/>
-              </a:srgbClr>
-            </a:solidFill>
-            <a:prstDash val="solid"/>
-          </a:ln>
-        </p:spPr>
-      </p:sp>
-      <p:sp>
-        <p:nvSpPr>
-          <p:cNvPr id="21" name="Shape 19"/>
-          <p:cNvSpPr/>
-          <p:nvPr/>
-        </p:nvSpPr>
-        <p:spPr>
-          <a:xfrm>
-            <a:off x="8296656" y="2907975"/>
-            <a:ext cx="374538" cy="374538"/>
-          </a:xfrm>
-          <a:prstGeom prst="ellipse">
-            <a:avLst/>
-          </a:prstGeom>
-          <a:solidFill>
-            <a:srgbClr val="2563EB"/>
-          </a:solidFill>
-          <a:ln w="12700">
-            <a:solidFill>
-              <a:srgbClr val="2563EB">
-                <a:alpha val="0"/>
-              </a:srgbClr>
-            </a:solidFill>
-            <a:prstDash val="solid"/>
-          </a:ln>
-        </p:spPr>
-      </p:sp>
-      <p:sp>
-        <p:nvSpPr>
-          <p:cNvPr id="22" name="Text 20"/>
-          <p:cNvSpPr txBox="1"/>
-          <p:nvPr/>
-        </p:nvSpPr>
-        <p:spPr>
-          <a:xfrm>
-            <a:off x="8296656" y="2907975"/>
-            <a:ext cx="374538" cy="374538"/>
-          </a:xfrm>
-          <a:prstGeom prst="rect">
-            <a:avLst/>
-          </a:prstGeom>
-          <a:noFill/>
-          <a:ln/>
-        </p:spPr>
-        <p:txBody>
-          <a:bodyPr wrap="square" lIns="0" tIns="0" rIns="0" bIns="0" rtlCol="0" anchor="ctr">
-            <a:normAutofit/>
-          </a:bodyPr>
-          <a:lstStyle/>
-          <a:p>
-            <a:pPr algn="ctr" indent="0" marL="0">
-              <a:lnSpc>
-                <a:spcPct val="120000"/>
-              </a:lnSpc>
-              <a:buNone/>
-            </a:pPr>
-            <a:r>
-              <a:rPr lang="en-US" sz="1500" b="1" dirty="0">
-                <a:solidFill>
-                  <a:srgbClr val="F8FAFC"/>
-                </a:solidFill>
-                <a:latin typeface="Pretendard" pitchFamily="34" charset="0"/>
-                <a:ea typeface="Pretendard" pitchFamily="34" charset="-122"/>
-                <a:cs typeface="Pretendard" pitchFamily="34" charset="-120"/>
-              </a:rPr>
-              <a:t>3</a:t>
-            </a:r>
-            <a:endParaRPr lang="en-US" sz="1500" dirty="0"/>
-          </a:p>
-        </p:txBody>
-      </p:sp>
-      <p:sp>
-        <p:nvSpPr>
-          <p:cNvPr id="23" name="Text 21"/>
-          <p:cNvSpPr txBox="1"/>
-          <p:nvPr/>
-        </p:nvSpPr>
-        <p:spPr>
-          <a:xfrm>
-            <a:off x="8817498" y="2638044"/>
-            <a:ext cx="2585070" cy="914400"/>
-          </a:xfrm>
-          <a:prstGeom prst="rect">
-            <a:avLst/>
-          </a:prstGeom>
-          <a:noFill/>
-          <a:ln/>
-        </p:spPr>
-        <p:txBody>
-          <a:bodyPr wrap="square" lIns="0" tIns="25400" rIns="25400" bIns="0" rtlCol="0" anchor="ctr">
-            <a:normAutofit/>
-          </a:bodyPr>
-          <a:lstStyle/>
-          <a:p>
-            <a:pPr algn="l" indent="0" marL="0">
-              <a:lnSpc>
-                <a:spcPct val="92000"/>
-              </a:lnSpc>
-              <a:buNone/>
-            </a:pPr>
-            <a:r>
-              <a:rPr lang="en-US" sz="1600" dirty="0">
-                <a:solidFill>
-                  <a:srgbClr val="111827"/>
-                </a:solidFill>
-                <a:latin typeface="Pretendard" pitchFamily="34" charset="0"/>
-                <a:ea typeface="Pretendard" pitchFamily="34" charset="-122"/>
-                <a:cs typeface="Pretendard" pitchFamily="34" charset="-120"/>
-              </a:rPr>
-              <a:t>Split slides</a:t>
-            </a:r>
-            <a:endParaRPr lang="en-US" sz="1600" dirty="0"/>
-          </a:p>
-        </p:txBody>
-      </p:sp>
-      <p:sp>
-        <p:nvSpPr>
-          <p:cNvPr id="24" name="Shape 22"/>
-          <p:cNvSpPr/>
-          <p:nvPr/>
-        </p:nvSpPr>
-        <p:spPr>
-          <a:xfrm>
-            <a:off x="8132064" y="3991356"/>
-            <a:ext cx="3435096" cy="1170432"/>
-          </a:xfrm>
-          <a:prstGeom prst="roundRect">
-            <a:avLst>
-              <a:gd name="adj" fmla="val 4688"/>
-            </a:avLst>
-          </a:prstGeom>
-          <a:solidFill>
-            <a:srgbClr val="FFFFFF"/>
-          </a:solidFill>
-          <a:ln w="12700">
-            <a:solidFill>
-              <a:srgbClr val="2563EB"/>
-            </a:solidFill>
-            <a:prstDash val="solid"/>
-          </a:ln>
-          <a:effectLst>
-            <a:outerShdw sx="100000" sy="100000" kx="0" ky="0" algn="bl" rotWithShape="0" blurRad="12700" dist="50800" dir="2700000">
-              <a:srgbClr val="000000">
-                <a:alpha val="12000"/>
-              </a:srgbClr>
-            </a:outerShdw>
-          </a:effectLst>
-        </p:spPr>
-      </p:sp>
-      <p:sp>
-        <p:nvSpPr>
-          <p:cNvPr id="25" name="Shape 23"/>
-          <p:cNvSpPr/>
-          <p:nvPr/>
-        </p:nvSpPr>
-        <p:spPr>
-          <a:xfrm>
-            <a:off x="8132064" y="3991356"/>
-            <a:ext cx="3435096" cy="109728"/>
-          </a:xfrm>
-          <a:prstGeom prst="rect">
-            <a:avLst/>
-          </a:prstGeom>
-          <a:solidFill>
-            <a:srgbClr val="2563EB"/>
-          </a:solidFill>
-          <a:ln w="12700">
-            <a:solidFill>
-              <a:srgbClr val="2563EB">
-                <a:alpha val="0"/>
-              </a:srgbClr>
-            </a:solidFill>
-            <a:prstDash val="solid"/>
-          </a:ln>
-        </p:spPr>
-      </p:sp>
-      <p:sp>
-        <p:nvSpPr>
-          <p:cNvPr id="26" name="Shape 24"/>
-          <p:cNvSpPr/>
-          <p:nvPr/>
-        </p:nvSpPr>
-        <p:spPr>
-          <a:xfrm>
-            <a:off x="8296656" y="4389303"/>
-            <a:ext cx="374538" cy="374538"/>
-          </a:xfrm>
-          <a:prstGeom prst="ellipse">
-            <a:avLst/>
-          </a:prstGeom>
-          <a:solidFill>
-            <a:srgbClr val="2563EB"/>
-          </a:solidFill>
-          <a:ln w="12700">
-            <a:solidFill>
-              <a:srgbClr val="2563EB">
-                <a:alpha val="0"/>
-              </a:srgbClr>
-            </a:solidFill>
-            <a:prstDash val="solid"/>
-          </a:ln>
-        </p:spPr>
-      </p:sp>
-      <p:sp>
-        <p:nvSpPr>
-          <p:cNvPr id="27" name="Text 25"/>
-          <p:cNvSpPr txBox="1"/>
-          <p:nvPr/>
-        </p:nvSpPr>
-        <p:spPr>
-          <a:xfrm>
-            <a:off x="8296656" y="4389303"/>
-            <a:ext cx="374538" cy="374538"/>
-          </a:xfrm>
-          <a:prstGeom prst="rect">
-            <a:avLst/>
-          </a:prstGeom>
-          <a:noFill/>
-          <a:ln/>
-        </p:spPr>
-        <p:txBody>
-          <a:bodyPr wrap="square" lIns="0" tIns="0" rIns="0" bIns="0" rtlCol="0" anchor="ctr">
-            <a:normAutofit/>
-          </a:bodyPr>
-          <a:lstStyle/>
-          <a:p>
-            <a:pPr algn="ctr" indent="0" marL="0">
-              <a:lnSpc>
-                <a:spcPct val="120000"/>
-              </a:lnSpc>
-              <a:buNone/>
-            </a:pPr>
-            <a:r>
-              <a:rPr lang="en-US" sz="1500" b="1" dirty="0">
-                <a:solidFill>
-                  <a:srgbClr val="F8FAFC"/>
-                </a:solidFill>
-                <a:latin typeface="Pretendard" pitchFamily="34" charset="0"/>
-                <a:ea typeface="Pretendard" pitchFamily="34" charset="-122"/>
-                <a:cs typeface="Pretendard" pitchFamily="34" charset="-120"/>
-              </a:rPr>
-              <a:t>4</a:t>
-            </a:r>
-            <a:endParaRPr lang="en-US" sz="1500" dirty="0"/>
-          </a:p>
-        </p:txBody>
-      </p:sp>
-      <p:sp>
-        <p:nvSpPr>
-          <p:cNvPr id="28" name="Text 26"/>
-          <p:cNvSpPr txBox="1"/>
-          <p:nvPr/>
-        </p:nvSpPr>
-        <p:spPr>
-          <a:xfrm>
-            <a:off x="8817498" y="4119372"/>
-            <a:ext cx="2585070" cy="914400"/>
-          </a:xfrm>
-          <a:prstGeom prst="rect">
-            <a:avLst/>
-          </a:prstGeom>
-          <a:noFill/>
-          <a:ln/>
-        </p:spPr>
-        <p:txBody>
-          <a:bodyPr wrap="square" lIns="0" tIns="25400" rIns="25400" bIns="0" rtlCol="0" anchor="ctr">
-            <a:normAutofit/>
-          </a:bodyPr>
-          <a:lstStyle/>
-          <a:p>
-            <a:pPr algn="l" indent="0" marL="0">
-              <a:lnSpc>
-                <a:spcPct val="92000"/>
-              </a:lnSpc>
-              <a:buNone/>
-            </a:pPr>
-            <a:r>
-              <a:rPr lang="en-US" sz="1600" dirty="0">
-                <a:solidFill>
-                  <a:srgbClr val="111827"/>
-                </a:solidFill>
-                <a:latin typeface="Pretendard" pitchFamily="34" charset="0"/>
-                <a:ea typeface="Pretendard" pitchFamily="34" charset="-122"/>
-                <a:cs typeface="Pretendard" pitchFamily="34" charset="-120"/>
-              </a:rPr>
-              <a:t>Layout objects</a:t>
-            </a:r>
-            <a:endParaRPr lang="en-US" sz="1600" dirty="0"/>
-          </a:p>
-        </p:txBody>
-      </p:sp>
-      <p:sp>
-        <p:nvSpPr>
-          <p:cNvPr id="29" name="Shape 27"/>
-          <p:cNvSpPr/>
-          <p:nvPr/>
-        </p:nvSpPr>
-        <p:spPr>
-          <a:xfrm>
-            <a:off x="4386072" y="3991356"/>
-            <a:ext cx="3435096" cy="1170432"/>
-          </a:xfrm>
-          <a:prstGeom prst="roundRect">
-            <a:avLst>
-              <a:gd name="adj" fmla="val 4688"/>
-            </a:avLst>
-          </a:prstGeom>
-          <a:solidFill>
-            <a:srgbClr val="FFFFFF"/>
-          </a:solidFill>
-          <a:ln w="12700">
-            <a:solidFill>
-              <a:srgbClr val="2563EB"/>
-            </a:solidFill>
-            <a:prstDash val="solid"/>
-          </a:ln>
-          <a:effectLst>
-            <a:outerShdw sx="100000" sy="100000" kx="0" ky="0" algn="bl" rotWithShape="0" blurRad="12700" dist="50800" dir="2700000">
-              <a:srgbClr val="000000">
-                <a:alpha val="12000"/>
-              </a:srgbClr>
-            </a:outerShdw>
-          </a:effectLst>
-        </p:spPr>
-      </p:sp>
-      <p:sp>
-        <p:nvSpPr>
-          <p:cNvPr id="30" name="Shape 28"/>
-          <p:cNvSpPr/>
-          <p:nvPr/>
-        </p:nvSpPr>
-        <p:spPr>
-          <a:xfrm>
-            <a:off x="4386072" y="3991356"/>
-            <a:ext cx="3435096" cy="109728"/>
-          </a:xfrm>
-          <a:prstGeom prst="rect">
-            <a:avLst/>
-          </a:prstGeom>
-          <a:solidFill>
-            <a:srgbClr val="2563EB"/>
-          </a:solidFill>
-          <a:ln w="12700">
-            <a:solidFill>
-              <a:srgbClr val="2563EB">
-                <a:alpha val="0"/>
-              </a:srgbClr>
-            </a:solidFill>
-            <a:prstDash val="solid"/>
-          </a:ln>
-        </p:spPr>
-      </p:sp>
-      <p:sp>
-        <p:nvSpPr>
-          <p:cNvPr id="31" name="Shape 29"/>
-          <p:cNvSpPr/>
-          <p:nvPr/>
-        </p:nvSpPr>
-        <p:spPr>
-          <a:xfrm>
-            <a:off x="4550664" y="4389303"/>
-            <a:ext cx="374538" cy="374538"/>
-          </a:xfrm>
-          <a:prstGeom prst="ellipse">
-            <a:avLst/>
-          </a:prstGeom>
-          <a:solidFill>
-            <a:srgbClr val="2563EB"/>
-          </a:solidFill>
-          <a:ln w="12700">
-            <a:solidFill>
-              <a:srgbClr val="2563EB">
-                <a:alpha val="0"/>
-              </a:srgbClr>
-            </a:solidFill>
-            <a:prstDash val="solid"/>
-          </a:ln>
-        </p:spPr>
-      </p:sp>
-      <p:sp>
-        <p:nvSpPr>
-          <p:cNvPr id="32" name="Text 30"/>
-          <p:cNvSpPr txBox="1"/>
-          <p:nvPr/>
-        </p:nvSpPr>
-        <p:spPr>
-          <a:xfrm>
-            <a:off x="4550664" y="4389303"/>
-            <a:ext cx="374538" cy="374538"/>
-          </a:xfrm>
-          <a:prstGeom prst="rect">
-            <a:avLst/>
-          </a:prstGeom>
-          <a:noFill/>
-          <a:ln/>
-        </p:spPr>
-        <p:txBody>
-          <a:bodyPr wrap="square" lIns="0" tIns="0" rIns="0" bIns="0" rtlCol="0" anchor="ctr">
-            <a:normAutofit/>
-          </a:bodyPr>
-          <a:lstStyle/>
-          <a:p>
-            <a:pPr algn="ctr" indent="0" marL="0">
-              <a:lnSpc>
-                <a:spcPct val="120000"/>
-              </a:lnSpc>
-              <a:buNone/>
-            </a:pPr>
-            <a:r>
-              <a:rPr lang="en-US" sz="1500" b="1" dirty="0">
-                <a:solidFill>
-                  <a:srgbClr val="F8FAFC"/>
-                </a:solidFill>
-                <a:latin typeface="Pretendard" pitchFamily="34" charset="0"/>
-                <a:ea typeface="Pretendard" pitchFamily="34" charset="-122"/>
-                <a:cs typeface="Pretendard" pitchFamily="34" charset="-120"/>
-              </a:rPr>
-              <a:t>5</a:t>
-            </a:r>
-            <a:endParaRPr lang="en-US" sz="1500" dirty="0"/>
-          </a:p>
-        </p:txBody>
-      </p:sp>
-      <p:sp>
-        <p:nvSpPr>
-          <p:cNvPr id="33" name="Text 31"/>
-          <p:cNvSpPr txBox="1"/>
-          <p:nvPr/>
-        </p:nvSpPr>
-        <p:spPr>
-          <a:xfrm>
-            <a:off x="5071506" y="4119372"/>
-            <a:ext cx="2585070" cy="914400"/>
-          </a:xfrm>
-          <a:prstGeom prst="rect">
-            <a:avLst/>
-          </a:prstGeom>
-          <a:noFill/>
-          <a:ln/>
-        </p:spPr>
-        <p:txBody>
-          <a:bodyPr wrap="square" lIns="0" tIns="25400" rIns="25400" bIns="0" rtlCol="0" anchor="ctr">
-            <a:normAutofit/>
-          </a:bodyPr>
-          <a:lstStyle/>
-          <a:p>
-            <a:pPr algn="l" indent="0" marL="0">
-              <a:lnSpc>
-                <a:spcPct val="92000"/>
-              </a:lnSpc>
-              <a:buNone/>
-            </a:pPr>
-            <a:r>
-              <a:rPr lang="en-US" sz="1600" dirty="0">
-                <a:solidFill>
-                  <a:srgbClr val="111827"/>
-                </a:solidFill>
-                <a:latin typeface="Pretendard" pitchFamily="34" charset="0"/>
-                <a:ea typeface="Pretendard" pitchFamily="34" charset="-122"/>
-                <a:cs typeface="Pretendard" pitchFamily="34" charset="-120"/>
-              </a:rPr>
-              <a:t>Validate overflow</a:t>
-            </a:r>
-            <a:endParaRPr lang="en-US" sz="1600" dirty="0"/>
-          </a:p>
-        </p:txBody>
-      </p:sp>
-      <p:sp>
-        <p:nvSpPr>
-          <p:cNvPr id="34" name="Shape 32"/>
-          <p:cNvSpPr/>
-          <p:nvPr/>
-        </p:nvSpPr>
-        <p:spPr>
-          <a:xfrm>
-            <a:off x="640080" y="3991356"/>
-            <a:ext cx="3435096" cy="1170432"/>
-          </a:xfrm>
-          <a:prstGeom prst="roundRect">
-            <a:avLst>
-              <a:gd name="adj" fmla="val 4688"/>
-            </a:avLst>
-          </a:prstGeom>
-          <a:solidFill>
-            <a:srgbClr val="FFFFFF"/>
-          </a:solidFill>
-          <a:ln w="12700">
-            <a:solidFill>
-              <a:srgbClr val="2563EB"/>
-            </a:solidFill>
-            <a:prstDash val="solid"/>
-          </a:ln>
-          <a:effectLst>
-            <a:outerShdw sx="100000" sy="100000" kx="0" ky="0" algn="bl" rotWithShape="0" blurRad="12700" dist="50800" dir="2700000">
-              <a:srgbClr val="000000">
-                <a:alpha val="12000"/>
-              </a:srgbClr>
-            </a:outerShdw>
-          </a:effectLst>
-        </p:spPr>
-      </p:sp>
-      <p:sp>
-        <p:nvSpPr>
-          <p:cNvPr id="35" name="Shape 33"/>
-          <p:cNvSpPr/>
-          <p:nvPr/>
-        </p:nvSpPr>
-        <p:spPr>
-          <a:xfrm>
-            <a:off x="640080" y="3991356"/>
-            <a:ext cx="3435096" cy="109728"/>
-          </a:xfrm>
-          <a:prstGeom prst="rect">
-            <a:avLst/>
-          </a:prstGeom>
-          <a:solidFill>
-            <a:srgbClr val="2563EB"/>
-          </a:solidFill>
-          <a:ln w="12700">
-            <a:solidFill>
-              <a:srgbClr val="2563EB">
-                <a:alpha val="0"/>
-              </a:srgbClr>
-            </a:solidFill>
-            <a:prstDash val="solid"/>
-          </a:ln>
-        </p:spPr>
-      </p:sp>
-      <p:sp>
-        <p:nvSpPr>
-          <p:cNvPr id="36" name="Shape 34"/>
-          <p:cNvSpPr/>
-          <p:nvPr/>
-        </p:nvSpPr>
-        <p:spPr>
-          <a:xfrm>
-            <a:off x="804672" y="4389303"/>
-            <a:ext cx="374538" cy="374538"/>
-          </a:xfrm>
-          <a:prstGeom prst="ellipse">
-            <a:avLst/>
-          </a:prstGeom>
-          <a:solidFill>
-            <a:srgbClr val="2563EB"/>
-          </a:solidFill>
-          <a:ln w="12700">
-            <a:solidFill>
-              <a:srgbClr val="2563EB">
-                <a:alpha val="0"/>
-              </a:srgbClr>
-            </a:solidFill>
-            <a:prstDash val="solid"/>
-          </a:ln>
-        </p:spPr>
-      </p:sp>
-      <p:sp>
-        <p:nvSpPr>
-          <p:cNvPr id="37" name="Text 35"/>
-          <p:cNvSpPr txBox="1"/>
-          <p:nvPr/>
-        </p:nvSpPr>
-        <p:spPr>
-          <a:xfrm>
-            <a:off x="804672" y="4389303"/>
-            <a:ext cx="374538" cy="374538"/>
-          </a:xfrm>
-          <a:prstGeom prst="rect">
-            <a:avLst/>
-          </a:prstGeom>
-          <a:noFill/>
-          <a:ln/>
-        </p:spPr>
-        <p:txBody>
-          <a:bodyPr wrap="square" lIns="0" tIns="0" rIns="0" bIns="0" rtlCol="0" anchor="ctr">
-            <a:normAutofit/>
-          </a:bodyPr>
-          <a:lstStyle/>
-          <a:p>
-            <a:pPr algn="ctr" indent="0" marL="0">
-              <a:lnSpc>
-                <a:spcPct val="120000"/>
-              </a:lnSpc>
-              <a:buNone/>
-            </a:pPr>
-            <a:r>
-              <a:rPr lang="en-US" sz="1500" b="1" dirty="0">
-                <a:solidFill>
-                  <a:srgbClr val="F8FAFC"/>
-                </a:solidFill>
-                <a:latin typeface="Pretendard" pitchFamily="34" charset="0"/>
-                <a:ea typeface="Pretendard" pitchFamily="34" charset="-122"/>
-                <a:cs typeface="Pretendard" pitchFamily="34" charset="-120"/>
-              </a:rPr>
-              <a:t>6</a:t>
-            </a:r>
-            <a:endParaRPr lang="en-US" sz="1500" dirty="0"/>
-          </a:p>
-        </p:txBody>
-      </p:sp>
-      <p:sp>
-        <p:nvSpPr>
-          <p:cNvPr id="38" name="Text 36"/>
-          <p:cNvSpPr txBox="1"/>
-          <p:nvPr/>
-        </p:nvSpPr>
-        <p:spPr>
-          <a:xfrm>
-            <a:off x="1325514" y="4119372"/>
-            <a:ext cx="2585070" cy="914400"/>
-          </a:xfrm>
-          <a:prstGeom prst="rect">
-            <a:avLst/>
-          </a:prstGeom>
-          <a:noFill/>
-          <a:ln/>
-        </p:spPr>
-        <p:txBody>
-          <a:bodyPr wrap="square" lIns="0" tIns="25400" rIns="25400" bIns="0" rtlCol="0" anchor="ctr">
-            <a:normAutofit/>
-          </a:bodyPr>
-          <a:lstStyle/>
-          <a:p>
-            <a:pPr algn="l" indent="0" marL="0">
-              <a:lnSpc>
-                <a:spcPct val="92000"/>
-              </a:lnSpc>
-              <a:buNone/>
-            </a:pPr>
-            <a:r>
-              <a:rPr lang="en-US" sz="1600" dirty="0">
-                <a:solidFill>
-                  <a:srgbClr val="111827"/>
-                </a:solidFill>
-                <a:latin typeface="Pretendard" pitchFamily="34" charset="0"/>
-                <a:ea typeface="Pretendard" pitchFamily="34" charset="-122"/>
-                <a:cs typeface="Pretendard" pitchFamily="34" charset="-120"/>
-              </a:rPr>
-              <a:t>Render PPTX HTML PDF</a:t>
-            </a:r>
-            <a:endParaRPr lang="en-US" sz="1600" dirty="0"/>
           </a:p>
         </p:txBody>
       </p:sp>

--- a/docs/theme-preview/pptx/clean.pptx
+++ b/docs/theme-preview/pptx/clean.pptx
@@ -29,9 +29,10 @@
     <p:sldId id="277" r:id="rId23"/>
     <p:sldId id="278" r:id="rId24"/>
     <p:sldId id="279" r:id="rId25"/>
+    <p:sldId id="280" r:id="rId26"/>
   </p:sldIdLst>
   <p:notesMasterIdLst>
-    <p:notesMasterId r:id="rId26"/>
+    <p:notesMasterId r:id="rId27"/>
   </p:notesMasterIdLst>
   <p:sldSz cx="12191695" cy="6858000"/>
   <p:notesSz cx="6858000" cy="12191695"/>
@@ -2558,6 +2559,94 @@
 </p:notes>
 </file>
 
+<file path=ppt/notesSlides/notesSlide25.xml><?xml version="1.0" encoding="utf-8"?>
+<p:notes xmlns:a="http://schemas.openxmlformats.org/drawingml/2006/main" xmlns:r="http://schemas.openxmlformats.org/officeDocument/2006/relationships" xmlns:p="http://schemas.openxmlformats.org/presentationml/2006/main">
+  <p:cSld>
+    <p:spTree>
+      <p:nvGrpSpPr>
+        <p:cNvPr id="1" name=""/>
+        <p:cNvGrpSpPr/>
+        <p:nvPr/>
+      </p:nvGrpSpPr>
+      <p:grpSpPr>
+        <a:xfrm>
+          <a:off x="0" y="0"/>
+          <a:ext cx="0" cy="0"/>
+          <a:chOff x="0" y="0"/>
+          <a:chExt cx="0" cy="0"/>
+        </a:xfrm>
+      </p:grpSpPr>
+      <p:sp>
+        <p:nvSpPr>
+          <p:cNvPr id="2" name="Slide Image Placeholder 1"/>
+          <p:cNvSpPr>
+            <a:spLocks noGrp="1" noRot="1" noChangeAspect="1"/>
+          </p:cNvSpPr>
+          <p:nvPr>
+            <p:ph type="sldImg"/>
+          </p:nvPr>
+        </p:nvSpPr>
+        <p:spPr/>
+      </p:sp>
+      <p:sp>
+        <p:nvSpPr>
+          <p:cNvPr id="3" name="Notes Placeholder 2"/>
+          <p:cNvSpPr>
+            <a:spLocks noGrp="1"/>
+          </p:cNvSpPr>
+          <p:nvPr>
+            <p:ph type="body" idx="1"/>
+          </p:nvPr>
+        </p:nvSpPr>
+        <p:spPr/>
+        <p:txBody>
+          <a:bodyPr/>
+          <a:lstStyle/>
+          <a:p>
+            <a:r>
+              <a:rPr lang="en-US" dirty="0"/>
+              <a:t/>
+            </a:r>
+            <a:endParaRPr lang="en-US" dirty="0"/>
+          </a:p>
+        </p:txBody>
+      </p:sp>
+      <p:sp>
+        <p:nvSpPr>
+          <p:cNvPr id="4" name="Slide Number Placeholder 3"/>
+          <p:cNvSpPr>
+            <a:spLocks noGrp="1"/>
+          </p:cNvSpPr>
+          <p:nvPr>
+            <p:ph type="sldNum" sz="quarter" idx="10"/>
+          </p:nvPr>
+        </p:nvSpPr>
+        <p:spPr/>
+        <p:txBody>
+          <a:bodyPr/>
+          <a:lstStyle/>
+          <a:p>
+            <a:fld id="{F7021451-1387-4CA6-816F-3879F97B5CBC}" type="slidenum">
+              <a:rPr lang="en-US"/>
+              <a:t>25</a:t>
+            </a:fld>
+            <a:endParaRPr lang="en-US"/>
+          </a:p>
+        </p:txBody>
+      </p:sp>
+    </p:spTree>
+    <p:extLst>
+      <p:ext uri="{BB962C8B-B14F-4D97-AF65-F5344CB8AC3E}">
+        <p14:creationId xmlns:p14="http://schemas.microsoft.com/office/powerpoint/2010/main" val="1024086991"/>
+      </p:ext>
+    </p:extLst>
+  </p:cSld>
+  <p:clrMapOvr>
+    <a:masterClrMapping/>
+  </p:clrMapOvr>
+</p:notes>
+</file>
+
 <file path=ppt/notesSlides/notesSlide3.xml><?xml version="1.0" encoding="utf-8"?>
 <p:notes xmlns:a="http://schemas.openxmlformats.org/drawingml/2006/main" xmlns:r="http://schemas.openxmlformats.org/officeDocument/2006/relationships" xmlns:p="http://schemas.openxmlformats.org/presentationml/2006/main">
   <p:cSld>
@@ -3691,7 +3780,61 @@
       </p:sp>
       <p:sp>
         <p:nvSpPr>
-          <p:cNvPr id="3" name="Text 1"/>
+          <p:cNvPr id="3" name="Shape 1"/>
+          <p:cNvSpPr/>
+          <p:nvPr/>
+        </p:nvSpPr>
+        <p:spPr>
+          <a:xfrm>
+            <a:off x="822960" y="1554480"/>
+            <a:ext cx="4937760" cy="73152"/>
+          </a:xfrm>
+          <a:prstGeom prst="rect">
+            <a:avLst/>
+          </a:prstGeom>
+          <a:solidFill>
+            <a:srgbClr val="2563EB"/>
+          </a:solidFill>
+          <a:ln w="12700">
+            <a:solidFill>
+              <a:srgbClr val="2563EB">
+                <a:alpha val="0"/>
+              </a:srgbClr>
+            </a:solidFill>
+            <a:prstDash val="solid"/>
+          </a:ln>
+        </p:spPr>
+      </p:sp>
+      <p:sp>
+        <p:nvSpPr>
+          <p:cNvPr id="4" name="Shape 2"/>
+          <p:cNvSpPr/>
+          <p:nvPr/>
+        </p:nvSpPr>
+        <p:spPr>
+          <a:xfrm>
+            <a:off x="6400800" y="1554480"/>
+            <a:ext cx="4937760" cy="73152"/>
+          </a:xfrm>
+          <a:prstGeom prst="rect">
+            <a:avLst/>
+          </a:prstGeom>
+          <a:solidFill>
+            <a:srgbClr val="2563EB"/>
+          </a:solidFill>
+          <a:ln w="12700">
+            <a:solidFill>
+              <a:srgbClr val="2563EB">
+                <a:alpha val="0"/>
+              </a:srgbClr>
+            </a:solidFill>
+            <a:prstDash val="solid"/>
+          </a:ln>
+        </p:spPr>
+      </p:sp>
+      <p:sp>
+        <p:nvSpPr>
+          <p:cNvPr id="5" name="Text 3"/>
           <p:cNvSpPr txBox="1"/>
           <p:nvPr/>
         </p:nvSpPr>
@@ -3725,7 +3868,7 @@
                 <a:ea typeface="Pretendard" pitchFamily="34" charset="-122"/>
                 <a:cs typeface="Pretendard" pitchFamily="34" charset="-120"/>
               </a:rPr>
-              <a:t>Pipeline Diagram</a:t>
+              <a:t>Semantic Blocks (Cont. 2/2)</a:t>
             </a:r>
             <a:endParaRPr lang="en-US" sz="3400" dirty="0"/>
           </a:p>
@@ -3733,222 +3876,14 @@
       </p:sp>
       <p:sp>
         <p:nvSpPr>
-          <p:cNvPr id="4" name="Shape 2"/>
-          <p:cNvSpPr/>
-          <p:nvPr/>
-        </p:nvSpPr>
-        <p:spPr>
-          <a:xfrm>
-            <a:off x="4002024" y="3095244"/>
-            <a:ext cx="457200" cy="0"/>
-          </a:xfrm>
-          <a:prstGeom prst="line">
-            <a:avLst/>
-          </a:prstGeom>
-          <a:noFill/>
-          <a:ln w="12700">
-            <a:solidFill>
-              <a:srgbClr val="2563EB"/>
-            </a:solidFill>
-            <a:prstDash val="solid"/>
-            <a:tailEnd type="triangle"/>
-          </a:ln>
-        </p:spPr>
-      </p:sp>
-      <p:sp>
-        <p:nvSpPr>
-          <p:cNvPr id="5" name="Shape 3"/>
-          <p:cNvSpPr/>
-          <p:nvPr/>
-        </p:nvSpPr>
-        <p:spPr>
-          <a:xfrm>
-            <a:off x="7748016" y="3095244"/>
-            <a:ext cx="457200" cy="0"/>
-          </a:xfrm>
-          <a:prstGeom prst="line">
-            <a:avLst/>
-          </a:prstGeom>
-          <a:noFill/>
-          <a:ln w="12700">
-            <a:solidFill>
-              <a:srgbClr val="2563EB"/>
-            </a:solidFill>
-            <a:prstDash val="solid"/>
-            <a:tailEnd type="triangle"/>
-          </a:ln>
-        </p:spPr>
-      </p:sp>
-      <p:sp>
-        <p:nvSpPr>
-          <p:cNvPr id="6" name="Shape 4"/>
-          <p:cNvSpPr/>
-          <p:nvPr/>
-        </p:nvSpPr>
-        <p:spPr>
-          <a:xfrm>
-            <a:off x="9849612" y="3627791"/>
-            <a:ext cx="0" cy="416235"/>
-          </a:xfrm>
-          <a:prstGeom prst="line">
-            <a:avLst/>
-          </a:prstGeom>
-          <a:noFill/>
-          <a:ln w="12700">
-            <a:solidFill>
-              <a:srgbClr val="2563EB"/>
-            </a:solidFill>
-            <a:prstDash val="solid"/>
-            <a:tailEnd type="triangle"/>
-          </a:ln>
-        </p:spPr>
-      </p:sp>
-      <p:sp>
-        <p:nvSpPr>
-          <p:cNvPr id="7" name="Shape 5"/>
-          <p:cNvSpPr/>
-          <p:nvPr/>
-        </p:nvSpPr>
-        <p:spPr>
-          <a:xfrm>
-            <a:off x="7748016" y="4576572"/>
-            <a:ext cx="457200" cy="0"/>
-          </a:xfrm>
-          <a:prstGeom prst="line">
-            <a:avLst/>
-          </a:prstGeom>
-          <a:noFill/>
-          <a:ln w="12700">
-            <a:solidFill>
-              <a:srgbClr val="2563EB"/>
-            </a:solidFill>
-            <a:prstDash val="solid"/>
-            <a:headEnd type="triangle"/>
-          </a:ln>
-        </p:spPr>
-      </p:sp>
-      <p:sp>
-        <p:nvSpPr>
-          <p:cNvPr id="8" name="Shape 6"/>
-          <p:cNvSpPr/>
-          <p:nvPr/>
-        </p:nvSpPr>
-        <p:spPr>
-          <a:xfrm>
-            <a:off x="4002024" y="4576572"/>
-            <a:ext cx="457200" cy="0"/>
-          </a:xfrm>
-          <a:prstGeom prst="line">
-            <a:avLst/>
-          </a:prstGeom>
-          <a:noFill/>
-          <a:ln w="12700">
-            <a:solidFill>
-              <a:srgbClr val="2563EB"/>
-            </a:solidFill>
-            <a:prstDash val="solid"/>
-            <a:headEnd type="triangle"/>
-          </a:ln>
-        </p:spPr>
-      </p:sp>
-      <p:sp>
-        <p:nvSpPr>
-          <p:cNvPr id="9" name="Shape 7"/>
-          <p:cNvSpPr/>
-          <p:nvPr/>
-        </p:nvSpPr>
-        <p:spPr>
-          <a:xfrm>
-            <a:off x="640080" y="2510028"/>
-            <a:ext cx="3435096" cy="1170432"/>
-          </a:xfrm>
-          <a:prstGeom prst="roundRect">
-            <a:avLst>
-              <a:gd name="adj" fmla="val 4688"/>
-            </a:avLst>
-          </a:prstGeom>
-          <a:solidFill>
-            <a:srgbClr val="FFFFFF"/>
-          </a:solidFill>
-          <a:ln w="12700">
-            <a:solidFill>
-              <a:srgbClr val="2563EB"/>
-            </a:solidFill>
-            <a:prstDash val="solid"/>
-          </a:ln>
-          <a:effectLst>
-            <a:outerShdw sx="100000" sy="100000" kx="0" ky="0" algn="bl" rotWithShape="0" blurRad="12700" dist="50800" dir="2700000">
-              <a:srgbClr val="000000">
-                <a:alpha val="12000"/>
-              </a:srgbClr>
-            </a:outerShdw>
-          </a:effectLst>
-        </p:spPr>
-      </p:sp>
-      <p:sp>
-        <p:nvSpPr>
-          <p:cNvPr id="10" name="Shape 8"/>
-          <p:cNvSpPr/>
-          <p:nvPr/>
-        </p:nvSpPr>
-        <p:spPr>
-          <a:xfrm>
-            <a:off x="640080" y="2510028"/>
-            <a:ext cx="3435096" cy="109728"/>
-          </a:xfrm>
-          <a:prstGeom prst="rect">
-            <a:avLst/>
-          </a:prstGeom>
-          <a:solidFill>
-            <a:srgbClr val="2563EB"/>
-          </a:solidFill>
-          <a:ln w="12700">
-            <a:solidFill>
-              <a:srgbClr val="2563EB">
-                <a:alpha val="0"/>
-              </a:srgbClr>
-            </a:solidFill>
-            <a:prstDash val="solid"/>
-          </a:ln>
-        </p:spPr>
-      </p:sp>
-      <p:sp>
-        <p:nvSpPr>
-          <p:cNvPr id="11" name="Shape 9"/>
-          <p:cNvSpPr/>
-          <p:nvPr/>
-        </p:nvSpPr>
-        <p:spPr>
-          <a:xfrm>
-            <a:off x="804672" y="2907975"/>
-            <a:ext cx="374538" cy="374538"/>
-          </a:xfrm>
-          <a:prstGeom prst="ellipse">
-            <a:avLst/>
-          </a:prstGeom>
-          <a:solidFill>
-            <a:srgbClr val="2563EB"/>
-          </a:solidFill>
-          <a:ln w="12700">
-            <a:solidFill>
-              <a:srgbClr val="2563EB">
-                <a:alpha val="0"/>
-              </a:srgbClr>
-            </a:solidFill>
-            <a:prstDash val="solid"/>
-          </a:ln>
-        </p:spPr>
-      </p:sp>
-      <p:sp>
-        <p:nvSpPr>
-          <p:cNvPr id="12" name="Text 10"/>
+          <p:cNvPr id="6" name="Text 4"/>
           <p:cNvSpPr txBox="1"/>
           <p:nvPr/>
         </p:nvSpPr>
         <p:spPr>
           <a:xfrm>
-            <a:off x="804672" y="2907975"/>
-            <a:ext cx="374538" cy="374538"/>
+            <a:off x="896112" y="1664208"/>
+            <a:ext cx="4791456" cy="4169664"/>
           </a:xfrm>
           <a:prstGeom prst="rect">
             <a:avLst/>
@@ -3957,63 +3892,34 @@
           <a:ln/>
         </p:spPr>
         <p:txBody>
-          <a:bodyPr wrap="square" lIns="0" tIns="0" rIns="0" bIns="0" rtlCol="0" anchor="ctr">
-            <a:normAutofit/>
-          </a:bodyPr>
+          <a:bodyPr wrap="square" lIns="0" tIns="25400" rIns="25400" bIns="0" rtlCol="0" anchor="t"/>
           <a:lstStyle/>
           <a:p>
-            <a:pPr algn="ctr" indent="0" marL="0">
+            <a:pPr algn="l" indent="0" marL="0">
               <a:lnSpc>
                 <a:spcPct val="120000"/>
               </a:lnSpc>
               <a:buNone/>
             </a:pPr>
             <a:r>
-              <a:rPr lang="en-US" sz="1500" b="1" dirty="0">
+              <a:rPr lang="en-US" sz="2200" b="1" dirty="0">
                 <a:solidFill>
-                  <a:srgbClr val="F8FAFC"/>
+                  <a:srgbClr val="2563EB"/>
                 </a:solidFill>
                 <a:latin typeface="Pretendard" pitchFamily="34" charset="0"/>
                 <a:ea typeface="Pretendard" pitchFamily="34" charset="-122"/>
                 <a:cs typeface="Pretendard" pitchFamily="34" charset="-120"/>
               </a:rPr>
-              <a:t>1</a:t>
+              <a:t>- Constraint:</a:t>
             </a:r>
-            <a:endParaRPr lang="en-US" sz="1500" dirty="0"/>
-          </a:p>
-        </p:txBody>
-      </p:sp>
-      <p:sp>
-        <p:nvSpPr>
-          <p:cNvPr id="13" name="Text 11"/>
-          <p:cNvSpPr txBox="1"/>
-          <p:nvPr/>
-        </p:nvSpPr>
-        <p:spPr>
-          <a:xfrm>
-            <a:off x="1325514" y="2638044"/>
-            <a:ext cx="2585070" cy="914400"/>
-          </a:xfrm>
-          <a:prstGeom prst="rect">
-            <a:avLst/>
-          </a:prstGeom>
-          <a:noFill/>
-          <a:ln/>
-        </p:spPr>
-        <p:txBody>
-          <a:bodyPr wrap="square" lIns="0" tIns="25400" rIns="25400" bIns="0" rtlCol="0" anchor="ctr">
-            <a:normAutofit/>
-          </a:bodyPr>
-          <a:lstStyle/>
-          <a:p>
             <a:pPr algn="l" indent="0" marL="0">
               <a:lnSpc>
-                <a:spcPct val="92000"/>
+                <a:spcPct val="120000"/>
               </a:lnSpc>
               <a:buNone/>
             </a:pPr>
             <a:r>
-              <a:rPr lang="en-US" sz="1600" dirty="0">
+              <a:rPr lang="en-US" sz="2200" dirty="0">
                 <a:solidFill>
                   <a:srgbClr val="111827"/>
                 </a:solidFill>
@@ -4021,110 +3927,22 @@
                 <a:ea typeface="Pretendard" pitchFamily="34" charset="-122"/>
                 <a:cs typeface="Pretendard" pitchFamily="34" charset="-120"/>
               </a:rPr>
-              <a:t>Markdown source</a:t>
+              <a:t>  Indented description lines stay under the bold label.</a:t>
             </a:r>
-            <a:endParaRPr lang="en-US" sz="1600" dirty="0"/>
+            <a:endParaRPr lang="en-US" sz="2200" dirty="0"/>
           </a:p>
         </p:txBody>
       </p:sp>
       <p:sp>
         <p:nvSpPr>
-          <p:cNvPr id="14" name="Shape 12"/>
-          <p:cNvSpPr/>
-          <p:nvPr/>
-        </p:nvSpPr>
-        <p:spPr>
-          <a:xfrm>
-            <a:off x="4386072" y="2510028"/>
-            <a:ext cx="3435096" cy="1170432"/>
-          </a:xfrm>
-          <a:prstGeom prst="roundRect">
-            <a:avLst>
-              <a:gd name="adj" fmla="val 4688"/>
-            </a:avLst>
-          </a:prstGeom>
-          <a:solidFill>
-            <a:srgbClr val="FFFFFF"/>
-          </a:solidFill>
-          <a:ln w="12700">
-            <a:solidFill>
-              <a:srgbClr val="2563EB"/>
-            </a:solidFill>
-            <a:prstDash val="solid"/>
-          </a:ln>
-          <a:effectLst>
-            <a:outerShdw sx="100000" sy="100000" kx="0" ky="0" algn="bl" rotWithShape="0" blurRad="12700" dist="50800" dir="2700000">
-              <a:srgbClr val="000000">
-                <a:alpha val="12000"/>
-              </a:srgbClr>
-            </a:outerShdw>
-          </a:effectLst>
-        </p:spPr>
-      </p:sp>
-      <p:sp>
-        <p:nvSpPr>
-          <p:cNvPr id="15" name="Shape 13"/>
-          <p:cNvSpPr/>
-          <p:nvPr/>
-        </p:nvSpPr>
-        <p:spPr>
-          <a:xfrm>
-            <a:off x="4386072" y="2510028"/>
-            <a:ext cx="3435096" cy="109728"/>
-          </a:xfrm>
-          <a:prstGeom prst="rect">
-            <a:avLst/>
-          </a:prstGeom>
-          <a:solidFill>
-            <a:srgbClr val="2563EB"/>
-          </a:solidFill>
-          <a:ln w="12700">
-            <a:solidFill>
-              <a:srgbClr val="2563EB">
-                <a:alpha val="0"/>
-              </a:srgbClr>
-            </a:solidFill>
-            <a:prstDash val="solid"/>
-          </a:ln>
-        </p:spPr>
-      </p:sp>
-      <p:sp>
-        <p:nvSpPr>
-          <p:cNvPr id="16" name="Shape 14"/>
-          <p:cNvSpPr/>
-          <p:nvPr/>
-        </p:nvSpPr>
-        <p:spPr>
-          <a:xfrm>
-            <a:off x="4550664" y="2907975"/>
-            <a:ext cx="374538" cy="374538"/>
-          </a:xfrm>
-          <a:prstGeom prst="ellipse">
-            <a:avLst/>
-          </a:prstGeom>
-          <a:solidFill>
-            <a:srgbClr val="2563EB"/>
-          </a:solidFill>
-          <a:ln w="12700">
-            <a:solidFill>
-              <a:srgbClr val="2563EB">
-                <a:alpha val="0"/>
-              </a:srgbClr>
-            </a:solidFill>
-            <a:prstDash val="solid"/>
-          </a:ln>
-        </p:spPr>
-      </p:sp>
-      <p:sp>
-        <p:nvSpPr>
-          <p:cNvPr id="17" name="Text 15"/>
+          <p:cNvPr id="7" name="Text 5"/>
           <p:cNvSpPr txBox="1"/>
           <p:nvPr/>
         </p:nvSpPr>
         <p:spPr>
           <a:xfrm>
-            <a:off x="4550664" y="2907975"/>
-            <a:ext cx="374538" cy="374538"/>
+            <a:off x="6473952" y="1664208"/>
+            <a:ext cx="4791456" cy="4169664"/>
           </a:xfrm>
           <a:prstGeom prst="rect">
             <a:avLst/>
@@ -4133,63 +3951,34 @@
           <a:ln/>
         </p:spPr>
         <p:txBody>
-          <a:bodyPr wrap="square" lIns="0" tIns="0" rIns="0" bIns="0" rtlCol="0" anchor="ctr">
-            <a:normAutofit/>
-          </a:bodyPr>
+          <a:bodyPr wrap="square" lIns="0" tIns="25400" rIns="25400" bIns="0" rtlCol="0" anchor="t"/>
           <a:lstStyle/>
           <a:p>
-            <a:pPr algn="ctr" indent="0" marL="0">
+            <a:pPr algn="l" indent="0" marL="0">
               <a:lnSpc>
                 <a:spcPct val="120000"/>
               </a:lnSpc>
               <a:buNone/>
             </a:pPr>
             <a:r>
-              <a:rPr lang="en-US" sz="1500" b="1" dirty="0">
+              <a:rPr lang="en-US" sz="2200" b="1" dirty="0">
                 <a:solidFill>
-                  <a:srgbClr val="F8FAFC"/>
+                  <a:srgbClr val="2563EB"/>
                 </a:solidFill>
                 <a:latin typeface="Pretendard" pitchFamily="34" charset="0"/>
                 <a:ea typeface="Pretendard" pitchFamily="34" charset="-122"/>
                 <a:cs typeface="Pretendard" pitchFamily="34" charset="-120"/>
               </a:rPr>
-              <a:t>2</a:t>
+              <a:t>- Emphasis</a:t>
             </a:r>
-            <a:endParaRPr lang="en-US" sz="1500" dirty="0"/>
-          </a:p>
-        </p:txBody>
-      </p:sp>
-      <p:sp>
-        <p:nvSpPr>
-          <p:cNvPr id="18" name="Text 16"/>
-          <p:cNvSpPr txBox="1"/>
-          <p:nvPr/>
-        </p:nvSpPr>
-        <p:spPr>
-          <a:xfrm>
-            <a:off x="5071506" y="2638044"/>
-            <a:ext cx="2585070" cy="914400"/>
-          </a:xfrm>
-          <a:prstGeom prst="rect">
-            <a:avLst/>
-          </a:prstGeom>
-          <a:noFill/>
-          <a:ln/>
-        </p:spPr>
-        <p:txBody>
-          <a:bodyPr wrap="square" lIns="0" tIns="25400" rIns="25400" bIns="0" rtlCol="0" anchor="ctr">
-            <a:normAutofit/>
-          </a:bodyPr>
-          <a:lstStyle/>
-          <a:p>
             <a:pPr algn="l" indent="0" marL="0">
               <a:lnSpc>
-                <a:spcPct val="92000"/>
+                <a:spcPct val="120000"/>
               </a:lnSpc>
               <a:buNone/>
             </a:pPr>
             <a:r>
-              <a:rPr lang="en-US" sz="1600" dirty="0">
+              <a:rPr lang="en-US" sz="2200" dirty="0">
                 <a:solidFill>
                   <a:srgbClr val="111827"/>
                 </a:solidFill>
@@ -4197,713 +3986,9 @@
                 <a:ea typeface="Pretendard" pitchFamily="34" charset="-122"/>
                 <a:cs typeface="Pretendard" pitchFamily="34" charset="-120"/>
               </a:rPr>
-              <a:t>Parse blocks</a:t>
+              <a:t>  bold and italic remain editable.</a:t>
             </a:r>
-            <a:endParaRPr lang="en-US" sz="1600" dirty="0"/>
-          </a:p>
-        </p:txBody>
-      </p:sp>
-      <p:sp>
-        <p:nvSpPr>
-          <p:cNvPr id="19" name="Shape 17"/>
-          <p:cNvSpPr/>
-          <p:nvPr/>
-        </p:nvSpPr>
-        <p:spPr>
-          <a:xfrm>
-            <a:off x="8132064" y="2510028"/>
-            <a:ext cx="3435096" cy="1170432"/>
-          </a:xfrm>
-          <a:prstGeom prst="roundRect">
-            <a:avLst>
-              <a:gd name="adj" fmla="val 4688"/>
-            </a:avLst>
-          </a:prstGeom>
-          <a:solidFill>
-            <a:srgbClr val="FFFFFF"/>
-          </a:solidFill>
-          <a:ln w="12700">
-            <a:solidFill>
-              <a:srgbClr val="2563EB"/>
-            </a:solidFill>
-            <a:prstDash val="solid"/>
-          </a:ln>
-          <a:effectLst>
-            <a:outerShdw sx="100000" sy="100000" kx="0" ky="0" algn="bl" rotWithShape="0" blurRad="12700" dist="50800" dir="2700000">
-              <a:srgbClr val="000000">
-                <a:alpha val="12000"/>
-              </a:srgbClr>
-            </a:outerShdw>
-          </a:effectLst>
-        </p:spPr>
-      </p:sp>
-      <p:sp>
-        <p:nvSpPr>
-          <p:cNvPr id="20" name="Shape 18"/>
-          <p:cNvSpPr/>
-          <p:nvPr/>
-        </p:nvSpPr>
-        <p:spPr>
-          <a:xfrm>
-            <a:off x="8132064" y="2510028"/>
-            <a:ext cx="3435096" cy="109728"/>
-          </a:xfrm>
-          <a:prstGeom prst="rect">
-            <a:avLst/>
-          </a:prstGeom>
-          <a:solidFill>
-            <a:srgbClr val="2563EB"/>
-          </a:solidFill>
-          <a:ln w="12700">
-            <a:solidFill>
-              <a:srgbClr val="2563EB">
-                <a:alpha val="0"/>
-              </a:srgbClr>
-            </a:solidFill>
-            <a:prstDash val="solid"/>
-          </a:ln>
-        </p:spPr>
-      </p:sp>
-      <p:sp>
-        <p:nvSpPr>
-          <p:cNvPr id="21" name="Shape 19"/>
-          <p:cNvSpPr/>
-          <p:nvPr/>
-        </p:nvSpPr>
-        <p:spPr>
-          <a:xfrm>
-            <a:off x="8296656" y="2907975"/>
-            <a:ext cx="374538" cy="374538"/>
-          </a:xfrm>
-          <a:prstGeom prst="ellipse">
-            <a:avLst/>
-          </a:prstGeom>
-          <a:solidFill>
-            <a:srgbClr val="2563EB"/>
-          </a:solidFill>
-          <a:ln w="12700">
-            <a:solidFill>
-              <a:srgbClr val="2563EB">
-                <a:alpha val="0"/>
-              </a:srgbClr>
-            </a:solidFill>
-            <a:prstDash val="solid"/>
-          </a:ln>
-        </p:spPr>
-      </p:sp>
-      <p:sp>
-        <p:nvSpPr>
-          <p:cNvPr id="22" name="Text 20"/>
-          <p:cNvSpPr txBox="1"/>
-          <p:nvPr/>
-        </p:nvSpPr>
-        <p:spPr>
-          <a:xfrm>
-            <a:off x="8296656" y="2907975"/>
-            <a:ext cx="374538" cy="374538"/>
-          </a:xfrm>
-          <a:prstGeom prst="rect">
-            <a:avLst/>
-          </a:prstGeom>
-          <a:noFill/>
-          <a:ln/>
-        </p:spPr>
-        <p:txBody>
-          <a:bodyPr wrap="square" lIns="0" tIns="0" rIns="0" bIns="0" rtlCol="0" anchor="ctr">
-            <a:normAutofit/>
-          </a:bodyPr>
-          <a:lstStyle/>
-          <a:p>
-            <a:pPr algn="ctr" indent="0" marL="0">
-              <a:lnSpc>
-                <a:spcPct val="120000"/>
-              </a:lnSpc>
-              <a:buNone/>
-            </a:pPr>
-            <a:r>
-              <a:rPr lang="en-US" sz="1500" b="1" dirty="0">
-                <a:solidFill>
-                  <a:srgbClr val="F8FAFC"/>
-                </a:solidFill>
-                <a:latin typeface="Pretendard" pitchFamily="34" charset="0"/>
-                <a:ea typeface="Pretendard" pitchFamily="34" charset="-122"/>
-                <a:cs typeface="Pretendard" pitchFamily="34" charset="-120"/>
-              </a:rPr>
-              <a:t>3</a:t>
-            </a:r>
-            <a:endParaRPr lang="en-US" sz="1500" dirty="0"/>
-          </a:p>
-        </p:txBody>
-      </p:sp>
-      <p:sp>
-        <p:nvSpPr>
-          <p:cNvPr id="23" name="Text 21"/>
-          <p:cNvSpPr txBox="1"/>
-          <p:nvPr/>
-        </p:nvSpPr>
-        <p:spPr>
-          <a:xfrm>
-            <a:off x="8817498" y="2638044"/>
-            <a:ext cx="2585070" cy="914400"/>
-          </a:xfrm>
-          <a:prstGeom prst="rect">
-            <a:avLst/>
-          </a:prstGeom>
-          <a:noFill/>
-          <a:ln/>
-        </p:spPr>
-        <p:txBody>
-          <a:bodyPr wrap="square" lIns="0" tIns="25400" rIns="25400" bIns="0" rtlCol="0" anchor="ctr">
-            <a:normAutofit/>
-          </a:bodyPr>
-          <a:lstStyle/>
-          <a:p>
-            <a:pPr algn="l" indent="0" marL="0">
-              <a:lnSpc>
-                <a:spcPct val="92000"/>
-              </a:lnSpc>
-              <a:buNone/>
-            </a:pPr>
-            <a:r>
-              <a:rPr lang="en-US" sz="1600" dirty="0">
-                <a:solidFill>
-                  <a:srgbClr val="111827"/>
-                </a:solidFill>
-                <a:latin typeface="Pretendard" pitchFamily="34" charset="0"/>
-                <a:ea typeface="Pretendard" pitchFamily="34" charset="-122"/>
-                <a:cs typeface="Pretendard" pitchFamily="34" charset="-120"/>
-              </a:rPr>
-              <a:t>Split slides</a:t>
-            </a:r>
-            <a:endParaRPr lang="en-US" sz="1600" dirty="0"/>
-          </a:p>
-        </p:txBody>
-      </p:sp>
-      <p:sp>
-        <p:nvSpPr>
-          <p:cNvPr id="24" name="Shape 22"/>
-          <p:cNvSpPr/>
-          <p:nvPr/>
-        </p:nvSpPr>
-        <p:spPr>
-          <a:xfrm>
-            <a:off x="8132064" y="3991356"/>
-            <a:ext cx="3435096" cy="1170432"/>
-          </a:xfrm>
-          <a:prstGeom prst="roundRect">
-            <a:avLst>
-              <a:gd name="adj" fmla="val 4688"/>
-            </a:avLst>
-          </a:prstGeom>
-          <a:solidFill>
-            <a:srgbClr val="FFFFFF"/>
-          </a:solidFill>
-          <a:ln w="12700">
-            <a:solidFill>
-              <a:srgbClr val="2563EB"/>
-            </a:solidFill>
-            <a:prstDash val="solid"/>
-          </a:ln>
-          <a:effectLst>
-            <a:outerShdw sx="100000" sy="100000" kx="0" ky="0" algn="bl" rotWithShape="0" blurRad="12700" dist="50800" dir="2700000">
-              <a:srgbClr val="000000">
-                <a:alpha val="12000"/>
-              </a:srgbClr>
-            </a:outerShdw>
-          </a:effectLst>
-        </p:spPr>
-      </p:sp>
-      <p:sp>
-        <p:nvSpPr>
-          <p:cNvPr id="25" name="Shape 23"/>
-          <p:cNvSpPr/>
-          <p:nvPr/>
-        </p:nvSpPr>
-        <p:spPr>
-          <a:xfrm>
-            <a:off x="8132064" y="3991356"/>
-            <a:ext cx="3435096" cy="109728"/>
-          </a:xfrm>
-          <a:prstGeom prst="rect">
-            <a:avLst/>
-          </a:prstGeom>
-          <a:solidFill>
-            <a:srgbClr val="2563EB"/>
-          </a:solidFill>
-          <a:ln w="12700">
-            <a:solidFill>
-              <a:srgbClr val="2563EB">
-                <a:alpha val="0"/>
-              </a:srgbClr>
-            </a:solidFill>
-            <a:prstDash val="solid"/>
-          </a:ln>
-        </p:spPr>
-      </p:sp>
-      <p:sp>
-        <p:nvSpPr>
-          <p:cNvPr id="26" name="Shape 24"/>
-          <p:cNvSpPr/>
-          <p:nvPr/>
-        </p:nvSpPr>
-        <p:spPr>
-          <a:xfrm>
-            <a:off x="8296656" y="4389303"/>
-            <a:ext cx="374538" cy="374538"/>
-          </a:xfrm>
-          <a:prstGeom prst="ellipse">
-            <a:avLst/>
-          </a:prstGeom>
-          <a:solidFill>
-            <a:srgbClr val="2563EB"/>
-          </a:solidFill>
-          <a:ln w="12700">
-            <a:solidFill>
-              <a:srgbClr val="2563EB">
-                <a:alpha val="0"/>
-              </a:srgbClr>
-            </a:solidFill>
-            <a:prstDash val="solid"/>
-          </a:ln>
-        </p:spPr>
-      </p:sp>
-      <p:sp>
-        <p:nvSpPr>
-          <p:cNvPr id="27" name="Text 25"/>
-          <p:cNvSpPr txBox="1"/>
-          <p:nvPr/>
-        </p:nvSpPr>
-        <p:spPr>
-          <a:xfrm>
-            <a:off x="8296656" y="4389303"/>
-            <a:ext cx="374538" cy="374538"/>
-          </a:xfrm>
-          <a:prstGeom prst="rect">
-            <a:avLst/>
-          </a:prstGeom>
-          <a:noFill/>
-          <a:ln/>
-        </p:spPr>
-        <p:txBody>
-          <a:bodyPr wrap="square" lIns="0" tIns="0" rIns="0" bIns="0" rtlCol="0" anchor="ctr">
-            <a:normAutofit/>
-          </a:bodyPr>
-          <a:lstStyle/>
-          <a:p>
-            <a:pPr algn="ctr" indent="0" marL="0">
-              <a:lnSpc>
-                <a:spcPct val="120000"/>
-              </a:lnSpc>
-              <a:buNone/>
-            </a:pPr>
-            <a:r>
-              <a:rPr lang="en-US" sz="1500" b="1" dirty="0">
-                <a:solidFill>
-                  <a:srgbClr val="F8FAFC"/>
-                </a:solidFill>
-                <a:latin typeface="Pretendard" pitchFamily="34" charset="0"/>
-                <a:ea typeface="Pretendard" pitchFamily="34" charset="-122"/>
-                <a:cs typeface="Pretendard" pitchFamily="34" charset="-120"/>
-              </a:rPr>
-              <a:t>4</a:t>
-            </a:r>
-            <a:endParaRPr lang="en-US" sz="1500" dirty="0"/>
-          </a:p>
-        </p:txBody>
-      </p:sp>
-      <p:sp>
-        <p:nvSpPr>
-          <p:cNvPr id="28" name="Text 26"/>
-          <p:cNvSpPr txBox="1"/>
-          <p:nvPr/>
-        </p:nvSpPr>
-        <p:spPr>
-          <a:xfrm>
-            <a:off x="8817498" y="4119372"/>
-            <a:ext cx="2585070" cy="914400"/>
-          </a:xfrm>
-          <a:prstGeom prst="rect">
-            <a:avLst/>
-          </a:prstGeom>
-          <a:noFill/>
-          <a:ln/>
-        </p:spPr>
-        <p:txBody>
-          <a:bodyPr wrap="square" lIns="0" tIns="25400" rIns="25400" bIns="0" rtlCol="0" anchor="ctr">
-            <a:normAutofit/>
-          </a:bodyPr>
-          <a:lstStyle/>
-          <a:p>
-            <a:pPr algn="l" indent="0" marL="0">
-              <a:lnSpc>
-                <a:spcPct val="92000"/>
-              </a:lnSpc>
-              <a:buNone/>
-            </a:pPr>
-            <a:r>
-              <a:rPr lang="en-US" sz="1600" dirty="0">
-                <a:solidFill>
-                  <a:srgbClr val="111827"/>
-                </a:solidFill>
-                <a:latin typeface="Pretendard" pitchFamily="34" charset="0"/>
-                <a:ea typeface="Pretendard" pitchFamily="34" charset="-122"/>
-                <a:cs typeface="Pretendard" pitchFamily="34" charset="-120"/>
-              </a:rPr>
-              <a:t>Layout objects</a:t>
-            </a:r>
-            <a:endParaRPr lang="en-US" sz="1600" dirty="0"/>
-          </a:p>
-        </p:txBody>
-      </p:sp>
-      <p:sp>
-        <p:nvSpPr>
-          <p:cNvPr id="29" name="Shape 27"/>
-          <p:cNvSpPr/>
-          <p:nvPr/>
-        </p:nvSpPr>
-        <p:spPr>
-          <a:xfrm>
-            <a:off x="4386072" y="3991356"/>
-            <a:ext cx="3435096" cy="1170432"/>
-          </a:xfrm>
-          <a:prstGeom prst="roundRect">
-            <a:avLst>
-              <a:gd name="adj" fmla="val 4688"/>
-            </a:avLst>
-          </a:prstGeom>
-          <a:solidFill>
-            <a:srgbClr val="FFFFFF"/>
-          </a:solidFill>
-          <a:ln w="12700">
-            <a:solidFill>
-              <a:srgbClr val="2563EB"/>
-            </a:solidFill>
-            <a:prstDash val="solid"/>
-          </a:ln>
-          <a:effectLst>
-            <a:outerShdw sx="100000" sy="100000" kx="0" ky="0" algn="bl" rotWithShape="0" blurRad="12700" dist="50800" dir="2700000">
-              <a:srgbClr val="000000">
-                <a:alpha val="12000"/>
-              </a:srgbClr>
-            </a:outerShdw>
-          </a:effectLst>
-        </p:spPr>
-      </p:sp>
-      <p:sp>
-        <p:nvSpPr>
-          <p:cNvPr id="30" name="Shape 28"/>
-          <p:cNvSpPr/>
-          <p:nvPr/>
-        </p:nvSpPr>
-        <p:spPr>
-          <a:xfrm>
-            <a:off x="4386072" y="3991356"/>
-            <a:ext cx="3435096" cy="109728"/>
-          </a:xfrm>
-          <a:prstGeom prst="rect">
-            <a:avLst/>
-          </a:prstGeom>
-          <a:solidFill>
-            <a:srgbClr val="2563EB"/>
-          </a:solidFill>
-          <a:ln w="12700">
-            <a:solidFill>
-              <a:srgbClr val="2563EB">
-                <a:alpha val="0"/>
-              </a:srgbClr>
-            </a:solidFill>
-            <a:prstDash val="solid"/>
-          </a:ln>
-        </p:spPr>
-      </p:sp>
-      <p:sp>
-        <p:nvSpPr>
-          <p:cNvPr id="31" name="Shape 29"/>
-          <p:cNvSpPr/>
-          <p:nvPr/>
-        </p:nvSpPr>
-        <p:spPr>
-          <a:xfrm>
-            <a:off x="4550664" y="4389303"/>
-            <a:ext cx="374538" cy="374538"/>
-          </a:xfrm>
-          <a:prstGeom prst="ellipse">
-            <a:avLst/>
-          </a:prstGeom>
-          <a:solidFill>
-            <a:srgbClr val="2563EB"/>
-          </a:solidFill>
-          <a:ln w="12700">
-            <a:solidFill>
-              <a:srgbClr val="2563EB">
-                <a:alpha val="0"/>
-              </a:srgbClr>
-            </a:solidFill>
-            <a:prstDash val="solid"/>
-          </a:ln>
-        </p:spPr>
-      </p:sp>
-      <p:sp>
-        <p:nvSpPr>
-          <p:cNvPr id="32" name="Text 30"/>
-          <p:cNvSpPr txBox="1"/>
-          <p:nvPr/>
-        </p:nvSpPr>
-        <p:spPr>
-          <a:xfrm>
-            <a:off x="4550664" y="4389303"/>
-            <a:ext cx="374538" cy="374538"/>
-          </a:xfrm>
-          <a:prstGeom prst="rect">
-            <a:avLst/>
-          </a:prstGeom>
-          <a:noFill/>
-          <a:ln/>
-        </p:spPr>
-        <p:txBody>
-          <a:bodyPr wrap="square" lIns="0" tIns="0" rIns="0" bIns="0" rtlCol="0" anchor="ctr">
-            <a:normAutofit/>
-          </a:bodyPr>
-          <a:lstStyle/>
-          <a:p>
-            <a:pPr algn="ctr" indent="0" marL="0">
-              <a:lnSpc>
-                <a:spcPct val="120000"/>
-              </a:lnSpc>
-              <a:buNone/>
-            </a:pPr>
-            <a:r>
-              <a:rPr lang="en-US" sz="1500" b="1" dirty="0">
-                <a:solidFill>
-                  <a:srgbClr val="F8FAFC"/>
-                </a:solidFill>
-                <a:latin typeface="Pretendard" pitchFamily="34" charset="0"/>
-                <a:ea typeface="Pretendard" pitchFamily="34" charset="-122"/>
-                <a:cs typeface="Pretendard" pitchFamily="34" charset="-120"/>
-              </a:rPr>
-              <a:t>5</a:t>
-            </a:r>
-            <a:endParaRPr lang="en-US" sz="1500" dirty="0"/>
-          </a:p>
-        </p:txBody>
-      </p:sp>
-      <p:sp>
-        <p:nvSpPr>
-          <p:cNvPr id="33" name="Text 31"/>
-          <p:cNvSpPr txBox="1"/>
-          <p:nvPr/>
-        </p:nvSpPr>
-        <p:spPr>
-          <a:xfrm>
-            <a:off x="5071506" y="4119372"/>
-            <a:ext cx="2585070" cy="914400"/>
-          </a:xfrm>
-          <a:prstGeom prst="rect">
-            <a:avLst/>
-          </a:prstGeom>
-          <a:noFill/>
-          <a:ln/>
-        </p:spPr>
-        <p:txBody>
-          <a:bodyPr wrap="square" lIns="0" tIns="25400" rIns="25400" bIns="0" rtlCol="0" anchor="ctr">
-            <a:normAutofit/>
-          </a:bodyPr>
-          <a:lstStyle/>
-          <a:p>
-            <a:pPr algn="l" indent="0" marL="0">
-              <a:lnSpc>
-                <a:spcPct val="92000"/>
-              </a:lnSpc>
-              <a:buNone/>
-            </a:pPr>
-            <a:r>
-              <a:rPr lang="en-US" sz="1600" dirty="0">
-                <a:solidFill>
-                  <a:srgbClr val="111827"/>
-                </a:solidFill>
-                <a:latin typeface="Pretendard" pitchFamily="34" charset="0"/>
-                <a:ea typeface="Pretendard" pitchFamily="34" charset="-122"/>
-                <a:cs typeface="Pretendard" pitchFamily="34" charset="-120"/>
-              </a:rPr>
-              <a:t>Validate overflow</a:t>
-            </a:r>
-            <a:endParaRPr lang="en-US" sz="1600" dirty="0"/>
-          </a:p>
-        </p:txBody>
-      </p:sp>
-      <p:sp>
-        <p:nvSpPr>
-          <p:cNvPr id="34" name="Shape 32"/>
-          <p:cNvSpPr/>
-          <p:nvPr/>
-        </p:nvSpPr>
-        <p:spPr>
-          <a:xfrm>
-            <a:off x="640080" y="3991356"/>
-            <a:ext cx="3435096" cy="1170432"/>
-          </a:xfrm>
-          <a:prstGeom prst="roundRect">
-            <a:avLst>
-              <a:gd name="adj" fmla="val 4688"/>
-            </a:avLst>
-          </a:prstGeom>
-          <a:solidFill>
-            <a:srgbClr val="FFFFFF"/>
-          </a:solidFill>
-          <a:ln w="12700">
-            <a:solidFill>
-              <a:srgbClr val="2563EB"/>
-            </a:solidFill>
-            <a:prstDash val="solid"/>
-          </a:ln>
-          <a:effectLst>
-            <a:outerShdw sx="100000" sy="100000" kx="0" ky="0" algn="bl" rotWithShape="0" blurRad="12700" dist="50800" dir="2700000">
-              <a:srgbClr val="000000">
-                <a:alpha val="12000"/>
-              </a:srgbClr>
-            </a:outerShdw>
-          </a:effectLst>
-        </p:spPr>
-      </p:sp>
-      <p:sp>
-        <p:nvSpPr>
-          <p:cNvPr id="35" name="Shape 33"/>
-          <p:cNvSpPr/>
-          <p:nvPr/>
-        </p:nvSpPr>
-        <p:spPr>
-          <a:xfrm>
-            <a:off x="640080" y="3991356"/>
-            <a:ext cx="3435096" cy="109728"/>
-          </a:xfrm>
-          <a:prstGeom prst="rect">
-            <a:avLst/>
-          </a:prstGeom>
-          <a:solidFill>
-            <a:srgbClr val="2563EB"/>
-          </a:solidFill>
-          <a:ln w="12700">
-            <a:solidFill>
-              <a:srgbClr val="2563EB">
-                <a:alpha val="0"/>
-              </a:srgbClr>
-            </a:solidFill>
-            <a:prstDash val="solid"/>
-          </a:ln>
-        </p:spPr>
-      </p:sp>
-      <p:sp>
-        <p:nvSpPr>
-          <p:cNvPr id="36" name="Shape 34"/>
-          <p:cNvSpPr/>
-          <p:nvPr/>
-        </p:nvSpPr>
-        <p:spPr>
-          <a:xfrm>
-            <a:off x="804672" y="4389303"/>
-            <a:ext cx="374538" cy="374538"/>
-          </a:xfrm>
-          <a:prstGeom prst="ellipse">
-            <a:avLst/>
-          </a:prstGeom>
-          <a:solidFill>
-            <a:srgbClr val="2563EB"/>
-          </a:solidFill>
-          <a:ln w="12700">
-            <a:solidFill>
-              <a:srgbClr val="2563EB">
-                <a:alpha val="0"/>
-              </a:srgbClr>
-            </a:solidFill>
-            <a:prstDash val="solid"/>
-          </a:ln>
-        </p:spPr>
-      </p:sp>
-      <p:sp>
-        <p:nvSpPr>
-          <p:cNvPr id="37" name="Text 35"/>
-          <p:cNvSpPr txBox="1"/>
-          <p:nvPr/>
-        </p:nvSpPr>
-        <p:spPr>
-          <a:xfrm>
-            <a:off x="804672" y="4389303"/>
-            <a:ext cx="374538" cy="374538"/>
-          </a:xfrm>
-          <a:prstGeom prst="rect">
-            <a:avLst/>
-          </a:prstGeom>
-          <a:noFill/>
-          <a:ln/>
-        </p:spPr>
-        <p:txBody>
-          <a:bodyPr wrap="square" lIns="0" tIns="0" rIns="0" bIns="0" rtlCol="0" anchor="ctr">
-            <a:normAutofit/>
-          </a:bodyPr>
-          <a:lstStyle/>
-          <a:p>
-            <a:pPr algn="ctr" indent="0" marL="0">
-              <a:lnSpc>
-                <a:spcPct val="120000"/>
-              </a:lnSpc>
-              <a:buNone/>
-            </a:pPr>
-            <a:r>
-              <a:rPr lang="en-US" sz="1500" b="1" dirty="0">
-                <a:solidFill>
-                  <a:srgbClr val="F8FAFC"/>
-                </a:solidFill>
-                <a:latin typeface="Pretendard" pitchFamily="34" charset="0"/>
-                <a:ea typeface="Pretendard" pitchFamily="34" charset="-122"/>
-                <a:cs typeface="Pretendard" pitchFamily="34" charset="-120"/>
-              </a:rPr>
-              <a:t>6</a:t>
-            </a:r>
-            <a:endParaRPr lang="en-US" sz="1500" dirty="0"/>
-          </a:p>
-        </p:txBody>
-      </p:sp>
-      <p:sp>
-        <p:nvSpPr>
-          <p:cNvPr id="38" name="Text 36"/>
-          <p:cNvSpPr txBox="1"/>
-          <p:nvPr/>
-        </p:nvSpPr>
-        <p:spPr>
-          <a:xfrm>
-            <a:off x="1325514" y="4119372"/>
-            <a:ext cx="2585070" cy="914400"/>
-          </a:xfrm>
-          <a:prstGeom prst="rect">
-            <a:avLst/>
-          </a:prstGeom>
-          <a:noFill/>
-          <a:ln/>
-        </p:spPr>
-        <p:txBody>
-          <a:bodyPr wrap="square" lIns="0" tIns="25400" rIns="25400" bIns="0" rtlCol="0" anchor="ctr">
-            <a:normAutofit/>
-          </a:bodyPr>
-          <a:lstStyle/>
-          <a:p>
-            <a:pPr algn="l" indent="0" marL="0">
-              <a:lnSpc>
-                <a:spcPct val="92000"/>
-              </a:lnSpc>
-              <a:buNone/>
-            </a:pPr>
-            <a:r>
-              <a:rPr lang="en-US" sz="1600" dirty="0">
-                <a:solidFill>
-                  <a:srgbClr val="111827"/>
-                </a:solidFill>
-                <a:latin typeface="Pretendard" pitchFamily="34" charset="0"/>
-                <a:ea typeface="Pretendard" pitchFamily="34" charset="-122"/>
-                <a:cs typeface="Pretendard" pitchFamily="34" charset="-120"/>
-              </a:rPr>
-              <a:t>Render PPTX HTML PDF</a:t>
-            </a:r>
-            <a:endParaRPr lang="en-US" sz="1600" dirty="0"/>
+            <a:endParaRPr lang="en-US" sz="2200" dirty="0"/>
           </a:p>
         </p:txBody>
       </p:sp>
@@ -4968,14 +4053,210 @@
       </p:sp>
       <p:sp>
         <p:nvSpPr>
-          <p:cNvPr id="3" name="Shape 1"/>
+          <p:cNvPr id="3" name="Text 1"/>
+          <p:cNvSpPr txBox="1"/>
+          <p:nvPr/>
+        </p:nvSpPr>
+        <p:spPr>
+          <a:xfrm>
+            <a:off x="731520" y="457200"/>
+            <a:ext cx="10698480" cy="731520"/>
+          </a:xfrm>
+          <a:prstGeom prst="rect">
+            <a:avLst/>
+          </a:prstGeom>
+          <a:noFill/>
+          <a:ln/>
+        </p:spPr>
+        <p:txBody>
+          <a:bodyPr wrap="square" lIns="0" tIns="0" rIns="0" bIns="0" rtlCol="0" anchor="ctr"/>
+          <a:lstStyle/>
+          <a:p>
+            <a:pPr algn="ctr" indent="0" marL="0">
+              <a:lnSpc>
+                <a:spcPct val="120000"/>
+              </a:lnSpc>
+              <a:buNone/>
+            </a:pPr>
+            <a:r>
+              <a:rPr lang="en-US" sz="3400" b="1" dirty="0">
+                <a:solidFill>
+                  <a:srgbClr val="111827"/>
+                </a:solidFill>
+                <a:latin typeface="Pretendard" pitchFamily="34" charset="0"/>
+                <a:ea typeface="Pretendard" pitchFamily="34" charset="-122"/>
+                <a:cs typeface="Pretendard" pitchFamily="34" charset="-120"/>
+              </a:rPr>
+              <a:t>Pipeline Diagram</a:t>
+            </a:r>
+            <a:endParaRPr lang="en-US" sz="3400" dirty="0"/>
+          </a:p>
+        </p:txBody>
+      </p:sp>
+      <p:sp>
+        <p:nvSpPr>
+          <p:cNvPr id="4" name="Shape 2"/>
           <p:cNvSpPr/>
           <p:nvPr/>
         </p:nvSpPr>
         <p:spPr>
           <a:xfrm>
-            <a:off x="914400" y="1463040"/>
-            <a:ext cx="10241280" cy="73152"/>
+            <a:off x="4002024" y="3095244"/>
+            <a:ext cx="457200" cy="0"/>
+          </a:xfrm>
+          <a:prstGeom prst="line">
+            <a:avLst/>
+          </a:prstGeom>
+          <a:noFill/>
+          <a:ln w="12700">
+            <a:solidFill>
+              <a:srgbClr val="2563EB"/>
+            </a:solidFill>
+            <a:prstDash val="solid"/>
+            <a:tailEnd type="triangle"/>
+          </a:ln>
+        </p:spPr>
+      </p:sp>
+      <p:sp>
+        <p:nvSpPr>
+          <p:cNvPr id="5" name="Shape 3"/>
+          <p:cNvSpPr/>
+          <p:nvPr/>
+        </p:nvSpPr>
+        <p:spPr>
+          <a:xfrm>
+            <a:off x="7748016" y="3095244"/>
+            <a:ext cx="457200" cy="0"/>
+          </a:xfrm>
+          <a:prstGeom prst="line">
+            <a:avLst/>
+          </a:prstGeom>
+          <a:noFill/>
+          <a:ln w="12700">
+            <a:solidFill>
+              <a:srgbClr val="2563EB"/>
+            </a:solidFill>
+            <a:prstDash val="solid"/>
+            <a:tailEnd type="triangle"/>
+          </a:ln>
+        </p:spPr>
+      </p:sp>
+      <p:sp>
+        <p:nvSpPr>
+          <p:cNvPr id="6" name="Shape 4"/>
+          <p:cNvSpPr/>
+          <p:nvPr/>
+        </p:nvSpPr>
+        <p:spPr>
+          <a:xfrm>
+            <a:off x="9849612" y="3627791"/>
+            <a:ext cx="0" cy="416235"/>
+          </a:xfrm>
+          <a:prstGeom prst="line">
+            <a:avLst/>
+          </a:prstGeom>
+          <a:noFill/>
+          <a:ln w="12700">
+            <a:solidFill>
+              <a:srgbClr val="2563EB"/>
+            </a:solidFill>
+            <a:prstDash val="solid"/>
+            <a:tailEnd type="triangle"/>
+          </a:ln>
+        </p:spPr>
+      </p:sp>
+      <p:sp>
+        <p:nvSpPr>
+          <p:cNvPr id="7" name="Shape 5"/>
+          <p:cNvSpPr/>
+          <p:nvPr/>
+        </p:nvSpPr>
+        <p:spPr>
+          <a:xfrm>
+            <a:off x="7748016" y="4576572"/>
+            <a:ext cx="457200" cy="0"/>
+          </a:xfrm>
+          <a:prstGeom prst="line">
+            <a:avLst/>
+          </a:prstGeom>
+          <a:noFill/>
+          <a:ln w="12700">
+            <a:solidFill>
+              <a:srgbClr val="2563EB"/>
+            </a:solidFill>
+            <a:prstDash val="solid"/>
+            <a:headEnd type="triangle"/>
+          </a:ln>
+        </p:spPr>
+      </p:sp>
+      <p:sp>
+        <p:nvSpPr>
+          <p:cNvPr id="8" name="Shape 6"/>
+          <p:cNvSpPr/>
+          <p:nvPr/>
+        </p:nvSpPr>
+        <p:spPr>
+          <a:xfrm>
+            <a:off x="4002024" y="4576572"/>
+            <a:ext cx="457200" cy="0"/>
+          </a:xfrm>
+          <a:prstGeom prst="line">
+            <a:avLst/>
+          </a:prstGeom>
+          <a:noFill/>
+          <a:ln w="12700">
+            <a:solidFill>
+              <a:srgbClr val="2563EB"/>
+            </a:solidFill>
+            <a:prstDash val="solid"/>
+            <a:headEnd type="triangle"/>
+          </a:ln>
+        </p:spPr>
+      </p:sp>
+      <p:sp>
+        <p:nvSpPr>
+          <p:cNvPr id="9" name="Shape 7"/>
+          <p:cNvSpPr/>
+          <p:nvPr/>
+        </p:nvSpPr>
+        <p:spPr>
+          <a:xfrm>
+            <a:off x="640080" y="2510028"/>
+            <a:ext cx="3435096" cy="1170432"/>
+          </a:xfrm>
+          <a:prstGeom prst="roundRect">
+            <a:avLst>
+              <a:gd name="adj" fmla="val 4688"/>
+            </a:avLst>
+          </a:prstGeom>
+          <a:solidFill>
+            <a:srgbClr val="FFFFFF"/>
+          </a:solidFill>
+          <a:ln w="12700">
+            <a:solidFill>
+              <a:srgbClr val="2563EB"/>
+            </a:solidFill>
+            <a:prstDash val="solid"/>
+          </a:ln>
+          <a:effectLst>
+            <a:outerShdw sx="100000" sy="100000" kx="0" ky="0" algn="bl" rotWithShape="0" blurRad="12700" dist="50800" dir="2700000">
+              <a:srgbClr val="000000">
+                <a:alpha val="12000"/>
+              </a:srgbClr>
+            </a:outerShdw>
+          </a:effectLst>
+        </p:spPr>
+      </p:sp>
+      <p:sp>
+        <p:nvSpPr>
+          <p:cNvPr id="10" name="Shape 8"/>
+          <p:cNvSpPr/>
+          <p:nvPr/>
+        </p:nvSpPr>
+        <p:spPr>
+          <a:xfrm>
+            <a:off x="640080" y="2510028"/>
+            <a:ext cx="3435096" cy="109728"/>
           </a:xfrm>
           <a:prstGeom prst="rect">
             <a:avLst/>
@@ -4995,7 +4276,1433 @@
       </p:sp>
       <p:sp>
         <p:nvSpPr>
-          <p:cNvPr id="4" name="Text 2"/>
+          <p:cNvPr id="11" name="Shape 9"/>
+          <p:cNvSpPr/>
+          <p:nvPr/>
+        </p:nvSpPr>
+        <p:spPr>
+          <a:xfrm>
+            <a:off x="804672" y="2907975"/>
+            <a:ext cx="374538" cy="374538"/>
+          </a:xfrm>
+          <a:prstGeom prst="ellipse">
+            <a:avLst/>
+          </a:prstGeom>
+          <a:solidFill>
+            <a:srgbClr val="2563EB"/>
+          </a:solidFill>
+          <a:ln w="12700">
+            <a:solidFill>
+              <a:srgbClr val="2563EB">
+                <a:alpha val="0"/>
+              </a:srgbClr>
+            </a:solidFill>
+            <a:prstDash val="solid"/>
+          </a:ln>
+        </p:spPr>
+      </p:sp>
+      <p:sp>
+        <p:nvSpPr>
+          <p:cNvPr id="12" name="Text 10"/>
+          <p:cNvSpPr txBox="1"/>
+          <p:nvPr/>
+        </p:nvSpPr>
+        <p:spPr>
+          <a:xfrm>
+            <a:off x="804672" y="2907975"/>
+            <a:ext cx="374538" cy="374538"/>
+          </a:xfrm>
+          <a:prstGeom prst="rect">
+            <a:avLst/>
+          </a:prstGeom>
+          <a:noFill/>
+          <a:ln/>
+        </p:spPr>
+        <p:txBody>
+          <a:bodyPr wrap="square" lIns="0" tIns="0" rIns="0" bIns="0" rtlCol="0" anchor="ctr">
+            <a:normAutofit/>
+          </a:bodyPr>
+          <a:lstStyle/>
+          <a:p>
+            <a:pPr algn="ctr" indent="0" marL="0">
+              <a:lnSpc>
+                <a:spcPct val="120000"/>
+              </a:lnSpc>
+              <a:buNone/>
+            </a:pPr>
+            <a:r>
+              <a:rPr lang="en-US" sz="1500" b="1" dirty="0">
+                <a:solidFill>
+                  <a:srgbClr val="F8FAFC"/>
+                </a:solidFill>
+                <a:latin typeface="Pretendard" pitchFamily="34" charset="0"/>
+                <a:ea typeface="Pretendard" pitchFamily="34" charset="-122"/>
+                <a:cs typeface="Pretendard" pitchFamily="34" charset="-120"/>
+              </a:rPr>
+              <a:t>1</a:t>
+            </a:r>
+            <a:endParaRPr lang="en-US" sz="1500" dirty="0"/>
+          </a:p>
+        </p:txBody>
+      </p:sp>
+      <p:sp>
+        <p:nvSpPr>
+          <p:cNvPr id="13" name="Text 11"/>
+          <p:cNvSpPr txBox="1"/>
+          <p:nvPr/>
+        </p:nvSpPr>
+        <p:spPr>
+          <a:xfrm>
+            <a:off x="1325514" y="2638044"/>
+            <a:ext cx="2585070" cy="914400"/>
+          </a:xfrm>
+          <a:prstGeom prst="rect">
+            <a:avLst/>
+          </a:prstGeom>
+          <a:noFill/>
+          <a:ln/>
+        </p:spPr>
+        <p:txBody>
+          <a:bodyPr wrap="square" lIns="0" tIns="25400" rIns="25400" bIns="0" rtlCol="0" anchor="ctr">
+            <a:normAutofit/>
+          </a:bodyPr>
+          <a:lstStyle/>
+          <a:p>
+            <a:pPr algn="l" indent="0" marL="0">
+              <a:lnSpc>
+                <a:spcPct val="92000"/>
+              </a:lnSpc>
+              <a:buNone/>
+            </a:pPr>
+            <a:r>
+              <a:rPr lang="en-US" sz="1600" dirty="0">
+                <a:solidFill>
+                  <a:srgbClr val="111827"/>
+                </a:solidFill>
+                <a:latin typeface="Pretendard" pitchFamily="34" charset="0"/>
+                <a:ea typeface="Pretendard" pitchFamily="34" charset="-122"/>
+                <a:cs typeface="Pretendard" pitchFamily="34" charset="-120"/>
+              </a:rPr>
+              <a:t>Markdown source</a:t>
+            </a:r>
+            <a:endParaRPr lang="en-US" sz="1600" dirty="0"/>
+          </a:p>
+        </p:txBody>
+      </p:sp>
+      <p:sp>
+        <p:nvSpPr>
+          <p:cNvPr id="14" name="Shape 12"/>
+          <p:cNvSpPr/>
+          <p:nvPr/>
+        </p:nvSpPr>
+        <p:spPr>
+          <a:xfrm>
+            <a:off x="4386072" y="2510028"/>
+            <a:ext cx="3435096" cy="1170432"/>
+          </a:xfrm>
+          <a:prstGeom prst="roundRect">
+            <a:avLst>
+              <a:gd name="adj" fmla="val 4688"/>
+            </a:avLst>
+          </a:prstGeom>
+          <a:solidFill>
+            <a:srgbClr val="FFFFFF"/>
+          </a:solidFill>
+          <a:ln w="12700">
+            <a:solidFill>
+              <a:srgbClr val="2563EB"/>
+            </a:solidFill>
+            <a:prstDash val="solid"/>
+          </a:ln>
+          <a:effectLst>
+            <a:outerShdw sx="100000" sy="100000" kx="0" ky="0" algn="bl" rotWithShape="0" blurRad="12700" dist="50800" dir="2700000">
+              <a:srgbClr val="000000">
+                <a:alpha val="12000"/>
+              </a:srgbClr>
+            </a:outerShdw>
+          </a:effectLst>
+        </p:spPr>
+      </p:sp>
+      <p:sp>
+        <p:nvSpPr>
+          <p:cNvPr id="15" name="Shape 13"/>
+          <p:cNvSpPr/>
+          <p:nvPr/>
+        </p:nvSpPr>
+        <p:spPr>
+          <a:xfrm>
+            <a:off x="4386072" y="2510028"/>
+            <a:ext cx="3435096" cy="109728"/>
+          </a:xfrm>
+          <a:prstGeom prst="rect">
+            <a:avLst/>
+          </a:prstGeom>
+          <a:solidFill>
+            <a:srgbClr val="2563EB"/>
+          </a:solidFill>
+          <a:ln w="12700">
+            <a:solidFill>
+              <a:srgbClr val="2563EB">
+                <a:alpha val="0"/>
+              </a:srgbClr>
+            </a:solidFill>
+            <a:prstDash val="solid"/>
+          </a:ln>
+        </p:spPr>
+      </p:sp>
+      <p:sp>
+        <p:nvSpPr>
+          <p:cNvPr id="16" name="Shape 14"/>
+          <p:cNvSpPr/>
+          <p:nvPr/>
+        </p:nvSpPr>
+        <p:spPr>
+          <a:xfrm>
+            <a:off x="4550664" y="2907975"/>
+            <a:ext cx="374538" cy="374538"/>
+          </a:xfrm>
+          <a:prstGeom prst="ellipse">
+            <a:avLst/>
+          </a:prstGeom>
+          <a:solidFill>
+            <a:srgbClr val="2563EB"/>
+          </a:solidFill>
+          <a:ln w="12700">
+            <a:solidFill>
+              <a:srgbClr val="2563EB">
+                <a:alpha val="0"/>
+              </a:srgbClr>
+            </a:solidFill>
+            <a:prstDash val="solid"/>
+          </a:ln>
+        </p:spPr>
+      </p:sp>
+      <p:sp>
+        <p:nvSpPr>
+          <p:cNvPr id="17" name="Text 15"/>
+          <p:cNvSpPr txBox="1"/>
+          <p:nvPr/>
+        </p:nvSpPr>
+        <p:spPr>
+          <a:xfrm>
+            <a:off x="4550664" y="2907975"/>
+            <a:ext cx="374538" cy="374538"/>
+          </a:xfrm>
+          <a:prstGeom prst="rect">
+            <a:avLst/>
+          </a:prstGeom>
+          <a:noFill/>
+          <a:ln/>
+        </p:spPr>
+        <p:txBody>
+          <a:bodyPr wrap="square" lIns="0" tIns="0" rIns="0" bIns="0" rtlCol="0" anchor="ctr">
+            <a:normAutofit/>
+          </a:bodyPr>
+          <a:lstStyle/>
+          <a:p>
+            <a:pPr algn="ctr" indent="0" marL="0">
+              <a:lnSpc>
+                <a:spcPct val="120000"/>
+              </a:lnSpc>
+              <a:buNone/>
+            </a:pPr>
+            <a:r>
+              <a:rPr lang="en-US" sz="1500" b="1" dirty="0">
+                <a:solidFill>
+                  <a:srgbClr val="F8FAFC"/>
+                </a:solidFill>
+                <a:latin typeface="Pretendard" pitchFamily="34" charset="0"/>
+                <a:ea typeface="Pretendard" pitchFamily="34" charset="-122"/>
+                <a:cs typeface="Pretendard" pitchFamily="34" charset="-120"/>
+              </a:rPr>
+              <a:t>2</a:t>
+            </a:r>
+            <a:endParaRPr lang="en-US" sz="1500" dirty="0"/>
+          </a:p>
+        </p:txBody>
+      </p:sp>
+      <p:sp>
+        <p:nvSpPr>
+          <p:cNvPr id="18" name="Text 16"/>
+          <p:cNvSpPr txBox="1"/>
+          <p:nvPr/>
+        </p:nvSpPr>
+        <p:spPr>
+          <a:xfrm>
+            <a:off x="5071506" y="2638044"/>
+            <a:ext cx="2585070" cy="914400"/>
+          </a:xfrm>
+          <a:prstGeom prst="rect">
+            <a:avLst/>
+          </a:prstGeom>
+          <a:noFill/>
+          <a:ln/>
+        </p:spPr>
+        <p:txBody>
+          <a:bodyPr wrap="square" lIns="0" tIns="25400" rIns="25400" bIns="0" rtlCol="0" anchor="ctr">
+            <a:normAutofit/>
+          </a:bodyPr>
+          <a:lstStyle/>
+          <a:p>
+            <a:pPr algn="l" indent="0" marL="0">
+              <a:lnSpc>
+                <a:spcPct val="92000"/>
+              </a:lnSpc>
+              <a:buNone/>
+            </a:pPr>
+            <a:r>
+              <a:rPr lang="en-US" sz="1600" dirty="0">
+                <a:solidFill>
+                  <a:srgbClr val="111827"/>
+                </a:solidFill>
+                <a:latin typeface="Pretendard" pitchFamily="34" charset="0"/>
+                <a:ea typeface="Pretendard" pitchFamily="34" charset="-122"/>
+                <a:cs typeface="Pretendard" pitchFamily="34" charset="-120"/>
+              </a:rPr>
+              <a:t>Parse blocks</a:t>
+            </a:r>
+            <a:endParaRPr lang="en-US" sz="1600" dirty="0"/>
+          </a:p>
+        </p:txBody>
+      </p:sp>
+      <p:sp>
+        <p:nvSpPr>
+          <p:cNvPr id="19" name="Shape 17"/>
+          <p:cNvSpPr/>
+          <p:nvPr/>
+        </p:nvSpPr>
+        <p:spPr>
+          <a:xfrm>
+            <a:off x="8132064" y="2510028"/>
+            <a:ext cx="3435096" cy="1170432"/>
+          </a:xfrm>
+          <a:prstGeom prst="roundRect">
+            <a:avLst>
+              <a:gd name="adj" fmla="val 4688"/>
+            </a:avLst>
+          </a:prstGeom>
+          <a:solidFill>
+            <a:srgbClr val="FFFFFF"/>
+          </a:solidFill>
+          <a:ln w="12700">
+            <a:solidFill>
+              <a:srgbClr val="2563EB"/>
+            </a:solidFill>
+            <a:prstDash val="solid"/>
+          </a:ln>
+          <a:effectLst>
+            <a:outerShdw sx="100000" sy="100000" kx="0" ky="0" algn="bl" rotWithShape="0" blurRad="12700" dist="50800" dir="2700000">
+              <a:srgbClr val="000000">
+                <a:alpha val="12000"/>
+              </a:srgbClr>
+            </a:outerShdw>
+          </a:effectLst>
+        </p:spPr>
+      </p:sp>
+      <p:sp>
+        <p:nvSpPr>
+          <p:cNvPr id="20" name="Shape 18"/>
+          <p:cNvSpPr/>
+          <p:nvPr/>
+        </p:nvSpPr>
+        <p:spPr>
+          <a:xfrm>
+            <a:off x="8132064" y="2510028"/>
+            <a:ext cx="3435096" cy="109728"/>
+          </a:xfrm>
+          <a:prstGeom prst="rect">
+            <a:avLst/>
+          </a:prstGeom>
+          <a:solidFill>
+            <a:srgbClr val="2563EB"/>
+          </a:solidFill>
+          <a:ln w="12700">
+            <a:solidFill>
+              <a:srgbClr val="2563EB">
+                <a:alpha val="0"/>
+              </a:srgbClr>
+            </a:solidFill>
+            <a:prstDash val="solid"/>
+          </a:ln>
+        </p:spPr>
+      </p:sp>
+      <p:sp>
+        <p:nvSpPr>
+          <p:cNvPr id="21" name="Shape 19"/>
+          <p:cNvSpPr/>
+          <p:nvPr/>
+        </p:nvSpPr>
+        <p:spPr>
+          <a:xfrm>
+            <a:off x="8296656" y="2907975"/>
+            <a:ext cx="374538" cy="374538"/>
+          </a:xfrm>
+          <a:prstGeom prst="ellipse">
+            <a:avLst/>
+          </a:prstGeom>
+          <a:solidFill>
+            <a:srgbClr val="2563EB"/>
+          </a:solidFill>
+          <a:ln w="12700">
+            <a:solidFill>
+              <a:srgbClr val="2563EB">
+                <a:alpha val="0"/>
+              </a:srgbClr>
+            </a:solidFill>
+            <a:prstDash val="solid"/>
+          </a:ln>
+        </p:spPr>
+      </p:sp>
+      <p:sp>
+        <p:nvSpPr>
+          <p:cNvPr id="22" name="Text 20"/>
+          <p:cNvSpPr txBox="1"/>
+          <p:nvPr/>
+        </p:nvSpPr>
+        <p:spPr>
+          <a:xfrm>
+            <a:off x="8296656" y="2907975"/>
+            <a:ext cx="374538" cy="374538"/>
+          </a:xfrm>
+          <a:prstGeom prst="rect">
+            <a:avLst/>
+          </a:prstGeom>
+          <a:noFill/>
+          <a:ln/>
+        </p:spPr>
+        <p:txBody>
+          <a:bodyPr wrap="square" lIns="0" tIns="0" rIns="0" bIns="0" rtlCol="0" anchor="ctr">
+            <a:normAutofit/>
+          </a:bodyPr>
+          <a:lstStyle/>
+          <a:p>
+            <a:pPr algn="ctr" indent="0" marL="0">
+              <a:lnSpc>
+                <a:spcPct val="120000"/>
+              </a:lnSpc>
+              <a:buNone/>
+            </a:pPr>
+            <a:r>
+              <a:rPr lang="en-US" sz="1500" b="1" dirty="0">
+                <a:solidFill>
+                  <a:srgbClr val="F8FAFC"/>
+                </a:solidFill>
+                <a:latin typeface="Pretendard" pitchFamily="34" charset="0"/>
+                <a:ea typeface="Pretendard" pitchFamily="34" charset="-122"/>
+                <a:cs typeface="Pretendard" pitchFamily="34" charset="-120"/>
+              </a:rPr>
+              <a:t>3</a:t>
+            </a:r>
+            <a:endParaRPr lang="en-US" sz="1500" dirty="0"/>
+          </a:p>
+        </p:txBody>
+      </p:sp>
+      <p:sp>
+        <p:nvSpPr>
+          <p:cNvPr id="23" name="Text 21"/>
+          <p:cNvSpPr txBox="1"/>
+          <p:nvPr/>
+        </p:nvSpPr>
+        <p:spPr>
+          <a:xfrm>
+            <a:off x="8817498" y="2638044"/>
+            <a:ext cx="2585070" cy="914400"/>
+          </a:xfrm>
+          <a:prstGeom prst="rect">
+            <a:avLst/>
+          </a:prstGeom>
+          <a:noFill/>
+          <a:ln/>
+        </p:spPr>
+        <p:txBody>
+          <a:bodyPr wrap="square" lIns="0" tIns="25400" rIns="25400" bIns="0" rtlCol="0" anchor="ctr">
+            <a:normAutofit/>
+          </a:bodyPr>
+          <a:lstStyle/>
+          <a:p>
+            <a:pPr algn="l" indent="0" marL="0">
+              <a:lnSpc>
+                <a:spcPct val="92000"/>
+              </a:lnSpc>
+              <a:buNone/>
+            </a:pPr>
+            <a:r>
+              <a:rPr lang="en-US" sz="1600" dirty="0">
+                <a:solidFill>
+                  <a:srgbClr val="111827"/>
+                </a:solidFill>
+                <a:latin typeface="Pretendard" pitchFamily="34" charset="0"/>
+                <a:ea typeface="Pretendard" pitchFamily="34" charset="-122"/>
+                <a:cs typeface="Pretendard" pitchFamily="34" charset="-120"/>
+              </a:rPr>
+              <a:t>Split slides</a:t>
+            </a:r>
+            <a:endParaRPr lang="en-US" sz="1600" dirty="0"/>
+          </a:p>
+        </p:txBody>
+      </p:sp>
+      <p:sp>
+        <p:nvSpPr>
+          <p:cNvPr id="24" name="Shape 22"/>
+          <p:cNvSpPr/>
+          <p:nvPr/>
+        </p:nvSpPr>
+        <p:spPr>
+          <a:xfrm>
+            <a:off x="8132064" y="3991356"/>
+            <a:ext cx="3435096" cy="1170432"/>
+          </a:xfrm>
+          <a:prstGeom prst="roundRect">
+            <a:avLst>
+              <a:gd name="adj" fmla="val 4688"/>
+            </a:avLst>
+          </a:prstGeom>
+          <a:solidFill>
+            <a:srgbClr val="FFFFFF"/>
+          </a:solidFill>
+          <a:ln w="12700">
+            <a:solidFill>
+              <a:srgbClr val="2563EB"/>
+            </a:solidFill>
+            <a:prstDash val="solid"/>
+          </a:ln>
+          <a:effectLst>
+            <a:outerShdw sx="100000" sy="100000" kx="0" ky="0" algn="bl" rotWithShape="0" blurRad="12700" dist="50800" dir="2700000">
+              <a:srgbClr val="000000">
+                <a:alpha val="12000"/>
+              </a:srgbClr>
+            </a:outerShdw>
+          </a:effectLst>
+        </p:spPr>
+      </p:sp>
+      <p:sp>
+        <p:nvSpPr>
+          <p:cNvPr id="25" name="Shape 23"/>
+          <p:cNvSpPr/>
+          <p:nvPr/>
+        </p:nvSpPr>
+        <p:spPr>
+          <a:xfrm>
+            <a:off x="8132064" y="3991356"/>
+            <a:ext cx="3435096" cy="109728"/>
+          </a:xfrm>
+          <a:prstGeom prst="rect">
+            <a:avLst/>
+          </a:prstGeom>
+          <a:solidFill>
+            <a:srgbClr val="2563EB"/>
+          </a:solidFill>
+          <a:ln w="12700">
+            <a:solidFill>
+              <a:srgbClr val="2563EB">
+                <a:alpha val="0"/>
+              </a:srgbClr>
+            </a:solidFill>
+            <a:prstDash val="solid"/>
+          </a:ln>
+        </p:spPr>
+      </p:sp>
+      <p:sp>
+        <p:nvSpPr>
+          <p:cNvPr id="26" name="Shape 24"/>
+          <p:cNvSpPr/>
+          <p:nvPr/>
+        </p:nvSpPr>
+        <p:spPr>
+          <a:xfrm>
+            <a:off x="8296656" y="4389303"/>
+            <a:ext cx="374538" cy="374538"/>
+          </a:xfrm>
+          <a:prstGeom prst="ellipse">
+            <a:avLst/>
+          </a:prstGeom>
+          <a:solidFill>
+            <a:srgbClr val="2563EB"/>
+          </a:solidFill>
+          <a:ln w="12700">
+            <a:solidFill>
+              <a:srgbClr val="2563EB">
+                <a:alpha val="0"/>
+              </a:srgbClr>
+            </a:solidFill>
+            <a:prstDash val="solid"/>
+          </a:ln>
+        </p:spPr>
+      </p:sp>
+      <p:sp>
+        <p:nvSpPr>
+          <p:cNvPr id="27" name="Text 25"/>
+          <p:cNvSpPr txBox="1"/>
+          <p:nvPr/>
+        </p:nvSpPr>
+        <p:spPr>
+          <a:xfrm>
+            <a:off x="8296656" y="4389303"/>
+            <a:ext cx="374538" cy="374538"/>
+          </a:xfrm>
+          <a:prstGeom prst="rect">
+            <a:avLst/>
+          </a:prstGeom>
+          <a:noFill/>
+          <a:ln/>
+        </p:spPr>
+        <p:txBody>
+          <a:bodyPr wrap="square" lIns="0" tIns="0" rIns="0" bIns="0" rtlCol="0" anchor="ctr">
+            <a:normAutofit/>
+          </a:bodyPr>
+          <a:lstStyle/>
+          <a:p>
+            <a:pPr algn="ctr" indent="0" marL="0">
+              <a:lnSpc>
+                <a:spcPct val="120000"/>
+              </a:lnSpc>
+              <a:buNone/>
+            </a:pPr>
+            <a:r>
+              <a:rPr lang="en-US" sz="1500" b="1" dirty="0">
+                <a:solidFill>
+                  <a:srgbClr val="F8FAFC"/>
+                </a:solidFill>
+                <a:latin typeface="Pretendard" pitchFamily="34" charset="0"/>
+                <a:ea typeface="Pretendard" pitchFamily="34" charset="-122"/>
+                <a:cs typeface="Pretendard" pitchFamily="34" charset="-120"/>
+              </a:rPr>
+              <a:t>4</a:t>
+            </a:r>
+            <a:endParaRPr lang="en-US" sz="1500" dirty="0"/>
+          </a:p>
+        </p:txBody>
+      </p:sp>
+      <p:sp>
+        <p:nvSpPr>
+          <p:cNvPr id="28" name="Text 26"/>
+          <p:cNvSpPr txBox="1"/>
+          <p:nvPr/>
+        </p:nvSpPr>
+        <p:spPr>
+          <a:xfrm>
+            <a:off x="8817498" y="4119372"/>
+            <a:ext cx="2585070" cy="914400"/>
+          </a:xfrm>
+          <a:prstGeom prst="rect">
+            <a:avLst/>
+          </a:prstGeom>
+          <a:noFill/>
+          <a:ln/>
+        </p:spPr>
+        <p:txBody>
+          <a:bodyPr wrap="square" lIns="0" tIns="25400" rIns="25400" bIns="0" rtlCol="0" anchor="ctr">
+            <a:normAutofit/>
+          </a:bodyPr>
+          <a:lstStyle/>
+          <a:p>
+            <a:pPr algn="l" indent="0" marL="0">
+              <a:lnSpc>
+                <a:spcPct val="92000"/>
+              </a:lnSpc>
+              <a:buNone/>
+            </a:pPr>
+            <a:r>
+              <a:rPr lang="en-US" sz="1600" dirty="0">
+                <a:solidFill>
+                  <a:srgbClr val="111827"/>
+                </a:solidFill>
+                <a:latin typeface="Pretendard" pitchFamily="34" charset="0"/>
+                <a:ea typeface="Pretendard" pitchFamily="34" charset="-122"/>
+                <a:cs typeface="Pretendard" pitchFamily="34" charset="-120"/>
+              </a:rPr>
+              <a:t>Layout objects</a:t>
+            </a:r>
+            <a:endParaRPr lang="en-US" sz="1600" dirty="0"/>
+          </a:p>
+        </p:txBody>
+      </p:sp>
+      <p:sp>
+        <p:nvSpPr>
+          <p:cNvPr id="29" name="Shape 27"/>
+          <p:cNvSpPr/>
+          <p:nvPr/>
+        </p:nvSpPr>
+        <p:spPr>
+          <a:xfrm>
+            <a:off x="4386072" y="3991356"/>
+            <a:ext cx="3435096" cy="1170432"/>
+          </a:xfrm>
+          <a:prstGeom prst="roundRect">
+            <a:avLst>
+              <a:gd name="adj" fmla="val 4688"/>
+            </a:avLst>
+          </a:prstGeom>
+          <a:solidFill>
+            <a:srgbClr val="FFFFFF"/>
+          </a:solidFill>
+          <a:ln w="12700">
+            <a:solidFill>
+              <a:srgbClr val="2563EB"/>
+            </a:solidFill>
+            <a:prstDash val="solid"/>
+          </a:ln>
+          <a:effectLst>
+            <a:outerShdw sx="100000" sy="100000" kx="0" ky="0" algn="bl" rotWithShape="0" blurRad="12700" dist="50800" dir="2700000">
+              <a:srgbClr val="000000">
+                <a:alpha val="12000"/>
+              </a:srgbClr>
+            </a:outerShdw>
+          </a:effectLst>
+        </p:spPr>
+      </p:sp>
+      <p:sp>
+        <p:nvSpPr>
+          <p:cNvPr id="30" name="Shape 28"/>
+          <p:cNvSpPr/>
+          <p:nvPr/>
+        </p:nvSpPr>
+        <p:spPr>
+          <a:xfrm>
+            <a:off x="4386072" y="3991356"/>
+            <a:ext cx="3435096" cy="109728"/>
+          </a:xfrm>
+          <a:prstGeom prst="rect">
+            <a:avLst/>
+          </a:prstGeom>
+          <a:solidFill>
+            <a:srgbClr val="2563EB"/>
+          </a:solidFill>
+          <a:ln w="12700">
+            <a:solidFill>
+              <a:srgbClr val="2563EB">
+                <a:alpha val="0"/>
+              </a:srgbClr>
+            </a:solidFill>
+            <a:prstDash val="solid"/>
+          </a:ln>
+        </p:spPr>
+      </p:sp>
+      <p:sp>
+        <p:nvSpPr>
+          <p:cNvPr id="31" name="Shape 29"/>
+          <p:cNvSpPr/>
+          <p:nvPr/>
+        </p:nvSpPr>
+        <p:spPr>
+          <a:xfrm>
+            <a:off x="4550664" y="4389303"/>
+            <a:ext cx="374538" cy="374538"/>
+          </a:xfrm>
+          <a:prstGeom prst="ellipse">
+            <a:avLst/>
+          </a:prstGeom>
+          <a:solidFill>
+            <a:srgbClr val="2563EB"/>
+          </a:solidFill>
+          <a:ln w="12700">
+            <a:solidFill>
+              <a:srgbClr val="2563EB">
+                <a:alpha val="0"/>
+              </a:srgbClr>
+            </a:solidFill>
+            <a:prstDash val="solid"/>
+          </a:ln>
+        </p:spPr>
+      </p:sp>
+      <p:sp>
+        <p:nvSpPr>
+          <p:cNvPr id="32" name="Text 30"/>
+          <p:cNvSpPr txBox="1"/>
+          <p:nvPr/>
+        </p:nvSpPr>
+        <p:spPr>
+          <a:xfrm>
+            <a:off x="4550664" y="4389303"/>
+            <a:ext cx="374538" cy="374538"/>
+          </a:xfrm>
+          <a:prstGeom prst="rect">
+            <a:avLst/>
+          </a:prstGeom>
+          <a:noFill/>
+          <a:ln/>
+        </p:spPr>
+        <p:txBody>
+          <a:bodyPr wrap="square" lIns="0" tIns="0" rIns="0" bIns="0" rtlCol="0" anchor="ctr">
+            <a:normAutofit/>
+          </a:bodyPr>
+          <a:lstStyle/>
+          <a:p>
+            <a:pPr algn="ctr" indent="0" marL="0">
+              <a:lnSpc>
+                <a:spcPct val="120000"/>
+              </a:lnSpc>
+              <a:buNone/>
+            </a:pPr>
+            <a:r>
+              <a:rPr lang="en-US" sz="1500" b="1" dirty="0">
+                <a:solidFill>
+                  <a:srgbClr val="F8FAFC"/>
+                </a:solidFill>
+                <a:latin typeface="Pretendard" pitchFamily="34" charset="0"/>
+                <a:ea typeface="Pretendard" pitchFamily="34" charset="-122"/>
+                <a:cs typeface="Pretendard" pitchFamily="34" charset="-120"/>
+              </a:rPr>
+              <a:t>5</a:t>
+            </a:r>
+            <a:endParaRPr lang="en-US" sz="1500" dirty="0"/>
+          </a:p>
+        </p:txBody>
+      </p:sp>
+      <p:sp>
+        <p:nvSpPr>
+          <p:cNvPr id="33" name="Text 31"/>
+          <p:cNvSpPr txBox="1"/>
+          <p:nvPr/>
+        </p:nvSpPr>
+        <p:spPr>
+          <a:xfrm>
+            <a:off x="5071506" y="4119372"/>
+            <a:ext cx="2585070" cy="914400"/>
+          </a:xfrm>
+          <a:prstGeom prst="rect">
+            <a:avLst/>
+          </a:prstGeom>
+          <a:noFill/>
+          <a:ln/>
+        </p:spPr>
+        <p:txBody>
+          <a:bodyPr wrap="square" lIns="0" tIns="25400" rIns="25400" bIns="0" rtlCol="0" anchor="ctr">
+            <a:normAutofit/>
+          </a:bodyPr>
+          <a:lstStyle/>
+          <a:p>
+            <a:pPr algn="l" indent="0" marL="0">
+              <a:lnSpc>
+                <a:spcPct val="92000"/>
+              </a:lnSpc>
+              <a:buNone/>
+            </a:pPr>
+            <a:r>
+              <a:rPr lang="en-US" sz="1600" dirty="0">
+                <a:solidFill>
+                  <a:srgbClr val="111827"/>
+                </a:solidFill>
+                <a:latin typeface="Pretendard" pitchFamily="34" charset="0"/>
+                <a:ea typeface="Pretendard" pitchFamily="34" charset="-122"/>
+                <a:cs typeface="Pretendard" pitchFamily="34" charset="-120"/>
+              </a:rPr>
+              <a:t>Validate overflow</a:t>
+            </a:r>
+            <a:endParaRPr lang="en-US" sz="1600" dirty="0"/>
+          </a:p>
+        </p:txBody>
+      </p:sp>
+      <p:sp>
+        <p:nvSpPr>
+          <p:cNvPr id="34" name="Shape 32"/>
+          <p:cNvSpPr/>
+          <p:nvPr/>
+        </p:nvSpPr>
+        <p:spPr>
+          <a:xfrm>
+            <a:off x="640080" y="3991356"/>
+            <a:ext cx="3435096" cy="1170432"/>
+          </a:xfrm>
+          <a:prstGeom prst="roundRect">
+            <a:avLst>
+              <a:gd name="adj" fmla="val 4688"/>
+            </a:avLst>
+          </a:prstGeom>
+          <a:solidFill>
+            <a:srgbClr val="FFFFFF"/>
+          </a:solidFill>
+          <a:ln w="12700">
+            <a:solidFill>
+              <a:srgbClr val="2563EB"/>
+            </a:solidFill>
+            <a:prstDash val="solid"/>
+          </a:ln>
+          <a:effectLst>
+            <a:outerShdw sx="100000" sy="100000" kx="0" ky="0" algn="bl" rotWithShape="0" blurRad="12700" dist="50800" dir="2700000">
+              <a:srgbClr val="000000">
+                <a:alpha val="12000"/>
+              </a:srgbClr>
+            </a:outerShdw>
+          </a:effectLst>
+        </p:spPr>
+      </p:sp>
+      <p:sp>
+        <p:nvSpPr>
+          <p:cNvPr id="35" name="Shape 33"/>
+          <p:cNvSpPr/>
+          <p:nvPr/>
+        </p:nvSpPr>
+        <p:spPr>
+          <a:xfrm>
+            <a:off x="640080" y="3991356"/>
+            <a:ext cx="3435096" cy="109728"/>
+          </a:xfrm>
+          <a:prstGeom prst="rect">
+            <a:avLst/>
+          </a:prstGeom>
+          <a:solidFill>
+            <a:srgbClr val="2563EB"/>
+          </a:solidFill>
+          <a:ln w="12700">
+            <a:solidFill>
+              <a:srgbClr val="2563EB">
+                <a:alpha val="0"/>
+              </a:srgbClr>
+            </a:solidFill>
+            <a:prstDash val="solid"/>
+          </a:ln>
+        </p:spPr>
+      </p:sp>
+      <p:sp>
+        <p:nvSpPr>
+          <p:cNvPr id="36" name="Shape 34"/>
+          <p:cNvSpPr/>
+          <p:nvPr/>
+        </p:nvSpPr>
+        <p:spPr>
+          <a:xfrm>
+            <a:off x="804672" y="4389303"/>
+            <a:ext cx="374538" cy="374538"/>
+          </a:xfrm>
+          <a:prstGeom prst="ellipse">
+            <a:avLst/>
+          </a:prstGeom>
+          <a:solidFill>
+            <a:srgbClr val="2563EB"/>
+          </a:solidFill>
+          <a:ln w="12700">
+            <a:solidFill>
+              <a:srgbClr val="2563EB">
+                <a:alpha val="0"/>
+              </a:srgbClr>
+            </a:solidFill>
+            <a:prstDash val="solid"/>
+          </a:ln>
+        </p:spPr>
+      </p:sp>
+      <p:sp>
+        <p:nvSpPr>
+          <p:cNvPr id="37" name="Text 35"/>
+          <p:cNvSpPr txBox="1"/>
+          <p:nvPr/>
+        </p:nvSpPr>
+        <p:spPr>
+          <a:xfrm>
+            <a:off x="804672" y="4389303"/>
+            <a:ext cx="374538" cy="374538"/>
+          </a:xfrm>
+          <a:prstGeom prst="rect">
+            <a:avLst/>
+          </a:prstGeom>
+          <a:noFill/>
+          <a:ln/>
+        </p:spPr>
+        <p:txBody>
+          <a:bodyPr wrap="square" lIns="0" tIns="0" rIns="0" bIns="0" rtlCol="0" anchor="ctr">
+            <a:normAutofit/>
+          </a:bodyPr>
+          <a:lstStyle/>
+          <a:p>
+            <a:pPr algn="ctr" indent="0" marL="0">
+              <a:lnSpc>
+                <a:spcPct val="120000"/>
+              </a:lnSpc>
+              <a:buNone/>
+            </a:pPr>
+            <a:r>
+              <a:rPr lang="en-US" sz="1500" b="1" dirty="0">
+                <a:solidFill>
+                  <a:srgbClr val="F8FAFC"/>
+                </a:solidFill>
+                <a:latin typeface="Pretendard" pitchFamily="34" charset="0"/>
+                <a:ea typeface="Pretendard" pitchFamily="34" charset="-122"/>
+                <a:cs typeface="Pretendard" pitchFamily="34" charset="-120"/>
+              </a:rPr>
+              <a:t>6</a:t>
+            </a:r>
+            <a:endParaRPr lang="en-US" sz="1500" dirty="0"/>
+          </a:p>
+        </p:txBody>
+      </p:sp>
+      <p:sp>
+        <p:nvSpPr>
+          <p:cNvPr id="38" name="Text 36"/>
+          <p:cNvSpPr txBox="1"/>
+          <p:nvPr/>
+        </p:nvSpPr>
+        <p:spPr>
+          <a:xfrm>
+            <a:off x="1325514" y="4119372"/>
+            <a:ext cx="2585070" cy="914400"/>
+          </a:xfrm>
+          <a:prstGeom prst="rect">
+            <a:avLst/>
+          </a:prstGeom>
+          <a:noFill/>
+          <a:ln/>
+        </p:spPr>
+        <p:txBody>
+          <a:bodyPr wrap="square" lIns="0" tIns="25400" rIns="25400" bIns="0" rtlCol="0" anchor="ctr">
+            <a:normAutofit/>
+          </a:bodyPr>
+          <a:lstStyle/>
+          <a:p>
+            <a:pPr algn="l" indent="0" marL="0">
+              <a:lnSpc>
+                <a:spcPct val="92000"/>
+              </a:lnSpc>
+              <a:buNone/>
+            </a:pPr>
+            <a:r>
+              <a:rPr lang="en-US" sz="1600" dirty="0">
+                <a:solidFill>
+                  <a:srgbClr val="111827"/>
+                </a:solidFill>
+                <a:latin typeface="Pretendard" pitchFamily="34" charset="0"/>
+                <a:ea typeface="Pretendard" pitchFamily="34" charset="-122"/>
+                <a:cs typeface="Pretendard" pitchFamily="34" charset="-120"/>
+              </a:rPr>
+              <a:t>Render PPTX HTML PDF</a:t>
+            </a:r>
+            <a:endParaRPr lang="en-US" sz="1600" dirty="0"/>
+          </a:p>
+        </p:txBody>
+      </p:sp>
+    </p:spTree>
+  </p:cSld>
+  <p:clrMapOvr>
+    <a:masterClrMapping/>
+  </p:clrMapOvr>
+</p:sld>
+</file>
+
+<file path=ppt/slides/slide12.xml><?xml version="1.0" encoding="utf-8"?>
+<p:sld xmlns:a="http://schemas.openxmlformats.org/drawingml/2006/main" xmlns:r="http://schemas.openxmlformats.org/officeDocument/2006/relationships" xmlns:p="http://schemas.openxmlformats.org/presentationml/2006/main">
+  <p:cSld name="Slide 12">
+    <p:bg>
+      <p:bgPr>
+        <a:solidFill>
+          <a:srgbClr val="F8FAFC"/>
+        </a:solidFill>
+      </p:bgPr>
+    </p:bg>
+    <p:spTree>
+      <p:nvGrpSpPr>
+        <p:cNvPr id="1" name=""/>
+        <p:cNvGrpSpPr/>
+        <p:nvPr/>
+      </p:nvGrpSpPr>
+      <p:grpSpPr>
+        <a:xfrm>
+          <a:off x="0" y="0"/>
+          <a:ext cx="0" cy="0"/>
+          <a:chOff x="0" y="0"/>
+          <a:chExt cx="0" cy="0"/>
+        </a:xfrm>
+      </p:grpSpPr>
+      <p:sp>
+        <p:nvSpPr>
+          <p:cNvPr id="2" name="Shape 0"/>
+          <p:cNvSpPr/>
+          <p:nvPr/>
+        </p:nvSpPr>
+        <p:spPr>
+          <a:xfrm>
+            <a:off x="731520" y="1207008"/>
+            <a:ext cx="1325880" cy="54864"/>
+          </a:xfrm>
+          <a:prstGeom prst="rect">
+            <a:avLst/>
+          </a:prstGeom>
+          <a:solidFill>
+            <a:srgbClr val="2563EB"/>
+          </a:solidFill>
+          <a:ln w="12700">
+            <a:solidFill>
+              <a:srgbClr val="2563EB">
+                <a:alpha val="0"/>
+              </a:srgbClr>
+            </a:solidFill>
+            <a:prstDash val="solid"/>
+          </a:ln>
+        </p:spPr>
+      </p:sp>
+      <p:sp>
+        <p:nvSpPr>
+          <p:cNvPr id="3" name="Shape 1"/>
+          <p:cNvSpPr/>
+          <p:nvPr/>
+        </p:nvSpPr>
+        <p:spPr>
+          <a:xfrm>
+            <a:off x="822960" y="1463040"/>
+            <a:ext cx="73152" cy="1920240"/>
+          </a:xfrm>
+          <a:prstGeom prst="rect">
+            <a:avLst/>
+          </a:prstGeom>
+          <a:solidFill>
+            <a:srgbClr val="2563EB"/>
+          </a:solidFill>
+          <a:ln w="12700">
+            <a:solidFill>
+              <a:srgbClr val="2563EB">
+                <a:alpha val="0"/>
+              </a:srgbClr>
+            </a:solidFill>
+            <a:prstDash val="solid"/>
+          </a:ln>
+        </p:spPr>
+      </p:sp>
+      <p:sp>
+        <p:nvSpPr>
+          <p:cNvPr id="4" name="Shape 2"/>
+          <p:cNvSpPr/>
+          <p:nvPr/>
+        </p:nvSpPr>
+        <p:spPr>
+          <a:xfrm>
+            <a:off x="6309360" y="1463040"/>
+            <a:ext cx="73152" cy="1920240"/>
+          </a:xfrm>
+          <a:prstGeom prst="rect">
+            <a:avLst/>
+          </a:prstGeom>
+          <a:solidFill>
+            <a:srgbClr val="DBEAFE"/>
+          </a:solidFill>
+          <a:ln w="12700">
+            <a:solidFill>
+              <a:srgbClr val="DBEAFE">
+                <a:alpha val="0"/>
+              </a:srgbClr>
+            </a:solidFill>
+            <a:prstDash val="solid"/>
+          </a:ln>
+        </p:spPr>
+      </p:sp>
+      <p:sp>
+        <p:nvSpPr>
+          <p:cNvPr id="5" name="Shape 3"/>
+          <p:cNvSpPr/>
+          <p:nvPr/>
+        </p:nvSpPr>
+        <p:spPr>
+          <a:xfrm>
+            <a:off x="822960" y="3749040"/>
+            <a:ext cx="73152" cy="1920240"/>
+          </a:xfrm>
+          <a:prstGeom prst="rect">
+            <a:avLst/>
+          </a:prstGeom>
+          <a:solidFill>
+            <a:srgbClr val="2563EB"/>
+          </a:solidFill>
+          <a:ln w="12700">
+            <a:solidFill>
+              <a:srgbClr val="2563EB">
+                <a:alpha val="0"/>
+              </a:srgbClr>
+            </a:solidFill>
+            <a:prstDash val="solid"/>
+          </a:ln>
+        </p:spPr>
+      </p:sp>
+      <p:sp>
+        <p:nvSpPr>
+          <p:cNvPr id="6" name="Shape 4"/>
+          <p:cNvSpPr/>
+          <p:nvPr/>
+        </p:nvSpPr>
+        <p:spPr>
+          <a:xfrm>
+            <a:off x="6309360" y="3749040"/>
+            <a:ext cx="73152" cy="1920240"/>
+          </a:xfrm>
+          <a:prstGeom prst="rect">
+            <a:avLst/>
+          </a:prstGeom>
+          <a:solidFill>
+            <a:srgbClr val="DBEAFE"/>
+          </a:solidFill>
+          <a:ln w="12700">
+            <a:solidFill>
+              <a:srgbClr val="DBEAFE">
+                <a:alpha val="0"/>
+              </a:srgbClr>
+            </a:solidFill>
+            <a:prstDash val="solid"/>
+          </a:ln>
+        </p:spPr>
+      </p:sp>
+      <p:pic>
+        <p:nvPicPr>
+          <p:cNvPr id="7" name="Image 0" descr="preencoded.png">    </p:cNvPr>
+          <p:cNvPicPr>
+            <a:picLocks noChangeAspect="1"/>
+          </p:cNvPicPr>
+          <p:nvPr/>
+        </p:nvPicPr>
+        <p:blipFill>
+          <a:blip r:embed="rId1">
+            <a:extLst>
+              <a:ext uri="{96DAC541-7B7A-43D3-8B79-37D633B846F1}">
+                <asvg:svgBlip xmlns:asvg="http://schemas.microsoft.com/office/drawing/2016/SVG/main" r:embed="rId2"/>
+              </a:ext>
+            </a:extLst>
+          </a:blip>
+          <a:stretch>
+            <a:fillRect/>
+          </a:stretch>
+        </p:blipFill>
+        <p:spPr>
+          <a:xfrm>
+            <a:off x="822960" y="1463040"/>
+            <a:ext cx="5029200" cy="1920240"/>
+          </a:xfrm>
+          <a:prstGeom prst="rect">
+            <a:avLst/>
+          </a:prstGeom>
+        </p:spPr>
+      </p:pic>
+      <p:sp>
+        <p:nvSpPr>
+          <p:cNvPr id="8" name="Shape 5"/>
+          <p:cNvSpPr/>
+          <p:nvPr/>
+        </p:nvSpPr>
+        <p:spPr>
+          <a:xfrm>
+            <a:off x="822960" y="1463040"/>
+            <a:ext cx="5029200" cy="1920240"/>
+          </a:xfrm>
+          <a:prstGeom prst="rect">
+            <a:avLst/>
+          </a:prstGeom>
+          <a:solidFill>
+            <a:srgbClr val="FFFFFF">
+              <a:alpha val="0"/>
+            </a:srgbClr>
+          </a:solidFill>
+          <a:ln w="12700">
+            <a:solidFill>
+              <a:srgbClr val="E2E8F0">
+                <a:alpha val="0"/>
+              </a:srgbClr>
+            </a:solidFill>
+            <a:prstDash val="solid"/>
+          </a:ln>
+          <a:effectLst>
+            <a:outerShdw sx="100000" sy="100000" kx="0" ky="0" algn="bl" rotWithShape="0" blurRad="12700" dist="50800" dir="2700000">
+              <a:srgbClr val="000000">
+                <a:alpha val="8000"/>
+              </a:srgbClr>
+            </a:outerShdw>
+          </a:effectLst>
+        </p:spPr>
+      </p:sp>
+      <p:pic>
+        <p:nvPicPr>
+          <p:cNvPr id="9" name="Image 1" descr="preencoded.png">    </p:cNvPr>
+          <p:cNvPicPr>
+            <a:picLocks noChangeAspect="1"/>
+          </p:cNvPicPr>
+          <p:nvPr/>
+        </p:nvPicPr>
+        <p:blipFill>
+          <a:blip r:embed="rId3">
+            <a:extLst>
+              <a:ext uri="{96DAC541-7B7A-43D3-8B79-37D633B846F1}">
+                <asvg:svgBlip xmlns:asvg="http://schemas.microsoft.com/office/drawing/2016/SVG/main" r:embed="rId4"/>
+              </a:ext>
+            </a:extLst>
+          </a:blip>
+          <a:stretch>
+            <a:fillRect/>
+          </a:stretch>
+        </p:blipFill>
+        <p:spPr>
+          <a:xfrm>
+            <a:off x="6309360" y="1463040"/>
+            <a:ext cx="5029200" cy="1920240"/>
+          </a:xfrm>
+          <a:prstGeom prst="rect">
+            <a:avLst/>
+          </a:prstGeom>
+        </p:spPr>
+      </p:pic>
+      <p:sp>
+        <p:nvSpPr>
+          <p:cNvPr id="10" name="Shape 6"/>
+          <p:cNvSpPr/>
+          <p:nvPr/>
+        </p:nvSpPr>
+        <p:spPr>
+          <a:xfrm>
+            <a:off x="6309360" y="1463040"/>
+            <a:ext cx="5029200" cy="1920240"/>
+          </a:xfrm>
+          <a:prstGeom prst="rect">
+            <a:avLst/>
+          </a:prstGeom>
+          <a:solidFill>
+            <a:srgbClr val="FFFFFF">
+              <a:alpha val="0"/>
+            </a:srgbClr>
+          </a:solidFill>
+          <a:ln w="12700">
+            <a:solidFill>
+              <a:srgbClr val="E2E8F0">
+                <a:alpha val="0"/>
+              </a:srgbClr>
+            </a:solidFill>
+            <a:prstDash val="solid"/>
+          </a:ln>
+          <a:effectLst>
+            <a:outerShdw sx="100000" sy="100000" kx="0" ky="0" algn="bl" rotWithShape="0" blurRad="12700" dist="50800" dir="2700000">
+              <a:srgbClr val="000000">
+                <a:alpha val="8000"/>
+              </a:srgbClr>
+            </a:outerShdw>
+          </a:effectLst>
+        </p:spPr>
+      </p:sp>
+      <p:pic>
+        <p:nvPicPr>
+          <p:cNvPr id="11" name="Image 2" descr="preencoded.png">    </p:cNvPr>
+          <p:cNvPicPr>
+            <a:picLocks noChangeAspect="1"/>
+          </p:cNvPicPr>
+          <p:nvPr/>
+        </p:nvPicPr>
+        <p:blipFill>
+          <a:blip r:embed="rId5">
+            <a:extLst>
+              <a:ext uri="{96DAC541-7B7A-43D3-8B79-37D633B846F1}">
+                <asvg:svgBlip xmlns:asvg="http://schemas.microsoft.com/office/drawing/2016/SVG/main" r:embed="rId6"/>
+              </a:ext>
+            </a:extLst>
+          </a:blip>
+          <a:stretch>
+            <a:fillRect/>
+          </a:stretch>
+        </p:blipFill>
+        <p:spPr>
+          <a:xfrm>
+            <a:off x="822960" y="3749040"/>
+            <a:ext cx="5029200" cy="1920240"/>
+          </a:xfrm>
+          <a:prstGeom prst="rect">
+            <a:avLst/>
+          </a:prstGeom>
+        </p:spPr>
+      </p:pic>
+      <p:sp>
+        <p:nvSpPr>
+          <p:cNvPr id="12" name="Shape 7"/>
+          <p:cNvSpPr/>
+          <p:nvPr/>
+        </p:nvSpPr>
+        <p:spPr>
+          <a:xfrm>
+            <a:off x="822960" y="3749040"/>
+            <a:ext cx="5029200" cy="1920240"/>
+          </a:xfrm>
+          <a:prstGeom prst="rect">
+            <a:avLst/>
+          </a:prstGeom>
+          <a:solidFill>
+            <a:srgbClr val="FFFFFF">
+              <a:alpha val="0"/>
+            </a:srgbClr>
+          </a:solidFill>
+          <a:ln w="12700">
+            <a:solidFill>
+              <a:srgbClr val="E2E8F0">
+                <a:alpha val="0"/>
+              </a:srgbClr>
+            </a:solidFill>
+            <a:prstDash val="solid"/>
+          </a:ln>
+          <a:effectLst>
+            <a:outerShdw sx="100000" sy="100000" kx="0" ky="0" algn="bl" rotWithShape="0" blurRad="12700" dist="50800" dir="2700000">
+              <a:srgbClr val="000000">
+                <a:alpha val="8000"/>
+              </a:srgbClr>
+            </a:outerShdw>
+          </a:effectLst>
+        </p:spPr>
+      </p:sp>
+      <p:pic>
+        <p:nvPicPr>
+          <p:cNvPr id="13" name="Image 3" descr="preencoded.png">    </p:cNvPr>
+          <p:cNvPicPr>
+            <a:picLocks noChangeAspect="1"/>
+          </p:cNvPicPr>
+          <p:nvPr/>
+        </p:nvPicPr>
+        <p:blipFill>
+          <a:blip r:embed="rId7">
+            <a:extLst>
+              <a:ext uri="{96DAC541-7B7A-43D3-8B79-37D633B846F1}">
+                <asvg:svgBlip xmlns:asvg="http://schemas.microsoft.com/office/drawing/2016/SVG/main" r:embed="rId8"/>
+              </a:ext>
+            </a:extLst>
+          </a:blip>
+          <a:stretch>
+            <a:fillRect/>
+          </a:stretch>
+        </p:blipFill>
+        <p:spPr>
+          <a:xfrm>
+            <a:off x="6309360" y="3749040"/>
+            <a:ext cx="5029200" cy="1920240"/>
+          </a:xfrm>
+          <a:prstGeom prst="rect">
+            <a:avLst/>
+          </a:prstGeom>
+        </p:spPr>
+      </p:pic>
+      <p:sp>
+        <p:nvSpPr>
+          <p:cNvPr id="14" name="Shape 8"/>
+          <p:cNvSpPr/>
+          <p:nvPr/>
+        </p:nvSpPr>
+        <p:spPr>
+          <a:xfrm>
+            <a:off x="6309360" y="3749040"/>
+            <a:ext cx="5029200" cy="1920240"/>
+          </a:xfrm>
+          <a:prstGeom prst="rect">
+            <a:avLst/>
+          </a:prstGeom>
+          <a:solidFill>
+            <a:srgbClr val="FFFFFF">
+              <a:alpha val="0"/>
+            </a:srgbClr>
+          </a:solidFill>
+          <a:ln w="12700">
+            <a:solidFill>
+              <a:srgbClr val="E2E8F0">
+                <a:alpha val="0"/>
+              </a:srgbClr>
+            </a:solidFill>
+            <a:prstDash val="solid"/>
+          </a:ln>
+          <a:effectLst>
+            <a:outerShdw sx="100000" sy="100000" kx="0" ky="0" algn="bl" rotWithShape="0" blurRad="12700" dist="50800" dir="2700000">
+              <a:srgbClr val="000000">
+                <a:alpha val="8000"/>
+              </a:srgbClr>
+            </a:outerShdw>
+          </a:effectLst>
+        </p:spPr>
+      </p:sp>
+      <p:sp>
+        <p:nvSpPr>
+          <p:cNvPr id="15" name="Text 9"/>
           <p:cNvSpPr txBox="1"/>
           <p:nvPr/>
         </p:nvSpPr>
@@ -5037,14 +5744,71 @@
       </p:sp>
       <p:sp>
         <p:nvSpPr>
-          <p:cNvPr id="5" name="Text 3"/>
+          <p:cNvPr id="16" name="Shape 10"/>
+          <p:cNvSpPr/>
+          <p:nvPr/>
+        </p:nvSpPr>
+        <p:spPr>
+          <a:xfrm>
+            <a:off x="976122" y="2130552"/>
+            <a:ext cx="585216" cy="585216"/>
+          </a:xfrm>
+          <a:prstGeom prst="roundRect">
+            <a:avLst>
+              <a:gd name="adj" fmla="val 6250"/>
+            </a:avLst>
+          </a:prstGeom>
+          <a:solidFill>
+            <a:srgbClr val="F8FAFC"/>
+          </a:solidFill>
+          <a:ln w="12700">
+            <a:solidFill>
+              <a:srgbClr val="E2E8F0"/>
+            </a:solidFill>
+            <a:prstDash val="solid"/>
+          </a:ln>
+        </p:spPr>
+      </p:sp>
+      <p:pic>
+        <p:nvPicPr>
+          <p:cNvPr id="17" name="Image 4" descr="article icon from tabler-icons (MIT)">    </p:cNvPr>
+          <p:cNvPicPr>
+            <a:picLocks noChangeAspect="1"/>
+          </p:cNvPicPr>
+          <p:nvPr/>
+        </p:nvPicPr>
+        <p:blipFill>
+          <a:blip r:embed="rId9">
+            <a:extLst>
+              <a:ext uri="{96DAC541-7B7A-43D3-8B79-37D633B846F1}">
+                <asvg:svgBlip xmlns:asvg="http://schemas.microsoft.com/office/drawing/2016/SVG/main" r:embed="rId10"/>
+              </a:ext>
+            </a:extLst>
+          </a:blip>
+          <a:stretch>
+            <a:fillRect/>
+          </a:stretch>
+        </p:blipFill>
+        <p:spPr>
+          <a:xfrm>
+            <a:off x="1049274" y="2203704"/>
+            <a:ext cx="438912" cy="438912"/>
+          </a:xfrm>
+          <a:prstGeom prst="rect">
+            <a:avLst/>
+          </a:prstGeom>
+        </p:spPr>
+      </p:pic>
+      <p:sp>
+        <p:nvSpPr>
+          <p:cNvPr id="18" name="Text 11"/>
           <p:cNvSpPr txBox="1"/>
           <p:nvPr/>
         </p:nvSpPr>
         <p:spPr>
           <a:xfrm>
-            <a:off x="987552" y="1572768"/>
-            <a:ext cx="10094976" cy="4261104"/>
+            <a:off x="1689354" y="1627632"/>
+            <a:ext cx="3961638" cy="1591056"/>
           </a:xfrm>
           <a:prstGeom prst="rect">
             <a:avLst/>
@@ -5053,7 +5817,7 @@
           <a:ln/>
         </p:spPr>
         <p:txBody>
-          <a:bodyPr wrap="square" lIns="0" tIns="25400" rIns="25400" bIns="0" rtlCol="0" anchor="t"/>
+          <a:bodyPr wrap="square" lIns="0" tIns="25400" rIns="25400" bIns="0" rtlCol="0" anchor="ctr"/>
           <a:lstStyle/>
           <a:p>
             <a:pPr algn="l" indent="0" marL="0">
@@ -5071,7 +5835,7 @@
                 <a:ea typeface="Pretendard" pitchFamily="34" charset="-122"/>
                 <a:cs typeface="Pretendard" pitchFamily="34" charset="-120"/>
               </a:rPr>
-              <a:t>- Surfaces</a:t>
+              <a:t>Surfaces</a:t>
             </a:r>
             <a:pPr algn="l" indent="0" marL="0">
               <a:lnSpc>
@@ -5092,6 +5856,85 @@
             </a:r>
             <a:endParaRPr lang="en-US" sz="2200" dirty="0"/>
           </a:p>
+        </p:txBody>
+      </p:sp>
+      <p:sp>
+        <p:nvSpPr>
+          <p:cNvPr id="19" name="Shape 12"/>
+          <p:cNvSpPr/>
+          <p:nvPr/>
+        </p:nvSpPr>
+        <p:spPr>
+          <a:xfrm>
+            <a:off x="6462522" y="2130552"/>
+            <a:ext cx="585216" cy="585216"/>
+          </a:xfrm>
+          <a:prstGeom prst="roundRect">
+            <a:avLst>
+              <a:gd name="adj" fmla="val 6250"/>
+            </a:avLst>
+          </a:prstGeom>
+          <a:solidFill>
+            <a:srgbClr val="F8FAFC"/>
+          </a:solidFill>
+          <a:ln w="12700">
+            <a:solidFill>
+              <a:srgbClr val="E2E8F0"/>
+            </a:solidFill>
+            <a:prstDash val="solid"/>
+          </a:ln>
+        </p:spPr>
+      </p:sp>
+      <p:pic>
+        <p:nvPicPr>
+          <p:cNvPr id="20" name="Image 5" descr="table icon from tabler-icons (MIT)">    </p:cNvPr>
+          <p:cNvPicPr>
+            <a:picLocks noChangeAspect="1"/>
+          </p:cNvPicPr>
+          <p:nvPr/>
+        </p:nvPicPr>
+        <p:blipFill>
+          <a:blip r:embed="rId11">
+            <a:extLst>
+              <a:ext uri="{96DAC541-7B7A-43D3-8B79-37D633B846F1}">
+                <asvg:svgBlip xmlns:asvg="http://schemas.microsoft.com/office/drawing/2016/SVG/main" r:embed="rId12"/>
+              </a:ext>
+            </a:extLst>
+          </a:blip>
+          <a:stretch>
+            <a:fillRect/>
+          </a:stretch>
+        </p:blipFill>
+        <p:spPr>
+          <a:xfrm>
+            <a:off x="6535674" y="2203704"/>
+            <a:ext cx="438912" cy="438912"/>
+          </a:xfrm>
+          <a:prstGeom prst="rect">
+            <a:avLst/>
+          </a:prstGeom>
+        </p:spPr>
+      </p:pic>
+      <p:sp>
+        <p:nvSpPr>
+          <p:cNvPr id="21" name="Text 13"/>
+          <p:cNvSpPr txBox="1"/>
+          <p:nvPr/>
+        </p:nvSpPr>
+        <p:spPr>
+          <a:xfrm>
+            <a:off x="7175754" y="1627632"/>
+            <a:ext cx="3961638" cy="1591056"/>
+          </a:xfrm>
+          <a:prstGeom prst="rect">
+            <a:avLst/>
+          </a:prstGeom>
+          <a:noFill/>
+          <a:ln/>
+        </p:spPr>
+        <p:txBody>
+          <a:bodyPr wrap="square" lIns="0" tIns="25400" rIns="25400" bIns="0" rtlCol="0" anchor="ctr"/>
+          <a:lstStyle/>
           <a:p>
             <a:pPr algn="l" indent="0" marL="0">
               <a:lnSpc>
@@ -5108,11 +5951,8 @@
                 <a:ea typeface="Pretendard" pitchFamily="34" charset="-122"/>
                 <a:cs typeface="Pretendard" pitchFamily="34" charset="-120"/>
               </a:rPr>
-              <a:t>- Layouts</a:t>
+              <a:t>Layouts</a:t>
             </a:r>
-            <a:endParaRPr lang="en-US" sz="2200" dirty="0"/>
-          </a:p>
-          <a:p>
             <a:pPr algn="l" indent="0" marL="0">
               <a:lnSpc>
                 <a:spcPct val="120000"/>
@@ -5132,6 +5972,85 @@
             </a:r>
             <a:endParaRPr lang="en-US" sz="2200" dirty="0"/>
           </a:p>
+        </p:txBody>
+      </p:sp>
+      <p:sp>
+        <p:nvSpPr>
+          <p:cNvPr id="22" name="Shape 14"/>
+          <p:cNvSpPr/>
+          <p:nvPr/>
+        </p:nvSpPr>
+        <p:spPr>
+          <a:xfrm>
+            <a:off x="976122" y="4416552"/>
+            <a:ext cx="585216" cy="585216"/>
+          </a:xfrm>
+          <a:prstGeom prst="roundRect">
+            <a:avLst>
+              <a:gd name="adj" fmla="val 6250"/>
+            </a:avLst>
+          </a:prstGeom>
+          <a:solidFill>
+            <a:srgbClr val="F8FAFC"/>
+          </a:solidFill>
+          <a:ln w="12700">
+            <a:solidFill>
+              <a:srgbClr val="E2E8F0"/>
+            </a:solidFill>
+            <a:prstDash val="solid"/>
+          </a:ln>
+        </p:spPr>
+      </p:sp>
+      <p:pic>
+        <p:nvPicPr>
+          <p:cNvPr id="23" name="Image 6" descr="chart icon from tabler-icons (MIT)">    </p:cNvPr>
+          <p:cNvPicPr>
+            <a:picLocks noChangeAspect="1"/>
+          </p:cNvPicPr>
+          <p:nvPr/>
+        </p:nvPicPr>
+        <p:blipFill>
+          <a:blip r:embed="rId13">
+            <a:extLst>
+              <a:ext uri="{96DAC541-7B7A-43D3-8B79-37D633B846F1}">
+                <asvg:svgBlip xmlns:asvg="http://schemas.microsoft.com/office/drawing/2016/SVG/main" r:embed="rId14"/>
+              </a:ext>
+            </a:extLst>
+          </a:blip>
+          <a:stretch>
+            <a:fillRect/>
+          </a:stretch>
+        </p:blipFill>
+        <p:spPr>
+          <a:xfrm>
+            <a:off x="1049274" y="4489704"/>
+            <a:ext cx="438912" cy="438912"/>
+          </a:xfrm>
+          <a:prstGeom prst="rect">
+            <a:avLst/>
+          </a:prstGeom>
+        </p:spPr>
+      </p:pic>
+      <p:sp>
+        <p:nvSpPr>
+          <p:cNvPr id="24" name="Text 15"/>
+          <p:cNvSpPr txBox="1"/>
+          <p:nvPr/>
+        </p:nvSpPr>
+        <p:spPr>
+          <a:xfrm>
+            <a:off x="1689354" y="3913632"/>
+            <a:ext cx="3961638" cy="1591056"/>
+          </a:xfrm>
+          <a:prstGeom prst="rect">
+            <a:avLst/>
+          </a:prstGeom>
+          <a:noFill/>
+          <a:ln/>
+        </p:spPr>
+        <p:txBody>
+          <a:bodyPr wrap="square" lIns="0" tIns="25400" rIns="25400" bIns="0" rtlCol="0" anchor="ctr"/>
+          <a:lstStyle/>
           <a:p>
             <a:pPr algn="l" indent="0" marL="0">
               <a:lnSpc>
@@ -5148,11 +6067,8 @@
                 <a:ea typeface="Pretendard" pitchFamily="34" charset="-122"/>
                 <a:cs typeface="Pretendard" pitchFamily="34" charset="-120"/>
               </a:rPr>
-              <a:t>- Evidence</a:t>
+              <a:t>Evidence</a:t>
             </a:r>
-            <a:endParaRPr lang="en-US" sz="2200" dirty="0"/>
-          </a:p>
-          <a:p>
             <a:pPr algn="l" indent="0" marL="0">
               <a:lnSpc>
                 <a:spcPct val="120000"/>
@@ -5172,6 +6088,85 @@
             </a:r>
             <a:endParaRPr lang="en-US" sz="2200" dirty="0"/>
           </a:p>
+        </p:txBody>
+      </p:sp>
+      <p:sp>
+        <p:nvSpPr>
+          <p:cNvPr id="25" name="Shape 16"/>
+          <p:cNvSpPr/>
+          <p:nvPr/>
+        </p:nvSpPr>
+        <p:spPr>
+          <a:xfrm>
+            <a:off x="6462522" y="4416552"/>
+            <a:ext cx="585216" cy="585216"/>
+          </a:xfrm>
+          <a:prstGeom prst="roundRect">
+            <a:avLst>
+              <a:gd name="adj" fmla="val 6250"/>
+            </a:avLst>
+          </a:prstGeom>
+          <a:solidFill>
+            <a:srgbClr val="F8FAFC"/>
+          </a:solidFill>
+          <a:ln w="12700">
+            <a:solidFill>
+              <a:srgbClr val="E2E8F0"/>
+            </a:solidFill>
+            <a:prstDash val="solid"/>
+          </a:ln>
+        </p:spPr>
+      </p:sp>
+      <p:pic>
+        <p:nvPicPr>
+          <p:cNvPr id="26" name="Image 7" descr="flow icon from tabler-icons (MIT)">    </p:cNvPr>
+          <p:cNvPicPr>
+            <a:picLocks noChangeAspect="1"/>
+          </p:cNvPicPr>
+          <p:nvPr/>
+        </p:nvPicPr>
+        <p:blipFill>
+          <a:blip r:embed="rId15">
+            <a:extLst>
+              <a:ext uri="{96DAC541-7B7A-43D3-8B79-37D633B846F1}">
+                <asvg:svgBlip xmlns:asvg="http://schemas.microsoft.com/office/drawing/2016/SVG/main" r:embed="rId16"/>
+              </a:ext>
+            </a:extLst>
+          </a:blip>
+          <a:stretch>
+            <a:fillRect/>
+          </a:stretch>
+        </p:blipFill>
+        <p:spPr>
+          <a:xfrm>
+            <a:off x="6535674" y="4489704"/>
+            <a:ext cx="438912" cy="438912"/>
+          </a:xfrm>
+          <a:prstGeom prst="rect">
+            <a:avLst/>
+          </a:prstGeom>
+        </p:spPr>
+      </p:pic>
+      <p:sp>
+        <p:nvSpPr>
+          <p:cNvPr id="27" name="Text 17"/>
+          <p:cNvSpPr txBox="1"/>
+          <p:nvPr/>
+        </p:nvSpPr>
+        <p:spPr>
+          <a:xfrm>
+            <a:off x="7175754" y="3913632"/>
+            <a:ext cx="3961638" cy="1591056"/>
+          </a:xfrm>
+          <a:prstGeom prst="rect">
+            <a:avLst/>
+          </a:prstGeom>
+          <a:noFill/>
+          <a:ln/>
+        </p:spPr>
+        <p:txBody>
+          <a:bodyPr wrap="square" lIns="0" tIns="25400" rIns="25400" bIns="0" rtlCol="0" anchor="ctr"/>
+          <a:lstStyle/>
           <a:p>
             <a:pPr algn="l" indent="0" marL="0">
               <a:lnSpc>
@@ -5188,11 +6183,8 @@
                 <a:ea typeface="Pretendard" pitchFamily="34" charset="-122"/>
                 <a:cs typeface="Pretendard" pitchFamily="34" charset="-120"/>
               </a:rPr>
-              <a:t>- Connectors</a:t>
+              <a:t>Connectors</a:t>
             </a:r>
-            <a:endParaRPr lang="en-US" sz="2200" dirty="0"/>
-          </a:p>
-          <a:p>
             <a:pPr algn="l" indent="0" marL="0">
               <a:lnSpc>
                 <a:spcPct val="120000"/>
@@ -5222,9 +6214,9 @@
 </p:sld>
 </file>
 
-<file path=ppt/slides/slide12.xml><?xml version="1.0" encoding="utf-8"?>
+<file path=ppt/slides/slide13.xml><?xml version="1.0" encoding="utf-8"?>
 <p:sld xmlns:a="http://schemas.openxmlformats.org/drawingml/2006/main" xmlns:r="http://schemas.openxmlformats.org/officeDocument/2006/relationships" xmlns:p="http://schemas.openxmlformats.org/presentationml/2006/main">
-  <p:cSld name="Slide 12">
+  <p:cSld name="Slide 13">
     <p:bg>
       <p:bgPr>
         <a:solidFill>
@@ -5481,7 +6473,7 @@
                 <a:ea typeface="Pretendard" pitchFamily="34" charset="-122"/>
                 <a:cs typeface="Pretendard" pitchFamily="34" charset="-120"/>
               </a:rPr>
-              <a:t>  magazine-rail, grid-baseline, glass-surface, newmorphic-panel, data-rail, minimal-rule.</a:t>
+              <a:t>  clean-card, glass-surface, newmorphic-panel, data-rail, minimal-rule.</a:t>
             </a:r>
             <a:endParaRPr lang="en-US" sz="2200" dirty="0"/>
           </a:p>
@@ -5495,9 +6487,9 @@
 </p:sld>
 </file>
 
-<file path=ppt/slides/slide13.xml><?xml version="1.0" encoding="utf-8"?>
+<file path=ppt/slides/slide14.xml><?xml version="1.0" encoding="utf-8"?>
 <p:sld xmlns:a="http://schemas.openxmlformats.org/drawingml/2006/main" xmlns:r="http://schemas.openxmlformats.org/officeDocument/2006/relationships" xmlns:p="http://schemas.openxmlformats.org/presentationml/2006/main">
-  <p:cSld name="Slide 13">
+  <p:cSld name="Slide 14">
     <p:bg>
       <p:bgPr>
         <a:solidFill>
@@ -5656,7 +6648,7 @@
       </p:sp>
       <p:graphicFrame>
         <p:nvGraphicFramePr>
-          <p:cNvPr id="14" name="Table 0"/>
+          <p:cNvPr id="15" name="Table 0"/>
           <p:cNvGraphicFramePr>
             <a:graphicFrameLocks noGrp="1"/>
           </p:cNvGraphicFramePr>
@@ -6717,9 +7709,9 @@
 </p:sld>
 </file>
 
-<file path=ppt/slides/slide14.xml><?xml version="1.0" encoding="utf-8"?>
+<file path=ppt/slides/slide15.xml><?xml version="1.0" encoding="utf-8"?>
 <p:sld xmlns:a="http://schemas.openxmlformats.org/drawingml/2006/main" xmlns:r="http://schemas.openxmlformats.org/officeDocument/2006/relationships" xmlns:p="http://schemas.openxmlformats.org/presentationml/2006/main">
-  <p:cSld name="Slide 14">
+  <p:cSld name="Slide 15">
     <p:bg>
       <p:bgPr>
         <a:solidFill>
@@ -7066,9 +8058,9 @@
 </p:sld>
 </file>
 
-<file path=ppt/slides/slide15.xml><?xml version="1.0" encoding="utf-8"?>
+<file path=ppt/slides/slide16.xml><?xml version="1.0" encoding="utf-8"?>
 <p:sld xmlns:a="http://schemas.openxmlformats.org/drawingml/2006/main" xmlns:r="http://schemas.openxmlformats.org/officeDocument/2006/relationships" xmlns:p="http://schemas.openxmlformats.org/presentationml/2006/main">
-  <p:cSld name="Slide 15">
+  <p:cSld name="Slide 16">
     <p:bg>
       <p:bgPr>
         <a:solidFill>
@@ -7227,7 +8219,7 @@
       </p:sp>
       <p:graphicFrame>
         <p:nvGraphicFramePr>
-          <p:cNvPr id="16" name="Table 0"/>
+          <p:cNvPr id="17" name="Table 0"/>
           <p:cNvGraphicFramePr>
             <a:graphicFrameLocks noGrp="1"/>
           </p:cNvGraphicFramePr>
@@ -8076,9 +9068,9 @@
 </p:sld>
 </file>
 
-<file path=ppt/slides/slide16.xml><?xml version="1.0" encoding="utf-8"?>
+<file path=ppt/slides/slide17.xml><?xml version="1.0" encoding="utf-8"?>
 <p:sld xmlns:a="http://schemas.openxmlformats.org/drawingml/2006/main" xmlns:r="http://schemas.openxmlformats.org/officeDocument/2006/relationships" xmlns:p="http://schemas.openxmlformats.org/presentationml/2006/main">
-  <p:cSld name="Slide 16">
+  <p:cSld name="Slide 17">
     <p:bg>
       <p:bgPr>
         <a:solidFill>
@@ -8937,813 +9929,6 @@
             <a:endParaRPr lang="en-US" sz="1400" dirty="0"/>
           </a:p>
         </p:txBody>
-      </p:sp>
-    </p:spTree>
-  </p:cSld>
-  <p:clrMapOvr>
-    <a:masterClrMapping/>
-  </p:clrMapOvr>
-</p:sld>
-</file>
-
-<file path=ppt/slides/slide17.xml><?xml version="1.0" encoding="utf-8"?>
-<p:sld xmlns:a="http://schemas.openxmlformats.org/drawingml/2006/main" xmlns:r="http://schemas.openxmlformats.org/officeDocument/2006/relationships" xmlns:p="http://schemas.openxmlformats.org/presentationml/2006/main">
-  <p:cSld name="Slide 17">
-    <p:bg>
-      <p:bgPr>
-        <a:solidFill>
-          <a:srgbClr val="F8FAFC"/>
-        </a:solidFill>
-      </p:bgPr>
-    </p:bg>
-    <p:spTree>
-      <p:nvGrpSpPr>
-        <p:cNvPr id="1" name=""/>
-        <p:cNvGrpSpPr/>
-        <p:nvPr/>
-      </p:nvGrpSpPr>
-      <p:grpSpPr>
-        <a:xfrm>
-          <a:off x="0" y="0"/>
-          <a:ext cx="0" cy="0"/>
-          <a:chOff x="0" y="0"/>
-          <a:chExt cx="0" cy="0"/>
-        </a:xfrm>
-      </p:grpSpPr>
-      <p:sp>
-        <p:nvSpPr>
-          <p:cNvPr id="2" name="Shape 0"/>
-          <p:cNvSpPr/>
-          <p:nvPr/>
-        </p:nvSpPr>
-        <p:spPr>
-          <a:xfrm>
-            <a:off x="731520" y="1207008"/>
-            <a:ext cx="1325880" cy="54864"/>
-          </a:xfrm>
-          <a:prstGeom prst="rect">
-            <a:avLst/>
-          </a:prstGeom>
-          <a:solidFill>
-            <a:srgbClr val="2563EB"/>
-          </a:solidFill>
-          <a:ln w="12700">
-            <a:solidFill>
-              <a:srgbClr val="2563EB">
-                <a:alpha val="0"/>
-              </a:srgbClr>
-            </a:solidFill>
-            <a:prstDash val="solid"/>
-          </a:ln>
-        </p:spPr>
-      </p:sp>
-      <p:pic>
-        <p:nvPicPr>
-          <p:cNvPr id="3" name="Image 0" descr="preencoded.png">    </p:cNvPr>
-          <p:cNvPicPr>
-            <a:picLocks noChangeAspect="1"/>
-          </p:cNvPicPr>
-          <p:nvPr/>
-        </p:nvPicPr>
-        <p:blipFill>
-          <a:blip r:embed="rId1">
-            <a:extLst>
-              <a:ext uri="{96DAC541-7B7A-43D3-8B79-37D633B846F1}">
-                <asvg:svgBlip xmlns:asvg="http://schemas.microsoft.com/office/drawing/2016/SVG/main" r:embed="rId2"/>
-              </a:ext>
-            </a:extLst>
-          </a:blip>
-          <a:stretch>
-            <a:fillRect/>
-          </a:stretch>
-        </p:blipFill>
-        <p:spPr>
-          <a:xfrm>
-            <a:off x="914400" y="1417320"/>
-            <a:ext cx="10241280" cy="4343400"/>
-          </a:xfrm>
-          <a:prstGeom prst="rect">
-            <a:avLst/>
-          </a:prstGeom>
-        </p:spPr>
-      </p:pic>
-      <p:sp>
-        <p:nvSpPr>
-          <p:cNvPr id="4" name="Shape 1"/>
-          <p:cNvSpPr/>
-          <p:nvPr/>
-        </p:nvSpPr>
-        <p:spPr>
-          <a:xfrm>
-            <a:off x="914400" y="1417320"/>
-            <a:ext cx="10241280" cy="4343400"/>
-          </a:xfrm>
-          <a:prstGeom prst="rect">
-            <a:avLst/>
-          </a:prstGeom>
-          <a:solidFill>
-            <a:srgbClr val="FFFFFF">
-              <a:alpha val="0"/>
-            </a:srgbClr>
-          </a:solidFill>
-          <a:ln w="12700">
-            <a:solidFill>
-              <a:srgbClr val="E2E8F0">
-                <a:alpha val="0"/>
-              </a:srgbClr>
-            </a:solidFill>
-            <a:prstDash val="solid"/>
-          </a:ln>
-          <a:effectLst>
-            <a:outerShdw sx="100000" sy="100000" kx="0" ky="0" algn="bl" rotWithShape="0" blurRad="12700" dist="50800" dir="2700000">
-              <a:srgbClr val="000000">
-                <a:alpha val="8000"/>
-              </a:srgbClr>
-            </a:outerShdw>
-          </a:effectLst>
-        </p:spPr>
-      </p:sp>
-      <p:sp>
-        <p:nvSpPr>
-          <p:cNvPr id="5" name="Text 2"/>
-          <p:cNvSpPr txBox="1"/>
-          <p:nvPr/>
-        </p:nvSpPr>
-        <p:spPr>
-          <a:xfrm>
-            <a:off x="731520" y="457200"/>
-            <a:ext cx="10698480" cy="731520"/>
-          </a:xfrm>
-          <a:prstGeom prst="rect">
-            <a:avLst/>
-          </a:prstGeom>
-          <a:noFill/>
-          <a:ln/>
-        </p:spPr>
-        <p:txBody>
-          <a:bodyPr wrap="square" lIns="0" tIns="0" rIns="0" bIns="0" rtlCol="0" anchor="ctr"/>
-          <a:lstStyle/>
-          <a:p>
-            <a:pPr algn="ctr" indent="0" marL="0">
-              <a:lnSpc>
-                <a:spcPct val="120000"/>
-              </a:lnSpc>
-              <a:buNone/>
-            </a:pPr>
-            <a:r>
-              <a:rPr lang="en-US" sz="3400" b="1" dirty="0">
-                <a:solidFill>
-                  <a:srgbClr val="111827"/>
-                </a:solidFill>
-                <a:latin typeface="Pretendard" pitchFamily="34" charset="0"/>
-                <a:ea typeface="Pretendard" pitchFamily="34" charset="-122"/>
-                <a:cs typeface="Pretendard" pitchFamily="34" charset="-120"/>
-              </a:rPr>
-              <a:t>Editable Proof Objects (Cont. 2/2)</a:t>
-            </a:r>
-            <a:endParaRPr lang="en-US" sz="3400" dirty="0"/>
-          </a:p>
-        </p:txBody>
-      </p:sp>
-      <p:sp>
-        <p:nvSpPr>
-          <p:cNvPr id="6" name="Shape 3"/>
-          <p:cNvSpPr/>
-          <p:nvPr/>
-        </p:nvSpPr>
-        <p:spPr>
-          <a:xfrm>
-            <a:off x="1078992" y="2446020"/>
-            <a:ext cx="2262957" cy="2286000"/>
-          </a:xfrm>
-          <a:prstGeom prst="roundRect">
-            <a:avLst>
-              <a:gd name="adj" fmla="val 2020"/>
-            </a:avLst>
-          </a:prstGeom>
-          <a:solidFill>
-            <a:srgbClr val="FFFFFF"/>
-          </a:solidFill>
-          <a:ln w="12700">
-            <a:solidFill>
-              <a:srgbClr val="E2E8F0"/>
-            </a:solidFill>
-            <a:prstDash val="solid"/>
-          </a:ln>
-        </p:spPr>
-      </p:sp>
-      <p:sp>
-        <p:nvSpPr>
-          <p:cNvPr id="7" name="Shape 4"/>
-          <p:cNvSpPr/>
-          <p:nvPr/>
-        </p:nvSpPr>
-        <p:spPr>
-          <a:xfrm>
-            <a:off x="1280160" y="4347972"/>
-            <a:ext cx="593815" cy="128016"/>
-          </a:xfrm>
-          <a:prstGeom prst="rect">
-            <a:avLst/>
-          </a:prstGeom>
-          <a:solidFill>
-            <a:srgbClr val="2563EB"/>
-          </a:solidFill>
-          <a:ln w="12700">
-            <a:solidFill>
-              <a:srgbClr val="2563EB">
-                <a:alpha val="0"/>
-              </a:srgbClr>
-            </a:solidFill>
-            <a:prstDash val="solid"/>
-          </a:ln>
-        </p:spPr>
-      </p:sp>
-      <p:sp>
-        <p:nvSpPr>
-          <p:cNvPr id="8" name="Text 5"/>
-          <p:cNvSpPr txBox="1"/>
-          <p:nvPr/>
-        </p:nvSpPr>
-        <p:spPr>
-          <a:xfrm>
-            <a:off x="1261872" y="2574036"/>
-            <a:ext cx="1897197" cy="914400"/>
-          </a:xfrm>
-          <a:prstGeom prst="rect">
-            <a:avLst/>
-          </a:prstGeom>
-          <a:noFill/>
-          <a:ln/>
-        </p:spPr>
-        <p:txBody>
-          <a:bodyPr wrap="square" lIns="381" tIns="508" rIns="508" bIns="381" rtlCol="0" anchor="ctr">
-            <a:normAutofit/>
-          </a:bodyPr>
-          <a:lstStyle/>
-          <a:p>
-            <a:pPr algn="ctr" indent="0" marL="0">
-              <a:lnSpc>
-                <a:spcPct val="120000"/>
-              </a:lnSpc>
-              <a:buNone/>
-            </a:pPr>
-            <a:r>
-              <a:rPr lang="en-US" sz="1800" b="1" dirty="0">
-                <a:solidFill>
-                  <a:srgbClr val="111827"/>
-                </a:solidFill>
-                <a:latin typeface="Pretendard" pitchFamily="34" charset="0"/>
-                <a:ea typeface="Pretendard" pitchFamily="34" charset="-122"/>
-                <a:cs typeface="Pretendard" pitchFamily="34" charset="-120"/>
-              </a:rPr>
-              <a:t>Parse</a:t>
-            </a:r>
-            <a:endParaRPr lang="en-US" sz="1800" dirty="0"/>
-          </a:p>
-        </p:txBody>
-      </p:sp>
-      <p:sp>
-        <p:nvSpPr>
-          <p:cNvPr id="9" name="Text 6"/>
-          <p:cNvSpPr txBox="1"/>
-          <p:nvPr/>
-        </p:nvSpPr>
-        <p:spPr>
-          <a:xfrm>
-            <a:off x="1261872" y="3543300"/>
-            <a:ext cx="1897197" cy="420624"/>
-          </a:xfrm>
-          <a:prstGeom prst="rect">
-            <a:avLst/>
-          </a:prstGeom>
-          <a:noFill/>
-          <a:ln/>
-        </p:spPr>
-        <p:txBody>
-          <a:bodyPr wrap="square" lIns="0" tIns="0" rIns="0" bIns="0" rtlCol="0" anchor="ctr">
-            <a:normAutofit/>
-          </a:bodyPr>
-          <a:lstStyle/>
-          <a:p>
-            <a:pPr algn="ctr" indent="0" marL="0">
-              <a:lnSpc>
-                <a:spcPct val="120000"/>
-              </a:lnSpc>
-              <a:buNone/>
-            </a:pPr>
-            <a:r>
-              <a:rPr lang="en-US" sz="2800" b="1" dirty="0">
-                <a:solidFill>
-                  <a:srgbClr val="2563EB"/>
-                </a:solidFill>
-                <a:latin typeface="Pretendard" pitchFamily="34" charset="0"/>
-                <a:ea typeface="Pretendard" pitchFamily="34" charset="-122"/>
-                <a:cs typeface="Pretendard" pitchFamily="34" charset="-120"/>
-              </a:rPr>
-              <a:t>30%</a:t>
-            </a:r>
-            <a:endParaRPr lang="en-US" sz="2800" dirty="0"/>
-          </a:p>
-        </p:txBody>
-      </p:sp>
-      <p:sp>
-        <p:nvSpPr>
-          <p:cNvPr id="10" name="Shape 7"/>
-          <p:cNvSpPr/>
-          <p:nvPr/>
-        </p:nvSpPr>
-        <p:spPr>
-          <a:xfrm>
-            <a:off x="3628705" y="2446020"/>
-            <a:ext cx="2262957" cy="2286000"/>
-          </a:xfrm>
-          <a:prstGeom prst="roundRect">
-            <a:avLst>
-              <a:gd name="adj" fmla="val 2020"/>
-            </a:avLst>
-          </a:prstGeom>
-          <a:solidFill>
-            <a:srgbClr val="FFFFFF"/>
-          </a:solidFill>
-          <a:ln w="12700">
-            <a:solidFill>
-              <a:srgbClr val="E2E8F0"/>
-            </a:solidFill>
-            <a:prstDash val="solid"/>
-          </a:ln>
-        </p:spPr>
-      </p:sp>
-      <p:sp>
-        <p:nvSpPr>
-          <p:cNvPr id="11" name="Shape 8"/>
-          <p:cNvSpPr/>
-          <p:nvPr/>
-        </p:nvSpPr>
-        <p:spPr>
-          <a:xfrm>
-            <a:off x="3829873" y="4347972"/>
-            <a:ext cx="1227218" cy="128016"/>
-          </a:xfrm>
-          <a:prstGeom prst="rect">
-            <a:avLst/>
-          </a:prstGeom>
-          <a:solidFill>
-            <a:srgbClr val="DBEAFE"/>
-          </a:solidFill>
-          <a:ln w="12700">
-            <a:solidFill>
-              <a:srgbClr val="DBEAFE">
-                <a:alpha val="0"/>
-              </a:srgbClr>
-            </a:solidFill>
-            <a:prstDash val="solid"/>
-          </a:ln>
-        </p:spPr>
-      </p:sp>
-      <p:sp>
-        <p:nvSpPr>
-          <p:cNvPr id="12" name="Text 9"/>
-          <p:cNvSpPr txBox="1"/>
-          <p:nvPr/>
-        </p:nvSpPr>
-        <p:spPr>
-          <a:xfrm>
-            <a:off x="3811585" y="2574036"/>
-            <a:ext cx="1897197" cy="914400"/>
-          </a:xfrm>
-          <a:prstGeom prst="rect">
-            <a:avLst/>
-          </a:prstGeom>
-          <a:noFill/>
-          <a:ln/>
-        </p:spPr>
-        <p:txBody>
-          <a:bodyPr wrap="square" lIns="381" tIns="508" rIns="508" bIns="381" rtlCol="0" anchor="ctr">
-            <a:normAutofit/>
-          </a:bodyPr>
-          <a:lstStyle/>
-          <a:p>
-            <a:pPr algn="ctr" indent="0" marL="0">
-              <a:lnSpc>
-                <a:spcPct val="120000"/>
-              </a:lnSpc>
-              <a:buNone/>
-            </a:pPr>
-            <a:r>
-              <a:rPr lang="en-US" sz="1800" b="1" dirty="0">
-                <a:solidFill>
-                  <a:srgbClr val="111827"/>
-                </a:solidFill>
-                <a:latin typeface="Pretendard" pitchFamily="34" charset="0"/>
-                <a:ea typeface="Pretendard" pitchFamily="34" charset="-122"/>
-                <a:cs typeface="Pretendard" pitchFamily="34" charset="-120"/>
-              </a:rPr>
-              <a:t>Plan</a:t>
-            </a:r>
-            <a:endParaRPr lang="en-US" sz="1800" dirty="0"/>
-          </a:p>
-        </p:txBody>
-      </p:sp>
-      <p:sp>
-        <p:nvSpPr>
-          <p:cNvPr id="13" name="Text 10"/>
-          <p:cNvSpPr txBox="1"/>
-          <p:nvPr/>
-        </p:nvSpPr>
-        <p:spPr>
-          <a:xfrm>
-            <a:off x="3811585" y="3543300"/>
-            <a:ext cx="1897197" cy="420624"/>
-          </a:xfrm>
-          <a:prstGeom prst="rect">
-            <a:avLst/>
-          </a:prstGeom>
-          <a:noFill/>
-          <a:ln/>
-        </p:spPr>
-        <p:txBody>
-          <a:bodyPr wrap="square" lIns="0" tIns="0" rIns="0" bIns="0" rtlCol="0" anchor="ctr">
-            <a:normAutofit/>
-          </a:bodyPr>
-          <a:lstStyle/>
-          <a:p>
-            <a:pPr algn="ctr" indent="0" marL="0">
-              <a:lnSpc>
-                <a:spcPct val="120000"/>
-              </a:lnSpc>
-              <a:buNone/>
-            </a:pPr>
-            <a:r>
-              <a:rPr lang="en-US" sz="2800" b="1" dirty="0">
-                <a:solidFill>
-                  <a:srgbClr val="DBEAFE"/>
-                </a:solidFill>
-                <a:latin typeface="Pretendard" pitchFamily="34" charset="0"/>
-                <a:ea typeface="Pretendard" pitchFamily="34" charset="-122"/>
-                <a:cs typeface="Pretendard" pitchFamily="34" charset="-120"/>
-              </a:rPr>
-              <a:t>62%</a:t>
-            </a:r>
-            <a:endParaRPr lang="en-US" sz="2800" dirty="0"/>
-          </a:p>
-        </p:txBody>
-      </p:sp>
-      <p:sp>
-        <p:nvSpPr>
-          <p:cNvPr id="14" name="Shape 11"/>
-          <p:cNvSpPr/>
-          <p:nvPr/>
-        </p:nvSpPr>
-        <p:spPr>
-          <a:xfrm>
-            <a:off x="6178418" y="2446020"/>
-            <a:ext cx="2262957" cy="2286000"/>
-          </a:xfrm>
-          <a:prstGeom prst="roundRect">
-            <a:avLst>
-              <a:gd name="adj" fmla="val 2020"/>
-            </a:avLst>
-          </a:prstGeom>
-          <a:solidFill>
-            <a:srgbClr val="FFFFFF"/>
-          </a:solidFill>
-          <a:ln w="12700">
-            <a:solidFill>
-              <a:srgbClr val="E2E8F0"/>
-            </a:solidFill>
-            <a:prstDash val="solid"/>
-          </a:ln>
-        </p:spPr>
-      </p:sp>
-      <p:sp>
-        <p:nvSpPr>
-          <p:cNvPr id="15" name="Shape 12"/>
-          <p:cNvSpPr/>
-          <p:nvPr/>
-        </p:nvSpPr>
-        <p:spPr>
-          <a:xfrm>
-            <a:off x="6379586" y="4347972"/>
-            <a:ext cx="1702270" cy="128016"/>
-          </a:xfrm>
-          <a:prstGeom prst="rect">
-            <a:avLst/>
-          </a:prstGeom>
-          <a:solidFill>
-            <a:srgbClr val="2563EB"/>
-          </a:solidFill>
-          <a:ln w="12700">
-            <a:solidFill>
-              <a:srgbClr val="2563EB">
-                <a:alpha val="0"/>
-              </a:srgbClr>
-            </a:solidFill>
-            <a:prstDash val="solid"/>
-          </a:ln>
-        </p:spPr>
-      </p:sp>
-      <p:sp>
-        <p:nvSpPr>
-          <p:cNvPr id="16" name="Text 13"/>
-          <p:cNvSpPr txBox="1"/>
-          <p:nvPr/>
-        </p:nvSpPr>
-        <p:spPr>
-          <a:xfrm>
-            <a:off x="6361298" y="2574036"/>
-            <a:ext cx="1897197" cy="914400"/>
-          </a:xfrm>
-          <a:prstGeom prst="rect">
-            <a:avLst/>
-          </a:prstGeom>
-          <a:noFill/>
-          <a:ln/>
-        </p:spPr>
-        <p:txBody>
-          <a:bodyPr wrap="square" lIns="381" tIns="508" rIns="508" bIns="381" rtlCol="0" anchor="ctr">
-            <a:normAutofit/>
-          </a:bodyPr>
-          <a:lstStyle/>
-          <a:p>
-            <a:pPr algn="ctr" indent="0" marL="0">
-              <a:lnSpc>
-                <a:spcPct val="120000"/>
-              </a:lnSpc>
-              <a:buNone/>
-            </a:pPr>
-            <a:r>
-              <a:rPr lang="en-US" sz="1800" b="1" dirty="0">
-                <a:solidFill>
-                  <a:srgbClr val="111827"/>
-                </a:solidFill>
-                <a:latin typeface="Pretendard" pitchFamily="34" charset="0"/>
-                <a:ea typeface="Pretendard" pitchFamily="34" charset="-122"/>
-                <a:cs typeface="Pretendard" pitchFamily="34" charset="-120"/>
-              </a:rPr>
-              <a:t>Render</a:t>
-            </a:r>
-            <a:endParaRPr lang="en-US" sz="1800" dirty="0"/>
-          </a:p>
-        </p:txBody>
-      </p:sp>
-      <p:sp>
-        <p:nvSpPr>
-          <p:cNvPr id="17" name="Text 14"/>
-          <p:cNvSpPr txBox="1"/>
-          <p:nvPr/>
-        </p:nvSpPr>
-        <p:spPr>
-          <a:xfrm>
-            <a:off x="6361298" y="3543300"/>
-            <a:ext cx="1897197" cy="420624"/>
-          </a:xfrm>
-          <a:prstGeom prst="rect">
-            <a:avLst/>
-          </a:prstGeom>
-          <a:noFill/>
-          <a:ln/>
-        </p:spPr>
-        <p:txBody>
-          <a:bodyPr wrap="square" lIns="0" tIns="0" rIns="0" bIns="0" rtlCol="0" anchor="ctr">
-            <a:normAutofit/>
-          </a:bodyPr>
-          <a:lstStyle/>
-          <a:p>
-            <a:pPr algn="ctr" indent="0" marL="0">
-              <a:lnSpc>
-                <a:spcPct val="120000"/>
-              </a:lnSpc>
-              <a:buNone/>
-            </a:pPr>
-            <a:r>
-              <a:rPr lang="en-US" sz="2800" b="1" dirty="0">
-                <a:solidFill>
-                  <a:srgbClr val="2563EB"/>
-                </a:solidFill>
-                <a:latin typeface="Pretendard" pitchFamily="34" charset="0"/>
-                <a:ea typeface="Pretendard" pitchFamily="34" charset="-122"/>
-                <a:cs typeface="Pretendard" pitchFamily="34" charset="-120"/>
-              </a:rPr>
-              <a:t>86%</a:t>
-            </a:r>
-            <a:endParaRPr lang="en-US" sz="2800" dirty="0"/>
-          </a:p>
-        </p:txBody>
-      </p:sp>
-      <p:sp>
-        <p:nvSpPr>
-          <p:cNvPr id="18" name="Shape 15"/>
-          <p:cNvSpPr/>
-          <p:nvPr/>
-        </p:nvSpPr>
-        <p:spPr>
-          <a:xfrm>
-            <a:off x="8728131" y="2446020"/>
-            <a:ext cx="2262957" cy="2286000"/>
-          </a:xfrm>
-          <a:prstGeom prst="roundRect">
-            <a:avLst>
-              <a:gd name="adj" fmla="val 2020"/>
-            </a:avLst>
-          </a:prstGeom>
-          <a:solidFill>
-            <a:srgbClr val="FFFFFF"/>
-          </a:solidFill>
-          <a:ln w="12700">
-            <a:solidFill>
-              <a:srgbClr val="E2E8F0"/>
-            </a:solidFill>
-            <a:prstDash val="solid"/>
-          </a:ln>
-        </p:spPr>
-      </p:sp>
-      <p:sp>
-        <p:nvSpPr>
-          <p:cNvPr id="19" name="Shape 16"/>
-          <p:cNvSpPr/>
-          <p:nvPr/>
-        </p:nvSpPr>
-        <p:spPr>
-          <a:xfrm>
-            <a:off x="8929299" y="4347972"/>
-            <a:ext cx="1860621" cy="128016"/>
-          </a:xfrm>
-          <a:prstGeom prst="rect">
-            <a:avLst/>
-          </a:prstGeom>
-          <a:solidFill>
-            <a:srgbClr val="2563EB"/>
-          </a:solidFill>
-          <a:ln w="12700">
-            <a:solidFill>
-              <a:srgbClr val="2563EB">
-                <a:alpha val="0"/>
-              </a:srgbClr>
-            </a:solidFill>
-            <a:prstDash val="solid"/>
-          </a:ln>
-        </p:spPr>
-      </p:sp>
-      <p:sp>
-        <p:nvSpPr>
-          <p:cNvPr id="20" name="Text 17"/>
-          <p:cNvSpPr txBox="1"/>
-          <p:nvPr/>
-        </p:nvSpPr>
-        <p:spPr>
-          <a:xfrm>
-            <a:off x="8911011" y="2574036"/>
-            <a:ext cx="1897197" cy="914400"/>
-          </a:xfrm>
-          <a:prstGeom prst="rect">
-            <a:avLst/>
-          </a:prstGeom>
-          <a:noFill/>
-          <a:ln/>
-        </p:spPr>
-        <p:txBody>
-          <a:bodyPr wrap="square" lIns="381" tIns="508" rIns="508" bIns="381" rtlCol="0" anchor="ctr">
-            <a:normAutofit/>
-          </a:bodyPr>
-          <a:lstStyle/>
-          <a:p>
-            <a:pPr algn="ctr" indent="0" marL="0">
-              <a:lnSpc>
-                <a:spcPct val="120000"/>
-              </a:lnSpc>
-              <a:buNone/>
-            </a:pPr>
-            <a:r>
-              <a:rPr lang="en-US" sz="1800" b="1" dirty="0">
-                <a:solidFill>
-                  <a:srgbClr val="111827"/>
-                </a:solidFill>
-                <a:latin typeface="Pretendard" pitchFamily="34" charset="0"/>
-                <a:ea typeface="Pretendard" pitchFamily="34" charset="-122"/>
-                <a:cs typeface="Pretendard" pitchFamily="34" charset="-120"/>
-              </a:rPr>
-              <a:t>Review</a:t>
-            </a:r>
-            <a:endParaRPr lang="en-US" sz="1800" dirty="0"/>
-          </a:p>
-        </p:txBody>
-      </p:sp>
-      <p:sp>
-        <p:nvSpPr>
-          <p:cNvPr id="21" name="Text 18"/>
-          <p:cNvSpPr txBox="1"/>
-          <p:nvPr/>
-        </p:nvSpPr>
-        <p:spPr>
-          <a:xfrm>
-            <a:off x="8911011" y="3543300"/>
-            <a:ext cx="1897197" cy="420624"/>
-          </a:xfrm>
-          <a:prstGeom prst="rect">
-            <a:avLst/>
-          </a:prstGeom>
-          <a:noFill/>
-          <a:ln/>
-        </p:spPr>
-        <p:txBody>
-          <a:bodyPr wrap="square" lIns="0" tIns="0" rIns="0" bIns="0" rtlCol="0" anchor="ctr">
-            <a:normAutofit/>
-          </a:bodyPr>
-          <a:lstStyle/>
-          <a:p>
-            <a:pPr algn="ctr" indent="0" marL="0">
-              <a:lnSpc>
-                <a:spcPct val="120000"/>
-              </a:lnSpc>
-              <a:buNone/>
-            </a:pPr>
-            <a:r>
-              <a:rPr lang="en-US" sz="2800" b="1" dirty="0">
-                <a:solidFill>
-                  <a:srgbClr val="2563EB"/>
-                </a:solidFill>
-                <a:latin typeface="Pretendard" pitchFamily="34" charset="0"/>
-                <a:ea typeface="Pretendard" pitchFamily="34" charset="-122"/>
-                <a:cs typeface="Pretendard" pitchFamily="34" charset="-120"/>
-              </a:rPr>
-              <a:t>94%</a:t>
-            </a:r>
-            <a:endParaRPr lang="en-US" sz="2800" dirty="0"/>
-          </a:p>
-        </p:txBody>
-      </p:sp>
-      <p:sp>
-        <p:nvSpPr>
-          <p:cNvPr id="22" name="Shape 19"/>
-          <p:cNvSpPr/>
-          <p:nvPr/>
-        </p:nvSpPr>
-        <p:spPr>
-          <a:xfrm>
-            <a:off x="3285375" y="3589020"/>
-            <a:ext cx="399904" cy="0"/>
-          </a:xfrm>
-          <a:prstGeom prst="line">
-            <a:avLst/>
-          </a:prstGeom>
-          <a:noFill/>
-          <a:ln w="12700">
-            <a:solidFill>
-              <a:srgbClr val="2563EB"/>
-            </a:solidFill>
-            <a:prstDash val="solid"/>
-            <a:tailEnd type="triangle"/>
-          </a:ln>
-        </p:spPr>
-      </p:sp>
-      <p:sp>
-        <p:nvSpPr>
-          <p:cNvPr id="23" name="Shape 20"/>
-          <p:cNvSpPr/>
-          <p:nvPr/>
-        </p:nvSpPr>
-        <p:spPr>
-          <a:xfrm>
-            <a:off x="5835088" y="3589020"/>
-            <a:ext cx="399904" cy="0"/>
-          </a:xfrm>
-          <a:prstGeom prst="line">
-            <a:avLst/>
-          </a:prstGeom>
-          <a:noFill/>
-          <a:ln w="12700">
-            <a:solidFill>
-              <a:srgbClr val="2563EB"/>
-            </a:solidFill>
-            <a:prstDash val="solid"/>
-            <a:tailEnd type="triangle"/>
-          </a:ln>
-        </p:spPr>
-      </p:sp>
-      <p:sp>
-        <p:nvSpPr>
-          <p:cNvPr id="24" name="Shape 21"/>
-          <p:cNvSpPr/>
-          <p:nvPr/>
-        </p:nvSpPr>
-        <p:spPr>
-          <a:xfrm>
-            <a:off x="8384801" y="3589020"/>
-            <a:ext cx="399904" cy="0"/>
-          </a:xfrm>
-          <a:prstGeom prst="line">
-            <a:avLst/>
-          </a:prstGeom>
-          <a:noFill/>
-          <a:ln w="12700">
-            <a:solidFill>
-              <a:srgbClr val="2563EB"/>
-            </a:solidFill>
-            <a:prstDash val="solid"/>
-            <a:tailEnd type="triangle"/>
-          </a:ln>
-        </p:spPr>
       </p:sp>
     </p:spTree>
   </p:cSld>
@@ -9804,16 +9989,151 @@
           </a:ln>
         </p:spPr>
       </p:sp>
-      <p:sp>
-        <p:nvSpPr>
-          <p:cNvPr id="3" name="Shape 1"/>
+      <p:pic>
+        <p:nvPicPr>
+          <p:cNvPr id="3" name="Image 0" descr="preencoded.png">    </p:cNvPr>
+          <p:cNvPicPr>
+            <a:picLocks noChangeAspect="1"/>
+          </p:cNvPicPr>
+          <p:nvPr/>
+        </p:nvPicPr>
+        <p:blipFill>
+          <a:blip r:embed="rId1">
+            <a:extLst>
+              <a:ext uri="{96DAC541-7B7A-43D3-8B79-37D633B846F1}">
+                <asvg:svgBlip xmlns:asvg="http://schemas.microsoft.com/office/drawing/2016/SVG/main" r:embed="rId2"/>
+              </a:ext>
+            </a:extLst>
+          </a:blip>
+          <a:stretch>
+            <a:fillRect/>
+          </a:stretch>
+        </p:blipFill>
+        <p:spPr>
+          <a:xfrm>
+            <a:off x="914400" y="1417320"/>
+            <a:ext cx="10241280" cy="4343400"/>
+          </a:xfrm>
+          <a:prstGeom prst="rect">
+            <a:avLst/>
+          </a:prstGeom>
+        </p:spPr>
+      </p:pic>
+      <p:sp>
+        <p:nvSpPr>
+          <p:cNvPr id="4" name="Shape 1"/>
           <p:cNvSpPr/>
           <p:nvPr/>
         </p:nvSpPr>
         <p:spPr>
           <a:xfrm>
-            <a:off x="914400" y="1463040"/>
-            <a:ext cx="10241280" cy="73152"/>
+            <a:off x="914400" y="1417320"/>
+            <a:ext cx="10241280" cy="4343400"/>
+          </a:xfrm>
+          <a:prstGeom prst="rect">
+            <a:avLst/>
+          </a:prstGeom>
+          <a:solidFill>
+            <a:srgbClr val="FFFFFF">
+              <a:alpha val="0"/>
+            </a:srgbClr>
+          </a:solidFill>
+          <a:ln w="12700">
+            <a:solidFill>
+              <a:srgbClr val="E2E8F0">
+                <a:alpha val="0"/>
+              </a:srgbClr>
+            </a:solidFill>
+            <a:prstDash val="solid"/>
+          </a:ln>
+          <a:effectLst>
+            <a:outerShdw sx="100000" sy="100000" kx="0" ky="0" algn="bl" rotWithShape="0" blurRad="12700" dist="50800" dir="2700000">
+              <a:srgbClr val="000000">
+                <a:alpha val="8000"/>
+              </a:srgbClr>
+            </a:outerShdw>
+          </a:effectLst>
+        </p:spPr>
+      </p:sp>
+      <p:sp>
+        <p:nvSpPr>
+          <p:cNvPr id="5" name="Text 2"/>
+          <p:cNvSpPr txBox="1"/>
+          <p:nvPr/>
+        </p:nvSpPr>
+        <p:spPr>
+          <a:xfrm>
+            <a:off x="731520" y="457200"/>
+            <a:ext cx="10698480" cy="731520"/>
+          </a:xfrm>
+          <a:prstGeom prst="rect">
+            <a:avLst/>
+          </a:prstGeom>
+          <a:noFill/>
+          <a:ln/>
+        </p:spPr>
+        <p:txBody>
+          <a:bodyPr wrap="square" lIns="0" tIns="0" rIns="0" bIns="0" rtlCol="0" anchor="ctr"/>
+          <a:lstStyle/>
+          <a:p>
+            <a:pPr algn="ctr" indent="0" marL="0">
+              <a:lnSpc>
+                <a:spcPct val="120000"/>
+              </a:lnSpc>
+              <a:buNone/>
+            </a:pPr>
+            <a:r>
+              <a:rPr lang="en-US" sz="3400" b="1" dirty="0">
+                <a:solidFill>
+                  <a:srgbClr val="111827"/>
+                </a:solidFill>
+                <a:latin typeface="Pretendard" pitchFamily="34" charset="0"/>
+                <a:ea typeface="Pretendard" pitchFamily="34" charset="-122"/>
+                <a:cs typeface="Pretendard" pitchFamily="34" charset="-120"/>
+              </a:rPr>
+              <a:t>Editable Proof Objects (Cont. 2/2)</a:t>
+            </a:r>
+            <a:endParaRPr lang="en-US" sz="3400" dirty="0"/>
+          </a:p>
+        </p:txBody>
+      </p:sp>
+      <p:sp>
+        <p:nvSpPr>
+          <p:cNvPr id="6" name="Shape 3"/>
+          <p:cNvSpPr/>
+          <p:nvPr/>
+        </p:nvSpPr>
+        <p:spPr>
+          <a:xfrm>
+            <a:off x="1078992" y="2446020"/>
+            <a:ext cx="2262957" cy="2286000"/>
+          </a:xfrm>
+          <a:prstGeom prst="roundRect">
+            <a:avLst>
+              <a:gd name="adj" fmla="val 2020"/>
+            </a:avLst>
+          </a:prstGeom>
+          <a:solidFill>
+            <a:srgbClr val="FFFFFF"/>
+          </a:solidFill>
+          <a:ln w="12700">
+            <a:solidFill>
+              <a:srgbClr val="E2E8F0"/>
+            </a:solidFill>
+            <a:prstDash val="solid"/>
+          </a:ln>
+        </p:spPr>
+      </p:sp>
+      <p:sp>
+        <p:nvSpPr>
+          <p:cNvPr id="7" name="Shape 4"/>
+          <p:cNvSpPr/>
+          <p:nvPr/>
+        </p:nvSpPr>
+        <p:spPr>
+          <a:xfrm>
+            <a:off x="1280160" y="4347972"/>
+            <a:ext cx="593815" cy="128016"/>
           </a:xfrm>
           <a:prstGeom prst="rect">
             <a:avLst/>
@@ -9833,7 +10153,960 @@
       </p:sp>
       <p:sp>
         <p:nvSpPr>
-          <p:cNvPr id="4" name="Text 2"/>
+          <p:cNvPr id="8" name="Text 5"/>
+          <p:cNvSpPr txBox="1"/>
+          <p:nvPr/>
+        </p:nvSpPr>
+        <p:spPr>
+          <a:xfrm>
+            <a:off x="1261872" y="2574036"/>
+            <a:ext cx="1897197" cy="914400"/>
+          </a:xfrm>
+          <a:prstGeom prst="rect">
+            <a:avLst/>
+          </a:prstGeom>
+          <a:noFill/>
+          <a:ln/>
+        </p:spPr>
+        <p:txBody>
+          <a:bodyPr wrap="square" lIns="381" tIns="508" rIns="508" bIns="381" rtlCol="0" anchor="ctr">
+            <a:normAutofit/>
+          </a:bodyPr>
+          <a:lstStyle/>
+          <a:p>
+            <a:pPr algn="ctr" indent="0" marL="0">
+              <a:lnSpc>
+                <a:spcPct val="120000"/>
+              </a:lnSpc>
+              <a:buNone/>
+            </a:pPr>
+            <a:r>
+              <a:rPr lang="en-US" sz="1800" b="1" dirty="0">
+                <a:solidFill>
+                  <a:srgbClr val="111827"/>
+                </a:solidFill>
+                <a:latin typeface="Pretendard" pitchFamily="34" charset="0"/>
+                <a:ea typeface="Pretendard" pitchFamily="34" charset="-122"/>
+                <a:cs typeface="Pretendard" pitchFamily="34" charset="-120"/>
+              </a:rPr>
+              <a:t>Parse</a:t>
+            </a:r>
+            <a:endParaRPr lang="en-US" sz="1800" dirty="0"/>
+          </a:p>
+        </p:txBody>
+      </p:sp>
+      <p:sp>
+        <p:nvSpPr>
+          <p:cNvPr id="9" name="Text 6"/>
+          <p:cNvSpPr txBox="1"/>
+          <p:nvPr/>
+        </p:nvSpPr>
+        <p:spPr>
+          <a:xfrm>
+            <a:off x="1261872" y="3543300"/>
+            <a:ext cx="1897197" cy="420624"/>
+          </a:xfrm>
+          <a:prstGeom prst="rect">
+            <a:avLst/>
+          </a:prstGeom>
+          <a:noFill/>
+          <a:ln/>
+        </p:spPr>
+        <p:txBody>
+          <a:bodyPr wrap="square" lIns="0" tIns="0" rIns="0" bIns="0" rtlCol="0" anchor="ctr">
+            <a:normAutofit/>
+          </a:bodyPr>
+          <a:lstStyle/>
+          <a:p>
+            <a:pPr algn="ctr" indent="0" marL="0">
+              <a:lnSpc>
+                <a:spcPct val="120000"/>
+              </a:lnSpc>
+              <a:buNone/>
+            </a:pPr>
+            <a:r>
+              <a:rPr lang="en-US" sz="2800" b="1" dirty="0">
+                <a:solidFill>
+                  <a:srgbClr val="2563EB"/>
+                </a:solidFill>
+                <a:latin typeface="Pretendard" pitchFamily="34" charset="0"/>
+                <a:ea typeface="Pretendard" pitchFamily="34" charset="-122"/>
+                <a:cs typeface="Pretendard" pitchFamily="34" charset="-120"/>
+              </a:rPr>
+              <a:t>30%</a:t>
+            </a:r>
+            <a:endParaRPr lang="en-US" sz="2800" dirty="0"/>
+          </a:p>
+        </p:txBody>
+      </p:sp>
+      <p:sp>
+        <p:nvSpPr>
+          <p:cNvPr id="10" name="Shape 7"/>
+          <p:cNvSpPr/>
+          <p:nvPr/>
+        </p:nvSpPr>
+        <p:spPr>
+          <a:xfrm>
+            <a:off x="3628705" y="2446020"/>
+            <a:ext cx="2262957" cy="2286000"/>
+          </a:xfrm>
+          <a:prstGeom prst="roundRect">
+            <a:avLst>
+              <a:gd name="adj" fmla="val 2020"/>
+            </a:avLst>
+          </a:prstGeom>
+          <a:solidFill>
+            <a:srgbClr val="FFFFFF"/>
+          </a:solidFill>
+          <a:ln w="12700">
+            <a:solidFill>
+              <a:srgbClr val="E2E8F0"/>
+            </a:solidFill>
+            <a:prstDash val="solid"/>
+          </a:ln>
+        </p:spPr>
+      </p:sp>
+      <p:sp>
+        <p:nvSpPr>
+          <p:cNvPr id="11" name="Shape 8"/>
+          <p:cNvSpPr/>
+          <p:nvPr/>
+        </p:nvSpPr>
+        <p:spPr>
+          <a:xfrm>
+            <a:off x="3829873" y="4347972"/>
+            <a:ext cx="1227218" cy="128016"/>
+          </a:xfrm>
+          <a:prstGeom prst="rect">
+            <a:avLst/>
+          </a:prstGeom>
+          <a:solidFill>
+            <a:srgbClr val="DBEAFE"/>
+          </a:solidFill>
+          <a:ln w="12700">
+            <a:solidFill>
+              <a:srgbClr val="DBEAFE">
+                <a:alpha val="0"/>
+              </a:srgbClr>
+            </a:solidFill>
+            <a:prstDash val="solid"/>
+          </a:ln>
+        </p:spPr>
+      </p:sp>
+      <p:sp>
+        <p:nvSpPr>
+          <p:cNvPr id="12" name="Text 9"/>
+          <p:cNvSpPr txBox="1"/>
+          <p:nvPr/>
+        </p:nvSpPr>
+        <p:spPr>
+          <a:xfrm>
+            <a:off x="3811585" y="2574036"/>
+            <a:ext cx="1897197" cy="914400"/>
+          </a:xfrm>
+          <a:prstGeom prst="rect">
+            <a:avLst/>
+          </a:prstGeom>
+          <a:noFill/>
+          <a:ln/>
+        </p:spPr>
+        <p:txBody>
+          <a:bodyPr wrap="square" lIns="381" tIns="508" rIns="508" bIns="381" rtlCol="0" anchor="ctr">
+            <a:normAutofit/>
+          </a:bodyPr>
+          <a:lstStyle/>
+          <a:p>
+            <a:pPr algn="ctr" indent="0" marL="0">
+              <a:lnSpc>
+                <a:spcPct val="120000"/>
+              </a:lnSpc>
+              <a:buNone/>
+            </a:pPr>
+            <a:r>
+              <a:rPr lang="en-US" sz="1800" b="1" dirty="0">
+                <a:solidFill>
+                  <a:srgbClr val="111827"/>
+                </a:solidFill>
+                <a:latin typeface="Pretendard" pitchFamily="34" charset="0"/>
+                <a:ea typeface="Pretendard" pitchFamily="34" charset="-122"/>
+                <a:cs typeface="Pretendard" pitchFamily="34" charset="-120"/>
+              </a:rPr>
+              <a:t>Plan</a:t>
+            </a:r>
+            <a:endParaRPr lang="en-US" sz="1800" dirty="0"/>
+          </a:p>
+        </p:txBody>
+      </p:sp>
+      <p:sp>
+        <p:nvSpPr>
+          <p:cNvPr id="13" name="Text 10"/>
+          <p:cNvSpPr txBox="1"/>
+          <p:nvPr/>
+        </p:nvSpPr>
+        <p:spPr>
+          <a:xfrm>
+            <a:off x="3811585" y="3543300"/>
+            <a:ext cx="1897197" cy="420624"/>
+          </a:xfrm>
+          <a:prstGeom prst="rect">
+            <a:avLst/>
+          </a:prstGeom>
+          <a:noFill/>
+          <a:ln/>
+        </p:spPr>
+        <p:txBody>
+          <a:bodyPr wrap="square" lIns="0" tIns="0" rIns="0" bIns="0" rtlCol="0" anchor="ctr">
+            <a:normAutofit/>
+          </a:bodyPr>
+          <a:lstStyle/>
+          <a:p>
+            <a:pPr algn="ctr" indent="0" marL="0">
+              <a:lnSpc>
+                <a:spcPct val="120000"/>
+              </a:lnSpc>
+              <a:buNone/>
+            </a:pPr>
+            <a:r>
+              <a:rPr lang="en-US" sz="2800" b="1" dirty="0">
+                <a:solidFill>
+                  <a:srgbClr val="DBEAFE"/>
+                </a:solidFill>
+                <a:latin typeface="Pretendard" pitchFamily="34" charset="0"/>
+                <a:ea typeface="Pretendard" pitchFamily="34" charset="-122"/>
+                <a:cs typeface="Pretendard" pitchFamily="34" charset="-120"/>
+              </a:rPr>
+              <a:t>62%</a:t>
+            </a:r>
+            <a:endParaRPr lang="en-US" sz="2800" dirty="0"/>
+          </a:p>
+        </p:txBody>
+      </p:sp>
+      <p:sp>
+        <p:nvSpPr>
+          <p:cNvPr id="14" name="Shape 11"/>
+          <p:cNvSpPr/>
+          <p:nvPr/>
+        </p:nvSpPr>
+        <p:spPr>
+          <a:xfrm>
+            <a:off x="6178418" y="2446020"/>
+            <a:ext cx="2262957" cy="2286000"/>
+          </a:xfrm>
+          <a:prstGeom prst="roundRect">
+            <a:avLst>
+              <a:gd name="adj" fmla="val 2020"/>
+            </a:avLst>
+          </a:prstGeom>
+          <a:solidFill>
+            <a:srgbClr val="FFFFFF"/>
+          </a:solidFill>
+          <a:ln w="12700">
+            <a:solidFill>
+              <a:srgbClr val="E2E8F0"/>
+            </a:solidFill>
+            <a:prstDash val="solid"/>
+          </a:ln>
+        </p:spPr>
+      </p:sp>
+      <p:sp>
+        <p:nvSpPr>
+          <p:cNvPr id="15" name="Shape 12"/>
+          <p:cNvSpPr/>
+          <p:nvPr/>
+        </p:nvSpPr>
+        <p:spPr>
+          <a:xfrm>
+            <a:off x="6379586" y="4347972"/>
+            <a:ext cx="1702270" cy="128016"/>
+          </a:xfrm>
+          <a:prstGeom prst="rect">
+            <a:avLst/>
+          </a:prstGeom>
+          <a:solidFill>
+            <a:srgbClr val="2563EB"/>
+          </a:solidFill>
+          <a:ln w="12700">
+            <a:solidFill>
+              <a:srgbClr val="2563EB">
+                <a:alpha val="0"/>
+              </a:srgbClr>
+            </a:solidFill>
+            <a:prstDash val="solid"/>
+          </a:ln>
+        </p:spPr>
+      </p:sp>
+      <p:sp>
+        <p:nvSpPr>
+          <p:cNvPr id="16" name="Text 13"/>
+          <p:cNvSpPr txBox="1"/>
+          <p:nvPr/>
+        </p:nvSpPr>
+        <p:spPr>
+          <a:xfrm>
+            <a:off x="6361298" y="2574036"/>
+            <a:ext cx="1897197" cy="914400"/>
+          </a:xfrm>
+          <a:prstGeom prst="rect">
+            <a:avLst/>
+          </a:prstGeom>
+          <a:noFill/>
+          <a:ln/>
+        </p:spPr>
+        <p:txBody>
+          <a:bodyPr wrap="square" lIns="381" tIns="508" rIns="508" bIns="381" rtlCol="0" anchor="ctr">
+            <a:normAutofit/>
+          </a:bodyPr>
+          <a:lstStyle/>
+          <a:p>
+            <a:pPr algn="ctr" indent="0" marL="0">
+              <a:lnSpc>
+                <a:spcPct val="120000"/>
+              </a:lnSpc>
+              <a:buNone/>
+            </a:pPr>
+            <a:r>
+              <a:rPr lang="en-US" sz="1800" b="1" dirty="0">
+                <a:solidFill>
+                  <a:srgbClr val="111827"/>
+                </a:solidFill>
+                <a:latin typeface="Pretendard" pitchFamily="34" charset="0"/>
+                <a:ea typeface="Pretendard" pitchFamily="34" charset="-122"/>
+                <a:cs typeface="Pretendard" pitchFamily="34" charset="-120"/>
+              </a:rPr>
+              <a:t>Render</a:t>
+            </a:r>
+            <a:endParaRPr lang="en-US" sz="1800" dirty="0"/>
+          </a:p>
+        </p:txBody>
+      </p:sp>
+      <p:sp>
+        <p:nvSpPr>
+          <p:cNvPr id="17" name="Text 14"/>
+          <p:cNvSpPr txBox="1"/>
+          <p:nvPr/>
+        </p:nvSpPr>
+        <p:spPr>
+          <a:xfrm>
+            <a:off x="6361298" y="3543300"/>
+            <a:ext cx="1897197" cy="420624"/>
+          </a:xfrm>
+          <a:prstGeom prst="rect">
+            <a:avLst/>
+          </a:prstGeom>
+          <a:noFill/>
+          <a:ln/>
+        </p:spPr>
+        <p:txBody>
+          <a:bodyPr wrap="square" lIns="0" tIns="0" rIns="0" bIns="0" rtlCol="0" anchor="ctr">
+            <a:normAutofit/>
+          </a:bodyPr>
+          <a:lstStyle/>
+          <a:p>
+            <a:pPr algn="ctr" indent="0" marL="0">
+              <a:lnSpc>
+                <a:spcPct val="120000"/>
+              </a:lnSpc>
+              <a:buNone/>
+            </a:pPr>
+            <a:r>
+              <a:rPr lang="en-US" sz="2800" b="1" dirty="0">
+                <a:solidFill>
+                  <a:srgbClr val="2563EB"/>
+                </a:solidFill>
+                <a:latin typeface="Pretendard" pitchFamily="34" charset="0"/>
+                <a:ea typeface="Pretendard" pitchFamily="34" charset="-122"/>
+                <a:cs typeface="Pretendard" pitchFamily="34" charset="-120"/>
+              </a:rPr>
+              <a:t>86%</a:t>
+            </a:r>
+            <a:endParaRPr lang="en-US" sz="2800" dirty="0"/>
+          </a:p>
+        </p:txBody>
+      </p:sp>
+      <p:sp>
+        <p:nvSpPr>
+          <p:cNvPr id="18" name="Shape 15"/>
+          <p:cNvSpPr/>
+          <p:nvPr/>
+        </p:nvSpPr>
+        <p:spPr>
+          <a:xfrm>
+            <a:off x="8728131" y="2446020"/>
+            <a:ext cx="2262957" cy="2286000"/>
+          </a:xfrm>
+          <a:prstGeom prst="roundRect">
+            <a:avLst>
+              <a:gd name="adj" fmla="val 2020"/>
+            </a:avLst>
+          </a:prstGeom>
+          <a:solidFill>
+            <a:srgbClr val="FFFFFF"/>
+          </a:solidFill>
+          <a:ln w="12700">
+            <a:solidFill>
+              <a:srgbClr val="E2E8F0"/>
+            </a:solidFill>
+            <a:prstDash val="solid"/>
+          </a:ln>
+        </p:spPr>
+      </p:sp>
+      <p:sp>
+        <p:nvSpPr>
+          <p:cNvPr id="19" name="Shape 16"/>
+          <p:cNvSpPr/>
+          <p:nvPr/>
+        </p:nvSpPr>
+        <p:spPr>
+          <a:xfrm>
+            <a:off x="8929299" y="4347972"/>
+            <a:ext cx="1860621" cy="128016"/>
+          </a:xfrm>
+          <a:prstGeom prst="rect">
+            <a:avLst/>
+          </a:prstGeom>
+          <a:solidFill>
+            <a:srgbClr val="2563EB"/>
+          </a:solidFill>
+          <a:ln w="12700">
+            <a:solidFill>
+              <a:srgbClr val="2563EB">
+                <a:alpha val="0"/>
+              </a:srgbClr>
+            </a:solidFill>
+            <a:prstDash val="solid"/>
+          </a:ln>
+        </p:spPr>
+      </p:sp>
+      <p:sp>
+        <p:nvSpPr>
+          <p:cNvPr id="20" name="Text 17"/>
+          <p:cNvSpPr txBox="1"/>
+          <p:nvPr/>
+        </p:nvSpPr>
+        <p:spPr>
+          <a:xfrm>
+            <a:off x="8911011" y="2574036"/>
+            <a:ext cx="1897197" cy="914400"/>
+          </a:xfrm>
+          <a:prstGeom prst="rect">
+            <a:avLst/>
+          </a:prstGeom>
+          <a:noFill/>
+          <a:ln/>
+        </p:spPr>
+        <p:txBody>
+          <a:bodyPr wrap="square" lIns="381" tIns="508" rIns="508" bIns="381" rtlCol="0" anchor="ctr">
+            <a:normAutofit/>
+          </a:bodyPr>
+          <a:lstStyle/>
+          <a:p>
+            <a:pPr algn="ctr" indent="0" marL="0">
+              <a:lnSpc>
+                <a:spcPct val="120000"/>
+              </a:lnSpc>
+              <a:buNone/>
+            </a:pPr>
+            <a:r>
+              <a:rPr lang="en-US" sz="1800" b="1" dirty="0">
+                <a:solidFill>
+                  <a:srgbClr val="111827"/>
+                </a:solidFill>
+                <a:latin typeface="Pretendard" pitchFamily="34" charset="0"/>
+                <a:ea typeface="Pretendard" pitchFamily="34" charset="-122"/>
+                <a:cs typeface="Pretendard" pitchFamily="34" charset="-120"/>
+              </a:rPr>
+              <a:t>Review</a:t>
+            </a:r>
+            <a:endParaRPr lang="en-US" sz="1800" dirty="0"/>
+          </a:p>
+        </p:txBody>
+      </p:sp>
+      <p:sp>
+        <p:nvSpPr>
+          <p:cNvPr id="21" name="Text 18"/>
+          <p:cNvSpPr txBox="1"/>
+          <p:nvPr/>
+        </p:nvSpPr>
+        <p:spPr>
+          <a:xfrm>
+            <a:off x="8911011" y="3543300"/>
+            <a:ext cx="1897197" cy="420624"/>
+          </a:xfrm>
+          <a:prstGeom prst="rect">
+            <a:avLst/>
+          </a:prstGeom>
+          <a:noFill/>
+          <a:ln/>
+        </p:spPr>
+        <p:txBody>
+          <a:bodyPr wrap="square" lIns="0" tIns="0" rIns="0" bIns="0" rtlCol="0" anchor="ctr">
+            <a:normAutofit/>
+          </a:bodyPr>
+          <a:lstStyle/>
+          <a:p>
+            <a:pPr algn="ctr" indent="0" marL="0">
+              <a:lnSpc>
+                <a:spcPct val="120000"/>
+              </a:lnSpc>
+              <a:buNone/>
+            </a:pPr>
+            <a:r>
+              <a:rPr lang="en-US" sz="2800" b="1" dirty="0">
+                <a:solidFill>
+                  <a:srgbClr val="2563EB"/>
+                </a:solidFill>
+                <a:latin typeface="Pretendard" pitchFamily="34" charset="0"/>
+                <a:ea typeface="Pretendard" pitchFamily="34" charset="-122"/>
+                <a:cs typeface="Pretendard" pitchFamily="34" charset="-120"/>
+              </a:rPr>
+              <a:t>94%</a:t>
+            </a:r>
+            <a:endParaRPr lang="en-US" sz="2800" dirty="0"/>
+          </a:p>
+        </p:txBody>
+      </p:sp>
+      <p:sp>
+        <p:nvSpPr>
+          <p:cNvPr id="22" name="Shape 19"/>
+          <p:cNvSpPr/>
+          <p:nvPr/>
+        </p:nvSpPr>
+        <p:spPr>
+          <a:xfrm>
+            <a:off x="3285375" y="3589020"/>
+            <a:ext cx="399904" cy="0"/>
+          </a:xfrm>
+          <a:prstGeom prst="line">
+            <a:avLst/>
+          </a:prstGeom>
+          <a:noFill/>
+          <a:ln w="12700">
+            <a:solidFill>
+              <a:srgbClr val="2563EB"/>
+            </a:solidFill>
+            <a:prstDash val="solid"/>
+            <a:tailEnd type="triangle"/>
+          </a:ln>
+        </p:spPr>
+      </p:sp>
+      <p:sp>
+        <p:nvSpPr>
+          <p:cNvPr id="23" name="Shape 20"/>
+          <p:cNvSpPr/>
+          <p:nvPr/>
+        </p:nvSpPr>
+        <p:spPr>
+          <a:xfrm>
+            <a:off x="5835088" y="3589020"/>
+            <a:ext cx="399904" cy="0"/>
+          </a:xfrm>
+          <a:prstGeom prst="line">
+            <a:avLst/>
+          </a:prstGeom>
+          <a:noFill/>
+          <a:ln w="12700">
+            <a:solidFill>
+              <a:srgbClr val="2563EB"/>
+            </a:solidFill>
+            <a:prstDash val="solid"/>
+            <a:tailEnd type="triangle"/>
+          </a:ln>
+        </p:spPr>
+      </p:sp>
+      <p:sp>
+        <p:nvSpPr>
+          <p:cNvPr id="24" name="Shape 21"/>
+          <p:cNvSpPr/>
+          <p:nvPr/>
+        </p:nvSpPr>
+        <p:spPr>
+          <a:xfrm>
+            <a:off x="8384801" y="3589020"/>
+            <a:ext cx="399904" cy="0"/>
+          </a:xfrm>
+          <a:prstGeom prst="line">
+            <a:avLst/>
+          </a:prstGeom>
+          <a:noFill/>
+          <a:ln w="12700">
+            <a:solidFill>
+              <a:srgbClr val="2563EB"/>
+            </a:solidFill>
+            <a:prstDash val="solid"/>
+            <a:tailEnd type="triangle"/>
+          </a:ln>
+        </p:spPr>
+      </p:sp>
+    </p:spTree>
+  </p:cSld>
+  <p:clrMapOvr>
+    <a:masterClrMapping/>
+  </p:clrMapOvr>
+</p:sld>
+</file>
+
+<file path=ppt/slides/slide19.xml><?xml version="1.0" encoding="utf-8"?>
+<p:sld xmlns:a="http://schemas.openxmlformats.org/drawingml/2006/main" xmlns:r="http://schemas.openxmlformats.org/officeDocument/2006/relationships" xmlns:p="http://schemas.openxmlformats.org/presentationml/2006/main">
+  <p:cSld name="Slide 19">
+    <p:bg>
+      <p:bgPr>
+        <a:solidFill>
+          <a:srgbClr val="F8FAFC"/>
+        </a:solidFill>
+      </p:bgPr>
+    </p:bg>
+    <p:spTree>
+      <p:nvGrpSpPr>
+        <p:cNvPr id="1" name=""/>
+        <p:cNvGrpSpPr/>
+        <p:nvPr/>
+      </p:nvGrpSpPr>
+      <p:grpSpPr>
+        <a:xfrm>
+          <a:off x="0" y="0"/>
+          <a:ext cx="0" cy="0"/>
+          <a:chOff x="0" y="0"/>
+          <a:chExt cx="0" cy="0"/>
+        </a:xfrm>
+      </p:grpSpPr>
+      <p:sp>
+        <p:nvSpPr>
+          <p:cNvPr id="2" name="Shape 0"/>
+          <p:cNvSpPr/>
+          <p:nvPr/>
+        </p:nvSpPr>
+        <p:spPr>
+          <a:xfrm>
+            <a:off x="731520" y="1207008"/>
+            <a:ext cx="1325880" cy="54864"/>
+          </a:xfrm>
+          <a:prstGeom prst="rect">
+            <a:avLst/>
+          </a:prstGeom>
+          <a:solidFill>
+            <a:srgbClr val="2563EB"/>
+          </a:solidFill>
+          <a:ln w="12700">
+            <a:solidFill>
+              <a:srgbClr val="2563EB">
+                <a:alpha val="0"/>
+              </a:srgbClr>
+            </a:solidFill>
+            <a:prstDash val="solid"/>
+          </a:ln>
+        </p:spPr>
+      </p:sp>
+      <p:sp>
+        <p:nvSpPr>
+          <p:cNvPr id="3" name="Shape 1"/>
+          <p:cNvSpPr/>
+          <p:nvPr/>
+        </p:nvSpPr>
+        <p:spPr>
+          <a:xfrm>
+            <a:off x="786384" y="1956816"/>
+            <a:ext cx="32004" cy="3483864"/>
+          </a:xfrm>
+          <a:prstGeom prst="rect">
+            <a:avLst/>
+          </a:prstGeom>
+          <a:solidFill>
+            <a:srgbClr val="DBEAFE">
+              <a:alpha val="80000"/>
+            </a:srgbClr>
+          </a:solidFill>
+          <a:ln w="12700">
+            <a:solidFill>
+              <a:srgbClr val="DBEAFE">
+                <a:alpha val="0"/>
+              </a:srgbClr>
+            </a:solidFill>
+            <a:prstDash val="solid"/>
+          </a:ln>
+        </p:spPr>
+      </p:sp>
+      <p:sp>
+        <p:nvSpPr>
+          <p:cNvPr id="4" name="Shape 2"/>
+          <p:cNvSpPr/>
+          <p:nvPr/>
+        </p:nvSpPr>
+        <p:spPr>
+          <a:xfrm>
+            <a:off x="914400" y="1865376"/>
+            <a:ext cx="73152" cy="1024128"/>
+          </a:xfrm>
+          <a:prstGeom prst="rect">
+            <a:avLst/>
+          </a:prstGeom>
+          <a:solidFill>
+            <a:srgbClr val="2563EB"/>
+          </a:solidFill>
+          <a:ln w="12700">
+            <a:solidFill>
+              <a:srgbClr val="2563EB">
+                <a:alpha val="0"/>
+              </a:srgbClr>
+            </a:solidFill>
+            <a:prstDash val="solid"/>
+          </a:ln>
+        </p:spPr>
+      </p:sp>
+      <p:sp>
+        <p:nvSpPr>
+          <p:cNvPr id="5" name="Shape 3"/>
+          <p:cNvSpPr/>
+          <p:nvPr/>
+        </p:nvSpPr>
+        <p:spPr>
+          <a:xfrm>
+            <a:off x="914400" y="3191256"/>
+            <a:ext cx="73152" cy="1024128"/>
+          </a:xfrm>
+          <a:prstGeom prst="rect">
+            <a:avLst/>
+          </a:prstGeom>
+          <a:solidFill>
+            <a:srgbClr val="DBEAFE"/>
+          </a:solidFill>
+          <a:ln w="12700">
+            <a:solidFill>
+              <a:srgbClr val="DBEAFE">
+                <a:alpha val="0"/>
+              </a:srgbClr>
+            </a:solidFill>
+            <a:prstDash val="solid"/>
+          </a:ln>
+        </p:spPr>
+      </p:sp>
+      <p:sp>
+        <p:nvSpPr>
+          <p:cNvPr id="6" name="Shape 4"/>
+          <p:cNvSpPr/>
+          <p:nvPr/>
+        </p:nvSpPr>
+        <p:spPr>
+          <a:xfrm>
+            <a:off x="914400" y="4507992"/>
+            <a:ext cx="73152" cy="1024128"/>
+          </a:xfrm>
+          <a:prstGeom prst="rect">
+            <a:avLst/>
+          </a:prstGeom>
+          <a:solidFill>
+            <a:srgbClr val="2563EB"/>
+          </a:solidFill>
+          <a:ln w="12700">
+            <a:solidFill>
+              <a:srgbClr val="2563EB">
+                <a:alpha val="0"/>
+              </a:srgbClr>
+            </a:solidFill>
+            <a:prstDash val="solid"/>
+          </a:ln>
+        </p:spPr>
+      </p:sp>
+      <p:pic>
+        <p:nvPicPr>
+          <p:cNvPr id="7" name="Image 0" descr="preencoded.png">    </p:cNvPr>
+          <p:cNvPicPr>
+            <a:picLocks noChangeAspect="1"/>
+          </p:cNvPicPr>
+          <p:nvPr/>
+        </p:nvPicPr>
+        <p:blipFill>
+          <a:blip r:embed="rId1">
+            <a:extLst>
+              <a:ext uri="{96DAC541-7B7A-43D3-8B79-37D633B846F1}">
+                <asvg:svgBlip xmlns:asvg="http://schemas.microsoft.com/office/drawing/2016/SVG/main" r:embed="rId2"/>
+              </a:ext>
+            </a:extLst>
+          </a:blip>
+          <a:stretch>
+            <a:fillRect/>
+          </a:stretch>
+        </p:blipFill>
+        <p:spPr>
+          <a:xfrm>
+            <a:off x="914400" y="1865376"/>
+            <a:ext cx="10241280" cy="1024128"/>
+          </a:xfrm>
+          <a:prstGeom prst="rect">
+            <a:avLst/>
+          </a:prstGeom>
+        </p:spPr>
+      </p:pic>
+      <p:sp>
+        <p:nvSpPr>
+          <p:cNvPr id="8" name="Shape 5"/>
+          <p:cNvSpPr/>
+          <p:nvPr/>
+        </p:nvSpPr>
+        <p:spPr>
+          <a:xfrm>
+            <a:off x="914400" y="1865376"/>
+            <a:ext cx="10241280" cy="1024128"/>
+          </a:xfrm>
+          <a:prstGeom prst="rect">
+            <a:avLst/>
+          </a:prstGeom>
+          <a:solidFill>
+            <a:srgbClr val="FFFFFF">
+              <a:alpha val="0"/>
+            </a:srgbClr>
+          </a:solidFill>
+          <a:ln w="12700">
+            <a:solidFill>
+              <a:srgbClr val="E2E8F0">
+                <a:alpha val="0"/>
+              </a:srgbClr>
+            </a:solidFill>
+            <a:prstDash val="solid"/>
+          </a:ln>
+          <a:effectLst>
+            <a:outerShdw sx="100000" sy="100000" kx="0" ky="0" algn="bl" rotWithShape="0" blurRad="12700" dist="50800" dir="2700000">
+              <a:srgbClr val="000000">
+                <a:alpha val="8000"/>
+              </a:srgbClr>
+            </a:outerShdw>
+          </a:effectLst>
+        </p:spPr>
+      </p:sp>
+      <p:pic>
+        <p:nvPicPr>
+          <p:cNvPr id="9" name="Image 1" descr="preencoded.png">    </p:cNvPr>
+          <p:cNvPicPr>
+            <a:picLocks noChangeAspect="1"/>
+          </p:cNvPicPr>
+          <p:nvPr/>
+        </p:nvPicPr>
+        <p:blipFill>
+          <a:blip r:embed="rId3">
+            <a:extLst>
+              <a:ext uri="{96DAC541-7B7A-43D3-8B79-37D633B846F1}">
+                <asvg:svgBlip xmlns:asvg="http://schemas.microsoft.com/office/drawing/2016/SVG/main" r:embed="rId4"/>
+              </a:ext>
+            </a:extLst>
+          </a:blip>
+          <a:stretch>
+            <a:fillRect/>
+          </a:stretch>
+        </p:blipFill>
+        <p:spPr>
+          <a:xfrm>
+            <a:off x="914400" y="3191256"/>
+            <a:ext cx="10241280" cy="1024128"/>
+          </a:xfrm>
+          <a:prstGeom prst="rect">
+            <a:avLst/>
+          </a:prstGeom>
+        </p:spPr>
+      </p:pic>
+      <p:sp>
+        <p:nvSpPr>
+          <p:cNvPr id="10" name="Shape 6"/>
+          <p:cNvSpPr/>
+          <p:nvPr/>
+        </p:nvSpPr>
+        <p:spPr>
+          <a:xfrm>
+            <a:off x="914400" y="3191256"/>
+            <a:ext cx="10241280" cy="1024128"/>
+          </a:xfrm>
+          <a:prstGeom prst="rect">
+            <a:avLst/>
+          </a:prstGeom>
+          <a:solidFill>
+            <a:srgbClr val="FFFFFF">
+              <a:alpha val="0"/>
+            </a:srgbClr>
+          </a:solidFill>
+          <a:ln w="12700">
+            <a:solidFill>
+              <a:srgbClr val="E2E8F0">
+                <a:alpha val="0"/>
+              </a:srgbClr>
+            </a:solidFill>
+            <a:prstDash val="solid"/>
+          </a:ln>
+          <a:effectLst>
+            <a:outerShdw sx="100000" sy="100000" kx="0" ky="0" algn="bl" rotWithShape="0" blurRad="12700" dist="50800" dir="2700000">
+              <a:srgbClr val="000000">
+                <a:alpha val="8000"/>
+              </a:srgbClr>
+            </a:outerShdw>
+          </a:effectLst>
+        </p:spPr>
+      </p:sp>
+      <p:pic>
+        <p:nvPicPr>
+          <p:cNvPr id="11" name="Image 2" descr="preencoded.png">    </p:cNvPr>
+          <p:cNvPicPr>
+            <a:picLocks noChangeAspect="1"/>
+          </p:cNvPicPr>
+          <p:nvPr/>
+        </p:nvPicPr>
+        <p:blipFill>
+          <a:blip r:embed="rId5">
+            <a:extLst>
+              <a:ext uri="{96DAC541-7B7A-43D3-8B79-37D633B846F1}">
+                <asvg:svgBlip xmlns:asvg="http://schemas.microsoft.com/office/drawing/2016/SVG/main" r:embed="rId6"/>
+              </a:ext>
+            </a:extLst>
+          </a:blip>
+          <a:stretch>
+            <a:fillRect/>
+          </a:stretch>
+        </p:blipFill>
+        <p:spPr>
+          <a:xfrm>
+            <a:off x="914400" y="4507992"/>
+            <a:ext cx="10241280" cy="1024128"/>
+          </a:xfrm>
+          <a:prstGeom prst="rect">
+            <a:avLst/>
+          </a:prstGeom>
+        </p:spPr>
+      </p:pic>
+      <p:sp>
+        <p:nvSpPr>
+          <p:cNvPr id="12" name="Shape 7"/>
+          <p:cNvSpPr/>
+          <p:nvPr/>
+        </p:nvSpPr>
+        <p:spPr>
+          <a:xfrm>
+            <a:off x="914400" y="4507992"/>
+            <a:ext cx="10241280" cy="1024128"/>
+          </a:xfrm>
+          <a:prstGeom prst="rect">
+            <a:avLst/>
+          </a:prstGeom>
+          <a:solidFill>
+            <a:srgbClr val="FFFFFF">
+              <a:alpha val="0"/>
+            </a:srgbClr>
+          </a:solidFill>
+          <a:ln w="12700">
+            <a:solidFill>
+              <a:srgbClr val="E2E8F0">
+                <a:alpha val="0"/>
+              </a:srgbClr>
+            </a:solidFill>
+            <a:prstDash val="solid"/>
+          </a:ln>
+          <a:effectLst>
+            <a:outerShdw sx="100000" sy="100000" kx="0" ky="0" algn="bl" rotWithShape="0" blurRad="12700" dist="50800" dir="2700000">
+              <a:srgbClr val="000000">
+                <a:alpha val="8000"/>
+              </a:srgbClr>
+            </a:outerShdw>
+          </a:effectLst>
+        </p:spPr>
+      </p:sp>
+      <p:sp>
+        <p:nvSpPr>
+          <p:cNvPr id="13" name="Text 8"/>
           <p:cNvSpPr txBox="1"/>
           <p:nvPr/>
         </p:nvSpPr>
@@ -9875,14 +11148,71 @@
       </p:sp>
       <p:sp>
         <p:nvSpPr>
-          <p:cNvPr id="5" name="Text 3"/>
+          <p:cNvPr id="14" name="Shape 9"/>
+          <p:cNvSpPr/>
+          <p:nvPr/>
+        </p:nvSpPr>
+        <p:spPr>
+          <a:xfrm>
+            <a:off x="1097280" y="2140428"/>
+            <a:ext cx="474025" cy="474025"/>
+          </a:xfrm>
+          <a:prstGeom prst="roundRect">
+            <a:avLst>
+              <a:gd name="adj" fmla="val 7716"/>
+            </a:avLst>
+          </a:prstGeom>
+          <a:solidFill>
+            <a:srgbClr val="F8FAFC"/>
+          </a:solidFill>
+          <a:ln w="12700">
+            <a:solidFill>
+              <a:srgbClr val="E2E8F0"/>
+            </a:solidFill>
+            <a:prstDash val="solid"/>
+          </a:ln>
+        </p:spPr>
+      </p:sp>
+      <p:pic>
+        <p:nvPicPr>
+          <p:cNvPr id="15" name="Image 3" descr="article icon from tabler-icons (MIT)">    </p:cNvPr>
+          <p:cNvPicPr>
+            <a:picLocks noChangeAspect="1"/>
+          </p:cNvPicPr>
+          <p:nvPr/>
+        </p:nvPicPr>
+        <p:blipFill>
+          <a:blip r:embed="rId7">
+            <a:extLst>
+              <a:ext uri="{96DAC541-7B7A-43D3-8B79-37D633B846F1}">
+                <asvg:svgBlip xmlns:asvg="http://schemas.microsoft.com/office/drawing/2016/SVG/main" r:embed="rId8"/>
+              </a:ext>
+            </a:extLst>
+          </a:blip>
+          <a:stretch>
+            <a:fillRect/>
+          </a:stretch>
+        </p:blipFill>
+        <p:spPr>
+          <a:xfrm>
+            <a:off x="1170432" y="2213580"/>
+            <a:ext cx="327721" cy="327721"/>
+          </a:xfrm>
+          <a:prstGeom prst="rect">
+            <a:avLst/>
+          </a:prstGeom>
+        </p:spPr>
+      </p:pic>
+      <p:sp>
+        <p:nvSpPr>
+          <p:cNvPr id="16" name="Text 10"/>
           <p:cNvSpPr txBox="1"/>
           <p:nvPr/>
         </p:nvSpPr>
         <p:spPr>
           <a:xfrm>
-            <a:off x="987552" y="1572768"/>
-            <a:ext cx="10094976" cy="4261104"/>
+            <a:off x="1699321" y="1987296"/>
+            <a:ext cx="9255191" cy="780288"/>
           </a:xfrm>
           <a:prstGeom prst="rect">
             <a:avLst/>
@@ -9891,7 +11221,7 @@
           <a:ln/>
         </p:spPr>
         <p:txBody>
-          <a:bodyPr wrap="square" lIns="0" tIns="25400" rIns="25400" bIns="0" rtlCol="0" anchor="t"/>
+          <a:bodyPr wrap="square" lIns="0" tIns="25400" rIns="25400" bIns="0" rtlCol="0" anchor="ctr"/>
           <a:lstStyle/>
           <a:p>
             <a:pPr algn="l" indent="0" marL="0">
@@ -9909,7 +11239,7 @@
                 <a:ea typeface="Pretendard" pitchFamily="34" charset="-122"/>
                 <a:cs typeface="Pretendard" pitchFamily="34" charset="-120"/>
               </a:rPr>
-              <a:t>- Method flag</a:t>
+              <a:t>Method flag</a:t>
             </a:r>
             <a:pPr algn="l" indent="0" marL="0">
               <a:lnSpc>
@@ -9930,6 +11260,85 @@
             </a:r>
             <a:endParaRPr lang="en-US" sz="2200" dirty="0"/>
           </a:p>
+        </p:txBody>
+      </p:sp>
+      <p:sp>
+        <p:nvSpPr>
+          <p:cNvPr id="17" name="Shape 11"/>
+          <p:cNvSpPr/>
+          <p:nvPr/>
+        </p:nvSpPr>
+        <p:spPr>
+          <a:xfrm>
+            <a:off x="1097280" y="3466308"/>
+            <a:ext cx="474025" cy="474025"/>
+          </a:xfrm>
+          <a:prstGeom prst="roundRect">
+            <a:avLst>
+              <a:gd name="adj" fmla="val 7716"/>
+            </a:avLst>
+          </a:prstGeom>
+          <a:solidFill>
+            <a:srgbClr val="F8FAFC"/>
+          </a:solidFill>
+          <a:ln w="12700">
+            <a:solidFill>
+              <a:srgbClr val="E2E8F0"/>
+            </a:solidFill>
+            <a:prstDash val="solid"/>
+          </a:ln>
+        </p:spPr>
+      </p:sp>
+      <p:pic>
+        <p:nvPicPr>
+          <p:cNvPr id="18" name="Image 4" descr="article icon from tabler-icons (MIT)">    </p:cNvPr>
+          <p:cNvPicPr>
+            <a:picLocks noChangeAspect="1"/>
+          </p:cNvPicPr>
+          <p:nvPr/>
+        </p:nvPicPr>
+        <p:blipFill>
+          <a:blip r:embed="rId9">
+            <a:extLst>
+              <a:ext uri="{96DAC541-7B7A-43D3-8B79-37D633B846F1}">
+                <asvg:svgBlip xmlns:asvg="http://schemas.microsoft.com/office/drawing/2016/SVG/main" r:embed="rId10"/>
+              </a:ext>
+            </a:extLst>
+          </a:blip>
+          <a:stretch>
+            <a:fillRect/>
+          </a:stretch>
+        </p:blipFill>
+        <p:spPr>
+          <a:xfrm>
+            <a:off x="1170432" y="3539460"/>
+            <a:ext cx="327721" cy="327721"/>
+          </a:xfrm>
+          <a:prstGeom prst="rect">
+            <a:avLst/>
+          </a:prstGeom>
+        </p:spPr>
+      </p:pic>
+      <p:sp>
+        <p:nvSpPr>
+          <p:cNvPr id="19" name="Text 12"/>
+          <p:cNvSpPr txBox="1"/>
+          <p:nvPr/>
+        </p:nvSpPr>
+        <p:spPr>
+          <a:xfrm>
+            <a:off x="1699321" y="3313176"/>
+            <a:ext cx="9255191" cy="780288"/>
+          </a:xfrm>
+          <a:prstGeom prst="rect">
+            <a:avLst/>
+          </a:prstGeom>
+          <a:noFill/>
+          <a:ln/>
+        </p:spPr>
+        <p:txBody>
+          <a:bodyPr wrap="square" lIns="0" tIns="25400" rIns="25400" bIns="0" rtlCol="0" anchor="ctr"/>
+          <a:lstStyle/>
           <a:p>
             <a:pPr algn="l" indent="0" marL="0">
               <a:lnSpc>
@@ -9946,11 +11355,8 @@
                 <a:ea typeface="Pretendard" pitchFamily="34" charset="-122"/>
                 <a:cs typeface="Pretendard" pitchFamily="34" charset="-120"/>
               </a:rPr>
-              <a:t>- Ticket panel</a:t>
+              <a:t>Ticket panel</a:t>
             </a:r>
-            <a:endParaRPr lang="en-US" sz="2200" dirty="0"/>
-          </a:p>
-          <a:p>
             <a:pPr algn="l" indent="0" marL="0">
               <a:lnSpc>
                 <a:spcPct val="120000"/>
@@ -9970,6 +11376,85 @@
             </a:r>
             <a:endParaRPr lang="en-US" sz="2200" dirty="0"/>
           </a:p>
+        </p:txBody>
+      </p:sp>
+      <p:sp>
+        <p:nvSpPr>
+          <p:cNvPr id="20" name="Shape 13"/>
+          <p:cNvSpPr/>
+          <p:nvPr/>
+        </p:nvSpPr>
+        <p:spPr>
+          <a:xfrm>
+            <a:off x="1097280" y="4783044"/>
+            <a:ext cx="474025" cy="474025"/>
+          </a:xfrm>
+          <a:prstGeom prst="roundRect">
+            <a:avLst>
+              <a:gd name="adj" fmla="val 7716"/>
+            </a:avLst>
+          </a:prstGeom>
+          <a:solidFill>
+            <a:srgbClr val="F8FAFC"/>
+          </a:solidFill>
+          <a:ln w="12700">
+            <a:solidFill>
+              <a:srgbClr val="E2E8F0"/>
+            </a:solidFill>
+            <a:prstDash val="solid"/>
+          </a:ln>
+        </p:spPr>
+      </p:sp>
+      <p:pic>
+        <p:nvPicPr>
+          <p:cNvPr id="21" name="Image 5" descr="article icon from tabler-icons (MIT)">    </p:cNvPr>
+          <p:cNvPicPr>
+            <a:picLocks noChangeAspect="1"/>
+          </p:cNvPicPr>
+          <p:nvPr/>
+        </p:nvPicPr>
+        <p:blipFill>
+          <a:blip r:embed="rId11">
+            <a:extLst>
+              <a:ext uri="{96DAC541-7B7A-43D3-8B79-37D633B846F1}">
+                <asvg:svgBlip xmlns:asvg="http://schemas.microsoft.com/office/drawing/2016/SVG/main" r:embed="rId12"/>
+              </a:ext>
+            </a:extLst>
+          </a:blip>
+          <a:stretch>
+            <a:fillRect/>
+          </a:stretch>
+        </p:blipFill>
+        <p:spPr>
+          <a:xfrm>
+            <a:off x="1170432" y="4856196"/>
+            <a:ext cx="327721" cy="327721"/>
+          </a:xfrm>
+          <a:prstGeom prst="rect">
+            <a:avLst/>
+          </a:prstGeom>
+        </p:spPr>
+      </p:pic>
+      <p:sp>
+        <p:nvSpPr>
+          <p:cNvPr id="22" name="Text 14"/>
+          <p:cNvSpPr txBox="1"/>
+          <p:nvPr/>
+        </p:nvSpPr>
+        <p:spPr>
+          <a:xfrm>
+            <a:off x="1699321" y="4629912"/>
+            <a:ext cx="9255191" cy="780288"/>
+          </a:xfrm>
+          <a:prstGeom prst="rect">
+            <a:avLst/>
+          </a:prstGeom>
+          <a:noFill/>
+          <a:ln/>
+        </p:spPr>
+        <p:txBody>
+          <a:bodyPr wrap="square" lIns="0" tIns="25400" rIns="25400" bIns="0" rtlCol="0" anchor="ctr"/>
+          <a:lstStyle/>
           <a:p>
             <a:pPr algn="l" indent="0" marL="0">
               <a:lnSpc>
@@ -9986,11 +11471,8 @@
                 <a:ea typeface="Pretendard" pitchFamily="34" charset="-122"/>
                 <a:cs typeface="Pretendard" pitchFamily="34" charset="-120"/>
               </a:rPr>
-              <a:t>- Two-corner panel</a:t>
+              <a:t>Two-corner panel</a:t>
             </a:r>
-            <a:endParaRPr lang="en-US" sz="2200" dirty="0"/>
-          </a:p>
-          <a:p>
             <a:pPr algn="l" indent="0" marL="0">
               <a:lnSpc>
                 <a:spcPct val="120000"/>
@@ -10020,9 +11502,1159 @@
 </p:sld>
 </file>
 
-<file path=ppt/slides/slide19.xml><?xml version="1.0" encoding="utf-8"?>
+<file path=ppt/slides/slide2.xml><?xml version="1.0" encoding="utf-8"?>
 <p:sld xmlns:a="http://schemas.openxmlformats.org/drawingml/2006/main" xmlns:r="http://schemas.openxmlformats.org/officeDocument/2006/relationships" xmlns:p="http://schemas.openxmlformats.org/presentationml/2006/main">
-  <p:cSld name="Slide 19">
+  <p:cSld name="Slide 2">
+    <p:bg>
+      <p:bgPr>
+        <a:solidFill>
+          <a:srgbClr val="F8FAFC"/>
+        </a:solidFill>
+      </p:bgPr>
+    </p:bg>
+    <p:spTree>
+      <p:nvGrpSpPr>
+        <p:cNvPr id="1" name=""/>
+        <p:cNvGrpSpPr/>
+        <p:nvPr/>
+      </p:nvGrpSpPr>
+      <p:grpSpPr>
+        <a:xfrm>
+          <a:off x="0" y="0"/>
+          <a:ext cx="0" cy="0"/>
+          <a:chOff x="0" y="0"/>
+          <a:chExt cx="0" cy="0"/>
+        </a:xfrm>
+      </p:grpSpPr>
+      <p:sp>
+        <p:nvSpPr>
+          <p:cNvPr id="2" name="Shape 0"/>
+          <p:cNvSpPr/>
+          <p:nvPr/>
+        </p:nvSpPr>
+        <p:spPr>
+          <a:xfrm>
+            <a:off x="731520" y="1207008"/>
+            <a:ext cx="1325880" cy="54864"/>
+          </a:xfrm>
+          <a:prstGeom prst="rect">
+            <a:avLst/>
+          </a:prstGeom>
+          <a:solidFill>
+            <a:srgbClr val="2563EB"/>
+          </a:solidFill>
+          <a:ln w="12700">
+            <a:solidFill>
+              <a:srgbClr val="2563EB">
+                <a:alpha val="0"/>
+              </a:srgbClr>
+            </a:solidFill>
+            <a:prstDash val="solid"/>
+          </a:ln>
+        </p:spPr>
+      </p:sp>
+      <p:sp>
+        <p:nvSpPr>
+          <p:cNvPr id="3" name="Shape 1"/>
+          <p:cNvSpPr/>
+          <p:nvPr/>
+        </p:nvSpPr>
+        <p:spPr>
+          <a:xfrm>
+            <a:off x="822960" y="1188720"/>
+            <a:ext cx="10515600" cy="45720"/>
+          </a:xfrm>
+          <a:prstGeom prst="rect">
+            <a:avLst/>
+          </a:prstGeom>
+          <a:solidFill>
+            <a:srgbClr val="2563EB"/>
+          </a:solidFill>
+          <a:ln w="12700">
+            <a:solidFill>
+              <a:srgbClr val="2563EB">
+                <a:alpha val="0"/>
+              </a:srgbClr>
+            </a:solidFill>
+            <a:prstDash val="solid"/>
+          </a:ln>
+        </p:spPr>
+      </p:sp>
+      <p:sp>
+        <p:nvSpPr>
+          <p:cNvPr id="4" name="Shape 2"/>
+          <p:cNvSpPr/>
+          <p:nvPr/>
+        </p:nvSpPr>
+        <p:spPr>
+          <a:xfrm>
+            <a:off x="822960" y="6382512"/>
+            <a:ext cx="2011680" cy="45720"/>
+          </a:xfrm>
+          <a:prstGeom prst="rect">
+            <a:avLst/>
+          </a:prstGeom>
+          <a:solidFill>
+            <a:srgbClr val="DBEAFE"/>
+          </a:solidFill>
+          <a:ln w="12700">
+            <a:solidFill>
+              <a:srgbClr val="DBEAFE">
+                <a:alpha val="0"/>
+              </a:srgbClr>
+            </a:solidFill>
+            <a:prstDash val="solid"/>
+          </a:ln>
+        </p:spPr>
+      </p:sp>
+      <p:sp>
+        <p:nvSpPr>
+          <p:cNvPr id="5" name="Shape 3"/>
+          <p:cNvSpPr/>
+          <p:nvPr/>
+        </p:nvSpPr>
+        <p:spPr>
+          <a:xfrm>
+            <a:off x="6080760" y="1389888"/>
+            <a:ext cx="22860" cy="4846320"/>
+          </a:xfrm>
+          <a:prstGeom prst="rect">
+            <a:avLst/>
+          </a:prstGeom>
+          <a:solidFill>
+            <a:srgbClr val="E2E8F0">
+              <a:alpha val="90000"/>
+            </a:srgbClr>
+          </a:solidFill>
+          <a:ln w="12700">
+            <a:solidFill>
+              <a:srgbClr val="E2E8F0">
+                <a:alpha val="0"/>
+              </a:srgbClr>
+            </a:solidFill>
+            <a:prstDash val="solid"/>
+          </a:ln>
+        </p:spPr>
+      </p:sp>
+      <p:sp>
+        <p:nvSpPr>
+          <p:cNvPr id="6" name="Shape 4"/>
+          <p:cNvSpPr/>
+          <p:nvPr/>
+        </p:nvSpPr>
+        <p:spPr>
+          <a:xfrm>
+            <a:off x="822960" y="1389888"/>
+            <a:ext cx="73152" cy="566928"/>
+          </a:xfrm>
+          <a:prstGeom prst="rect">
+            <a:avLst/>
+          </a:prstGeom>
+          <a:solidFill>
+            <a:srgbClr val="2563EB"/>
+          </a:solidFill>
+          <a:ln w="12700">
+            <a:solidFill>
+              <a:srgbClr val="2563EB">
+                <a:alpha val="0"/>
+              </a:srgbClr>
+            </a:solidFill>
+            <a:prstDash val="solid"/>
+          </a:ln>
+        </p:spPr>
+      </p:sp>
+      <p:sp>
+        <p:nvSpPr>
+          <p:cNvPr id="7" name="Shape 5"/>
+          <p:cNvSpPr/>
+          <p:nvPr/>
+        </p:nvSpPr>
+        <p:spPr>
+          <a:xfrm>
+            <a:off x="822960" y="2103120"/>
+            <a:ext cx="73152" cy="566928"/>
+          </a:xfrm>
+          <a:prstGeom prst="rect">
+            <a:avLst/>
+          </a:prstGeom>
+          <a:solidFill>
+            <a:srgbClr val="DBEAFE"/>
+          </a:solidFill>
+          <a:ln w="12700">
+            <a:solidFill>
+              <a:srgbClr val="DBEAFE">
+                <a:alpha val="0"/>
+              </a:srgbClr>
+            </a:solidFill>
+            <a:prstDash val="solid"/>
+          </a:ln>
+        </p:spPr>
+      </p:sp>
+      <p:sp>
+        <p:nvSpPr>
+          <p:cNvPr id="8" name="Shape 6"/>
+          <p:cNvSpPr/>
+          <p:nvPr/>
+        </p:nvSpPr>
+        <p:spPr>
+          <a:xfrm>
+            <a:off x="822960" y="2816352"/>
+            <a:ext cx="73152" cy="566928"/>
+          </a:xfrm>
+          <a:prstGeom prst="rect">
+            <a:avLst/>
+          </a:prstGeom>
+          <a:solidFill>
+            <a:srgbClr val="2563EB"/>
+          </a:solidFill>
+          <a:ln w="12700">
+            <a:solidFill>
+              <a:srgbClr val="2563EB">
+                <a:alpha val="0"/>
+              </a:srgbClr>
+            </a:solidFill>
+            <a:prstDash val="solid"/>
+          </a:ln>
+        </p:spPr>
+      </p:sp>
+      <p:sp>
+        <p:nvSpPr>
+          <p:cNvPr id="9" name="Shape 7"/>
+          <p:cNvSpPr/>
+          <p:nvPr/>
+        </p:nvSpPr>
+        <p:spPr>
+          <a:xfrm>
+            <a:off x="822960" y="3529584"/>
+            <a:ext cx="73152" cy="566928"/>
+          </a:xfrm>
+          <a:prstGeom prst="rect">
+            <a:avLst/>
+          </a:prstGeom>
+          <a:solidFill>
+            <a:srgbClr val="DBEAFE"/>
+          </a:solidFill>
+          <a:ln w="12700">
+            <a:solidFill>
+              <a:srgbClr val="DBEAFE">
+                <a:alpha val="0"/>
+              </a:srgbClr>
+            </a:solidFill>
+            <a:prstDash val="solid"/>
+          </a:ln>
+        </p:spPr>
+      </p:sp>
+      <p:sp>
+        <p:nvSpPr>
+          <p:cNvPr id="10" name="Shape 8"/>
+          <p:cNvSpPr/>
+          <p:nvPr/>
+        </p:nvSpPr>
+        <p:spPr>
+          <a:xfrm>
+            <a:off x="822960" y="4242816"/>
+            <a:ext cx="73152" cy="566928"/>
+          </a:xfrm>
+          <a:prstGeom prst="rect">
+            <a:avLst/>
+          </a:prstGeom>
+          <a:solidFill>
+            <a:srgbClr val="2563EB"/>
+          </a:solidFill>
+          <a:ln w="12700">
+            <a:solidFill>
+              <a:srgbClr val="2563EB">
+                <a:alpha val="0"/>
+              </a:srgbClr>
+            </a:solidFill>
+            <a:prstDash val="solid"/>
+          </a:ln>
+        </p:spPr>
+      </p:sp>
+      <p:sp>
+        <p:nvSpPr>
+          <p:cNvPr id="11" name="Shape 9"/>
+          <p:cNvSpPr/>
+          <p:nvPr/>
+        </p:nvSpPr>
+        <p:spPr>
+          <a:xfrm>
+            <a:off x="822960" y="4956048"/>
+            <a:ext cx="73152" cy="566928"/>
+          </a:xfrm>
+          <a:prstGeom prst="rect">
+            <a:avLst/>
+          </a:prstGeom>
+          <a:solidFill>
+            <a:srgbClr val="DBEAFE"/>
+          </a:solidFill>
+          <a:ln w="12700">
+            <a:solidFill>
+              <a:srgbClr val="DBEAFE">
+                <a:alpha val="0"/>
+              </a:srgbClr>
+            </a:solidFill>
+            <a:prstDash val="solid"/>
+          </a:ln>
+        </p:spPr>
+      </p:sp>
+      <p:sp>
+        <p:nvSpPr>
+          <p:cNvPr id="12" name="Shape 10"/>
+          <p:cNvSpPr/>
+          <p:nvPr/>
+        </p:nvSpPr>
+        <p:spPr>
+          <a:xfrm>
+            <a:off x="822960" y="5669280"/>
+            <a:ext cx="73152" cy="566928"/>
+          </a:xfrm>
+          <a:prstGeom prst="rect">
+            <a:avLst/>
+          </a:prstGeom>
+          <a:solidFill>
+            <a:srgbClr val="2563EB"/>
+          </a:solidFill>
+          <a:ln w="12700">
+            <a:solidFill>
+              <a:srgbClr val="2563EB">
+                <a:alpha val="0"/>
+              </a:srgbClr>
+            </a:solidFill>
+            <a:prstDash val="solid"/>
+          </a:ln>
+        </p:spPr>
+      </p:sp>
+      <p:sp>
+        <p:nvSpPr>
+          <p:cNvPr id="13" name="Shape 11"/>
+          <p:cNvSpPr/>
+          <p:nvPr/>
+        </p:nvSpPr>
+        <p:spPr>
+          <a:xfrm>
+            <a:off x="6272784" y="1389888"/>
+            <a:ext cx="73152" cy="566928"/>
+          </a:xfrm>
+          <a:prstGeom prst="rect">
+            <a:avLst/>
+          </a:prstGeom>
+          <a:solidFill>
+            <a:srgbClr val="DBEAFE"/>
+          </a:solidFill>
+          <a:ln w="12700">
+            <a:solidFill>
+              <a:srgbClr val="DBEAFE">
+                <a:alpha val="0"/>
+              </a:srgbClr>
+            </a:solidFill>
+            <a:prstDash val="solid"/>
+          </a:ln>
+        </p:spPr>
+      </p:sp>
+      <p:sp>
+        <p:nvSpPr>
+          <p:cNvPr id="14" name="Shape 12"/>
+          <p:cNvSpPr/>
+          <p:nvPr/>
+        </p:nvSpPr>
+        <p:spPr>
+          <a:xfrm>
+            <a:off x="6272784" y="2103120"/>
+            <a:ext cx="73152" cy="566928"/>
+          </a:xfrm>
+          <a:prstGeom prst="rect">
+            <a:avLst/>
+          </a:prstGeom>
+          <a:solidFill>
+            <a:srgbClr val="2563EB"/>
+          </a:solidFill>
+          <a:ln w="12700">
+            <a:solidFill>
+              <a:srgbClr val="2563EB">
+                <a:alpha val="0"/>
+              </a:srgbClr>
+            </a:solidFill>
+            <a:prstDash val="solid"/>
+          </a:ln>
+        </p:spPr>
+      </p:sp>
+      <p:sp>
+        <p:nvSpPr>
+          <p:cNvPr id="15" name="Shape 13"/>
+          <p:cNvSpPr/>
+          <p:nvPr/>
+        </p:nvSpPr>
+        <p:spPr>
+          <a:xfrm>
+            <a:off x="6272784" y="2816352"/>
+            <a:ext cx="73152" cy="566928"/>
+          </a:xfrm>
+          <a:prstGeom prst="rect">
+            <a:avLst/>
+          </a:prstGeom>
+          <a:solidFill>
+            <a:srgbClr val="DBEAFE"/>
+          </a:solidFill>
+          <a:ln w="12700">
+            <a:solidFill>
+              <a:srgbClr val="DBEAFE">
+                <a:alpha val="0"/>
+              </a:srgbClr>
+            </a:solidFill>
+            <a:prstDash val="solid"/>
+          </a:ln>
+        </p:spPr>
+      </p:sp>
+      <p:sp>
+        <p:nvSpPr>
+          <p:cNvPr id="16" name="Shape 14"/>
+          <p:cNvSpPr/>
+          <p:nvPr/>
+        </p:nvSpPr>
+        <p:spPr>
+          <a:xfrm>
+            <a:off x="6272784" y="3529584"/>
+            <a:ext cx="73152" cy="566928"/>
+          </a:xfrm>
+          <a:prstGeom prst="rect">
+            <a:avLst/>
+          </a:prstGeom>
+          <a:solidFill>
+            <a:srgbClr val="2563EB"/>
+          </a:solidFill>
+          <a:ln w="12700">
+            <a:solidFill>
+              <a:srgbClr val="2563EB">
+                <a:alpha val="0"/>
+              </a:srgbClr>
+            </a:solidFill>
+            <a:prstDash val="solid"/>
+          </a:ln>
+        </p:spPr>
+      </p:sp>
+      <p:sp>
+        <p:nvSpPr>
+          <p:cNvPr id="17" name="Shape 15"/>
+          <p:cNvSpPr/>
+          <p:nvPr/>
+        </p:nvSpPr>
+        <p:spPr>
+          <a:xfrm>
+            <a:off x="6272784" y="4242816"/>
+            <a:ext cx="73152" cy="566928"/>
+          </a:xfrm>
+          <a:prstGeom prst="rect">
+            <a:avLst/>
+          </a:prstGeom>
+          <a:solidFill>
+            <a:srgbClr val="DBEAFE"/>
+          </a:solidFill>
+          <a:ln w="12700">
+            <a:solidFill>
+              <a:srgbClr val="DBEAFE">
+                <a:alpha val="0"/>
+              </a:srgbClr>
+            </a:solidFill>
+            <a:prstDash val="solid"/>
+          </a:ln>
+        </p:spPr>
+      </p:sp>
+      <p:sp>
+        <p:nvSpPr>
+          <p:cNvPr id="18" name="Shape 16"/>
+          <p:cNvSpPr/>
+          <p:nvPr/>
+        </p:nvSpPr>
+        <p:spPr>
+          <a:xfrm>
+            <a:off x="6272784" y="4956048"/>
+            <a:ext cx="73152" cy="566928"/>
+          </a:xfrm>
+          <a:prstGeom prst="rect">
+            <a:avLst/>
+          </a:prstGeom>
+          <a:solidFill>
+            <a:srgbClr val="2563EB"/>
+          </a:solidFill>
+          <a:ln w="12700">
+            <a:solidFill>
+              <a:srgbClr val="2563EB">
+                <a:alpha val="0"/>
+              </a:srgbClr>
+            </a:solidFill>
+            <a:prstDash val="solid"/>
+          </a:ln>
+        </p:spPr>
+      </p:sp>
+      <p:sp>
+        <p:nvSpPr>
+          <p:cNvPr id="19" name="Shape 17"/>
+          <p:cNvSpPr/>
+          <p:nvPr/>
+        </p:nvSpPr>
+        <p:spPr>
+          <a:xfrm>
+            <a:off x="6272784" y="5669280"/>
+            <a:ext cx="73152" cy="566928"/>
+          </a:xfrm>
+          <a:prstGeom prst="rect">
+            <a:avLst/>
+          </a:prstGeom>
+          <a:solidFill>
+            <a:srgbClr val="DBEAFE"/>
+          </a:solidFill>
+          <a:ln w="12700">
+            <a:solidFill>
+              <a:srgbClr val="DBEAFE">
+                <a:alpha val="0"/>
+              </a:srgbClr>
+            </a:solidFill>
+            <a:prstDash val="solid"/>
+          </a:ln>
+        </p:spPr>
+      </p:sp>
+      <p:sp>
+        <p:nvSpPr>
+          <p:cNvPr id="20" name="Text 18"/>
+          <p:cNvSpPr txBox="1"/>
+          <p:nvPr/>
+        </p:nvSpPr>
+        <p:spPr>
+          <a:xfrm>
+            <a:off x="731520" y="384048"/>
+            <a:ext cx="10698480" cy="822960"/>
+          </a:xfrm>
+          <a:prstGeom prst="rect">
+            <a:avLst/>
+          </a:prstGeom>
+          <a:noFill/>
+          <a:ln/>
+        </p:spPr>
+        <p:txBody>
+          <a:bodyPr wrap="square" lIns="0" tIns="0" rIns="0" bIns="0" rtlCol="0" anchor="ctr"/>
+          <a:lstStyle/>
+          <a:p>
+            <a:pPr algn="ctr" indent="0" marL="0">
+              <a:lnSpc>
+                <a:spcPct val="120000"/>
+              </a:lnSpc>
+              <a:buNone/>
+            </a:pPr>
+            <a:r>
+              <a:rPr lang="en-US" sz="3800" b="1" dirty="0">
+                <a:solidFill>
+                  <a:srgbClr val="111827"/>
+                </a:solidFill>
+                <a:latin typeface="Pretendard" pitchFamily="34" charset="0"/>
+                <a:ea typeface="Pretendard" pitchFamily="34" charset="-122"/>
+                <a:cs typeface="Pretendard" pitchFamily="34" charset="-120"/>
+              </a:rPr>
+              <a:t>Agenda</a:t>
+            </a:r>
+            <a:endParaRPr lang="en-US" sz="3800" dirty="0"/>
+          </a:p>
+        </p:txBody>
+      </p:sp>
+      <p:sp>
+        <p:nvSpPr>
+          <p:cNvPr id="21" name="Text 19"/>
+          <p:cNvSpPr txBox="1"/>
+          <p:nvPr/>
+        </p:nvSpPr>
+        <p:spPr>
+          <a:xfrm>
+            <a:off x="1042416" y="1481328"/>
+            <a:ext cx="4645152" cy="384048"/>
+          </a:xfrm>
+          <a:prstGeom prst="rect">
+            <a:avLst/>
+          </a:prstGeom>
+          <a:noFill/>
+          <a:ln/>
+        </p:spPr>
+        <p:txBody>
+          <a:bodyPr wrap="square" lIns="0" tIns="25400" rIns="25400" bIns="0" rtlCol="0" anchor="ctr"/>
+          <a:lstStyle/>
+          <a:p>
+            <a:pPr algn="ctr" indent="0" marL="0">
+              <a:lnSpc>
+                <a:spcPct val="120000"/>
+              </a:lnSpc>
+              <a:buNone/>
+            </a:pPr>
+            <a:r>
+              <a:rPr lang="en-US" sz="1800" dirty="0">
+                <a:solidFill>
+                  <a:srgbClr val="111827"/>
+                </a:solidFill>
+                <a:latin typeface="Pretendard" pitchFamily="34" charset="0"/>
+                <a:ea typeface="Pretendard" pitchFamily="34" charset="-122"/>
+                <a:cs typeface="Pretendard" pitchFamily="34" charset="-120"/>
+              </a:rPr>
+              <a:t>01  Teaser Summary</a:t>
+            </a:r>
+            <a:endParaRPr lang="en-US" sz="1800" dirty="0"/>
+          </a:p>
+        </p:txBody>
+      </p:sp>
+      <p:sp>
+        <p:nvSpPr>
+          <p:cNvPr id="22" name="Text 20"/>
+          <p:cNvSpPr txBox="1"/>
+          <p:nvPr/>
+        </p:nvSpPr>
+        <p:spPr>
+          <a:xfrm>
+            <a:off x="1042416" y="2194560"/>
+            <a:ext cx="4645152" cy="384048"/>
+          </a:xfrm>
+          <a:prstGeom prst="rect">
+            <a:avLst/>
+          </a:prstGeom>
+          <a:noFill/>
+          <a:ln/>
+        </p:spPr>
+        <p:txBody>
+          <a:bodyPr wrap="square" lIns="0" tIns="25400" rIns="25400" bIns="0" rtlCol="0" anchor="ctr"/>
+          <a:lstStyle/>
+          <a:p>
+            <a:pPr algn="ctr" indent="0" marL="0">
+              <a:lnSpc>
+                <a:spcPct val="120000"/>
+              </a:lnSpc>
+              <a:buNone/>
+            </a:pPr>
+            <a:r>
+              <a:rPr lang="en-US" sz="1800" dirty="0">
+                <a:solidFill>
+                  <a:srgbClr val="111827"/>
+                </a:solidFill>
+                <a:latin typeface="Pretendard" pitchFamily="34" charset="0"/>
+                <a:ea typeface="Pretendard" pitchFamily="34" charset="-122"/>
+                <a:cs typeface="Pretendard" pitchFamily="34" charset="-120"/>
+              </a:rPr>
+              <a:t>02  Composition Contract</a:t>
+            </a:r>
+            <a:endParaRPr lang="en-US" sz="1800" dirty="0"/>
+          </a:p>
+        </p:txBody>
+      </p:sp>
+      <p:sp>
+        <p:nvSpPr>
+          <p:cNvPr id="23" name="Text 21"/>
+          <p:cNvSpPr txBox="1"/>
+          <p:nvPr/>
+        </p:nvSpPr>
+        <p:spPr>
+          <a:xfrm>
+            <a:off x="1042416" y="2907792"/>
+            <a:ext cx="4645152" cy="384048"/>
+          </a:xfrm>
+          <a:prstGeom prst="rect">
+            <a:avLst/>
+          </a:prstGeom>
+          <a:noFill/>
+          <a:ln/>
+        </p:spPr>
+        <p:txBody>
+          <a:bodyPr wrap="square" lIns="0" tIns="25400" rIns="25400" bIns="0" rtlCol="0" anchor="ctr"/>
+          <a:lstStyle/>
+          <a:p>
+            <a:pPr algn="ctr" indent="0" marL="0">
+              <a:lnSpc>
+                <a:spcPct val="120000"/>
+              </a:lnSpc>
+              <a:buNone/>
+            </a:pPr>
+            <a:r>
+              <a:rPr lang="en-US" sz="1800" dirty="0">
+                <a:solidFill>
+                  <a:srgbClr val="111827"/>
+                </a:solidFill>
+                <a:latin typeface="Pretendard" pitchFamily="34" charset="0"/>
+                <a:ea typeface="Pretendard" pitchFamily="34" charset="-122"/>
+                <a:cs typeface="Pretendard" pitchFamily="34" charset="-120"/>
+              </a:rPr>
+              <a:t>03  Pruned Style Families</a:t>
+            </a:r>
+            <a:endParaRPr lang="en-US" sz="1800" dirty="0"/>
+          </a:p>
+        </p:txBody>
+      </p:sp>
+      <p:sp>
+        <p:nvSpPr>
+          <p:cNvPr id="24" name="Text 22"/>
+          <p:cNvSpPr txBox="1"/>
+          <p:nvPr/>
+        </p:nvSpPr>
+        <p:spPr>
+          <a:xfrm>
+            <a:off x="1042416" y="3621024"/>
+            <a:ext cx="4645152" cy="384048"/>
+          </a:xfrm>
+          <a:prstGeom prst="rect">
+            <a:avLst/>
+          </a:prstGeom>
+          <a:noFill/>
+          <a:ln/>
+        </p:spPr>
+        <p:txBody>
+          <a:bodyPr wrap="square" lIns="0" tIns="25400" rIns="25400" bIns="0" rtlCol="0" anchor="ctr"/>
+          <a:lstStyle/>
+          <a:p>
+            <a:pPr algn="ctr" indent="0" marL="0">
+              <a:lnSpc>
+                <a:spcPct val="120000"/>
+              </a:lnSpc>
+              <a:buNone/>
+            </a:pPr>
+            <a:r>
+              <a:rPr lang="en-US" sz="1800" dirty="0">
+                <a:solidFill>
+                  <a:srgbClr val="111827"/>
+                </a:solidFill>
+                <a:latin typeface="Pretendard" pitchFamily="34" charset="0"/>
+                <a:ea typeface="Pretendard" pitchFamily="34" charset="-122"/>
+                <a:cs typeface="Pretendard" pitchFamily="34" charset="-120"/>
+              </a:rPr>
+              <a:t>04  Semantic Blocks</a:t>
+            </a:r>
+            <a:endParaRPr lang="en-US" sz="1800" dirty="0"/>
+          </a:p>
+        </p:txBody>
+      </p:sp>
+      <p:sp>
+        <p:nvSpPr>
+          <p:cNvPr id="25" name="Text 23"/>
+          <p:cNvSpPr txBox="1"/>
+          <p:nvPr/>
+        </p:nvSpPr>
+        <p:spPr>
+          <a:xfrm>
+            <a:off x="1042416" y="4334256"/>
+            <a:ext cx="4645152" cy="384048"/>
+          </a:xfrm>
+          <a:prstGeom prst="rect">
+            <a:avLst/>
+          </a:prstGeom>
+          <a:noFill/>
+          <a:ln/>
+        </p:spPr>
+        <p:txBody>
+          <a:bodyPr wrap="square" lIns="0" tIns="25400" rIns="25400" bIns="0" rtlCol="0" anchor="ctr"/>
+          <a:lstStyle/>
+          <a:p>
+            <a:pPr algn="ctr" indent="0" marL="0">
+              <a:lnSpc>
+                <a:spcPct val="120000"/>
+              </a:lnSpc>
+              <a:buNone/>
+            </a:pPr>
+            <a:r>
+              <a:rPr lang="en-US" sz="1800" dirty="0">
+                <a:solidFill>
+                  <a:srgbClr val="111827"/>
+                </a:solidFill>
+                <a:latin typeface="Pretendard" pitchFamily="34" charset="0"/>
+                <a:ea typeface="Pretendard" pitchFamily="34" charset="-122"/>
+                <a:cs typeface="Pretendard" pitchFamily="34" charset="-120"/>
+              </a:rPr>
+              <a:t>05  Pipeline Diagram</a:t>
+            </a:r>
+            <a:endParaRPr lang="en-US" sz="1800" dirty="0"/>
+          </a:p>
+        </p:txBody>
+      </p:sp>
+      <p:sp>
+        <p:nvSpPr>
+          <p:cNvPr id="26" name="Text 24"/>
+          <p:cNvSpPr txBox="1"/>
+          <p:nvPr/>
+        </p:nvSpPr>
+        <p:spPr>
+          <a:xfrm>
+            <a:off x="1042416" y="5047488"/>
+            <a:ext cx="4645152" cy="384048"/>
+          </a:xfrm>
+          <a:prstGeom prst="rect">
+            <a:avLst/>
+          </a:prstGeom>
+          <a:noFill/>
+          <a:ln/>
+        </p:spPr>
+        <p:txBody>
+          <a:bodyPr wrap="square" lIns="0" tIns="25400" rIns="25400" bIns="0" rtlCol="0" anchor="ctr"/>
+          <a:lstStyle/>
+          <a:p>
+            <a:pPr algn="ctr" indent="0" marL="0">
+              <a:lnSpc>
+                <a:spcPct val="120000"/>
+              </a:lnSpc>
+              <a:buNone/>
+            </a:pPr>
+            <a:r>
+              <a:rPr lang="en-US" sz="1800" dirty="0">
+                <a:solidFill>
+                  <a:srgbClr val="111827"/>
+                </a:solidFill>
+                <a:latin typeface="Pretendard" pitchFamily="34" charset="0"/>
+                <a:ea typeface="Pretendard" pitchFamily="34" charset="-122"/>
+                <a:cs typeface="Pretendard" pitchFamily="34" charset="-120"/>
+              </a:rPr>
+              <a:t>06  Decoration Pattern Catalog</a:t>
+            </a:r>
+            <a:endParaRPr lang="en-US" sz="1800" dirty="0"/>
+          </a:p>
+        </p:txBody>
+      </p:sp>
+      <p:sp>
+        <p:nvSpPr>
+          <p:cNvPr id="27" name="Text 25"/>
+          <p:cNvSpPr txBox="1"/>
+          <p:nvPr/>
+        </p:nvSpPr>
+        <p:spPr>
+          <a:xfrm>
+            <a:off x="1042416" y="5760720"/>
+            <a:ext cx="4645152" cy="384048"/>
+          </a:xfrm>
+          <a:prstGeom prst="rect">
+            <a:avLst/>
+          </a:prstGeom>
+          <a:noFill/>
+          <a:ln/>
+        </p:spPr>
+        <p:txBody>
+          <a:bodyPr wrap="square" lIns="0" tIns="25400" rIns="25400" bIns="0" rtlCol="0" anchor="ctr"/>
+          <a:lstStyle/>
+          <a:p>
+            <a:pPr algn="ctr" indent="0" marL="0">
+              <a:lnSpc>
+                <a:spcPct val="120000"/>
+              </a:lnSpc>
+              <a:buNone/>
+            </a:pPr>
+            <a:r>
+              <a:rPr lang="en-US" sz="1800" dirty="0">
+                <a:solidFill>
+                  <a:srgbClr val="111827"/>
+                </a:solidFill>
+                <a:latin typeface="Pretendard" pitchFamily="34" charset="0"/>
+                <a:ea typeface="Pretendard" pitchFamily="34" charset="-122"/>
+                <a:cs typeface="Pretendard" pitchFamily="34" charset="-120"/>
+              </a:rPr>
+              <a:t>07  Table Coherence</a:t>
+            </a:r>
+            <a:endParaRPr lang="en-US" sz="1800" dirty="0"/>
+          </a:p>
+        </p:txBody>
+      </p:sp>
+      <p:sp>
+        <p:nvSpPr>
+          <p:cNvPr id="28" name="Text 26"/>
+          <p:cNvSpPr txBox="1"/>
+          <p:nvPr/>
+        </p:nvSpPr>
+        <p:spPr>
+          <a:xfrm>
+            <a:off x="6492240" y="1481328"/>
+            <a:ext cx="4645152" cy="384048"/>
+          </a:xfrm>
+          <a:prstGeom prst="rect">
+            <a:avLst/>
+          </a:prstGeom>
+          <a:noFill/>
+          <a:ln/>
+        </p:spPr>
+        <p:txBody>
+          <a:bodyPr wrap="square" lIns="0" tIns="25400" rIns="25400" bIns="0" rtlCol="0" anchor="ctr"/>
+          <a:lstStyle/>
+          <a:p>
+            <a:pPr algn="ctr" indent="0" marL="0">
+              <a:lnSpc>
+                <a:spcPct val="120000"/>
+              </a:lnSpc>
+              <a:buNone/>
+            </a:pPr>
+            <a:r>
+              <a:rPr lang="en-US" sz="1800" dirty="0">
+                <a:solidFill>
+                  <a:srgbClr val="111827"/>
+                </a:solidFill>
+                <a:latin typeface="Pretendard" pitchFamily="34" charset="0"/>
+                <a:ea typeface="Pretendard" pitchFamily="34" charset="-122"/>
+                <a:cs typeface="Pretendard" pitchFamily="34" charset="-120"/>
+              </a:rPr>
+              <a:t>08  Chart and Table Pair</a:t>
+            </a:r>
+            <a:endParaRPr lang="en-US" sz="1800" dirty="0"/>
+          </a:p>
+        </p:txBody>
+      </p:sp>
+      <p:sp>
+        <p:nvSpPr>
+          <p:cNvPr id="29" name="Text 27"/>
+          <p:cNvSpPr txBox="1"/>
+          <p:nvPr/>
+        </p:nvSpPr>
+        <p:spPr>
+          <a:xfrm>
+            <a:off x="6492240" y="2194560"/>
+            <a:ext cx="4645152" cy="384048"/>
+          </a:xfrm>
+          <a:prstGeom prst="rect">
+            <a:avLst/>
+          </a:prstGeom>
+          <a:noFill/>
+          <a:ln/>
+        </p:spPr>
+        <p:txBody>
+          <a:bodyPr wrap="square" lIns="0" tIns="25400" rIns="25400" bIns="0" rtlCol="0" anchor="ctr"/>
+          <a:lstStyle/>
+          <a:p>
+            <a:pPr algn="ctr" indent="0" marL="0">
+              <a:lnSpc>
+                <a:spcPct val="120000"/>
+              </a:lnSpc>
+              <a:buNone/>
+            </a:pPr>
+            <a:r>
+              <a:rPr lang="en-US" sz="1800" dirty="0">
+                <a:solidFill>
+                  <a:srgbClr val="111827"/>
+                </a:solidFill>
+                <a:latin typeface="Pretendard" pitchFamily="34" charset="0"/>
+                <a:ea typeface="Pretendard" pitchFamily="34" charset="-122"/>
+                <a:cs typeface="Pretendard" pitchFamily="34" charset="-120"/>
+              </a:rPr>
+              <a:t>09  Editable Proof Objects</a:t>
+            </a:r>
+            <a:endParaRPr lang="en-US" sz="1800" dirty="0"/>
+          </a:p>
+        </p:txBody>
+      </p:sp>
+      <p:sp>
+        <p:nvSpPr>
+          <p:cNvPr id="30" name="Text 28"/>
+          <p:cNvSpPr txBox="1"/>
+          <p:nvPr/>
+        </p:nvSpPr>
+        <p:spPr>
+          <a:xfrm>
+            <a:off x="6492240" y="2907792"/>
+            <a:ext cx="4645152" cy="384048"/>
+          </a:xfrm>
+          <a:prstGeom prst="rect">
+            <a:avLst/>
+          </a:prstGeom>
+          <a:noFill/>
+          <a:ln/>
+        </p:spPr>
+        <p:txBody>
+          <a:bodyPr wrap="square" lIns="0" tIns="25400" rIns="25400" bIns="0" rtlCol="0" anchor="ctr"/>
+          <a:lstStyle/>
+          <a:p>
+            <a:pPr algn="ctr" indent="0" marL="0">
+              <a:lnSpc>
+                <a:spcPct val="120000"/>
+              </a:lnSpc>
+              <a:buNone/>
+            </a:pPr>
+            <a:r>
+              <a:rPr lang="en-US" sz="1800" dirty="0">
+                <a:solidFill>
+                  <a:srgbClr val="111827"/>
+                </a:solidFill>
+                <a:latin typeface="Pretendard" pitchFamily="34" charset="0"/>
+                <a:ea typeface="Pretendard" pitchFamily="34" charset="-122"/>
+                <a:cs typeface="Pretendard" pitchFamily="34" charset="-120"/>
+              </a:rPr>
+              <a:t>10  Object Shape Grammar</a:t>
+            </a:r>
+            <a:endParaRPr lang="en-US" sz="1800" dirty="0"/>
+          </a:p>
+        </p:txBody>
+      </p:sp>
+      <p:sp>
+        <p:nvSpPr>
+          <p:cNvPr id="31" name="Text 29"/>
+          <p:cNvSpPr txBox="1"/>
+          <p:nvPr/>
+        </p:nvSpPr>
+        <p:spPr>
+          <a:xfrm>
+            <a:off x="6492240" y="3621024"/>
+            <a:ext cx="4645152" cy="384048"/>
+          </a:xfrm>
+          <a:prstGeom prst="rect">
+            <a:avLst/>
+          </a:prstGeom>
+          <a:noFill/>
+          <a:ln/>
+        </p:spPr>
+        <p:txBody>
+          <a:bodyPr wrap="square" lIns="0" tIns="25400" rIns="25400" bIns="0" rtlCol="0" anchor="ctr"/>
+          <a:lstStyle/>
+          <a:p>
+            <a:pPr algn="ctr" indent="0" marL="0">
+              <a:lnSpc>
+                <a:spcPct val="120000"/>
+              </a:lnSpc>
+              <a:buNone/>
+            </a:pPr>
+            <a:r>
+              <a:rPr lang="en-US" sz="1800" dirty="0">
+                <a:solidFill>
+                  <a:srgbClr val="111827"/>
+                </a:solidFill>
+                <a:latin typeface="Pretendard" pitchFamily="34" charset="0"/>
+                <a:ea typeface="Pretendard" pitchFamily="34" charset="-122"/>
+                <a:cs typeface="Pretendard" pitchFamily="34" charset="-120"/>
+              </a:rPr>
+              <a:t>11  Icon and Text Aside</a:t>
+            </a:r>
+            <a:endParaRPr lang="en-US" sz="1800" dirty="0"/>
+          </a:p>
+        </p:txBody>
+      </p:sp>
+      <p:sp>
+        <p:nvSpPr>
+          <p:cNvPr id="32" name="Text 30"/>
+          <p:cNvSpPr txBox="1"/>
+          <p:nvPr/>
+        </p:nvSpPr>
+        <p:spPr>
+          <a:xfrm>
+            <a:off x="6492240" y="4334256"/>
+            <a:ext cx="4645152" cy="384048"/>
+          </a:xfrm>
+          <a:prstGeom prst="rect">
+            <a:avLst/>
+          </a:prstGeom>
+          <a:noFill/>
+          <a:ln/>
+        </p:spPr>
+        <p:txBody>
+          <a:bodyPr wrap="square" lIns="0" tIns="25400" rIns="25400" bIns="0" rtlCol="0" anchor="ctr"/>
+          <a:lstStyle/>
+          <a:p>
+            <a:pPr algn="ctr" indent="0" marL="0">
+              <a:lnSpc>
+                <a:spcPct val="120000"/>
+              </a:lnSpc>
+              <a:buNone/>
+            </a:pPr>
+            <a:r>
+              <a:rPr lang="en-US" sz="1800" dirty="0">
+                <a:solidFill>
+                  <a:srgbClr val="111827"/>
+                </a:solidFill>
+                <a:latin typeface="Pretendard" pitchFamily="34" charset="0"/>
+                <a:ea typeface="Pretendard" pitchFamily="34" charset="-122"/>
+                <a:cs typeface="Pretendard" pitchFamily="34" charset="-120"/>
+              </a:rPr>
+              <a:t>12  Overflow Guard</a:t>
+            </a:r>
+            <a:endParaRPr lang="en-US" sz="1800" dirty="0"/>
+          </a:p>
+        </p:txBody>
+      </p:sp>
+      <p:sp>
+        <p:nvSpPr>
+          <p:cNvPr id="33" name="Text 31"/>
+          <p:cNvSpPr txBox="1"/>
+          <p:nvPr/>
+        </p:nvSpPr>
+        <p:spPr>
+          <a:xfrm>
+            <a:off x="6492240" y="5047488"/>
+            <a:ext cx="4645152" cy="384048"/>
+          </a:xfrm>
+          <a:prstGeom prst="rect">
+            <a:avLst/>
+          </a:prstGeom>
+          <a:noFill/>
+          <a:ln/>
+        </p:spPr>
+        <p:txBody>
+          <a:bodyPr wrap="square" lIns="0" tIns="25400" rIns="25400" bIns="0" rtlCol="0" anchor="ctr"/>
+          <a:lstStyle/>
+          <a:p>
+            <a:pPr algn="ctr" indent="0" marL="0">
+              <a:lnSpc>
+                <a:spcPct val="120000"/>
+              </a:lnSpc>
+              <a:buNone/>
+            </a:pPr>
+            <a:r>
+              <a:rPr lang="en-US" sz="1800" dirty="0">
+                <a:solidFill>
+                  <a:srgbClr val="111827"/>
+                </a:solidFill>
+                <a:latin typeface="Pretendard" pitchFamily="34" charset="0"/>
+                <a:ea typeface="Pretendard" pitchFamily="34" charset="-122"/>
+                <a:cs typeface="Pretendard" pitchFamily="34" charset="-120"/>
+              </a:rPr>
+              <a:t>13  Image Safe Frame</a:t>
+            </a:r>
+            <a:endParaRPr lang="en-US" sz="1800" dirty="0"/>
+          </a:p>
+        </p:txBody>
+      </p:sp>
+      <p:sp>
+        <p:nvSpPr>
+          <p:cNvPr id="34" name="Text 32"/>
+          <p:cNvSpPr txBox="1"/>
+          <p:nvPr/>
+        </p:nvSpPr>
+        <p:spPr>
+          <a:xfrm>
+            <a:off x="6492240" y="5760720"/>
+            <a:ext cx="4645152" cy="384048"/>
+          </a:xfrm>
+          <a:prstGeom prst="rect">
+            <a:avLst/>
+          </a:prstGeom>
+          <a:noFill/>
+          <a:ln/>
+        </p:spPr>
+        <p:txBody>
+          <a:bodyPr wrap="square" lIns="0" tIns="25400" rIns="25400" bIns="0" rtlCol="0" anchor="ctr"/>
+          <a:lstStyle/>
+          <a:p>
+            <a:pPr algn="ctr" indent="0" marL="0">
+              <a:lnSpc>
+                <a:spcPct val="120000"/>
+              </a:lnSpc>
+              <a:buNone/>
+            </a:pPr>
+            <a:r>
+              <a:rPr lang="en-US" sz="1800" dirty="0">
+                <a:solidFill>
+                  <a:srgbClr val="111827"/>
+                </a:solidFill>
+                <a:latin typeface="Pretendard" pitchFamily="34" charset="0"/>
+                <a:ea typeface="Pretendard" pitchFamily="34" charset="-122"/>
+                <a:cs typeface="Pretendard" pitchFamily="34" charset="-120"/>
+              </a:rPr>
+              <a:t>14  Mixed Object Packing</a:t>
+            </a:r>
+            <a:endParaRPr lang="en-US" sz="1800" dirty="0"/>
+          </a:p>
+        </p:txBody>
+      </p:sp>
+    </p:spTree>
+  </p:cSld>
+  <p:clrMapOvr>
+    <a:masterClrMapping/>
+  </p:clrMapOvr>
+</p:sld>
+</file>
+
+<file path=ppt/slides/slide20.xml><?xml version="1.0" encoding="utf-8"?>
+<p:sld xmlns:a="http://schemas.openxmlformats.org/drawingml/2006/main" xmlns:r="http://schemas.openxmlformats.org/officeDocument/2006/relationships" xmlns:p="http://schemas.openxmlformats.org/presentationml/2006/main">
+  <p:cSld name="Slide 20">
     <p:bg>
       <p:bgPr>
         <a:solidFill>
@@ -10293,1159 +12925,9 @@
 </p:sld>
 </file>
 
-<file path=ppt/slides/slide2.xml><?xml version="1.0" encoding="utf-8"?>
+<file path=ppt/slides/slide21.xml><?xml version="1.0" encoding="utf-8"?>
 <p:sld xmlns:a="http://schemas.openxmlformats.org/drawingml/2006/main" xmlns:r="http://schemas.openxmlformats.org/officeDocument/2006/relationships" xmlns:p="http://schemas.openxmlformats.org/presentationml/2006/main">
-  <p:cSld name="Slide 2">
-    <p:bg>
-      <p:bgPr>
-        <a:solidFill>
-          <a:srgbClr val="F8FAFC"/>
-        </a:solidFill>
-      </p:bgPr>
-    </p:bg>
-    <p:spTree>
-      <p:nvGrpSpPr>
-        <p:cNvPr id="1" name=""/>
-        <p:cNvGrpSpPr/>
-        <p:nvPr/>
-      </p:nvGrpSpPr>
-      <p:grpSpPr>
-        <a:xfrm>
-          <a:off x="0" y="0"/>
-          <a:ext cx="0" cy="0"/>
-          <a:chOff x="0" y="0"/>
-          <a:chExt cx="0" cy="0"/>
-        </a:xfrm>
-      </p:grpSpPr>
-      <p:sp>
-        <p:nvSpPr>
-          <p:cNvPr id="2" name="Shape 0"/>
-          <p:cNvSpPr/>
-          <p:nvPr/>
-        </p:nvSpPr>
-        <p:spPr>
-          <a:xfrm>
-            <a:off x="731520" y="1207008"/>
-            <a:ext cx="1325880" cy="54864"/>
-          </a:xfrm>
-          <a:prstGeom prst="rect">
-            <a:avLst/>
-          </a:prstGeom>
-          <a:solidFill>
-            <a:srgbClr val="2563EB"/>
-          </a:solidFill>
-          <a:ln w="12700">
-            <a:solidFill>
-              <a:srgbClr val="2563EB">
-                <a:alpha val="0"/>
-              </a:srgbClr>
-            </a:solidFill>
-            <a:prstDash val="solid"/>
-          </a:ln>
-        </p:spPr>
-      </p:sp>
-      <p:sp>
-        <p:nvSpPr>
-          <p:cNvPr id="3" name="Shape 1"/>
-          <p:cNvSpPr/>
-          <p:nvPr/>
-        </p:nvSpPr>
-        <p:spPr>
-          <a:xfrm>
-            <a:off x="822960" y="1188720"/>
-            <a:ext cx="10515600" cy="45720"/>
-          </a:xfrm>
-          <a:prstGeom prst="rect">
-            <a:avLst/>
-          </a:prstGeom>
-          <a:solidFill>
-            <a:srgbClr val="2563EB"/>
-          </a:solidFill>
-          <a:ln w="12700">
-            <a:solidFill>
-              <a:srgbClr val="2563EB">
-                <a:alpha val="0"/>
-              </a:srgbClr>
-            </a:solidFill>
-            <a:prstDash val="solid"/>
-          </a:ln>
-        </p:spPr>
-      </p:sp>
-      <p:sp>
-        <p:nvSpPr>
-          <p:cNvPr id="4" name="Shape 2"/>
-          <p:cNvSpPr/>
-          <p:nvPr/>
-        </p:nvSpPr>
-        <p:spPr>
-          <a:xfrm>
-            <a:off x="822960" y="6382512"/>
-            <a:ext cx="2011680" cy="45720"/>
-          </a:xfrm>
-          <a:prstGeom prst="rect">
-            <a:avLst/>
-          </a:prstGeom>
-          <a:solidFill>
-            <a:srgbClr val="DBEAFE"/>
-          </a:solidFill>
-          <a:ln w="12700">
-            <a:solidFill>
-              <a:srgbClr val="DBEAFE">
-                <a:alpha val="0"/>
-              </a:srgbClr>
-            </a:solidFill>
-            <a:prstDash val="solid"/>
-          </a:ln>
-        </p:spPr>
-      </p:sp>
-      <p:sp>
-        <p:nvSpPr>
-          <p:cNvPr id="5" name="Shape 3"/>
-          <p:cNvSpPr/>
-          <p:nvPr/>
-        </p:nvSpPr>
-        <p:spPr>
-          <a:xfrm>
-            <a:off x="6080760" y="1389888"/>
-            <a:ext cx="22860" cy="4846320"/>
-          </a:xfrm>
-          <a:prstGeom prst="rect">
-            <a:avLst/>
-          </a:prstGeom>
-          <a:solidFill>
-            <a:srgbClr val="E2E8F0">
-              <a:alpha val="90000"/>
-            </a:srgbClr>
-          </a:solidFill>
-          <a:ln w="12700">
-            <a:solidFill>
-              <a:srgbClr val="E2E8F0">
-                <a:alpha val="0"/>
-              </a:srgbClr>
-            </a:solidFill>
-            <a:prstDash val="solid"/>
-          </a:ln>
-        </p:spPr>
-      </p:sp>
-      <p:sp>
-        <p:nvSpPr>
-          <p:cNvPr id="6" name="Shape 4"/>
-          <p:cNvSpPr/>
-          <p:nvPr/>
-        </p:nvSpPr>
-        <p:spPr>
-          <a:xfrm>
-            <a:off x="822960" y="1389888"/>
-            <a:ext cx="73152" cy="566928"/>
-          </a:xfrm>
-          <a:prstGeom prst="rect">
-            <a:avLst/>
-          </a:prstGeom>
-          <a:solidFill>
-            <a:srgbClr val="2563EB"/>
-          </a:solidFill>
-          <a:ln w="12700">
-            <a:solidFill>
-              <a:srgbClr val="2563EB">
-                <a:alpha val="0"/>
-              </a:srgbClr>
-            </a:solidFill>
-            <a:prstDash val="solid"/>
-          </a:ln>
-        </p:spPr>
-      </p:sp>
-      <p:sp>
-        <p:nvSpPr>
-          <p:cNvPr id="7" name="Shape 5"/>
-          <p:cNvSpPr/>
-          <p:nvPr/>
-        </p:nvSpPr>
-        <p:spPr>
-          <a:xfrm>
-            <a:off x="822960" y="2103120"/>
-            <a:ext cx="73152" cy="566928"/>
-          </a:xfrm>
-          <a:prstGeom prst="rect">
-            <a:avLst/>
-          </a:prstGeom>
-          <a:solidFill>
-            <a:srgbClr val="DBEAFE"/>
-          </a:solidFill>
-          <a:ln w="12700">
-            <a:solidFill>
-              <a:srgbClr val="DBEAFE">
-                <a:alpha val="0"/>
-              </a:srgbClr>
-            </a:solidFill>
-            <a:prstDash val="solid"/>
-          </a:ln>
-        </p:spPr>
-      </p:sp>
-      <p:sp>
-        <p:nvSpPr>
-          <p:cNvPr id="8" name="Shape 6"/>
-          <p:cNvSpPr/>
-          <p:nvPr/>
-        </p:nvSpPr>
-        <p:spPr>
-          <a:xfrm>
-            <a:off x="822960" y="2816352"/>
-            <a:ext cx="73152" cy="566928"/>
-          </a:xfrm>
-          <a:prstGeom prst="rect">
-            <a:avLst/>
-          </a:prstGeom>
-          <a:solidFill>
-            <a:srgbClr val="2563EB"/>
-          </a:solidFill>
-          <a:ln w="12700">
-            <a:solidFill>
-              <a:srgbClr val="2563EB">
-                <a:alpha val="0"/>
-              </a:srgbClr>
-            </a:solidFill>
-            <a:prstDash val="solid"/>
-          </a:ln>
-        </p:spPr>
-      </p:sp>
-      <p:sp>
-        <p:nvSpPr>
-          <p:cNvPr id="9" name="Shape 7"/>
-          <p:cNvSpPr/>
-          <p:nvPr/>
-        </p:nvSpPr>
-        <p:spPr>
-          <a:xfrm>
-            <a:off x="822960" y="3529584"/>
-            <a:ext cx="73152" cy="566928"/>
-          </a:xfrm>
-          <a:prstGeom prst="rect">
-            <a:avLst/>
-          </a:prstGeom>
-          <a:solidFill>
-            <a:srgbClr val="DBEAFE"/>
-          </a:solidFill>
-          <a:ln w="12700">
-            <a:solidFill>
-              <a:srgbClr val="DBEAFE">
-                <a:alpha val="0"/>
-              </a:srgbClr>
-            </a:solidFill>
-            <a:prstDash val="solid"/>
-          </a:ln>
-        </p:spPr>
-      </p:sp>
-      <p:sp>
-        <p:nvSpPr>
-          <p:cNvPr id="10" name="Shape 8"/>
-          <p:cNvSpPr/>
-          <p:nvPr/>
-        </p:nvSpPr>
-        <p:spPr>
-          <a:xfrm>
-            <a:off x="822960" y="4242816"/>
-            <a:ext cx="73152" cy="566928"/>
-          </a:xfrm>
-          <a:prstGeom prst="rect">
-            <a:avLst/>
-          </a:prstGeom>
-          <a:solidFill>
-            <a:srgbClr val="2563EB"/>
-          </a:solidFill>
-          <a:ln w="12700">
-            <a:solidFill>
-              <a:srgbClr val="2563EB">
-                <a:alpha val="0"/>
-              </a:srgbClr>
-            </a:solidFill>
-            <a:prstDash val="solid"/>
-          </a:ln>
-        </p:spPr>
-      </p:sp>
-      <p:sp>
-        <p:nvSpPr>
-          <p:cNvPr id="11" name="Shape 9"/>
-          <p:cNvSpPr/>
-          <p:nvPr/>
-        </p:nvSpPr>
-        <p:spPr>
-          <a:xfrm>
-            <a:off x="822960" y="4956048"/>
-            <a:ext cx="73152" cy="566928"/>
-          </a:xfrm>
-          <a:prstGeom prst="rect">
-            <a:avLst/>
-          </a:prstGeom>
-          <a:solidFill>
-            <a:srgbClr val="DBEAFE"/>
-          </a:solidFill>
-          <a:ln w="12700">
-            <a:solidFill>
-              <a:srgbClr val="DBEAFE">
-                <a:alpha val="0"/>
-              </a:srgbClr>
-            </a:solidFill>
-            <a:prstDash val="solid"/>
-          </a:ln>
-        </p:spPr>
-      </p:sp>
-      <p:sp>
-        <p:nvSpPr>
-          <p:cNvPr id="12" name="Shape 10"/>
-          <p:cNvSpPr/>
-          <p:nvPr/>
-        </p:nvSpPr>
-        <p:spPr>
-          <a:xfrm>
-            <a:off x="822960" y="5669280"/>
-            <a:ext cx="73152" cy="566928"/>
-          </a:xfrm>
-          <a:prstGeom prst="rect">
-            <a:avLst/>
-          </a:prstGeom>
-          <a:solidFill>
-            <a:srgbClr val="2563EB"/>
-          </a:solidFill>
-          <a:ln w="12700">
-            <a:solidFill>
-              <a:srgbClr val="2563EB">
-                <a:alpha val="0"/>
-              </a:srgbClr>
-            </a:solidFill>
-            <a:prstDash val="solid"/>
-          </a:ln>
-        </p:spPr>
-      </p:sp>
-      <p:sp>
-        <p:nvSpPr>
-          <p:cNvPr id="13" name="Shape 11"/>
-          <p:cNvSpPr/>
-          <p:nvPr/>
-        </p:nvSpPr>
-        <p:spPr>
-          <a:xfrm>
-            <a:off x="6272784" y="1389888"/>
-            <a:ext cx="73152" cy="566928"/>
-          </a:xfrm>
-          <a:prstGeom prst="rect">
-            <a:avLst/>
-          </a:prstGeom>
-          <a:solidFill>
-            <a:srgbClr val="DBEAFE"/>
-          </a:solidFill>
-          <a:ln w="12700">
-            <a:solidFill>
-              <a:srgbClr val="DBEAFE">
-                <a:alpha val="0"/>
-              </a:srgbClr>
-            </a:solidFill>
-            <a:prstDash val="solid"/>
-          </a:ln>
-        </p:spPr>
-      </p:sp>
-      <p:sp>
-        <p:nvSpPr>
-          <p:cNvPr id="14" name="Shape 12"/>
-          <p:cNvSpPr/>
-          <p:nvPr/>
-        </p:nvSpPr>
-        <p:spPr>
-          <a:xfrm>
-            <a:off x="6272784" y="2103120"/>
-            <a:ext cx="73152" cy="566928"/>
-          </a:xfrm>
-          <a:prstGeom prst="rect">
-            <a:avLst/>
-          </a:prstGeom>
-          <a:solidFill>
-            <a:srgbClr val="2563EB"/>
-          </a:solidFill>
-          <a:ln w="12700">
-            <a:solidFill>
-              <a:srgbClr val="2563EB">
-                <a:alpha val="0"/>
-              </a:srgbClr>
-            </a:solidFill>
-            <a:prstDash val="solid"/>
-          </a:ln>
-        </p:spPr>
-      </p:sp>
-      <p:sp>
-        <p:nvSpPr>
-          <p:cNvPr id="15" name="Shape 13"/>
-          <p:cNvSpPr/>
-          <p:nvPr/>
-        </p:nvSpPr>
-        <p:spPr>
-          <a:xfrm>
-            <a:off x="6272784" y="2816352"/>
-            <a:ext cx="73152" cy="566928"/>
-          </a:xfrm>
-          <a:prstGeom prst="rect">
-            <a:avLst/>
-          </a:prstGeom>
-          <a:solidFill>
-            <a:srgbClr val="DBEAFE"/>
-          </a:solidFill>
-          <a:ln w="12700">
-            <a:solidFill>
-              <a:srgbClr val="DBEAFE">
-                <a:alpha val="0"/>
-              </a:srgbClr>
-            </a:solidFill>
-            <a:prstDash val="solid"/>
-          </a:ln>
-        </p:spPr>
-      </p:sp>
-      <p:sp>
-        <p:nvSpPr>
-          <p:cNvPr id="16" name="Shape 14"/>
-          <p:cNvSpPr/>
-          <p:nvPr/>
-        </p:nvSpPr>
-        <p:spPr>
-          <a:xfrm>
-            <a:off x="6272784" y="3529584"/>
-            <a:ext cx="73152" cy="566928"/>
-          </a:xfrm>
-          <a:prstGeom prst="rect">
-            <a:avLst/>
-          </a:prstGeom>
-          <a:solidFill>
-            <a:srgbClr val="2563EB"/>
-          </a:solidFill>
-          <a:ln w="12700">
-            <a:solidFill>
-              <a:srgbClr val="2563EB">
-                <a:alpha val="0"/>
-              </a:srgbClr>
-            </a:solidFill>
-            <a:prstDash val="solid"/>
-          </a:ln>
-        </p:spPr>
-      </p:sp>
-      <p:sp>
-        <p:nvSpPr>
-          <p:cNvPr id="17" name="Shape 15"/>
-          <p:cNvSpPr/>
-          <p:nvPr/>
-        </p:nvSpPr>
-        <p:spPr>
-          <a:xfrm>
-            <a:off x="6272784" y="4242816"/>
-            <a:ext cx="73152" cy="566928"/>
-          </a:xfrm>
-          <a:prstGeom prst="rect">
-            <a:avLst/>
-          </a:prstGeom>
-          <a:solidFill>
-            <a:srgbClr val="DBEAFE"/>
-          </a:solidFill>
-          <a:ln w="12700">
-            <a:solidFill>
-              <a:srgbClr val="DBEAFE">
-                <a:alpha val="0"/>
-              </a:srgbClr>
-            </a:solidFill>
-            <a:prstDash val="solid"/>
-          </a:ln>
-        </p:spPr>
-      </p:sp>
-      <p:sp>
-        <p:nvSpPr>
-          <p:cNvPr id="18" name="Shape 16"/>
-          <p:cNvSpPr/>
-          <p:nvPr/>
-        </p:nvSpPr>
-        <p:spPr>
-          <a:xfrm>
-            <a:off x="6272784" y="4956048"/>
-            <a:ext cx="73152" cy="566928"/>
-          </a:xfrm>
-          <a:prstGeom prst="rect">
-            <a:avLst/>
-          </a:prstGeom>
-          <a:solidFill>
-            <a:srgbClr val="2563EB"/>
-          </a:solidFill>
-          <a:ln w="12700">
-            <a:solidFill>
-              <a:srgbClr val="2563EB">
-                <a:alpha val="0"/>
-              </a:srgbClr>
-            </a:solidFill>
-            <a:prstDash val="solid"/>
-          </a:ln>
-        </p:spPr>
-      </p:sp>
-      <p:sp>
-        <p:nvSpPr>
-          <p:cNvPr id="19" name="Shape 17"/>
-          <p:cNvSpPr/>
-          <p:nvPr/>
-        </p:nvSpPr>
-        <p:spPr>
-          <a:xfrm>
-            <a:off x="6272784" y="5669280"/>
-            <a:ext cx="73152" cy="566928"/>
-          </a:xfrm>
-          <a:prstGeom prst="rect">
-            <a:avLst/>
-          </a:prstGeom>
-          <a:solidFill>
-            <a:srgbClr val="DBEAFE"/>
-          </a:solidFill>
-          <a:ln w="12700">
-            <a:solidFill>
-              <a:srgbClr val="DBEAFE">
-                <a:alpha val="0"/>
-              </a:srgbClr>
-            </a:solidFill>
-            <a:prstDash val="solid"/>
-          </a:ln>
-        </p:spPr>
-      </p:sp>
-      <p:sp>
-        <p:nvSpPr>
-          <p:cNvPr id="20" name="Text 18"/>
-          <p:cNvSpPr txBox="1"/>
-          <p:nvPr/>
-        </p:nvSpPr>
-        <p:spPr>
-          <a:xfrm>
-            <a:off x="731520" y="384048"/>
-            <a:ext cx="10698480" cy="822960"/>
-          </a:xfrm>
-          <a:prstGeom prst="rect">
-            <a:avLst/>
-          </a:prstGeom>
-          <a:noFill/>
-          <a:ln/>
-        </p:spPr>
-        <p:txBody>
-          <a:bodyPr wrap="square" lIns="0" tIns="0" rIns="0" bIns="0" rtlCol="0" anchor="ctr"/>
-          <a:lstStyle/>
-          <a:p>
-            <a:pPr algn="ctr" indent="0" marL="0">
-              <a:lnSpc>
-                <a:spcPct val="120000"/>
-              </a:lnSpc>
-              <a:buNone/>
-            </a:pPr>
-            <a:r>
-              <a:rPr lang="en-US" sz="3800" b="1" dirty="0">
-                <a:solidFill>
-                  <a:srgbClr val="111827"/>
-                </a:solidFill>
-                <a:latin typeface="Pretendard" pitchFamily="34" charset="0"/>
-                <a:ea typeface="Pretendard" pitchFamily="34" charset="-122"/>
-                <a:cs typeface="Pretendard" pitchFamily="34" charset="-120"/>
-              </a:rPr>
-              <a:t>Agenda</a:t>
-            </a:r>
-            <a:endParaRPr lang="en-US" sz="3800" dirty="0"/>
-          </a:p>
-        </p:txBody>
-      </p:sp>
-      <p:sp>
-        <p:nvSpPr>
-          <p:cNvPr id="21" name="Text 19"/>
-          <p:cNvSpPr txBox="1"/>
-          <p:nvPr/>
-        </p:nvSpPr>
-        <p:spPr>
-          <a:xfrm>
-            <a:off x="1042416" y="1481328"/>
-            <a:ext cx="4645152" cy="384048"/>
-          </a:xfrm>
-          <a:prstGeom prst="rect">
-            <a:avLst/>
-          </a:prstGeom>
-          <a:noFill/>
-          <a:ln/>
-        </p:spPr>
-        <p:txBody>
-          <a:bodyPr wrap="square" lIns="0" tIns="25400" rIns="25400" bIns="0" rtlCol="0" anchor="ctr"/>
-          <a:lstStyle/>
-          <a:p>
-            <a:pPr algn="ctr" indent="0" marL="0">
-              <a:lnSpc>
-                <a:spcPct val="120000"/>
-              </a:lnSpc>
-              <a:buNone/>
-            </a:pPr>
-            <a:r>
-              <a:rPr lang="en-US" sz="1800" dirty="0">
-                <a:solidFill>
-                  <a:srgbClr val="111827"/>
-                </a:solidFill>
-                <a:latin typeface="Pretendard" pitchFamily="34" charset="0"/>
-                <a:ea typeface="Pretendard" pitchFamily="34" charset="-122"/>
-                <a:cs typeface="Pretendard" pitchFamily="34" charset="-120"/>
-              </a:rPr>
-              <a:t>01  Teaser Summary</a:t>
-            </a:r>
-            <a:endParaRPr lang="en-US" sz="1800" dirty="0"/>
-          </a:p>
-        </p:txBody>
-      </p:sp>
-      <p:sp>
-        <p:nvSpPr>
-          <p:cNvPr id="22" name="Text 20"/>
-          <p:cNvSpPr txBox="1"/>
-          <p:nvPr/>
-        </p:nvSpPr>
-        <p:spPr>
-          <a:xfrm>
-            <a:off x="1042416" y="2194560"/>
-            <a:ext cx="4645152" cy="384048"/>
-          </a:xfrm>
-          <a:prstGeom prst="rect">
-            <a:avLst/>
-          </a:prstGeom>
-          <a:noFill/>
-          <a:ln/>
-        </p:spPr>
-        <p:txBody>
-          <a:bodyPr wrap="square" lIns="0" tIns="25400" rIns="25400" bIns="0" rtlCol="0" anchor="ctr"/>
-          <a:lstStyle/>
-          <a:p>
-            <a:pPr algn="ctr" indent="0" marL="0">
-              <a:lnSpc>
-                <a:spcPct val="120000"/>
-              </a:lnSpc>
-              <a:buNone/>
-            </a:pPr>
-            <a:r>
-              <a:rPr lang="en-US" sz="1800" dirty="0">
-                <a:solidFill>
-                  <a:srgbClr val="111827"/>
-                </a:solidFill>
-                <a:latin typeface="Pretendard" pitchFamily="34" charset="0"/>
-                <a:ea typeface="Pretendard" pitchFamily="34" charset="-122"/>
-                <a:cs typeface="Pretendard" pitchFamily="34" charset="-120"/>
-              </a:rPr>
-              <a:t>02  Composition Contract</a:t>
-            </a:r>
-            <a:endParaRPr lang="en-US" sz="1800" dirty="0"/>
-          </a:p>
-        </p:txBody>
-      </p:sp>
-      <p:sp>
-        <p:nvSpPr>
-          <p:cNvPr id="23" name="Text 21"/>
-          <p:cNvSpPr txBox="1"/>
-          <p:nvPr/>
-        </p:nvSpPr>
-        <p:spPr>
-          <a:xfrm>
-            <a:off x="1042416" y="2907792"/>
-            <a:ext cx="4645152" cy="384048"/>
-          </a:xfrm>
-          <a:prstGeom prst="rect">
-            <a:avLst/>
-          </a:prstGeom>
-          <a:noFill/>
-          <a:ln/>
-        </p:spPr>
-        <p:txBody>
-          <a:bodyPr wrap="square" lIns="0" tIns="25400" rIns="25400" bIns="0" rtlCol="0" anchor="ctr"/>
-          <a:lstStyle/>
-          <a:p>
-            <a:pPr algn="ctr" indent="0" marL="0">
-              <a:lnSpc>
-                <a:spcPct val="120000"/>
-              </a:lnSpc>
-              <a:buNone/>
-            </a:pPr>
-            <a:r>
-              <a:rPr lang="en-US" sz="1800" dirty="0">
-                <a:solidFill>
-                  <a:srgbClr val="111827"/>
-                </a:solidFill>
-                <a:latin typeface="Pretendard" pitchFamily="34" charset="0"/>
-                <a:ea typeface="Pretendard" pitchFamily="34" charset="-122"/>
-                <a:cs typeface="Pretendard" pitchFamily="34" charset="-120"/>
-              </a:rPr>
-              <a:t>03  Pruned Style Families</a:t>
-            </a:r>
-            <a:endParaRPr lang="en-US" sz="1800" dirty="0"/>
-          </a:p>
-        </p:txBody>
-      </p:sp>
-      <p:sp>
-        <p:nvSpPr>
-          <p:cNvPr id="24" name="Text 22"/>
-          <p:cNvSpPr txBox="1"/>
-          <p:nvPr/>
-        </p:nvSpPr>
-        <p:spPr>
-          <a:xfrm>
-            <a:off x="1042416" y="3621024"/>
-            <a:ext cx="4645152" cy="384048"/>
-          </a:xfrm>
-          <a:prstGeom prst="rect">
-            <a:avLst/>
-          </a:prstGeom>
-          <a:noFill/>
-          <a:ln/>
-        </p:spPr>
-        <p:txBody>
-          <a:bodyPr wrap="square" lIns="0" tIns="25400" rIns="25400" bIns="0" rtlCol="0" anchor="ctr"/>
-          <a:lstStyle/>
-          <a:p>
-            <a:pPr algn="ctr" indent="0" marL="0">
-              <a:lnSpc>
-                <a:spcPct val="120000"/>
-              </a:lnSpc>
-              <a:buNone/>
-            </a:pPr>
-            <a:r>
-              <a:rPr lang="en-US" sz="1800" dirty="0">
-                <a:solidFill>
-                  <a:srgbClr val="111827"/>
-                </a:solidFill>
-                <a:latin typeface="Pretendard" pitchFamily="34" charset="0"/>
-                <a:ea typeface="Pretendard" pitchFamily="34" charset="-122"/>
-                <a:cs typeface="Pretendard" pitchFamily="34" charset="-120"/>
-              </a:rPr>
-              <a:t>04  Semantic Blocks</a:t>
-            </a:r>
-            <a:endParaRPr lang="en-US" sz="1800" dirty="0"/>
-          </a:p>
-        </p:txBody>
-      </p:sp>
-      <p:sp>
-        <p:nvSpPr>
-          <p:cNvPr id="25" name="Text 23"/>
-          <p:cNvSpPr txBox="1"/>
-          <p:nvPr/>
-        </p:nvSpPr>
-        <p:spPr>
-          <a:xfrm>
-            <a:off x="1042416" y="4334256"/>
-            <a:ext cx="4645152" cy="384048"/>
-          </a:xfrm>
-          <a:prstGeom prst="rect">
-            <a:avLst/>
-          </a:prstGeom>
-          <a:noFill/>
-          <a:ln/>
-        </p:spPr>
-        <p:txBody>
-          <a:bodyPr wrap="square" lIns="0" tIns="25400" rIns="25400" bIns="0" rtlCol="0" anchor="ctr"/>
-          <a:lstStyle/>
-          <a:p>
-            <a:pPr algn="ctr" indent="0" marL="0">
-              <a:lnSpc>
-                <a:spcPct val="120000"/>
-              </a:lnSpc>
-              <a:buNone/>
-            </a:pPr>
-            <a:r>
-              <a:rPr lang="en-US" sz="1800" dirty="0">
-                <a:solidFill>
-                  <a:srgbClr val="111827"/>
-                </a:solidFill>
-                <a:latin typeface="Pretendard" pitchFamily="34" charset="0"/>
-                <a:ea typeface="Pretendard" pitchFamily="34" charset="-122"/>
-                <a:cs typeface="Pretendard" pitchFamily="34" charset="-120"/>
-              </a:rPr>
-              <a:t>05  Pipeline Diagram</a:t>
-            </a:r>
-            <a:endParaRPr lang="en-US" sz="1800" dirty="0"/>
-          </a:p>
-        </p:txBody>
-      </p:sp>
-      <p:sp>
-        <p:nvSpPr>
-          <p:cNvPr id="26" name="Text 24"/>
-          <p:cNvSpPr txBox="1"/>
-          <p:nvPr/>
-        </p:nvSpPr>
-        <p:spPr>
-          <a:xfrm>
-            <a:off x="1042416" y="5047488"/>
-            <a:ext cx="4645152" cy="384048"/>
-          </a:xfrm>
-          <a:prstGeom prst="rect">
-            <a:avLst/>
-          </a:prstGeom>
-          <a:noFill/>
-          <a:ln/>
-        </p:spPr>
-        <p:txBody>
-          <a:bodyPr wrap="square" lIns="0" tIns="25400" rIns="25400" bIns="0" rtlCol="0" anchor="ctr"/>
-          <a:lstStyle/>
-          <a:p>
-            <a:pPr algn="ctr" indent="0" marL="0">
-              <a:lnSpc>
-                <a:spcPct val="120000"/>
-              </a:lnSpc>
-              <a:buNone/>
-            </a:pPr>
-            <a:r>
-              <a:rPr lang="en-US" sz="1800" dirty="0">
-                <a:solidFill>
-                  <a:srgbClr val="111827"/>
-                </a:solidFill>
-                <a:latin typeface="Pretendard" pitchFamily="34" charset="0"/>
-                <a:ea typeface="Pretendard" pitchFamily="34" charset="-122"/>
-                <a:cs typeface="Pretendard" pitchFamily="34" charset="-120"/>
-              </a:rPr>
-              <a:t>06  Decoration Pattern Catalog</a:t>
-            </a:r>
-            <a:endParaRPr lang="en-US" sz="1800" dirty="0"/>
-          </a:p>
-        </p:txBody>
-      </p:sp>
-      <p:sp>
-        <p:nvSpPr>
-          <p:cNvPr id="27" name="Text 25"/>
-          <p:cNvSpPr txBox="1"/>
-          <p:nvPr/>
-        </p:nvSpPr>
-        <p:spPr>
-          <a:xfrm>
-            <a:off x="1042416" y="5760720"/>
-            <a:ext cx="4645152" cy="384048"/>
-          </a:xfrm>
-          <a:prstGeom prst="rect">
-            <a:avLst/>
-          </a:prstGeom>
-          <a:noFill/>
-          <a:ln/>
-        </p:spPr>
-        <p:txBody>
-          <a:bodyPr wrap="square" lIns="0" tIns="25400" rIns="25400" bIns="0" rtlCol="0" anchor="ctr"/>
-          <a:lstStyle/>
-          <a:p>
-            <a:pPr algn="ctr" indent="0" marL="0">
-              <a:lnSpc>
-                <a:spcPct val="120000"/>
-              </a:lnSpc>
-              <a:buNone/>
-            </a:pPr>
-            <a:r>
-              <a:rPr lang="en-US" sz="1800" dirty="0">
-                <a:solidFill>
-                  <a:srgbClr val="111827"/>
-                </a:solidFill>
-                <a:latin typeface="Pretendard" pitchFamily="34" charset="0"/>
-                <a:ea typeface="Pretendard" pitchFamily="34" charset="-122"/>
-                <a:cs typeface="Pretendard" pitchFamily="34" charset="-120"/>
-              </a:rPr>
-              <a:t>07  Table Coherence</a:t>
-            </a:r>
-            <a:endParaRPr lang="en-US" sz="1800" dirty="0"/>
-          </a:p>
-        </p:txBody>
-      </p:sp>
-      <p:sp>
-        <p:nvSpPr>
-          <p:cNvPr id="28" name="Text 26"/>
-          <p:cNvSpPr txBox="1"/>
-          <p:nvPr/>
-        </p:nvSpPr>
-        <p:spPr>
-          <a:xfrm>
-            <a:off x="6492240" y="1481328"/>
-            <a:ext cx="4645152" cy="384048"/>
-          </a:xfrm>
-          <a:prstGeom prst="rect">
-            <a:avLst/>
-          </a:prstGeom>
-          <a:noFill/>
-          <a:ln/>
-        </p:spPr>
-        <p:txBody>
-          <a:bodyPr wrap="square" lIns="0" tIns="25400" rIns="25400" bIns="0" rtlCol="0" anchor="ctr"/>
-          <a:lstStyle/>
-          <a:p>
-            <a:pPr algn="ctr" indent="0" marL="0">
-              <a:lnSpc>
-                <a:spcPct val="120000"/>
-              </a:lnSpc>
-              <a:buNone/>
-            </a:pPr>
-            <a:r>
-              <a:rPr lang="en-US" sz="1800" dirty="0">
-                <a:solidFill>
-                  <a:srgbClr val="111827"/>
-                </a:solidFill>
-                <a:latin typeface="Pretendard" pitchFamily="34" charset="0"/>
-                <a:ea typeface="Pretendard" pitchFamily="34" charset="-122"/>
-                <a:cs typeface="Pretendard" pitchFamily="34" charset="-120"/>
-              </a:rPr>
-              <a:t>08  Chart and Table Pair</a:t>
-            </a:r>
-            <a:endParaRPr lang="en-US" sz="1800" dirty="0"/>
-          </a:p>
-        </p:txBody>
-      </p:sp>
-      <p:sp>
-        <p:nvSpPr>
-          <p:cNvPr id="29" name="Text 27"/>
-          <p:cNvSpPr txBox="1"/>
-          <p:nvPr/>
-        </p:nvSpPr>
-        <p:spPr>
-          <a:xfrm>
-            <a:off x="6492240" y="2194560"/>
-            <a:ext cx="4645152" cy="384048"/>
-          </a:xfrm>
-          <a:prstGeom prst="rect">
-            <a:avLst/>
-          </a:prstGeom>
-          <a:noFill/>
-          <a:ln/>
-        </p:spPr>
-        <p:txBody>
-          <a:bodyPr wrap="square" lIns="0" tIns="25400" rIns="25400" bIns="0" rtlCol="0" anchor="ctr"/>
-          <a:lstStyle/>
-          <a:p>
-            <a:pPr algn="ctr" indent="0" marL="0">
-              <a:lnSpc>
-                <a:spcPct val="120000"/>
-              </a:lnSpc>
-              <a:buNone/>
-            </a:pPr>
-            <a:r>
-              <a:rPr lang="en-US" sz="1800" dirty="0">
-                <a:solidFill>
-                  <a:srgbClr val="111827"/>
-                </a:solidFill>
-                <a:latin typeface="Pretendard" pitchFamily="34" charset="0"/>
-                <a:ea typeface="Pretendard" pitchFamily="34" charset="-122"/>
-                <a:cs typeface="Pretendard" pitchFamily="34" charset="-120"/>
-              </a:rPr>
-              <a:t>09  Editable Proof Objects</a:t>
-            </a:r>
-            <a:endParaRPr lang="en-US" sz="1800" dirty="0"/>
-          </a:p>
-        </p:txBody>
-      </p:sp>
-      <p:sp>
-        <p:nvSpPr>
-          <p:cNvPr id="30" name="Text 28"/>
-          <p:cNvSpPr txBox="1"/>
-          <p:nvPr/>
-        </p:nvSpPr>
-        <p:spPr>
-          <a:xfrm>
-            <a:off x="6492240" y="2907792"/>
-            <a:ext cx="4645152" cy="384048"/>
-          </a:xfrm>
-          <a:prstGeom prst="rect">
-            <a:avLst/>
-          </a:prstGeom>
-          <a:noFill/>
-          <a:ln/>
-        </p:spPr>
-        <p:txBody>
-          <a:bodyPr wrap="square" lIns="0" tIns="25400" rIns="25400" bIns="0" rtlCol="0" anchor="ctr"/>
-          <a:lstStyle/>
-          <a:p>
-            <a:pPr algn="ctr" indent="0" marL="0">
-              <a:lnSpc>
-                <a:spcPct val="120000"/>
-              </a:lnSpc>
-              <a:buNone/>
-            </a:pPr>
-            <a:r>
-              <a:rPr lang="en-US" sz="1800" dirty="0">
-                <a:solidFill>
-                  <a:srgbClr val="111827"/>
-                </a:solidFill>
-                <a:latin typeface="Pretendard" pitchFamily="34" charset="0"/>
-                <a:ea typeface="Pretendard" pitchFamily="34" charset="-122"/>
-                <a:cs typeface="Pretendard" pitchFamily="34" charset="-120"/>
-              </a:rPr>
-              <a:t>10  Object Shape Grammar</a:t>
-            </a:r>
-            <a:endParaRPr lang="en-US" sz="1800" dirty="0"/>
-          </a:p>
-        </p:txBody>
-      </p:sp>
-      <p:sp>
-        <p:nvSpPr>
-          <p:cNvPr id="31" name="Text 29"/>
-          <p:cNvSpPr txBox="1"/>
-          <p:nvPr/>
-        </p:nvSpPr>
-        <p:spPr>
-          <a:xfrm>
-            <a:off x="6492240" y="3621024"/>
-            <a:ext cx="4645152" cy="384048"/>
-          </a:xfrm>
-          <a:prstGeom prst="rect">
-            <a:avLst/>
-          </a:prstGeom>
-          <a:noFill/>
-          <a:ln/>
-        </p:spPr>
-        <p:txBody>
-          <a:bodyPr wrap="square" lIns="0" tIns="25400" rIns="25400" bIns="0" rtlCol="0" anchor="ctr"/>
-          <a:lstStyle/>
-          <a:p>
-            <a:pPr algn="ctr" indent="0" marL="0">
-              <a:lnSpc>
-                <a:spcPct val="120000"/>
-              </a:lnSpc>
-              <a:buNone/>
-            </a:pPr>
-            <a:r>
-              <a:rPr lang="en-US" sz="1800" dirty="0">
-                <a:solidFill>
-                  <a:srgbClr val="111827"/>
-                </a:solidFill>
-                <a:latin typeface="Pretendard" pitchFamily="34" charset="0"/>
-                <a:ea typeface="Pretendard" pitchFamily="34" charset="-122"/>
-                <a:cs typeface="Pretendard" pitchFamily="34" charset="-120"/>
-              </a:rPr>
-              <a:t>11  Icon and Text Aside</a:t>
-            </a:r>
-            <a:endParaRPr lang="en-US" sz="1800" dirty="0"/>
-          </a:p>
-        </p:txBody>
-      </p:sp>
-      <p:sp>
-        <p:nvSpPr>
-          <p:cNvPr id="32" name="Text 30"/>
-          <p:cNvSpPr txBox="1"/>
-          <p:nvPr/>
-        </p:nvSpPr>
-        <p:spPr>
-          <a:xfrm>
-            <a:off x="6492240" y="4334256"/>
-            <a:ext cx="4645152" cy="384048"/>
-          </a:xfrm>
-          <a:prstGeom prst="rect">
-            <a:avLst/>
-          </a:prstGeom>
-          <a:noFill/>
-          <a:ln/>
-        </p:spPr>
-        <p:txBody>
-          <a:bodyPr wrap="square" lIns="0" tIns="25400" rIns="25400" bIns="0" rtlCol="0" anchor="ctr"/>
-          <a:lstStyle/>
-          <a:p>
-            <a:pPr algn="ctr" indent="0" marL="0">
-              <a:lnSpc>
-                <a:spcPct val="120000"/>
-              </a:lnSpc>
-              <a:buNone/>
-            </a:pPr>
-            <a:r>
-              <a:rPr lang="en-US" sz="1800" dirty="0">
-                <a:solidFill>
-                  <a:srgbClr val="111827"/>
-                </a:solidFill>
-                <a:latin typeface="Pretendard" pitchFamily="34" charset="0"/>
-                <a:ea typeface="Pretendard" pitchFamily="34" charset="-122"/>
-                <a:cs typeface="Pretendard" pitchFamily="34" charset="-120"/>
-              </a:rPr>
-              <a:t>12  Overflow Guard</a:t>
-            </a:r>
-            <a:endParaRPr lang="en-US" sz="1800" dirty="0"/>
-          </a:p>
-        </p:txBody>
-      </p:sp>
-      <p:sp>
-        <p:nvSpPr>
-          <p:cNvPr id="33" name="Text 31"/>
-          <p:cNvSpPr txBox="1"/>
-          <p:nvPr/>
-        </p:nvSpPr>
-        <p:spPr>
-          <a:xfrm>
-            <a:off x="6492240" y="5047488"/>
-            <a:ext cx="4645152" cy="384048"/>
-          </a:xfrm>
-          <a:prstGeom prst="rect">
-            <a:avLst/>
-          </a:prstGeom>
-          <a:noFill/>
-          <a:ln/>
-        </p:spPr>
-        <p:txBody>
-          <a:bodyPr wrap="square" lIns="0" tIns="25400" rIns="25400" bIns="0" rtlCol="0" anchor="ctr"/>
-          <a:lstStyle/>
-          <a:p>
-            <a:pPr algn="ctr" indent="0" marL="0">
-              <a:lnSpc>
-                <a:spcPct val="120000"/>
-              </a:lnSpc>
-              <a:buNone/>
-            </a:pPr>
-            <a:r>
-              <a:rPr lang="en-US" sz="1800" dirty="0">
-                <a:solidFill>
-                  <a:srgbClr val="111827"/>
-                </a:solidFill>
-                <a:latin typeface="Pretendard" pitchFamily="34" charset="0"/>
-                <a:ea typeface="Pretendard" pitchFamily="34" charset="-122"/>
-                <a:cs typeface="Pretendard" pitchFamily="34" charset="-120"/>
-              </a:rPr>
-              <a:t>13  Image Safe Frame</a:t>
-            </a:r>
-            <a:endParaRPr lang="en-US" sz="1800" dirty="0"/>
-          </a:p>
-        </p:txBody>
-      </p:sp>
-      <p:sp>
-        <p:nvSpPr>
-          <p:cNvPr id="34" name="Text 32"/>
-          <p:cNvSpPr txBox="1"/>
-          <p:nvPr/>
-        </p:nvSpPr>
-        <p:spPr>
-          <a:xfrm>
-            <a:off x="6492240" y="5760720"/>
-            <a:ext cx="4645152" cy="384048"/>
-          </a:xfrm>
-          <a:prstGeom prst="rect">
-            <a:avLst/>
-          </a:prstGeom>
-          <a:noFill/>
-          <a:ln/>
-        </p:spPr>
-        <p:txBody>
-          <a:bodyPr wrap="square" lIns="0" tIns="25400" rIns="25400" bIns="0" rtlCol="0" anchor="ctr"/>
-          <a:lstStyle/>
-          <a:p>
-            <a:pPr algn="ctr" indent="0" marL="0">
-              <a:lnSpc>
-                <a:spcPct val="120000"/>
-              </a:lnSpc>
-              <a:buNone/>
-            </a:pPr>
-            <a:r>
-              <a:rPr lang="en-US" sz="1800" dirty="0">
-                <a:solidFill>
-                  <a:srgbClr val="111827"/>
-                </a:solidFill>
-                <a:latin typeface="Pretendard" pitchFamily="34" charset="0"/>
-                <a:ea typeface="Pretendard" pitchFamily="34" charset="-122"/>
-                <a:cs typeface="Pretendard" pitchFamily="34" charset="-120"/>
-              </a:rPr>
-              <a:t>14  Mixed Object Packing</a:t>
-            </a:r>
-            <a:endParaRPr lang="en-US" sz="1800" dirty="0"/>
-          </a:p>
-        </p:txBody>
-      </p:sp>
-    </p:spTree>
-  </p:cSld>
-  <p:clrMapOvr>
-    <a:masterClrMapping/>
-  </p:clrMapOvr>
-</p:sld>
-</file>
-
-<file path=ppt/slides/slide20.xml><?xml version="1.0" encoding="utf-8"?>
-<p:sld xmlns:a="http://schemas.openxmlformats.org/drawingml/2006/main" xmlns:r="http://schemas.openxmlformats.org/officeDocument/2006/relationships" xmlns:p="http://schemas.openxmlformats.org/presentationml/2006/main">
-  <p:cSld name="Slide 20">
+  <p:cSld name="Slide 21">
     <p:bg>
       <p:bgPr>
         <a:solidFill>
@@ -12380,9 +13862,9 @@
 </p:sld>
 </file>
 
-<file path=ppt/slides/slide21.xml><?xml version="1.0" encoding="utf-8"?>
+<file path=ppt/slides/slide22.xml><?xml version="1.0" encoding="utf-8"?>
 <p:sld xmlns:a="http://schemas.openxmlformats.org/drawingml/2006/main" xmlns:r="http://schemas.openxmlformats.org/officeDocument/2006/relationships" xmlns:p="http://schemas.openxmlformats.org/presentationml/2006/main">
-  <p:cSld name="Slide 21">
+  <p:cSld name="Slide 22">
     <p:bg>
       <p:bgPr>
         <a:solidFill>
@@ -13317,9 +14799,9 @@
 </p:sld>
 </file>
 
-<file path=ppt/slides/slide22.xml><?xml version="1.0" encoding="utf-8"?>
+<file path=ppt/slides/slide23.xml><?xml version="1.0" encoding="utf-8"?>
 <p:sld xmlns:a="http://schemas.openxmlformats.org/drawingml/2006/main" xmlns:r="http://schemas.openxmlformats.org/officeDocument/2006/relationships" xmlns:p="http://schemas.openxmlformats.org/presentationml/2006/main">
-  <p:cSld name="Slide 22">
+  <p:cSld name="Slide 23">
     <p:bg>
       <p:bgPr>
         <a:solidFill>
@@ -13680,9 +15162,9 @@
 </p:sld>
 </file>
 
-<file path=ppt/slides/slide23.xml><?xml version="1.0" encoding="utf-8"?>
+<file path=ppt/slides/slide24.xml><?xml version="1.0" encoding="utf-8"?>
 <p:sld xmlns:a="http://schemas.openxmlformats.org/drawingml/2006/main" xmlns:r="http://schemas.openxmlformats.org/officeDocument/2006/relationships" xmlns:p="http://schemas.openxmlformats.org/presentationml/2006/main">
-  <p:cSld name="Slide 23">
+  <p:cSld name="Slide 24">
     <p:bg>
       <p:bgPr>
         <a:solidFill>
@@ -14016,7 +15498,7 @@
       </p:graphicFrame>
       <p:graphicFrame>
         <p:nvGraphicFramePr>
-          <p:cNvPr id="24" name="Table 0"/>
+          <p:cNvPr id="25" name="Table 0"/>
           <p:cNvGraphicFramePr>
             <a:graphicFrameLocks noGrp="1"/>
           </p:cNvGraphicFramePr>
@@ -14593,9 +16075,9 @@
 </p:sld>
 </file>
 
-<file path=ppt/slides/slide24.xml><?xml version="1.0" encoding="utf-8"?>
+<file path=ppt/slides/slide25.xml><?xml version="1.0" encoding="utf-8"?>
 <p:sld xmlns:a="http://schemas.openxmlformats.org/drawingml/2006/main" xmlns:r="http://schemas.openxmlformats.org/officeDocument/2006/relationships" xmlns:p="http://schemas.openxmlformats.org/presentationml/2006/main">
-  <p:cSld name="Slide 24">
+  <p:cSld name="Slide 25">
     <p:bg>
       <p:bgPr>
         <a:solidFill>
@@ -15884,7 +17366,7 @@
                 <a:ea typeface="Pretendard" pitchFamily="34" charset="-122"/>
                 <a:cs typeface="Pretendard" pitchFamily="34" charset="-120"/>
               </a:rPr>
-              <a:t>  8 pruned decoration grammars, not palette-only swaps.</a:t>
+              <a:t>  5 pruned decoration grammars, not palette-only swaps.</a:t>
             </a:r>
             <a:endParaRPr lang="en-US" sz="2200" dirty="0"/>
           </a:p>
@@ -17594,7 +19076,7 @@
       </p:sp>
       <p:pic>
         <p:nvPicPr>
-          <p:cNvPr id="18" name="Image 4" descr="chart icon from tabler-icons (MIT)">    </p:cNvPr>
+          <p:cNvPr id="18" name="Image 4" descr="article icon from tabler-icons (MIT)">    </p:cNvPr>
           <p:cNvPicPr>
             <a:picLocks noChangeAspect="1"/>
           </p:cNvPicPr>
@@ -17631,122 +19113,6 @@
         <p:spPr>
           <a:xfrm>
             <a:off x="1699321" y="3313176"/>
-            <a:ext cx="9255191" cy="780288"/>
-          </a:xfrm>
-          <a:prstGeom prst="rect">
-            <a:avLst/>
-          </a:prstGeom>
-          <a:noFill/>
-          <a:ln/>
-        </p:spPr>
-        <p:txBody>
-          <a:bodyPr wrap="square" lIns="0" tIns="25400" rIns="25400" bIns="0" rtlCol="0" anchor="ctr"/>
-          <a:lstStyle/>
-          <a:p>
-            <a:pPr algn="l" indent="0" marL="0">
-              <a:lnSpc>
-                <a:spcPct val="120000"/>
-              </a:lnSpc>
-              <a:buNone/>
-            </a:pPr>
-            <a:r>
-              <a:rPr lang="en-US" sz="2200" b="1" dirty="0">
-                <a:solidFill>
-                  <a:srgbClr val="2563EB"/>
-                </a:solidFill>
-                <a:latin typeface="Pretendard" pitchFamily="34" charset="0"/>
-                <a:ea typeface="Pretendard" pitchFamily="34" charset="-122"/>
-                <a:cs typeface="Pretendard" pitchFamily="34" charset="-120"/>
-              </a:rPr>
-              <a:t>Editorial / magazine</a:t>
-            </a:r>
-            <a:pPr algn="l" indent="0" marL="0">
-              <a:lnSpc>
-                <a:spcPct val="120000"/>
-              </a:lnSpc>
-              <a:buNone/>
-            </a:pPr>
-            <a:r>
-              <a:rPr lang="en-US" sz="2200" dirty="0">
-                <a:solidFill>
-                  <a:srgbClr val="111827"/>
-                </a:solidFill>
-                <a:latin typeface="Pretendard" pitchFamily="34" charset="0"/>
-                <a:ea typeface="Pretendard" pitchFamily="34" charset="-122"/>
-                <a:cs typeface="Pretendard" pitchFamily="34" charset="-120"/>
-              </a:rPr>
-              <a:t>  asymmetric rhythm and publication-like accents.</a:t>
-            </a:r>
-            <a:endParaRPr lang="en-US" sz="2200" dirty="0"/>
-          </a:p>
-        </p:txBody>
-      </p:sp>
-      <p:sp>
-        <p:nvSpPr>
-          <p:cNvPr id="20" name="Shape 13"/>
-          <p:cNvSpPr/>
-          <p:nvPr/>
-        </p:nvSpPr>
-        <p:spPr>
-          <a:xfrm>
-            <a:off x="1097280" y="4783044"/>
-            <a:ext cx="474025" cy="474025"/>
-          </a:xfrm>
-          <a:prstGeom prst="roundRect">
-            <a:avLst>
-              <a:gd name="adj" fmla="val 7716"/>
-            </a:avLst>
-          </a:prstGeom>
-          <a:solidFill>
-            <a:srgbClr val="F8FAFC"/>
-          </a:solidFill>
-          <a:ln w="12700">
-            <a:solidFill>
-              <a:srgbClr val="E2E8F0"/>
-            </a:solidFill>
-            <a:prstDash val="solid"/>
-          </a:ln>
-        </p:spPr>
-      </p:sp>
-      <p:pic>
-        <p:nvPicPr>
-          <p:cNvPr id="21" name="Image 5" descr="article icon from tabler-icons (MIT)">    </p:cNvPr>
-          <p:cNvPicPr>
-            <a:picLocks noChangeAspect="1"/>
-          </p:cNvPicPr>
-          <p:nvPr/>
-        </p:nvPicPr>
-        <p:blipFill>
-          <a:blip r:embed="rId11">
-            <a:extLst>
-              <a:ext uri="{96DAC541-7B7A-43D3-8B79-37D633B846F1}">
-                <asvg:svgBlip xmlns:asvg="http://schemas.microsoft.com/office/drawing/2016/SVG/main" r:embed="rId12"/>
-              </a:ext>
-            </a:extLst>
-          </a:blip>
-          <a:stretch>
-            <a:fillRect/>
-          </a:stretch>
-        </p:blipFill>
-        <p:spPr>
-          <a:xfrm>
-            <a:off x="1170432" y="4856196"/>
-            <a:ext cx="327721" cy="327721"/>
-          </a:xfrm>
-          <a:prstGeom prst="rect">
-            <a:avLst/>
-          </a:prstGeom>
-        </p:spPr>
-      </p:pic>
-      <p:sp>
-        <p:nvSpPr>
-          <p:cNvPr id="22" name="Text 14"/>
-          <p:cNvSpPr txBox="1"/>
-          <p:nvPr/>
-        </p:nvSpPr>
-        <p:spPr>
-          <a:xfrm>
-            <a:off x="1699321" y="4629912"/>
             <a:ext cx="9255191" cy="780288"/>
           </a:xfrm>
           <a:prstGeom prst="rect">
@@ -17797,6 +19163,122 @@
           </a:p>
         </p:txBody>
       </p:sp>
+      <p:sp>
+        <p:nvSpPr>
+          <p:cNvPr id="20" name="Shape 13"/>
+          <p:cNvSpPr/>
+          <p:nvPr/>
+        </p:nvSpPr>
+        <p:spPr>
+          <a:xfrm>
+            <a:off x="1097280" y="4783044"/>
+            <a:ext cx="474025" cy="474025"/>
+          </a:xfrm>
+          <a:prstGeom prst="roundRect">
+            <a:avLst>
+              <a:gd name="adj" fmla="val 7716"/>
+            </a:avLst>
+          </a:prstGeom>
+          <a:solidFill>
+            <a:srgbClr val="F8FAFC"/>
+          </a:solidFill>
+          <a:ln w="12700">
+            <a:solidFill>
+              <a:srgbClr val="E2E8F0"/>
+            </a:solidFill>
+            <a:prstDash val="solid"/>
+          </a:ln>
+        </p:spPr>
+      </p:sp>
+      <p:pic>
+        <p:nvPicPr>
+          <p:cNvPr id="21" name="Image 5" descr="chart icon from tabler-icons (MIT)">    </p:cNvPr>
+          <p:cNvPicPr>
+            <a:picLocks noChangeAspect="1"/>
+          </p:cNvPicPr>
+          <p:nvPr/>
+        </p:nvPicPr>
+        <p:blipFill>
+          <a:blip r:embed="rId11">
+            <a:extLst>
+              <a:ext uri="{96DAC541-7B7A-43D3-8B79-37D633B846F1}">
+                <asvg:svgBlip xmlns:asvg="http://schemas.microsoft.com/office/drawing/2016/SVG/main" r:embed="rId12"/>
+              </a:ext>
+            </a:extLst>
+          </a:blip>
+          <a:stretch>
+            <a:fillRect/>
+          </a:stretch>
+        </p:blipFill>
+        <p:spPr>
+          <a:xfrm>
+            <a:off x="1170432" y="4856196"/>
+            <a:ext cx="327721" cy="327721"/>
+          </a:xfrm>
+          <a:prstGeom prst="rect">
+            <a:avLst/>
+          </a:prstGeom>
+        </p:spPr>
+      </p:pic>
+      <p:sp>
+        <p:nvSpPr>
+          <p:cNvPr id="22" name="Text 14"/>
+          <p:cNvSpPr txBox="1"/>
+          <p:nvPr/>
+        </p:nvSpPr>
+        <p:spPr>
+          <a:xfrm>
+            <a:off x="1699321" y="4629912"/>
+            <a:ext cx="9255191" cy="780288"/>
+          </a:xfrm>
+          <a:prstGeom prst="rect">
+            <a:avLst/>
+          </a:prstGeom>
+          <a:noFill/>
+          <a:ln/>
+        </p:spPr>
+        <p:txBody>
+          <a:bodyPr wrap="square" lIns="0" tIns="25400" rIns="25400" bIns="0" rtlCol="0" anchor="ctr"/>
+          <a:lstStyle/>
+          <a:p>
+            <a:pPr algn="l" indent="0" marL="0">
+              <a:lnSpc>
+                <a:spcPct val="120000"/>
+              </a:lnSpc>
+              <a:buNone/>
+            </a:pPr>
+            <a:r>
+              <a:rPr lang="en-US" sz="2200" b="1" dirty="0">
+                <a:solidFill>
+                  <a:srgbClr val="2563EB"/>
+                </a:solidFill>
+                <a:latin typeface="Pretendard" pitchFamily="34" charset="0"/>
+                <a:ea typeface="Pretendard" pitchFamily="34" charset="-122"/>
+                <a:cs typeface="Pretendard" pitchFamily="34" charset="-120"/>
+              </a:rPr>
+              <a:t>Glass / data</a:t>
+            </a:r>
+            <a:pPr algn="l" indent="0" marL="0">
+              <a:lnSpc>
+                <a:spcPct val="120000"/>
+              </a:lnSpc>
+              <a:buNone/>
+            </a:pPr>
+            <a:r>
+              <a:rPr lang="en-US" sz="2200" dirty="0">
+                <a:solidFill>
+                  <a:srgbClr val="111827"/>
+                </a:solidFill>
+                <a:latin typeface="Pretendard" pitchFamily="34" charset="0"/>
+                <a:ea typeface="Pretendard" pitchFamily="34" charset="-122"/>
+                <a:cs typeface="Pretendard" pitchFamily="34" charset="-120"/>
+              </a:rPr>
+              <a:t>  translucent surfaces or metric rails.</a:t>
+            </a:r>
+            <a:endParaRPr lang="en-US" sz="2200" dirty="0"/>
+          </a:p>
+        </p:txBody>
+      </p:sp>
     </p:spTree>
   </p:cSld>
   <p:clrMapOvr>
@@ -17988,7 +19470,7 @@
                 <a:ea typeface="Pretendard" pitchFamily="34" charset="-122"/>
                 <a:cs typeface="Pretendard" pitchFamily="34" charset="-120"/>
               </a:rPr>
-              <a:t>- Glass / grid / data</a:t>
+              <a:t>- Clean</a:t>
             </a:r>
             <a:pPr algn="l" indent="0" marL="0">
               <a:lnSpc>
@@ -18005,7 +19487,7 @@
                 <a:ea typeface="Pretendard" pitchFamily="34" charset="-122"/>
                 <a:cs typeface="Pretendard" pitchFamily="34" charset="-120"/>
               </a:rPr>
-              <a:t>  translucent surfaces, construction lines, or metric rails.</a:t>
+              <a:t>  restrained default structure for ordinary decks.</a:t>
             </a:r>
             <a:endParaRPr lang="en-US" sz="2200" dirty="0"/>
           </a:p>
@@ -18137,8 +19619,8 @@
         </p:nvSpPr>
         <p:spPr>
           <a:xfrm>
-            <a:off x="822960" y="1463040"/>
-            <a:ext cx="73152" cy="1920240"/>
+            <a:off x="822960" y="1554480"/>
+            <a:ext cx="4937760" cy="73152"/>
           </a:xfrm>
           <a:prstGeom prst="rect">
             <a:avLst/>
@@ -18164,35 +19646,8 @@
         </p:nvSpPr>
         <p:spPr>
           <a:xfrm>
-            <a:off x="6309360" y="1463040"/>
-            <a:ext cx="73152" cy="1920240"/>
-          </a:xfrm>
-          <a:prstGeom prst="rect">
-            <a:avLst/>
-          </a:prstGeom>
-          <a:solidFill>
-            <a:srgbClr val="DBEAFE"/>
-          </a:solidFill>
-          <a:ln w="12700">
-            <a:solidFill>
-              <a:srgbClr val="DBEAFE">
-                <a:alpha val="0"/>
-              </a:srgbClr>
-            </a:solidFill>
-            <a:prstDash val="solid"/>
-          </a:ln>
-        </p:spPr>
-      </p:sp>
-      <p:sp>
-        <p:nvSpPr>
-          <p:cNvPr id="5" name="Shape 3"/>
-          <p:cNvSpPr/>
-          <p:nvPr/>
-        </p:nvSpPr>
-        <p:spPr>
-          <a:xfrm>
-            <a:off x="822960" y="3749040"/>
-            <a:ext cx="73152" cy="1920240"/>
+            <a:off x="6400800" y="1554480"/>
+            <a:ext cx="4937760" cy="73152"/>
           </a:xfrm>
           <a:prstGeom prst="rect">
             <a:avLst/>
@@ -18212,298 +19667,7 @@
       </p:sp>
       <p:sp>
         <p:nvSpPr>
-          <p:cNvPr id="6" name="Shape 4"/>
-          <p:cNvSpPr/>
-          <p:nvPr/>
-        </p:nvSpPr>
-        <p:spPr>
-          <a:xfrm>
-            <a:off x="6309360" y="3749040"/>
-            <a:ext cx="73152" cy="1920240"/>
-          </a:xfrm>
-          <a:prstGeom prst="rect">
-            <a:avLst/>
-          </a:prstGeom>
-          <a:solidFill>
-            <a:srgbClr val="DBEAFE"/>
-          </a:solidFill>
-          <a:ln w="12700">
-            <a:solidFill>
-              <a:srgbClr val="DBEAFE">
-                <a:alpha val="0"/>
-              </a:srgbClr>
-            </a:solidFill>
-            <a:prstDash val="solid"/>
-          </a:ln>
-        </p:spPr>
-      </p:sp>
-      <p:pic>
-        <p:nvPicPr>
-          <p:cNvPr id="7" name="Image 0" descr="preencoded.png">    </p:cNvPr>
-          <p:cNvPicPr>
-            <a:picLocks noChangeAspect="1"/>
-          </p:cNvPicPr>
-          <p:nvPr/>
-        </p:nvPicPr>
-        <p:blipFill>
-          <a:blip r:embed="rId1">
-            <a:extLst>
-              <a:ext uri="{96DAC541-7B7A-43D3-8B79-37D633B846F1}">
-                <asvg:svgBlip xmlns:asvg="http://schemas.microsoft.com/office/drawing/2016/SVG/main" r:embed="rId2"/>
-              </a:ext>
-            </a:extLst>
-          </a:blip>
-          <a:stretch>
-            <a:fillRect/>
-          </a:stretch>
-        </p:blipFill>
-        <p:spPr>
-          <a:xfrm>
-            <a:off x="822960" y="1463040"/>
-            <a:ext cx="5029200" cy="1920240"/>
-          </a:xfrm>
-          <a:prstGeom prst="rect">
-            <a:avLst/>
-          </a:prstGeom>
-        </p:spPr>
-      </p:pic>
-      <p:sp>
-        <p:nvSpPr>
-          <p:cNvPr id="8" name="Shape 5"/>
-          <p:cNvSpPr/>
-          <p:nvPr/>
-        </p:nvSpPr>
-        <p:spPr>
-          <a:xfrm>
-            <a:off x="822960" y="1463040"/>
-            <a:ext cx="5029200" cy="1920240"/>
-          </a:xfrm>
-          <a:prstGeom prst="rect">
-            <a:avLst/>
-          </a:prstGeom>
-          <a:solidFill>
-            <a:srgbClr val="FFFFFF">
-              <a:alpha val="0"/>
-            </a:srgbClr>
-          </a:solidFill>
-          <a:ln w="12700">
-            <a:solidFill>
-              <a:srgbClr val="E2E8F0">
-                <a:alpha val="0"/>
-              </a:srgbClr>
-            </a:solidFill>
-            <a:prstDash val="solid"/>
-          </a:ln>
-          <a:effectLst>
-            <a:outerShdw sx="100000" sy="100000" kx="0" ky="0" algn="bl" rotWithShape="0" blurRad="12700" dist="50800" dir="2700000">
-              <a:srgbClr val="000000">
-                <a:alpha val="8000"/>
-              </a:srgbClr>
-            </a:outerShdw>
-          </a:effectLst>
-        </p:spPr>
-      </p:sp>
-      <p:pic>
-        <p:nvPicPr>
-          <p:cNvPr id="9" name="Image 1" descr="preencoded.png">    </p:cNvPr>
-          <p:cNvPicPr>
-            <a:picLocks noChangeAspect="1"/>
-          </p:cNvPicPr>
-          <p:nvPr/>
-        </p:nvPicPr>
-        <p:blipFill>
-          <a:blip r:embed="rId3">
-            <a:extLst>
-              <a:ext uri="{96DAC541-7B7A-43D3-8B79-37D633B846F1}">
-                <asvg:svgBlip xmlns:asvg="http://schemas.microsoft.com/office/drawing/2016/SVG/main" r:embed="rId4"/>
-              </a:ext>
-            </a:extLst>
-          </a:blip>
-          <a:stretch>
-            <a:fillRect/>
-          </a:stretch>
-        </p:blipFill>
-        <p:spPr>
-          <a:xfrm>
-            <a:off x="6309360" y="1463040"/>
-            <a:ext cx="5029200" cy="1920240"/>
-          </a:xfrm>
-          <a:prstGeom prst="rect">
-            <a:avLst/>
-          </a:prstGeom>
-        </p:spPr>
-      </p:pic>
-      <p:sp>
-        <p:nvSpPr>
-          <p:cNvPr id="10" name="Shape 6"/>
-          <p:cNvSpPr/>
-          <p:nvPr/>
-        </p:nvSpPr>
-        <p:spPr>
-          <a:xfrm>
-            <a:off x="6309360" y="1463040"/>
-            <a:ext cx="5029200" cy="1920240"/>
-          </a:xfrm>
-          <a:prstGeom prst="rect">
-            <a:avLst/>
-          </a:prstGeom>
-          <a:solidFill>
-            <a:srgbClr val="FFFFFF">
-              <a:alpha val="0"/>
-            </a:srgbClr>
-          </a:solidFill>
-          <a:ln w="12700">
-            <a:solidFill>
-              <a:srgbClr val="E2E8F0">
-                <a:alpha val="0"/>
-              </a:srgbClr>
-            </a:solidFill>
-            <a:prstDash val="solid"/>
-          </a:ln>
-          <a:effectLst>
-            <a:outerShdw sx="100000" sy="100000" kx="0" ky="0" algn="bl" rotWithShape="0" blurRad="12700" dist="50800" dir="2700000">
-              <a:srgbClr val="000000">
-                <a:alpha val="8000"/>
-              </a:srgbClr>
-            </a:outerShdw>
-          </a:effectLst>
-        </p:spPr>
-      </p:sp>
-      <p:pic>
-        <p:nvPicPr>
-          <p:cNvPr id="11" name="Image 2" descr="preencoded.png">    </p:cNvPr>
-          <p:cNvPicPr>
-            <a:picLocks noChangeAspect="1"/>
-          </p:cNvPicPr>
-          <p:nvPr/>
-        </p:nvPicPr>
-        <p:blipFill>
-          <a:blip r:embed="rId5">
-            <a:extLst>
-              <a:ext uri="{96DAC541-7B7A-43D3-8B79-37D633B846F1}">
-                <asvg:svgBlip xmlns:asvg="http://schemas.microsoft.com/office/drawing/2016/SVG/main" r:embed="rId6"/>
-              </a:ext>
-            </a:extLst>
-          </a:blip>
-          <a:stretch>
-            <a:fillRect/>
-          </a:stretch>
-        </p:blipFill>
-        <p:spPr>
-          <a:xfrm>
-            <a:off x="822960" y="3749040"/>
-            <a:ext cx="5029200" cy="1920240"/>
-          </a:xfrm>
-          <a:prstGeom prst="rect">
-            <a:avLst/>
-          </a:prstGeom>
-        </p:spPr>
-      </p:pic>
-      <p:sp>
-        <p:nvSpPr>
-          <p:cNvPr id="12" name="Shape 7"/>
-          <p:cNvSpPr/>
-          <p:nvPr/>
-        </p:nvSpPr>
-        <p:spPr>
-          <a:xfrm>
-            <a:off x="822960" y="3749040"/>
-            <a:ext cx="5029200" cy="1920240"/>
-          </a:xfrm>
-          <a:prstGeom prst="rect">
-            <a:avLst/>
-          </a:prstGeom>
-          <a:solidFill>
-            <a:srgbClr val="FFFFFF">
-              <a:alpha val="0"/>
-            </a:srgbClr>
-          </a:solidFill>
-          <a:ln w="12700">
-            <a:solidFill>
-              <a:srgbClr val="E2E8F0">
-                <a:alpha val="0"/>
-              </a:srgbClr>
-            </a:solidFill>
-            <a:prstDash val="solid"/>
-          </a:ln>
-          <a:effectLst>
-            <a:outerShdw sx="100000" sy="100000" kx="0" ky="0" algn="bl" rotWithShape="0" blurRad="12700" dist="50800" dir="2700000">
-              <a:srgbClr val="000000">
-                <a:alpha val="8000"/>
-              </a:srgbClr>
-            </a:outerShdw>
-          </a:effectLst>
-        </p:spPr>
-      </p:sp>
-      <p:pic>
-        <p:nvPicPr>
-          <p:cNvPr id="13" name="Image 3" descr="preencoded.png">    </p:cNvPr>
-          <p:cNvPicPr>
-            <a:picLocks noChangeAspect="1"/>
-          </p:cNvPicPr>
-          <p:nvPr/>
-        </p:nvPicPr>
-        <p:blipFill>
-          <a:blip r:embed="rId7">
-            <a:extLst>
-              <a:ext uri="{96DAC541-7B7A-43D3-8B79-37D633B846F1}">
-                <asvg:svgBlip xmlns:asvg="http://schemas.microsoft.com/office/drawing/2016/SVG/main" r:embed="rId8"/>
-              </a:ext>
-            </a:extLst>
-          </a:blip>
-          <a:stretch>
-            <a:fillRect/>
-          </a:stretch>
-        </p:blipFill>
-        <p:spPr>
-          <a:xfrm>
-            <a:off x="6309360" y="3749040"/>
-            <a:ext cx="5029200" cy="1920240"/>
-          </a:xfrm>
-          <a:prstGeom prst="rect">
-            <a:avLst/>
-          </a:prstGeom>
-        </p:spPr>
-      </p:pic>
-      <p:sp>
-        <p:nvSpPr>
-          <p:cNvPr id="14" name="Shape 8"/>
-          <p:cNvSpPr/>
-          <p:nvPr/>
-        </p:nvSpPr>
-        <p:spPr>
-          <a:xfrm>
-            <a:off x="6309360" y="3749040"/>
-            <a:ext cx="5029200" cy="1920240"/>
-          </a:xfrm>
-          <a:prstGeom prst="rect">
-            <a:avLst/>
-          </a:prstGeom>
-          <a:solidFill>
-            <a:srgbClr val="FFFFFF">
-              <a:alpha val="0"/>
-            </a:srgbClr>
-          </a:solidFill>
-          <a:ln w="12700">
-            <a:solidFill>
-              <a:srgbClr val="E2E8F0">
-                <a:alpha val="0"/>
-              </a:srgbClr>
-            </a:solidFill>
-            <a:prstDash val="solid"/>
-          </a:ln>
-          <a:effectLst>
-            <a:outerShdw sx="100000" sy="100000" kx="0" ky="0" algn="bl" rotWithShape="0" blurRad="12700" dist="50800" dir="2700000">
-              <a:srgbClr val="000000">
-                <a:alpha val="8000"/>
-              </a:srgbClr>
-            </a:outerShdw>
-          </a:effectLst>
-        </p:spPr>
-      </p:sp>
-      <p:sp>
-        <p:nvSpPr>
-          <p:cNvPr id="15" name="Text 9"/>
+          <p:cNvPr id="5" name="Text 3"/>
           <p:cNvSpPr txBox="1"/>
           <p:nvPr/>
         </p:nvSpPr>
@@ -18545,71 +19709,14 @@
       </p:sp>
       <p:sp>
         <p:nvSpPr>
-          <p:cNvPr id="16" name="Shape 10"/>
-          <p:cNvSpPr/>
-          <p:nvPr/>
-        </p:nvSpPr>
-        <p:spPr>
-          <a:xfrm>
-            <a:off x="976122" y="2130552"/>
-            <a:ext cx="585216" cy="585216"/>
-          </a:xfrm>
-          <a:prstGeom prst="roundRect">
-            <a:avLst>
-              <a:gd name="adj" fmla="val 6250"/>
-            </a:avLst>
-          </a:prstGeom>
-          <a:solidFill>
-            <a:srgbClr val="F8FAFC"/>
-          </a:solidFill>
-          <a:ln w="12700">
-            <a:solidFill>
-              <a:srgbClr val="E2E8F0"/>
-            </a:solidFill>
-            <a:prstDash val="solid"/>
-          </a:ln>
-        </p:spPr>
-      </p:sp>
-      <p:pic>
-        <p:nvPicPr>
-          <p:cNvPr id="17" name="Image 4" descr="table icon from tabler-icons (MIT)">    </p:cNvPr>
-          <p:cNvPicPr>
-            <a:picLocks noChangeAspect="1"/>
-          </p:cNvPicPr>
-          <p:nvPr/>
-        </p:nvPicPr>
-        <p:blipFill>
-          <a:blip r:embed="rId9">
-            <a:extLst>
-              <a:ext uri="{96DAC541-7B7A-43D3-8B79-37D633B846F1}">
-                <asvg:svgBlip xmlns:asvg="http://schemas.microsoft.com/office/drawing/2016/SVG/main" r:embed="rId10"/>
-              </a:ext>
-            </a:extLst>
-          </a:blip>
-          <a:stretch>
-            <a:fillRect/>
-          </a:stretch>
-        </p:blipFill>
-        <p:spPr>
-          <a:xfrm>
-            <a:off x="1049274" y="2203704"/>
-            <a:ext cx="438912" cy="438912"/>
-          </a:xfrm>
-          <a:prstGeom prst="rect">
-            <a:avLst/>
-          </a:prstGeom>
-        </p:spPr>
-      </p:pic>
-      <p:sp>
-        <p:nvSpPr>
-          <p:cNvPr id="18" name="Text 11"/>
+          <p:cNvPr id="6" name="Text 4"/>
           <p:cNvSpPr txBox="1"/>
           <p:nvPr/>
         </p:nvSpPr>
         <p:spPr>
           <a:xfrm>
-            <a:off x="1689354" y="2033016"/>
-            <a:ext cx="3961638" cy="780288"/>
+            <a:off x="896112" y="1664208"/>
+            <a:ext cx="4791456" cy="4169664"/>
           </a:xfrm>
           <a:prstGeom prst="rect">
             <a:avLst/>
@@ -18618,7 +19725,7 @@
           <a:ln/>
         </p:spPr>
         <p:txBody>
-          <a:bodyPr wrap="square" lIns="0" tIns="25400" rIns="25400" bIns="0" rtlCol="0" anchor="ctr"/>
+          <a:bodyPr wrap="square" lIns="0" tIns="25400" rIns="25400" bIns="0" rtlCol="0" anchor="t"/>
           <a:lstStyle/>
           <a:p>
             <a:pPr algn="l" indent="0" marL="0">
@@ -18636,7 +19743,7 @@
                 <a:ea typeface="Pretendard" pitchFamily="34" charset="-122"/>
                 <a:cs typeface="Pretendard" pitchFamily="34" charset="-120"/>
               </a:rPr>
-              <a:t>Headings</a:t>
+              <a:t>- Headings</a:t>
             </a:r>
             <a:pPr algn="l" indent="0" marL="0">
               <a:lnSpc>
@@ -18661,71 +19768,14 @@
       </p:sp>
       <p:sp>
         <p:nvSpPr>
-          <p:cNvPr id="19" name="Shape 12"/>
-          <p:cNvSpPr/>
-          <p:nvPr/>
-        </p:nvSpPr>
-        <p:spPr>
-          <a:xfrm>
-            <a:off x="6462522" y="2130552"/>
-            <a:ext cx="585216" cy="585216"/>
-          </a:xfrm>
-          <a:prstGeom prst="roundRect">
-            <a:avLst>
-              <a:gd name="adj" fmla="val 6250"/>
-            </a:avLst>
-          </a:prstGeom>
-          <a:solidFill>
-            <a:srgbClr val="F8FAFC"/>
-          </a:solidFill>
-          <a:ln w="12700">
-            <a:solidFill>
-              <a:srgbClr val="E2E8F0"/>
-            </a:solidFill>
-            <a:prstDash val="solid"/>
-          </a:ln>
-        </p:spPr>
-      </p:sp>
-      <p:pic>
-        <p:nvPicPr>
-          <p:cNvPr id="20" name="Image 5" descr="article icon from tabler-icons (MIT)">    </p:cNvPr>
-          <p:cNvPicPr>
-            <a:picLocks noChangeAspect="1"/>
-          </p:cNvPicPr>
-          <p:nvPr/>
-        </p:nvPicPr>
-        <p:blipFill>
-          <a:blip r:embed="rId11">
-            <a:extLst>
-              <a:ext uri="{96DAC541-7B7A-43D3-8B79-37D633B846F1}">
-                <asvg:svgBlip xmlns:asvg="http://schemas.microsoft.com/office/drawing/2016/SVG/main" r:embed="rId12"/>
-              </a:ext>
-            </a:extLst>
-          </a:blip>
-          <a:stretch>
-            <a:fillRect/>
-          </a:stretch>
-        </p:blipFill>
-        <p:spPr>
-          <a:xfrm>
-            <a:off x="6535674" y="2203704"/>
-            <a:ext cx="438912" cy="438912"/>
-          </a:xfrm>
-          <a:prstGeom prst="rect">
-            <a:avLst/>
-          </a:prstGeom>
-        </p:spPr>
-      </p:pic>
-      <p:sp>
-        <p:nvSpPr>
-          <p:cNvPr id="21" name="Text 13"/>
+          <p:cNvPr id="7" name="Text 5"/>
           <p:cNvSpPr txBox="1"/>
           <p:nvPr/>
         </p:nvSpPr>
         <p:spPr>
           <a:xfrm>
-            <a:off x="7175754" y="1865376"/>
-            <a:ext cx="3961638" cy="1115568"/>
+            <a:off x="6473952" y="1664208"/>
+            <a:ext cx="4791456" cy="4169664"/>
           </a:xfrm>
           <a:prstGeom prst="rect">
             <a:avLst/>
@@ -18734,7 +19784,7 @@
           <a:ln/>
         </p:spPr>
         <p:txBody>
-          <a:bodyPr wrap="square" lIns="0" tIns="25400" rIns="25400" bIns="0" rtlCol="0" anchor="ctr"/>
+          <a:bodyPr wrap="square" lIns="0" tIns="25400" rIns="25400" bIns="0" rtlCol="0" anchor="t"/>
           <a:lstStyle/>
           <a:p>
             <a:pPr algn="l" indent="0" marL="0">
@@ -18752,7 +19802,7 @@
                 <a:ea typeface="Pretendard" pitchFamily="34" charset="-122"/>
                 <a:cs typeface="Pretendard" pitchFamily="34" charset="-120"/>
               </a:rPr>
-              <a:t>Lists</a:t>
+              <a:t>- Lists</a:t>
             </a:r>
             <a:pPr algn="l" indent="0" marL="0">
               <a:lnSpc>
@@ -18770,238 +19820,6 @@
                 <a:cs typeface="Pretendard" pitchFamily="34" charset="-120"/>
               </a:rPr>
               <a:t>  ordered and unordered structure.</a:t>
-            </a:r>
-            <a:endParaRPr lang="en-US" sz="2200" dirty="0"/>
-          </a:p>
-        </p:txBody>
-      </p:sp>
-      <p:sp>
-        <p:nvSpPr>
-          <p:cNvPr id="22" name="Shape 14"/>
-          <p:cNvSpPr/>
-          <p:nvPr/>
-        </p:nvSpPr>
-        <p:spPr>
-          <a:xfrm>
-            <a:off x="976122" y="4416552"/>
-            <a:ext cx="585216" cy="585216"/>
-          </a:xfrm>
-          <a:prstGeom prst="roundRect">
-            <a:avLst>
-              <a:gd name="adj" fmla="val 6250"/>
-            </a:avLst>
-          </a:prstGeom>
-          <a:solidFill>
-            <a:srgbClr val="F8FAFC"/>
-          </a:solidFill>
-          <a:ln w="12700">
-            <a:solidFill>
-              <a:srgbClr val="E2E8F0"/>
-            </a:solidFill>
-            <a:prstDash val="solid"/>
-          </a:ln>
-        </p:spPr>
-      </p:sp>
-      <p:pic>
-        <p:nvPicPr>
-          <p:cNvPr id="23" name="Image 6" descr="article icon from tabler-icons (MIT)">    </p:cNvPr>
-          <p:cNvPicPr>
-            <a:picLocks noChangeAspect="1"/>
-          </p:cNvPicPr>
-          <p:nvPr/>
-        </p:nvPicPr>
-        <p:blipFill>
-          <a:blip r:embed="rId13">
-            <a:extLst>
-              <a:ext uri="{96DAC541-7B7A-43D3-8B79-37D633B846F1}">
-                <asvg:svgBlip xmlns:asvg="http://schemas.microsoft.com/office/drawing/2016/SVG/main" r:embed="rId14"/>
-              </a:ext>
-            </a:extLst>
-          </a:blip>
-          <a:stretch>
-            <a:fillRect/>
-          </a:stretch>
-        </p:blipFill>
-        <p:spPr>
-          <a:xfrm>
-            <a:off x="1049274" y="4489704"/>
-            <a:ext cx="438912" cy="438912"/>
-          </a:xfrm>
-          <a:prstGeom prst="rect">
-            <a:avLst/>
-          </a:prstGeom>
-        </p:spPr>
-      </p:pic>
-      <p:sp>
-        <p:nvSpPr>
-          <p:cNvPr id="24" name="Text 15"/>
-          <p:cNvSpPr txBox="1"/>
-          <p:nvPr/>
-        </p:nvSpPr>
-        <p:spPr>
-          <a:xfrm>
-            <a:off x="1689354" y="4151376"/>
-            <a:ext cx="3961638" cy="1115568"/>
-          </a:xfrm>
-          <a:prstGeom prst="rect">
-            <a:avLst/>
-          </a:prstGeom>
-          <a:noFill/>
-          <a:ln/>
-        </p:spPr>
-        <p:txBody>
-          <a:bodyPr wrap="square" lIns="0" tIns="25400" rIns="25400" bIns="0" rtlCol="0" anchor="ctr"/>
-          <a:lstStyle/>
-          <a:p>
-            <a:pPr algn="l" indent="0" marL="0">
-              <a:lnSpc>
-                <a:spcPct val="120000"/>
-              </a:lnSpc>
-              <a:buNone/>
-            </a:pPr>
-            <a:r>
-              <a:rPr lang="en-US" sz="2200" b="1" dirty="0">
-                <a:solidFill>
-                  <a:srgbClr val="2563EB"/>
-                </a:solidFill>
-                <a:latin typeface="Pretendard" pitchFamily="34" charset="0"/>
-                <a:ea typeface="Pretendard" pitchFamily="34" charset="-122"/>
-                <a:cs typeface="Pretendard" pitchFamily="34" charset="-120"/>
-              </a:rPr>
-              <a:t>Constraint:</a:t>
-            </a:r>
-            <a:pPr algn="l" indent="0" marL="0">
-              <a:lnSpc>
-                <a:spcPct val="120000"/>
-              </a:lnSpc>
-              <a:buNone/>
-            </a:pPr>
-            <a:r>
-              <a:rPr lang="en-US" sz="2200" dirty="0">
-                <a:solidFill>
-                  <a:srgbClr val="111827"/>
-                </a:solidFill>
-                <a:latin typeface="Pretendard" pitchFamily="34" charset="0"/>
-                <a:ea typeface="Pretendard" pitchFamily="34" charset="-122"/>
-                <a:cs typeface="Pretendard" pitchFamily="34" charset="-120"/>
-              </a:rPr>
-              <a:t>  Indented description lines stay under the bold label.</a:t>
-            </a:r>
-            <a:endParaRPr lang="en-US" sz="2200" dirty="0"/>
-          </a:p>
-        </p:txBody>
-      </p:sp>
-      <p:sp>
-        <p:nvSpPr>
-          <p:cNvPr id="25" name="Shape 16"/>
-          <p:cNvSpPr/>
-          <p:nvPr/>
-        </p:nvSpPr>
-        <p:spPr>
-          <a:xfrm>
-            <a:off x="6462522" y="4416552"/>
-            <a:ext cx="585216" cy="585216"/>
-          </a:xfrm>
-          <a:prstGeom prst="roundRect">
-            <a:avLst>
-              <a:gd name="adj" fmla="val 6250"/>
-            </a:avLst>
-          </a:prstGeom>
-          <a:solidFill>
-            <a:srgbClr val="F8FAFC"/>
-          </a:solidFill>
-          <a:ln w="12700">
-            <a:solidFill>
-              <a:srgbClr val="E2E8F0"/>
-            </a:solidFill>
-            <a:prstDash val="solid"/>
-          </a:ln>
-        </p:spPr>
-      </p:sp>
-      <p:pic>
-        <p:nvPicPr>
-          <p:cNvPr id="26" name="Image 7" descr="table icon from tabler-icons (MIT)">    </p:cNvPr>
-          <p:cNvPicPr>
-            <a:picLocks noChangeAspect="1"/>
-          </p:cNvPicPr>
-          <p:nvPr/>
-        </p:nvPicPr>
-        <p:blipFill>
-          <a:blip r:embed="rId15">
-            <a:extLst>
-              <a:ext uri="{96DAC541-7B7A-43D3-8B79-37D633B846F1}">
-                <asvg:svgBlip xmlns:asvg="http://schemas.microsoft.com/office/drawing/2016/SVG/main" r:embed="rId16"/>
-              </a:ext>
-            </a:extLst>
-          </a:blip>
-          <a:stretch>
-            <a:fillRect/>
-          </a:stretch>
-        </p:blipFill>
-        <p:spPr>
-          <a:xfrm>
-            <a:off x="6535674" y="4489704"/>
-            <a:ext cx="438912" cy="438912"/>
-          </a:xfrm>
-          <a:prstGeom prst="rect">
-            <a:avLst/>
-          </a:prstGeom>
-        </p:spPr>
-      </p:pic>
-      <p:sp>
-        <p:nvSpPr>
-          <p:cNvPr id="27" name="Text 17"/>
-          <p:cNvSpPr txBox="1"/>
-          <p:nvPr/>
-        </p:nvSpPr>
-        <p:spPr>
-          <a:xfrm>
-            <a:off x="7175754" y="4151376"/>
-            <a:ext cx="3961638" cy="1115568"/>
-          </a:xfrm>
-          <a:prstGeom prst="rect">
-            <a:avLst/>
-          </a:prstGeom>
-          <a:noFill/>
-          <a:ln/>
-        </p:spPr>
-        <p:txBody>
-          <a:bodyPr wrap="square" lIns="0" tIns="25400" rIns="25400" bIns="0" rtlCol="0" anchor="ctr"/>
-          <a:lstStyle/>
-          <a:p>
-            <a:pPr algn="l" indent="0" marL="0">
-              <a:lnSpc>
-                <a:spcPct val="120000"/>
-              </a:lnSpc>
-              <a:buNone/>
-            </a:pPr>
-            <a:r>
-              <a:rPr lang="en-US" sz="2200" b="1" dirty="0">
-                <a:solidFill>
-                  <a:srgbClr val="2563EB"/>
-                </a:solidFill>
-                <a:latin typeface="Pretendard" pitchFamily="34" charset="0"/>
-                <a:ea typeface="Pretendard" pitchFamily="34" charset="-122"/>
-                <a:cs typeface="Pretendard" pitchFamily="34" charset="-120"/>
-              </a:rPr>
-              <a:t>Emphasis</a:t>
-            </a:r>
-            <a:pPr algn="l" indent="0" marL="0">
-              <a:lnSpc>
-                <a:spcPct val="120000"/>
-              </a:lnSpc>
-              <a:buNone/>
-            </a:pPr>
-            <a:r>
-              <a:rPr lang="en-US" sz="2200" dirty="0">
-                <a:solidFill>
-                  <a:srgbClr val="111827"/>
-                </a:solidFill>
-                <a:latin typeface="Pretendard" pitchFamily="34" charset="0"/>
-                <a:ea typeface="Pretendard" pitchFamily="34" charset="-122"/>
-                <a:cs typeface="Pretendard" pitchFamily="34" charset="-120"/>
-              </a:rPr>
-              <a:t>  bold and italic remain editable.</a:t>
             </a:r>
             <a:endParaRPr lang="en-US" sz="2200" dirty="0"/>
           </a:p>
